--- a/Arquitectura de Sistemas Computacionales/Clases/Clase 4 - Microservicios y arquitecturas distribuidas/Presentacion.pptx
+++ b/Arquitectura de Sistemas Computacionales/Clases/Clase 4 - Microservicios y arquitecturas distribuidas/Presentacion.pptx
@@ -43,6 +43,10 @@
     <p:sldId id="291" r:id="rId42"/>
     <p:sldId id="292" r:id="rId43"/>
     <p:sldId id="293" r:id="rId44"/>
+    <p:sldId id="294" r:id="rId45"/>
+    <p:sldId id="295" r:id="rId46"/>
+    <p:sldId id="296" r:id="rId47"/>
+    <p:sldId id="297" r:id="rId48"/>
   </p:sldIdLst>
   <p:sldSz cx="12191695" cy="6858000" type="screen4x3"/>
   <p:notesSz cx="6858000" cy="9144000"/>
@@ -3601,7 +3605,7 @@
                 </a:solidFill>
                 <a:latin typeface="Calibri"/>
               </a:rPr>
-              <a:t>Monolito: lo que la palabra realmente significa (2/3)</a:t>
+              <a:t>Monolito: lo que la palabra realmente significa (1/4)</a:t>
             </a:r>
           </a:p>
         </p:txBody>
@@ -3640,7 +3644,7 @@
                 </a:solidFill>
                 <a:latin typeface="Calibri"/>
               </a:rPr>
-              <a:t>–   Aqui hay que repetir la advertencia de la clase pasada, porque es la fuente numero uno de confusion: contenedor en C4 no significa contenedor de Docker.</a:t>
+              <a:t>–   Un monolito es un sistema que se despliega como una sola unidad: todo su codigo se construye junto y sale al aire junto.</a:t>
             </a:r>
           </a:p>
           <a:p>
@@ -3656,7 +3660,7 @@
                 </a:solidFill>
                 <a:latin typeface="Calibri"/>
               </a:rPr>
-              <a:t>–   Una aplicacion web de una sola pagina que corre en el navegador, una API, una base de datos gestionada, una cola de mensajes y un proceso trabajador en segundo plano son cinco contenedores C4, aunque solo dos de ellos esten dockerizados.</a:t>
+              <a:t>–   No es un insulto ni un error, es la arquitectura correcta por defecto para la mayoria de los sistemas pequenos, y varios proyectos de este curso deberian ser monolitos bien organizados.</a:t>
             </a:r>
           </a:p>
           <a:p>
@@ -3672,7 +3676,7 @@
                 </a:solidFill>
                 <a:latin typeface="Calibri"/>
               </a:rPr>
-              <a:t>–   Confundirlo lleva al estudiante a creer que debe empaquetar cada caja con Docker para que el diagrama sea valido, lo cual no es cierto y desvia el trabajo de la semana hacia una tarea que nadie pidio.</a:t>
+              <a:t>–   Un microservicio, en cambio, es una unidad de despliegue independiente con una frontera de responsabilidad de negocio propia.</a:t>
             </a:r>
           </a:p>
           <a:p>
@@ -3688,7 +3692,7 @@
                 </a:solidFill>
                 <a:latin typeface="Calibri"/>
               </a:rPr>
-              <a:t>–   Con eso claro, lo primero que el estudiante entrega hoy es la decision, y tiene una forma exigida que conviene dictar literal porque se corrige asi.</a:t>
+              <a:t>–   Tres senales de una frontera real: el servicio es dueno de sus propios datos, puede liberarse a su propio ritmo y corresponde a una capacidad de negocio que se puede nombrar sin usar palabras tecnicas.</a:t>
             </a:r>
           </a:p>
           <a:p>
@@ -3704,23 +3708,7 @@
                 </a:solidFill>
                 <a:latin typeface="Calibri"/>
               </a:rPr>
-              <a:t>–   Es UNA frase y elige UNA de las dos opciones: monolito modular o microservicios.</a:t>
-            </a:r>
-          </a:p>
-          <a:p>
-            <a:pPr>
-              <a:spcAft>
-                <a:spcPts val="800"/>
-              </a:spcAft>
-            </a:pPr>
-            <a:r>
-              <a:rPr sz="2000" b="0" i="0">
-                <a:solidFill>
-                  <a:srgbClr val="333333"/>
-                </a:solidFill>
-                <a:latin typeface="Calibri"/>
-              </a:rPr>
-              <a:t>–   «Un poco de los dos» vale cero, y hay que decir por que: no es una posicion intermedia sensata, es la frase de quien no decidio, y un sistema no se puede desplegar de las dos formas a la vez.</a:t>
+              <a:t>–   En cuanto a la notacion, el nivel de contenedores del modelo C4 pide dibujar, dentro del sistema, cada cosa que se ejecuta o almacena de forma independiente</a:t>
             </a:r>
           </a:p>
         </p:txBody>
@@ -3901,7 +3889,7 @@
                 </a:solidFill>
                 <a:latin typeface="Calibri"/>
               </a:rPr>
-              <a:t>Monolito: lo que la palabra realmente significa (3/3)</a:t>
+              <a:t>Monolito: lo que la palabra realmente significa (2/4)</a:t>
             </a:r>
           </a:p>
         </p:txBody>
@@ -3940,7 +3928,7 @@
                 </a:solidFill>
                 <a:latin typeface="Calibri"/>
               </a:rPr>
-              <a:t>–   La decision se sostiene con exactamente dos criterios.</a:t>
+              <a:t>–   Con tres datos obligatorios por caja (nombre, tecnologia y responsabilidad en una frase) y cada flecha etiquetada con protocolo y formato, nunca una linea muda.</a:t>
             </a:r>
           </a:p>
           <a:p>
@@ -3956,7 +3944,7 @@
                 </a:solidFill>
                 <a:latin typeface="Calibri"/>
               </a:rPr>
-              <a:t>–   El primero es el tamano del equipo, y se exige CON numero y CON plazo: «somos dos personas y tenemos doce semanas» es un criterio</a:t>
+              <a:t>–   Aqui hay que repetir la advertencia de la clase pasada, porque es la fuente numero uno de confusion: contenedor en C4 no significa contenedor de Docker.</a:t>
             </a:r>
           </a:p>
           <a:p>
@@ -3972,7 +3960,7 @@
                 </a:solidFill>
                 <a:latin typeface="Calibri"/>
               </a:rPr>
-              <a:t>–   «el equipo es pequeno» no lo es, porque no permite verificar nada.</a:t>
+              <a:t>–   Una aplicacion web de una sola pagina que corre en el navegador, una API, una base de datos gestionada, una cola de mensajes y un proceso trabajador en segundo plano son cinco contenedores C4, aunque solo dos de ellos esten dockerizados.</a:t>
             </a:r>
           </a:p>
           <a:p>
@@ -3988,55 +3976,7 @@
                 </a:solidFill>
                 <a:latin typeface="Calibri"/>
               </a:rPr>
-              <a:t>–   La razon de fondo es la que se repite en el cierre: la cantidad de servicios que una organizacion sostiene es funcion del numero de equipos autonomos, no del gusto por la modularidad.</a:t>
-            </a:r>
-          </a:p>
-          <a:p>
-            <a:pPr>
-              <a:spcAft>
-                <a:spcPts val="800"/>
-              </a:spcAft>
-            </a:pPr>
-            <a:r>
-              <a:rPr sz="2000" b="0" i="0">
-                <a:solidFill>
-                  <a:srgbClr val="333333"/>
-                </a:solidFill>
-                <a:latin typeface="Calibri"/>
-              </a:rPr>
-              <a:t>–   El segundo criterio es el acoplamiento, y se responde diciendo QUE partes cambian juntas: si al tocar el calendario de disponibilidad hay que tocar tambien el registro de clientes, esas dos cosas no son dos servicios.</a:t>
-            </a:r>
-          </a:p>
-          <a:p>
-            <a:pPr>
-              <a:spcAft>
-                <a:spcPts val="800"/>
-              </a:spcAft>
-            </a:pPr>
-            <a:r>
-              <a:rPr sz="2000" b="0" i="0">
-                <a:solidFill>
-                  <a:srgbClr val="333333"/>
-                </a:solidFill>
-                <a:latin typeface="Calibri"/>
-              </a:rPr>
-              <a:t>–   Y la frase se cierra con las dos mitades del trade-off: lo que se gana y lo que se pierde.</a:t>
-            </a:r>
-          </a:p>
-          <a:p>
-            <a:pPr>
-              <a:spcAft>
-                <a:spcPts val="800"/>
-              </a:spcAft>
-            </a:pPr>
-            <a:r>
-              <a:rPr sz="2000" b="0" i="0">
-                <a:solidFill>
-                  <a:srgbClr val="333333"/>
-                </a:solidFill>
-                <a:latin typeface="Calibri"/>
-              </a:rPr>
-              <a:t>–   Sin la segunda mitad no hubo decision, hubo una justificacion escrita despues de los hechos —el mismo defecto que la Clase 2 senalaba en los ADR sin consecuencias negativas—, y esa simetria entre las dos clases vale la pena nombrarla en voz alta.</a:t>
+              <a:t>–   Confundirlo lleva al estudiante a creer que debe empaquetar cada caja con Docker para que el diagrama sea valido, lo cual no es cierto y desvia el trabajo de la semana hacia una tarea que nadie pidio.</a:t>
             </a:r>
           </a:p>
         </p:txBody>
@@ -4217,7 +4157,7 @@
                 </a:solidFill>
                 <a:latin typeface="Calibri"/>
               </a:rPr>
-              <a:t>Las tres reglas del nivel Container y la trazabilidad con el Context (1/2)</a:t>
+              <a:t>Monolito: lo que la palabra realmente significa (3/4)</a:t>
             </a:r>
           </a:p>
         </p:txBody>
@@ -4256,7 +4196,7 @@
                 </a:solidFill>
                 <a:latin typeface="Calibri"/>
               </a:rPr>
-              <a:t>–   Antes del ejemplo conviene fijar las tres reglas con las que se corrige el diagrama, porque cada una tiene puntos asignados y las tres se pierden por descuido y no por no saber.</a:t>
+              <a:t>–   Con eso claro, lo primero que el estudiante entrega hoy es la decision, y tiene una forma exigida que conviene dictar literal porque se corrige asi.</a:t>
             </a:r>
           </a:p>
           <a:p>
@@ -4272,7 +4212,7 @@
                 </a:solidFill>
                 <a:latin typeface="Calibri"/>
               </a:rPr>
-              <a:t>–   La primera: cada caja lleva TRES datos, no uno.</a:t>
+              <a:t>–   Es UNA frase y elige UNA de las dos opciones: monolito modular o microservicios.</a:t>
             </a:r>
           </a:p>
           <a:p>
@@ -4288,7 +4228,7 @@
                 </a:solidFill>
                 <a:latin typeface="Calibri"/>
               </a:rPr>
-              <a:t>–   Nombre, tecnologia y responsabilidad en una frase.</a:t>
+              <a:t>–   «Un poco de los dos» vale cero, y hay que decir por que: no es una posicion intermedia sensata, es la frase de quien no decidio, y un sistema no se puede desplegar de las dos formas a la vez.</a:t>
             </a:r>
           </a:p>
           <a:p>
@@ -4304,7 +4244,7 @@
                 </a:solidFill>
                 <a:latin typeface="Calibri"/>
               </a:rPr>
-              <a:t>–   Una caja que dice solo «API» no es un contenedor descrito, es una etiqueta; con «API de turnos · Node.js · valida la franja y registra el turno» ya se puede discutir si esa frontera tiene sentido.</a:t>
+              <a:t>–   El primero es el tamano del equipo, y se exige CON numero y CON plazo: «somos dos personas y tenemos doce semanas» es un criterio</a:t>
             </a:r>
           </a:p>
           <a:p>
@@ -4320,7 +4260,7 @@
                 </a:solidFill>
                 <a:latin typeface="Calibri"/>
               </a:rPr>
-              <a:t>–   La segunda: lo que guarda datos no es una caja mas.</a:t>
+              <a:t>–   «el equipo es pequeno» no lo es, porque no permite verificar nada.</a:t>
             </a:r>
           </a:p>
           <a:p>
@@ -4336,39 +4276,7 @@
                 </a:solidFill>
                 <a:latin typeface="Calibri"/>
               </a:rPr>
-              <a:t>–   En la notacion se marca como almacen —en el codigo, ContainerDb en lugar de Container— y esa distincion no es cosmetica: un almacen no se replica igual que un servicio, no se despliega igual y no falla igual, y todo eso se retoma en las Clases 7 y 13.</a:t>
-            </a:r>
-          </a:p>
-          <a:p>
-            <a:pPr>
-              <a:spcAft>
-                <a:spcPts val="800"/>
-              </a:spcAft>
-            </a:pPr>
-            <a:r>
-              <a:rPr sz="2000" b="0" i="0">
-                <a:solidFill>
-                  <a:srgbClr val="333333"/>
-                </a:solidFill>
-                <a:latin typeface="Calibri"/>
-              </a:rPr>
-              <a:t>–   La tercera: ninguna flecha queda muda, y media etiqueta tampoco alcanza.</a:t>
-            </a:r>
-          </a:p>
-          <a:p>
-            <a:pPr>
-              <a:spcAft>
-                <a:spcPts val="800"/>
-              </a:spcAft>
-            </a:pPr>
-            <a:r>
-              <a:rPr sz="2000" b="0" i="0">
-                <a:solidFill>
-                  <a:srgbClr val="333333"/>
-                </a:solidFill>
-                <a:latin typeface="Calibri"/>
-              </a:rPr>
-              <a:t>–   Cada flecha lleva protocolo Y formato: HTTPS/JSON, TCP/SQL.</a:t>
+              <a:t>–   El segundo criterio es el acoplamiento, y se responde diciendo QUE partes cambian juntas: si al tocar el calendario de disponibilidad hay que tocar tambien el registro de clientes, esas dos cosas no son dos servicios.</a:t>
             </a:r>
           </a:p>
         </p:txBody>
@@ -4549,7 +4457,7 @@
                 </a:solidFill>
                 <a:latin typeface="Calibri"/>
               </a:rPr>
-              <a:t>Las tres reglas del nivel Container y la trazabilidad con el Context (2/2)</a:t>
+              <a:t>Monolito: lo que la palabra realmente significa (4/4)</a:t>
             </a:r>
           </a:p>
         </p:txBody>
@@ -4588,7 +4496,7 @@
                 </a:solidFill>
                 <a:latin typeface="Calibri"/>
               </a:rPr>
-              <a:t>–   «HTTP» a secas no dice como viajan los datos y «SQL» a secas no dice sobre que transporte; con las dos mitades, cualquiera que lea el diagrama sabe por donde puede romperse.</a:t>
+              <a:t>–   Y la frase se cierra con las dos mitades del trade-off: lo que se gana y lo que se pierde.</a:t>
             </a:r>
           </a:p>
           <a:p>
@@ -4604,87 +4512,7 @@
                 </a:solidFill>
                 <a:latin typeface="Calibri"/>
               </a:rPr>
-              <a:t>–   Y hay una cuarta condicion que no es del nivel sino de la continuidad del proyecto: los nombres tienen que ser IDENTICOS a los del C4 Context de la Clase 1.</a:t>
-            </a:r>
-          </a:p>
-          <a:p>
-            <a:pPr>
-              <a:spcAft>
-                <a:spcPts val="800"/>
-              </a:spcAft>
-            </a:pPr>
-            <a:r>
-              <a:rPr sz="2000" b="0" i="0">
-                <a:solidFill>
-                  <a:srgbClr val="333333"/>
-                </a:solidFill>
-                <a:latin typeface="Calibri"/>
-              </a:rPr>
-              <a:t>–   Si alli decia «Pasarela de pagos», aqui no puede decir «Pagos».</a:t>
-            </a:r>
-          </a:p>
-          <a:p>
-            <a:pPr>
-              <a:spcAft>
-                <a:spcPts val="800"/>
-              </a:spcAft>
-            </a:pPr>
-            <a:r>
-              <a:rPr sz="2000" b="0" i="0">
-                <a:solidFill>
-                  <a:srgbClr val="333333"/>
-                </a:solidFill>
-                <a:latin typeface="Calibri"/>
-              </a:rPr>
-              <a:t>–   No es pedanteria de notacion; es lo unico que permite afirmar que los dos dibujos son el mismo sistema visto desde distinta altura</a:t>
-            </a:r>
-          </a:p>
-          <a:p>
-            <a:pPr>
-              <a:spcAft>
-                <a:spcPts val="800"/>
-              </a:spcAft>
-            </a:pPr>
-            <a:r>
-              <a:rPr sz="2000" b="0" i="0">
-                <a:solidFill>
-                  <a:srgbClr val="333333"/>
-                </a:solidFill>
-                <a:latin typeface="Calibri"/>
-              </a:rPr>
-              <a:t>–   Y es exactamente lo que se volvera a verificar en la Clase 7 contra el diagrama de despliegue y en la Clase 11 en la auditoria del paquete.</a:t>
-            </a:r>
-          </a:p>
-          <a:p>
-            <a:pPr>
-              <a:spcAft>
-                <a:spcPts val="800"/>
-              </a:spcAft>
-            </a:pPr>
-            <a:r>
-              <a:rPr sz="2000" b="0" i="0">
-                <a:solidFill>
-                  <a:srgbClr val="333333"/>
-                </a:solidFill>
-                <a:latin typeface="Calibri"/>
-              </a:rPr>
-              <a:t>–   Los actores y los sistemas externos del Context siguen existiendo hoy y siguen estando FUERA del recuadro del sistema: abrir la caja no elimina lo que la rodeaba.</a:t>
-            </a:r>
-          </a:p>
-          <a:p>
-            <a:pPr>
-              <a:spcAft>
-                <a:spcPts val="800"/>
-              </a:spcAft>
-            </a:pPr>
-            <a:r>
-              <a:rPr sz="2000" b="0" i="0">
-                <a:solidFill>
-                  <a:srgbClr val="333333"/>
-                </a:solidFill>
-                <a:latin typeface="Calibri"/>
-              </a:rPr>
-              <a:t>–   Ese es el error de dibujo mas comun de la clase, meter al usuario o a la pasarela de pagos dentro del sistema propio, y se detecta en dos segundos preguntando quien lo opera.</a:t>
+              <a:t>–   Sin la segunda mitad no hubo decision, hubo una justificacion escrita despues de los hechos —el mismo defecto que la Clase 2 senalaba en los ADR sin consecuencias negativas—, y esa simetria entre las dos clases vale la pena nombrarla en voz alta.</a:t>
             </a:r>
           </a:p>
         </p:txBody>
@@ -4865,7 +4693,7 @@
                 </a:solidFill>
                 <a:latin typeface="Calibri"/>
               </a:rPr>
-              <a:t>C4Container en Mermaid: la sintaxis que la plataforma renderiza (1/2)</a:t>
+              <a:t>Las tres reglas del nivel Container y la trazabilidad con el Context (1/2)</a:t>
             </a:r>
           </a:p>
         </p:txBody>
@@ -4904,7 +4732,7 @@
                 </a:solidFill>
                 <a:latin typeface="Calibri"/>
               </a:rPr>
-              <a:t>–   El diagrama no se entrega como imagen: se entrega como codigo, y la plataforma lo renderiza.</a:t>
+              <a:t>–   La primera: cada caja lleva TRES datos, no uno.</a:t>
             </a:r>
           </a:p>
           <a:p>
@@ -4920,7 +4748,7 @@
                 </a:solidFill>
                 <a:latin typeface="Calibri"/>
               </a:rPr>
-              <a:t>–   Son cinco reglas de escritura y conviene recorrerlas sobre la diapositiva, linea por linea.</a:t>
+              <a:t>–   Una caja que dice solo «API» no es un contenedor descrito, es una etiqueta; con «API de turnos · Node.js · valida la franja y registra el turno» ya se puede discutir si esa frontera tiene sentido.</a:t>
             </a:r>
           </a:p>
           <a:p>
@@ -4936,7 +4764,7 @@
                 </a:solidFill>
                 <a:latin typeface="Calibri"/>
               </a:rPr>
-              <a:t>–   La primera linea es exactamente C4Container, sin nada antes</a:t>
+              <a:t>–   La segunda: lo que guarda datos no es una caja mas.</a:t>
             </a:r>
           </a:p>
           <a:p>
@@ -4952,7 +4780,7 @@
                 </a:solidFill>
                 <a:latin typeface="Calibri"/>
               </a:rPr>
-              <a:t>–   C4Context es el nivel de la Clase 1 y graph TD es otro tipo de diagrama, y cualquiera de los dos deja la respuesta en el nivel equivocado.</a:t>
+              <a:t>–   En la notacion se marca como almacen —en el codigo, ContainerDb en lugar de Container— y esa distincion no es cosmetica: un almacen no se replica igual que un servicio, no se despliega igual y no falla igual, y todo eso se retoma en las Clases 7 y 13.</a:t>
             </a:r>
           </a:p>
           <a:p>
@@ -4968,7 +4796,7 @@
                 </a:solidFill>
                 <a:latin typeface="Calibri"/>
               </a:rPr>
-              <a:t>–   Los actores se declaran con Person y los sistemas ajenos con System_Ext, los dos por fuera del bloque del sistema.</a:t>
+              <a:t>–   La tercera: ninguna flecha queda muda, y media etiqueta tampoco alcanza.</a:t>
             </a:r>
           </a:p>
           <a:p>
@@ -4984,23 +4812,7 @@
                 </a:solidFill>
                 <a:latin typeface="Calibri"/>
               </a:rPr>
-              <a:t>–   El sistema propio se abre con System_Boundary y una llave, y dentro van las cajas: Container para lo que ejecuta y ContainerDb para lo que almacena, cada una con identificador, nombre, tecnologia y responsabilidad.</a:t>
-            </a:r>
-          </a:p>
-          <a:p>
-            <a:pPr>
-              <a:spcAft>
-                <a:spcPts val="800"/>
-              </a:spcAft>
-            </a:pPr>
-            <a:r>
-              <a:rPr sz="2000" b="0" i="0">
-                <a:solidFill>
-                  <a:srgbClr val="333333"/>
-                </a:solidFill>
-                <a:latin typeface="Calibri"/>
-              </a:rPr>
-              <a:t>–   La llave se cierra, y las relaciones van despues, con Rel y cuatro datos: origen, destino, que hace y con que protocolo y formato.</a:t>
+              <a:t>–   Cada flecha lleva protocolo Y formato: HTTPS/JSON, TCP/SQL.</a:t>
             </a:r>
           </a:p>
         </p:txBody>
@@ -5181,7 +4993,7 @@
                 </a:solidFill>
                 <a:latin typeface="Calibri"/>
               </a:rPr>
-              <a:t>C4Container en Mermaid: la sintaxis que la plataforma renderiza (2/2)</a:t>
+              <a:t>Las tres reglas del nivel Container y la trazabilidad con el Context (2/2)</a:t>
             </a:r>
           </a:p>
         </p:txBody>
@@ -5220,7 +5032,7 @@
                 </a:solidFill>
                 <a:latin typeface="Calibri"/>
               </a:rPr>
-              <a:t>–   El identificador corto de cada caja —en el molde proyectado son spa, api, db y worker— es el que usan las relaciones; si no coincide, no dibuja la flecha y tampoco avisa con claridad.</a:t>
+              <a:t>–   Y hay una cuarta condicion que no es del nivel sino de la continuidad del proyecto: los nombres tienen que ser IDENTICOS a los del C4 Context de la Clase 1.</a:t>
             </a:r>
           </a:p>
           <a:p>
@@ -5236,7 +5048,7 @@
                 </a:solidFill>
                 <a:latin typeface="Calibri"/>
               </a:rPr>
-              <a:t>–   Lo que NO delega el estudiante es la revision, y hay tres cosas que tiene que verificar el mismo antes de enviar</a:t>
+              <a:t>–   Si alli decia «Pasarela de pagos», aqui no puede decir «Pagos».</a:t>
             </a:r>
           </a:p>
           <a:p>
@@ -5252,7 +5064,7 @@
                 </a:solidFill>
                 <a:latin typeface="Calibri"/>
               </a:rPr>
-              <a:t>–   Porque son las que la IA equivoca con frecuencia: que la primera linea sea C4Container, que la base de datos haya quedado como ContainerDb y no como Container, y que ninguna relacion haya perdido la mitad de su etiqueta.</a:t>
+              <a:t>–   No es pedanteria de notacion; es lo unico que permite afirmar que los dos dibujos son el mismo sistema visto desde distinta altura</a:t>
             </a:r>
           </a:p>
           <a:p>
@@ -5268,7 +5080,7 @@
                 </a:solidFill>
                 <a:latin typeface="Calibri"/>
               </a:rPr>
-              <a:t>–   La regla operativa del dia se dice como consecuencia y no como consejo: se pega el codigo, se mira renderizado, y solo entonces se envia.</a:t>
+              <a:t>–   Y es exactamente lo que se volvera a verificar en la Clase 7 contra el diagrama de despliegue y en la Clase 11 en la auditoria del paquete.</a:t>
             </a:r>
           </a:p>
           <a:p>
@@ -5284,7 +5096,23 @@
                 </a:solidFill>
                 <a:latin typeface="Calibri"/>
               </a:rPr>
-              <a:t>–   Un codigo que no renderiza vale cero, y es el unico punto del taller donde el estudiante puede comprobar su propia nota antes de entregar.</a:t>
+              <a:t>–   Los actores y los sistemas externos del Context siguen existiendo hoy y siguen estando FUERA del recuadro del sistema: abrir la caja no elimina lo que la rodeaba.</a:t>
+            </a:r>
+          </a:p>
+          <a:p>
+            <a:pPr>
+              <a:spcAft>
+                <a:spcPts val="800"/>
+              </a:spcAft>
+            </a:pPr>
+            <a:r>
+              <a:rPr sz="2000" b="0" i="0">
+                <a:solidFill>
+                  <a:srgbClr val="333333"/>
+                </a:solidFill>
+                <a:latin typeface="Calibri"/>
+              </a:rPr>
+              <a:t>–   Ese es el error de dibujo mas comun de la clase, meter al usuario o a la pasarela de pagos dentro del sistema propio, y se detecta en dos segundos preguntando quien lo opera.</a:t>
             </a:r>
           </a:p>
         </p:txBody>
@@ -5465,7 +5293,7 @@
                 </a:solidFill>
                 <a:latin typeface="Calibri"/>
               </a:rPr>
-              <a:t>Primer ejemplo: los tres contenedores de CloudLite Turnos (1/2)</a:t>
+              <a:t>C4Container en Mermaid: la sintaxis que la plataforma renderiza (1/2)</a:t>
             </a:r>
           </a:p>
         </p:txBody>
@@ -5504,7 +5332,7 @@
                 </a:solidFill>
                 <a:latin typeface="Calibri"/>
               </a:rPr>
-              <a:t>–   Primer ejemplo concreto, y conviene construirlo en el tablero en vivo.</a:t>
+              <a:t>–   El diagrama no se entrega como imagen: se entrega como codigo, y la plataforma lo renderiza.</a:t>
             </a:r>
           </a:p>
           <a:p>
@@ -5520,7 +5348,7 @@
                 </a:solidFill>
                 <a:latin typeface="Calibri"/>
               </a:rPr>
-              <a:t>–   CloudLite Turnos, el sistema de agendamiento de la barberia, empieza con tres contenedores: una aplicacion web que corre en el navegador del cliente, una API que atiende peticiones HTTP con cuerpo en formato JSON</a:t>
+              <a:t>–   Son cinco reglas de escritura y conviene recorrerlas sobre la diapositiva, linea por linea.</a:t>
             </a:r>
           </a:p>
           <a:p>
@@ -5536,7 +5364,7 @@
                 </a:solidFill>
                 <a:latin typeface="Calibri"/>
               </a:rPr>
-              <a:t>–   Y una base de datos relacional donde viven turnos, clientes y horarios.</a:t>
+              <a:t>–   La primera linea es exactamente C4Container, sin nada antes</a:t>
             </a:r>
           </a:p>
           <a:p>
@@ -5552,7 +5380,7 @@
                 </a:solidFill>
                 <a:latin typeface="Calibri"/>
               </a:rPr>
-              <a:t>–   La flecha entre la web y la API dice «HTTPS/JSON, consulta disponibilidad y crea reservas»; la flecha entre la API y la base de datos dice «TCP, lee y escribe turnos».</a:t>
+              <a:t>–   C4Context es el nivel de la Clase 1 y graph TD es otro tipo de diagrama, y cualquiera de los dos deja la respuesta en el nivel equivocado.</a:t>
             </a:r>
           </a:p>
           <a:p>
@@ -5568,7 +5396,7 @@
                 </a:solidFill>
                 <a:latin typeface="Calibri"/>
               </a:rPr>
-              <a:t>–   Con eso ya existe un diagrama valido y defendible.</a:t>
+              <a:t>–   Los actores se declaran con Person y los sistemas ajenos con System_Ext, los dos por fuera del bloque del sistema.</a:t>
             </a:r>
           </a:p>
           <a:p>
@@ -5584,7 +5412,7 @@
                 </a:solidFill>
                 <a:latin typeface="Calibri"/>
               </a:rPr>
-              <a:t>–   Ahora viene la parte interesante: la cuarta caja aparece solo si hay una razon.</a:t>
+              <a:t>–   El sistema propio se abre con System_Boundary y una llave, y dentro van las cajas: Container para lo que ejecuta y ContainerDb para lo que almacena, cada una con identificador, nombre, tecnologia y responsabilidad.</a:t>
             </a:r>
           </a:p>
         </p:txBody>
@@ -5765,7 +5593,7 @@
                 </a:solidFill>
                 <a:latin typeface="Calibri"/>
               </a:rPr>
-              <a:t>Primer ejemplo: los tres contenedores de CloudLite Turnos (2/2)</a:t>
+              <a:t>C4Container en Mermaid: la sintaxis que la plataforma renderiza (2/2)</a:t>
             </a:r>
           </a:p>
         </p:txBody>
@@ -5804,7 +5632,7 @@
                 </a:solidFill>
                 <a:latin typeface="Calibri"/>
               </a:rPr>
-              <a:t>–   El envio del correo de confirmacion tarda, con proveedores reales de correo, entre 300 y 2000 milisegundos, y puede fallar por causas ajenas al sistema.</a:t>
+              <a:t>–   La llave se cierra, y las relaciones van despues, con Rel y cuatro datos: origen, destino, que hace y con que protocolo y formato.</a:t>
             </a:r>
           </a:p>
           <a:p>
@@ -5820,7 +5648,7 @@
                 </a:solidFill>
                 <a:latin typeface="Calibri"/>
               </a:rPr>
-              <a:t>–   Si la API espera ese envio antes de responder, la reserva de un turno hereda esa latencia y ese riesgo.</a:t>
+              <a:t>–   El identificador corto de cada caja —en el molde proyectado son spa, api, db y worker— es el que usan las relaciones; si no coincide, no dibuja la flecha y tampoco avisa con claridad.</a:t>
             </a:r>
           </a:p>
           <a:p>
@@ -5836,7 +5664,7 @@
                 </a:solidFill>
                 <a:latin typeface="Calibri"/>
               </a:rPr>
-              <a:t>–   Esa es una razon legitima para separar: se agrega una cola de mensajes y un trabajador de notificaciones, la API escribe el turno, publica un mensaje y responde en decenas de milisegundos, y el trabajador envia el correo despues, con reintentos si falla.</a:t>
+              <a:t>–   La regla operativa del dia se dice como consecuencia y no como consejo: se pega el codigo, se mira renderizado, y solo entonces se envia.</a:t>
             </a:r>
           </a:p>
           <a:p>
@@ -5852,7 +5680,7 @@
                 </a:solidFill>
                 <a:latin typeface="Calibri"/>
               </a:rPr>
-              <a:t>–   Cuatro contenedores con una justificacion medible es mejor arquitectura que ocho por moda.</a:t>
+              <a:t>–   Un codigo que no renderiza vale cero, y es el unico punto del taller donde el estudiante puede comprobar su propia nota antes de entregar.</a:t>
             </a:r>
           </a:p>
         </p:txBody>
@@ -6033,7 +5861,7 @@
                 </a:solidFill>
                 <a:latin typeface="Calibri"/>
               </a:rPr>
-              <a:t>Los contratos: cuatro datos por fila y un 409 obligatorio (1/2)</a:t>
+              <a:t>Primer ejemplo: los tres contenedores de CloudLite Turnos</a:t>
             </a:r>
           </a:p>
         </p:txBody>
@@ -6072,7 +5900,7 @@
                 </a:solidFill>
                 <a:latin typeface="Calibri"/>
               </a:rPr>
-              <a:t>–   Si cada flecha del diagrama lleva protocolo y formato, el paso siguiente es decir QUE se negocia por esa flecha, y eso es un contrato.</a:t>
+              <a:t>–   CloudLite Turnos, el sistema de agendamiento de la barberia, empieza con tres contenedores: una aplicacion web que corre en el navegador del cliente, una API que atiende peticiones HTTP con cuerpo en formato JSON</a:t>
             </a:r>
           </a:p>
           <a:p>
@@ -6088,7 +5916,7 @@
                 </a:solidFill>
                 <a:latin typeface="Calibri"/>
               </a:rPr>
-              <a:t>–   Un contrato entre dos piezas de un sistema tiene cuatro datos y los cuatro se piden por separado: como se llama la interaccion en terminos de negocio</a:t>
+              <a:t>–   Y una base de datos relacional donde viven turnos, clientes y horarios.</a:t>
             </a:r>
           </a:p>
           <a:p>
@@ -6104,7 +5932,7 @@
                 </a:solidFill>
                 <a:latin typeface="Calibri"/>
               </a:rPr>
-              <a:t>–   Quien llama a quien, con que verbo y ruta —o con que nombre de evento, si es asincrono—, y cual es el error de negocio que puede devolver.</a:t>
+              <a:t>–   Ahora viene la parte interesante: la cuarta caja aparece solo si hay una razon.</a:t>
             </a:r>
           </a:p>
           <a:p>
@@ -6120,7 +5948,7 @@
                 </a:solidFill>
                 <a:latin typeface="Calibri"/>
               </a:rPr>
-              <a:t>–   El cuarto es el que se olvida y el que hace util al contrato.</a:t>
+              <a:t>–   El envio del correo de confirmacion tarda, con proveedores reales de correo, entre 300 y 2000 milisegundos, y puede fallar por causas ajenas al sistema.</a:t>
             </a:r>
           </a:p>
           <a:p>
@@ -6136,55 +5964,7 @@
                 </a:solidFill>
                 <a:latin typeface="Calibri"/>
               </a:rPr>
-              <a:t>–   Un error de negocio es una respuesta prevista, que forma parte del diseno: la franja ya esta tomada, el cupo se agoto, el usuario no tiene permiso.</a:t>
-            </a:r>
-          </a:p>
-          <a:p>
-            <a:pPr>
-              <a:spcAft>
-                <a:spcPts val="800"/>
-              </a:spcAft>
-            </a:pPr>
-            <a:r>
-              <a:rPr sz="2000" b="0" i="0">
-                <a:solidFill>
-                  <a:srgbClr val="333333"/>
-                </a:solidFill>
-                <a:latin typeface="Calibri"/>
-              </a:rPr>
-              <a:t>–   Un 500 no es un error de negocio, es una falla del sistema; nadie lo disena, y por eso poner 500 en esa columna es la senal de que el estudiante no distinguio las dos cosas.</a:t>
-            </a:r>
-          </a:p>
-          <a:p>
-            <a:pPr>
-              <a:spcAft>
-                <a:spcPts val="800"/>
-              </a:spcAft>
-            </a:pPr>
-            <a:r>
-              <a:rPr sz="2000" b="0" i="0">
-                <a:solidFill>
-                  <a:srgbClr val="333333"/>
-                </a:solidFill>
-                <a:latin typeface="Calibri"/>
-              </a:rPr>
-              <a:t>–   La diapositiva proyecta los tres contratos resueltos sobre CloudLite Turnos y conviene recorrerlos leyendo la cuarta columna en voz alta, porque es lo que hay que replicar.</a:t>
-            </a:r>
-          </a:p>
-          <a:p>
-            <a:pPr>
-              <a:spcAft>
-                <a:spcPts val="800"/>
-              </a:spcAft>
-            </a:pPr>
-            <a:r>
-              <a:rPr sz="2000" b="0" i="0">
-                <a:solidFill>
-                  <a:srgbClr val="333333"/>
-                </a:solidFill>
-                <a:latin typeface="Calibri"/>
-              </a:rPr>
-              <a:t>–   Dos exigencias mas, que valen puntos y se pierden sin darse cuenta.</a:t>
+              <a:t>–   Cuatro contenedores con una justificacion medible es mejor arquitectura que ocho por moda.</a:t>
             </a:r>
           </a:p>
         </p:txBody>
@@ -6365,7 +6145,7 @@
                 </a:solidFill>
                 <a:latin typeface="Calibri"/>
               </a:rPr>
-              <a:t>Los contratos: cuatro datos por fila y un 409 obligatorio (2/2)</a:t>
+              <a:t>Los contratos: cuatro datos por fila y un 409 obligatorio (1/3)</a:t>
             </a:r>
           </a:p>
         </p:txBody>
@@ -6404,7 +6184,7 @@
                 </a:solidFill>
                 <a:latin typeface="Calibri"/>
               </a:rPr>
-              <a:t>–   La primera: al menos uno de los tres contratos tiene que ser un 409 de conflicto, y la razon es de dominio y no de capricho.</a:t>
+              <a:t>–   Si cada flecha del diagrama lleva protocolo y formato, el paso siguiente es decir QUE se negocia por esa flecha, y eso es un contrato.</a:t>
             </a:r>
           </a:p>
           <a:p>
@@ -6420,7 +6200,7 @@
                 </a:solidFill>
                 <a:latin typeface="Calibri"/>
               </a:rPr>
-              <a:t>–   El 409 es la respuesta que dice «tu peticion es valida, pero el estado actual del sistema no la admite», y en cualquier dominio de reservas ese caso existe siempre: dos clientes quieren la misma franja.</a:t>
+              <a:t>–   Un contrato entre dos piezas de un sistema tiene cuatro datos y los cuatro se piden por separado: como se llama la interaccion en terminos de negocio</a:t>
             </a:r>
           </a:p>
           <a:p>
@@ -6436,7 +6216,7 @@
                 </a:solidFill>
                 <a:latin typeface="Calibri"/>
               </a:rPr>
-              <a:t>–   Un estudiante que no encuentra ningun 409 en su sistema casi nunca tiene un dominio sin conflictos; lo que tiene es un diagrama que no modela ninguna regla de negocio.</a:t>
+              <a:t>–   Quien llama a quien, con que verbo y ruta —o con que nombre de evento, si es asincrono—, y cual es el error de negocio que puede devolver.</a:t>
             </a:r>
           </a:p>
           <a:p>
@@ -6452,7 +6232,7 @@
                 </a:solidFill>
                 <a:latin typeface="Calibri"/>
               </a:rPr>
-              <a:t>–   La segunda exigencia: los tres contratos no pueden ser entre el mismo par de cajas.</a:t>
+              <a:t>–   El cuarto es el que se olvida y el que hace util al contrato.</a:t>
             </a:r>
           </a:p>
           <a:p>
@@ -6468,7 +6248,7 @@
                 </a:solidFill>
                 <a:latin typeface="Calibri"/>
               </a:rPr>
-              <a:t>–   Tres filas que digan «App web → API» describen un solo canal contado tres veces, y lo que se esta evaluando es si el estudiante entendio que su sistema tiene varias fronteras.</a:t>
+              <a:t>–   Un error de negocio es una respuesta prevista, que forma parte del diseno: la franja ya esta tomada, el cupo se agoto, el usuario no tiene permiso.</a:t>
             </a:r>
           </a:p>
           <a:p>
@@ -6484,23 +6264,7 @@
                 </a:solidFill>
                 <a:latin typeface="Calibri"/>
               </a:rPr>
-              <a:t>–   Y si el contrato es con la base de datos, en la columna del verbo va la sentencia (INSERT, SELECT) y no una ruta REST</a:t>
-            </a:r>
-          </a:p>
-          <a:p>
-            <a:pPr>
-              <a:spcAft>
-                <a:spcPts val="800"/>
-              </a:spcAft>
-            </a:pPr>
-            <a:r>
-              <a:rPr sz="2000" b="0" i="0">
-                <a:solidFill>
-                  <a:srgbClr val="333333"/>
-                </a:solidFill>
-                <a:latin typeface="Calibri"/>
-              </a:rPr>
-              <a:t>–   Porque la base no expone rutas; ponerle POST /turnos a la base de datos es el error que delata que se lleno la tabla por analogia y no leyendo el propio diagrama.</a:t>
+              <a:t>–   Un 500 no es un error de negocio, es una falla del sistema; nadie lo disena, y por eso poner 500 en esa columna es la senal de que el estudiante no distinguio las dos cosas.</a:t>
             </a:r>
           </a:p>
         </p:txBody>
@@ -7028,7 +6792,7 @@
                 </a:solidFill>
                 <a:latin typeface="Calibri"/>
               </a:rPr>
-              <a:t>Lo que se paga al distribuir: la red no es una llamada de funcion</a:t>
+              <a:t>Los contratos: cuatro datos por fila y un 409 obligatorio (2/3)</a:t>
             </a:r>
           </a:p>
         </p:txBody>
@@ -7067,7 +6831,7 @@
                 </a:solidFill>
                 <a:latin typeface="Calibri"/>
               </a:rPr>
-              <a:t>–   El segundo bloque de contenido es el mas importante del dia: que se paga al distribuir.</a:t>
+              <a:t>–   La diapositiva proyecta los tres contratos resueltos sobre CloudLite Turnos y conviene recorrerlos leyendo la cuarta columna en voz alta, porque es lo que hay que replicar.</a:t>
             </a:r>
           </a:p>
           <a:p>
@@ -7083,7 +6847,7 @@
                 </a:solidFill>
                 <a:latin typeface="Calibri"/>
               </a:rPr>
-              <a:t>–   Una llamada a una funcion dentro del mismo proceso cuesta del orden de nanosegundos y no puede fallar por causas de red.</a:t>
+              <a:t>–   La primera: al menos uno de los tres contratos tiene que ser un 409 de conflicto, y la razon es de dominio y no de capricho.</a:t>
             </a:r>
           </a:p>
           <a:p>
@@ -7099,7 +6863,7 @@
                 </a:solidFill>
                 <a:latin typeface="Calibri"/>
               </a:rPr>
-              <a:t>–   La misma llamada convertida en peticion HTTP entre dos contenedores de la misma maquina o del mismo centro de datos cuesta tipicamente entre 1 y 5 milisegundos, y entre regiones geograficas distintas puede subir a 50 o 200 milisegundos.</a:t>
+              <a:t>–   El 409 es la respuesta que dice «tu peticion es valida, pero el estado actual del sistema no la admite», y en cualquier dominio de reservas ese caso existe siempre: dos clientes quieren la misma franja.</a:t>
             </a:r>
           </a:p>
           <a:p>
@@ -7115,7 +6879,7 @@
                 </a:solidFill>
                 <a:latin typeface="Calibri"/>
               </a:rPr>
-              <a:t>–   Es decir, convertir una llamada local en remota empeora el costo en varios ordenes de magnitud, y a eso se suma que ahora la llamada puede perderse, llegar duplicada o tardar indefinidamente.</a:t>
+              <a:t>–   Un estudiante que no encuentra ningun 409 en su sistema casi nunca tiene un dominio sin conflictos; lo que tiene es un diagrama que no modela ninguna regla de negocio.</a:t>
             </a:r>
           </a:p>
           <a:p>
@@ -7131,39 +6895,7 @@
                 </a:solidFill>
                 <a:latin typeface="Calibri"/>
               </a:rPr>
-              <a:t>–   Hay una aritmetica que conviene mostrar porque impresiona con razon: si una peticion del usuario atraviesa en cadena cinco servicios y cada uno esta disponible el 99,9 % del tiempo</a:t>
-            </a:r>
-          </a:p>
-          <a:p>
-            <a:pPr>
-              <a:spcAft>
-                <a:spcPts val="800"/>
-              </a:spcAft>
-            </a:pPr>
-            <a:r>
-              <a:rPr sz="2000" b="0" i="0">
-                <a:solidFill>
-                  <a:srgbClr val="333333"/>
-                </a:solidFill>
-                <a:latin typeface="Calibri"/>
-              </a:rPr>
-              <a:t>–   La disponibilidad del recorrido completo es 0,999 elevado a la quinta potencia, alrededor del 99,5 %, lo que pasa de unos 43 minutos de indisponibilidad al mes a mas de tres horas.</a:t>
-            </a:r>
-          </a:p>
-          <a:p>
-            <a:pPr>
-              <a:spcAft>
-                <a:spcPts val="800"/>
-              </a:spcAft>
-            </a:pPr>
-            <a:r>
-              <a:rPr sz="2000" b="0" i="0">
-                <a:solidFill>
-                  <a:srgbClr val="333333"/>
-                </a:solidFill>
-                <a:latin typeface="Calibri"/>
-              </a:rPr>
-              <a:t>–   Ese calculo es exacto y no una convencion, y es el argumento mas contundente contra multiplicar servicios sin necesidad.</a:t>
+              <a:t>–   La segunda exigencia: los tres contratos no pueden ser entre el mismo par de cajas.</a:t>
             </a:r>
           </a:p>
         </p:txBody>
@@ -7344,7 +7076,7 @@
                 </a:solidFill>
                 <a:latin typeface="Calibri"/>
               </a:rPr>
-              <a:t>Timeout, reintento, idempotencia y circuit breaker (1/2)</a:t>
+              <a:t>Los contratos: cuatro datos por fila y un 409 obligatorio (3/3)</a:t>
             </a:r>
           </a:p>
         </p:txBody>
@@ -7383,7 +7115,7 @@
                 </a:solidFill>
                 <a:latin typeface="Calibri"/>
               </a:rPr>
-              <a:t>–   De ahi salen cuatro mecanismos que el diagrama y la tabla deben poder mencionar.</a:t>
+              <a:t>–   Tres filas que digan «App web → API» describen un solo canal contado tres veces, y lo que se esta evaluando es si el estudiante entendio que su sistema tiene varias fronteras.</a:t>
             </a:r>
           </a:p>
           <a:p>
@@ -7399,7 +7131,7 @@
                 </a:solidFill>
                 <a:latin typeface="Calibri"/>
               </a:rPr>
-              <a:t>–   Un timeout es el tiempo maximo que un servicio espera respuesta antes de darse por vencido; sin timeout explicito, un servicio lento no falla sino que deja colgado a quien lo llamo, y el bloqueo se propaga hacia arriba hasta tumbar el sistema completo.</a:t>
+              <a:t>–   Y si el contrato es con la base de datos, en la columna del verbo va la sentencia (INSERT, SELECT) y no una ruta REST</a:t>
             </a:r>
           </a:p>
           <a:p>
@@ -7415,23 +7147,7 @@
                 </a:solidFill>
                 <a:latin typeface="Calibri"/>
               </a:rPr>
-              <a:t>–   Los valores tipicos para llamadas internas estan entre 2 y 5 segundos, y son convencion, no ley.</a:t>
-            </a:r>
-          </a:p>
-          <a:p>
-            <a:pPr>
-              <a:spcAft>
-                <a:spcPts val="800"/>
-              </a:spcAft>
-            </a:pPr>
-            <a:r>
-              <a:rPr sz="2000" b="0" i="0">
-                <a:solidFill>
-                  <a:srgbClr val="333333"/>
-                </a:solidFill>
-                <a:latin typeface="Calibri"/>
-              </a:rPr>
-              <a:t>–   Un reintento es volver a intentar la llamada fallida, y trae una trampa: si todos los clientes reintentan de inmediato contra un servicio ya saturado, lo hunden mas, por lo que se limita a dos o tres reintentos con espera creciente entre uno y otro.</a:t>
+              <a:t>–   Porque la base no expone rutas; ponerle POST /turnos a la base de datos es el error que delata que se lleno la tabla por analogia y no leyendo el propio diagrama.</a:t>
             </a:r>
           </a:p>
         </p:txBody>
@@ -7612,7 +7328,7 @@
                 </a:solidFill>
                 <a:latin typeface="Calibri"/>
               </a:rPr>
-              <a:t>Timeout, reintento, idempotencia y circuit breaker (2/2)</a:t>
+              <a:t>Lo que se paga al distribuir: la red no es una llamada de funcion (1/2)</a:t>
             </a:r>
           </a:p>
         </p:txBody>
@@ -7651,7 +7367,7 @@
                 </a:solidFill>
                 <a:latin typeface="Calibri"/>
               </a:rPr>
-              <a:t>–   Los reintentos exigen idempotencia, que significa que ejecutar la misma operacion dos veces produzca el mismo resultado que ejecutarla una vez.</a:t>
+              <a:t>–   El segundo bloque de contenido es el mas importante del dia: que se paga al distribuir.</a:t>
             </a:r>
           </a:p>
           <a:p>
@@ -7667,7 +7383,7 @@
                 </a:solidFill>
                 <a:latin typeface="Calibri"/>
               </a:rPr>
-              <a:t>–   En CloudLite eso es literal: si el reintento de crear turno no es idempotente, el cliente termina con dos reservas para el mismo horario, y la solucion habitual es que la peticion lleve un identificador unico que el servidor reconozca como repetido.</a:t>
+              <a:t>–   Una llamada a una funcion dentro del mismo proceso cuesta del orden de nanosegundos y no puede fallar por causas de red.</a:t>
             </a:r>
           </a:p>
           <a:p>
@@ -7683,7 +7399,23 @@
                 </a:solidFill>
                 <a:latin typeface="Calibri"/>
               </a:rPr>
-              <a:t>–   El cuarto mecanismo es el interruptor de circuito, o circuit breaker, que tras varias fallas consecutivas deja de intentar por un rato y responde de inmediato con un error controlado, para no gastar recursos golpeando algo que esta caido.</a:t>
+              <a:t>–   La misma llamada convertida en peticion HTTP entre dos contenedores de la misma maquina o del mismo centro de datos cuesta tipicamente entre 1 y 5 milisegundos, y entre regiones geograficas distintas puede subir a 50 o 200 milisegundos.</a:t>
+            </a:r>
+          </a:p>
+          <a:p>
+            <a:pPr>
+              <a:spcAft>
+                <a:spcPts val="800"/>
+              </a:spcAft>
+            </a:pPr>
+            <a:r>
+              <a:rPr sz="2000" b="0" i="0">
+                <a:solidFill>
+                  <a:srgbClr val="333333"/>
+                </a:solidFill>
+                <a:latin typeface="Calibri"/>
+              </a:rPr>
+              <a:t>–   Es decir, convertir una llamada local en remota empeora el costo en varios ordenes de magnitud, y a eso se suma que ahora la llamada puede perderse, llegar duplicada o tardar indefinidamente.</a:t>
             </a:r>
           </a:p>
         </p:txBody>
@@ -7864,7 +7596,7 @@
                 </a:solidFill>
                 <a:latin typeface="Calibri"/>
               </a:rPr>
-              <a:t>Los datos: donde se rompen los proyectos academicos (1/2)</a:t>
+              <a:t>Lo que se paga al distribuir: la red no es una llamada de funcion (2/2)</a:t>
             </a:r>
           </a:p>
         </p:txBody>
@@ -7903,7 +7635,7 @@
                 </a:solidFill>
                 <a:latin typeface="Calibri"/>
               </a:rPr>
-              <a:t>–   El punto donde los proyectos academicos se rompen es el de los datos.</a:t>
+              <a:t>–   Hay una aritmetica que conviene mostrar porque impresiona con razon: si una peticion del usuario atraviesa en cadena cinco servicios y cada uno esta disponible el 99,9 % del tiempo</a:t>
             </a:r>
           </a:p>
           <a:p>
@@ -7919,7 +7651,7 @@
                 </a:solidFill>
                 <a:latin typeface="Calibri"/>
               </a:rPr>
-              <a:t>–   La regla ortodoxa de los microservicios dice que cada servicio es dueno exclusivo de su base de datos y que nadie mas la consulta directamente</a:t>
+              <a:t>–   La disponibilidad del recorrido completo es 0,999 elevado a la quinta potencia, alrededor del 99,5 %, lo que pasa de unos 43 minutos de indisponibilidad al mes a mas de tres horas.</a:t>
             </a:r>
           </a:p>
           <a:p>
@@ -7935,39 +7667,7 @@
                 </a:solidFill>
                 <a:latin typeface="Calibri"/>
               </a:rPr>
-              <a:t>–   Si dos servicios comparten tablas, estan acoplados y no pueden desplegarse por separado, lo que contradice la definicion.</a:t>
-            </a:r>
-          </a:p>
-          <a:p>
-            <a:pPr>
-              <a:spcAft>
-                <a:spcPts val="800"/>
-              </a:spcAft>
-            </a:pPr>
-            <a:r>
-              <a:rPr sz="2000" b="0" i="0">
-                <a:solidFill>
-                  <a:srgbClr val="333333"/>
-                </a:solidFill>
-                <a:latin typeface="Calibri"/>
-              </a:rPr>
-              <a:t>–   Pero cumplir esa regla tiene un precio real: una consulta que antes era un join deja de existir y hay que resolverla llamando a otro servicio</a:t>
-            </a:r>
-          </a:p>
-          <a:p>
-            <a:pPr>
-              <a:spcAft>
-                <a:spcPts val="800"/>
-              </a:spcAft>
-            </a:pPr>
-            <a:r>
-              <a:rPr sz="2000" b="0" i="0">
-                <a:solidFill>
-                  <a:srgbClr val="333333"/>
-                </a:solidFill>
-                <a:latin typeface="Calibri"/>
-              </a:rPr>
-              <a:t>–   Y una operacion que abarca dos servicios ya no puede ser una transaccion unica sino una secuencia de pasos con compensaciones.</a:t>
+              <a:t>–   Ese calculo es exacto y no una convencion, y es el argumento mas contundente contra multiplicar servicios sin necesidad.</a:t>
             </a:r>
           </a:p>
         </p:txBody>
@@ -8148,7 +7848,7 @@
                 </a:solidFill>
                 <a:latin typeface="Calibri"/>
               </a:rPr>
-              <a:t>Los datos: donde se rompen los proyectos academicos (2/2)</a:t>
+              <a:t>Timeout, reintento, idempotencia y circuit breaker (1/2)</a:t>
             </a:r>
           </a:p>
         </p:txBody>
@@ -8187,7 +7887,7 @@
                 </a:solidFill>
                 <a:latin typeface="Calibri"/>
               </a:rPr>
-              <a:t>–   Eso introduce consistencia eventual, es decir un lapso durante el cual dos partes del sistema tienen versiones distintas de la verdad, con consecuencias visibles para el usuario.</a:t>
+              <a:t>–   Un timeout es el tiempo maximo que un servicio espera respuesta antes de darse por vencido; sin timeout explicito, un servicio lento no falla sino que deja colgado a quien lo llamo, y el bloqueo se propaga hacia arriba hasta tumbar el sistema completo.</a:t>
             </a:r>
           </a:p>
           <a:p>
@@ -8203,7 +7903,7 @@
                 </a:solidFill>
                 <a:latin typeface="Calibri"/>
               </a:rPr>
-              <a:t>–   La postura honesta para este curso, y hay que enunciarla en voz alta, es que un CloudLite con una base de datos compartida y propiedad de tablas claramente documentada resulta aceptable</a:t>
+              <a:t>–   Los valores tipicos para llamadas internas estan entre 2 y 5 segundos, y son convencion, no ley.</a:t>
             </a:r>
           </a:p>
           <a:p>
@@ -8219,23 +7919,7 @@
                 </a:solidFill>
                 <a:latin typeface="Calibri"/>
               </a:rPr>
-              <a:t>–   Siempre que el estudiante lo registre como un trade-off consciente en su informe y no lo presente como microservicios puros.</a:t>
-            </a:r>
-          </a:p>
-          <a:p>
-            <a:pPr>
-              <a:spcAft>
-                <a:spcPts val="800"/>
-              </a:spcAft>
-            </a:pPr>
-            <a:r>
-              <a:rPr sz="2000" b="0" i="0">
-                <a:solidFill>
-                  <a:srgbClr val="333333"/>
-                </a:solidFill>
-                <a:latin typeface="Calibri"/>
-              </a:rPr>
-              <a:t>–   Fingir ortodoxia es peor que documentar una concesion.</a:t>
+              <a:t>–   Un reintento es volver a intentar la llamada fallida, y trae una trampa: si todos los clientes reintentan de inmediato contra un servicio ya saturado, lo hunden mas, por lo que se limita a dos o tres reintentos con espera creciente entre uno y otro.</a:t>
             </a:r>
           </a:p>
         </p:txBody>
@@ -8416,7 +8100,7 @@
                 </a:solidFill>
                 <a:latin typeface="Calibri"/>
               </a:rPr>
-              <a:t>El tercer entregable: los tres riesgos, y por que son esos tres (1/3)</a:t>
+              <a:t>Timeout, reintento, idempotencia y circuit breaker (2/2)</a:t>
             </a:r>
           </a:p>
         </p:txBody>
@@ -8455,7 +8139,7 @@
                 </a:solidFill>
                 <a:latin typeface="Calibri"/>
               </a:rPr>
-              <a:t>–   El tercer entregable es lo que impide que la clase quede en pura teoria, y no es una tabla libre de riesgos: son TRES riesgos, cada uno responde una pregunta distinta, y estan elegidos para que ninguno se pueda contestar sin mirar el propio diagrama.</a:t>
+              <a:t>–   En CloudLite eso es literal: si el reintento de crear turno no es idempotente, el cliente termina con dos reservas para el mismo horario, y la solucion habitual es que la peticion lleve un identificador unico que el servidor reconozca como repetido.</a:t>
             </a:r>
           </a:p>
           <a:p>
@@ -8471,71 +8155,7 @@
                 </a:solidFill>
                 <a:latin typeface="Calibri"/>
               </a:rPr>
-              <a:t>–   El primero pregunta que se cae.</a:t>
-            </a:r>
-          </a:p>
-          <a:p>
-            <a:pPr>
-              <a:spcAft>
-                <a:spcPts val="800"/>
-              </a:spcAft>
-            </a:pPr>
-            <a:r>
-              <a:rPr sz="2000" b="0" i="0">
-                <a:solidFill>
-                  <a:srgbClr val="333333"/>
-                </a:solidFill>
-                <a:latin typeface="Calibri"/>
-              </a:rPr>
-              <a:t>–   Se nombra UNA caja del diagrama y se dice que deja de funcionar y —esta es la mitad que se olvida— que SIGUE funcionando.</a:t>
-            </a:r>
-          </a:p>
-          <a:p>
-            <a:pPr>
-              <a:spcAft>
-                <a:spcPts val="800"/>
-              </a:spcAft>
-            </a:pPr>
-            <a:r>
-              <a:rPr sz="2000" b="0" i="0">
-                <a:solidFill>
-                  <a:srgbClr val="333333"/>
-                </a:solidFill>
-                <a:latin typeface="Calibri"/>
-              </a:rPr>
-              <a:t>–   «Se cae todo» vale la mitad de los puntos, y con razon: en un sistema bien partido nunca se cae todo, y el ejercicio consiste precisamente en descubrir que algunas cosas sobreviven.</a:t>
-            </a:r>
-          </a:p>
-          <a:p>
-            <a:pPr>
-              <a:spcAft>
-                <a:spcPts val="800"/>
-              </a:spcAft>
-            </a:pPr>
-            <a:r>
-              <a:rPr sz="2000" b="0" i="0">
-                <a:solidFill>
-                  <a:srgbClr val="333333"/>
-                </a:solidFill>
-                <a:latin typeface="Calibri"/>
-              </a:rPr>
-              <a:t>–   En CloudLite Turnos, si se cae el trabajador de notificaciones, los turnos se siguen reservando y lo que se pierde es el correo de confirmacion; si se cae la base de turnos, no se reserva nada</a:t>
-            </a:r>
-          </a:p>
-          <a:p>
-            <a:pPr>
-              <a:spcAft>
-                <a:spcPts val="800"/>
-              </a:spcAft>
-            </a:pPr>
-            <a:r>
-              <a:rPr sz="2000" b="0" i="0">
-                <a:solidFill>
-                  <a:srgbClr val="333333"/>
-                </a:solidFill>
-                <a:latin typeface="Calibri"/>
-              </a:rPr>
-              <a:t>–   Pero la aplicacion web sigue cargando y puede mostrar un mensaje decente en lugar de una pantalla en blanco.</a:t>
+              <a:t>–   El cuarto mecanismo es el interruptor de circuito, o circuit breaker, que tras varias fallas consecutivas deja de intentar por un rato y responde de inmediato con un error controlado, para no gastar recursos golpeando algo que esta caido.</a:t>
             </a:r>
           </a:p>
         </p:txBody>
@@ -8716,7 +8336,7 @@
                 </a:solidFill>
                 <a:latin typeface="Calibri"/>
               </a:rPr>
-              <a:t>El tercer entregable: los tres riesgos, y por que son esos tres (2/3)</a:t>
+              <a:t>Los datos: donde se rompen los proyectos academicos (1/2)</a:t>
             </a:r>
           </a:p>
         </p:txBody>
@@ -8755,7 +8375,7 @@
                 </a:solidFill>
                 <a:latin typeface="Calibri"/>
               </a:rPr>
-              <a:t>–   Ese razonamiento es el que en la Clase 7 permite decidir que va en cada zona de red y en la Clase 13 que pieza vale la pena replicar.</a:t>
+              <a:t>–   El punto donde los proyectos academicos se rompen es el de los datos.</a:t>
             </a:r>
           </a:p>
           <a:p>
@@ -8771,7 +8391,7 @@
                 </a:solidFill>
                 <a:latin typeface="Calibri"/>
               </a:rPr>
-              <a:t>–   El segundo pregunta cuantos saltos de red tiene una operacion de punta a punta, y se responde con un numero, contado sobre el propio dibujo.</a:t>
+              <a:t>–   La regla ortodoxa de los microservicios dice que cada servicio es dueno exclusivo de su base de datos y que nadie mas la consulta directamente</a:t>
             </a:r>
           </a:p>
           <a:p>
@@ -8787,7 +8407,7 @@
                 </a:solidFill>
                 <a:latin typeface="Calibri"/>
               </a:rPr>
-              <a:t>–   Reservar un turno en el ejemplo de tres cajas son tres saltos: el navegador a la aplicacion web, la aplicacion web a la API, y la API a la base de datos; si se agrega el correo son cuatro, y si el correo se envia por cola, cinco.</a:t>
+              <a:t>–   Si dos servicios comparten tablas, estan acoplados y no pueden desplegarse por separado, lo que contradice la definicion.</a:t>
             </a:r>
           </a:p>
           <a:p>
@@ -8803,7 +8423,7 @@
                 </a:solidFill>
                 <a:latin typeface="Calibri"/>
               </a:rPr>
-              <a:t>–   El numero importa por lo que se explico arriba: cada salto agrega latencia y una probabilidad de fallo, y esa aritmetica es la unica defensa contra multiplicar cajas por gusto.</a:t>
+              <a:t>–   Pero cumplir esa regla tiene un precio real: una consulta que antes era un join deja de existir y hay que resolverla llamando a otro servicio</a:t>
             </a:r>
           </a:p>
           <a:p>
@@ -8819,23 +8439,7 @@
                 </a:solidFill>
                 <a:latin typeface="Calibri"/>
               </a:rPr>
-              <a:t>–   Un estudiante que no puede contar sus saltos no esta leyendo su diagrama, esta recordandolo.</a:t>
-            </a:r>
-          </a:p>
-          <a:p>
-            <a:pPr>
-              <a:spcAft>
-                <a:spcPts val="800"/>
-              </a:spcAft>
-            </a:pPr>
-            <a:r>
-              <a:rPr sz="2000" b="0" i="0">
-                <a:solidFill>
-                  <a:srgbClr val="333333"/>
-                </a:solidFill>
-                <a:latin typeface="Calibri"/>
-              </a:rPr>
-              <a:t>–   El tercero pregunta por un dato que se escribe en dos pasos, y es el mas dificil de los tres porque exige mirar la escritura y no la lectura.</a:t>
+              <a:t>–   Y una operacion que abarca dos servicios ya no puede ser una transaccion unica sino una secuencia de pasos con compensaciones.</a:t>
             </a:r>
           </a:p>
         </p:txBody>
@@ -9016,7 +8620,7 @@
                 </a:solidFill>
                 <a:latin typeface="Calibri"/>
               </a:rPr>
-              <a:t>El tercer entregable: los tres riesgos, y por que son esos tres (3/3)</a:t>
+              <a:t>Los datos: donde se rompen los proyectos academicos (2/2)</a:t>
             </a:r>
           </a:p>
         </p:txBody>
@@ -9055,7 +8659,7 @@
                 </a:solidFill>
                 <a:latin typeface="Calibri"/>
               </a:rPr>
-              <a:t>–   En el ejemplo, el turno se escribe en la base y despues se publica el mensaje del correo: si el segundo paso falla, el turno existe y el cliente nunca se entero.</a:t>
+              <a:t>–   La postura honesta para este curso, y hay que enunciarla en voz alta, es que un CloudLite con una base de datos compartida y propiedad de tablas claramente documentada resulta aceptable</a:t>
             </a:r>
           </a:p>
           <a:p>
@@ -9071,7 +8675,7 @@
                 </a:solidFill>
                 <a:latin typeface="Calibri"/>
               </a:rPr>
-              <a:t>–   Ese es el problema de fondo de todo sistema distribuido, y hoy no se resuelve con una saga completa: se reconoce, se nombra el dato concreto y se dice que queda inconsistente.</a:t>
+              <a:t>–   Siempre que el estudiante lo registre como un trade-off consciente en su informe y no lo presente como microservicios puros.</a:t>
             </a:r>
           </a:p>
           <a:p>
@@ -9087,23 +8691,7 @@
                 </a:solidFill>
                 <a:latin typeface="Calibri"/>
               </a:rPr>
-              <a:t>–   Si un estudiante dice que no encuentra ningun riesgo, casi siempre es porque su diagrama tiene flechas sin protocolo o sin formato: no sabe por donde puede romperse porque nunca definio como se comunican las piezas.</a:t>
-            </a:r>
-          </a:p>
-          <a:p>
-            <a:pPr>
-              <a:spcAft>
-                <a:spcPts val="800"/>
-              </a:spcAft>
-            </a:pPr>
-            <a:r>
-              <a:rPr sz="2000" b="0" i="0">
-                <a:solidFill>
-                  <a:srgbClr val="333333"/>
-                </a:solidFill>
-                <a:latin typeface="Calibri"/>
-              </a:rPr>
-              <a:t>–   Devolverle el diagrama es mas util que darle un ejemplo.</a:t>
+              <a:t>–   Fingir ortodoxia es peor que documentar una concesion.</a:t>
             </a:r>
           </a:p>
         </p:txBody>
@@ -9284,7 +8872,7 @@
                 </a:solidFill>
                 <a:latin typeface="Calibri"/>
               </a:rPr>
-              <a:t>Preguntas frecuentes y cierre conceptual () (1/2)</a:t>
+              <a:t>El tercer entregable: los tres riesgos, y por que son esos tres (1/3)</a:t>
             </a:r>
           </a:p>
         </p:txBody>
@@ -9323,7 +8911,7 @@
                 </a:solidFill>
                 <a:latin typeface="Calibri"/>
               </a:rPr>
-              <a:t>–   Las preguntas de esta clase son predecibles y conviene responderlas con firmeza.</a:t>
+              <a:t>–   El tercer entregable es lo que impide que la clase quede en pura teoria, y no es una tabla libre de riesgos: son TRES riesgos, cada uno responde una pregunta distinta, y estan elegidos para que ninguno se pueda contestar sin mirar el propio diagrama.</a:t>
             </a:r>
           </a:p>
           <a:p>
@@ -9339,7 +8927,7 @@
                 </a:solidFill>
                 <a:latin typeface="Calibri"/>
               </a:rPr>
-              <a:t>–   Cuantos microservicios son los correctos: no hay numero correcto, hay justificacion por frontera</a:t>
+              <a:t>–   Se nombra UNA caja del diagrama y se dice que deja de funcionar y —esta es la mitad que se olvida— que SIGUE funcionando.</a:t>
             </a:r>
           </a:p>
           <a:p>
@@ -9355,7 +8943,7 @@
                 </a:solidFill>
                 <a:latin typeface="Calibri"/>
               </a:rPr>
-              <a:t>–   Y el rango de dos a cinco contenedores que exige el curso es una restriccion pedagogica pensada para proyectos de una a tres personas en doce semanas, no un hallazgo de la ingenieria.</a:t>
+              <a:t>–   «Se cae todo» vale la mitad de los puntos, y con razon: en un sistema bien partido nunca se cae todo, y el ejercicio consiste precisamente en descubrir que algunas cosas sobreviven.</a:t>
             </a:r>
           </a:p>
           <a:p>
@@ -9371,55 +8959,7 @@
                 </a:solidFill>
                 <a:latin typeface="Calibri"/>
               </a:rPr>
-              <a:t>–   Si las empresas grandes tienen cientos de servicios, por que nosotros solo tres: porque el numero de servicios que una organizacion puede sostener es funcion del numero de equipos autonomos y de la madurez de su automatizacion de despliegue y observabilidad</a:t>
-            </a:r>
-          </a:p>
-          <a:p>
-            <a:pPr>
-              <a:spcAft>
-                <a:spcPts val="800"/>
-              </a:spcAft>
-            </a:pPr>
-            <a:r>
-              <a:rPr sz="2000" b="0" i="0">
-                <a:solidFill>
-                  <a:srgbClr val="333333"/>
-                </a:solidFill>
-                <a:latin typeface="Calibri"/>
-              </a:rPr>
-              <a:t>–   Condiciones que un equipo de tres no tiene, y copiar la forma sin las condiciones produce lo que aqui se llama microservicios teatro.</a:t>
-            </a:r>
-          </a:p>
-          <a:p>
-            <a:pPr>
-              <a:spcAft>
-                <a:spcPts val="800"/>
-              </a:spcAft>
-            </a:pPr>
-            <a:r>
-              <a:rPr sz="2000" b="0" i="0">
-                <a:solidFill>
-                  <a:srgbClr val="333333"/>
-                </a:solidFill>
-                <a:latin typeface="Calibri"/>
-              </a:rPr>
-              <a:t>–   Y la tercera, que hay que responder sin ambiguedad: esta mal hacer un monolito.</a:t>
-            </a:r>
-          </a:p>
-          <a:p>
-            <a:pPr>
-              <a:spcAft>
-                <a:spcPts val="800"/>
-              </a:spcAft>
-            </a:pPr>
-            <a:r>
-              <a:rPr sz="2000" b="0" i="0">
-                <a:solidFill>
-                  <a:srgbClr val="333333"/>
-                </a:solidFill>
-                <a:latin typeface="Calibri"/>
-              </a:rPr>
-              <a:t>–   No; esta mal hacerlo sin saber que se eligio, y un monolito modular bien argumentado recibe mejor calificacion que cinco servicios sin razon.</a:t>
+              <a:t>–   En CloudLite Turnos, si se cae el trabajador de notificaciones, los turnos se siguen reservando y lo que se pierde es el correo de confirmacion; si se cae la base de turnos, no se reserva nada</a:t>
             </a:r>
           </a:p>
         </p:txBody>
@@ -9600,7 +9140,7 @@
                 </a:solidFill>
                 <a:latin typeface="Calibri"/>
               </a:rPr>
-              <a:t>Preguntas frecuentes y cierre conceptual () (2/2)</a:t>
+              <a:t>El tercer entregable: los tres riesgos, y por que son esos tres (2/3)</a:t>
             </a:r>
           </a:p>
         </p:txBody>
@@ -9639,7 +9179,7 @@
                 </a:solidFill>
                 <a:latin typeface="Calibri"/>
               </a:rPr>
-              <a:t>–   Error tipico del docente que no domina el tema: aplaudir un diagrama con ocho microservicios sin preguntar por que existe cada uno.</a:t>
+              <a:t>–   Pero la aplicacion web sigue cargando y puede mostrar un mensaje decente en lugar de una pantalla en blanco.</a:t>
             </a:r>
           </a:p>
           <a:p>
@@ -9655,7 +9195,7 @@
                 </a:solidFill>
                 <a:latin typeface="Calibri"/>
               </a:rPr>
-              <a:t>–   El numero de servicios no mide calidad arquitectonica; la justificacion de cada frontera si.</a:t>
+              <a:t>–   Ese razonamiento es el que en la Clase 7 permite decidir que va en cada zona de red y en la Clase 13 que pieza vale la pena replicar.</a:t>
             </a:r>
           </a:p>
           <a:p>
@@ -9671,7 +9211,7 @@
                 </a:solidFill>
                 <a:latin typeface="Calibri"/>
               </a:rPr>
-              <a:t>–   La consecuencia aguas abajo es que ese estudiante llega a la Clase 7 con ocho cajas que no puede ubicar en zonas de red</a:t>
+              <a:t>–   Reservar un turno en el ejemplo de tres cajas son tres saltos: el navegador a la aplicacion web, la aplicacion web a la API, y la API a la base de datos; si se agrega el correo son cuatro, y si el correo se envia por cola, cinco.</a:t>
             </a:r>
           </a:p>
           <a:p>
@@ -9687,7 +9227,7 @@
                 </a:solidFill>
                 <a:latin typeface="Calibri"/>
               </a:rPr>
-              <a:t>–   A la Clase 8 con ocho pipelines que nunca construira y a la Clase 12 sin poder identificar un cuello de botella, porque no entiende el flujo de su propio sistema.</a:t>
+              <a:t>–   El numero importa por lo que se explico arriba: cada salto agrega latencia y una probabilidad de fallo, y esa aritmetica es la unica defensa contra multiplicar cajas por gusto.</a:t>
             </a:r>
           </a:p>
           <a:p>
@@ -9703,7 +9243,7 @@
                 </a:solidFill>
                 <a:latin typeface="Calibri"/>
               </a:rPr>
-              <a:t>–   El segundo error es tratar la latencia y los fallos parciales como un detalle de implementacion que se vera despues: si hoy no se dice que una flecha en el diagrama es una llamada de red que puede fallar</a:t>
+              <a:t>–   Un estudiante que no puede contar sus saltos no esta leyendo su diagrama, esta recordandolo.</a:t>
             </a:r>
           </a:p>
           <a:p>
@@ -9719,23 +9259,7 @@
                 </a:solidFill>
                 <a:latin typeface="Calibri"/>
               </a:rPr>
-              <a:t>–   El estudiante disenara como si distribuir fuera gratis, no incluira timeouts ni idempotencia en su tabla de riesgos</a:t>
-            </a:r>
-          </a:p>
-          <a:p>
-            <a:pPr>
-              <a:spcAft>
-                <a:spcPts val="800"/>
-              </a:spcAft>
-            </a:pPr>
-            <a:r>
-              <a:rPr sz="2000" b="0" i="0">
-                <a:solidFill>
-                  <a:srgbClr val="333333"/>
-                </a:solidFill>
-                <a:latin typeface="Calibri"/>
-              </a:rPr>
-              <a:t>–   Y en la Clase 13 pedira autoescalado como solucion magica a un problema de diseno originado precisamente en esta clase.</a:t>
+              <a:t>–   El tercero pregunta por un dato que se escribe en dos pasos, y es el mas dificil de los tres porque exige mirar la escritura y no la lectura.</a:t>
             </a:r>
           </a:p>
         </p:txBody>
@@ -10116,7 +9640,7 @@
         <p:spPr>
           <a:xfrm>
             <a:off x="0" y="0"/>
-            <a:ext cx="12191695" cy="1170432"/>
+            <a:ext cx="12191695" cy="960120"/>
           </a:xfrm>
           <a:prstGeom prst="rect">
             <a:avLst/>
@@ -10158,7 +9682,7 @@
         </p:nvSpPr>
         <p:spPr>
           <a:xfrm>
-            <a:off x="0" y="1170432"/>
+            <a:off x="0" y="960120"/>
             <a:ext cx="12191695" cy="41148"/>
           </a:xfrm>
           <a:prstGeom prst="rect">
@@ -10202,7 +9726,7 @@
         <p:spPr>
           <a:xfrm>
             <a:off x="457200" y="164592"/>
-            <a:ext cx="11277295" cy="384048"/>
+            <a:ext cx="11277295" cy="502920"/>
           </a:xfrm>
           <a:prstGeom prst="rect">
             <a:avLst/>
@@ -10222,7 +9746,7 @@
                 </a:solidFill>
                 <a:latin typeface="Calibri"/>
               </a:rPr>
-              <a:t>Ejemplo de diagrama C4 — nivel Containers</a:t>
+              <a:t>El tercer entregable: los tres riesgos, y por que son esos tres (3/3)</a:t>
             </a:r>
           </a:p>
         </p:txBody>
@@ -10235,8 +9759,8 @@
         </p:nvSpPr>
         <p:spPr>
           <a:xfrm>
-            <a:off x="457200" y="566928"/>
-            <a:ext cx="11277295" cy="411480"/>
+            <a:off x="457200" y="1170432"/>
+            <a:ext cx="11277295" cy="5230368"/>
           </a:xfrm>
           <a:prstGeom prst="rect">
             <a:avLst/>
@@ -10249,614 +9773,74 @@
           </a:bodyPr>
           <a:lstStyle/>
           <a:p>
-            <a:r>
-              <a:rPr sz="1400" b="0" i="0">
-                <a:solidFill>
-                  <a:srgbClr val="B8D8EE"/>
-                </a:solidFill>
-                <a:latin typeface="Calibri"/>
-              </a:rPr>
-              <a:t>2–5 cajas justificadas, cada flecha con protocolo Y formato</a:t>
-            </a:r>
-          </a:p>
-        </p:txBody>
-      </p:sp>
-      <p:sp>
-        <p:nvSpPr>
-          <p:cNvPr id="6" name="Rounded Rectangle 5"/>
-          <p:cNvSpPr/>
-          <p:nvPr/>
-        </p:nvSpPr>
-        <p:spPr>
-          <a:xfrm>
-            <a:off x="822960" y="2011680"/>
-            <a:ext cx="2377440" cy="1097280"/>
-          </a:xfrm>
-          <a:prstGeom prst="roundRect">
-            <a:avLst>
-              <a:gd name="adj" fmla="val 12000"/>
-            </a:avLst>
-          </a:prstGeom>
-          <a:solidFill>
-            <a:srgbClr val="095292"/>
-          </a:solidFill>
-          <a:ln>
-            <a:noFill/>
-          </a:ln>
-        </p:spPr>
-        <p:style>
-          <a:lnRef idx="1">
-            <a:schemeClr val="accent1"/>
-          </a:lnRef>
-          <a:fillRef idx="3">
-            <a:schemeClr val="accent1"/>
-          </a:fillRef>
-          <a:effectRef idx="2">
-            <a:schemeClr val="accent1"/>
-          </a:effectRef>
-          <a:fontRef idx="minor">
-            <a:schemeClr val="lt1"/>
-          </a:fontRef>
-        </p:style>
-        <p:txBody>
-          <a:bodyPr rtlCol="0" anchor="ctr" wrap="square"/>
-          <a:lstStyle/>
-          <a:p>
-            <a:pPr algn="ctr"/>
-            <a:r>
-              <a:rPr sz="1100" b="1" i="0">
-                <a:solidFill>
-                  <a:srgbClr val="FFFFFF"/>
-                </a:solidFill>
-                <a:latin typeface="Calibri"/>
-              </a:rPr>
-              <a:t>App web
-(Container · React)</a:t>
-            </a:r>
-          </a:p>
-        </p:txBody>
-      </p:sp>
-      <p:sp>
-        <p:nvSpPr>
-          <p:cNvPr id="7" name="Rounded Rectangle 6"/>
-          <p:cNvSpPr/>
-          <p:nvPr/>
-        </p:nvSpPr>
-        <p:spPr>
-          <a:xfrm>
-            <a:off x="4754880" y="2011680"/>
-            <a:ext cx="2377440" cy="1097280"/>
-          </a:xfrm>
-          <a:prstGeom prst="roundRect">
-            <a:avLst>
-              <a:gd name="adj" fmla="val 12000"/>
-            </a:avLst>
-          </a:prstGeom>
-          <a:solidFill>
-            <a:srgbClr val="095292"/>
-          </a:solidFill>
-          <a:ln>
-            <a:noFill/>
-          </a:ln>
-        </p:spPr>
-        <p:style>
-          <a:lnRef idx="1">
-            <a:schemeClr val="accent1"/>
-          </a:lnRef>
-          <a:fillRef idx="3">
-            <a:schemeClr val="accent1"/>
-          </a:fillRef>
-          <a:effectRef idx="2">
-            <a:schemeClr val="accent1"/>
-          </a:effectRef>
-          <a:fontRef idx="minor">
-            <a:schemeClr val="lt1"/>
-          </a:fontRef>
-        </p:style>
-        <p:txBody>
-          <a:bodyPr rtlCol="0" anchor="ctr" wrap="square"/>
-          <a:lstStyle/>
-          <a:p>
-            <a:pPr algn="ctr"/>
-            <a:r>
-              <a:rPr sz="1100" b="1" i="0">
-                <a:solidFill>
-                  <a:srgbClr val="FFFFFF"/>
-                </a:solidFill>
-                <a:latin typeface="Calibri"/>
-              </a:rPr>
-              <a:t>API de turnos
-(Container · Node.js)</a:t>
-            </a:r>
-          </a:p>
-        </p:txBody>
-      </p:sp>
-      <p:sp>
-        <p:nvSpPr>
-          <p:cNvPr id="8" name="Rounded Rectangle 7"/>
-          <p:cNvSpPr/>
-          <p:nvPr/>
-        </p:nvSpPr>
-        <p:spPr>
-          <a:xfrm>
-            <a:off x="8595360" y="2011680"/>
-            <a:ext cx="2377440" cy="1097280"/>
-          </a:xfrm>
-          <a:prstGeom prst="roundRect">
-            <a:avLst>
-              <a:gd name="adj" fmla="val 12000"/>
-            </a:avLst>
-          </a:prstGeom>
-          <a:solidFill>
-            <a:srgbClr val="269CCB"/>
-          </a:solidFill>
-          <a:ln>
-            <a:noFill/>
-          </a:ln>
-        </p:spPr>
-        <p:style>
-          <a:lnRef idx="1">
-            <a:schemeClr val="accent1"/>
-          </a:lnRef>
-          <a:fillRef idx="3">
-            <a:schemeClr val="accent1"/>
-          </a:fillRef>
-          <a:effectRef idx="2">
-            <a:schemeClr val="accent1"/>
-          </a:effectRef>
-          <a:fontRef idx="minor">
-            <a:schemeClr val="lt1"/>
-          </a:fontRef>
-        </p:style>
-        <p:txBody>
-          <a:bodyPr rtlCol="0" anchor="ctr" wrap="square"/>
-          <a:lstStyle/>
-          <a:p>
-            <a:pPr algn="ctr"/>
-            <a:r>
-              <a:rPr sz="1100" b="1" i="0">
-                <a:solidFill>
-                  <a:srgbClr val="FFFFFF"/>
-                </a:solidFill>
-                <a:latin typeface="Calibri"/>
-              </a:rPr>
-              <a:t>Base de turnos
-(ContainerDb · PostgreSQL)</a:t>
-            </a:r>
-          </a:p>
-        </p:txBody>
-      </p:sp>
-      <p:sp>
-        <p:nvSpPr>
-          <p:cNvPr id="9" name="Rounded Rectangle 8"/>
-          <p:cNvSpPr/>
-          <p:nvPr/>
-        </p:nvSpPr>
-        <p:spPr>
-          <a:xfrm>
-            <a:off x="822960" y="3931920"/>
-            <a:ext cx="2377440" cy="914400"/>
-          </a:xfrm>
-          <a:prstGeom prst="roundRect">
-            <a:avLst>
-              <a:gd name="adj" fmla="val 12000"/>
-            </a:avLst>
-          </a:prstGeom>
-          <a:solidFill>
-            <a:srgbClr val="FFD000"/>
-          </a:solidFill>
-          <a:ln>
-            <a:noFill/>
-          </a:ln>
-        </p:spPr>
-        <p:style>
-          <a:lnRef idx="1">
-            <a:schemeClr val="accent1"/>
-          </a:lnRef>
-          <a:fillRef idx="3">
-            <a:schemeClr val="accent1"/>
-          </a:fillRef>
-          <a:effectRef idx="2">
-            <a:schemeClr val="accent1"/>
-          </a:effectRef>
-          <a:fontRef idx="minor">
-            <a:schemeClr val="lt1"/>
-          </a:fontRef>
-        </p:style>
-        <p:txBody>
-          <a:bodyPr rtlCol="0" anchor="ctr" wrap="square"/>
-          <a:lstStyle/>
-          <a:p>
-            <a:pPr algn="ctr"/>
-            <a:r>
-              <a:rPr sz="1300" b="1" i="0">
-                <a:solidFill>
-                  <a:srgbClr val="095292"/>
-                </a:solidFill>
-                <a:latin typeface="Calibri"/>
-              </a:rPr>
-              <a:t>Cliente
-(Person)</a:t>
-            </a:r>
-          </a:p>
-        </p:txBody>
-      </p:sp>
-      <p:sp>
-        <p:nvSpPr>
-          <p:cNvPr id="10" name="Rounded Rectangle 9"/>
-          <p:cNvSpPr/>
-          <p:nvPr/>
-        </p:nvSpPr>
-        <p:spPr>
-          <a:xfrm>
-            <a:off x="4754880" y="3931920"/>
-            <a:ext cx="2377440" cy="914400"/>
-          </a:xfrm>
-          <a:prstGeom prst="roundRect">
-            <a:avLst>
-              <a:gd name="adj" fmla="val 12000"/>
-            </a:avLst>
-          </a:prstGeom>
-          <a:solidFill>
-            <a:srgbClr val="095292"/>
-          </a:solidFill>
-          <a:ln>
-            <a:noFill/>
-          </a:ln>
-        </p:spPr>
-        <p:style>
-          <a:lnRef idx="1">
-            <a:schemeClr val="accent1"/>
-          </a:lnRef>
-          <a:fillRef idx="3">
-            <a:schemeClr val="accent1"/>
-          </a:fillRef>
-          <a:effectRef idx="2">
-            <a:schemeClr val="accent1"/>
-          </a:effectRef>
-          <a:fontRef idx="minor">
-            <a:schemeClr val="lt1"/>
-          </a:fontRef>
-        </p:style>
-        <p:txBody>
-          <a:bodyPr rtlCol="0" anchor="ctr" wrap="square"/>
-          <a:lstStyle/>
-          <a:p>
-            <a:pPr algn="ctr"/>
-            <a:r>
-              <a:rPr sz="1100" b="1" i="0">
-                <a:solidFill>
-                  <a:srgbClr val="FFFFFF"/>
-                </a:solidFill>
-                <a:latin typeface="Calibri"/>
-              </a:rPr>
-              <a:t>Worker de avisos
-(Container · cola)</a:t>
-            </a:r>
-          </a:p>
-        </p:txBody>
-      </p:sp>
-      <p:cxnSp>
-        <p:nvCxnSpPr>
-          <p:cNvPr id="11" name="Connector 10"/>
-          <p:cNvCxnSpPr/>
-          <p:nvPr/>
-        </p:nvCxnSpPr>
-        <p:spPr>
-          <a:xfrm flipV="1">
-            <a:off x="2011680" y="3108960"/>
-            <a:ext cx="0" cy="822960"/>
-          </a:xfrm>
-          <a:prstGeom prst="line">
-            <a:avLst/>
-          </a:prstGeom>
-          <a:ln w="22225">
-            <a:solidFill>
-              <a:srgbClr val="666666"/>
-            </a:solidFill>
-            <a:tailEnd type="triangle" w="med" len="med"/>
-          </a:ln>
-        </p:spPr>
-        <p:style>
-          <a:lnRef idx="2">
-            <a:schemeClr val="accent1"/>
-          </a:lnRef>
-          <a:fillRef idx="0">
-            <a:schemeClr val="accent1"/>
-          </a:fillRef>
-          <a:effectRef idx="1">
-            <a:schemeClr val="accent1"/>
-          </a:effectRef>
-          <a:fontRef idx="minor">
-            <a:schemeClr val="tx1"/>
-          </a:fontRef>
-        </p:style>
-      </p:cxnSp>
-      <p:sp>
-        <p:nvSpPr>
-          <p:cNvPr id="12" name="TextBox 11"/>
-          <p:cNvSpPr txBox="1"/>
-          <p:nvPr/>
-        </p:nvSpPr>
-        <p:spPr>
-          <a:xfrm>
-            <a:off x="2121408" y="3319272"/>
-            <a:ext cx="1645920" cy="320040"/>
-          </a:xfrm>
-          <a:prstGeom prst="rect">
-            <a:avLst/>
-          </a:prstGeom>
-          <a:noFill/>
-        </p:spPr>
-        <p:txBody>
-          <a:bodyPr wrap="square">
-            <a:spAutoFit/>
-          </a:bodyPr>
-          <a:lstStyle/>
-          <a:p>
-            <a:pPr algn="l"/>
-            <a:r>
-              <a:rPr sz="1000" b="0" i="1">
-                <a:solidFill>
-                  <a:srgbClr val="666666"/>
-                </a:solidFill>
-                <a:latin typeface="Calibri"/>
-              </a:rPr>
-              <a:t>usa · HTTPS</a:t>
-            </a:r>
-          </a:p>
-        </p:txBody>
-      </p:sp>
-      <p:cxnSp>
-        <p:nvCxnSpPr>
-          <p:cNvPr id="13" name="Connector 12"/>
-          <p:cNvCxnSpPr/>
-          <p:nvPr/>
-        </p:nvCxnSpPr>
-        <p:spPr>
-          <a:xfrm>
-            <a:off x="3200400" y="2560320"/>
-            <a:ext cx="1554480" cy="0"/>
-          </a:xfrm>
-          <a:prstGeom prst="line">
-            <a:avLst/>
-          </a:prstGeom>
-          <a:ln w="22225">
-            <a:solidFill>
-              <a:srgbClr val="666666"/>
-            </a:solidFill>
-            <a:tailEnd type="triangle" w="med" len="med"/>
-          </a:ln>
-        </p:spPr>
-        <p:style>
-          <a:lnRef idx="2">
-            <a:schemeClr val="accent1"/>
-          </a:lnRef>
-          <a:fillRef idx="0">
-            <a:schemeClr val="accent1"/>
-          </a:fillRef>
-          <a:effectRef idx="1">
-            <a:schemeClr val="accent1"/>
-          </a:effectRef>
-          <a:fontRef idx="minor">
-            <a:schemeClr val="tx1"/>
-          </a:fontRef>
-        </p:style>
-      </p:cxnSp>
-      <p:sp>
-        <p:nvSpPr>
-          <p:cNvPr id="14" name="TextBox 13"/>
-          <p:cNvSpPr txBox="1"/>
-          <p:nvPr/>
-        </p:nvSpPr>
-        <p:spPr>
-          <a:xfrm>
-            <a:off x="3154679" y="2359152"/>
-            <a:ext cx="1645920" cy="320040"/>
-          </a:xfrm>
-          <a:prstGeom prst="rect">
-            <a:avLst/>
-          </a:prstGeom>
-          <a:noFill/>
-        </p:spPr>
-        <p:txBody>
-          <a:bodyPr wrap="square">
-            <a:spAutoFit/>
-          </a:bodyPr>
-          <a:lstStyle/>
-          <a:p>
-            <a:pPr algn="ctr"/>
-            <a:r>
-              <a:rPr sz="1000" b="0" i="1">
-                <a:solidFill>
-                  <a:srgbClr val="666666"/>
-                </a:solidFill>
-                <a:latin typeface="Calibri"/>
-              </a:rPr>
-              <a:t>HTTPS/JSON</a:t>
-            </a:r>
-          </a:p>
-        </p:txBody>
-      </p:sp>
-      <p:cxnSp>
-        <p:nvCxnSpPr>
-          <p:cNvPr id="15" name="Connector 14"/>
-          <p:cNvCxnSpPr/>
-          <p:nvPr/>
-        </p:nvCxnSpPr>
-        <p:spPr>
-          <a:xfrm>
-            <a:off x="7132320" y="2560320"/>
-            <a:ext cx="1463040" cy="0"/>
-          </a:xfrm>
-          <a:prstGeom prst="line">
-            <a:avLst/>
-          </a:prstGeom>
-          <a:ln w="22225">
-            <a:solidFill>
-              <a:srgbClr val="666666"/>
-            </a:solidFill>
-            <a:tailEnd type="triangle" w="med" len="med"/>
-          </a:ln>
-        </p:spPr>
-        <p:style>
-          <a:lnRef idx="2">
-            <a:schemeClr val="accent1"/>
-          </a:lnRef>
-          <a:fillRef idx="0">
-            <a:schemeClr val="accent1"/>
-          </a:fillRef>
-          <a:effectRef idx="1">
-            <a:schemeClr val="accent1"/>
-          </a:effectRef>
-          <a:fontRef idx="minor">
-            <a:schemeClr val="tx1"/>
-          </a:fontRef>
-        </p:style>
-      </p:cxnSp>
-      <p:sp>
-        <p:nvSpPr>
-          <p:cNvPr id="16" name="TextBox 15"/>
-          <p:cNvSpPr txBox="1"/>
-          <p:nvPr/>
-        </p:nvSpPr>
-        <p:spPr>
-          <a:xfrm>
-            <a:off x="7040880" y="2359152"/>
-            <a:ext cx="1645920" cy="320040"/>
-          </a:xfrm>
-          <a:prstGeom prst="rect">
-            <a:avLst/>
-          </a:prstGeom>
-          <a:noFill/>
-        </p:spPr>
-        <p:txBody>
-          <a:bodyPr wrap="square">
-            <a:spAutoFit/>
-          </a:bodyPr>
-          <a:lstStyle/>
-          <a:p>
-            <a:pPr algn="ctr"/>
-            <a:r>
-              <a:rPr sz="1000" b="0" i="1">
-                <a:solidFill>
-                  <a:srgbClr val="666666"/>
-                </a:solidFill>
-                <a:latin typeface="Calibri"/>
-              </a:rPr>
-              <a:t>TCP/SQL</a:t>
-            </a:r>
-          </a:p>
-        </p:txBody>
-      </p:sp>
-      <p:cxnSp>
-        <p:nvCxnSpPr>
-          <p:cNvPr id="17" name="Connector 16"/>
-          <p:cNvCxnSpPr/>
-          <p:nvPr/>
-        </p:nvCxnSpPr>
-        <p:spPr>
-          <a:xfrm>
-            <a:off x="5943600" y="3108960"/>
-            <a:ext cx="0" cy="822960"/>
-          </a:xfrm>
-          <a:prstGeom prst="line">
-            <a:avLst/>
-          </a:prstGeom>
-          <a:ln w="22225">
-            <a:solidFill>
-              <a:srgbClr val="666666"/>
-            </a:solidFill>
-            <a:tailEnd type="triangle" w="med" len="med"/>
-          </a:ln>
-        </p:spPr>
-        <p:style>
-          <a:lnRef idx="2">
-            <a:schemeClr val="accent1"/>
-          </a:lnRef>
-          <a:fillRef idx="0">
-            <a:schemeClr val="accent1"/>
-          </a:fillRef>
-          <a:effectRef idx="1">
-            <a:schemeClr val="accent1"/>
-          </a:effectRef>
-          <a:fontRef idx="minor">
-            <a:schemeClr val="tx1"/>
-          </a:fontRef>
-        </p:style>
-      </p:cxnSp>
-      <p:sp>
-        <p:nvSpPr>
-          <p:cNvPr id="18" name="TextBox 17"/>
-          <p:cNvSpPr txBox="1"/>
-          <p:nvPr/>
-        </p:nvSpPr>
-        <p:spPr>
-          <a:xfrm>
-            <a:off x="6053328" y="3319272"/>
-            <a:ext cx="1645920" cy="320040"/>
-          </a:xfrm>
-          <a:prstGeom prst="rect">
-            <a:avLst/>
-          </a:prstGeom>
-          <a:noFill/>
-        </p:spPr>
-        <p:txBody>
-          <a:bodyPr wrap="square">
-            <a:spAutoFit/>
-          </a:bodyPr>
-          <a:lstStyle/>
-          <a:p>
-            <a:pPr algn="l"/>
-            <a:r>
-              <a:rPr sz="1000" b="0" i="1">
-                <a:solidFill>
-                  <a:srgbClr val="666666"/>
-                </a:solidFill>
-                <a:latin typeface="Calibri"/>
-              </a:rPr>
-              <a:t>evento/cola (AMQP)</a:t>
-            </a:r>
-          </a:p>
-        </p:txBody>
-      </p:sp>
-      <p:sp>
-        <p:nvSpPr>
-          <p:cNvPr id="19" name="TextBox 18"/>
-          <p:cNvSpPr txBox="1"/>
-          <p:nvPr/>
-        </p:nvSpPr>
-        <p:spPr>
-          <a:xfrm>
-            <a:off x="457200" y="6263640"/>
-            <a:ext cx="11277295" cy="411480"/>
-          </a:xfrm>
-          <a:prstGeom prst="rect">
-            <a:avLst/>
-          </a:prstGeom>
-          <a:noFill/>
-        </p:spPr>
-        <p:txBody>
-          <a:bodyPr wrap="square">
-            <a:spAutoFit/>
-          </a:bodyPr>
-          <a:lstStyle/>
-          <a:p>
-            <a:r>
-              <a:rPr sz="1100" b="0" i="1">
-                <a:solidFill>
-                  <a:srgbClr val="666666"/>
-                </a:solidFill>
-                <a:latin typeface="Calibri"/>
-              </a:rPr>
-              <a:t>Lo que guarda datos va como ContainerDb, no como un Container más. La cuarta caja (el worker) existe porque el correo tarda: sin esa razón, no va. Y estos nombres deben reaparecer igual en el Deployment (Clase 7).</a:t>
-            </a:r>
-          </a:p>
-        </p:txBody>
-      </p:sp>
-      <p:sp>
-        <p:nvSpPr>
-          <p:cNvPr id="20" name="TextBox 19"/>
+            <a:pPr>
+              <a:spcAft>
+                <a:spcPts val="800"/>
+              </a:spcAft>
+            </a:pPr>
+            <a:r>
+              <a:rPr sz="2000" b="0" i="0">
+                <a:solidFill>
+                  <a:srgbClr val="333333"/>
+                </a:solidFill>
+                <a:latin typeface="Calibri"/>
+              </a:rPr>
+              <a:t>–   En el ejemplo, el turno se escribe en la base y despues se publica el mensaje del correo: si el segundo paso falla, el turno existe y el cliente nunca se entero.</a:t>
+            </a:r>
+          </a:p>
+          <a:p>
+            <a:pPr>
+              <a:spcAft>
+                <a:spcPts val="800"/>
+              </a:spcAft>
+            </a:pPr>
+            <a:r>
+              <a:rPr sz="2000" b="0" i="0">
+                <a:solidFill>
+                  <a:srgbClr val="333333"/>
+                </a:solidFill>
+                <a:latin typeface="Calibri"/>
+              </a:rPr>
+              <a:t>–   Ese es el problema de fondo de todo sistema distribuido, y hoy no se resuelve con una saga completa: se reconoce, se nombra el dato concreto y se dice que queda inconsistente.</a:t>
+            </a:r>
+          </a:p>
+          <a:p>
+            <a:pPr>
+              <a:spcAft>
+                <a:spcPts val="800"/>
+              </a:spcAft>
+            </a:pPr>
+            <a:r>
+              <a:rPr sz="2000" b="0" i="0">
+                <a:solidFill>
+                  <a:srgbClr val="333333"/>
+                </a:solidFill>
+                <a:latin typeface="Calibri"/>
+              </a:rPr>
+              <a:t>–   Si un estudiante dice que no encuentra ningun riesgo, casi siempre es porque su diagrama tiene flechas sin protocolo o sin formato: no sabe por donde puede romperse porque nunca definio como se comunican las piezas.</a:t>
+            </a:r>
+          </a:p>
+          <a:p>
+            <a:pPr>
+              <a:spcAft>
+                <a:spcPts val="800"/>
+              </a:spcAft>
+            </a:pPr>
+            <a:r>
+              <a:rPr sz="2000" b="0" i="0">
+                <a:solidFill>
+                  <a:srgbClr val="333333"/>
+                </a:solidFill>
+                <a:latin typeface="Calibri"/>
+              </a:rPr>
+              <a:t>–   Devolverle el diagrama es mas util que darle un ejemplo.</a:t>
+            </a:r>
+          </a:p>
+        </p:txBody>
+      </p:sp>
+      <p:sp>
+        <p:nvSpPr>
+          <p:cNvPr id="6" name="TextBox 5"/>
           <p:cNvSpPr txBox="1"/>
           <p:nvPr/>
         </p:nvSpPr>
@@ -11030,142 +10014,21 @@
                 </a:solidFill>
                 <a:latin typeface="Calibri"/>
               </a:rPr>
-              <a:t>Microservicios de verdad vs microservicios teatro</a:t>
-            </a:r>
-          </a:p>
-        </p:txBody>
-      </p:sp>
-      <p:sp>
-        <p:nvSpPr>
-          <p:cNvPr id="5" name="Rounded Rectangle 4"/>
-          <p:cNvSpPr/>
-          <p:nvPr/>
-        </p:nvSpPr>
-        <p:spPr>
-          <a:xfrm>
-            <a:off x="457200" y="1261872"/>
-            <a:ext cx="5478627" cy="5093208"/>
-          </a:xfrm>
-          <a:prstGeom prst="roundRect">
-            <a:avLst>
-              <a:gd name="adj" fmla="val 12000"/>
-            </a:avLst>
-          </a:prstGeom>
-          <a:solidFill>
-            <a:srgbClr val="FBE4E4"/>
-          </a:solidFill>
-          <a:ln>
-            <a:noFill/>
-          </a:ln>
-        </p:spPr>
-        <p:style>
-          <a:lnRef idx="1">
-            <a:schemeClr val="accent1"/>
-          </a:lnRef>
-          <a:fillRef idx="3">
-            <a:schemeClr val="accent1"/>
-          </a:fillRef>
-          <a:effectRef idx="2">
-            <a:schemeClr val="accent1"/>
-          </a:effectRef>
-          <a:fontRef idx="minor">
-            <a:schemeClr val="lt1"/>
-          </a:fontRef>
-        </p:style>
-        <p:txBody>
-          <a:bodyPr rtlCol="0" anchor="ctr"/>
-          <a:lstStyle/>
-          <a:p>
-            <a:pPr algn="ctr"/>
-          </a:p>
-        </p:txBody>
-      </p:sp>
-      <p:sp>
-        <p:nvSpPr>
-          <p:cNvPr id="6" name="Rectangle 5"/>
-          <p:cNvSpPr/>
-          <p:nvPr/>
-        </p:nvSpPr>
-        <p:spPr>
-          <a:xfrm>
-            <a:off x="457200" y="1261872"/>
-            <a:ext cx="5478627" cy="502920"/>
-          </a:xfrm>
-          <a:prstGeom prst="rect">
-            <a:avLst/>
-          </a:prstGeom>
-          <a:solidFill>
-            <a:srgbClr val="A02030"/>
-          </a:solidFill>
-          <a:ln>
-            <a:noFill/>
-          </a:ln>
-        </p:spPr>
-        <p:style>
-          <a:lnRef idx="1">
-            <a:schemeClr val="accent1"/>
-          </a:lnRef>
-          <a:fillRef idx="3">
-            <a:schemeClr val="accent1"/>
-          </a:fillRef>
-          <a:effectRef idx="2">
-            <a:schemeClr val="accent1"/>
-          </a:effectRef>
-          <a:fontRef idx="minor">
-            <a:schemeClr val="lt1"/>
-          </a:fontRef>
-        </p:style>
-        <p:txBody>
-          <a:bodyPr rtlCol="0" anchor="ctr"/>
-          <a:lstStyle/>
-          <a:p>
-            <a:pPr algn="ctr"/>
-          </a:p>
-        </p:txBody>
-      </p:sp>
-      <p:sp>
-        <p:nvSpPr>
-          <p:cNvPr id="7" name="TextBox 6"/>
+              <a:t>Preguntas frecuentes y cierre conceptual () (1/3)</a:t>
+            </a:r>
+          </a:p>
+        </p:txBody>
+      </p:sp>
+      <p:sp>
+        <p:nvSpPr>
+          <p:cNvPr id="5" name="TextBox 4"/>
           <p:cNvSpPr txBox="1"/>
           <p:nvPr/>
         </p:nvSpPr>
         <p:spPr>
           <a:xfrm>
-            <a:off x="594360" y="1353312"/>
-            <a:ext cx="5204307" cy="365760"/>
-          </a:xfrm>
-          <a:prstGeom prst="rect">
-            <a:avLst/>
-          </a:prstGeom>
-          <a:noFill/>
-        </p:spPr>
-        <p:txBody>
-          <a:bodyPr wrap="square" anchor="ctr"/>
-          <a:lstStyle/>
-          <a:p>
-            <a:pPr algn="ctr"/>
-            <a:r>
-              <a:rPr sz="1600" b="1" i="0">
-                <a:solidFill>
-                  <a:srgbClr val="FFFFFF"/>
-                </a:solidFill>
-                <a:latin typeface="Calibri"/>
-              </a:rPr>
-              <a:t>Teatro (lo que NO queremos)</a:t>
-            </a:r>
-          </a:p>
-        </p:txBody>
-      </p:sp>
-      <p:sp>
-        <p:nvSpPr>
-          <p:cNvPr id="8" name="TextBox 7"/>
-          <p:cNvSpPr txBox="1"/>
-          <p:nvPr/>
-        </p:nvSpPr>
-        <p:spPr>
-          <a:xfrm>
-            <a:off x="621792" y="1901952"/>
-            <a:ext cx="5158587" cy="4498848"/>
+            <a:off x="457200" y="1170432"/>
+            <a:ext cx="11277295" cy="5230368"/>
           </a:xfrm>
           <a:prstGeom prst="rect">
             <a:avLst/>
@@ -11184,13 +10047,13 @@
               </a:spcAft>
             </a:pPr>
             <a:r>
-              <a:rPr sz="1500" b="0" i="0">
-                <a:solidFill>
-                  <a:srgbClr val="333333"/>
-                </a:solidFill>
-                <a:latin typeface="Calibri"/>
-              </a:rPr>
-              <a:t>–   12 servicios para un equipo de 3</a:t>
+              <a:rPr sz="2000" b="0" i="0">
+                <a:solidFill>
+                  <a:srgbClr val="333333"/>
+                </a:solidFill>
+                <a:latin typeface="Calibri"/>
+              </a:rPr>
+              <a:t>–   Las preguntas de esta clase son predecibles y conviene responderlas con firmeza.</a:t>
             </a:r>
           </a:p>
           <a:p>
@@ -11200,13 +10063,13 @@
               </a:spcAft>
             </a:pPr>
             <a:r>
-              <a:rPr sz="1500" b="0" i="0">
-                <a:solidFill>
-                  <a:srgbClr val="333333"/>
-                </a:solidFill>
-                <a:latin typeface="Calibri"/>
-              </a:rPr>
-              <a:t>–   Se separan por capricho tecnico, no por negocio</a:t>
+              <a:rPr sz="2000" b="0" i="0">
+                <a:solidFill>
+                  <a:srgbClr val="333333"/>
+                </a:solidFill>
+                <a:latin typeface="Calibri"/>
+              </a:rPr>
+              <a:t>–   Cuantos microservicios son los correctos: no hay numero correcto, hay justificacion por frontera</a:t>
             </a:r>
           </a:p>
           <a:p>
@@ -11216,13 +10079,13 @@
               </a:spcAft>
             </a:pPr>
             <a:r>
-              <a:rPr sz="1500" b="0" i="0">
-                <a:solidFill>
-                  <a:srgbClr val="333333"/>
-                </a:solidFill>
-                <a:latin typeface="Calibri"/>
-              </a:rPr>
-              <a:t>–   Flechas sin protocolo ni verbo</a:t>
+              <a:rPr sz="2000" b="0" i="0">
+                <a:solidFill>
+                  <a:srgbClr val="333333"/>
+                </a:solidFill>
+                <a:latin typeface="Calibri"/>
+              </a:rPr>
+              <a:t>–   Y el rango de dos a cinco contenedores que exige el curso es una restriccion pedagogica pensada para proyectos de una a tres personas en doce semanas, no un hallazgo de la ingenieria.</a:t>
             </a:r>
           </a:p>
           <a:p>
@@ -11232,228 +10095,20 @@
               </a:spcAft>
             </a:pPr>
             <a:r>
-              <a:rPr sz="1500" b="0" i="0">
-                <a:solidFill>
-                  <a:srgbClr val="333333"/>
-                </a:solidFill>
-                <a:latin typeface="Calibri"/>
-              </a:rPr>
-              <a:t>–   Nadie sabe explicar por que ese corte</a:t>
-            </a:r>
-          </a:p>
-        </p:txBody>
-      </p:sp>
-      <p:sp>
-        <p:nvSpPr>
-          <p:cNvPr id="9" name="Rounded Rectangle 8"/>
-          <p:cNvSpPr/>
-          <p:nvPr/>
-        </p:nvSpPr>
-        <p:spPr>
-          <a:xfrm>
-            <a:off x="6255867" y="1261872"/>
-            <a:ext cx="5478627" cy="5093208"/>
-          </a:xfrm>
-          <a:prstGeom prst="roundRect">
-            <a:avLst>
-              <a:gd name="adj" fmla="val 12000"/>
-            </a:avLst>
-          </a:prstGeom>
-          <a:solidFill>
-            <a:srgbClr val="E8F4FA"/>
-          </a:solidFill>
-          <a:ln>
-            <a:noFill/>
-          </a:ln>
-        </p:spPr>
-        <p:style>
-          <a:lnRef idx="1">
-            <a:schemeClr val="accent1"/>
-          </a:lnRef>
-          <a:fillRef idx="3">
-            <a:schemeClr val="accent1"/>
-          </a:fillRef>
-          <a:effectRef idx="2">
-            <a:schemeClr val="accent1"/>
-          </a:effectRef>
-          <a:fontRef idx="minor">
-            <a:schemeClr val="lt1"/>
-          </a:fontRef>
-        </p:style>
-        <p:txBody>
-          <a:bodyPr rtlCol="0" anchor="ctr"/>
-          <a:lstStyle/>
-          <a:p>
-            <a:pPr algn="ctr"/>
-          </a:p>
-        </p:txBody>
-      </p:sp>
-      <p:sp>
-        <p:nvSpPr>
-          <p:cNvPr id="10" name="Rectangle 9"/>
-          <p:cNvSpPr/>
-          <p:nvPr/>
-        </p:nvSpPr>
-        <p:spPr>
-          <a:xfrm>
-            <a:off x="6255867" y="1261872"/>
-            <a:ext cx="5478627" cy="502920"/>
-          </a:xfrm>
-          <a:prstGeom prst="rect">
-            <a:avLst/>
-          </a:prstGeom>
-          <a:solidFill>
-            <a:srgbClr val="095292"/>
-          </a:solidFill>
-          <a:ln>
-            <a:noFill/>
-          </a:ln>
-        </p:spPr>
-        <p:style>
-          <a:lnRef idx="1">
-            <a:schemeClr val="accent1"/>
-          </a:lnRef>
-          <a:fillRef idx="3">
-            <a:schemeClr val="accent1"/>
-          </a:fillRef>
-          <a:effectRef idx="2">
-            <a:schemeClr val="accent1"/>
-          </a:effectRef>
-          <a:fontRef idx="minor">
-            <a:schemeClr val="lt1"/>
-          </a:fontRef>
-        </p:style>
-        <p:txBody>
-          <a:bodyPr rtlCol="0" anchor="ctr"/>
-          <a:lstStyle/>
-          <a:p>
-            <a:pPr algn="ctr"/>
-          </a:p>
-        </p:txBody>
-      </p:sp>
-      <p:sp>
-        <p:nvSpPr>
-          <p:cNvPr id="11" name="TextBox 10"/>
-          <p:cNvSpPr txBox="1"/>
-          <p:nvPr/>
-        </p:nvSpPr>
-        <p:spPr>
-          <a:xfrm>
-            <a:off x="6393027" y="1353312"/>
-            <a:ext cx="5204307" cy="365760"/>
-          </a:xfrm>
-          <a:prstGeom prst="rect">
-            <a:avLst/>
-          </a:prstGeom>
-          <a:noFill/>
-        </p:spPr>
-        <p:txBody>
-          <a:bodyPr wrap="square" anchor="ctr"/>
-          <a:lstStyle/>
-          <a:p>
-            <a:pPr algn="ctr"/>
-            <a:r>
-              <a:rPr sz="1600" b="1" i="0">
-                <a:solidFill>
-                  <a:srgbClr val="FFFFFF"/>
-                </a:solidFill>
-                <a:latin typeface="Calibri"/>
-              </a:rPr>
-              <a:t>Frontera justificada</a:t>
-            </a:r>
-          </a:p>
-        </p:txBody>
-      </p:sp>
-      <p:sp>
-        <p:nvSpPr>
-          <p:cNvPr id="12" name="TextBox 11"/>
-          <p:cNvSpPr txBox="1"/>
-          <p:nvPr/>
-        </p:nvSpPr>
-        <p:spPr>
-          <a:xfrm>
-            <a:off x="6420459" y="1901952"/>
-            <a:ext cx="5158587" cy="4498848"/>
-          </a:xfrm>
-          <a:prstGeom prst="rect">
-            <a:avLst/>
-          </a:prstGeom>
-          <a:noFill/>
-        </p:spPr>
-        <p:txBody>
-          <a:bodyPr wrap="square">
-            <a:spAutoFit/>
-          </a:bodyPr>
-          <a:lstStyle/>
-          <a:p>
-            <a:pPr>
-              <a:spcAft>
-                <a:spcPts val="800"/>
-              </a:spcAft>
-            </a:pPr>
-            <a:r>
-              <a:rPr sz="1500" b="0" i="0">
-                <a:solidFill>
-                  <a:srgbClr val="333333"/>
-                </a:solidFill>
-                <a:latin typeface="Calibri"/>
-              </a:rPr>
-              <a:t>–   2-5 contenedores logicos, cada uno con su razon</a:t>
-            </a:r>
-          </a:p>
-          <a:p>
-            <a:pPr>
-              <a:spcAft>
-                <a:spcPts val="800"/>
-              </a:spcAft>
-            </a:pPr>
-            <a:r>
-              <a:rPr sz="1500" b="0" i="0">
-                <a:solidFill>
-                  <a:srgbClr val="333333"/>
-                </a:solidFill>
-                <a:latin typeface="Calibri"/>
-              </a:rPr>
-              <a:t>–   Frontera = responsabilidad de negocio</a:t>
-            </a:r>
-          </a:p>
-          <a:p>
-            <a:pPr>
-              <a:spcAft>
-                <a:spcPts val="800"/>
-              </a:spcAft>
-            </a:pPr>
-            <a:r>
-              <a:rPr sz="1500" b="0" i="0">
-                <a:solidFill>
-                  <a:srgbClr val="333333"/>
-                </a:solidFill>
-                <a:latin typeface="Calibri"/>
-              </a:rPr>
-              <a:t>–   Cada flecha: protocolo + verbo (HTTP/JSON, 'reserva')</a:t>
-            </a:r>
-          </a:p>
-          <a:p>
-            <a:pPr>
-              <a:spcAft>
-                <a:spcPts val="800"/>
-              </a:spcAft>
-            </a:pPr>
-            <a:r>
-              <a:rPr sz="1500" b="0" i="0">
-                <a:solidFill>
-                  <a:srgbClr val="333333"/>
-                </a:solidFill>
-                <a:latin typeface="Calibri"/>
-              </a:rPr>
-              <a:t>–   Se explica en 60 s sin leer notas</a:t>
-            </a:r>
-          </a:p>
-        </p:txBody>
-      </p:sp>
-      <p:sp>
-        <p:nvSpPr>
-          <p:cNvPr id="13" name="TextBox 12"/>
+              <a:rPr sz="2000" b="0" i="0">
+                <a:solidFill>
+                  <a:srgbClr val="333333"/>
+                </a:solidFill>
+                <a:latin typeface="Calibri"/>
+              </a:rPr>
+              <a:t>–   Si las empresas grandes tienen cientos de servicios, por que nosotros solo tres: porque el numero de servicios que una organizacion puede sostener es funcion del numero de equipos autonomos y de la madurez de su automatizacion de despliegue y observabilidad</a:t>
+            </a:r>
+          </a:p>
+        </p:txBody>
+      </p:sp>
+      <p:sp>
+        <p:nvSpPr>
+          <p:cNvPr id="6" name="TextBox 5"/>
           <p:cNvSpPr txBox="1"/>
           <p:nvPr/>
         </p:nvSpPr>
@@ -11627,141 +10282,21 @@
                 </a:solidFill>
                 <a:latin typeface="Calibri"/>
               </a:rPr>
-              <a:t>C4Container en Mermaid: el molde que la plataforma del curso renderiza</a:t>
-            </a:r>
-          </a:p>
-        </p:txBody>
-      </p:sp>
-      <p:sp>
-        <p:nvSpPr>
-          <p:cNvPr id="5" name="Rounded Rectangle 4"/>
-          <p:cNvSpPr/>
-          <p:nvPr/>
-        </p:nvSpPr>
-        <p:spPr>
-          <a:xfrm>
-            <a:off x="457200" y="1261872"/>
-            <a:ext cx="11277295" cy="4773168"/>
-          </a:xfrm>
-          <a:prstGeom prst="roundRect">
-            <a:avLst>
-              <a:gd name="adj" fmla="val 12000"/>
-            </a:avLst>
-          </a:prstGeom>
-          <a:solidFill>
-            <a:srgbClr val="1E2A38"/>
-          </a:solidFill>
-          <a:ln>
-            <a:noFill/>
-          </a:ln>
-        </p:spPr>
-        <p:style>
-          <a:lnRef idx="1">
-            <a:schemeClr val="accent1"/>
-          </a:lnRef>
-          <a:fillRef idx="3">
-            <a:schemeClr val="accent1"/>
-          </a:fillRef>
-          <a:effectRef idx="2">
-            <a:schemeClr val="accent1"/>
-          </a:effectRef>
-          <a:fontRef idx="minor">
-            <a:schemeClr val="lt1"/>
-          </a:fontRef>
-        </p:style>
-        <p:txBody>
-          <a:bodyPr rtlCol="0" anchor="ctr"/>
-          <a:lstStyle/>
-          <a:p>
-            <a:pPr algn="ctr"/>
-          </a:p>
-        </p:txBody>
-      </p:sp>
-      <p:sp>
-        <p:nvSpPr>
-          <p:cNvPr id="6" name="Rectangle 5"/>
-          <p:cNvSpPr/>
-          <p:nvPr/>
-        </p:nvSpPr>
-        <p:spPr>
-          <a:xfrm>
-            <a:off x="457200" y="1261872"/>
-            <a:ext cx="11277295" cy="320040"/>
-          </a:xfrm>
-          <a:prstGeom prst="rect">
-            <a:avLst/>
-          </a:prstGeom>
-          <a:solidFill>
-            <a:srgbClr val="095292"/>
-          </a:solidFill>
-          <a:ln>
-            <a:noFill/>
-          </a:ln>
-        </p:spPr>
-        <p:style>
-          <a:lnRef idx="1">
-            <a:schemeClr val="accent1"/>
-          </a:lnRef>
-          <a:fillRef idx="3">
-            <a:schemeClr val="accent1"/>
-          </a:fillRef>
-          <a:effectRef idx="2">
-            <a:schemeClr val="accent1"/>
-          </a:effectRef>
-          <a:fontRef idx="minor">
-            <a:schemeClr val="lt1"/>
-          </a:fontRef>
-        </p:style>
-        <p:txBody>
-          <a:bodyPr rtlCol="0" anchor="ctr"/>
-          <a:lstStyle/>
-          <a:p>
-            <a:pPr algn="ctr"/>
-          </a:p>
-        </p:txBody>
-      </p:sp>
-      <p:sp>
-        <p:nvSpPr>
-          <p:cNvPr id="7" name="TextBox 6"/>
+              <a:t>Preguntas frecuentes y cierre conceptual () (2/3)</a:t>
+            </a:r>
+          </a:p>
+        </p:txBody>
+      </p:sp>
+      <p:sp>
+        <p:nvSpPr>
+          <p:cNvPr id="5" name="TextBox 4"/>
           <p:cNvSpPr txBox="1"/>
           <p:nvPr/>
         </p:nvSpPr>
         <p:spPr>
           <a:xfrm>
-            <a:off x="685800" y="1307592"/>
-            <a:ext cx="10820095" cy="256032"/>
-          </a:xfrm>
-          <a:prstGeom prst="rect">
-            <a:avLst/>
-          </a:prstGeom>
-          <a:noFill/>
-        </p:spPr>
-        <p:txBody>
-          <a:bodyPr wrap="square" anchor="ctr"/>
-          <a:lstStyle/>
-          <a:p>
-            <a:r>
-              <a:rPr sz="1000" b="1" i="0">
-                <a:solidFill>
-                  <a:srgbClr val="269CCB"/>
-                </a:solidFill>
-                <a:latin typeface="Calibri"/>
-              </a:rPr>
-              <a:t>● ● ●</a:t>
-            </a:r>
-          </a:p>
-        </p:txBody>
-      </p:sp>
-      <p:sp>
-        <p:nvSpPr>
-          <p:cNvPr id="8" name="TextBox 7"/>
-          <p:cNvSpPr txBox="1"/>
-          <p:nvPr/>
-        </p:nvSpPr>
-        <p:spPr>
-          <a:xfrm>
-            <a:off x="777240" y="1719072"/>
-            <a:ext cx="10637215" cy="4133087"/>
+            <a:off x="457200" y="1170432"/>
+            <a:ext cx="11277295" cy="5230368"/>
           </a:xfrm>
           <a:prstGeom prst="rect">
             <a:avLst/>
@@ -11776,283 +10311,88 @@
           <a:p>
             <a:pPr>
               <a:spcAft>
-                <a:spcPts val="400"/>
+                <a:spcPts val="800"/>
               </a:spcAft>
             </a:pPr>
             <a:r>
-              <a:rPr sz="1400" b="0" i="0">
-                <a:solidFill>
-                  <a:srgbClr val="FFFFFF"/>
-                </a:solidFill>
-                <a:latin typeface="Calibri"/>
-              </a:rPr>
-              <a:t>C4Container</a:t>
+              <a:rPr sz="2000" b="0" i="0">
+                <a:solidFill>
+                  <a:srgbClr val="333333"/>
+                </a:solidFill>
+                <a:latin typeface="Calibri"/>
+              </a:rPr>
+              <a:t>–   Condiciones que un equipo de tres no tiene, y copiar la forma sin las condiciones produce lo que aqui se llama microservicios teatro.</a:t>
             </a:r>
           </a:p>
           <a:p>
             <a:pPr>
               <a:spcAft>
-                <a:spcPts val="400"/>
+                <a:spcPts val="800"/>
               </a:spcAft>
             </a:pPr>
             <a:r>
-              <a:rPr sz="1400" b="0" i="0">
-                <a:solidFill>
-                  <a:srgbClr val="FFFFFF"/>
-                </a:solidFill>
-                <a:latin typeface="Calibri"/>
-              </a:rPr>
-              <a:t>title Diagrama de contenedores - CloudLite Turnos</a:t>
+              <a:rPr sz="2000" b="0" i="0">
+                <a:solidFill>
+                  <a:srgbClr val="333333"/>
+                </a:solidFill>
+                <a:latin typeface="Calibri"/>
+              </a:rPr>
+              <a:t>–   Y la tercera, que hay que responder sin ambiguedad: esta mal hacer un monolito.</a:t>
             </a:r>
           </a:p>
           <a:p>
             <a:pPr>
               <a:spcAft>
-                <a:spcPts val="400"/>
+                <a:spcPts val="800"/>
               </a:spcAft>
             </a:pPr>
             <a:r>
-              <a:rPr sz="1400" b="0" i="0">
-                <a:solidFill>
-                  <a:srgbClr val="FFFFFF"/>
-                </a:solidFill>
-                <a:latin typeface="Calibri"/>
-              </a:rPr>
-              <a:t>Person(cliente, "Cliente de la barberia", "Reserva y consulta sus turnos")</a:t>
+              <a:rPr sz="2000" b="0" i="0">
+                <a:solidFill>
+                  <a:srgbClr val="333333"/>
+                </a:solidFill>
+                <a:latin typeface="Calibri"/>
+              </a:rPr>
+              <a:t>–   Error tipico del docente que no domina el tema: aplaudir un diagrama con ocho microservicios sin preguntar por que existe cada uno.</a:t>
             </a:r>
           </a:p>
           <a:p>
             <a:pPr>
               <a:spcAft>
-                <a:spcPts val="400"/>
+                <a:spcPts val="800"/>
               </a:spcAft>
             </a:pPr>
             <a:r>
-              <a:rPr sz="1400" b="0" i="0">
-                <a:solidFill>
-                  <a:srgbClr val="FFFFFF"/>
-                </a:solidFill>
-                <a:latin typeface="Calibri"/>
-              </a:rPr>
-              <a:t>System_Boundary(cloudlite, "CloudLite App") {</a:t>
+              <a:rPr sz="2000" b="0" i="0">
+                <a:solidFill>
+                  <a:srgbClr val="333333"/>
+                </a:solidFill>
+                <a:latin typeface="Calibri"/>
+              </a:rPr>
+              <a:t>–   La consecuencia aguas abajo es que ese estudiante llega a la Clase 7 con ocho cajas que no puede ubicar en zonas de red</a:t>
             </a:r>
           </a:p>
           <a:p>
             <a:pPr>
               <a:spcAft>
-                <a:spcPts val="400"/>
+                <a:spcPts val="800"/>
               </a:spcAft>
             </a:pPr>
             <a:r>
-              <a:rPr sz="1400" b="0" i="0">
-                <a:solidFill>
-                  <a:srgbClr val="FFFFFF"/>
-                </a:solidFill>
-                <a:latin typeface="Calibri"/>
-              </a:rPr>
-              <a:t>  Container(spa, "App web", "React", "Muestra franjas libres y crea la reserva")</a:t>
-            </a:r>
-          </a:p>
-          <a:p>
-            <a:pPr>
-              <a:spcAft>
-                <a:spcPts val="400"/>
-              </a:spcAft>
-            </a:pPr>
-            <a:r>
-              <a:rPr sz="1400" b="0" i="0">
-                <a:solidFill>
-                  <a:srgbClr val="FFFFFF"/>
-                </a:solidFill>
-                <a:latin typeface="Calibri"/>
-              </a:rPr>
-              <a:t>  Container(api, "API de turnos", "Node.js", "Valida la franja y registra el turno")</a:t>
-            </a:r>
-          </a:p>
-          <a:p>
-            <a:pPr>
-              <a:spcAft>
-                <a:spcPts val="400"/>
-              </a:spcAft>
-            </a:pPr>
-            <a:r>
-              <a:rPr sz="1400" b="0" i="0">
-                <a:solidFill>
-                  <a:srgbClr val="FFFFFF"/>
-                </a:solidFill>
-                <a:latin typeface="Calibri"/>
-              </a:rPr>
-              <a:t>  ContainerDb(db, "Base de turnos", "PostgreSQL", "Turnos, clientes y horarios")</a:t>
-            </a:r>
-          </a:p>
-          <a:p>
-            <a:pPr>
-              <a:spcAft>
-                <a:spcPts val="400"/>
-              </a:spcAft>
-            </a:pPr>
-            <a:r>
-              <a:rPr sz="1400" b="0" i="0">
-                <a:solidFill>
-                  <a:srgbClr val="FFFFFF"/>
-                </a:solidFill>
-                <a:latin typeface="Calibri"/>
-              </a:rPr>
-              <a:t>  Container(worker, "Worker de avisos", "cola", "Envia el aviso, con reintentos")</a:t>
-            </a:r>
-          </a:p>
-          <a:p>
-            <a:pPr>
-              <a:spcAft>
-                <a:spcPts val="400"/>
-              </a:spcAft>
-            </a:pPr>
-            <a:r>
-              <a:rPr sz="1400" b="0" i="0">
-                <a:solidFill>
-                  <a:srgbClr val="FFFFFF"/>
-                </a:solidFill>
-                <a:latin typeface="Calibri"/>
-              </a:rPr>
-              <a:t>}</a:t>
-            </a:r>
-          </a:p>
-          <a:p>
-            <a:pPr>
-              <a:spcAft>
-                <a:spcPts val="400"/>
-              </a:spcAft>
-            </a:pPr>
-            <a:r>
-              <a:rPr sz="1400" b="0" i="0">
-                <a:solidFill>
-                  <a:srgbClr val="FFFFFF"/>
-                </a:solidFill>
-                <a:latin typeface="Calibri"/>
-              </a:rPr>
-              <a:t>System_Ext(correo, "Correo transaccional", "Entrega el correo al cliente")</a:t>
-            </a:r>
-          </a:p>
-          <a:p>
-            <a:pPr>
-              <a:spcAft>
-                <a:spcPts val="400"/>
-              </a:spcAft>
-            </a:pPr>
-            <a:r>
-              <a:rPr sz="1400" b="0" i="0">
-                <a:solidFill>
-                  <a:srgbClr val="FFFFFF"/>
-                </a:solidFill>
-                <a:latin typeface="Calibri"/>
-              </a:rPr>
-              <a:t>Rel(cliente, spa, "Reserva un turno", "HTTPS")</a:t>
-            </a:r>
-          </a:p>
-          <a:p>
-            <a:pPr>
-              <a:spcAft>
-                <a:spcPts val="400"/>
-              </a:spcAft>
-            </a:pPr>
-            <a:r>
-              <a:rPr sz="1400" b="0" i="0">
-                <a:solidFill>
-                  <a:srgbClr val="FFFFFF"/>
-                </a:solidFill>
-                <a:latin typeface="Calibri"/>
-              </a:rPr>
-              <a:t>Rel(spa, api, "POST /turnos", "HTTPS/JSON")</a:t>
-            </a:r>
-          </a:p>
-          <a:p>
-            <a:pPr>
-              <a:spcAft>
-                <a:spcPts val="400"/>
-              </a:spcAft>
-            </a:pPr>
-            <a:r>
-              <a:rPr sz="1400" b="0" i="0">
-                <a:solidFill>
-                  <a:srgbClr val="FFFFFF"/>
-                </a:solidFill>
-                <a:latin typeface="Calibri"/>
-              </a:rPr>
-              <a:t>Rel(api, db, "INSERT / SELECT de turnos", "TCP/SQL")</a:t>
-            </a:r>
-          </a:p>
-          <a:p>
-            <a:pPr>
-              <a:spcAft>
-                <a:spcPts val="400"/>
-              </a:spcAft>
-            </a:pPr>
-            <a:r>
-              <a:rPr sz="1400" b="0" i="0">
-                <a:solidFill>
-                  <a:srgbClr val="FFFFFF"/>
-                </a:solidFill>
-                <a:latin typeface="Calibri"/>
-              </a:rPr>
-              <a:t>Rel(api, worker, "Publica aviso-de-turno", "evento/cola (AMQP)")</a:t>
-            </a:r>
-          </a:p>
-          <a:p>
-            <a:pPr>
-              <a:spcAft>
-                <a:spcPts val="400"/>
-              </a:spcAft>
-            </a:pPr>
-            <a:r>
-              <a:rPr sz="1400" b="0" i="0">
-                <a:solidFill>
-                  <a:srgbClr val="FFFFFF"/>
-                </a:solidFill>
-                <a:latin typeface="Calibri"/>
-              </a:rPr>
-              <a:t>Rel(worker, correo, "Envia la confirmacion", "API REST sobre HTTPS")</a:t>
-            </a:r>
-          </a:p>
-        </p:txBody>
-      </p:sp>
-      <p:sp>
-        <p:nvSpPr>
-          <p:cNvPr id="9" name="TextBox 8"/>
-          <p:cNvSpPr txBox="1"/>
-          <p:nvPr/>
-        </p:nvSpPr>
-        <p:spPr>
-          <a:xfrm>
-            <a:off x="457200" y="6080760"/>
-            <a:ext cx="11277295" cy="320040"/>
-          </a:xfrm>
-          <a:prstGeom prst="rect">
-            <a:avLst/>
-          </a:prstGeom>
-          <a:noFill/>
-        </p:spPr>
-        <p:txBody>
-          <a:bodyPr wrap="square">
-            <a:spAutoFit/>
-          </a:bodyPr>
-          <a:lstStyle/>
-          <a:p>
-            <a:pPr algn="ctr"/>
-            <a:r>
-              <a:rPr sz="1200" b="0" i="1">
-                <a:solidFill>
-                  <a:srgbClr val="666666"/>
-                </a:solidFill>
-                <a:latin typeface="Calibri"/>
-              </a:rPr>
-              <a:t>La base va como «ContainerDb» y cada «Rel» lleva protocolo Y formato. Los externos, FUERA del «System_Boundary».</a:t>
-            </a:r>
-          </a:p>
-        </p:txBody>
-      </p:sp>
-      <p:sp>
-        <p:nvSpPr>
-          <p:cNvPr id="10" name="TextBox 9"/>
+              <a:rPr sz="2000" b="0" i="0">
+                <a:solidFill>
+                  <a:srgbClr val="333333"/>
+                </a:solidFill>
+                <a:latin typeface="Calibri"/>
+              </a:rPr>
+              <a:t>–   A la Clase 8 con ocho pipelines que nunca construira y a la Clase 12 sin poder identificar un cuello de botella, porque no entiende el flujo de su propio sistema.</a:t>
+            </a:r>
+          </a:p>
+        </p:txBody>
+      </p:sp>
+      <p:sp>
+        <p:nvSpPr>
+          <p:cNvPr id="6" name="TextBox 5"/>
           <p:cNvSpPr txBox="1"/>
           <p:nvPr/>
         </p:nvSpPr>
@@ -12120,7 +10460,7 @@
         <p:spPr>
           <a:xfrm>
             <a:off x="0" y="0"/>
-            <a:ext cx="12191695" cy="1170432"/>
+            <a:ext cx="12191695" cy="960120"/>
           </a:xfrm>
           <a:prstGeom prst="rect">
             <a:avLst/>
@@ -12162,7 +10502,7 @@
         </p:nvSpPr>
         <p:spPr>
           <a:xfrm>
-            <a:off x="0" y="1170432"/>
+            <a:off x="0" y="960120"/>
             <a:ext cx="12191695" cy="41148"/>
           </a:xfrm>
           <a:prstGeom prst="rect">
@@ -12206,7 +10546,7 @@
         <p:spPr>
           <a:xfrm>
             <a:off x="457200" y="164592"/>
-            <a:ext cx="11277295" cy="384048"/>
+            <a:ext cx="11277295" cy="502920"/>
           </a:xfrm>
           <a:prstGeom prst="rect">
             <a:avLst/>
@@ -12226,7 +10566,7 @@
                 </a:solidFill>
                 <a:latin typeface="Calibri"/>
               </a:rPr>
-              <a:t>Herramientas de hoy</a:t>
+              <a:t>Preguntas frecuentes y cierre conceptual () (3/3)</a:t>
             </a:r>
           </a:p>
         </p:txBody>
@@ -12239,8 +10579,8 @@
         </p:nvSpPr>
         <p:spPr>
           <a:xfrm>
-            <a:off x="457200" y="566928"/>
-            <a:ext cx="11277295" cy="411480"/>
+            <a:off x="457200" y="1170432"/>
+            <a:ext cx="11277295" cy="5230368"/>
           </a:xfrm>
           <a:prstGeom prst="rect">
             <a:avLst/>
@@ -12253,837 +10593,58 @@
           </a:bodyPr>
           <a:lstStyle/>
           <a:p>
-            <a:r>
-              <a:rPr sz="1400" b="0" i="0">
-                <a:solidFill>
-                  <a:srgbClr val="B8D8EE"/>
-                </a:solidFill>
-                <a:latin typeface="Calibri"/>
-              </a:rPr>
-              <a:t>Gratis · navegador o free tier · sin cuenta de pago</a:t>
-            </a:r>
-          </a:p>
-        </p:txBody>
-      </p:sp>
-      <p:sp>
-        <p:nvSpPr>
-          <p:cNvPr id="6" name="Rounded Rectangle 5"/>
-          <p:cNvSpPr/>
-          <p:nvPr/>
-        </p:nvSpPr>
-        <p:spPr>
-          <a:xfrm>
-            <a:off x="457200" y="1591056"/>
-            <a:ext cx="3624986" cy="2299716"/>
-          </a:xfrm>
-          <a:prstGeom prst="roundRect">
-            <a:avLst>
-              <a:gd name="adj" fmla="val 12000"/>
-            </a:avLst>
-          </a:prstGeom>
-          <a:solidFill>
-            <a:srgbClr val="F2F2F2"/>
-          </a:solidFill>
-          <a:ln>
-            <a:noFill/>
-          </a:ln>
-        </p:spPr>
-        <p:style>
-          <a:lnRef idx="1">
-            <a:schemeClr val="accent1"/>
-          </a:lnRef>
-          <a:fillRef idx="3">
-            <a:schemeClr val="accent1"/>
-          </a:fillRef>
-          <a:effectRef idx="2">
-            <a:schemeClr val="accent1"/>
-          </a:effectRef>
-          <a:fontRef idx="minor">
-            <a:schemeClr val="lt1"/>
-          </a:fontRef>
-        </p:style>
-        <p:txBody>
-          <a:bodyPr rtlCol="0" anchor="ctr"/>
-          <a:lstStyle/>
-          <a:p>
-            <a:pPr algn="ctr"/>
-          </a:p>
-        </p:txBody>
-      </p:sp>
-      <p:sp>
-        <p:nvSpPr>
-          <p:cNvPr id="7" name="Rectangle 6"/>
-          <p:cNvSpPr/>
-          <p:nvPr/>
-        </p:nvSpPr>
-        <p:spPr>
-          <a:xfrm>
-            <a:off x="457200" y="1591056"/>
-            <a:ext cx="3624986" cy="64008"/>
-          </a:xfrm>
-          <a:prstGeom prst="rect">
-            <a:avLst/>
-          </a:prstGeom>
-          <a:solidFill>
-            <a:srgbClr val="095292"/>
-          </a:solidFill>
-          <a:ln>
-            <a:noFill/>
-          </a:ln>
-        </p:spPr>
-        <p:style>
-          <a:lnRef idx="1">
-            <a:schemeClr val="accent1"/>
-          </a:lnRef>
-          <a:fillRef idx="3">
-            <a:schemeClr val="accent1"/>
-          </a:fillRef>
-          <a:effectRef idx="2">
-            <a:schemeClr val="accent1"/>
-          </a:effectRef>
-          <a:fontRef idx="minor">
-            <a:schemeClr val="lt1"/>
-          </a:fontRef>
-        </p:style>
-        <p:txBody>
-          <a:bodyPr rtlCol="0" anchor="ctr"/>
-          <a:lstStyle/>
-          <a:p>
-            <a:pPr algn="ctr"/>
-          </a:p>
-        </p:txBody>
-      </p:sp>
-      <p:sp>
-        <p:nvSpPr>
-          <p:cNvPr id="8" name="Rectangle 7"/>
-          <p:cNvSpPr/>
-          <p:nvPr/>
-        </p:nvSpPr>
-        <p:spPr>
-          <a:xfrm>
-            <a:off x="457200" y="1655064"/>
-            <a:ext cx="3624986" cy="27432"/>
-          </a:xfrm>
-          <a:prstGeom prst="rect">
-            <a:avLst/>
-          </a:prstGeom>
-          <a:solidFill>
-            <a:srgbClr val="FFD000"/>
-          </a:solidFill>
-          <a:ln>
-            <a:noFill/>
-          </a:ln>
-        </p:spPr>
-        <p:style>
-          <a:lnRef idx="1">
-            <a:schemeClr val="accent1"/>
-          </a:lnRef>
-          <a:fillRef idx="3">
-            <a:schemeClr val="accent1"/>
-          </a:fillRef>
-          <a:effectRef idx="2">
-            <a:schemeClr val="accent1"/>
-          </a:effectRef>
-          <a:fontRef idx="minor">
-            <a:schemeClr val="lt1"/>
-          </a:fontRef>
-        </p:style>
-        <p:txBody>
-          <a:bodyPr rtlCol="0" anchor="ctr"/>
-          <a:lstStyle/>
-          <a:p>
-            <a:pPr algn="ctr"/>
-          </a:p>
-        </p:txBody>
-      </p:sp>
-      <p:pic>
-        <p:nvPicPr>
-          <p:cNvPr id="9" name="Picture 8" descr="drawio.png"/>
-          <p:cNvPicPr>
-            <a:picLocks noChangeAspect="1"/>
-          </p:cNvPicPr>
-          <p:nvPr/>
-        </p:nvPicPr>
-        <p:blipFill>
-          <a:blip r:embed="rId2"/>
-          <a:stretch>
-            <a:fillRect/>
-          </a:stretch>
-        </p:blipFill>
-        <p:spPr>
-          <a:xfrm>
-            <a:off x="1659331" y="1847087"/>
-            <a:ext cx="1220724" cy="1220724"/>
-          </a:xfrm>
-          <a:prstGeom prst="rect">
-            <a:avLst/>
-          </a:prstGeom>
-        </p:spPr>
-      </p:pic>
-      <p:sp>
-        <p:nvSpPr>
-          <p:cNvPr id="10" name="TextBox 9"/>
-          <p:cNvSpPr txBox="1"/>
-          <p:nvPr/>
-        </p:nvSpPr>
-        <p:spPr>
-          <a:xfrm>
-            <a:off x="530352" y="3159251"/>
-            <a:ext cx="3478682" cy="621792"/>
-          </a:xfrm>
-          <a:prstGeom prst="rect">
-            <a:avLst/>
-          </a:prstGeom>
-          <a:noFill/>
-        </p:spPr>
-        <p:txBody>
-          <a:bodyPr wrap="square" anchor="t"/>
-          <a:lstStyle/>
-          <a:p>
-            <a:pPr algn="ctr"/>
-            <a:r>
-              <a:rPr sz="1300" b="1" i="0">
-                <a:solidFill>
-                  <a:srgbClr val="095292"/>
-                </a:solidFill>
-                <a:latin typeface="Calibri"/>
-              </a:rPr>
-              <a:t>draw.io</a:t>
-            </a:r>
-          </a:p>
-          <a:p>
-            <a:pPr algn="ctr">
-              <a:spcBef>
-                <a:spcPts val="200"/>
-              </a:spcBef>
+            <a:pPr>
+              <a:spcAft>
+                <a:spcPts val="800"/>
+              </a:spcAft>
             </a:pPr>
             <a:r>
-              <a:rPr sz="1000" b="0" i="0">
-                <a:solidFill>
-                  <a:srgbClr val="666666"/>
-                </a:solidFill>
-                <a:latin typeface="Calibri"/>
-              </a:rPr>
-              <a:t>Boceto del C4</a:t>
-            </a:r>
-          </a:p>
-        </p:txBody>
-      </p:sp>
-      <p:sp>
-        <p:nvSpPr>
-          <p:cNvPr id="11" name="Rounded Rectangle 10"/>
-          <p:cNvSpPr/>
-          <p:nvPr/>
-        </p:nvSpPr>
-        <p:spPr>
-          <a:xfrm>
-            <a:off x="4283354" y="1591056"/>
-            <a:ext cx="3624986" cy="2299716"/>
-          </a:xfrm>
-          <a:prstGeom prst="roundRect">
-            <a:avLst>
-              <a:gd name="adj" fmla="val 12000"/>
-            </a:avLst>
-          </a:prstGeom>
-          <a:solidFill>
-            <a:srgbClr val="F2F2F2"/>
-          </a:solidFill>
-          <a:ln>
-            <a:noFill/>
-          </a:ln>
-        </p:spPr>
-        <p:style>
-          <a:lnRef idx="1">
-            <a:schemeClr val="accent1"/>
-          </a:lnRef>
-          <a:fillRef idx="3">
-            <a:schemeClr val="accent1"/>
-          </a:fillRef>
-          <a:effectRef idx="2">
-            <a:schemeClr val="accent1"/>
-          </a:effectRef>
-          <a:fontRef idx="minor">
-            <a:schemeClr val="lt1"/>
-          </a:fontRef>
-        </p:style>
-        <p:txBody>
-          <a:bodyPr rtlCol="0" anchor="ctr"/>
-          <a:lstStyle/>
-          <a:p>
-            <a:pPr algn="ctr"/>
-          </a:p>
-        </p:txBody>
-      </p:sp>
-      <p:sp>
-        <p:nvSpPr>
-          <p:cNvPr id="12" name="Rectangle 11"/>
-          <p:cNvSpPr/>
-          <p:nvPr/>
-        </p:nvSpPr>
-        <p:spPr>
-          <a:xfrm>
-            <a:off x="4283354" y="1591056"/>
-            <a:ext cx="3624986" cy="64008"/>
-          </a:xfrm>
-          <a:prstGeom prst="rect">
-            <a:avLst/>
-          </a:prstGeom>
-          <a:solidFill>
-            <a:srgbClr val="095292"/>
-          </a:solidFill>
-          <a:ln>
-            <a:noFill/>
-          </a:ln>
-        </p:spPr>
-        <p:style>
-          <a:lnRef idx="1">
-            <a:schemeClr val="accent1"/>
-          </a:lnRef>
-          <a:fillRef idx="3">
-            <a:schemeClr val="accent1"/>
-          </a:fillRef>
-          <a:effectRef idx="2">
-            <a:schemeClr val="accent1"/>
-          </a:effectRef>
-          <a:fontRef idx="minor">
-            <a:schemeClr val="lt1"/>
-          </a:fontRef>
-        </p:style>
-        <p:txBody>
-          <a:bodyPr rtlCol="0" anchor="ctr"/>
-          <a:lstStyle/>
-          <a:p>
-            <a:pPr algn="ctr"/>
-          </a:p>
-        </p:txBody>
-      </p:sp>
-      <p:sp>
-        <p:nvSpPr>
-          <p:cNvPr id="13" name="Rectangle 12"/>
-          <p:cNvSpPr/>
-          <p:nvPr/>
-        </p:nvSpPr>
-        <p:spPr>
-          <a:xfrm>
-            <a:off x="4283354" y="1655064"/>
-            <a:ext cx="3624986" cy="27432"/>
-          </a:xfrm>
-          <a:prstGeom prst="rect">
-            <a:avLst/>
-          </a:prstGeom>
-          <a:solidFill>
-            <a:srgbClr val="FFD000"/>
-          </a:solidFill>
-          <a:ln>
-            <a:noFill/>
-          </a:ln>
-        </p:spPr>
-        <p:style>
-          <a:lnRef idx="1">
-            <a:schemeClr val="accent1"/>
-          </a:lnRef>
-          <a:fillRef idx="3">
-            <a:schemeClr val="accent1"/>
-          </a:fillRef>
-          <a:effectRef idx="2">
-            <a:schemeClr val="accent1"/>
-          </a:effectRef>
-          <a:fontRef idx="minor">
-            <a:schemeClr val="lt1"/>
-          </a:fontRef>
-        </p:style>
-        <p:txBody>
-          <a:bodyPr rtlCol="0" anchor="ctr"/>
-          <a:lstStyle/>
-          <a:p>
-            <a:pPr algn="ctr"/>
-          </a:p>
-        </p:txBody>
-      </p:sp>
-      <p:pic>
-        <p:nvPicPr>
-          <p:cNvPr id="14" name="Picture 13" descr="excalidraw.png"/>
-          <p:cNvPicPr>
-            <a:picLocks noChangeAspect="1"/>
-          </p:cNvPicPr>
-          <p:nvPr/>
-        </p:nvPicPr>
-        <p:blipFill>
-          <a:blip r:embed="rId3"/>
-          <a:stretch>
-            <a:fillRect/>
-          </a:stretch>
-        </p:blipFill>
-        <p:spPr>
-          <a:xfrm>
-            <a:off x="5485485" y="1847087"/>
-            <a:ext cx="1220724" cy="1220724"/>
-          </a:xfrm>
-          <a:prstGeom prst="rect">
-            <a:avLst/>
-          </a:prstGeom>
-        </p:spPr>
-      </p:pic>
-      <p:sp>
-        <p:nvSpPr>
-          <p:cNvPr id="15" name="TextBox 14"/>
-          <p:cNvSpPr txBox="1"/>
-          <p:nvPr/>
-        </p:nvSpPr>
-        <p:spPr>
-          <a:xfrm>
-            <a:off x="4356506" y="3159251"/>
-            <a:ext cx="3478682" cy="621792"/>
-          </a:xfrm>
-          <a:prstGeom prst="rect">
-            <a:avLst/>
-          </a:prstGeom>
-          <a:noFill/>
-        </p:spPr>
-        <p:txBody>
-          <a:bodyPr wrap="square" anchor="t"/>
-          <a:lstStyle/>
-          <a:p>
-            <a:pPr algn="ctr"/>
-            <a:r>
-              <a:rPr sz="1300" b="1" i="0">
-                <a:solidFill>
-                  <a:srgbClr val="095292"/>
-                </a:solidFill>
-                <a:latin typeface="Calibri"/>
-              </a:rPr>
-              <a:t>Excalidraw</a:t>
-            </a:r>
-          </a:p>
-          <a:p>
-            <a:pPr algn="ctr">
-              <a:spcBef>
-                <a:spcPts val="200"/>
-              </a:spcBef>
+              <a:rPr sz="2000" b="0" i="0">
+                <a:solidFill>
+                  <a:srgbClr val="333333"/>
+                </a:solidFill>
+                <a:latin typeface="Calibri"/>
+              </a:rPr>
+              <a:t>–   El segundo error es tratar la latencia y los fallos parciales como un detalle de implementacion que se vera despues: si hoy no se dice que una flecha en el diagrama es una llamada de red que puede fallar</a:t>
+            </a:r>
+          </a:p>
+          <a:p>
+            <a:pPr>
+              <a:spcAft>
+                <a:spcPts val="800"/>
+              </a:spcAft>
             </a:pPr>
             <a:r>
-              <a:rPr sz="1000" b="0" i="0">
-                <a:solidFill>
-                  <a:srgbClr val="666666"/>
-                </a:solidFill>
-                <a:latin typeface="Calibri"/>
-              </a:rPr>
-              <a:t>Boceto rapido</a:t>
-            </a:r>
-          </a:p>
-        </p:txBody>
-      </p:sp>
-      <p:sp>
-        <p:nvSpPr>
-          <p:cNvPr id="16" name="Rounded Rectangle 15"/>
-          <p:cNvSpPr/>
-          <p:nvPr/>
-        </p:nvSpPr>
-        <p:spPr>
-          <a:xfrm>
-            <a:off x="8109508" y="1591056"/>
-            <a:ext cx="3624986" cy="2299716"/>
-          </a:xfrm>
-          <a:prstGeom prst="roundRect">
-            <a:avLst>
-              <a:gd name="adj" fmla="val 12000"/>
-            </a:avLst>
-          </a:prstGeom>
-          <a:solidFill>
-            <a:srgbClr val="F2F2F2"/>
-          </a:solidFill>
-          <a:ln>
-            <a:noFill/>
-          </a:ln>
-        </p:spPr>
-        <p:style>
-          <a:lnRef idx="1">
-            <a:schemeClr val="accent1"/>
-          </a:lnRef>
-          <a:fillRef idx="3">
-            <a:schemeClr val="accent1"/>
-          </a:fillRef>
-          <a:effectRef idx="2">
-            <a:schemeClr val="accent1"/>
-          </a:effectRef>
-          <a:fontRef idx="minor">
-            <a:schemeClr val="lt1"/>
-          </a:fontRef>
-        </p:style>
-        <p:txBody>
-          <a:bodyPr rtlCol="0" anchor="ctr"/>
-          <a:lstStyle/>
-          <a:p>
-            <a:pPr algn="ctr"/>
-          </a:p>
-        </p:txBody>
-      </p:sp>
-      <p:sp>
-        <p:nvSpPr>
-          <p:cNvPr id="17" name="Rectangle 16"/>
-          <p:cNvSpPr/>
-          <p:nvPr/>
-        </p:nvSpPr>
-        <p:spPr>
-          <a:xfrm>
-            <a:off x="8109508" y="1591056"/>
-            <a:ext cx="3624986" cy="64008"/>
-          </a:xfrm>
-          <a:prstGeom prst="rect">
-            <a:avLst/>
-          </a:prstGeom>
-          <a:solidFill>
-            <a:srgbClr val="095292"/>
-          </a:solidFill>
-          <a:ln>
-            <a:noFill/>
-          </a:ln>
-        </p:spPr>
-        <p:style>
-          <a:lnRef idx="1">
-            <a:schemeClr val="accent1"/>
-          </a:lnRef>
-          <a:fillRef idx="3">
-            <a:schemeClr val="accent1"/>
-          </a:fillRef>
-          <a:effectRef idx="2">
-            <a:schemeClr val="accent1"/>
-          </a:effectRef>
-          <a:fontRef idx="minor">
-            <a:schemeClr val="lt1"/>
-          </a:fontRef>
-        </p:style>
-        <p:txBody>
-          <a:bodyPr rtlCol="0" anchor="ctr"/>
-          <a:lstStyle/>
-          <a:p>
-            <a:pPr algn="ctr"/>
-          </a:p>
-        </p:txBody>
-      </p:sp>
-      <p:sp>
-        <p:nvSpPr>
-          <p:cNvPr id="18" name="Rectangle 17"/>
-          <p:cNvSpPr/>
-          <p:nvPr/>
-        </p:nvSpPr>
-        <p:spPr>
-          <a:xfrm>
-            <a:off x="8109508" y="1655064"/>
-            <a:ext cx="3624986" cy="27432"/>
-          </a:xfrm>
-          <a:prstGeom prst="rect">
-            <a:avLst/>
-          </a:prstGeom>
-          <a:solidFill>
-            <a:srgbClr val="FFD000"/>
-          </a:solidFill>
-          <a:ln>
-            <a:noFill/>
-          </a:ln>
-        </p:spPr>
-        <p:style>
-          <a:lnRef idx="1">
-            <a:schemeClr val="accent1"/>
-          </a:lnRef>
-          <a:fillRef idx="3">
-            <a:schemeClr val="accent1"/>
-          </a:fillRef>
-          <a:effectRef idx="2">
-            <a:schemeClr val="accent1"/>
-          </a:effectRef>
-          <a:fontRef idx="minor">
-            <a:schemeClr val="lt1"/>
-          </a:fontRef>
-        </p:style>
-        <p:txBody>
-          <a:bodyPr rtlCol="0" anchor="ctr"/>
-          <a:lstStyle/>
-          <a:p>
-            <a:pPr algn="ctr"/>
-          </a:p>
-        </p:txBody>
-      </p:sp>
-      <p:pic>
-        <p:nvPicPr>
-          <p:cNvPr id="19" name="Picture 18" descr="mermaid.png"/>
-          <p:cNvPicPr>
-            <a:picLocks noChangeAspect="1"/>
-          </p:cNvPicPr>
-          <p:nvPr/>
-        </p:nvPicPr>
-        <p:blipFill>
-          <a:blip r:embed="rId4"/>
-          <a:stretch>
-            <a:fillRect/>
-          </a:stretch>
-        </p:blipFill>
-        <p:spPr>
-          <a:xfrm>
-            <a:off x="9311640" y="1847087"/>
-            <a:ext cx="1220724" cy="1220724"/>
-          </a:xfrm>
-          <a:prstGeom prst="rect">
-            <a:avLst/>
-          </a:prstGeom>
-        </p:spPr>
-      </p:pic>
-      <p:sp>
-        <p:nvSpPr>
-          <p:cNvPr id="20" name="TextBox 19"/>
-          <p:cNvSpPr txBox="1"/>
-          <p:nvPr/>
-        </p:nvSpPr>
-        <p:spPr>
-          <a:xfrm>
-            <a:off x="8182660" y="3159251"/>
-            <a:ext cx="3478682" cy="621792"/>
-          </a:xfrm>
-          <a:prstGeom prst="rect">
-            <a:avLst/>
-          </a:prstGeom>
-          <a:noFill/>
-        </p:spPr>
-        <p:txBody>
-          <a:bodyPr wrap="square" anchor="t"/>
-          <a:lstStyle/>
-          <a:p>
-            <a:pPr algn="ctr"/>
-            <a:r>
-              <a:rPr sz="1300" b="1" i="0">
-                <a:solidFill>
-                  <a:srgbClr val="095292"/>
-                </a:solidFill>
-                <a:latin typeface="Calibri"/>
-              </a:rPr>
-              <a:t>Mermaid</a:t>
-            </a:r>
-          </a:p>
-          <a:p>
-            <a:pPr algn="ctr">
-              <a:spcBef>
-                <a:spcPts val="200"/>
-              </a:spcBef>
+              <a:rPr sz="2000" b="0" i="0">
+                <a:solidFill>
+                  <a:srgbClr val="333333"/>
+                </a:solidFill>
+                <a:latin typeface="Calibri"/>
+              </a:rPr>
+              <a:t>–   El estudiante disenara como si distribuir fuera gratis, no incluira timeouts ni idempotencia en su tabla de riesgos</a:t>
+            </a:r>
+          </a:p>
+          <a:p>
+            <a:pPr>
+              <a:spcAft>
+                <a:spcPts val="800"/>
+              </a:spcAft>
             </a:pPr>
             <a:r>
-              <a:rPr sz="1000" b="0" i="0">
-                <a:solidFill>
-                  <a:srgbClr val="666666"/>
-                </a:solidFill>
-                <a:latin typeface="Calibri"/>
-              </a:rPr>
-              <a:t>Codigo del diagrama</a:t>
-            </a:r>
-          </a:p>
-        </p:txBody>
-      </p:sp>
-      <p:sp>
-        <p:nvSpPr>
-          <p:cNvPr id="21" name="Rounded Rectangle 20"/>
-          <p:cNvSpPr/>
-          <p:nvPr/>
-        </p:nvSpPr>
-        <p:spPr>
-          <a:xfrm>
-            <a:off x="4283354" y="4055364"/>
-            <a:ext cx="3624986" cy="2299716"/>
-          </a:xfrm>
-          <a:prstGeom prst="roundRect">
-            <a:avLst>
-              <a:gd name="adj" fmla="val 12000"/>
-            </a:avLst>
-          </a:prstGeom>
-          <a:solidFill>
-            <a:srgbClr val="F2F2F2"/>
-          </a:solidFill>
-          <a:ln>
-            <a:noFill/>
-          </a:ln>
-        </p:spPr>
-        <p:style>
-          <a:lnRef idx="1">
-            <a:schemeClr val="accent1"/>
-          </a:lnRef>
-          <a:fillRef idx="3">
-            <a:schemeClr val="accent1"/>
-          </a:fillRef>
-          <a:effectRef idx="2">
-            <a:schemeClr val="accent1"/>
-          </a:effectRef>
-          <a:fontRef idx="minor">
-            <a:schemeClr val="lt1"/>
-          </a:fontRef>
-        </p:style>
-        <p:txBody>
-          <a:bodyPr rtlCol="0" anchor="ctr"/>
-          <a:lstStyle/>
-          <a:p>
-            <a:pPr algn="ctr"/>
-          </a:p>
-        </p:txBody>
-      </p:sp>
-      <p:sp>
-        <p:nvSpPr>
-          <p:cNvPr id="22" name="Rectangle 21"/>
-          <p:cNvSpPr/>
-          <p:nvPr/>
-        </p:nvSpPr>
-        <p:spPr>
-          <a:xfrm>
-            <a:off x="4283354" y="4055364"/>
-            <a:ext cx="3624986" cy="64008"/>
-          </a:xfrm>
-          <a:prstGeom prst="rect">
-            <a:avLst/>
-          </a:prstGeom>
-          <a:solidFill>
-            <a:srgbClr val="095292"/>
-          </a:solidFill>
-          <a:ln>
-            <a:noFill/>
-          </a:ln>
-        </p:spPr>
-        <p:style>
-          <a:lnRef idx="1">
-            <a:schemeClr val="accent1"/>
-          </a:lnRef>
-          <a:fillRef idx="3">
-            <a:schemeClr val="accent1"/>
-          </a:fillRef>
-          <a:effectRef idx="2">
-            <a:schemeClr val="accent1"/>
-          </a:effectRef>
-          <a:fontRef idx="minor">
-            <a:schemeClr val="lt1"/>
-          </a:fontRef>
-        </p:style>
-        <p:txBody>
-          <a:bodyPr rtlCol="0" anchor="ctr"/>
-          <a:lstStyle/>
-          <a:p>
-            <a:pPr algn="ctr"/>
-          </a:p>
-        </p:txBody>
-      </p:sp>
-      <p:sp>
-        <p:nvSpPr>
-          <p:cNvPr id="23" name="Rectangle 22"/>
-          <p:cNvSpPr/>
-          <p:nvPr/>
-        </p:nvSpPr>
-        <p:spPr>
-          <a:xfrm>
-            <a:off x="4283354" y="4119372"/>
-            <a:ext cx="3624986" cy="27432"/>
-          </a:xfrm>
-          <a:prstGeom prst="rect">
-            <a:avLst/>
-          </a:prstGeom>
-          <a:solidFill>
-            <a:srgbClr val="FFD000"/>
-          </a:solidFill>
-          <a:ln>
-            <a:noFill/>
-          </a:ln>
-        </p:spPr>
-        <p:style>
-          <a:lnRef idx="1">
-            <a:schemeClr val="accent1"/>
-          </a:lnRef>
-          <a:fillRef idx="3">
-            <a:schemeClr val="accent1"/>
-          </a:fillRef>
-          <a:effectRef idx="2">
-            <a:schemeClr val="accent1"/>
-          </a:effectRef>
-          <a:fontRef idx="minor">
-            <a:schemeClr val="lt1"/>
-          </a:fontRef>
-        </p:style>
-        <p:txBody>
-          <a:bodyPr rtlCol="0" anchor="ctr"/>
-          <a:lstStyle/>
-          <a:p>
-            <a:pPr algn="ctr"/>
-          </a:p>
-        </p:txBody>
-      </p:sp>
-      <p:pic>
-        <p:nvPicPr>
-          <p:cNvPr id="24" name="Picture 23" descr="examlab.png"/>
-          <p:cNvPicPr>
-            <a:picLocks noChangeAspect="1"/>
-          </p:cNvPicPr>
-          <p:nvPr/>
-        </p:nvPicPr>
-        <p:blipFill>
-          <a:blip r:embed="rId5"/>
-          <a:stretch>
-            <a:fillRect/>
-          </a:stretch>
-        </p:blipFill>
-        <p:spPr>
-          <a:xfrm>
-            <a:off x="5485485" y="4311396"/>
-            <a:ext cx="1220724" cy="1220724"/>
-          </a:xfrm>
-          <a:prstGeom prst="rect">
-            <a:avLst/>
-          </a:prstGeom>
-        </p:spPr>
-      </p:pic>
-      <p:sp>
-        <p:nvSpPr>
-          <p:cNvPr id="25" name="TextBox 24"/>
-          <p:cNvSpPr txBox="1"/>
-          <p:nvPr/>
-        </p:nvSpPr>
-        <p:spPr>
-          <a:xfrm>
-            <a:off x="4356506" y="5623560"/>
-            <a:ext cx="3478682" cy="621792"/>
-          </a:xfrm>
-          <a:prstGeom prst="rect">
-            <a:avLst/>
-          </a:prstGeom>
-          <a:noFill/>
-        </p:spPr>
-        <p:txBody>
-          <a:bodyPr wrap="square" anchor="t"/>
-          <a:lstStyle/>
-          <a:p>
-            <a:pPr algn="ctr"/>
-            <a:r>
-              <a:rPr sz="1300" b="1" i="0">
-                <a:solidFill>
-                  <a:srgbClr val="095292"/>
-                </a:solidFill>
-                <a:latin typeface="Calibri"/>
-              </a:rPr>
-              <a:t>la plataforma del curso</a:t>
-            </a:r>
-          </a:p>
-          <a:p>
-            <a:pPr algn="ctr">
-              <a:spcBef>
-                <a:spcPts val="200"/>
-              </a:spcBef>
-            </a:pPr>
-            <a:r>
-              <a:rPr sz="1000" b="0" i="0">
-                <a:solidFill>
-                  <a:srgbClr val="666666"/>
-                </a:solidFill>
-                <a:latin typeface="Calibri"/>
-              </a:rPr>
-              <a:t>Donde se entrega</a:t>
-            </a:r>
-          </a:p>
-        </p:txBody>
-      </p:sp>
-      <p:sp>
-        <p:nvSpPr>
-          <p:cNvPr id="26" name="TextBox 25"/>
+              <a:rPr sz="2000" b="0" i="0">
+                <a:solidFill>
+                  <a:srgbClr val="333333"/>
+                </a:solidFill>
+                <a:latin typeface="Calibri"/>
+              </a:rPr>
+              <a:t>–   Y en la Clase 13 pedira autoescalado como solucion magica a un problema de diseno originado precisamente en esta clase.</a:t>
+            </a:r>
+          </a:p>
+        </p:txBody>
+      </p:sp>
+      <p:sp>
+        <p:nvSpPr>
+          <p:cNvPr id="6" name="TextBox 5"/>
           <p:cNvSpPr txBox="1"/>
           <p:nvPr/>
         </p:nvSpPr>
@@ -13257,7 +10818,7 @@
                 </a:solidFill>
                 <a:latin typeface="Calibri"/>
               </a:rPr>
-              <a:t>Del boceto a la plataforma del curso (diagrama)</a:t>
+              <a:t>Ejemplo de diagrama C4 — nivel Containers</a:t>
             </a:r>
           </a:p>
         </p:txBody>
@@ -13291,7 +10852,7 @@
                 </a:solidFill>
                 <a:latin typeface="Calibri"/>
               </a:rPr>
-              <a:t>El diagrama se entrega como código Mermaid dentro de la plataforma del curso, no como imagen</a:t>
+              <a:t>2–5 cajas justificadas, cada flecha con protocolo Y formato</a:t>
             </a:r>
           </a:p>
         </p:txBody>
@@ -13304,53 +10865,8 @@
         </p:nvSpPr>
         <p:spPr>
           <a:xfrm>
-            <a:off x="457200" y="1659636"/>
-            <a:ext cx="11277295" cy="1051560"/>
-          </a:xfrm>
-          <a:prstGeom prst="roundRect">
-            <a:avLst>
-              <a:gd name="adj" fmla="val 12000"/>
-            </a:avLst>
-          </a:prstGeom>
-          <a:solidFill>
-            <a:srgbClr val="F2F2F2"/>
-          </a:solidFill>
-          <a:ln>
-            <a:noFill/>
-          </a:ln>
-        </p:spPr>
-        <p:style>
-          <a:lnRef idx="1">
-            <a:schemeClr val="accent1"/>
-          </a:lnRef>
-          <a:fillRef idx="3">
-            <a:schemeClr val="accent1"/>
-          </a:fillRef>
-          <a:effectRef idx="2">
-            <a:schemeClr val="accent1"/>
-          </a:effectRef>
-          <a:fontRef idx="minor">
-            <a:schemeClr val="lt1"/>
-          </a:fontRef>
-        </p:style>
-        <p:txBody>
-          <a:bodyPr rtlCol="0" anchor="ctr"/>
-          <a:lstStyle/>
-          <a:p>
-            <a:pPr algn="ctr"/>
-          </a:p>
-        </p:txBody>
-      </p:sp>
-      <p:sp>
-        <p:nvSpPr>
-          <p:cNvPr id="7" name="Rounded Rectangle 6"/>
-          <p:cNvSpPr/>
-          <p:nvPr/>
-        </p:nvSpPr>
-        <p:spPr>
-          <a:xfrm>
-            <a:off x="594360" y="1965960"/>
-            <a:ext cx="438912" cy="438912"/>
+            <a:off x="822960" y="2011680"/>
+            <a:ext cx="2377440" cy="1097280"/>
           </a:xfrm>
           <a:prstGeom prst="roundRect">
             <a:avLst>
@@ -13379,149 +10895,33 @@
           </a:fontRef>
         </p:style>
         <p:txBody>
-          <a:bodyPr rtlCol="0" anchor="ctr"/>
+          <a:bodyPr rtlCol="0" anchor="ctr" wrap="square"/>
           <a:lstStyle/>
           <a:p>
             <a:pPr algn="ctr"/>
-          </a:p>
-        </p:txBody>
-      </p:sp>
-      <p:sp>
-        <p:nvSpPr>
-          <p:cNvPr id="8" name="TextBox 7"/>
-          <p:cNvSpPr txBox="1"/>
-          <p:nvPr/>
-        </p:nvSpPr>
-        <p:spPr>
-          <a:xfrm>
-            <a:off x="594360" y="1965960"/>
-            <a:ext cx="438912" cy="438912"/>
-          </a:xfrm>
-          <a:prstGeom prst="rect">
-            <a:avLst/>
-          </a:prstGeom>
-          <a:noFill/>
-        </p:spPr>
-        <p:txBody>
-          <a:bodyPr wrap="square" anchor="ctr"/>
-          <a:lstStyle/>
-          <a:p>
-            <a:pPr algn="ctr"/>
-            <a:r>
-              <a:rPr sz="1600" b="1" i="0">
+            <a:r>
+              <a:rPr sz="1100" b="1" i="0">
                 <a:solidFill>
                   <a:srgbClr val="FFFFFF"/>
                 </a:solidFill>
                 <a:latin typeface="Calibri"/>
               </a:rPr>
-              <a:t>1</a:t>
-            </a:r>
-          </a:p>
-        </p:txBody>
-      </p:sp>
-      <p:sp>
-        <p:nvSpPr>
-          <p:cNvPr id="9" name="TextBox 8"/>
-          <p:cNvSpPr txBox="1"/>
-          <p:nvPr/>
-        </p:nvSpPr>
-        <p:spPr>
-          <a:xfrm>
-            <a:off x="1188720" y="1751076"/>
-            <a:ext cx="10271455" cy="886968"/>
-          </a:xfrm>
-          <a:prstGeom prst="rect">
-            <a:avLst/>
-          </a:prstGeom>
-          <a:noFill/>
-        </p:spPr>
-        <p:txBody>
-          <a:bodyPr wrap="square" anchor="ctr"/>
-          <a:lstStyle/>
-          <a:p>
-            <a:r>
-              <a:rPr sz="1500" b="1" i="0">
-                <a:solidFill>
-                  <a:srgbClr val="095292"/>
-                </a:solidFill>
-                <a:latin typeface="Calibri"/>
-              </a:rPr>
-              <a:t>Disena visual</a:t>
-            </a:r>
-          </a:p>
-          <a:p>
-            <a:pPr>
-              <a:spcBef>
-                <a:spcPts val="200"/>
-              </a:spcBef>
-            </a:pPr>
-            <a:r>
-              <a:rPr sz="1300" b="0" i="0">
-                <a:solidFill>
-                  <a:srgbClr val="333333"/>
-                </a:solidFill>
-                <a:latin typeface="Calibri"/>
-              </a:rPr>
-              <a:t>Dibuja el diagrama como quieras en Excalidraw o draw.io: es mas rapido arrastrar cajas que escribir codigo, y ahi es donde piensas el modelo.</a:t>
-            </a:r>
-          </a:p>
-        </p:txBody>
-      </p:sp>
-      <p:sp>
-        <p:nvSpPr>
-          <p:cNvPr id="10" name="Rounded Rectangle 9"/>
+              <a:t>App web
+(Container · React)</a:t>
+            </a:r>
+          </a:p>
+        </p:txBody>
+      </p:sp>
+      <p:sp>
+        <p:nvSpPr>
+          <p:cNvPr id="7" name="Rounded Rectangle 6"/>
           <p:cNvSpPr/>
           <p:nvPr/>
         </p:nvSpPr>
         <p:spPr>
           <a:xfrm>
-            <a:off x="457200" y="2802636"/>
-            <a:ext cx="11277295" cy="1051560"/>
-          </a:xfrm>
-          <a:prstGeom prst="roundRect">
-            <a:avLst>
-              <a:gd name="adj" fmla="val 12000"/>
-            </a:avLst>
-          </a:prstGeom>
-          <a:solidFill>
-            <a:srgbClr val="E8F4FA"/>
-          </a:solidFill>
-          <a:ln>
-            <a:noFill/>
-          </a:ln>
-        </p:spPr>
-        <p:style>
-          <a:lnRef idx="1">
-            <a:schemeClr val="accent1"/>
-          </a:lnRef>
-          <a:fillRef idx="3">
-            <a:schemeClr val="accent1"/>
-          </a:fillRef>
-          <a:effectRef idx="2">
-            <a:schemeClr val="accent1"/>
-          </a:effectRef>
-          <a:fontRef idx="minor">
-            <a:schemeClr val="lt1"/>
-          </a:fontRef>
-        </p:style>
-        <p:txBody>
-          <a:bodyPr rtlCol="0" anchor="ctr"/>
-          <a:lstStyle/>
-          <a:p>
-            <a:pPr algn="ctr"/>
-          </a:p>
-        </p:txBody>
-      </p:sp>
-      <p:sp>
-        <p:nvSpPr>
-          <p:cNvPr id="11" name="Rounded Rectangle 10"/>
-          <p:cNvSpPr/>
-          <p:nvPr/>
-        </p:nvSpPr>
-        <p:spPr>
-          <a:xfrm>
-            <a:off x="594360" y="3108960"/>
-            <a:ext cx="438912" cy="438912"/>
+            <a:off x="4754880" y="2011680"/>
+            <a:ext cx="2377440" cy="1097280"/>
           </a:xfrm>
           <a:prstGeom prst="roundRect">
             <a:avLst>
@@ -13550,104 +10950,33 @@
           </a:fontRef>
         </p:style>
         <p:txBody>
-          <a:bodyPr rtlCol="0" anchor="ctr"/>
+          <a:bodyPr rtlCol="0" anchor="ctr" wrap="square"/>
           <a:lstStyle/>
           <a:p>
             <a:pPr algn="ctr"/>
-          </a:p>
-        </p:txBody>
-      </p:sp>
-      <p:sp>
-        <p:nvSpPr>
-          <p:cNvPr id="12" name="TextBox 11"/>
-          <p:cNvSpPr txBox="1"/>
-          <p:nvPr/>
-        </p:nvSpPr>
-        <p:spPr>
-          <a:xfrm>
-            <a:off x="594360" y="3108960"/>
-            <a:ext cx="438912" cy="438912"/>
-          </a:xfrm>
-          <a:prstGeom prst="rect">
-            <a:avLst/>
-          </a:prstGeom>
-          <a:noFill/>
-        </p:spPr>
-        <p:txBody>
-          <a:bodyPr wrap="square" anchor="ctr"/>
-          <a:lstStyle/>
-          <a:p>
-            <a:pPr algn="ctr"/>
-            <a:r>
-              <a:rPr sz="1600" b="1" i="0">
+            <a:r>
+              <a:rPr sz="1100" b="1" i="0">
                 <a:solidFill>
                   <a:srgbClr val="FFFFFF"/>
                 </a:solidFill>
                 <a:latin typeface="Calibri"/>
               </a:rPr>
-              <a:t>2</a:t>
-            </a:r>
-          </a:p>
-        </p:txBody>
-      </p:sp>
-      <p:sp>
-        <p:nvSpPr>
-          <p:cNvPr id="13" name="TextBox 12"/>
-          <p:cNvSpPr txBox="1"/>
-          <p:nvPr/>
-        </p:nvSpPr>
-        <p:spPr>
-          <a:xfrm>
-            <a:off x="1188720" y="2894076"/>
-            <a:ext cx="10271455" cy="886968"/>
-          </a:xfrm>
-          <a:prstGeom prst="rect">
-            <a:avLst/>
-          </a:prstGeom>
-          <a:noFill/>
-        </p:spPr>
-        <p:txBody>
-          <a:bodyPr wrap="square" anchor="ctr"/>
-          <a:lstStyle/>
-          <a:p>
-            <a:r>
-              <a:rPr sz="1500" b="1" i="0">
-                <a:solidFill>
-                  <a:srgbClr val="095292"/>
-                </a:solidFill>
-                <a:latin typeface="Calibri"/>
-              </a:rPr>
-              <a:t>Traduce con IA</a:t>
-            </a:r>
-          </a:p>
-          <a:p>
-            <a:pPr>
-              <a:spcBef>
-                <a:spcPts val="200"/>
-              </a:spcBef>
-            </a:pPr>
-            <a:r>
-              <a:rPr sz="1300" b="0" i="0">
-                <a:solidFill>
-                  <a:srgbClr val="333333"/>
-                </a:solidFill>
-                <a:latin typeface="Calibri"/>
-              </a:rPr>
-              <a:t>Copia o describe tu boceto a una IA y pidele el codigo Mermaid: «convierte este diagrama a Mermaid usando C4Container». Revisa el resultado: la IA acierta la sintaxis, no tu modelo.</a:t>
-            </a:r>
-          </a:p>
-        </p:txBody>
-      </p:sp>
-      <p:sp>
-        <p:nvSpPr>
-          <p:cNvPr id="14" name="Rounded Rectangle 13"/>
+              <a:t>API de turnos
+(Container · Node.js)</a:t>
+            </a:r>
+          </a:p>
+        </p:txBody>
+      </p:sp>
+      <p:sp>
+        <p:nvSpPr>
+          <p:cNvPr id="8" name="Rounded Rectangle 7"/>
           <p:cNvSpPr/>
           <p:nvPr/>
         </p:nvSpPr>
         <p:spPr>
           <a:xfrm>
-            <a:off x="457200" y="3945636"/>
-            <a:ext cx="11277295" cy="1051560"/>
+            <a:off x="8595360" y="2011680"/>
+            <a:ext cx="2377440" cy="1097280"/>
           </a:xfrm>
           <a:prstGeom prst="roundRect">
             <a:avLst>
@@ -13655,7 +10984,7 @@
             </a:avLst>
           </a:prstGeom>
           <a:solidFill>
-            <a:srgbClr val="F2F2F2"/>
+            <a:srgbClr val="269CCB"/>
           </a:solidFill>
           <a:ln>
             <a:noFill/>
@@ -13676,23 +11005,88 @@
           </a:fontRef>
         </p:style>
         <p:txBody>
-          <a:bodyPr rtlCol="0" anchor="ctr"/>
+          <a:bodyPr rtlCol="0" anchor="ctr" wrap="square"/>
           <a:lstStyle/>
           <a:p>
             <a:pPr algn="ctr"/>
-          </a:p>
-        </p:txBody>
-      </p:sp>
-      <p:sp>
-        <p:nvSpPr>
-          <p:cNvPr id="15" name="Rounded Rectangle 14"/>
+            <a:r>
+              <a:rPr sz="1100" b="1" i="0">
+                <a:solidFill>
+                  <a:srgbClr val="FFFFFF"/>
+                </a:solidFill>
+                <a:latin typeface="Calibri"/>
+              </a:rPr>
+              <a:t>Base de turnos
+(ContainerDb · PostgreSQL)</a:t>
+            </a:r>
+          </a:p>
+        </p:txBody>
+      </p:sp>
+      <p:sp>
+        <p:nvSpPr>
+          <p:cNvPr id="9" name="Rounded Rectangle 8"/>
           <p:cNvSpPr/>
           <p:nvPr/>
         </p:nvSpPr>
         <p:spPr>
           <a:xfrm>
-            <a:off x="594360" y="4251960"/>
-            <a:ext cx="438912" cy="438912"/>
+            <a:off x="822960" y="3931920"/>
+            <a:ext cx="2377440" cy="914400"/>
+          </a:xfrm>
+          <a:prstGeom prst="roundRect">
+            <a:avLst>
+              <a:gd name="adj" fmla="val 12000"/>
+            </a:avLst>
+          </a:prstGeom>
+          <a:solidFill>
+            <a:srgbClr val="FFD000"/>
+          </a:solidFill>
+          <a:ln>
+            <a:noFill/>
+          </a:ln>
+        </p:spPr>
+        <p:style>
+          <a:lnRef idx="1">
+            <a:schemeClr val="accent1"/>
+          </a:lnRef>
+          <a:fillRef idx="3">
+            <a:schemeClr val="accent1"/>
+          </a:fillRef>
+          <a:effectRef idx="2">
+            <a:schemeClr val="accent1"/>
+          </a:effectRef>
+          <a:fontRef idx="minor">
+            <a:schemeClr val="lt1"/>
+          </a:fontRef>
+        </p:style>
+        <p:txBody>
+          <a:bodyPr rtlCol="0" anchor="ctr" wrap="square"/>
+          <a:lstStyle/>
+          <a:p>
+            <a:pPr algn="ctr"/>
+            <a:r>
+              <a:rPr sz="1300" b="1" i="0">
+                <a:solidFill>
+                  <a:srgbClr val="095292"/>
+                </a:solidFill>
+                <a:latin typeface="Calibri"/>
+              </a:rPr>
+              <a:t>Cliente
+(Person)</a:t>
+            </a:r>
+          </a:p>
+        </p:txBody>
+      </p:sp>
+      <p:sp>
+        <p:nvSpPr>
+          <p:cNvPr id="10" name="Rounded Rectangle 9"/>
+          <p:cNvSpPr/>
+          <p:nvPr/>
+        </p:nvSpPr>
+        <p:spPr>
+          <a:xfrm>
+            <a:off x="4754880" y="3931920"/>
+            <a:ext cx="2377440" cy="914400"/>
           </a:xfrm>
           <a:prstGeom prst="roundRect">
             <a:avLst>
@@ -13721,13 +11115,201 @@
           </a:fontRef>
         </p:style>
         <p:txBody>
-          <a:bodyPr rtlCol="0" anchor="ctr"/>
+          <a:bodyPr rtlCol="0" anchor="ctr" wrap="square"/>
           <a:lstStyle/>
           <a:p>
             <a:pPr algn="ctr"/>
-          </a:p>
-        </p:txBody>
-      </p:sp>
+            <a:r>
+              <a:rPr sz="1100" b="1" i="0">
+                <a:solidFill>
+                  <a:srgbClr val="FFFFFF"/>
+                </a:solidFill>
+                <a:latin typeface="Calibri"/>
+              </a:rPr>
+              <a:t>Worker de avisos
+(Container · cola)</a:t>
+            </a:r>
+          </a:p>
+        </p:txBody>
+      </p:sp>
+      <p:cxnSp>
+        <p:nvCxnSpPr>
+          <p:cNvPr id="11" name="Connector 10"/>
+          <p:cNvCxnSpPr/>
+          <p:nvPr/>
+        </p:nvCxnSpPr>
+        <p:spPr>
+          <a:xfrm flipV="1">
+            <a:off x="2011680" y="3108960"/>
+            <a:ext cx="0" cy="822960"/>
+          </a:xfrm>
+          <a:prstGeom prst="line">
+            <a:avLst/>
+          </a:prstGeom>
+          <a:ln w="22225">
+            <a:solidFill>
+              <a:srgbClr val="666666"/>
+            </a:solidFill>
+            <a:tailEnd type="triangle" w="med" len="med"/>
+          </a:ln>
+        </p:spPr>
+        <p:style>
+          <a:lnRef idx="2">
+            <a:schemeClr val="accent1"/>
+          </a:lnRef>
+          <a:fillRef idx="0">
+            <a:schemeClr val="accent1"/>
+          </a:fillRef>
+          <a:effectRef idx="1">
+            <a:schemeClr val="accent1"/>
+          </a:effectRef>
+          <a:fontRef idx="minor">
+            <a:schemeClr val="tx1"/>
+          </a:fontRef>
+        </p:style>
+      </p:cxnSp>
+      <p:sp>
+        <p:nvSpPr>
+          <p:cNvPr id="12" name="TextBox 11"/>
+          <p:cNvSpPr txBox="1"/>
+          <p:nvPr/>
+        </p:nvSpPr>
+        <p:spPr>
+          <a:xfrm>
+            <a:off x="2121408" y="3319272"/>
+            <a:ext cx="1645920" cy="320040"/>
+          </a:xfrm>
+          <a:prstGeom prst="rect">
+            <a:avLst/>
+          </a:prstGeom>
+          <a:noFill/>
+        </p:spPr>
+        <p:txBody>
+          <a:bodyPr wrap="square">
+            <a:spAutoFit/>
+          </a:bodyPr>
+          <a:lstStyle/>
+          <a:p>
+            <a:pPr algn="l"/>
+            <a:r>
+              <a:rPr sz="1000" b="0" i="1">
+                <a:solidFill>
+                  <a:srgbClr val="666666"/>
+                </a:solidFill>
+                <a:latin typeface="Calibri"/>
+              </a:rPr>
+              <a:t>usa · HTTPS</a:t>
+            </a:r>
+          </a:p>
+        </p:txBody>
+      </p:sp>
+      <p:cxnSp>
+        <p:nvCxnSpPr>
+          <p:cNvPr id="13" name="Connector 12"/>
+          <p:cNvCxnSpPr/>
+          <p:nvPr/>
+        </p:nvCxnSpPr>
+        <p:spPr>
+          <a:xfrm>
+            <a:off x="3200400" y="2560320"/>
+            <a:ext cx="1554480" cy="0"/>
+          </a:xfrm>
+          <a:prstGeom prst="line">
+            <a:avLst/>
+          </a:prstGeom>
+          <a:ln w="22225">
+            <a:solidFill>
+              <a:srgbClr val="666666"/>
+            </a:solidFill>
+            <a:tailEnd type="triangle" w="med" len="med"/>
+          </a:ln>
+        </p:spPr>
+        <p:style>
+          <a:lnRef idx="2">
+            <a:schemeClr val="accent1"/>
+          </a:lnRef>
+          <a:fillRef idx="0">
+            <a:schemeClr val="accent1"/>
+          </a:fillRef>
+          <a:effectRef idx="1">
+            <a:schemeClr val="accent1"/>
+          </a:effectRef>
+          <a:fontRef idx="minor">
+            <a:schemeClr val="tx1"/>
+          </a:fontRef>
+        </p:style>
+      </p:cxnSp>
+      <p:sp>
+        <p:nvSpPr>
+          <p:cNvPr id="14" name="TextBox 13"/>
+          <p:cNvSpPr txBox="1"/>
+          <p:nvPr/>
+        </p:nvSpPr>
+        <p:spPr>
+          <a:xfrm>
+            <a:off x="3154679" y="2359152"/>
+            <a:ext cx="1645920" cy="320040"/>
+          </a:xfrm>
+          <a:prstGeom prst="rect">
+            <a:avLst/>
+          </a:prstGeom>
+          <a:noFill/>
+        </p:spPr>
+        <p:txBody>
+          <a:bodyPr wrap="square">
+            <a:spAutoFit/>
+          </a:bodyPr>
+          <a:lstStyle/>
+          <a:p>
+            <a:pPr algn="ctr"/>
+            <a:r>
+              <a:rPr sz="1000" b="0" i="1">
+                <a:solidFill>
+                  <a:srgbClr val="666666"/>
+                </a:solidFill>
+                <a:latin typeface="Calibri"/>
+              </a:rPr>
+              <a:t>HTTPS/JSON</a:t>
+            </a:r>
+          </a:p>
+        </p:txBody>
+      </p:sp>
+      <p:cxnSp>
+        <p:nvCxnSpPr>
+          <p:cNvPr id="15" name="Connector 14"/>
+          <p:cNvCxnSpPr/>
+          <p:nvPr/>
+        </p:nvCxnSpPr>
+        <p:spPr>
+          <a:xfrm>
+            <a:off x="7132320" y="2560320"/>
+            <a:ext cx="1463040" cy="0"/>
+          </a:xfrm>
+          <a:prstGeom prst="line">
+            <a:avLst/>
+          </a:prstGeom>
+          <a:ln w="22225">
+            <a:solidFill>
+              <a:srgbClr val="666666"/>
+            </a:solidFill>
+            <a:tailEnd type="triangle" w="med" len="med"/>
+          </a:ln>
+        </p:spPr>
+        <p:style>
+          <a:lnRef idx="2">
+            <a:schemeClr val="accent1"/>
+          </a:lnRef>
+          <a:fillRef idx="0">
+            <a:schemeClr val="accent1"/>
+          </a:fillRef>
+          <a:effectRef idx="1">
+            <a:schemeClr val="accent1"/>
+          </a:effectRef>
+          <a:fontRef idx="minor">
+            <a:schemeClr val="tx1"/>
+          </a:fontRef>
+        </p:style>
+      </p:cxnSp>
       <p:sp>
         <p:nvSpPr>
           <p:cNvPr id="16" name="TextBox 15"/>
@@ -13736,8 +11318,8 @@
         </p:nvSpPr>
         <p:spPr>
           <a:xfrm>
-            <a:off x="594360" y="4251960"/>
-            <a:ext cx="438912" cy="438912"/>
+            <a:off x="7040880" y="2359152"/>
+            <a:ext cx="1645920" cy="320040"/>
           </a:xfrm>
           <a:prstGeom prst="rect">
             <a:avLst/>
@@ -13745,244 +11327,132 @@
           <a:noFill/>
         </p:spPr>
         <p:txBody>
-          <a:bodyPr wrap="square" anchor="ctr"/>
+          <a:bodyPr wrap="square">
+            <a:spAutoFit/>
+          </a:bodyPr>
           <a:lstStyle/>
           <a:p>
             <a:pPr algn="ctr"/>
             <a:r>
-              <a:rPr sz="1600" b="1" i="0">
-                <a:solidFill>
-                  <a:srgbClr val="FFFFFF"/>
-                </a:solidFill>
-                <a:latin typeface="Calibri"/>
-              </a:rPr>
-              <a:t>3</a:t>
-            </a:r>
-          </a:p>
-        </p:txBody>
-      </p:sp>
-      <p:sp>
-        <p:nvSpPr>
-          <p:cNvPr id="17" name="TextBox 16"/>
-          <p:cNvSpPr txBox="1"/>
-          <p:nvPr/>
-        </p:nvSpPr>
-        <p:spPr>
-          <a:xfrm>
-            <a:off x="1188720" y="4037076"/>
-            <a:ext cx="10271455" cy="886968"/>
-          </a:xfrm>
-          <a:prstGeom prst="rect">
-            <a:avLst/>
-          </a:prstGeom>
-          <a:noFill/>
-        </p:spPr>
-        <p:txBody>
-          <a:bodyPr wrap="square" anchor="ctr"/>
-          <a:lstStyle/>
-          <a:p>
-            <a:r>
-              <a:rPr sz="1500" b="1" i="0">
-                <a:solidFill>
-                  <a:srgbClr val="095292"/>
-                </a:solidFill>
-                <a:latin typeface="Calibri"/>
-              </a:rPr>
-              <a:t>Pega y renderiza en la plataforma del curso</a:t>
-            </a:r>
-          </a:p>
-          <a:p>
-            <a:pPr>
-              <a:spcBef>
-                <a:spcPts val="200"/>
-              </a:spcBef>
-            </a:pPr>
-            <a:r>
-              <a:rPr sz="1300" b="0" i="0">
-                <a:solidFill>
-                  <a:srgbClr val="333333"/>
-                </a:solidFill>
-                <a:latin typeface="Calibri"/>
-              </a:rPr>
-              <a:t>Pega ese codigo en la caja de texto de la pregunta y mira como lo dibuja la plataforma. Si no renderiza, corrige ahi mismo: lo que se califica es el diagrama renderizado dentro de la plataforma del curso.</a:t>
-            </a:r>
-          </a:p>
-        </p:txBody>
-      </p:sp>
-      <p:sp>
-        <p:nvSpPr>
-          <p:cNvPr id="18" name="Rounded Rectangle 17"/>
-          <p:cNvSpPr/>
-          <p:nvPr/>
-        </p:nvSpPr>
-        <p:spPr>
-          <a:xfrm>
-            <a:off x="457200" y="5088636"/>
-            <a:ext cx="11277295" cy="1051560"/>
-          </a:xfrm>
-          <a:prstGeom prst="roundRect">
-            <a:avLst>
-              <a:gd name="adj" fmla="val 12000"/>
-            </a:avLst>
-          </a:prstGeom>
-          <a:solidFill>
-            <a:srgbClr val="E8F4FA"/>
-          </a:solidFill>
-          <a:ln>
-            <a:noFill/>
+              <a:rPr sz="1000" b="0" i="1">
+                <a:solidFill>
+                  <a:srgbClr val="666666"/>
+                </a:solidFill>
+                <a:latin typeface="Calibri"/>
+              </a:rPr>
+              <a:t>TCP/SQL</a:t>
+            </a:r>
+          </a:p>
+        </p:txBody>
+      </p:sp>
+      <p:cxnSp>
+        <p:nvCxnSpPr>
+          <p:cNvPr id="17" name="Connector 16"/>
+          <p:cNvCxnSpPr/>
+          <p:nvPr/>
+        </p:nvCxnSpPr>
+        <p:spPr>
+          <a:xfrm>
+            <a:off x="5943600" y="3108960"/>
+            <a:ext cx="0" cy="822960"/>
+          </a:xfrm>
+          <a:prstGeom prst="line">
+            <a:avLst/>
+          </a:prstGeom>
+          <a:ln w="22225">
+            <a:solidFill>
+              <a:srgbClr val="666666"/>
+            </a:solidFill>
+            <a:tailEnd type="triangle" w="med" len="med"/>
           </a:ln>
         </p:spPr>
         <p:style>
-          <a:lnRef idx="1">
+          <a:lnRef idx="2">
             <a:schemeClr val="accent1"/>
           </a:lnRef>
-          <a:fillRef idx="3">
+          <a:fillRef idx="0">
             <a:schemeClr val="accent1"/>
           </a:fillRef>
-          <a:effectRef idx="2">
+          <a:effectRef idx="1">
             <a:schemeClr val="accent1"/>
           </a:effectRef>
           <a:fontRef idx="minor">
-            <a:schemeClr val="lt1"/>
+            <a:schemeClr val="tx1"/>
           </a:fontRef>
         </p:style>
-        <p:txBody>
-          <a:bodyPr rtlCol="0" anchor="ctr"/>
-          <a:lstStyle/>
-          <a:p>
-            <a:pPr algn="ctr"/>
-          </a:p>
-        </p:txBody>
-      </p:sp>
-      <p:sp>
-        <p:nvSpPr>
-          <p:cNvPr id="19" name="Rounded Rectangle 18"/>
-          <p:cNvSpPr/>
-          <p:nvPr/>
-        </p:nvSpPr>
-        <p:spPr>
-          <a:xfrm>
-            <a:off x="594360" y="5394960"/>
-            <a:ext cx="438912" cy="438912"/>
-          </a:xfrm>
-          <a:prstGeom prst="roundRect">
-            <a:avLst>
-              <a:gd name="adj" fmla="val 12000"/>
-            </a:avLst>
-          </a:prstGeom>
-          <a:solidFill>
-            <a:srgbClr val="095292"/>
-          </a:solidFill>
-          <a:ln>
-            <a:noFill/>
-          </a:ln>
-        </p:spPr>
-        <p:style>
-          <a:lnRef idx="1">
-            <a:schemeClr val="accent1"/>
-          </a:lnRef>
-          <a:fillRef idx="3">
-            <a:schemeClr val="accent1"/>
-          </a:fillRef>
-          <a:effectRef idx="2">
-            <a:schemeClr val="accent1"/>
-          </a:effectRef>
-          <a:fontRef idx="minor">
-            <a:schemeClr val="lt1"/>
-          </a:fontRef>
-        </p:style>
-        <p:txBody>
-          <a:bodyPr rtlCol="0" anchor="ctr"/>
-          <a:lstStyle/>
-          <a:p>
-            <a:pPr algn="ctr"/>
+      </p:cxnSp>
+      <p:sp>
+        <p:nvSpPr>
+          <p:cNvPr id="18" name="TextBox 17"/>
+          <p:cNvSpPr txBox="1"/>
+          <p:nvPr/>
+        </p:nvSpPr>
+        <p:spPr>
+          <a:xfrm>
+            <a:off x="6053328" y="3319272"/>
+            <a:ext cx="1645920" cy="320040"/>
+          </a:xfrm>
+          <a:prstGeom prst="rect">
+            <a:avLst/>
+          </a:prstGeom>
+          <a:noFill/>
+        </p:spPr>
+        <p:txBody>
+          <a:bodyPr wrap="square">
+            <a:spAutoFit/>
+          </a:bodyPr>
+          <a:lstStyle/>
+          <a:p>
+            <a:pPr algn="l"/>
+            <a:r>
+              <a:rPr sz="1000" b="0" i="1">
+                <a:solidFill>
+                  <a:srgbClr val="666666"/>
+                </a:solidFill>
+                <a:latin typeface="Calibri"/>
+              </a:rPr>
+              <a:t>evento/cola (AMQP)</a:t>
+            </a:r>
+          </a:p>
+        </p:txBody>
+      </p:sp>
+      <p:sp>
+        <p:nvSpPr>
+          <p:cNvPr id="19" name="TextBox 18"/>
+          <p:cNvSpPr txBox="1"/>
+          <p:nvPr/>
+        </p:nvSpPr>
+        <p:spPr>
+          <a:xfrm>
+            <a:off x="457200" y="6263640"/>
+            <a:ext cx="11277295" cy="411480"/>
+          </a:xfrm>
+          <a:prstGeom prst="rect">
+            <a:avLst/>
+          </a:prstGeom>
+          <a:noFill/>
+        </p:spPr>
+        <p:txBody>
+          <a:bodyPr wrap="square">
+            <a:spAutoFit/>
+          </a:bodyPr>
+          <a:lstStyle/>
+          <a:p>
+            <a:r>
+              <a:rPr sz="1100" b="0" i="1">
+                <a:solidFill>
+                  <a:srgbClr val="666666"/>
+                </a:solidFill>
+                <a:latin typeface="Calibri"/>
+              </a:rPr>
+              <a:t>Lo que guarda datos va como ContainerDb, no como un Container más. La cuarta caja (el worker) existe porque el correo tarda: sin esa razón, no va. Y estos nombres deben reaparecer igual en el Deployment (Clase 7).</a:t>
+            </a:r>
           </a:p>
         </p:txBody>
       </p:sp>
       <p:sp>
         <p:nvSpPr>
           <p:cNvPr id="20" name="TextBox 19"/>
-          <p:cNvSpPr txBox="1"/>
-          <p:nvPr/>
-        </p:nvSpPr>
-        <p:spPr>
-          <a:xfrm>
-            <a:off x="594360" y="5394960"/>
-            <a:ext cx="438912" cy="438912"/>
-          </a:xfrm>
-          <a:prstGeom prst="rect">
-            <a:avLst/>
-          </a:prstGeom>
-          <a:noFill/>
-        </p:spPr>
-        <p:txBody>
-          <a:bodyPr wrap="square" anchor="ctr"/>
-          <a:lstStyle/>
-          <a:p>
-            <a:pPr algn="ctr"/>
-            <a:r>
-              <a:rPr sz="1600" b="1" i="0">
-                <a:solidFill>
-                  <a:srgbClr val="FFFFFF"/>
-                </a:solidFill>
-                <a:latin typeface="Calibri"/>
-              </a:rPr>
-              <a:t>4</a:t>
-            </a:r>
-          </a:p>
-        </p:txBody>
-      </p:sp>
-      <p:sp>
-        <p:nvSpPr>
-          <p:cNvPr id="21" name="TextBox 20"/>
-          <p:cNvSpPr txBox="1"/>
-          <p:nvPr/>
-        </p:nvSpPr>
-        <p:spPr>
-          <a:xfrm>
-            <a:off x="1188720" y="5180076"/>
-            <a:ext cx="10271455" cy="886968"/>
-          </a:xfrm>
-          <a:prstGeom prst="rect">
-            <a:avLst/>
-          </a:prstGeom>
-          <a:noFill/>
-        </p:spPr>
-        <p:txBody>
-          <a:bodyPr wrap="square" anchor="ctr"/>
-          <a:lstStyle/>
-          <a:p>
-            <a:r>
-              <a:rPr sz="1500" b="1" i="0">
-                <a:solidFill>
-                  <a:srgbClr val="095292"/>
-                </a:solidFill>
-                <a:latin typeface="Calibri"/>
-              </a:rPr>
-              <a:t>Guarda el PNG para tu PI</a:t>
-            </a:r>
-          </a:p>
-          <a:p>
-            <a:pPr>
-              <a:spcBef>
-                <a:spcPts val="200"/>
-              </a:spcBef>
-            </a:pPr>
-            <a:r>
-              <a:rPr sz="1300" b="0" i="0">
-                <a:solidFill>
-                  <a:srgbClr val="333333"/>
-                </a:solidFill>
-                <a:latin typeface="Calibri"/>
-              </a:rPr>
-              <a:t>Exporta tambien la imagen a la carpeta de tu Proyecto Integrador. Esa copia es para tu informe; no reemplaza la respuesta en la plataforma.</a:t>
-            </a:r>
-          </a:p>
-        </p:txBody>
-      </p:sp>
-      <p:sp>
-        <p:nvSpPr>
-          <p:cNvPr id="22" name="TextBox 21"/>
           <p:cNvSpPr txBox="1"/>
           <p:nvPr/>
         </p:nvSpPr>
@@ -14156,21 +11626,142 @@
                 </a:solidFill>
                 <a:latin typeface="Calibri"/>
               </a:rPr>
-              <a:t>PI CloudLite — entregable de hoy</a:t>
-            </a:r>
-          </a:p>
-        </p:txBody>
-      </p:sp>
-      <p:sp>
-        <p:nvSpPr>
-          <p:cNvPr id="5" name="TextBox 4"/>
+              <a:t>Microservicios de verdad vs microservicios teatro</a:t>
+            </a:r>
+          </a:p>
+        </p:txBody>
+      </p:sp>
+      <p:sp>
+        <p:nvSpPr>
+          <p:cNvPr id="5" name="Rounded Rectangle 4"/>
+          <p:cNvSpPr/>
+          <p:nvPr/>
+        </p:nvSpPr>
+        <p:spPr>
+          <a:xfrm>
+            <a:off x="457200" y="1261872"/>
+            <a:ext cx="5478627" cy="5093208"/>
+          </a:xfrm>
+          <a:prstGeom prst="roundRect">
+            <a:avLst>
+              <a:gd name="adj" fmla="val 12000"/>
+            </a:avLst>
+          </a:prstGeom>
+          <a:solidFill>
+            <a:srgbClr val="FBE4E4"/>
+          </a:solidFill>
+          <a:ln>
+            <a:noFill/>
+          </a:ln>
+        </p:spPr>
+        <p:style>
+          <a:lnRef idx="1">
+            <a:schemeClr val="accent1"/>
+          </a:lnRef>
+          <a:fillRef idx="3">
+            <a:schemeClr val="accent1"/>
+          </a:fillRef>
+          <a:effectRef idx="2">
+            <a:schemeClr val="accent1"/>
+          </a:effectRef>
+          <a:fontRef idx="minor">
+            <a:schemeClr val="lt1"/>
+          </a:fontRef>
+        </p:style>
+        <p:txBody>
+          <a:bodyPr rtlCol="0" anchor="ctr"/>
+          <a:lstStyle/>
+          <a:p>
+            <a:pPr algn="ctr"/>
+          </a:p>
+        </p:txBody>
+      </p:sp>
+      <p:sp>
+        <p:nvSpPr>
+          <p:cNvPr id="6" name="Rectangle 5"/>
+          <p:cNvSpPr/>
+          <p:nvPr/>
+        </p:nvSpPr>
+        <p:spPr>
+          <a:xfrm>
+            <a:off x="457200" y="1261872"/>
+            <a:ext cx="5478627" cy="502920"/>
+          </a:xfrm>
+          <a:prstGeom prst="rect">
+            <a:avLst/>
+          </a:prstGeom>
+          <a:solidFill>
+            <a:srgbClr val="A02030"/>
+          </a:solidFill>
+          <a:ln>
+            <a:noFill/>
+          </a:ln>
+        </p:spPr>
+        <p:style>
+          <a:lnRef idx="1">
+            <a:schemeClr val="accent1"/>
+          </a:lnRef>
+          <a:fillRef idx="3">
+            <a:schemeClr val="accent1"/>
+          </a:fillRef>
+          <a:effectRef idx="2">
+            <a:schemeClr val="accent1"/>
+          </a:effectRef>
+          <a:fontRef idx="minor">
+            <a:schemeClr val="lt1"/>
+          </a:fontRef>
+        </p:style>
+        <p:txBody>
+          <a:bodyPr rtlCol="0" anchor="ctr"/>
+          <a:lstStyle/>
+          <a:p>
+            <a:pPr algn="ctr"/>
+          </a:p>
+        </p:txBody>
+      </p:sp>
+      <p:sp>
+        <p:nvSpPr>
+          <p:cNvPr id="7" name="TextBox 6"/>
           <p:cNvSpPr txBox="1"/>
           <p:nvPr/>
         </p:nvSpPr>
         <p:spPr>
           <a:xfrm>
-            <a:off x="457200" y="1170432"/>
-            <a:ext cx="11277295" cy="5230368"/>
+            <a:off x="594360" y="1353312"/>
+            <a:ext cx="5204307" cy="365760"/>
+          </a:xfrm>
+          <a:prstGeom prst="rect">
+            <a:avLst/>
+          </a:prstGeom>
+          <a:noFill/>
+        </p:spPr>
+        <p:txBody>
+          <a:bodyPr wrap="square" anchor="ctr"/>
+          <a:lstStyle/>
+          <a:p>
+            <a:pPr algn="ctr"/>
+            <a:r>
+              <a:rPr sz="1600" b="1" i="0">
+                <a:solidFill>
+                  <a:srgbClr val="FFFFFF"/>
+                </a:solidFill>
+                <a:latin typeface="Calibri"/>
+              </a:rPr>
+              <a:t>Teatro (lo que NO queremos)</a:t>
+            </a:r>
+          </a:p>
+        </p:txBody>
+      </p:sp>
+      <p:sp>
+        <p:nvSpPr>
+          <p:cNvPr id="8" name="TextBox 7"/>
+          <p:cNvSpPr txBox="1"/>
+          <p:nvPr/>
+        </p:nvSpPr>
+        <p:spPr>
+          <a:xfrm>
+            <a:off x="621792" y="1901952"/>
+            <a:ext cx="5158587" cy="4498848"/>
           </a:xfrm>
           <a:prstGeom prst="rect">
             <a:avLst/>
@@ -14189,31 +11780,13 @@
               </a:spcAft>
             </a:pPr>
             <a:r>
-              <a:rPr sz="2000" b="0" i="0">
-                <a:solidFill>
-                  <a:srgbClr val="333333"/>
-                </a:solidFill>
-                <a:latin typeface="Calibri"/>
-              </a:rPr>
-              <a:t>–   </a:t>
-            </a:r>
-            <a:r>
-              <a:rPr sz="2000" b="1" i="0">
-                <a:solidFill>
-                  <a:srgbClr val="333333"/>
-                </a:solidFill>
-                <a:latin typeface="Calibri"/>
-              </a:rPr>
-              <a:t>Entregable:</a:t>
-            </a:r>
-            <a:r>
-              <a:rPr sz="2000" b="0" i="0">
-                <a:solidFill>
-                  <a:srgbClr val="333333"/>
-                </a:solidFill>
-                <a:latin typeface="Calibri"/>
-              </a:rPr>
-              <a:t> Diagrama C4 Container en Mermaid + tabla de 3 contratos + 3 riesgos de distribución</a:t>
+              <a:rPr sz="1500" b="0" i="0">
+                <a:solidFill>
+                  <a:srgbClr val="333333"/>
+                </a:solidFill>
+                <a:latin typeface="Calibri"/>
+              </a:rPr>
+              <a:t>–   12 servicios para un equipo de 3</a:t>
             </a:r>
           </a:p>
           <a:p>
@@ -14223,22 +11796,13 @@
               </a:spcAft>
             </a:pPr>
             <a:r>
-              <a:rPr sz="2000" b="0" i="0">
-                <a:solidFill>
-                  <a:srgbClr val="333333"/>
-                </a:solidFill>
-                <a:latin typeface="Calibri"/>
-              </a:rPr>
-              <a:t>–   Herramienta: </a:t>
-            </a:r>
-            <a:r>
-              <a:rPr sz="2000" b="1" i="0">
-                <a:solidFill>
-                  <a:srgbClr val="333333"/>
-                </a:solidFill>
-                <a:latin typeface="Calibri"/>
-              </a:rPr>
-              <a:t>draw.io o Excalidraw para bocetar · Mermaid dentro de la plataforma del curso para entregar</a:t>
+              <a:rPr sz="1500" b="0" i="0">
+                <a:solidFill>
+                  <a:srgbClr val="333333"/>
+                </a:solidFill>
+                <a:latin typeface="Calibri"/>
+              </a:rPr>
+              <a:t>–   Se separan por capricho tecnico, no por negocio</a:t>
             </a:r>
           </a:p>
           <a:p>
@@ -14248,31 +11812,13 @@
               </a:spcAft>
             </a:pPr>
             <a:r>
-              <a:rPr sz="2000" b="0" i="0">
-                <a:solidFill>
-                  <a:srgbClr val="333333"/>
-                </a:solidFill>
-                <a:latin typeface="Calibri"/>
-              </a:rPr>
-              <a:t>–   Todo lo que construyan hoy entra al </a:t>
-            </a:r>
-            <a:r>
-              <a:rPr sz="2000" b="1" i="0">
-                <a:solidFill>
-                  <a:srgbClr val="333333"/>
-                </a:solidFill>
-                <a:latin typeface="Calibri"/>
-              </a:rPr>
-              <a:t>informe/repo del PI</a:t>
-            </a:r>
-            <a:r>
-              <a:rPr sz="2000" b="0" i="0">
-                <a:solidFill>
-                  <a:srgbClr val="333333"/>
-                </a:solidFill>
-                <a:latin typeface="Calibri"/>
-              </a:rPr>
-              <a:t> (no es lab suelto).</a:t>
+              <a:rPr sz="1500" b="0" i="0">
+                <a:solidFill>
+                  <a:srgbClr val="333333"/>
+                </a:solidFill>
+                <a:latin typeface="Calibri"/>
+              </a:rPr>
+              <a:t>–   Flechas sin protocolo ni verbo</a:t>
             </a:r>
           </a:p>
           <a:p>
@@ -14282,20 +11828,228 @@
               </a:spcAft>
             </a:pPr>
             <a:r>
-              <a:rPr sz="2000" b="0" i="0">
-                <a:solidFill>
-                  <a:srgbClr val="333333"/>
-                </a:solidFill>
-                <a:latin typeface="Calibri"/>
-              </a:rPr>
-              <a:t>–   Individual por defecto · el docente puede autorizar equipos de 2–3; la entrega en la plataforma del curso siempre es individual.</a:t>
-            </a:r>
-          </a:p>
-        </p:txBody>
-      </p:sp>
-      <p:sp>
-        <p:nvSpPr>
-          <p:cNvPr id="6" name="TextBox 5"/>
+              <a:rPr sz="1500" b="0" i="0">
+                <a:solidFill>
+                  <a:srgbClr val="333333"/>
+                </a:solidFill>
+                <a:latin typeface="Calibri"/>
+              </a:rPr>
+              <a:t>–   Nadie sabe explicar por que ese corte</a:t>
+            </a:r>
+          </a:p>
+        </p:txBody>
+      </p:sp>
+      <p:sp>
+        <p:nvSpPr>
+          <p:cNvPr id="9" name="Rounded Rectangle 8"/>
+          <p:cNvSpPr/>
+          <p:nvPr/>
+        </p:nvSpPr>
+        <p:spPr>
+          <a:xfrm>
+            <a:off x="6255867" y="1261872"/>
+            <a:ext cx="5478627" cy="5093208"/>
+          </a:xfrm>
+          <a:prstGeom prst="roundRect">
+            <a:avLst>
+              <a:gd name="adj" fmla="val 12000"/>
+            </a:avLst>
+          </a:prstGeom>
+          <a:solidFill>
+            <a:srgbClr val="E8F4FA"/>
+          </a:solidFill>
+          <a:ln>
+            <a:noFill/>
+          </a:ln>
+        </p:spPr>
+        <p:style>
+          <a:lnRef idx="1">
+            <a:schemeClr val="accent1"/>
+          </a:lnRef>
+          <a:fillRef idx="3">
+            <a:schemeClr val="accent1"/>
+          </a:fillRef>
+          <a:effectRef idx="2">
+            <a:schemeClr val="accent1"/>
+          </a:effectRef>
+          <a:fontRef idx="minor">
+            <a:schemeClr val="lt1"/>
+          </a:fontRef>
+        </p:style>
+        <p:txBody>
+          <a:bodyPr rtlCol="0" anchor="ctr"/>
+          <a:lstStyle/>
+          <a:p>
+            <a:pPr algn="ctr"/>
+          </a:p>
+        </p:txBody>
+      </p:sp>
+      <p:sp>
+        <p:nvSpPr>
+          <p:cNvPr id="10" name="Rectangle 9"/>
+          <p:cNvSpPr/>
+          <p:nvPr/>
+        </p:nvSpPr>
+        <p:spPr>
+          <a:xfrm>
+            <a:off x="6255867" y="1261872"/>
+            <a:ext cx="5478627" cy="502920"/>
+          </a:xfrm>
+          <a:prstGeom prst="rect">
+            <a:avLst/>
+          </a:prstGeom>
+          <a:solidFill>
+            <a:srgbClr val="095292"/>
+          </a:solidFill>
+          <a:ln>
+            <a:noFill/>
+          </a:ln>
+        </p:spPr>
+        <p:style>
+          <a:lnRef idx="1">
+            <a:schemeClr val="accent1"/>
+          </a:lnRef>
+          <a:fillRef idx="3">
+            <a:schemeClr val="accent1"/>
+          </a:fillRef>
+          <a:effectRef idx="2">
+            <a:schemeClr val="accent1"/>
+          </a:effectRef>
+          <a:fontRef idx="minor">
+            <a:schemeClr val="lt1"/>
+          </a:fontRef>
+        </p:style>
+        <p:txBody>
+          <a:bodyPr rtlCol="0" anchor="ctr"/>
+          <a:lstStyle/>
+          <a:p>
+            <a:pPr algn="ctr"/>
+          </a:p>
+        </p:txBody>
+      </p:sp>
+      <p:sp>
+        <p:nvSpPr>
+          <p:cNvPr id="11" name="TextBox 10"/>
+          <p:cNvSpPr txBox="1"/>
+          <p:nvPr/>
+        </p:nvSpPr>
+        <p:spPr>
+          <a:xfrm>
+            <a:off x="6393027" y="1353312"/>
+            <a:ext cx="5204307" cy="365760"/>
+          </a:xfrm>
+          <a:prstGeom prst="rect">
+            <a:avLst/>
+          </a:prstGeom>
+          <a:noFill/>
+        </p:spPr>
+        <p:txBody>
+          <a:bodyPr wrap="square" anchor="ctr"/>
+          <a:lstStyle/>
+          <a:p>
+            <a:pPr algn="ctr"/>
+            <a:r>
+              <a:rPr sz="1600" b="1" i="0">
+                <a:solidFill>
+                  <a:srgbClr val="FFFFFF"/>
+                </a:solidFill>
+                <a:latin typeface="Calibri"/>
+              </a:rPr>
+              <a:t>Frontera justificada</a:t>
+            </a:r>
+          </a:p>
+        </p:txBody>
+      </p:sp>
+      <p:sp>
+        <p:nvSpPr>
+          <p:cNvPr id="12" name="TextBox 11"/>
+          <p:cNvSpPr txBox="1"/>
+          <p:nvPr/>
+        </p:nvSpPr>
+        <p:spPr>
+          <a:xfrm>
+            <a:off x="6420459" y="1901952"/>
+            <a:ext cx="5158587" cy="4498848"/>
+          </a:xfrm>
+          <a:prstGeom prst="rect">
+            <a:avLst/>
+          </a:prstGeom>
+          <a:noFill/>
+        </p:spPr>
+        <p:txBody>
+          <a:bodyPr wrap="square">
+            <a:spAutoFit/>
+          </a:bodyPr>
+          <a:lstStyle/>
+          <a:p>
+            <a:pPr>
+              <a:spcAft>
+                <a:spcPts val="800"/>
+              </a:spcAft>
+            </a:pPr>
+            <a:r>
+              <a:rPr sz="1500" b="0" i="0">
+                <a:solidFill>
+                  <a:srgbClr val="333333"/>
+                </a:solidFill>
+                <a:latin typeface="Calibri"/>
+              </a:rPr>
+              <a:t>–   2-5 contenedores logicos, cada uno con su razon</a:t>
+            </a:r>
+          </a:p>
+          <a:p>
+            <a:pPr>
+              <a:spcAft>
+                <a:spcPts val="800"/>
+              </a:spcAft>
+            </a:pPr>
+            <a:r>
+              <a:rPr sz="1500" b="0" i="0">
+                <a:solidFill>
+                  <a:srgbClr val="333333"/>
+                </a:solidFill>
+                <a:latin typeface="Calibri"/>
+              </a:rPr>
+              <a:t>–   Frontera = responsabilidad de negocio</a:t>
+            </a:r>
+          </a:p>
+          <a:p>
+            <a:pPr>
+              <a:spcAft>
+                <a:spcPts val="800"/>
+              </a:spcAft>
+            </a:pPr>
+            <a:r>
+              <a:rPr sz="1500" b="0" i="0">
+                <a:solidFill>
+                  <a:srgbClr val="333333"/>
+                </a:solidFill>
+                <a:latin typeface="Calibri"/>
+              </a:rPr>
+              <a:t>–   Cada flecha: protocolo + verbo (HTTP/JSON, 'reserva')</a:t>
+            </a:r>
+          </a:p>
+          <a:p>
+            <a:pPr>
+              <a:spcAft>
+                <a:spcPts val="800"/>
+              </a:spcAft>
+            </a:pPr>
+            <a:r>
+              <a:rPr sz="1500" b="0" i="0">
+                <a:solidFill>
+                  <a:srgbClr val="333333"/>
+                </a:solidFill>
+                <a:latin typeface="Calibri"/>
+              </a:rPr>
+              <a:t>–   Se explica en 60 s sin leer notas</a:t>
+            </a:r>
+          </a:p>
+        </p:txBody>
+      </p:sp>
+      <p:sp>
+        <p:nvSpPr>
+          <p:cNvPr id="13" name="TextBox 12"/>
           <p:cNvSpPr txBox="1"/>
           <p:nvPr/>
         </p:nvSpPr>
@@ -14469,21 +12223,141 @@
                 </a:solidFill>
                 <a:latin typeface="Calibri"/>
               </a:rPr>
-              <a:t>Manos a la obra (paso a paso)</a:t>
-            </a:r>
-          </a:p>
-        </p:txBody>
-      </p:sp>
-      <p:sp>
-        <p:nvSpPr>
-          <p:cNvPr id="5" name="TextBox 4"/>
+              <a:t>C4Container en Mermaid: el molde que la plataforma del curso renderiza</a:t>
+            </a:r>
+          </a:p>
+        </p:txBody>
+      </p:sp>
+      <p:sp>
+        <p:nvSpPr>
+          <p:cNvPr id="5" name="Rounded Rectangle 4"/>
+          <p:cNvSpPr/>
+          <p:nvPr/>
+        </p:nvSpPr>
+        <p:spPr>
+          <a:xfrm>
+            <a:off x="457200" y="1261872"/>
+            <a:ext cx="11277295" cy="4773168"/>
+          </a:xfrm>
+          <a:prstGeom prst="roundRect">
+            <a:avLst>
+              <a:gd name="adj" fmla="val 12000"/>
+            </a:avLst>
+          </a:prstGeom>
+          <a:solidFill>
+            <a:srgbClr val="1E2A38"/>
+          </a:solidFill>
+          <a:ln>
+            <a:noFill/>
+          </a:ln>
+        </p:spPr>
+        <p:style>
+          <a:lnRef idx="1">
+            <a:schemeClr val="accent1"/>
+          </a:lnRef>
+          <a:fillRef idx="3">
+            <a:schemeClr val="accent1"/>
+          </a:fillRef>
+          <a:effectRef idx="2">
+            <a:schemeClr val="accent1"/>
+          </a:effectRef>
+          <a:fontRef idx="minor">
+            <a:schemeClr val="lt1"/>
+          </a:fontRef>
+        </p:style>
+        <p:txBody>
+          <a:bodyPr rtlCol="0" anchor="ctr"/>
+          <a:lstStyle/>
+          <a:p>
+            <a:pPr algn="ctr"/>
+          </a:p>
+        </p:txBody>
+      </p:sp>
+      <p:sp>
+        <p:nvSpPr>
+          <p:cNvPr id="6" name="Rectangle 5"/>
+          <p:cNvSpPr/>
+          <p:nvPr/>
+        </p:nvSpPr>
+        <p:spPr>
+          <a:xfrm>
+            <a:off x="457200" y="1261872"/>
+            <a:ext cx="11277295" cy="320040"/>
+          </a:xfrm>
+          <a:prstGeom prst="rect">
+            <a:avLst/>
+          </a:prstGeom>
+          <a:solidFill>
+            <a:srgbClr val="095292"/>
+          </a:solidFill>
+          <a:ln>
+            <a:noFill/>
+          </a:ln>
+        </p:spPr>
+        <p:style>
+          <a:lnRef idx="1">
+            <a:schemeClr val="accent1"/>
+          </a:lnRef>
+          <a:fillRef idx="3">
+            <a:schemeClr val="accent1"/>
+          </a:fillRef>
+          <a:effectRef idx="2">
+            <a:schemeClr val="accent1"/>
+          </a:effectRef>
+          <a:fontRef idx="minor">
+            <a:schemeClr val="lt1"/>
+          </a:fontRef>
+        </p:style>
+        <p:txBody>
+          <a:bodyPr rtlCol="0" anchor="ctr"/>
+          <a:lstStyle/>
+          <a:p>
+            <a:pPr algn="ctr"/>
+          </a:p>
+        </p:txBody>
+      </p:sp>
+      <p:sp>
+        <p:nvSpPr>
+          <p:cNvPr id="7" name="TextBox 6"/>
           <p:cNvSpPr txBox="1"/>
           <p:nvPr/>
         </p:nvSpPr>
         <p:spPr>
           <a:xfrm>
-            <a:off x="457200" y="1170432"/>
-            <a:ext cx="11277295" cy="5230368"/>
+            <a:off x="685800" y="1307592"/>
+            <a:ext cx="10820095" cy="256032"/>
+          </a:xfrm>
+          <a:prstGeom prst="rect">
+            <a:avLst/>
+          </a:prstGeom>
+          <a:noFill/>
+        </p:spPr>
+        <p:txBody>
+          <a:bodyPr wrap="square" anchor="ctr"/>
+          <a:lstStyle/>
+          <a:p>
+            <a:r>
+              <a:rPr sz="1000" b="1" i="0">
+                <a:solidFill>
+                  <a:srgbClr val="269CCB"/>
+                </a:solidFill>
+                <a:latin typeface="Calibri"/>
+              </a:rPr>
+              <a:t>● ● ●</a:t>
+            </a:r>
+          </a:p>
+        </p:txBody>
+      </p:sp>
+      <p:sp>
+        <p:nvSpPr>
+          <p:cNvPr id="8" name="TextBox 7"/>
+          <p:cNvSpPr txBox="1"/>
+          <p:nvPr/>
+        </p:nvSpPr>
+        <p:spPr>
+          <a:xfrm>
+            <a:off x="777240" y="1719072"/>
+            <a:ext cx="10637215" cy="4133087"/>
           </a:xfrm>
           <a:prstGeom prst="rect">
             <a:avLst/>
@@ -14498,135 +12372,283 @@
           <a:p>
             <a:pPr>
               <a:spcAft>
-                <a:spcPts val="800"/>
+                <a:spcPts val="400"/>
               </a:spcAft>
             </a:pPr>
             <a:r>
-              <a:rPr sz="2000" b="1" i="0">
-                <a:solidFill>
-                  <a:srgbClr val="333333"/>
-                </a:solidFill>
-                <a:latin typeface="Calibri"/>
-              </a:rPr>
-              <a:t>1.</a:t>
-            </a:r>
-            <a:r>
-              <a:rPr sz="2000" b="0" i="0">
-                <a:solidFill>
-                  <a:srgbClr val="333333"/>
-                </a:solidFill>
-                <a:latin typeface="Calibri"/>
-              </a:rPr>
-              <a:t> Paso 1: decida en la pregunta 12 si su CloudLite es un monolito modular o microservicios, con los dos criterios aplicados a su caso (tamano del equipo con numero y plazo, y que partes cambian juntas) y lo que gana y pierde; verifique que no escribio «un poco de los dos», porque eso vale cero.</a:t>
+              <a:rPr sz="1400" b="0" i="0">
+                <a:solidFill>
+                  <a:srgbClr val="FFFFFF"/>
+                </a:solidFill>
+                <a:latin typeface="Calibri"/>
+              </a:rPr>
+              <a:t>C4Container</a:t>
             </a:r>
           </a:p>
           <a:p>
             <a:pPr>
               <a:spcAft>
-                <a:spcPts val="800"/>
+                <a:spcPts val="400"/>
               </a:spcAft>
             </a:pPr>
             <a:r>
-              <a:rPr sz="2000" b="0" i="0">
-                <a:solidFill>
-                  <a:srgbClr val="333333"/>
-                </a:solidFill>
-                <a:latin typeface="Calibri"/>
-              </a:rPr>
-              <a:t>–   </a:t>
-            </a:r>
-            <a:r>
-              <a:rPr sz="2000" b="1" i="0">
-                <a:solidFill>
-                  <a:srgbClr val="333333"/>
-                </a:solidFill>
-                <a:latin typeface="Calibri"/>
-              </a:rPr>
-              <a:t>2.</a:t>
-            </a:r>
-            <a:r>
-              <a:rPr sz="2000" b="0" i="0">
-                <a:solidFill>
-                  <a:srgbClr val="333333"/>
-                </a:solidFill>
-                <a:latin typeface="Calibri"/>
-              </a:rPr>
-              <a:t> Paso 2: modele en la pregunta 13 el C4 Container partiendo del C4 Context de la pregunta 3, con entre 2 y 5 contenedores coherentes con la decision anterior, los almacenes de datos como ContainerDb y toda flecha con protocolo y formato; verifique que los nombres de sistema, actores y sistemas externos sean identicos a los del Context.</a:t>
+              <a:rPr sz="1400" b="0" i="0">
+                <a:solidFill>
+                  <a:srgbClr val="FFFFFF"/>
+                </a:solidFill>
+                <a:latin typeface="Calibri"/>
+              </a:rPr>
+              <a:t>title Diagrama de contenedores - CloudLite Turnos</a:t>
             </a:r>
           </a:p>
           <a:p>
             <a:pPr>
               <a:spcAft>
-                <a:spcPts val="800"/>
+                <a:spcPts val="400"/>
               </a:spcAft>
             </a:pPr>
             <a:r>
-              <a:rPr sz="2000" b="0" i="0">
-                <a:solidFill>
-                  <a:srgbClr val="333333"/>
-                </a:solidFill>
-                <a:latin typeface="Calibri"/>
-              </a:rPr>
-              <a:t>–   </a:t>
-            </a:r>
-            <a:r>
-              <a:rPr sz="2000" b="1" i="0">
-                <a:solidFill>
-                  <a:srgbClr val="333333"/>
-                </a:solidFill>
-                <a:latin typeface="Calibri"/>
-              </a:rPr>
-              <a:t>3.</a:t>
-            </a:r>
-            <a:r>
-              <a:rPr sz="2000" b="0" i="0">
-                <a:solidFill>
-                  <a:srgbClr val="333333"/>
-                </a:solidFill>
-                <a:latin typeface="Calibri"/>
-              </a:rPr>
-              <a:t> Paso 3: liste en la pregunta 14 los 3 contratos con quien llama a quien usando los nombres exactos del diagrama, el verbo y la ruta (o el evento) y el error de negocio con su codigo y su significado en el dominio; verifique que al menos uno sea un 409 de conflicto y que ninguno diga «500 error del servidor».</a:t>
+              <a:rPr sz="1400" b="0" i="0">
+                <a:solidFill>
+                  <a:srgbClr val="FFFFFF"/>
+                </a:solidFill>
+                <a:latin typeface="Calibri"/>
+              </a:rPr>
+              <a:t>Person(cliente, "Cliente de la barberia", "Reserva y consulta sus turnos")</a:t>
             </a:r>
           </a:p>
           <a:p>
             <a:pPr>
               <a:spcAft>
-                <a:spcPts val="800"/>
+                <a:spcPts val="400"/>
               </a:spcAft>
             </a:pPr>
             <a:r>
-              <a:rPr sz="2000" b="0" i="0">
-                <a:solidFill>
-                  <a:srgbClr val="333333"/>
-                </a:solidFill>
-                <a:latin typeface="Calibri"/>
-              </a:rPr>
-              <a:t>–   </a:t>
-            </a:r>
-            <a:r>
-              <a:rPr sz="2000" b="1" i="0">
-                <a:solidFill>
-                  <a:srgbClr val="333333"/>
-                </a:solidFill>
-                <a:latin typeface="Calibri"/>
-              </a:rPr>
-              <a:t>4.</a:t>
-            </a:r>
-            <a:r>
-              <a:rPr sz="2000" b="0" i="0">
-                <a:solidFill>
-                  <a:srgbClr val="333333"/>
-                </a:solidFill>
-                <a:latin typeface="Calibri"/>
-              </a:rPr>
-              <a:t> Paso 4: analice en la pregunta 15 los tres riesgos de distribucion nombrando una caja concreta que se cae, contando los saltos de red de una operacion de punta a punta y nombrando un dato expuesto a inconsistencia; con esto la actividad del Corte 1 queda completa y se entrega en la plataforma del curso antes del en la fecha que indique el docentede esta semana.</a:t>
-            </a:r>
-          </a:p>
-        </p:txBody>
-      </p:sp>
-      <p:sp>
-        <p:nvSpPr>
-          <p:cNvPr id="6" name="TextBox 5"/>
+              <a:rPr sz="1400" b="0" i="0">
+                <a:solidFill>
+                  <a:srgbClr val="FFFFFF"/>
+                </a:solidFill>
+                <a:latin typeface="Calibri"/>
+              </a:rPr>
+              <a:t>System_Boundary(cloudlite, "CloudLite App") {</a:t>
+            </a:r>
+          </a:p>
+          <a:p>
+            <a:pPr>
+              <a:spcAft>
+                <a:spcPts val="400"/>
+              </a:spcAft>
+            </a:pPr>
+            <a:r>
+              <a:rPr sz="1400" b="0" i="0">
+                <a:solidFill>
+                  <a:srgbClr val="FFFFFF"/>
+                </a:solidFill>
+                <a:latin typeface="Calibri"/>
+              </a:rPr>
+              <a:t>  Container(spa, "App web", "React", "Muestra franjas libres y crea la reserva")</a:t>
+            </a:r>
+          </a:p>
+          <a:p>
+            <a:pPr>
+              <a:spcAft>
+                <a:spcPts val="400"/>
+              </a:spcAft>
+            </a:pPr>
+            <a:r>
+              <a:rPr sz="1400" b="0" i="0">
+                <a:solidFill>
+                  <a:srgbClr val="FFFFFF"/>
+                </a:solidFill>
+                <a:latin typeface="Calibri"/>
+              </a:rPr>
+              <a:t>  Container(api, "API de turnos", "Node.js", "Valida la franja y registra el turno")</a:t>
+            </a:r>
+          </a:p>
+          <a:p>
+            <a:pPr>
+              <a:spcAft>
+                <a:spcPts val="400"/>
+              </a:spcAft>
+            </a:pPr>
+            <a:r>
+              <a:rPr sz="1400" b="0" i="0">
+                <a:solidFill>
+                  <a:srgbClr val="FFFFFF"/>
+                </a:solidFill>
+                <a:latin typeface="Calibri"/>
+              </a:rPr>
+              <a:t>  ContainerDb(db, "Base de turnos", "PostgreSQL", "Turnos, clientes y horarios")</a:t>
+            </a:r>
+          </a:p>
+          <a:p>
+            <a:pPr>
+              <a:spcAft>
+                <a:spcPts val="400"/>
+              </a:spcAft>
+            </a:pPr>
+            <a:r>
+              <a:rPr sz="1400" b="0" i="0">
+                <a:solidFill>
+                  <a:srgbClr val="FFFFFF"/>
+                </a:solidFill>
+                <a:latin typeface="Calibri"/>
+              </a:rPr>
+              <a:t>  Container(worker, "Worker de avisos", "cola", "Envia el aviso, con reintentos")</a:t>
+            </a:r>
+          </a:p>
+          <a:p>
+            <a:pPr>
+              <a:spcAft>
+                <a:spcPts val="400"/>
+              </a:spcAft>
+            </a:pPr>
+            <a:r>
+              <a:rPr sz="1400" b="0" i="0">
+                <a:solidFill>
+                  <a:srgbClr val="FFFFFF"/>
+                </a:solidFill>
+                <a:latin typeface="Calibri"/>
+              </a:rPr>
+              <a:t>}</a:t>
+            </a:r>
+          </a:p>
+          <a:p>
+            <a:pPr>
+              <a:spcAft>
+                <a:spcPts val="400"/>
+              </a:spcAft>
+            </a:pPr>
+            <a:r>
+              <a:rPr sz="1400" b="0" i="0">
+                <a:solidFill>
+                  <a:srgbClr val="FFFFFF"/>
+                </a:solidFill>
+                <a:latin typeface="Calibri"/>
+              </a:rPr>
+              <a:t>System_Ext(correo, "Correo transaccional", "Entrega el correo al cliente")</a:t>
+            </a:r>
+          </a:p>
+          <a:p>
+            <a:pPr>
+              <a:spcAft>
+                <a:spcPts val="400"/>
+              </a:spcAft>
+            </a:pPr>
+            <a:r>
+              <a:rPr sz="1400" b="0" i="0">
+                <a:solidFill>
+                  <a:srgbClr val="FFFFFF"/>
+                </a:solidFill>
+                <a:latin typeface="Calibri"/>
+              </a:rPr>
+              <a:t>Rel(cliente, spa, "Reserva un turno", "HTTPS")</a:t>
+            </a:r>
+          </a:p>
+          <a:p>
+            <a:pPr>
+              <a:spcAft>
+                <a:spcPts val="400"/>
+              </a:spcAft>
+            </a:pPr>
+            <a:r>
+              <a:rPr sz="1400" b="0" i="0">
+                <a:solidFill>
+                  <a:srgbClr val="FFFFFF"/>
+                </a:solidFill>
+                <a:latin typeface="Calibri"/>
+              </a:rPr>
+              <a:t>Rel(spa, api, "POST /turnos", "HTTPS/JSON")</a:t>
+            </a:r>
+          </a:p>
+          <a:p>
+            <a:pPr>
+              <a:spcAft>
+                <a:spcPts val="400"/>
+              </a:spcAft>
+            </a:pPr>
+            <a:r>
+              <a:rPr sz="1400" b="0" i="0">
+                <a:solidFill>
+                  <a:srgbClr val="FFFFFF"/>
+                </a:solidFill>
+                <a:latin typeface="Calibri"/>
+              </a:rPr>
+              <a:t>Rel(api, db, "INSERT / SELECT de turnos", "TCP/SQL")</a:t>
+            </a:r>
+          </a:p>
+          <a:p>
+            <a:pPr>
+              <a:spcAft>
+                <a:spcPts val="400"/>
+              </a:spcAft>
+            </a:pPr>
+            <a:r>
+              <a:rPr sz="1400" b="0" i="0">
+                <a:solidFill>
+                  <a:srgbClr val="FFFFFF"/>
+                </a:solidFill>
+                <a:latin typeface="Calibri"/>
+              </a:rPr>
+              <a:t>Rel(api, worker, "Publica aviso-de-turno", "evento/cola (AMQP)")</a:t>
+            </a:r>
+          </a:p>
+          <a:p>
+            <a:pPr>
+              <a:spcAft>
+                <a:spcPts val="400"/>
+              </a:spcAft>
+            </a:pPr>
+            <a:r>
+              <a:rPr sz="1400" b="0" i="0">
+                <a:solidFill>
+                  <a:srgbClr val="FFFFFF"/>
+                </a:solidFill>
+                <a:latin typeface="Calibri"/>
+              </a:rPr>
+              <a:t>Rel(worker, correo, "Envia la confirmacion", "API REST sobre HTTPS")</a:t>
+            </a:r>
+          </a:p>
+        </p:txBody>
+      </p:sp>
+      <p:sp>
+        <p:nvSpPr>
+          <p:cNvPr id="9" name="TextBox 8"/>
+          <p:cNvSpPr txBox="1"/>
+          <p:nvPr/>
+        </p:nvSpPr>
+        <p:spPr>
+          <a:xfrm>
+            <a:off x="457200" y="6080760"/>
+            <a:ext cx="11277295" cy="320040"/>
+          </a:xfrm>
+          <a:prstGeom prst="rect">
+            <a:avLst/>
+          </a:prstGeom>
+          <a:noFill/>
+        </p:spPr>
+        <p:txBody>
+          <a:bodyPr wrap="square">
+            <a:spAutoFit/>
+          </a:bodyPr>
+          <a:lstStyle/>
+          <a:p>
+            <a:pPr algn="ctr"/>
+            <a:r>
+              <a:rPr sz="1200" b="0" i="1">
+                <a:solidFill>
+                  <a:srgbClr val="666666"/>
+                </a:solidFill>
+                <a:latin typeface="Calibri"/>
+              </a:rPr>
+              <a:t>La base va como «ContainerDb» y cada «Rel» lleva protocolo Y formato. Los externos, FUERA del «System_Boundary».</a:t>
+            </a:r>
+          </a:p>
+        </p:txBody>
+      </p:sp>
+      <p:sp>
+        <p:nvSpPr>
+          <p:cNvPr id="10" name="TextBox 9"/>
           <p:cNvSpPr txBox="1"/>
           <p:nvPr/>
         </p:nvSpPr>
@@ -14694,7 +12716,7 @@
         <p:spPr>
           <a:xfrm>
             <a:off x="0" y="0"/>
-            <a:ext cx="12191695" cy="960120"/>
+            <a:ext cx="12191695" cy="1170432"/>
           </a:xfrm>
           <a:prstGeom prst="rect">
             <a:avLst/>
@@ -14736,7 +12758,7 @@
         </p:nvSpPr>
         <p:spPr>
           <a:xfrm>
-            <a:off x="0" y="960120"/>
+            <a:off x="0" y="1170432"/>
             <a:ext cx="12191695" cy="41148"/>
           </a:xfrm>
           <a:prstGeom prst="rect">
@@ -14780,7 +12802,7 @@
         <p:spPr>
           <a:xfrm>
             <a:off x="457200" y="164592"/>
-            <a:ext cx="11277295" cy="502920"/>
+            <a:ext cx="11277295" cy="384048"/>
           </a:xfrm>
           <a:prstGeom prst="rect">
             <a:avLst/>
@@ -14800,21 +12822,55 @@
                 </a:solidFill>
                 <a:latin typeface="Calibri"/>
               </a:rPr>
-              <a:t>Para continuar (PI)</a:t>
-            </a:r>
-          </a:p>
-        </p:txBody>
-      </p:sp>
-      <p:sp>
-        <p:nvSpPr>
-          <p:cNvPr id="5" name="Rounded Rectangle 4"/>
+              <a:t>Herramientas de hoy</a:t>
+            </a:r>
+          </a:p>
+        </p:txBody>
+      </p:sp>
+      <p:sp>
+        <p:nvSpPr>
+          <p:cNvPr id="5" name="TextBox 4"/>
+          <p:cNvSpPr txBox="1"/>
+          <p:nvPr/>
+        </p:nvSpPr>
+        <p:spPr>
+          <a:xfrm>
+            <a:off x="457200" y="566928"/>
+            <a:ext cx="11277295" cy="411480"/>
+          </a:xfrm>
+          <a:prstGeom prst="rect">
+            <a:avLst/>
+          </a:prstGeom>
+          <a:noFill/>
+        </p:spPr>
+        <p:txBody>
+          <a:bodyPr wrap="square">
+            <a:spAutoFit/>
+          </a:bodyPr>
+          <a:lstStyle/>
+          <a:p>
+            <a:r>
+              <a:rPr sz="1400" b="0" i="0">
+                <a:solidFill>
+                  <a:srgbClr val="B8D8EE"/>
+                </a:solidFill>
+                <a:latin typeface="Calibri"/>
+              </a:rPr>
+              <a:t>Gratis · navegador o free tier · sin cuenta de pago</a:t>
+            </a:r>
+          </a:p>
+        </p:txBody>
+      </p:sp>
+      <p:sp>
+        <p:nvSpPr>
+          <p:cNvPr id="6" name="Rounded Rectangle 5"/>
           <p:cNvSpPr/>
           <p:nvPr/>
         </p:nvSpPr>
         <p:spPr>
           <a:xfrm>
-            <a:off x="457200" y="1261872"/>
-            <a:ext cx="11277295" cy="1051560"/>
+            <a:off x="457200" y="1591056"/>
+            <a:ext cx="3624986" cy="2299716"/>
           </a:xfrm>
           <a:prstGeom prst="roundRect">
             <a:avLst>
@@ -14822,7 +12878,7 @@
             </a:avLst>
           </a:prstGeom>
           <a:solidFill>
-            <a:srgbClr val="E8F4FA"/>
+            <a:srgbClr val="F2F2F2"/>
           </a:solidFill>
           <a:ln>
             <a:noFill/>
@@ -14852,20 +12908,20 @@
       </p:sp>
       <p:sp>
         <p:nvSpPr>
-          <p:cNvPr id="6" name="Rectangle 5"/>
+          <p:cNvPr id="7" name="Rectangle 6"/>
           <p:cNvSpPr/>
           <p:nvPr/>
         </p:nvSpPr>
         <p:spPr>
           <a:xfrm>
-            <a:off x="457200" y="1261872"/>
-            <a:ext cx="128016" cy="1051560"/>
+            <a:off x="457200" y="1591056"/>
+            <a:ext cx="3624986" cy="64008"/>
           </a:xfrm>
           <a:prstGeom prst="rect">
             <a:avLst/>
           </a:prstGeom>
           <a:solidFill>
-            <a:srgbClr val="269CCB"/>
+            <a:srgbClr val="095292"/>
           </a:solidFill>
           <a:ln>
             <a:noFill/>
@@ -14895,109 +12951,14 @@
       </p:sp>
       <p:sp>
         <p:nvSpPr>
-          <p:cNvPr id="7" name="TextBox 6"/>
-          <p:cNvSpPr txBox="1"/>
-          <p:nvPr/>
-        </p:nvSpPr>
-        <p:spPr>
-          <a:xfrm>
-            <a:off x="777240" y="1399031"/>
-            <a:ext cx="10774375" cy="822959"/>
-          </a:xfrm>
-          <a:prstGeom prst="rect">
-            <a:avLst/>
-          </a:prstGeom>
-          <a:noFill/>
-        </p:spPr>
-        <p:txBody>
-          <a:bodyPr wrap="square">
-            <a:spAutoFit/>
-          </a:bodyPr>
-          <a:lstStyle/>
-          <a:p>
-            <a:r>
-              <a:rPr sz="1200" b="1" i="0">
-                <a:solidFill>
-                  <a:srgbClr val="269CCB"/>
-                </a:solidFill>
-                <a:latin typeface="Calibri"/>
-              </a:rPr>
-              <a:t>Info</a:t>
-            </a:r>
-          </a:p>
-          <a:p>
-            <a:pPr>
-              <a:spcBef>
-                <a:spcPts val="400"/>
-              </a:spcBef>
-            </a:pPr>
-            <a:r>
-              <a:rPr sz="1400" b="0" i="0">
-                <a:solidFill>
-                  <a:srgbClr val="333333"/>
-                </a:solidFill>
-                <a:latin typeface="Calibri"/>
-              </a:rPr>
-              <a:t>Entregable: Diagrama C4 Container en Mermaid + tabla de 3 contratos + 3 riesgos de distribución</a:t>
-            </a:r>
-          </a:p>
-        </p:txBody>
-      </p:sp>
-      <p:sp>
-        <p:nvSpPr>
-          <p:cNvPr id="8" name="Rounded Rectangle 7"/>
+          <p:cNvPr id="8" name="Rectangle 7"/>
           <p:cNvSpPr/>
           <p:nvPr/>
         </p:nvSpPr>
         <p:spPr>
           <a:xfrm>
-            <a:off x="457200" y="2478024"/>
-            <a:ext cx="11277295" cy="1051560"/>
-          </a:xfrm>
-          <a:prstGeom prst="roundRect">
-            <a:avLst>
-              <a:gd name="adj" fmla="val 12000"/>
-            </a:avLst>
-          </a:prstGeom>
-          <a:solidFill>
-            <a:srgbClr val="FFF8E1"/>
-          </a:solidFill>
-          <a:ln>
-            <a:noFill/>
-          </a:ln>
-        </p:spPr>
-        <p:style>
-          <a:lnRef idx="1">
-            <a:schemeClr val="accent1"/>
-          </a:lnRef>
-          <a:fillRef idx="3">
-            <a:schemeClr val="accent1"/>
-          </a:fillRef>
-          <a:effectRef idx="2">
-            <a:schemeClr val="accent1"/>
-          </a:effectRef>
-          <a:fontRef idx="minor">
-            <a:schemeClr val="lt1"/>
-          </a:fontRef>
-        </p:style>
-        <p:txBody>
-          <a:bodyPr rtlCol="0" anchor="ctr"/>
-          <a:lstStyle/>
-          <a:p>
-            <a:pPr algn="ctr"/>
-          </a:p>
-        </p:txBody>
-      </p:sp>
-      <p:sp>
-        <p:nvSpPr>
-          <p:cNvPr id="9" name="Rectangle 8"/>
-          <p:cNvSpPr/>
-          <p:nvPr/>
-        </p:nvSpPr>
-        <p:spPr>
-          <a:xfrm>
-            <a:off x="457200" y="2478024"/>
-            <a:ext cx="128016" cy="1051560"/>
+            <a:off x="457200" y="1655064"/>
+            <a:ext cx="3624986" cy="27432"/>
           </a:xfrm>
           <a:prstGeom prst="rect">
             <a:avLst/>
@@ -15031,6 +12992,30 @@
           </a:p>
         </p:txBody>
       </p:sp>
+      <p:pic>
+        <p:nvPicPr>
+          <p:cNvPr id="9" name="Picture 8" descr="drawio.png"/>
+          <p:cNvPicPr>
+            <a:picLocks noChangeAspect="1"/>
+          </p:cNvPicPr>
+          <p:nvPr/>
+        </p:nvPicPr>
+        <p:blipFill>
+          <a:blip r:embed="rId2"/>
+          <a:stretch>
+            <a:fillRect/>
+          </a:stretch>
+        </p:blipFill>
+        <p:spPr>
+          <a:xfrm>
+            <a:off x="1659331" y="1847087"/>
+            <a:ext cx="1220724" cy="1220724"/>
+          </a:xfrm>
+          <a:prstGeom prst="rect">
+            <a:avLst/>
+          </a:prstGeom>
+        </p:spPr>
+      </p:pic>
       <p:sp>
         <p:nvSpPr>
           <p:cNvPr id="10" name="TextBox 9"/>
@@ -15039,8 +13024,8 @@
         </p:nvSpPr>
         <p:spPr>
           <a:xfrm>
-            <a:off x="777240" y="2615184"/>
-            <a:ext cx="10774375" cy="822959"/>
+            <a:off x="530352" y="3159251"/>
+            <a:ext cx="3478682" cy="621792"/>
           </a:xfrm>
           <a:prstGeom prst="rect">
             <a:avLst/>
@@ -15048,35 +13033,34 @@
           <a:noFill/>
         </p:spPr>
         <p:txBody>
-          <a:bodyPr wrap="square">
-            <a:spAutoFit/>
-          </a:bodyPr>
-          <a:lstStyle/>
-          <a:p>
-            <a:r>
-              <a:rPr sz="1200" b="1" i="0">
-                <a:solidFill>
-                  <a:srgbClr val="FFD000"/>
-                </a:solidFill>
-                <a:latin typeface="Calibri"/>
-              </a:rPr>
-              <a:t>Aclaración</a:t>
-            </a:r>
-          </a:p>
-          <a:p>
-            <a:pPr>
+          <a:bodyPr wrap="square" anchor="t"/>
+          <a:lstStyle/>
+          <a:p>
+            <a:pPr algn="ctr"/>
+            <a:r>
+              <a:rPr sz="1300" b="1" i="0">
+                <a:solidFill>
+                  <a:srgbClr val="095292"/>
+                </a:solidFill>
+                <a:latin typeface="Calibri"/>
+              </a:rPr>
+              <a:t>draw.io</a:t>
+            </a:r>
+          </a:p>
+          <a:p>
+            <a:pPr algn="ctr">
               <a:spcBef>
-                <a:spcPts val="400"/>
+                <a:spcPts val="200"/>
               </a:spcBef>
             </a:pPr>
             <a:r>
-              <a:rPr sz="1400" b="0" i="0">
-                <a:solidFill>
-                  <a:srgbClr val="333333"/>
-                </a:solidFill>
-                <a:latin typeface="Calibri"/>
-              </a:rPr>
-              <a:t>Subir evidencias al paquete CloudLite (Drive/repo) y a la plataforma del curso en la fecha que indique el docente.</a:t>
+              <a:rPr sz="1000" b="0" i="0">
+                <a:solidFill>
+                  <a:srgbClr val="666666"/>
+                </a:solidFill>
+                <a:latin typeface="Calibri"/>
+              </a:rPr>
+              <a:t>Boceto del C4</a:t>
             </a:r>
           </a:p>
         </p:txBody>
@@ -15089,8 +13073,8 @@
         </p:nvSpPr>
         <p:spPr>
           <a:xfrm>
-            <a:off x="457200" y="3694176"/>
-            <a:ext cx="11277295" cy="1051560"/>
+            <a:off x="4283354" y="1591056"/>
+            <a:ext cx="3624986" cy="2299716"/>
           </a:xfrm>
           <a:prstGeom prst="roundRect">
             <a:avLst>
@@ -15098,7 +13082,7 @@
             </a:avLst>
           </a:prstGeom>
           <a:solidFill>
-            <a:srgbClr val="FBE4E4"/>
+            <a:srgbClr val="F2F2F2"/>
           </a:solidFill>
           <a:ln>
             <a:noFill/>
@@ -15134,14 +13118,14 @@
         </p:nvSpPr>
         <p:spPr>
           <a:xfrm>
-            <a:off x="457200" y="3694176"/>
-            <a:ext cx="128016" cy="1051560"/>
+            <a:off x="4283354" y="1591056"/>
+            <a:ext cx="3624986" cy="64008"/>
           </a:xfrm>
           <a:prstGeom prst="rect">
             <a:avLst/>
           </a:prstGeom>
           <a:solidFill>
-            <a:srgbClr val="A02030"/>
+            <a:srgbClr val="095292"/>
           </a:solidFill>
           <a:ln>
             <a:noFill/>
@@ -15171,14 +13155,81 @@
       </p:sp>
       <p:sp>
         <p:nvSpPr>
-          <p:cNvPr id="13" name="TextBox 12"/>
+          <p:cNvPr id="13" name="Rectangle 12"/>
+          <p:cNvSpPr/>
+          <p:nvPr/>
+        </p:nvSpPr>
+        <p:spPr>
+          <a:xfrm>
+            <a:off x="4283354" y="1655064"/>
+            <a:ext cx="3624986" cy="27432"/>
+          </a:xfrm>
+          <a:prstGeom prst="rect">
+            <a:avLst/>
+          </a:prstGeom>
+          <a:solidFill>
+            <a:srgbClr val="FFD000"/>
+          </a:solidFill>
+          <a:ln>
+            <a:noFill/>
+          </a:ln>
+        </p:spPr>
+        <p:style>
+          <a:lnRef idx="1">
+            <a:schemeClr val="accent1"/>
+          </a:lnRef>
+          <a:fillRef idx="3">
+            <a:schemeClr val="accent1"/>
+          </a:fillRef>
+          <a:effectRef idx="2">
+            <a:schemeClr val="accent1"/>
+          </a:effectRef>
+          <a:fontRef idx="minor">
+            <a:schemeClr val="lt1"/>
+          </a:fontRef>
+        </p:style>
+        <p:txBody>
+          <a:bodyPr rtlCol="0" anchor="ctr"/>
+          <a:lstStyle/>
+          <a:p>
+            <a:pPr algn="ctr"/>
+          </a:p>
+        </p:txBody>
+      </p:sp>
+      <p:pic>
+        <p:nvPicPr>
+          <p:cNvPr id="14" name="Picture 13" descr="excalidraw.png"/>
+          <p:cNvPicPr>
+            <a:picLocks noChangeAspect="1"/>
+          </p:cNvPicPr>
+          <p:nvPr/>
+        </p:nvPicPr>
+        <p:blipFill>
+          <a:blip r:embed="rId3"/>
+          <a:stretch>
+            <a:fillRect/>
+          </a:stretch>
+        </p:blipFill>
+        <p:spPr>
+          <a:xfrm>
+            <a:off x="5485485" y="1847087"/>
+            <a:ext cx="1220724" cy="1220724"/>
+          </a:xfrm>
+          <a:prstGeom prst="rect">
+            <a:avLst/>
+          </a:prstGeom>
+        </p:spPr>
+      </p:pic>
+      <p:sp>
+        <p:nvSpPr>
+          <p:cNvPr id="15" name="TextBox 14"/>
           <p:cNvSpPr txBox="1"/>
           <p:nvPr/>
         </p:nvSpPr>
         <p:spPr>
           <a:xfrm>
-            <a:off x="777240" y="3831336"/>
-            <a:ext cx="10774375" cy="822959"/>
+            <a:off x="4356506" y="3159251"/>
+            <a:ext cx="3478682" cy="621792"/>
           </a:xfrm>
           <a:prstGeom prst="rect">
             <a:avLst/>
@@ -15186,42 +13237,449 @@
           <a:noFill/>
         </p:spPr>
         <p:txBody>
-          <a:bodyPr wrap="square">
-            <a:spAutoFit/>
-          </a:bodyPr>
-          <a:lstStyle/>
-          <a:p>
-            <a:r>
-              <a:rPr sz="1200" b="1" i="0">
-                <a:solidFill>
-                  <a:srgbClr val="A02030"/>
-                </a:solidFill>
-                <a:latin typeface="Calibri"/>
-              </a:rPr>
-              <a:t>Atención</a:t>
-            </a:r>
-          </a:p>
-          <a:p>
-            <a:pPr>
+          <a:bodyPr wrap="square" anchor="t"/>
+          <a:lstStyle/>
+          <a:p>
+            <a:pPr algn="ctr"/>
+            <a:r>
+              <a:rPr sz="1300" b="1" i="0">
+                <a:solidFill>
+                  <a:srgbClr val="095292"/>
+                </a:solidFill>
+                <a:latin typeface="Calibri"/>
+              </a:rPr>
+              <a:t>Excalidraw</a:t>
+            </a:r>
+          </a:p>
+          <a:p>
+            <a:pPr algn="ctr">
               <a:spcBef>
-                <a:spcPts val="400"/>
+                <a:spcPts val="200"/>
               </a:spcBef>
             </a:pPr>
             <a:r>
-              <a:rPr sz="1400" b="0" i="0">
-                <a:solidFill>
-                  <a:srgbClr val="333333"/>
-                </a:solidFill>
-                <a:latin typeface="Calibri"/>
-              </a:rPr>
-              <a:t>Sin cloud de pago ni instalaciones obligatorias de hipervisores/Docker Desktop.</a:t>
-            </a:r>
-          </a:p>
-        </p:txBody>
-      </p:sp>
-      <p:sp>
-        <p:nvSpPr>
-          <p:cNvPr id="14" name="TextBox 13"/>
+              <a:rPr sz="1000" b="0" i="0">
+                <a:solidFill>
+                  <a:srgbClr val="666666"/>
+                </a:solidFill>
+                <a:latin typeface="Calibri"/>
+              </a:rPr>
+              <a:t>Boceto rapido</a:t>
+            </a:r>
+          </a:p>
+        </p:txBody>
+      </p:sp>
+      <p:sp>
+        <p:nvSpPr>
+          <p:cNvPr id="16" name="Rounded Rectangle 15"/>
+          <p:cNvSpPr/>
+          <p:nvPr/>
+        </p:nvSpPr>
+        <p:spPr>
+          <a:xfrm>
+            <a:off x="8109508" y="1591056"/>
+            <a:ext cx="3624986" cy="2299716"/>
+          </a:xfrm>
+          <a:prstGeom prst="roundRect">
+            <a:avLst>
+              <a:gd name="adj" fmla="val 12000"/>
+            </a:avLst>
+          </a:prstGeom>
+          <a:solidFill>
+            <a:srgbClr val="F2F2F2"/>
+          </a:solidFill>
+          <a:ln>
+            <a:noFill/>
+          </a:ln>
+        </p:spPr>
+        <p:style>
+          <a:lnRef idx="1">
+            <a:schemeClr val="accent1"/>
+          </a:lnRef>
+          <a:fillRef idx="3">
+            <a:schemeClr val="accent1"/>
+          </a:fillRef>
+          <a:effectRef idx="2">
+            <a:schemeClr val="accent1"/>
+          </a:effectRef>
+          <a:fontRef idx="minor">
+            <a:schemeClr val="lt1"/>
+          </a:fontRef>
+        </p:style>
+        <p:txBody>
+          <a:bodyPr rtlCol="0" anchor="ctr"/>
+          <a:lstStyle/>
+          <a:p>
+            <a:pPr algn="ctr"/>
+          </a:p>
+        </p:txBody>
+      </p:sp>
+      <p:sp>
+        <p:nvSpPr>
+          <p:cNvPr id="17" name="Rectangle 16"/>
+          <p:cNvSpPr/>
+          <p:nvPr/>
+        </p:nvSpPr>
+        <p:spPr>
+          <a:xfrm>
+            <a:off x="8109508" y="1591056"/>
+            <a:ext cx="3624986" cy="64008"/>
+          </a:xfrm>
+          <a:prstGeom prst="rect">
+            <a:avLst/>
+          </a:prstGeom>
+          <a:solidFill>
+            <a:srgbClr val="095292"/>
+          </a:solidFill>
+          <a:ln>
+            <a:noFill/>
+          </a:ln>
+        </p:spPr>
+        <p:style>
+          <a:lnRef idx="1">
+            <a:schemeClr val="accent1"/>
+          </a:lnRef>
+          <a:fillRef idx="3">
+            <a:schemeClr val="accent1"/>
+          </a:fillRef>
+          <a:effectRef idx="2">
+            <a:schemeClr val="accent1"/>
+          </a:effectRef>
+          <a:fontRef idx="minor">
+            <a:schemeClr val="lt1"/>
+          </a:fontRef>
+        </p:style>
+        <p:txBody>
+          <a:bodyPr rtlCol="0" anchor="ctr"/>
+          <a:lstStyle/>
+          <a:p>
+            <a:pPr algn="ctr"/>
+          </a:p>
+        </p:txBody>
+      </p:sp>
+      <p:sp>
+        <p:nvSpPr>
+          <p:cNvPr id="18" name="Rectangle 17"/>
+          <p:cNvSpPr/>
+          <p:nvPr/>
+        </p:nvSpPr>
+        <p:spPr>
+          <a:xfrm>
+            <a:off x="8109508" y="1655064"/>
+            <a:ext cx="3624986" cy="27432"/>
+          </a:xfrm>
+          <a:prstGeom prst="rect">
+            <a:avLst/>
+          </a:prstGeom>
+          <a:solidFill>
+            <a:srgbClr val="FFD000"/>
+          </a:solidFill>
+          <a:ln>
+            <a:noFill/>
+          </a:ln>
+        </p:spPr>
+        <p:style>
+          <a:lnRef idx="1">
+            <a:schemeClr val="accent1"/>
+          </a:lnRef>
+          <a:fillRef idx="3">
+            <a:schemeClr val="accent1"/>
+          </a:fillRef>
+          <a:effectRef idx="2">
+            <a:schemeClr val="accent1"/>
+          </a:effectRef>
+          <a:fontRef idx="minor">
+            <a:schemeClr val="lt1"/>
+          </a:fontRef>
+        </p:style>
+        <p:txBody>
+          <a:bodyPr rtlCol="0" anchor="ctr"/>
+          <a:lstStyle/>
+          <a:p>
+            <a:pPr algn="ctr"/>
+          </a:p>
+        </p:txBody>
+      </p:sp>
+      <p:pic>
+        <p:nvPicPr>
+          <p:cNvPr id="19" name="Picture 18" descr="mermaid.png"/>
+          <p:cNvPicPr>
+            <a:picLocks noChangeAspect="1"/>
+          </p:cNvPicPr>
+          <p:nvPr/>
+        </p:nvPicPr>
+        <p:blipFill>
+          <a:blip r:embed="rId4"/>
+          <a:stretch>
+            <a:fillRect/>
+          </a:stretch>
+        </p:blipFill>
+        <p:spPr>
+          <a:xfrm>
+            <a:off x="9311640" y="1847087"/>
+            <a:ext cx="1220724" cy="1220724"/>
+          </a:xfrm>
+          <a:prstGeom prst="rect">
+            <a:avLst/>
+          </a:prstGeom>
+        </p:spPr>
+      </p:pic>
+      <p:sp>
+        <p:nvSpPr>
+          <p:cNvPr id="20" name="TextBox 19"/>
+          <p:cNvSpPr txBox="1"/>
+          <p:nvPr/>
+        </p:nvSpPr>
+        <p:spPr>
+          <a:xfrm>
+            <a:off x="8182660" y="3159251"/>
+            <a:ext cx="3478682" cy="621792"/>
+          </a:xfrm>
+          <a:prstGeom prst="rect">
+            <a:avLst/>
+          </a:prstGeom>
+          <a:noFill/>
+        </p:spPr>
+        <p:txBody>
+          <a:bodyPr wrap="square" anchor="t"/>
+          <a:lstStyle/>
+          <a:p>
+            <a:pPr algn="ctr"/>
+            <a:r>
+              <a:rPr sz="1300" b="1" i="0">
+                <a:solidFill>
+                  <a:srgbClr val="095292"/>
+                </a:solidFill>
+                <a:latin typeface="Calibri"/>
+              </a:rPr>
+              <a:t>Mermaid</a:t>
+            </a:r>
+          </a:p>
+          <a:p>
+            <a:pPr algn="ctr">
+              <a:spcBef>
+                <a:spcPts val="200"/>
+              </a:spcBef>
+            </a:pPr>
+            <a:r>
+              <a:rPr sz="1000" b="0" i="0">
+                <a:solidFill>
+                  <a:srgbClr val="666666"/>
+                </a:solidFill>
+                <a:latin typeface="Calibri"/>
+              </a:rPr>
+              <a:t>Codigo del diagrama</a:t>
+            </a:r>
+          </a:p>
+        </p:txBody>
+      </p:sp>
+      <p:sp>
+        <p:nvSpPr>
+          <p:cNvPr id="21" name="Rounded Rectangle 20"/>
+          <p:cNvSpPr/>
+          <p:nvPr/>
+        </p:nvSpPr>
+        <p:spPr>
+          <a:xfrm>
+            <a:off x="4283354" y="4055364"/>
+            <a:ext cx="3624986" cy="2299716"/>
+          </a:xfrm>
+          <a:prstGeom prst="roundRect">
+            <a:avLst>
+              <a:gd name="adj" fmla="val 12000"/>
+            </a:avLst>
+          </a:prstGeom>
+          <a:solidFill>
+            <a:srgbClr val="F2F2F2"/>
+          </a:solidFill>
+          <a:ln>
+            <a:noFill/>
+          </a:ln>
+        </p:spPr>
+        <p:style>
+          <a:lnRef idx="1">
+            <a:schemeClr val="accent1"/>
+          </a:lnRef>
+          <a:fillRef idx="3">
+            <a:schemeClr val="accent1"/>
+          </a:fillRef>
+          <a:effectRef idx="2">
+            <a:schemeClr val="accent1"/>
+          </a:effectRef>
+          <a:fontRef idx="minor">
+            <a:schemeClr val="lt1"/>
+          </a:fontRef>
+        </p:style>
+        <p:txBody>
+          <a:bodyPr rtlCol="0" anchor="ctr"/>
+          <a:lstStyle/>
+          <a:p>
+            <a:pPr algn="ctr"/>
+          </a:p>
+        </p:txBody>
+      </p:sp>
+      <p:sp>
+        <p:nvSpPr>
+          <p:cNvPr id="22" name="Rectangle 21"/>
+          <p:cNvSpPr/>
+          <p:nvPr/>
+        </p:nvSpPr>
+        <p:spPr>
+          <a:xfrm>
+            <a:off x="4283354" y="4055364"/>
+            <a:ext cx="3624986" cy="64008"/>
+          </a:xfrm>
+          <a:prstGeom prst="rect">
+            <a:avLst/>
+          </a:prstGeom>
+          <a:solidFill>
+            <a:srgbClr val="095292"/>
+          </a:solidFill>
+          <a:ln>
+            <a:noFill/>
+          </a:ln>
+        </p:spPr>
+        <p:style>
+          <a:lnRef idx="1">
+            <a:schemeClr val="accent1"/>
+          </a:lnRef>
+          <a:fillRef idx="3">
+            <a:schemeClr val="accent1"/>
+          </a:fillRef>
+          <a:effectRef idx="2">
+            <a:schemeClr val="accent1"/>
+          </a:effectRef>
+          <a:fontRef idx="minor">
+            <a:schemeClr val="lt1"/>
+          </a:fontRef>
+        </p:style>
+        <p:txBody>
+          <a:bodyPr rtlCol="0" anchor="ctr"/>
+          <a:lstStyle/>
+          <a:p>
+            <a:pPr algn="ctr"/>
+          </a:p>
+        </p:txBody>
+      </p:sp>
+      <p:sp>
+        <p:nvSpPr>
+          <p:cNvPr id="23" name="Rectangle 22"/>
+          <p:cNvSpPr/>
+          <p:nvPr/>
+        </p:nvSpPr>
+        <p:spPr>
+          <a:xfrm>
+            <a:off x="4283354" y="4119372"/>
+            <a:ext cx="3624986" cy="27432"/>
+          </a:xfrm>
+          <a:prstGeom prst="rect">
+            <a:avLst/>
+          </a:prstGeom>
+          <a:solidFill>
+            <a:srgbClr val="FFD000"/>
+          </a:solidFill>
+          <a:ln>
+            <a:noFill/>
+          </a:ln>
+        </p:spPr>
+        <p:style>
+          <a:lnRef idx="1">
+            <a:schemeClr val="accent1"/>
+          </a:lnRef>
+          <a:fillRef idx="3">
+            <a:schemeClr val="accent1"/>
+          </a:fillRef>
+          <a:effectRef idx="2">
+            <a:schemeClr val="accent1"/>
+          </a:effectRef>
+          <a:fontRef idx="minor">
+            <a:schemeClr val="lt1"/>
+          </a:fontRef>
+        </p:style>
+        <p:txBody>
+          <a:bodyPr rtlCol="0" anchor="ctr"/>
+          <a:lstStyle/>
+          <a:p>
+            <a:pPr algn="ctr"/>
+          </a:p>
+        </p:txBody>
+      </p:sp>
+      <p:pic>
+        <p:nvPicPr>
+          <p:cNvPr id="24" name="Picture 23" descr="examlab.png"/>
+          <p:cNvPicPr>
+            <a:picLocks noChangeAspect="1"/>
+          </p:cNvPicPr>
+          <p:nvPr/>
+        </p:nvPicPr>
+        <p:blipFill>
+          <a:blip r:embed="rId5"/>
+          <a:stretch>
+            <a:fillRect/>
+          </a:stretch>
+        </p:blipFill>
+        <p:spPr>
+          <a:xfrm>
+            <a:off x="5485485" y="4311396"/>
+            <a:ext cx="1220724" cy="1220724"/>
+          </a:xfrm>
+          <a:prstGeom prst="rect">
+            <a:avLst/>
+          </a:prstGeom>
+        </p:spPr>
+      </p:pic>
+      <p:sp>
+        <p:nvSpPr>
+          <p:cNvPr id="25" name="TextBox 24"/>
+          <p:cNvSpPr txBox="1"/>
+          <p:nvPr/>
+        </p:nvSpPr>
+        <p:spPr>
+          <a:xfrm>
+            <a:off x="4356506" y="5623560"/>
+            <a:ext cx="3478682" cy="621792"/>
+          </a:xfrm>
+          <a:prstGeom prst="rect">
+            <a:avLst/>
+          </a:prstGeom>
+          <a:noFill/>
+        </p:spPr>
+        <p:txBody>
+          <a:bodyPr wrap="square" anchor="t"/>
+          <a:lstStyle/>
+          <a:p>
+            <a:pPr algn="ctr"/>
+            <a:r>
+              <a:rPr sz="1300" b="1" i="0">
+                <a:solidFill>
+                  <a:srgbClr val="095292"/>
+                </a:solidFill>
+                <a:latin typeface="Calibri"/>
+              </a:rPr>
+              <a:t>la plataforma del curso</a:t>
+            </a:r>
+          </a:p>
+          <a:p>
+            <a:pPr algn="ctr">
+              <a:spcBef>
+                <a:spcPts val="200"/>
+              </a:spcBef>
+            </a:pPr>
+            <a:r>
+              <a:rPr sz="1000" b="0" i="0">
+                <a:solidFill>
+                  <a:srgbClr val="666666"/>
+                </a:solidFill>
+                <a:latin typeface="Calibri"/>
+              </a:rPr>
+              <a:t>Donde se entrega</a:t>
+            </a:r>
+          </a:p>
+        </p:txBody>
+      </p:sp>
+      <p:sp>
+        <p:nvSpPr>
+          <p:cNvPr id="26" name="TextBox 25"/>
           <p:cNvSpPr txBox="1"/>
           <p:nvPr/>
         </p:nvSpPr>
@@ -15289,13 +13747,13 @@
         <p:spPr>
           <a:xfrm>
             <a:off x="0" y="0"/>
-            <a:ext cx="12191695" cy="164592"/>
+            <a:ext cx="12191695" cy="1170432"/>
           </a:xfrm>
           <a:prstGeom prst="rect">
             <a:avLst/>
           </a:prstGeom>
           <a:solidFill>
-            <a:srgbClr val="269CCB"/>
+            <a:srgbClr val="095292"/>
           </a:solidFill>
           <a:ln>
             <a:noFill/>
@@ -15323,30 +13781,49 @@
           </a:p>
         </p:txBody>
       </p:sp>
-      <p:pic>
-        <p:nvPicPr>
-          <p:cNvPr id="3" name="Picture 2" descr="logo_uniajc_color.png"/>
-          <p:cNvPicPr>
-            <a:picLocks noChangeAspect="1"/>
-          </p:cNvPicPr>
-          <p:nvPr/>
-        </p:nvPicPr>
-        <p:blipFill>
-          <a:blip r:embed="rId2"/>
-          <a:stretch>
-            <a:fillRect/>
-          </a:stretch>
-        </p:blipFill>
-        <p:spPr>
-          <a:xfrm>
-            <a:off x="10271455" y="5998464"/>
-            <a:ext cx="1463040" cy="643233"/>
-          </a:xfrm>
-          <a:prstGeom prst="rect">
-            <a:avLst/>
-          </a:prstGeom>
-        </p:spPr>
-      </p:pic>
+      <p:sp>
+        <p:nvSpPr>
+          <p:cNvPr id="3" name="Rectangle 2"/>
+          <p:cNvSpPr/>
+          <p:nvPr/>
+        </p:nvSpPr>
+        <p:spPr>
+          <a:xfrm>
+            <a:off x="0" y="1170432"/>
+            <a:ext cx="12191695" cy="41148"/>
+          </a:xfrm>
+          <a:prstGeom prst="rect">
+            <a:avLst/>
+          </a:prstGeom>
+          <a:solidFill>
+            <a:srgbClr val="FFD000"/>
+          </a:solidFill>
+          <a:ln>
+            <a:noFill/>
+          </a:ln>
+        </p:spPr>
+        <p:style>
+          <a:lnRef idx="1">
+            <a:schemeClr val="accent1"/>
+          </a:lnRef>
+          <a:fillRef idx="3">
+            <a:schemeClr val="accent1"/>
+          </a:fillRef>
+          <a:effectRef idx="2">
+            <a:schemeClr val="accent1"/>
+          </a:effectRef>
+          <a:fontRef idx="minor">
+            <a:schemeClr val="lt1"/>
+          </a:fontRef>
+        </p:style>
+        <p:txBody>
+          <a:bodyPr rtlCol="0" anchor="ctr"/>
+          <a:lstStyle/>
+          <a:p>
+            <a:pPr algn="ctr"/>
+          </a:p>
+        </p:txBody>
+      </p:sp>
       <p:sp>
         <p:nvSpPr>
           <p:cNvPr id="4" name="TextBox 3"/>
@@ -15355,41 +13832,8 @@
         </p:nvSpPr>
         <p:spPr>
           <a:xfrm>
-            <a:off x="457200" y="1737360"/>
-            <a:ext cx="11277295" cy="1097280"/>
-          </a:xfrm>
-          <a:prstGeom prst="rect">
-            <a:avLst/>
-          </a:prstGeom>
-          <a:noFill/>
-        </p:spPr>
-        <p:txBody>
-          <a:bodyPr wrap="square" anchor="ctr"/>
-          <a:lstStyle/>
-          <a:p>
-            <a:pPr algn="ctr"/>
-            <a:r>
-              <a:rPr sz="3400" b="1" i="0">
-                <a:solidFill>
-                  <a:srgbClr val="095292"/>
-                </a:solidFill>
-                <a:latin typeface="Calibri"/>
-              </a:rPr>
-              <a:t>Clase 4 · PI en movimiento</a:t>
-            </a:r>
-          </a:p>
-        </p:txBody>
-      </p:sp>
-      <p:sp>
-        <p:nvSpPr>
-          <p:cNvPr id="5" name="TextBox 4"/>
-          <p:cNvSpPr txBox="1"/>
-          <p:nvPr/>
-        </p:nvSpPr>
-        <p:spPr>
-          <a:xfrm>
-            <a:off x="457200" y="3017520"/>
-            <a:ext cx="11277295" cy="1645920"/>
+            <a:off x="457200" y="164592"/>
+            <a:ext cx="11277295" cy="384048"/>
           </a:xfrm>
           <a:prstGeom prst="rect">
             <a:avLst/>
@@ -15402,65 +13846,28 @@
           </a:bodyPr>
           <a:lstStyle/>
           <a:p>
-            <a:pPr algn="ctr">
-              <a:spcAft>
-                <a:spcPts val="600"/>
-              </a:spcAft>
-            </a:pPr>
-            <a:r>
-              <a:rPr sz="1600" b="0" i="0">
-                <a:solidFill>
-                  <a:srgbClr val="333333"/>
-                </a:solidFill>
-                <a:latin typeface="Calibri"/>
-              </a:rPr>
-              <a:t>Diagramar componentes/servicios de CloudLite y sus contratos</a:t>
-            </a:r>
-          </a:p>
-          <a:p>
-            <a:pPr algn="ctr">
-              <a:spcAft>
-                <a:spcPts val="600"/>
-              </a:spcAft>
-            </a:pPr>
-            <a:r>
-              <a:rPr sz="1600" b="0" i="0">
-                <a:solidFill>
-                  <a:srgbClr val="333333"/>
-                </a:solidFill>
-                <a:latin typeface="Calibri"/>
-              </a:rPr>
-              <a:t>Evidencia: Diagrama C4 Container en Mermaid + tabla de 3 contratos + 3 riesgos de distribución</a:t>
-            </a:r>
-          </a:p>
-          <a:p>
-            <a:pPr algn="ctr">
-              <a:spcAft>
-                <a:spcPts val="600"/>
-              </a:spcAft>
-            </a:pPr>
-            <a:r>
-              <a:rPr sz="1600" b="0" i="0">
-                <a:solidFill>
-                  <a:srgbClr val="333333"/>
-                </a:solidFill>
-                <a:latin typeface="Calibri"/>
-              </a:rPr>
-              <a:t>Siguiente paso = siguiente hito del PI CloudLite</a:t>
-            </a:r>
-          </a:p>
-        </p:txBody>
-      </p:sp>
-      <p:sp>
-        <p:nvSpPr>
-          <p:cNvPr id="6" name="TextBox 5"/>
+            <a:r>
+              <a:rPr sz="2600" b="1" i="0">
+                <a:solidFill>
+                  <a:srgbClr val="FFFFFF"/>
+                </a:solidFill>
+                <a:latin typeface="Calibri"/>
+              </a:rPr>
+              <a:t>Del boceto a la plataforma del curso (diagrama)</a:t>
+            </a:r>
+          </a:p>
+        </p:txBody>
+      </p:sp>
+      <p:sp>
+        <p:nvSpPr>
+          <p:cNvPr id="5" name="TextBox 4"/>
           <p:cNvSpPr txBox="1"/>
           <p:nvPr/>
         </p:nvSpPr>
         <p:spPr>
           <a:xfrm>
-            <a:off x="457200" y="4754880"/>
-            <a:ext cx="11277295" cy="640080"/>
+            <a:off x="457200" y="566928"/>
+            <a:ext cx="11277295" cy="411480"/>
           </a:xfrm>
           <a:prstGeom prst="rect">
             <a:avLst/>
@@ -15473,15 +13880,1046 @@
           </a:bodyPr>
           <a:lstStyle/>
           <a:p>
+            <a:r>
+              <a:rPr sz="1400" b="0" i="0">
+                <a:solidFill>
+                  <a:srgbClr val="B8D8EE"/>
+                </a:solidFill>
+                <a:latin typeface="Calibri"/>
+              </a:rPr>
+              <a:t>El diagrama se entrega como código Mermaid dentro de la plataforma del curso, no como imagen</a:t>
+            </a:r>
+          </a:p>
+        </p:txBody>
+      </p:sp>
+      <p:sp>
+        <p:nvSpPr>
+          <p:cNvPr id="6" name="Rounded Rectangle 5"/>
+          <p:cNvSpPr/>
+          <p:nvPr/>
+        </p:nvSpPr>
+        <p:spPr>
+          <a:xfrm>
+            <a:off x="457200" y="1659636"/>
+            <a:ext cx="11277295" cy="1051560"/>
+          </a:xfrm>
+          <a:prstGeom prst="roundRect">
+            <a:avLst>
+              <a:gd name="adj" fmla="val 12000"/>
+            </a:avLst>
+          </a:prstGeom>
+          <a:solidFill>
+            <a:srgbClr val="F2F2F2"/>
+          </a:solidFill>
+          <a:ln>
+            <a:noFill/>
+          </a:ln>
+        </p:spPr>
+        <p:style>
+          <a:lnRef idx="1">
+            <a:schemeClr val="accent1"/>
+          </a:lnRef>
+          <a:fillRef idx="3">
+            <a:schemeClr val="accent1"/>
+          </a:fillRef>
+          <a:effectRef idx="2">
+            <a:schemeClr val="accent1"/>
+          </a:effectRef>
+          <a:fontRef idx="minor">
+            <a:schemeClr val="lt1"/>
+          </a:fontRef>
+        </p:style>
+        <p:txBody>
+          <a:bodyPr rtlCol="0" anchor="ctr"/>
+          <a:lstStyle/>
+          <a:p>
             <a:pPr algn="ctr"/>
+          </a:p>
+        </p:txBody>
+      </p:sp>
+      <p:sp>
+        <p:nvSpPr>
+          <p:cNvPr id="7" name="Rounded Rectangle 6"/>
+          <p:cNvSpPr/>
+          <p:nvPr/>
+        </p:nvSpPr>
+        <p:spPr>
+          <a:xfrm>
+            <a:off x="594360" y="1965960"/>
+            <a:ext cx="438912" cy="438912"/>
+          </a:xfrm>
+          <a:prstGeom prst="roundRect">
+            <a:avLst>
+              <a:gd name="adj" fmla="val 12000"/>
+            </a:avLst>
+          </a:prstGeom>
+          <a:solidFill>
+            <a:srgbClr val="095292"/>
+          </a:solidFill>
+          <a:ln>
+            <a:noFill/>
+          </a:ln>
+        </p:spPr>
+        <p:style>
+          <a:lnRef idx="1">
+            <a:schemeClr val="accent1"/>
+          </a:lnRef>
+          <a:fillRef idx="3">
+            <a:schemeClr val="accent1"/>
+          </a:fillRef>
+          <a:effectRef idx="2">
+            <a:schemeClr val="accent1"/>
+          </a:effectRef>
+          <a:fontRef idx="minor">
+            <a:schemeClr val="lt1"/>
+          </a:fontRef>
+        </p:style>
+        <p:txBody>
+          <a:bodyPr rtlCol="0" anchor="ctr"/>
+          <a:lstStyle/>
+          <a:p>
+            <a:pPr algn="ctr"/>
+          </a:p>
+        </p:txBody>
+      </p:sp>
+      <p:sp>
+        <p:nvSpPr>
+          <p:cNvPr id="8" name="TextBox 7"/>
+          <p:cNvSpPr txBox="1"/>
+          <p:nvPr/>
+        </p:nvSpPr>
+        <p:spPr>
+          <a:xfrm>
+            <a:off x="594360" y="1965960"/>
+            <a:ext cx="438912" cy="438912"/>
+          </a:xfrm>
+          <a:prstGeom prst="rect">
+            <a:avLst/>
+          </a:prstGeom>
+          <a:noFill/>
+        </p:spPr>
+        <p:txBody>
+          <a:bodyPr wrap="square" anchor="ctr"/>
+          <a:lstStyle/>
+          <a:p>
+            <a:pPr algn="ctr"/>
+            <a:r>
+              <a:rPr sz="1600" b="1" i="0">
+                <a:solidFill>
+                  <a:srgbClr val="FFFFFF"/>
+                </a:solidFill>
+                <a:latin typeface="Calibri"/>
+              </a:rPr>
+              <a:t>1</a:t>
+            </a:r>
+          </a:p>
+        </p:txBody>
+      </p:sp>
+      <p:sp>
+        <p:nvSpPr>
+          <p:cNvPr id="9" name="TextBox 8"/>
+          <p:cNvSpPr txBox="1"/>
+          <p:nvPr/>
+        </p:nvSpPr>
+        <p:spPr>
+          <a:xfrm>
+            <a:off x="1188720" y="1751076"/>
+            <a:ext cx="10271455" cy="886968"/>
+          </a:xfrm>
+          <a:prstGeom prst="rect">
+            <a:avLst/>
+          </a:prstGeom>
+          <a:noFill/>
+        </p:spPr>
+        <p:txBody>
+          <a:bodyPr wrap="square" anchor="ctr"/>
+          <a:lstStyle/>
+          <a:p>
+            <a:r>
+              <a:rPr sz="1500" b="1" i="0">
+                <a:solidFill>
+                  <a:srgbClr val="095292"/>
+                </a:solidFill>
+                <a:latin typeface="Calibri"/>
+              </a:rPr>
+              <a:t>Disena visual</a:t>
+            </a:r>
+          </a:p>
+          <a:p>
+            <a:pPr>
+              <a:spcBef>
+                <a:spcPts val="200"/>
+              </a:spcBef>
+            </a:pPr>
+            <a:r>
+              <a:rPr sz="1300" b="0" i="0">
+                <a:solidFill>
+                  <a:srgbClr val="333333"/>
+                </a:solidFill>
+                <a:latin typeface="Calibri"/>
+              </a:rPr>
+              <a:t>Dibuja el diagrama como quieras en Excalidraw o draw.io: es mas rapido arrastrar cajas que escribir codigo, y ahi es donde piensas el modelo.</a:t>
+            </a:r>
+          </a:p>
+        </p:txBody>
+      </p:sp>
+      <p:sp>
+        <p:nvSpPr>
+          <p:cNvPr id="10" name="Rounded Rectangle 9"/>
+          <p:cNvSpPr/>
+          <p:nvPr/>
+        </p:nvSpPr>
+        <p:spPr>
+          <a:xfrm>
+            <a:off x="457200" y="2802636"/>
+            <a:ext cx="11277295" cy="1051560"/>
+          </a:xfrm>
+          <a:prstGeom prst="roundRect">
+            <a:avLst>
+              <a:gd name="adj" fmla="val 12000"/>
+            </a:avLst>
+          </a:prstGeom>
+          <a:solidFill>
+            <a:srgbClr val="E8F4FA"/>
+          </a:solidFill>
+          <a:ln>
+            <a:noFill/>
+          </a:ln>
+        </p:spPr>
+        <p:style>
+          <a:lnRef idx="1">
+            <a:schemeClr val="accent1"/>
+          </a:lnRef>
+          <a:fillRef idx="3">
+            <a:schemeClr val="accent1"/>
+          </a:fillRef>
+          <a:effectRef idx="2">
+            <a:schemeClr val="accent1"/>
+          </a:effectRef>
+          <a:fontRef idx="minor">
+            <a:schemeClr val="lt1"/>
+          </a:fontRef>
+        </p:style>
+        <p:txBody>
+          <a:bodyPr rtlCol="0" anchor="ctr"/>
+          <a:lstStyle/>
+          <a:p>
+            <a:pPr algn="ctr"/>
+          </a:p>
+        </p:txBody>
+      </p:sp>
+      <p:sp>
+        <p:nvSpPr>
+          <p:cNvPr id="11" name="Rounded Rectangle 10"/>
+          <p:cNvSpPr/>
+          <p:nvPr/>
+        </p:nvSpPr>
+        <p:spPr>
+          <a:xfrm>
+            <a:off x="594360" y="3108960"/>
+            <a:ext cx="438912" cy="438912"/>
+          </a:xfrm>
+          <a:prstGeom prst="roundRect">
+            <a:avLst>
+              <a:gd name="adj" fmla="val 12000"/>
+            </a:avLst>
+          </a:prstGeom>
+          <a:solidFill>
+            <a:srgbClr val="095292"/>
+          </a:solidFill>
+          <a:ln>
+            <a:noFill/>
+          </a:ln>
+        </p:spPr>
+        <p:style>
+          <a:lnRef idx="1">
+            <a:schemeClr val="accent1"/>
+          </a:lnRef>
+          <a:fillRef idx="3">
+            <a:schemeClr val="accent1"/>
+          </a:fillRef>
+          <a:effectRef idx="2">
+            <a:schemeClr val="accent1"/>
+          </a:effectRef>
+          <a:fontRef idx="minor">
+            <a:schemeClr val="lt1"/>
+          </a:fontRef>
+        </p:style>
+        <p:txBody>
+          <a:bodyPr rtlCol="0" anchor="ctr"/>
+          <a:lstStyle/>
+          <a:p>
+            <a:pPr algn="ctr"/>
+          </a:p>
+        </p:txBody>
+      </p:sp>
+      <p:sp>
+        <p:nvSpPr>
+          <p:cNvPr id="12" name="TextBox 11"/>
+          <p:cNvSpPr txBox="1"/>
+          <p:nvPr/>
+        </p:nvSpPr>
+        <p:spPr>
+          <a:xfrm>
+            <a:off x="594360" y="3108960"/>
+            <a:ext cx="438912" cy="438912"/>
+          </a:xfrm>
+          <a:prstGeom prst="rect">
+            <a:avLst/>
+          </a:prstGeom>
+          <a:noFill/>
+        </p:spPr>
+        <p:txBody>
+          <a:bodyPr wrap="square" anchor="ctr"/>
+          <a:lstStyle/>
+          <a:p>
+            <a:pPr algn="ctr"/>
+            <a:r>
+              <a:rPr sz="1600" b="1" i="0">
+                <a:solidFill>
+                  <a:srgbClr val="FFFFFF"/>
+                </a:solidFill>
+                <a:latin typeface="Calibri"/>
+              </a:rPr>
+              <a:t>2</a:t>
+            </a:r>
+          </a:p>
+        </p:txBody>
+      </p:sp>
+      <p:sp>
+        <p:nvSpPr>
+          <p:cNvPr id="13" name="TextBox 12"/>
+          <p:cNvSpPr txBox="1"/>
+          <p:nvPr/>
+        </p:nvSpPr>
+        <p:spPr>
+          <a:xfrm>
+            <a:off x="1188720" y="2894076"/>
+            <a:ext cx="10271455" cy="886968"/>
+          </a:xfrm>
+          <a:prstGeom prst="rect">
+            <a:avLst/>
+          </a:prstGeom>
+          <a:noFill/>
+        </p:spPr>
+        <p:txBody>
+          <a:bodyPr wrap="square" anchor="ctr"/>
+          <a:lstStyle/>
+          <a:p>
+            <a:r>
+              <a:rPr sz="1500" b="1" i="0">
+                <a:solidFill>
+                  <a:srgbClr val="095292"/>
+                </a:solidFill>
+                <a:latin typeface="Calibri"/>
+              </a:rPr>
+              <a:t>Traduce con IA</a:t>
+            </a:r>
+          </a:p>
+          <a:p>
+            <a:pPr>
+              <a:spcBef>
+                <a:spcPts val="200"/>
+              </a:spcBef>
+            </a:pPr>
+            <a:r>
+              <a:rPr sz="1300" b="0" i="0">
+                <a:solidFill>
+                  <a:srgbClr val="333333"/>
+                </a:solidFill>
+                <a:latin typeface="Calibri"/>
+              </a:rPr>
+              <a:t>Copia o describe tu boceto a una IA y pidele el codigo Mermaid: «convierte este diagrama a Mermaid usando C4Container». Revisa el resultado: la IA acierta la sintaxis, no tu modelo.</a:t>
+            </a:r>
+          </a:p>
+        </p:txBody>
+      </p:sp>
+      <p:sp>
+        <p:nvSpPr>
+          <p:cNvPr id="14" name="Rounded Rectangle 13"/>
+          <p:cNvSpPr/>
+          <p:nvPr/>
+        </p:nvSpPr>
+        <p:spPr>
+          <a:xfrm>
+            <a:off x="457200" y="3945636"/>
+            <a:ext cx="11277295" cy="1051560"/>
+          </a:xfrm>
+          <a:prstGeom prst="roundRect">
+            <a:avLst>
+              <a:gd name="adj" fmla="val 12000"/>
+            </a:avLst>
+          </a:prstGeom>
+          <a:solidFill>
+            <a:srgbClr val="F2F2F2"/>
+          </a:solidFill>
+          <a:ln>
+            <a:noFill/>
+          </a:ln>
+        </p:spPr>
+        <p:style>
+          <a:lnRef idx="1">
+            <a:schemeClr val="accent1"/>
+          </a:lnRef>
+          <a:fillRef idx="3">
+            <a:schemeClr val="accent1"/>
+          </a:fillRef>
+          <a:effectRef idx="2">
+            <a:schemeClr val="accent1"/>
+          </a:effectRef>
+          <a:fontRef idx="minor">
+            <a:schemeClr val="lt1"/>
+          </a:fontRef>
+        </p:style>
+        <p:txBody>
+          <a:bodyPr rtlCol="0" anchor="ctr"/>
+          <a:lstStyle/>
+          <a:p>
+            <a:pPr algn="ctr"/>
+          </a:p>
+        </p:txBody>
+      </p:sp>
+      <p:sp>
+        <p:nvSpPr>
+          <p:cNvPr id="15" name="Rounded Rectangle 14"/>
+          <p:cNvSpPr/>
+          <p:nvPr/>
+        </p:nvSpPr>
+        <p:spPr>
+          <a:xfrm>
+            <a:off x="594360" y="4251960"/>
+            <a:ext cx="438912" cy="438912"/>
+          </a:xfrm>
+          <a:prstGeom prst="roundRect">
+            <a:avLst>
+              <a:gd name="adj" fmla="val 12000"/>
+            </a:avLst>
+          </a:prstGeom>
+          <a:solidFill>
+            <a:srgbClr val="095292"/>
+          </a:solidFill>
+          <a:ln>
+            <a:noFill/>
+          </a:ln>
+        </p:spPr>
+        <p:style>
+          <a:lnRef idx="1">
+            <a:schemeClr val="accent1"/>
+          </a:lnRef>
+          <a:fillRef idx="3">
+            <a:schemeClr val="accent1"/>
+          </a:fillRef>
+          <a:effectRef idx="2">
+            <a:schemeClr val="accent1"/>
+          </a:effectRef>
+          <a:fontRef idx="minor">
+            <a:schemeClr val="lt1"/>
+          </a:fontRef>
+        </p:style>
+        <p:txBody>
+          <a:bodyPr rtlCol="0" anchor="ctr"/>
+          <a:lstStyle/>
+          <a:p>
+            <a:pPr algn="ctr"/>
+          </a:p>
+        </p:txBody>
+      </p:sp>
+      <p:sp>
+        <p:nvSpPr>
+          <p:cNvPr id="16" name="TextBox 15"/>
+          <p:cNvSpPr txBox="1"/>
+          <p:nvPr/>
+        </p:nvSpPr>
+        <p:spPr>
+          <a:xfrm>
+            <a:off x="594360" y="4251960"/>
+            <a:ext cx="438912" cy="438912"/>
+          </a:xfrm>
+          <a:prstGeom prst="rect">
+            <a:avLst/>
+          </a:prstGeom>
+          <a:noFill/>
+        </p:spPr>
+        <p:txBody>
+          <a:bodyPr wrap="square" anchor="ctr"/>
+          <a:lstStyle/>
+          <a:p>
+            <a:pPr algn="ctr"/>
+            <a:r>
+              <a:rPr sz="1600" b="1" i="0">
+                <a:solidFill>
+                  <a:srgbClr val="FFFFFF"/>
+                </a:solidFill>
+                <a:latin typeface="Calibri"/>
+              </a:rPr>
+              <a:t>3</a:t>
+            </a:r>
+          </a:p>
+        </p:txBody>
+      </p:sp>
+      <p:sp>
+        <p:nvSpPr>
+          <p:cNvPr id="17" name="TextBox 16"/>
+          <p:cNvSpPr txBox="1"/>
+          <p:nvPr/>
+        </p:nvSpPr>
+        <p:spPr>
+          <a:xfrm>
+            <a:off x="1188720" y="4037076"/>
+            <a:ext cx="10271455" cy="886968"/>
+          </a:xfrm>
+          <a:prstGeom prst="rect">
+            <a:avLst/>
+          </a:prstGeom>
+          <a:noFill/>
+        </p:spPr>
+        <p:txBody>
+          <a:bodyPr wrap="square" anchor="ctr"/>
+          <a:lstStyle/>
+          <a:p>
+            <a:r>
+              <a:rPr sz="1500" b="1" i="0">
+                <a:solidFill>
+                  <a:srgbClr val="095292"/>
+                </a:solidFill>
+                <a:latin typeface="Calibri"/>
+              </a:rPr>
+              <a:t>Pega y renderiza en la plataforma del curso</a:t>
+            </a:r>
+          </a:p>
+          <a:p>
+            <a:pPr>
+              <a:spcBef>
+                <a:spcPts val="200"/>
+              </a:spcBef>
+            </a:pPr>
+            <a:r>
+              <a:rPr sz="1300" b="0" i="0">
+                <a:solidFill>
+                  <a:srgbClr val="333333"/>
+                </a:solidFill>
+                <a:latin typeface="Calibri"/>
+              </a:rPr>
+              <a:t>Pega ese codigo en la caja de texto de la pregunta y mira como lo dibuja la plataforma. Si no renderiza, corrige ahi mismo: lo que se califica es el diagrama renderizado dentro de la plataforma del curso.</a:t>
+            </a:r>
+          </a:p>
+        </p:txBody>
+      </p:sp>
+      <p:sp>
+        <p:nvSpPr>
+          <p:cNvPr id="18" name="Rounded Rectangle 17"/>
+          <p:cNvSpPr/>
+          <p:nvPr/>
+        </p:nvSpPr>
+        <p:spPr>
+          <a:xfrm>
+            <a:off x="457200" y="5088636"/>
+            <a:ext cx="11277295" cy="1051560"/>
+          </a:xfrm>
+          <a:prstGeom prst="roundRect">
+            <a:avLst>
+              <a:gd name="adj" fmla="val 12000"/>
+            </a:avLst>
+          </a:prstGeom>
+          <a:solidFill>
+            <a:srgbClr val="E8F4FA"/>
+          </a:solidFill>
+          <a:ln>
+            <a:noFill/>
+          </a:ln>
+        </p:spPr>
+        <p:style>
+          <a:lnRef idx="1">
+            <a:schemeClr val="accent1"/>
+          </a:lnRef>
+          <a:fillRef idx="3">
+            <a:schemeClr val="accent1"/>
+          </a:fillRef>
+          <a:effectRef idx="2">
+            <a:schemeClr val="accent1"/>
+          </a:effectRef>
+          <a:fontRef idx="minor">
+            <a:schemeClr val="lt1"/>
+          </a:fontRef>
+        </p:style>
+        <p:txBody>
+          <a:bodyPr rtlCol="0" anchor="ctr"/>
+          <a:lstStyle/>
+          <a:p>
+            <a:pPr algn="ctr"/>
+          </a:p>
+        </p:txBody>
+      </p:sp>
+      <p:sp>
+        <p:nvSpPr>
+          <p:cNvPr id="19" name="Rounded Rectangle 18"/>
+          <p:cNvSpPr/>
+          <p:nvPr/>
+        </p:nvSpPr>
+        <p:spPr>
+          <a:xfrm>
+            <a:off x="594360" y="5394960"/>
+            <a:ext cx="438912" cy="438912"/>
+          </a:xfrm>
+          <a:prstGeom prst="roundRect">
+            <a:avLst>
+              <a:gd name="adj" fmla="val 12000"/>
+            </a:avLst>
+          </a:prstGeom>
+          <a:solidFill>
+            <a:srgbClr val="095292"/>
+          </a:solidFill>
+          <a:ln>
+            <a:noFill/>
+          </a:ln>
+        </p:spPr>
+        <p:style>
+          <a:lnRef idx="1">
+            <a:schemeClr val="accent1"/>
+          </a:lnRef>
+          <a:fillRef idx="3">
+            <a:schemeClr val="accent1"/>
+          </a:fillRef>
+          <a:effectRef idx="2">
+            <a:schemeClr val="accent1"/>
+          </a:effectRef>
+          <a:fontRef idx="minor">
+            <a:schemeClr val="lt1"/>
+          </a:fontRef>
+        </p:style>
+        <p:txBody>
+          <a:bodyPr rtlCol="0" anchor="ctr"/>
+          <a:lstStyle/>
+          <a:p>
+            <a:pPr algn="ctr"/>
+          </a:p>
+        </p:txBody>
+      </p:sp>
+      <p:sp>
+        <p:nvSpPr>
+          <p:cNvPr id="20" name="TextBox 19"/>
+          <p:cNvSpPr txBox="1"/>
+          <p:nvPr/>
+        </p:nvSpPr>
+        <p:spPr>
+          <a:xfrm>
+            <a:off x="594360" y="5394960"/>
+            <a:ext cx="438912" cy="438912"/>
+          </a:xfrm>
+          <a:prstGeom prst="rect">
+            <a:avLst/>
+          </a:prstGeom>
+          <a:noFill/>
+        </p:spPr>
+        <p:txBody>
+          <a:bodyPr wrap="square" anchor="ctr"/>
+          <a:lstStyle/>
+          <a:p>
+            <a:pPr algn="ctr"/>
+            <a:r>
+              <a:rPr sz="1600" b="1" i="0">
+                <a:solidFill>
+                  <a:srgbClr val="FFFFFF"/>
+                </a:solidFill>
+                <a:latin typeface="Calibri"/>
+              </a:rPr>
+              <a:t>4</a:t>
+            </a:r>
+          </a:p>
+        </p:txBody>
+      </p:sp>
+      <p:sp>
+        <p:nvSpPr>
+          <p:cNvPr id="21" name="TextBox 20"/>
+          <p:cNvSpPr txBox="1"/>
+          <p:nvPr/>
+        </p:nvSpPr>
+        <p:spPr>
+          <a:xfrm>
+            <a:off x="1188720" y="5180076"/>
+            <a:ext cx="10271455" cy="886968"/>
+          </a:xfrm>
+          <a:prstGeom prst="rect">
+            <a:avLst/>
+          </a:prstGeom>
+          <a:noFill/>
+        </p:spPr>
+        <p:txBody>
+          <a:bodyPr wrap="square" anchor="ctr"/>
+          <a:lstStyle/>
+          <a:p>
+            <a:r>
+              <a:rPr sz="1500" b="1" i="0">
+                <a:solidFill>
+                  <a:srgbClr val="095292"/>
+                </a:solidFill>
+                <a:latin typeface="Calibri"/>
+              </a:rPr>
+              <a:t>Guarda el PNG para tu PI</a:t>
+            </a:r>
+          </a:p>
+          <a:p>
+            <a:pPr>
+              <a:spcBef>
+                <a:spcPts val="200"/>
+              </a:spcBef>
+            </a:pPr>
+            <a:r>
+              <a:rPr sz="1300" b="0" i="0">
+                <a:solidFill>
+                  <a:srgbClr val="333333"/>
+                </a:solidFill>
+                <a:latin typeface="Calibri"/>
+              </a:rPr>
+              <a:t>Exporta tambien la imagen a la carpeta de tu Proyecto Integrador. Esa copia es para tu informe; no reemplaza la respuesta en la plataforma.</a:t>
+            </a:r>
+          </a:p>
+        </p:txBody>
+      </p:sp>
+      <p:sp>
+        <p:nvSpPr>
+          <p:cNvPr id="22" name="TextBox 21"/>
+          <p:cNvSpPr txBox="1"/>
+          <p:nvPr/>
+        </p:nvSpPr>
+        <p:spPr>
+          <a:xfrm>
+            <a:off x="11185855" y="6473952"/>
+            <a:ext cx="640080" cy="274320"/>
+          </a:xfrm>
+          <a:prstGeom prst="rect">
+            <a:avLst/>
+          </a:prstGeom>
+          <a:noFill/>
+        </p:spPr>
+        <p:txBody>
+          <a:bodyPr wrap="square">
+            <a:spAutoFit/>
+          </a:bodyPr>
+          <a:lstStyle/>
+          <a:p>
+            <a:pPr algn="r"/>
+            <a:r>
+              <a:rPr sz="1100" b="0" i="0">
+                <a:solidFill>
+                  <a:srgbClr val="666666"/>
+                </a:solidFill>
+                <a:latin typeface="Calibri"/>
+              </a:rPr>
+              <a:t>38</a:t>
+            </a:r>
+          </a:p>
+        </p:txBody>
+      </p:sp>
+    </p:spTree>
+  </p:cSld>
+  <p:clrMapOvr>
+    <a:masterClrMapping/>
+  </p:clrMapOvr>
+</p:sld>
+</file>
+
+<file path=ppt/slides/slide39.xml><?xml version="1.0" encoding="utf-8"?>
+<p:sld xmlns:a="http://schemas.openxmlformats.org/drawingml/2006/main" xmlns:p="http://schemas.openxmlformats.org/presentationml/2006/main" xmlns:r="http://schemas.openxmlformats.org/officeDocument/2006/relationships">
+  <p:cSld>
+    <p:bg>
+      <p:bgPr>
+        <a:solidFill>
+          <a:srgbClr val="FFFFFF"/>
+        </a:solidFill>
+        <a:effectLst/>
+      </p:bgPr>
+    </p:bg>
+    <p:spTree>
+      <p:nvGrpSpPr>
+        <p:cNvPr id="1" name=""/>
+        <p:cNvGrpSpPr/>
+        <p:nvPr/>
+      </p:nvGrpSpPr>
+      <p:grpSpPr/>
+      <p:sp>
+        <p:nvSpPr>
+          <p:cNvPr id="2" name="Rectangle 1"/>
+          <p:cNvSpPr/>
+          <p:nvPr/>
+        </p:nvSpPr>
+        <p:spPr>
+          <a:xfrm>
+            <a:off x="0" y="0"/>
+            <a:ext cx="12191695" cy="960120"/>
+          </a:xfrm>
+          <a:prstGeom prst="rect">
+            <a:avLst/>
+          </a:prstGeom>
+          <a:solidFill>
+            <a:srgbClr val="095292"/>
+          </a:solidFill>
+          <a:ln>
+            <a:noFill/>
+          </a:ln>
+        </p:spPr>
+        <p:style>
+          <a:lnRef idx="1">
+            <a:schemeClr val="accent1"/>
+          </a:lnRef>
+          <a:fillRef idx="3">
+            <a:schemeClr val="accent1"/>
+          </a:fillRef>
+          <a:effectRef idx="2">
+            <a:schemeClr val="accent1"/>
+          </a:effectRef>
+          <a:fontRef idx="minor">
+            <a:schemeClr val="lt1"/>
+          </a:fontRef>
+        </p:style>
+        <p:txBody>
+          <a:bodyPr rtlCol="0" anchor="ctr"/>
+          <a:lstStyle/>
+          <a:p>
+            <a:pPr algn="ctr"/>
+          </a:p>
+        </p:txBody>
+      </p:sp>
+      <p:sp>
+        <p:nvSpPr>
+          <p:cNvPr id="3" name="Rectangle 2"/>
+          <p:cNvSpPr/>
+          <p:nvPr/>
+        </p:nvSpPr>
+        <p:spPr>
+          <a:xfrm>
+            <a:off x="0" y="960120"/>
+            <a:ext cx="12191695" cy="41148"/>
+          </a:xfrm>
+          <a:prstGeom prst="rect">
+            <a:avLst/>
+          </a:prstGeom>
+          <a:solidFill>
+            <a:srgbClr val="FFD000"/>
+          </a:solidFill>
+          <a:ln>
+            <a:noFill/>
+          </a:ln>
+        </p:spPr>
+        <p:style>
+          <a:lnRef idx="1">
+            <a:schemeClr val="accent1"/>
+          </a:lnRef>
+          <a:fillRef idx="3">
+            <a:schemeClr val="accent1"/>
+          </a:fillRef>
+          <a:effectRef idx="2">
+            <a:schemeClr val="accent1"/>
+          </a:effectRef>
+          <a:fontRef idx="minor">
+            <a:schemeClr val="lt1"/>
+          </a:fontRef>
+        </p:style>
+        <p:txBody>
+          <a:bodyPr rtlCol="0" anchor="ctr"/>
+          <a:lstStyle/>
+          <a:p>
+            <a:pPr algn="ctr"/>
+          </a:p>
+        </p:txBody>
+      </p:sp>
+      <p:sp>
+        <p:nvSpPr>
+          <p:cNvPr id="4" name="TextBox 3"/>
+          <p:cNvSpPr txBox="1"/>
+          <p:nvPr/>
+        </p:nvSpPr>
+        <p:spPr>
+          <a:xfrm>
+            <a:off x="457200" y="164592"/>
+            <a:ext cx="11277295" cy="502920"/>
+          </a:xfrm>
+          <a:prstGeom prst="rect">
+            <a:avLst/>
+          </a:prstGeom>
+          <a:noFill/>
+        </p:spPr>
+        <p:txBody>
+          <a:bodyPr wrap="square">
+            <a:spAutoFit/>
+          </a:bodyPr>
+          <a:lstStyle/>
+          <a:p>
+            <a:r>
+              <a:rPr sz="2600" b="1" i="0">
+                <a:solidFill>
+                  <a:srgbClr val="FFFFFF"/>
+                </a:solidFill>
+                <a:latin typeface="Calibri"/>
+              </a:rPr>
+              <a:t>PI CloudLite — entregable de hoy</a:t>
+            </a:r>
+          </a:p>
+        </p:txBody>
+      </p:sp>
+      <p:sp>
+        <p:nvSpPr>
+          <p:cNvPr id="5" name="TextBox 4"/>
+          <p:cNvSpPr txBox="1"/>
+          <p:nvPr/>
+        </p:nvSpPr>
+        <p:spPr>
+          <a:xfrm>
+            <a:off x="457200" y="1170432"/>
+            <a:ext cx="11277295" cy="5230368"/>
+          </a:xfrm>
+          <a:prstGeom prst="rect">
+            <a:avLst/>
+          </a:prstGeom>
+          <a:noFill/>
+        </p:spPr>
+        <p:txBody>
+          <a:bodyPr wrap="square">
+            <a:spAutoFit/>
+          </a:bodyPr>
+          <a:lstStyle/>
+          <a:p>
+            <a:pPr>
+              <a:spcAft>
+                <a:spcPts val="800"/>
+              </a:spcAft>
+            </a:pPr>
+            <a:r>
+              <a:rPr sz="2000" b="0" i="0">
+                <a:solidFill>
+                  <a:srgbClr val="333333"/>
+                </a:solidFill>
+                <a:latin typeface="Calibri"/>
+              </a:rPr>
+              <a:t>–   </a:t>
+            </a:r>
             <a:r>
               <a:rPr sz="2000" b="1" i="0">
                 <a:solidFill>
-                  <a:srgbClr val="269CCB"/>
-                </a:solidFill>
-                <a:latin typeface="Calibri"/>
-              </a:rPr>
-              <a:t>Teoría al servicio del proyecto</a:t>
+                  <a:srgbClr val="333333"/>
+                </a:solidFill>
+                <a:latin typeface="Calibri"/>
+              </a:rPr>
+              <a:t>Entregable:</a:t>
+            </a:r>
+            <a:r>
+              <a:rPr sz="2000" b="0" i="0">
+                <a:solidFill>
+                  <a:srgbClr val="333333"/>
+                </a:solidFill>
+                <a:latin typeface="Calibri"/>
+              </a:rPr>
+              <a:t> Diagrama C4 Container en Mermaid + tabla de 3 contratos + 3 riesgos de distribución</a:t>
+            </a:r>
+          </a:p>
+          <a:p>
+            <a:pPr>
+              <a:spcAft>
+                <a:spcPts val="800"/>
+              </a:spcAft>
+            </a:pPr>
+            <a:r>
+              <a:rPr sz="2000" b="0" i="0">
+                <a:solidFill>
+                  <a:srgbClr val="333333"/>
+                </a:solidFill>
+                <a:latin typeface="Calibri"/>
+              </a:rPr>
+              <a:t>–   Herramienta: </a:t>
+            </a:r>
+            <a:r>
+              <a:rPr sz="2000" b="1" i="0">
+                <a:solidFill>
+                  <a:srgbClr val="333333"/>
+                </a:solidFill>
+                <a:latin typeface="Calibri"/>
+              </a:rPr>
+              <a:t>draw.io o Excalidraw para bocetar · Mermaid dentro de la plataforma del curso para entregar</a:t>
+            </a:r>
+          </a:p>
+          <a:p>
+            <a:pPr>
+              <a:spcAft>
+                <a:spcPts val="800"/>
+              </a:spcAft>
+            </a:pPr>
+            <a:r>
+              <a:rPr sz="2000" b="0" i="0">
+                <a:solidFill>
+                  <a:srgbClr val="333333"/>
+                </a:solidFill>
+                <a:latin typeface="Calibri"/>
+              </a:rPr>
+              <a:t>–   Todo lo que construyan hoy entra al </a:t>
+            </a:r>
+            <a:r>
+              <a:rPr sz="2000" b="1" i="0">
+                <a:solidFill>
+                  <a:srgbClr val="333333"/>
+                </a:solidFill>
+                <a:latin typeface="Calibri"/>
+              </a:rPr>
+              <a:t>informe/repo del PI</a:t>
+            </a:r>
+            <a:r>
+              <a:rPr sz="2000" b="0" i="0">
+                <a:solidFill>
+                  <a:srgbClr val="333333"/>
+                </a:solidFill>
+                <a:latin typeface="Calibri"/>
+              </a:rPr>
+              <a:t> (no es lab suelto).</a:t>
+            </a:r>
+          </a:p>
+          <a:p>
+            <a:pPr>
+              <a:spcAft>
+                <a:spcPts val="800"/>
+              </a:spcAft>
+            </a:pPr>
+            <a:r>
+              <a:rPr sz="2000" b="0" i="0">
+                <a:solidFill>
+                  <a:srgbClr val="333333"/>
+                </a:solidFill>
+                <a:latin typeface="Calibri"/>
+              </a:rPr>
+              <a:t>–   Individual por defecto · el docente puede autorizar equipos de 2–3; la entrega en la plataforma del curso siempre es individual.</a:t>
+            </a:r>
+          </a:p>
+        </p:txBody>
+      </p:sp>
+      <p:sp>
+        <p:nvSpPr>
+          <p:cNvPr id="6" name="TextBox 5"/>
+          <p:cNvSpPr txBox="1"/>
+          <p:nvPr/>
+        </p:nvSpPr>
+        <p:spPr>
+          <a:xfrm>
+            <a:off x="11185855" y="6473952"/>
+            <a:ext cx="640080" cy="274320"/>
+          </a:xfrm>
+          <a:prstGeom prst="rect">
+            <a:avLst/>
+          </a:prstGeom>
+          <a:noFill/>
+        </p:spPr>
+        <p:txBody>
+          <a:bodyPr wrap="square">
+            <a:spAutoFit/>
+          </a:bodyPr>
+          <a:lstStyle/>
+          <a:p>
+            <a:pPr algn="r"/>
+            <a:r>
+              <a:rPr sz="1100" b="0" i="0">
+                <a:solidFill>
+                  <a:srgbClr val="666666"/>
+                </a:solidFill>
+                <a:latin typeface="Calibri"/>
+              </a:rPr>
+              <a:t>39</a:t>
             </a:r>
           </a:p>
         </p:txBody>
@@ -15854,6 +15292,1164 @@
                 <a:latin typeface="Calibri"/>
               </a:rPr>
               <a:t>4</a:t>
+            </a:r>
+          </a:p>
+        </p:txBody>
+      </p:sp>
+    </p:spTree>
+  </p:cSld>
+  <p:clrMapOvr>
+    <a:masterClrMapping/>
+  </p:clrMapOvr>
+</p:sld>
+</file>
+
+<file path=ppt/slides/slide40.xml><?xml version="1.0" encoding="utf-8"?>
+<p:sld xmlns:a="http://schemas.openxmlformats.org/drawingml/2006/main" xmlns:p="http://schemas.openxmlformats.org/presentationml/2006/main" xmlns:r="http://schemas.openxmlformats.org/officeDocument/2006/relationships">
+  <p:cSld>
+    <p:bg>
+      <p:bgPr>
+        <a:solidFill>
+          <a:srgbClr val="FFFFFF"/>
+        </a:solidFill>
+        <a:effectLst/>
+      </p:bgPr>
+    </p:bg>
+    <p:spTree>
+      <p:nvGrpSpPr>
+        <p:cNvPr id="1" name=""/>
+        <p:cNvGrpSpPr/>
+        <p:nvPr/>
+      </p:nvGrpSpPr>
+      <p:grpSpPr/>
+      <p:sp>
+        <p:nvSpPr>
+          <p:cNvPr id="2" name="Rectangle 1"/>
+          <p:cNvSpPr/>
+          <p:nvPr/>
+        </p:nvSpPr>
+        <p:spPr>
+          <a:xfrm>
+            <a:off x="0" y="0"/>
+            <a:ext cx="12191695" cy="960120"/>
+          </a:xfrm>
+          <a:prstGeom prst="rect">
+            <a:avLst/>
+          </a:prstGeom>
+          <a:solidFill>
+            <a:srgbClr val="095292"/>
+          </a:solidFill>
+          <a:ln>
+            <a:noFill/>
+          </a:ln>
+        </p:spPr>
+        <p:style>
+          <a:lnRef idx="1">
+            <a:schemeClr val="accent1"/>
+          </a:lnRef>
+          <a:fillRef idx="3">
+            <a:schemeClr val="accent1"/>
+          </a:fillRef>
+          <a:effectRef idx="2">
+            <a:schemeClr val="accent1"/>
+          </a:effectRef>
+          <a:fontRef idx="minor">
+            <a:schemeClr val="lt1"/>
+          </a:fontRef>
+        </p:style>
+        <p:txBody>
+          <a:bodyPr rtlCol="0" anchor="ctr"/>
+          <a:lstStyle/>
+          <a:p>
+            <a:pPr algn="ctr"/>
+          </a:p>
+        </p:txBody>
+      </p:sp>
+      <p:sp>
+        <p:nvSpPr>
+          <p:cNvPr id="3" name="Rectangle 2"/>
+          <p:cNvSpPr/>
+          <p:nvPr/>
+        </p:nvSpPr>
+        <p:spPr>
+          <a:xfrm>
+            <a:off x="0" y="960120"/>
+            <a:ext cx="12191695" cy="41148"/>
+          </a:xfrm>
+          <a:prstGeom prst="rect">
+            <a:avLst/>
+          </a:prstGeom>
+          <a:solidFill>
+            <a:srgbClr val="FFD000"/>
+          </a:solidFill>
+          <a:ln>
+            <a:noFill/>
+          </a:ln>
+        </p:spPr>
+        <p:style>
+          <a:lnRef idx="1">
+            <a:schemeClr val="accent1"/>
+          </a:lnRef>
+          <a:fillRef idx="3">
+            <a:schemeClr val="accent1"/>
+          </a:fillRef>
+          <a:effectRef idx="2">
+            <a:schemeClr val="accent1"/>
+          </a:effectRef>
+          <a:fontRef idx="minor">
+            <a:schemeClr val="lt1"/>
+          </a:fontRef>
+        </p:style>
+        <p:txBody>
+          <a:bodyPr rtlCol="0" anchor="ctr"/>
+          <a:lstStyle/>
+          <a:p>
+            <a:pPr algn="ctr"/>
+          </a:p>
+        </p:txBody>
+      </p:sp>
+      <p:sp>
+        <p:nvSpPr>
+          <p:cNvPr id="4" name="TextBox 3"/>
+          <p:cNvSpPr txBox="1"/>
+          <p:nvPr/>
+        </p:nvSpPr>
+        <p:spPr>
+          <a:xfrm>
+            <a:off x="457200" y="164592"/>
+            <a:ext cx="11277295" cy="502920"/>
+          </a:xfrm>
+          <a:prstGeom prst="rect">
+            <a:avLst/>
+          </a:prstGeom>
+          <a:noFill/>
+        </p:spPr>
+        <p:txBody>
+          <a:bodyPr wrap="square">
+            <a:spAutoFit/>
+          </a:bodyPr>
+          <a:lstStyle/>
+          <a:p>
+            <a:r>
+              <a:rPr sz="2600" b="1" i="0">
+                <a:solidFill>
+                  <a:srgbClr val="FFFFFF"/>
+                </a:solidFill>
+                <a:latin typeface="Calibri"/>
+              </a:rPr>
+              <a:t>Manos a la obra (paso a paso)</a:t>
+            </a:r>
+          </a:p>
+        </p:txBody>
+      </p:sp>
+      <p:sp>
+        <p:nvSpPr>
+          <p:cNvPr id="5" name="TextBox 4"/>
+          <p:cNvSpPr txBox="1"/>
+          <p:nvPr/>
+        </p:nvSpPr>
+        <p:spPr>
+          <a:xfrm>
+            <a:off x="457200" y="1170432"/>
+            <a:ext cx="11277295" cy="5230368"/>
+          </a:xfrm>
+          <a:prstGeom prst="rect">
+            <a:avLst/>
+          </a:prstGeom>
+          <a:noFill/>
+        </p:spPr>
+        <p:txBody>
+          <a:bodyPr wrap="square">
+            <a:spAutoFit/>
+          </a:bodyPr>
+          <a:lstStyle/>
+          <a:p>
+            <a:pPr>
+              <a:spcAft>
+                <a:spcPts val="800"/>
+              </a:spcAft>
+            </a:pPr>
+            <a:r>
+              <a:rPr sz="2000" b="1" i="0">
+                <a:solidFill>
+                  <a:srgbClr val="333333"/>
+                </a:solidFill>
+                <a:latin typeface="Calibri"/>
+              </a:rPr>
+              <a:t>1.</a:t>
+            </a:r>
+            <a:r>
+              <a:rPr sz="2000" b="0" i="0">
+                <a:solidFill>
+                  <a:srgbClr val="333333"/>
+                </a:solidFill>
+                <a:latin typeface="Calibri"/>
+              </a:rPr>
+              <a:t> Paso 1: decida en la pregunta 12 si su CloudLite es un monolito modular o microservicios, con los dos criterios aplicados a su caso (tamano del equipo con numero y plazo, y que partes cambian juntas) y lo que gana y pierde; verifique que no escribio «un poco de los dos», porque eso vale cero.</a:t>
+            </a:r>
+          </a:p>
+          <a:p>
+            <a:pPr>
+              <a:spcAft>
+                <a:spcPts val="800"/>
+              </a:spcAft>
+            </a:pPr>
+            <a:r>
+              <a:rPr sz="2000" b="0" i="0">
+                <a:solidFill>
+                  <a:srgbClr val="333333"/>
+                </a:solidFill>
+                <a:latin typeface="Calibri"/>
+              </a:rPr>
+              <a:t>–   </a:t>
+            </a:r>
+            <a:r>
+              <a:rPr sz="2000" b="1" i="0">
+                <a:solidFill>
+                  <a:srgbClr val="333333"/>
+                </a:solidFill>
+                <a:latin typeface="Calibri"/>
+              </a:rPr>
+              <a:t>2.</a:t>
+            </a:r>
+            <a:r>
+              <a:rPr sz="2000" b="0" i="0">
+                <a:solidFill>
+                  <a:srgbClr val="333333"/>
+                </a:solidFill>
+                <a:latin typeface="Calibri"/>
+              </a:rPr>
+              <a:t> Paso 2: modele en la pregunta 13 el C4 Container partiendo del C4 Context de la pregunta 3, con entre 2 y 5 contenedores coherentes con la decision anterior, los almacenes de datos como ContainerDb y toda flecha con protocolo y formato; verifique que los nombres de sistema, actores y sistemas externos sean identicos a los del Context.</a:t>
+            </a:r>
+          </a:p>
+          <a:p>
+            <a:pPr>
+              <a:spcAft>
+                <a:spcPts val="800"/>
+              </a:spcAft>
+            </a:pPr>
+            <a:r>
+              <a:rPr sz="2000" b="0" i="0">
+                <a:solidFill>
+                  <a:srgbClr val="333333"/>
+                </a:solidFill>
+                <a:latin typeface="Calibri"/>
+              </a:rPr>
+              <a:t>–   </a:t>
+            </a:r>
+            <a:r>
+              <a:rPr sz="2000" b="1" i="0">
+                <a:solidFill>
+                  <a:srgbClr val="333333"/>
+                </a:solidFill>
+                <a:latin typeface="Calibri"/>
+              </a:rPr>
+              <a:t>3.</a:t>
+            </a:r>
+            <a:r>
+              <a:rPr sz="2000" b="0" i="0">
+                <a:solidFill>
+                  <a:srgbClr val="333333"/>
+                </a:solidFill>
+                <a:latin typeface="Calibri"/>
+              </a:rPr>
+              <a:t> Paso 3: liste en la pregunta 14 los 3 contratos con quien llama a quien usando los nombres exactos del diagrama, el verbo y la ruta (o el evento) y el error de negocio con su codigo y su significado en el dominio; verifique que al menos uno sea un 409 de conflicto y que ninguno diga «500 error del servidor».</a:t>
+            </a:r>
+          </a:p>
+          <a:p>
+            <a:pPr>
+              <a:spcAft>
+                <a:spcPts val="800"/>
+              </a:spcAft>
+            </a:pPr>
+            <a:r>
+              <a:rPr sz="2000" b="0" i="0">
+                <a:solidFill>
+                  <a:srgbClr val="333333"/>
+                </a:solidFill>
+                <a:latin typeface="Calibri"/>
+              </a:rPr>
+              <a:t>–   </a:t>
+            </a:r>
+            <a:r>
+              <a:rPr sz="2000" b="1" i="0">
+                <a:solidFill>
+                  <a:srgbClr val="333333"/>
+                </a:solidFill>
+                <a:latin typeface="Calibri"/>
+              </a:rPr>
+              <a:t>4.</a:t>
+            </a:r>
+            <a:r>
+              <a:rPr sz="2000" b="0" i="0">
+                <a:solidFill>
+                  <a:srgbClr val="333333"/>
+                </a:solidFill>
+                <a:latin typeface="Calibri"/>
+              </a:rPr>
+              <a:t> Paso 4: analice en la pregunta 15 los tres riesgos de distribucion nombrando una caja concreta que se cae, contando los saltos de red de una operacion de punta a punta y nombrando un dato expuesto a inconsistencia; con esto la actividad del Corte 1 queda completa y se entrega en la plataforma del curso antes del en la fecha que indique el docentede esta semana.</a:t>
+            </a:r>
+          </a:p>
+        </p:txBody>
+      </p:sp>
+      <p:sp>
+        <p:nvSpPr>
+          <p:cNvPr id="6" name="TextBox 5"/>
+          <p:cNvSpPr txBox="1"/>
+          <p:nvPr/>
+        </p:nvSpPr>
+        <p:spPr>
+          <a:xfrm>
+            <a:off x="11185855" y="6473952"/>
+            <a:ext cx="640080" cy="274320"/>
+          </a:xfrm>
+          <a:prstGeom prst="rect">
+            <a:avLst/>
+          </a:prstGeom>
+          <a:noFill/>
+        </p:spPr>
+        <p:txBody>
+          <a:bodyPr wrap="square">
+            <a:spAutoFit/>
+          </a:bodyPr>
+          <a:lstStyle/>
+          <a:p>
+            <a:pPr algn="r"/>
+            <a:r>
+              <a:rPr sz="1100" b="0" i="0">
+                <a:solidFill>
+                  <a:srgbClr val="666666"/>
+                </a:solidFill>
+                <a:latin typeface="Calibri"/>
+              </a:rPr>
+              <a:t>40</a:t>
+            </a:r>
+          </a:p>
+        </p:txBody>
+      </p:sp>
+    </p:spTree>
+  </p:cSld>
+  <p:clrMapOvr>
+    <a:masterClrMapping/>
+  </p:clrMapOvr>
+</p:sld>
+</file>
+
+<file path=ppt/slides/slide41.xml><?xml version="1.0" encoding="utf-8"?>
+<p:sld xmlns:a="http://schemas.openxmlformats.org/drawingml/2006/main" xmlns:p="http://schemas.openxmlformats.org/presentationml/2006/main" xmlns:r="http://schemas.openxmlformats.org/officeDocument/2006/relationships">
+  <p:cSld>
+    <p:bg>
+      <p:bgPr>
+        <a:solidFill>
+          <a:srgbClr val="FFFFFF"/>
+        </a:solidFill>
+        <a:effectLst/>
+      </p:bgPr>
+    </p:bg>
+    <p:spTree>
+      <p:nvGrpSpPr>
+        <p:cNvPr id="1" name=""/>
+        <p:cNvGrpSpPr/>
+        <p:nvPr/>
+      </p:nvGrpSpPr>
+      <p:grpSpPr/>
+      <p:sp>
+        <p:nvSpPr>
+          <p:cNvPr id="2" name="Rectangle 1"/>
+          <p:cNvSpPr/>
+          <p:nvPr/>
+        </p:nvSpPr>
+        <p:spPr>
+          <a:xfrm>
+            <a:off x="0" y="0"/>
+            <a:ext cx="12191695" cy="960120"/>
+          </a:xfrm>
+          <a:prstGeom prst="rect">
+            <a:avLst/>
+          </a:prstGeom>
+          <a:solidFill>
+            <a:srgbClr val="095292"/>
+          </a:solidFill>
+          <a:ln>
+            <a:noFill/>
+          </a:ln>
+        </p:spPr>
+        <p:style>
+          <a:lnRef idx="1">
+            <a:schemeClr val="accent1"/>
+          </a:lnRef>
+          <a:fillRef idx="3">
+            <a:schemeClr val="accent1"/>
+          </a:fillRef>
+          <a:effectRef idx="2">
+            <a:schemeClr val="accent1"/>
+          </a:effectRef>
+          <a:fontRef idx="minor">
+            <a:schemeClr val="lt1"/>
+          </a:fontRef>
+        </p:style>
+        <p:txBody>
+          <a:bodyPr rtlCol="0" anchor="ctr"/>
+          <a:lstStyle/>
+          <a:p>
+            <a:pPr algn="ctr"/>
+          </a:p>
+        </p:txBody>
+      </p:sp>
+      <p:sp>
+        <p:nvSpPr>
+          <p:cNvPr id="3" name="Rectangle 2"/>
+          <p:cNvSpPr/>
+          <p:nvPr/>
+        </p:nvSpPr>
+        <p:spPr>
+          <a:xfrm>
+            <a:off x="0" y="960120"/>
+            <a:ext cx="12191695" cy="41148"/>
+          </a:xfrm>
+          <a:prstGeom prst="rect">
+            <a:avLst/>
+          </a:prstGeom>
+          <a:solidFill>
+            <a:srgbClr val="FFD000"/>
+          </a:solidFill>
+          <a:ln>
+            <a:noFill/>
+          </a:ln>
+        </p:spPr>
+        <p:style>
+          <a:lnRef idx="1">
+            <a:schemeClr val="accent1"/>
+          </a:lnRef>
+          <a:fillRef idx="3">
+            <a:schemeClr val="accent1"/>
+          </a:fillRef>
+          <a:effectRef idx="2">
+            <a:schemeClr val="accent1"/>
+          </a:effectRef>
+          <a:fontRef idx="minor">
+            <a:schemeClr val="lt1"/>
+          </a:fontRef>
+        </p:style>
+        <p:txBody>
+          <a:bodyPr rtlCol="0" anchor="ctr"/>
+          <a:lstStyle/>
+          <a:p>
+            <a:pPr algn="ctr"/>
+          </a:p>
+        </p:txBody>
+      </p:sp>
+      <p:sp>
+        <p:nvSpPr>
+          <p:cNvPr id="4" name="TextBox 3"/>
+          <p:cNvSpPr txBox="1"/>
+          <p:nvPr/>
+        </p:nvSpPr>
+        <p:spPr>
+          <a:xfrm>
+            <a:off x="457200" y="164592"/>
+            <a:ext cx="11277295" cy="502920"/>
+          </a:xfrm>
+          <a:prstGeom prst="rect">
+            <a:avLst/>
+          </a:prstGeom>
+          <a:noFill/>
+        </p:spPr>
+        <p:txBody>
+          <a:bodyPr wrap="square">
+            <a:spAutoFit/>
+          </a:bodyPr>
+          <a:lstStyle/>
+          <a:p>
+            <a:r>
+              <a:rPr sz="2600" b="1" i="0">
+                <a:solidFill>
+                  <a:srgbClr val="FFFFFF"/>
+                </a:solidFill>
+                <a:latin typeface="Calibri"/>
+              </a:rPr>
+              <a:t>Para continuar (PI)</a:t>
+            </a:r>
+          </a:p>
+        </p:txBody>
+      </p:sp>
+      <p:sp>
+        <p:nvSpPr>
+          <p:cNvPr id="5" name="Rounded Rectangle 4"/>
+          <p:cNvSpPr/>
+          <p:nvPr/>
+        </p:nvSpPr>
+        <p:spPr>
+          <a:xfrm>
+            <a:off x="457200" y="1261872"/>
+            <a:ext cx="11277295" cy="1051560"/>
+          </a:xfrm>
+          <a:prstGeom prst="roundRect">
+            <a:avLst>
+              <a:gd name="adj" fmla="val 12000"/>
+            </a:avLst>
+          </a:prstGeom>
+          <a:solidFill>
+            <a:srgbClr val="E8F4FA"/>
+          </a:solidFill>
+          <a:ln>
+            <a:noFill/>
+          </a:ln>
+        </p:spPr>
+        <p:style>
+          <a:lnRef idx="1">
+            <a:schemeClr val="accent1"/>
+          </a:lnRef>
+          <a:fillRef idx="3">
+            <a:schemeClr val="accent1"/>
+          </a:fillRef>
+          <a:effectRef idx="2">
+            <a:schemeClr val="accent1"/>
+          </a:effectRef>
+          <a:fontRef idx="minor">
+            <a:schemeClr val="lt1"/>
+          </a:fontRef>
+        </p:style>
+        <p:txBody>
+          <a:bodyPr rtlCol="0" anchor="ctr"/>
+          <a:lstStyle/>
+          <a:p>
+            <a:pPr algn="ctr"/>
+          </a:p>
+        </p:txBody>
+      </p:sp>
+      <p:sp>
+        <p:nvSpPr>
+          <p:cNvPr id="6" name="Rectangle 5"/>
+          <p:cNvSpPr/>
+          <p:nvPr/>
+        </p:nvSpPr>
+        <p:spPr>
+          <a:xfrm>
+            <a:off x="457200" y="1261872"/>
+            <a:ext cx="128016" cy="1051560"/>
+          </a:xfrm>
+          <a:prstGeom prst="rect">
+            <a:avLst/>
+          </a:prstGeom>
+          <a:solidFill>
+            <a:srgbClr val="269CCB"/>
+          </a:solidFill>
+          <a:ln>
+            <a:noFill/>
+          </a:ln>
+        </p:spPr>
+        <p:style>
+          <a:lnRef idx="1">
+            <a:schemeClr val="accent1"/>
+          </a:lnRef>
+          <a:fillRef idx="3">
+            <a:schemeClr val="accent1"/>
+          </a:fillRef>
+          <a:effectRef idx="2">
+            <a:schemeClr val="accent1"/>
+          </a:effectRef>
+          <a:fontRef idx="minor">
+            <a:schemeClr val="lt1"/>
+          </a:fontRef>
+        </p:style>
+        <p:txBody>
+          <a:bodyPr rtlCol="0" anchor="ctr"/>
+          <a:lstStyle/>
+          <a:p>
+            <a:pPr algn="ctr"/>
+          </a:p>
+        </p:txBody>
+      </p:sp>
+      <p:sp>
+        <p:nvSpPr>
+          <p:cNvPr id="7" name="TextBox 6"/>
+          <p:cNvSpPr txBox="1"/>
+          <p:nvPr/>
+        </p:nvSpPr>
+        <p:spPr>
+          <a:xfrm>
+            <a:off x="777240" y="1399031"/>
+            <a:ext cx="10774375" cy="822959"/>
+          </a:xfrm>
+          <a:prstGeom prst="rect">
+            <a:avLst/>
+          </a:prstGeom>
+          <a:noFill/>
+        </p:spPr>
+        <p:txBody>
+          <a:bodyPr wrap="square">
+            <a:spAutoFit/>
+          </a:bodyPr>
+          <a:lstStyle/>
+          <a:p>
+            <a:r>
+              <a:rPr sz="1200" b="1" i="0">
+                <a:solidFill>
+                  <a:srgbClr val="269CCB"/>
+                </a:solidFill>
+                <a:latin typeface="Calibri"/>
+              </a:rPr>
+              <a:t>Info</a:t>
+            </a:r>
+          </a:p>
+          <a:p>
+            <a:pPr>
+              <a:spcBef>
+                <a:spcPts val="400"/>
+              </a:spcBef>
+            </a:pPr>
+            <a:r>
+              <a:rPr sz="1400" b="0" i="0">
+                <a:solidFill>
+                  <a:srgbClr val="333333"/>
+                </a:solidFill>
+                <a:latin typeface="Calibri"/>
+              </a:rPr>
+              <a:t>Entregable: Diagrama C4 Container en Mermaid + tabla de 3 contratos + 3 riesgos de distribución</a:t>
+            </a:r>
+          </a:p>
+        </p:txBody>
+      </p:sp>
+      <p:sp>
+        <p:nvSpPr>
+          <p:cNvPr id="8" name="Rounded Rectangle 7"/>
+          <p:cNvSpPr/>
+          <p:nvPr/>
+        </p:nvSpPr>
+        <p:spPr>
+          <a:xfrm>
+            <a:off x="457200" y="2478024"/>
+            <a:ext cx="11277295" cy="1051560"/>
+          </a:xfrm>
+          <a:prstGeom prst="roundRect">
+            <a:avLst>
+              <a:gd name="adj" fmla="val 12000"/>
+            </a:avLst>
+          </a:prstGeom>
+          <a:solidFill>
+            <a:srgbClr val="FFF8E1"/>
+          </a:solidFill>
+          <a:ln>
+            <a:noFill/>
+          </a:ln>
+        </p:spPr>
+        <p:style>
+          <a:lnRef idx="1">
+            <a:schemeClr val="accent1"/>
+          </a:lnRef>
+          <a:fillRef idx="3">
+            <a:schemeClr val="accent1"/>
+          </a:fillRef>
+          <a:effectRef idx="2">
+            <a:schemeClr val="accent1"/>
+          </a:effectRef>
+          <a:fontRef idx="minor">
+            <a:schemeClr val="lt1"/>
+          </a:fontRef>
+        </p:style>
+        <p:txBody>
+          <a:bodyPr rtlCol="0" anchor="ctr"/>
+          <a:lstStyle/>
+          <a:p>
+            <a:pPr algn="ctr"/>
+          </a:p>
+        </p:txBody>
+      </p:sp>
+      <p:sp>
+        <p:nvSpPr>
+          <p:cNvPr id="9" name="Rectangle 8"/>
+          <p:cNvSpPr/>
+          <p:nvPr/>
+        </p:nvSpPr>
+        <p:spPr>
+          <a:xfrm>
+            <a:off x="457200" y="2478024"/>
+            <a:ext cx="128016" cy="1051560"/>
+          </a:xfrm>
+          <a:prstGeom prst="rect">
+            <a:avLst/>
+          </a:prstGeom>
+          <a:solidFill>
+            <a:srgbClr val="FFD000"/>
+          </a:solidFill>
+          <a:ln>
+            <a:noFill/>
+          </a:ln>
+        </p:spPr>
+        <p:style>
+          <a:lnRef idx="1">
+            <a:schemeClr val="accent1"/>
+          </a:lnRef>
+          <a:fillRef idx="3">
+            <a:schemeClr val="accent1"/>
+          </a:fillRef>
+          <a:effectRef idx="2">
+            <a:schemeClr val="accent1"/>
+          </a:effectRef>
+          <a:fontRef idx="minor">
+            <a:schemeClr val="lt1"/>
+          </a:fontRef>
+        </p:style>
+        <p:txBody>
+          <a:bodyPr rtlCol="0" anchor="ctr"/>
+          <a:lstStyle/>
+          <a:p>
+            <a:pPr algn="ctr"/>
+          </a:p>
+        </p:txBody>
+      </p:sp>
+      <p:sp>
+        <p:nvSpPr>
+          <p:cNvPr id="10" name="TextBox 9"/>
+          <p:cNvSpPr txBox="1"/>
+          <p:nvPr/>
+        </p:nvSpPr>
+        <p:spPr>
+          <a:xfrm>
+            <a:off x="777240" y="2615184"/>
+            <a:ext cx="10774375" cy="822959"/>
+          </a:xfrm>
+          <a:prstGeom prst="rect">
+            <a:avLst/>
+          </a:prstGeom>
+          <a:noFill/>
+        </p:spPr>
+        <p:txBody>
+          <a:bodyPr wrap="square">
+            <a:spAutoFit/>
+          </a:bodyPr>
+          <a:lstStyle/>
+          <a:p>
+            <a:r>
+              <a:rPr sz="1200" b="1" i="0">
+                <a:solidFill>
+                  <a:srgbClr val="FFD000"/>
+                </a:solidFill>
+                <a:latin typeface="Calibri"/>
+              </a:rPr>
+              <a:t>Aclaración</a:t>
+            </a:r>
+          </a:p>
+          <a:p>
+            <a:pPr>
+              <a:spcBef>
+                <a:spcPts val="400"/>
+              </a:spcBef>
+            </a:pPr>
+            <a:r>
+              <a:rPr sz="1400" b="0" i="0">
+                <a:solidFill>
+                  <a:srgbClr val="333333"/>
+                </a:solidFill>
+                <a:latin typeface="Calibri"/>
+              </a:rPr>
+              <a:t>Subir evidencias al paquete CloudLite (Drive/repo) y a la plataforma del curso en la fecha que indique el docente.</a:t>
+            </a:r>
+          </a:p>
+        </p:txBody>
+      </p:sp>
+      <p:sp>
+        <p:nvSpPr>
+          <p:cNvPr id="11" name="Rounded Rectangle 10"/>
+          <p:cNvSpPr/>
+          <p:nvPr/>
+        </p:nvSpPr>
+        <p:spPr>
+          <a:xfrm>
+            <a:off x="457200" y="3694176"/>
+            <a:ext cx="11277295" cy="1051560"/>
+          </a:xfrm>
+          <a:prstGeom prst="roundRect">
+            <a:avLst>
+              <a:gd name="adj" fmla="val 12000"/>
+            </a:avLst>
+          </a:prstGeom>
+          <a:solidFill>
+            <a:srgbClr val="FBE4E4"/>
+          </a:solidFill>
+          <a:ln>
+            <a:noFill/>
+          </a:ln>
+        </p:spPr>
+        <p:style>
+          <a:lnRef idx="1">
+            <a:schemeClr val="accent1"/>
+          </a:lnRef>
+          <a:fillRef idx="3">
+            <a:schemeClr val="accent1"/>
+          </a:fillRef>
+          <a:effectRef idx="2">
+            <a:schemeClr val="accent1"/>
+          </a:effectRef>
+          <a:fontRef idx="minor">
+            <a:schemeClr val="lt1"/>
+          </a:fontRef>
+        </p:style>
+        <p:txBody>
+          <a:bodyPr rtlCol="0" anchor="ctr"/>
+          <a:lstStyle/>
+          <a:p>
+            <a:pPr algn="ctr"/>
+          </a:p>
+        </p:txBody>
+      </p:sp>
+      <p:sp>
+        <p:nvSpPr>
+          <p:cNvPr id="12" name="Rectangle 11"/>
+          <p:cNvSpPr/>
+          <p:nvPr/>
+        </p:nvSpPr>
+        <p:spPr>
+          <a:xfrm>
+            <a:off x="457200" y="3694176"/>
+            <a:ext cx="128016" cy="1051560"/>
+          </a:xfrm>
+          <a:prstGeom prst="rect">
+            <a:avLst/>
+          </a:prstGeom>
+          <a:solidFill>
+            <a:srgbClr val="A02030"/>
+          </a:solidFill>
+          <a:ln>
+            <a:noFill/>
+          </a:ln>
+        </p:spPr>
+        <p:style>
+          <a:lnRef idx="1">
+            <a:schemeClr val="accent1"/>
+          </a:lnRef>
+          <a:fillRef idx="3">
+            <a:schemeClr val="accent1"/>
+          </a:fillRef>
+          <a:effectRef idx="2">
+            <a:schemeClr val="accent1"/>
+          </a:effectRef>
+          <a:fontRef idx="minor">
+            <a:schemeClr val="lt1"/>
+          </a:fontRef>
+        </p:style>
+        <p:txBody>
+          <a:bodyPr rtlCol="0" anchor="ctr"/>
+          <a:lstStyle/>
+          <a:p>
+            <a:pPr algn="ctr"/>
+          </a:p>
+        </p:txBody>
+      </p:sp>
+      <p:sp>
+        <p:nvSpPr>
+          <p:cNvPr id="13" name="TextBox 12"/>
+          <p:cNvSpPr txBox="1"/>
+          <p:nvPr/>
+        </p:nvSpPr>
+        <p:spPr>
+          <a:xfrm>
+            <a:off x="777240" y="3831336"/>
+            <a:ext cx="10774375" cy="822959"/>
+          </a:xfrm>
+          <a:prstGeom prst="rect">
+            <a:avLst/>
+          </a:prstGeom>
+          <a:noFill/>
+        </p:spPr>
+        <p:txBody>
+          <a:bodyPr wrap="square">
+            <a:spAutoFit/>
+          </a:bodyPr>
+          <a:lstStyle/>
+          <a:p>
+            <a:r>
+              <a:rPr sz="1200" b="1" i="0">
+                <a:solidFill>
+                  <a:srgbClr val="A02030"/>
+                </a:solidFill>
+                <a:latin typeface="Calibri"/>
+              </a:rPr>
+              <a:t>Atención</a:t>
+            </a:r>
+          </a:p>
+          <a:p>
+            <a:pPr>
+              <a:spcBef>
+                <a:spcPts val="400"/>
+              </a:spcBef>
+            </a:pPr>
+            <a:r>
+              <a:rPr sz="1400" b="0" i="0">
+                <a:solidFill>
+                  <a:srgbClr val="333333"/>
+                </a:solidFill>
+                <a:latin typeface="Calibri"/>
+              </a:rPr>
+              <a:t>Sin cloud de pago ni instalaciones obligatorias de hipervisores/Docker Desktop.</a:t>
+            </a:r>
+          </a:p>
+        </p:txBody>
+      </p:sp>
+      <p:sp>
+        <p:nvSpPr>
+          <p:cNvPr id="14" name="TextBox 13"/>
+          <p:cNvSpPr txBox="1"/>
+          <p:nvPr/>
+        </p:nvSpPr>
+        <p:spPr>
+          <a:xfrm>
+            <a:off x="11185855" y="6473952"/>
+            <a:ext cx="640080" cy="274320"/>
+          </a:xfrm>
+          <a:prstGeom prst="rect">
+            <a:avLst/>
+          </a:prstGeom>
+          <a:noFill/>
+        </p:spPr>
+        <p:txBody>
+          <a:bodyPr wrap="square">
+            <a:spAutoFit/>
+          </a:bodyPr>
+          <a:lstStyle/>
+          <a:p>
+            <a:pPr algn="r"/>
+            <a:r>
+              <a:rPr sz="1100" b="0" i="0">
+                <a:solidFill>
+                  <a:srgbClr val="666666"/>
+                </a:solidFill>
+                <a:latin typeface="Calibri"/>
+              </a:rPr>
+              <a:t>41</a:t>
+            </a:r>
+          </a:p>
+        </p:txBody>
+      </p:sp>
+    </p:spTree>
+  </p:cSld>
+  <p:clrMapOvr>
+    <a:masterClrMapping/>
+  </p:clrMapOvr>
+</p:sld>
+</file>
+
+<file path=ppt/slides/slide42.xml><?xml version="1.0" encoding="utf-8"?>
+<p:sld xmlns:a="http://schemas.openxmlformats.org/drawingml/2006/main" xmlns:p="http://schemas.openxmlformats.org/presentationml/2006/main" xmlns:r="http://schemas.openxmlformats.org/officeDocument/2006/relationships">
+  <p:cSld>
+    <p:bg>
+      <p:bgPr>
+        <a:solidFill>
+          <a:srgbClr val="FFFFFF"/>
+        </a:solidFill>
+        <a:effectLst/>
+      </p:bgPr>
+    </p:bg>
+    <p:spTree>
+      <p:nvGrpSpPr>
+        <p:cNvPr id="1" name=""/>
+        <p:cNvGrpSpPr/>
+        <p:nvPr/>
+      </p:nvGrpSpPr>
+      <p:grpSpPr/>
+      <p:sp>
+        <p:nvSpPr>
+          <p:cNvPr id="2" name="Rectangle 1"/>
+          <p:cNvSpPr/>
+          <p:nvPr/>
+        </p:nvSpPr>
+        <p:spPr>
+          <a:xfrm>
+            <a:off x="0" y="0"/>
+            <a:ext cx="12191695" cy="164592"/>
+          </a:xfrm>
+          <a:prstGeom prst="rect">
+            <a:avLst/>
+          </a:prstGeom>
+          <a:solidFill>
+            <a:srgbClr val="269CCB"/>
+          </a:solidFill>
+          <a:ln>
+            <a:noFill/>
+          </a:ln>
+        </p:spPr>
+        <p:style>
+          <a:lnRef idx="1">
+            <a:schemeClr val="accent1"/>
+          </a:lnRef>
+          <a:fillRef idx="3">
+            <a:schemeClr val="accent1"/>
+          </a:fillRef>
+          <a:effectRef idx="2">
+            <a:schemeClr val="accent1"/>
+          </a:effectRef>
+          <a:fontRef idx="minor">
+            <a:schemeClr val="lt1"/>
+          </a:fontRef>
+        </p:style>
+        <p:txBody>
+          <a:bodyPr rtlCol="0" anchor="ctr"/>
+          <a:lstStyle/>
+          <a:p>
+            <a:pPr algn="ctr"/>
+          </a:p>
+        </p:txBody>
+      </p:sp>
+      <p:pic>
+        <p:nvPicPr>
+          <p:cNvPr id="3" name="Picture 2" descr="logo_uniajc_color.png"/>
+          <p:cNvPicPr>
+            <a:picLocks noChangeAspect="1"/>
+          </p:cNvPicPr>
+          <p:nvPr/>
+        </p:nvPicPr>
+        <p:blipFill>
+          <a:blip r:embed="rId2"/>
+          <a:stretch>
+            <a:fillRect/>
+          </a:stretch>
+        </p:blipFill>
+        <p:spPr>
+          <a:xfrm>
+            <a:off x="10271455" y="5998464"/>
+            <a:ext cx="1463040" cy="643233"/>
+          </a:xfrm>
+          <a:prstGeom prst="rect">
+            <a:avLst/>
+          </a:prstGeom>
+        </p:spPr>
+      </p:pic>
+      <p:sp>
+        <p:nvSpPr>
+          <p:cNvPr id="4" name="TextBox 3"/>
+          <p:cNvSpPr txBox="1"/>
+          <p:nvPr/>
+        </p:nvSpPr>
+        <p:spPr>
+          <a:xfrm>
+            <a:off x="457200" y="1737360"/>
+            <a:ext cx="11277295" cy="1097280"/>
+          </a:xfrm>
+          <a:prstGeom prst="rect">
+            <a:avLst/>
+          </a:prstGeom>
+          <a:noFill/>
+        </p:spPr>
+        <p:txBody>
+          <a:bodyPr wrap="square" anchor="ctr"/>
+          <a:lstStyle/>
+          <a:p>
+            <a:pPr algn="ctr"/>
+            <a:r>
+              <a:rPr sz="3400" b="1" i="0">
+                <a:solidFill>
+                  <a:srgbClr val="095292"/>
+                </a:solidFill>
+                <a:latin typeface="Calibri"/>
+              </a:rPr>
+              <a:t>Clase 4 · PI en movimiento</a:t>
+            </a:r>
+          </a:p>
+        </p:txBody>
+      </p:sp>
+      <p:sp>
+        <p:nvSpPr>
+          <p:cNvPr id="5" name="TextBox 4"/>
+          <p:cNvSpPr txBox="1"/>
+          <p:nvPr/>
+        </p:nvSpPr>
+        <p:spPr>
+          <a:xfrm>
+            <a:off x="457200" y="3017520"/>
+            <a:ext cx="11277295" cy="1645920"/>
+          </a:xfrm>
+          <a:prstGeom prst="rect">
+            <a:avLst/>
+          </a:prstGeom>
+          <a:noFill/>
+        </p:spPr>
+        <p:txBody>
+          <a:bodyPr wrap="square">
+            <a:spAutoFit/>
+          </a:bodyPr>
+          <a:lstStyle/>
+          <a:p>
+            <a:pPr algn="ctr">
+              <a:spcAft>
+                <a:spcPts val="600"/>
+              </a:spcAft>
+            </a:pPr>
+            <a:r>
+              <a:rPr sz="1600" b="0" i="0">
+                <a:solidFill>
+                  <a:srgbClr val="333333"/>
+                </a:solidFill>
+                <a:latin typeface="Calibri"/>
+              </a:rPr>
+              <a:t>Diagramar componentes/servicios de CloudLite y sus contratos</a:t>
+            </a:r>
+          </a:p>
+          <a:p>
+            <a:pPr algn="ctr">
+              <a:spcAft>
+                <a:spcPts val="600"/>
+              </a:spcAft>
+            </a:pPr>
+            <a:r>
+              <a:rPr sz="1600" b="0" i="0">
+                <a:solidFill>
+                  <a:srgbClr val="333333"/>
+                </a:solidFill>
+                <a:latin typeface="Calibri"/>
+              </a:rPr>
+              <a:t>Evidencia: Diagrama C4 Container en Mermaid + tabla de 3 contratos + 3 riesgos de distribución</a:t>
+            </a:r>
+          </a:p>
+          <a:p>
+            <a:pPr algn="ctr">
+              <a:spcAft>
+                <a:spcPts val="600"/>
+              </a:spcAft>
+            </a:pPr>
+            <a:r>
+              <a:rPr sz="1600" b="0" i="0">
+                <a:solidFill>
+                  <a:srgbClr val="333333"/>
+                </a:solidFill>
+                <a:latin typeface="Calibri"/>
+              </a:rPr>
+              <a:t>Siguiente paso = siguiente hito del PI CloudLite</a:t>
+            </a:r>
+          </a:p>
+        </p:txBody>
+      </p:sp>
+      <p:sp>
+        <p:nvSpPr>
+          <p:cNvPr id="6" name="TextBox 5"/>
+          <p:cNvSpPr txBox="1"/>
+          <p:nvPr/>
+        </p:nvSpPr>
+        <p:spPr>
+          <a:xfrm>
+            <a:off x="457200" y="4754880"/>
+            <a:ext cx="11277295" cy="640080"/>
+          </a:xfrm>
+          <a:prstGeom prst="rect">
+            <a:avLst/>
+          </a:prstGeom>
+          <a:noFill/>
+        </p:spPr>
+        <p:txBody>
+          <a:bodyPr wrap="square">
+            <a:spAutoFit/>
+          </a:bodyPr>
+          <a:lstStyle/>
+          <a:p>
+            <a:pPr algn="ctr"/>
+            <a:r>
+              <a:rPr sz="2000" b="1" i="0">
+                <a:solidFill>
+                  <a:srgbClr val="269CCB"/>
+                </a:solidFill>
+                <a:latin typeface="Calibri"/>
+              </a:rPr>
+              <a:t>Teoría al servicio del proyecto</a:t>
             </a:r>
           </a:p>
         </p:txBody>
@@ -17400,7 +17996,7 @@
                 </a:solidFill>
                 <a:latin typeface="Calibri"/>
               </a:rPr>
-              <a:t>De donde viene la clase y que se abre hoy</a:t>
+              <a:t>De donde viene la clase y que se abre hoy (1/2)</a:t>
             </a:r>
           </a:p>
         </p:txBody>
@@ -17488,38 +18084,6 @@
                 <a:latin typeface="Calibri"/>
               </a:rPr>
               <a:t>–   Ese es el nivel 2 del modelo C4, el de contenedores, y el entregable son tres cosas: la decision de arquitectura en una frase con sus dos criterios, el diagrama de contenedores escrito en Mermaid, y una tabla de tres contratos mas tres riesgos de distribucion.</a:t>
-            </a:r>
-          </a:p>
-          <a:p>
-            <a:pPr>
-              <a:spcAft>
-                <a:spcPts val="800"/>
-              </a:spcAft>
-            </a:pPr>
-            <a:r>
-              <a:rPr sz="2000" b="0" i="0">
-                <a:solidFill>
-                  <a:srgbClr val="333333"/>
-                </a:solidFill>
-                <a:latin typeface="Calibri"/>
-              </a:rPr>
-              <a:t>–   La pregunta que organiza la clase no es que son los microservicios, sino una mas incomoda y mas util: cada vez que un sistema se parte en dos, se gana algo y se paga algo, y hoy hay que decir explicitamente que se gana y que se paga.</a:t>
-            </a:r>
-          </a:p>
-          <a:p>
-            <a:pPr>
-              <a:spcAft>
-                <a:spcPts val="800"/>
-              </a:spcAft>
-            </a:pPr>
-            <a:r>
-              <a:rPr sz="2000" b="0" i="0">
-                <a:solidFill>
-                  <a:srgbClr val="333333"/>
-                </a:solidFill>
-                <a:latin typeface="Calibri"/>
-              </a:rPr>
-              <a:t>–   Un estudiante que solo aprende la primera mitad de esa frase sale convencido de que mas servicios es mejor arquitectura, que es exactamente el error que esta clase debe prevenir.</a:t>
             </a:r>
           </a:p>
         </p:txBody>
@@ -17700,7 +18264,7 @@
                 </a:solidFill>
                 <a:latin typeface="Calibri"/>
               </a:rPr>
-              <a:t>Monolito: lo que la palabra realmente significa (1/3)</a:t>
+              <a:t>De donde viene la clase y que se abre hoy (2/2)</a:t>
             </a:r>
           </a:p>
         </p:txBody>
@@ -17739,7 +18303,7 @@
                 </a:solidFill>
                 <a:latin typeface="Calibri"/>
               </a:rPr>
-              <a:t>–   Empecemos por el termino que el estudiante trae con mala fama.</a:t>
+              <a:t>–   La pregunta que organiza la clase no es que son los microservicios, sino una mas incomoda y mas util: cada vez que un sistema se parte en dos, se gana algo y se paga algo, y hoy hay que decir explicitamente que se gana y que se paga.</a:t>
             </a:r>
           </a:p>
           <a:p>
@@ -17755,87 +18319,7 @@
                 </a:solidFill>
                 <a:latin typeface="Calibri"/>
               </a:rPr>
-              <a:t>–   Un monolito es un sistema que se despliega como una sola unidad: todo su codigo se construye junto y sale al aire junto.</a:t>
-            </a:r>
-          </a:p>
-          <a:p>
-            <a:pPr>
-              <a:spcAft>
-                <a:spcPts val="800"/>
-              </a:spcAft>
-            </a:pPr>
-            <a:r>
-              <a:rPr sz="2000" b="0" i="0">
-                <a:solidFill>
-                  <a:srgbClr val="333333"/>
-                </a:solidFill>
-                <a:latin typeface="Calibri"/>
-              </a:rPr>
-              <a:t>–   No es un insulto ni un error, es la arquitectura correcta por defecto para la mayoria de los sistemas pequenos, y varios proyectos de este curso deberian ser monolitos bien organizados.</a:t>
-            </a:r>
-          </a:p>
-          <a:p>
-            <a:pPr>
-              <a:spcAft>
-                <a:spcPts val="800"/>
-              </a:spcAft>
-            </a:pPr>
-            <a:r>
-              <a:rPr sz="2000" b="0" i="0">
-                <a:solidFill>
-                  <a:srgbClr val="333333"/>
-                </a:solidFill>
-                <a:latin typeface="Calibri"/>
-              </a:rPr>
-              <a:t>–   Un microservicio, en cambio, es una unidad de despliegue independiente con una frontera de responsabilidad de negocio propia.</a:t>
-            </a:r>
-          </a:p>
-          <a:p>
-            <a:pPr>
-              <a:spcAft>
-                <a:spcPts val="800"/>
-              </a:spcAft>
-            </a:pPr>
-            <a:r>
-              <a:rPr sz="2000" b="0" i="0">
-                <a:solidFill>
-                  <a:srgbClr val="333333"/>
-                </a:solidFill>
-                <a:latin typeface="Calibri"/>
-              </a:rPr>
-              <a:t>–   Tres senales de una frontera real: el servicio es dueno de sus propios datos, puede liberarse a su propio ritmo y corresponde a una capacidad de negocio que se puede nombrar sin usar palabras tecnicas.</a:t>
-            </a:r>
-          </a:p>
-          <a:p>
-            <a:pPr>
-              <a:spcAft>
-                <a:spcPts val="800"/>
-              </a:spcAft>
-            </a:pPr>
-            <a:r>
-              <a:rPr sz="2000" b="0" i="0">
-                <a:solidFill>
-                  <a:srgbClr val="333333"/>
-                </a:solidFill>
-                <a:latin typeface="Calibri"/>
-              </a:rPr>
-              <a:t>–   En cuanto a la notacion, el nivel de contenedores del modelo C4 pide dibujar, dentro del sistema, cada cosa que se ejecuta o almacena de forma independiente</a:t>
-            </a:r>
-          </a:p>
-          <a:p>
-            <a:pPr>
-              <a:spcAft>
-                <a:spcPts val="800"/>
-              </a:spcAft>
-            </a:pPr>
-            <a:r>
-              <a:rPr sz="2000" b="0" i="0">
-                <a:solidFill>
-                  <a:srgbClr val="333333"/>
-                </a:solidFill>
-                <a:latin typeface="Calibri"/>
-              </a:rPr>
-              <a:t>–   Con tres datos obligatorios por caja (nombre, tecnologia y responsabilidad en una frase) y cada flecha etiquetada con protocolo y formato, nunca una linea muda.</a:t>
+              <a:t>–   Un estudiante que solo aprende la primera mitad de esa frase sale convencido de que mas servicios es mejor arquitectura, que es exactamente el error que esta clase debe prevenir.</a:t>
             </a:r>
           </a:p>
         </p:txBody>

--- a/Arquitectura de Sistemas Computacionales/Clases/Clase 4 - Microservicios y arquitecturas distribuidas/Presentacion.pptx
+++ b/Arquitectura de Sistemas Computacionales/Clases/Clase 4 - Microservicios y arquitecturas distribuidas/Presentacion.pptx
@@ -47,6 +47,8 @@
     <p:sldId id="295" r:id="rId46"/>
     <p:sldId id="296" r:id="rId47"/>
     <p:sldId id="297" r:id="rId48"/>
+    <p:sldId id="298" r:id="rId49"/>
+    <p:sldId id="299" r:id="rId50"/>
   </p:sldIdLst>
   <p:sldSz cx="12191695" cy="6858000" type="screen4x3"/>
   <p:notesSz cx="6858000" cy="9144000"/>
@@ -10712,7 +10714,7 @@
         <p:spPr>
           <a:xfrm>
             <a:off x="0" y="0"/>
-            <a:ext cx="12191695" cy="1170432"/>
+            <a:ext cx="12191695" cy="960120"/>
           </a:xfrm>
           <a:prstGeom prst="rect">
             <a:avLst/>
@@ -10754,7 +10756,7 @@
         </p:nvSpPr>
         <p:spPr>
           <a:xfrm>
-            <a:off x="0" y="1170432"/>
+            <a:off x="0" y="960120"/>
             <a:ext cx="12191695" cy="41148"/>
           </a:xfrm>
           <a:prstGeom prst="rect">
@@ -10798,7 +10800,7 @@
         <p:spPr>
           <a:xfrm>
             <a:off x="457200" y="164592"/>
-            <a:ext cx="11277295" cy="384048"/>
+            <a:ext cx="11277295" cy="502920"/>
           </a:xfrm>
           <a:prstGeom prst="rect">
             <a:avLst/>
@@ -10818,60 +10820,69 @@
                 </a:solidFill>
                 <a:latin typeface="Calibri"/>
               </a:rPr>
-              <a:t>Ejemplo de diagrama C4 — nivel Containers</a:t>
-            </a:r>
-          </a:p>
-        </p:txBody>
-      </p:sp>
-      <p:sp>
-        <p:nvSpPr>
-          <p:cNvPr id="5" name="TextBox 4"/>
-          <p:cNvSpPr txBox="1"/>
-          <p:nvPr/>
-        </p:nvSpPr>
-        <p:spPr>
-          <a:xfrm>
-            <a:off x="457200" y="566928"/>
-            <a:ext cx="11277295" cy="411480"/>
-          </a:xfrm>
-          <a:prstGeom prst="rect">
-            <a:avLst/>
-          </a:prstGeom>
-          <a:noFill/>
-        </p:spPr>
-        <p:txBody>
-          <a:bodyPr wrap="square">
-            <a:spAutoFit/>
-          </a:bodyPr>
-          <a:lstStyle/>
-          <a:p>
-            <a:r>
-              <a:rPr sz="1400" b="0" i="0">
-                <a:solidFill>
-                  <a:srgbClr val="B8D8EE"/>
-                </a:solidFill>
-                <a:latin typeface="Calibri"/>
-              </a:rPr>
-              <a:t>2–5 cajas justificadas, cada flecha con protocolo Y formato</a:t>
-            </a:r>
-          </a:p>
-        </p:txBody>
-      </p:sp>
-      <p:sp>
-        <p:nvSpPr>
-          <p:cNvPr id="6" name="Rounded Rectangle 5"/>
+              <a:t>El C4 Container en Mermaid: la forma que la plataforma del curso renderiza</a:t>
+            </a:r>
+          </a:p>
+        </p:txBody>
+      </p:sp>
+      <p:sp>
+        <p:nvSpPr>
+          <p:cNvPr id="5" name="Rounded Rectangle 4"/>
           <p:cNvSpPr/>
           <p:nvPr/>
         </p:nvSpPr>
         <p:spPr>
           <a:xfrm>
-            <a:off x="822960" y="2011680"/>
-            <a:ext cx="2377440" cy="1097280"/>
+            <a:off x="457200" y="1261872"/>
+            <a:ext cx="11277295" cy="5093208"/>
           </a:xfrm>
           <a:prstGeom prst="roundRect">
             <a:avLst>
               <a:gd name="adj" fmla="val 12000"/>
             </a:avLst>
+          </a:prstGeom>
+          <a:solidFill>
+            <a:srgbClr val="1E2A38"/>
+          </a:solidFill>
+          <a:ln>
+            <a:noFill/>
+          </a:ln>
+        </p:spPr>
+        <p:style>
+          <a:lnRef idx="1">
+            <a:schemeClr val="accent1"/>
+          </a:lnRef>
+          <a:fillRef idx="3">
+            <a:schemeClr val="accent1"/>
+          </a:fillRef>
+          <a:effectRef idx="2">
+            <a:schemeClr val="accent1"/>
+          </a:effectRef>
+          <a:fontRef idx="minor">
+            <a:schemeClr val="lt1"/>
+          </a:fontRef>
+        </p:style>
+        <p:txBody>
+          <a:bodyPr rtlCol="0" anchor="ctr"/>
+          <a:lstStyle/>
+          <a:p>
+            <a:pPr algn="ctr"/>
+          </a:p>
+        </p:txBody>
+      </p:sp>
+      <p:sp>
+        <p:nvSpPr>
+          <p:cNvPr id="6" name="Rectangle 5"/>
+          <p:cNvSpPr/>
+          <p:nvPr/>
+        </p:nvSpPr>
+        <p:spPr>
+          <a:xfrm>
+            <a:off x="457200" y="1261872"/>
+            <a:ext cx="11277295" cy="320040"/>
+          </a:xfrm>
+          <a:prstGeom prst="rect">
+            <a:avLst/>
           </a:prstGeom>
           <a:solidFill>
             <a:srgbClr val="095292"/>
@@ -10895,289 +10906,55 @@
           </a:fontRef>
         </p:style>
         <p:txBody>
-          <a:bodyPr rtlCol="0" anchor="ctr" wrap="square"/>
+          <a:bodyPr rtlCol="0" anchor="ctr"/>
           <a:lstStyle/>
           <a:p>
             <a:pPr algn="ctr"/>
-            <a:r>
-              <a:rPr sz="1100" b="1" i="0">
-                <a:solidFill>
-                  <a:srgbClr val="FFFFFF"/>
-                </a:solidFill>
-                <a:latin typeface="Calibri"/>
-              </a:rPr>
-              <a:t>App web
-(Container · React)</a:t>
-            </a:r>
-          </a:p>
-        </p:txBody>
-      </p:sp>
-      <p:sp>
-        <p:nvSpPr>
-          <p:cNvPr id="7" name="Rounded Rectangle 6"/>
-          <p:cNvSpPr/>
-          <p:nvPr/>
-        </p:nvSpPr>
-        <p:spPr>
-          <a:xfrm>
-            <a:off x="4754880" y="2011680"/>
-            <a:ext cx="2377440" cy="1097280"/>
-          </a:xfrm>
-          <a:prstGeom prst="roundRect">
-            <a:avLst>
-              <a:gd name="adj" fmla="val 12000"/>
-            </a:avLst>
-          </a:prstGeom>
-          <a:solidFill>
-            <a:srgbClr val="095292"/>
-          </a:solidFill>
-          <a:ln>
-            <a:noFill/>
-          </a:ln>
-        </p:spPr>
-        <p:style>
-          <a:lnRef idx="1">
-            <a:schemeClr val="accent1"/>
-          </a:lnRef>
-          <a:fillRef idx="3">
-            <a:schemeClr val="accent1"/>
-          </a:fillRef>
-          <a:effectRef idx="2">
-            <a:schemeClr val="accent1"/>
-          </a:effectRef>
-          <a:fontRef idx="minor">
-            <a:schemeClr val="lt1"/>
-          </a:fontRef>
-        </p:style>
-        <p:txBody>
-          <a:bodyPr rtlCol="0" anchor="ctr" wrap="square"/>
-          <a:lstStyle/>
-          <a:p>
-            <a:pPr algn="ctr"/>
-            <a:r>
-              <a:rPr sz="1100" b="1" i="0">
-                <a:solidFill>
-                  <a:srgbClr val="FFFFFF"/>
-                </a:solidFill>
-                <a:latin typeface="Calibri"/>
-              </a:rPr>
-              <a:t>API de turnos
-(Container · Node.js)</a:t>
-            </a:r>
-          </a:p>
-        </p:txBody>
-      </p:sp>
-      <p:sp>
-        <p:nvSpPr>
-          <p:cNvPr id="8" name="Rounded Rectangle 7"/>
-          <p:cNvSpPr/>
-          <p:nvPr/>
-        </p:nvSpPr>
-        <p:spPr>
-          <a:xfrm>
-            <a:off x="8595360" y="2011680"/>
-            <a:ext cx="2377440" cy="1097280"/>
-          </a:xfrm>
-          <a:prstGeom prst="roundRect">
-            <a:avLst>
-              <a:gd name="adj" fmla="val 12000"/>
-            </a:avLst>
-          </a:prstGeom>
-          <a:solidFill>
-            <a:srgbClr val="269CCB"/>
-          </a:solidFill>
-          <a:ln>
-            <a:noFill/>
-          </a:ln>
-        </p:spPr>
-        <p:style>
-          <a:lnRef idx="1">
-            <a:schemeClr val="accent1"/>
-          </a:lnRef>
-          <a:fillRef idx="3">
-            <a:schemeClr val="accent1"/>
-          </a:fillRef>
-          <a:effectRef idx="2">
-            <a:schemeClr val="accent1"/>
-          </a:effectRef>
-          <a:fontRef idx="minor">
-            <a:schemeClr val="lt1"/>
-          </a:fontRef>
-        </p:style>
-        <p:txBody>
-          <a:bodyPr rtlCol="0" anchor="ctr" wrap="square"/>
-          <a:lstStyle/>
-          <a:p>
-            <a:pPr algn="ctr"/>
-            <a:r>
-              <a:rPr sz="1100" b="1" i="0">
-                <a:solidFill>
-                  <a:srgbClr val="FFFFFF"/>
-                </a:solidFill>
-                <a:latin typeface="Calibri"/>
-              </a:rPr>
-              <a:t>Base de turnos
-(ContainerDb · PostgreSQL)</a:t>
-            </a:r>
-          </a:p>
-        </p:txBody>
-      </p:sp>
-      <p:sp>
-        <p:nvSpPr>
-          <p:cNvPr id="9" name="Rounded Rectangle 8"/>
-          <p:cNvSpPr/>
-          <p:nvPr/>
-        </p:nvSpPr>
-        <p:spPr>
-          <a:xfrm>
-            <a:off x="822960" y="3931920"/>
-            <a:ext cx="2377440" cy="914400"/>
-          </a:xfrm>
-          <a:prstGeom prst="roundRect">
-            <a:avLst>
-              <a:gd name="adj" fmla="val 12000"/>
-            </a:avLst>
-          </a:prstGeom>
-          <a:solidFill>
-            <a:srgbClr val="FFD000"/>
-          </a:solidFill>
-          <a:ln>
-            <a:noFill/>
-          </a:ln>
-        </p:spPr>
-        <p:style>
-          <a:lnRef idx="1">
-            <a:schemeClr val="accent1"/>
-          </a:lnRef>
-          <a:fillRef idx="3">
-            <a:schemeClr val="accent1"/>
-          </a:fillRef>
-          <a:effectRef idx="2">
-            <a:schemeClr val="accent1"/>
-          </a:effectRef>
-          <a:fontRef idx="minor">
-            <a:schemeClr val="lt1"/>
-          </a:fontRef>
-        </p:style>
-        <p:txBody>
-          <a:bodyPr rtlCol="0" anchor="ctr" wrap="square"/>
-          <a:lstStyle/>
-          <a:p>
-            <a:pPr algn="ctr"/>
-            <a:r>
-              <a:rPr sz="1300" b="1" i="0">
-                <a:solidFill>
-                  <a:srgbClr val="095292"/>
-                </a:solidFill>
-                <a:latin typeface="Calibri"/>
-              </a:rPr>
-              <a:t>Cliente
-(Person)</a:t>
-            </a:r>
-          </a:p>
-        </p:txBody>
-      </p:sp>
-      <p:sp>
-        <p:nvSpPr>
-          <p:cNvPr id="10" name="Rounded Rectangle 9"/>
-          <p:cNvSpPr/>
-          <p:nvPr/>
-        </p:nvSpPr>
-        <p:spPr>
-          <a:xfrm>
-            <a:off x="4754880" y="3931920"/>
-            <a:ext cx="2377440" cy="914400"/>
-          </a:xfrm>
-          <a:prstGeom prst="roundRect">
-            <a:avLst>
-              <a:gd name="adj" fmla="val 12000"/>
-            </a:avLst>
-          </a:prstGeom>
-          <a:solidFill>
-            <a:srgbClr val="095292"/>
-          </a:solidFill>
-          <a:ln>
-            <a:noFill/>
-          </a:ln>
-        </p:spPr>
-        <p:style>
-          <a:lnRef idx="1">
-            <a:schemeClr val="accent1"/>
-          </a:lnRef>
-          <a:fillRef idx="3">
-            <a:schemeClr val="accent1"/>
-          </a:fillRef>
-          <a:effectRef idx="2">
-            <a:schemeClr val="accent1"/>
-          </a:effectRef>
-          <a:fontRef idx="minor">
-            <a:schemeClr val="lt1"/>
-          </a:fontRef>
-        </p:style>
-        <p:txBody>
-          <a:bodyPr rtlCol="0" anchor="ctr" wrap="square"/>
-          <a:lstStyle/>
-          <a:p>
-            <a:pPr algn="ctr"/>
-            <a:r>
-              <a:rPr sz="1100" b="1" i="0">
-                <a:solidFill>
-                  <a:srgbClr val="FFFFFF"/>
-                </a:solidFill>
-                <a:latin typeface="Calibri"/>
-              </a:rPr>
-              <a:t>Worker de avisos
-(Container · cola)</a:t>
-            </a:r>
-          </a:p>
-        </p:txBody>
-      </p:sp>
-      <p:cxnSp>
-        <p:nvCxnSpPr>
-          <p:cNvPr id="11" name="Connector 10"/>
-          <p:cNvCxnSpPr/>
-          <p:nvPr/>
-        </p:nvCxnSpPr>
-        <p:spPr>
-          <a:xfrm flipV="1">
-            <a:off x="2011680" y="3108960"/>
-            <a:ext cx="0" cy="822960"/>
-          </a:xfrm>
-          <a:prstGeom prst="line">
-            <a:avLst/>
-          </a:prstGeom>
-          <a:ln w="22225">
-            <a:solidFill>
-              <a:srgbClr val="666666"/>
-            </a:solidFill>
-            <a:tailEnd type="triangle" w="med" len="med"/>
-          </a:ln>
-        </p:spPr>
-        <p:style>
-          <a:lnRef idx="2">
-            <a:schemeClr val="accent1"/>
-          </a:lnRef>
-          <a:fillRef idx="0">
-            <a:schemeClr val="accent1"/>
-          </a:fillRef>
-          <a:effectRef idx="1">
-            <a:schemeClr val="accent1"/>
-          </a:effectRef>
-          <a:fontRef idx="minor">
-            <a:schemeClr val="tx1"/>
-          </a:fontRef>
-        </p:style>
-      </p:cxnSp>
-      <p:sp>
-        <p:nvSpPr>
-          <p:cNvPr id="12" name="TextBox 11"/>
+          </a:p>
+        </p:txBody>
+      </p:sp>
+      <p:sp>
+        <p:nvSpPr>
+          <p:cNvPr id="7" name="TextBox 6"/>
           <p:cNvSpPr txBox="1"/>
           <p:nvPr/>
         </p:nvSpPr>
         <p:spPr>
           <a:xfrm>
-            <a:off x="2121408" y="3319272"/>
-            <a:ext cx="1645920" cy="320040"/>
+            <a:off x="685800" y="1307592"/>
+            <a:ext cx="10820095" cy="256032"/>
+          </a:xfrm>
+          <a:prstGeom prst="rect">
+            <a:avLst/>
+          </a:prstGeom>
+          <a:noFill/>
+        </p:spPr>
+        <p:txBody>
+          <a:bodyPr wrap="square" anchor="ctr"/>
+          <a:lstStyle/>
+          <a:p>
+            <a:r>
+              <a:rPr sz="1000" b="1" i="0">
+                <a:solidFill>
+                  <a:srgbClr val="269CCB"/>
+                </a:solidFill>
+                <a:latin typeface="Calibri"/>
+              </a:rPr>
+              <a:t>● ● ●</a:t>
+            </a:r>
+          </a:p>
+        </p:txBody>
+      </p:sp>
+      <p:sp>
+        <p:nvSpPr>
+          <p:cNvPr id="8" name="TextBox 7"/>
+          <p:cNvSpPr txBox="1"/>
+          <p:nvPr/>
+        </p:nvSpPr>
+        <p:spPr>
+          <a:xfrm>
+            <a:off x="777240" y="1719072"/>
+            <a:ext cx="10637215" cy="4453128"/>
           </a:xfrm>
           <a:prstGeom prst="rect">
             <a:avLst/>
@@ -11190,269 +10967,282 @@
           </a:bodyPr>
           <a:lstStyle/>
           <a:p>
-            <a:pPr algn="l"/>
-            <a:r>
-              <a:rPr sz="1000" b="0" i="1">
-                <a:solidFill>
-                  <a:srgbClr val="666666"/>
-                </a:solidFill>
-                <a:latin typeface="Calibri"/>
-              </a:rPr>
-              <a:t>usa · HTTPS</a:t>
-            </a:r>
-          </a:p>
-        </p:txBody>
-      </p:sp>
-      <p:cxnSp>
-        <p:nvCxnSpPr>
-          <p:cNvPr id="13" name="Connector 12"/>
-          <p:cNvCxnSpPr/>
-          <p:nvPr/>
-        </p:nvCxnSpPr>
-        <p:spPr>
-          <a:xfrm>
-            <a:off x="3200400" y="2560320"/>
-            <a:ext cx="1554480" cy="0"/>
-          </a:xfrm>
-          <a:prstGeom prst="line">
-            <a:avLst/>
-          </a:prstGeom>
-          <a:ln w="22225">
-            <a:solidFill>
-              <a:srgbClr val="666666"/>
-            </a:solidFill>
-            <a:tailEnd type="triangle" w="med" len="med"/>
-          </a:ln>
-        </p:spPr>
-        <p:style>
-          <a:lnRef idx="2">
-            <a:schemeClr val="accent1"/>
-          </a:lnRef>
-          <a:fillRef idx="0">
-            <a:schemeClr val="accent1"/>
-          </a:fillRef>
-          <a:effectRef idx="1">
-            <a:schemeClr val="accent1"/>
-          </a:effectRef>
-          <a:fontRef idx="minor">
-            <a:schemeClr val="tx1"/>
-          </a:fontRef>
-        </p:style>
-      </p:cxnSp>
-      <p:sp>
-        <p:nvSpPr>
-          <p:cNvPr id="14" name="TextBox 13"/>
-          <p:cNvSpPr txBox="1"/>
-          <p:nvPr/>
-        </p:nvSpPr>
-        <p:spPr>
-          <a:xfrm>
-            <a:off x="3154679" y="2359152"/>
-            <a:ext cx="1645920" cy="320040"/>
-          </a:xfrm>
-          <a:prstGeom prst="rect">
-            <a:avLst/>
-          </a:prstGeom>
-          <a:noFill/>
-        </p:spPr>
-        <p:txBody>
-          <a:bodyPr wrap="square">
-            <a:spAutoFit/>
-          </a:bodyPr>
-          <a:lstStyle/>
-          <a:p>
-            <a:pPr algn="ctr"/>
-            <a:r>
-              <a:rPr sz="1000" b="0" i="1">
-                <a:solidFill>
-                  <a:srgbClr val="666666"/>
-                </a:solidFill>
-                <a:latin typeface="Calibri"/>
-              </a:rPr>
-              <a:t>HTTPS/JSON</a:t>
-            </a:r>
-          </a:p>
-        </p:txBody>
-      </p:sp>
-      <p:cxnSp>
-        <p:nvCxnSpPr>
-          <p:cNvPr id="15" name="Connector 14"/>
-          <p:cNvCxnSpPr/>
-          <p:nvPr/>
-        </p:nvCxnSpPr>
-        <p:spPr>
-          <a:xfrm>
-            <a:off x="7132320" y="2560320"/>
-            <a:ext cx="1463040" cy="0"/>
-          </a:xfrm>
-          <a:prstGeom prst="line">
-            <a:avLst/>
-          </a:prstGeom>
-          <a:ln w="22225">
-            <a:solidFill>
-              <a:srgbClr val="666666"/>
-            </a:solidFill>
-            <a:tailEnd type="triangle" w="med" len="med"/>
-          </a:ln>
-        </p:spPr>
-        <p:style>
-          <a:lnRef idx="2">
-            <a:schemeClr val="accent1"/>
-          </a:lnRef>
-          <a:fillRef idx="0">
-            <a:schemeClr val="accent1"/>
-          </a:fillRef>
-          <a:effectRef idx="1">
-            <a:schemeClr val="accent1"/>
-          </a:effectRef>
-          <a:fontRef idx="minor">
-            <a:schemeClr val="tx1"/>
-          </a:fontRef>
-        </p:style>
-      </p:cxnSp>
-      <p:sp>
-        <p:nvSpPr>
-          <p:cNvPr id="16" name="TextBox 15"/>
-          <p:cNvSpPr txBox="1"/>
-          <p:nvPr/>
-        </p:nvSpPr>
-        <p:spPr>
-          <a:xfrm>
-            <a:off x="7040880" y="2359152"/>
-            <a:ext cx="1645920" cy="320040"/>
-          </a:xfrm>
-          <a:prstGeom prst="rect">
-            <a:avLst/>
-          </a:prstGeom>
-          <a:noFill/>
-        </p:spPr>
-        <p:txBody>
-          <a:bodyPr wrap="square">
-            <a:spAutoFit/>
-          </a:bodyPr>
-          <a:lstStyle/>
-          <a:p>
-            <a:pPr algn="ctr"/>
-            <a:r>
-              <a:rPr sz="1000" b="0" i="1">
-                <a:solidFill>
-                  <a:srgbClr val="666666"/>
-                </a:solidFill>
-                <a:latin typeface="Calibri"/>
-              </a:rPr>
-              <a:t>TCP/SQL</a:t>
-            </a:r>
-          </a:p>
-        </p:txBody>
-      </p:sp>
-      <p:cxnSp>
-        <p:nvCxnSpPr>
-          <p:cNvPr id="17" name="Connector 16"/>
-          <p:cNvCxnSpPr/>
-          <p:nvPr/>
-        </p:nvCxnSpPr>
-        <p:spPr>
-          <a:xfrm>
-            <a:off x="5943600" y="3108960"/>
-            <a:ext cx="0" cy="822960"/>
-          </a:xfrm>
-          <a:prstGeom prst="line">
-            <a:avLst/>
-          </a:prstGeom>
-          <a:ln w="22225">
-            <a:solidFill>
-              <a:srgbClr val="666666"/>
-            </a:solidFill>
-            <a:tailEnd type="triangle" w="med" len="med"/>
-          </a:ln>
-        </p:spPr>
-        <p:style>
-          <a:lnRef idx="2">
-            <a:schemeClr val="accent1"/>
-          </a:lnRef>
-          <a:fillRef idx="0">
-            <a:schemeClr val="accent1"/>
-          </a:fillRef>
-          <a:effectRef idx="1">
-            <a:schemeClr val="accent1"/>
-          </a:effectRef>
-          <a:fontRef idx="minor">
-            <a:schemeClr val="tx1"/>
-          </a:fontRef>
-        </p:style>
-      </p:cxnSp>
-      <p:sp>
-        <p:nvSpPr>
-          <p:cNvPr id="18" name="TextBox 17"/>
-          <p:cNvSpPr txBox="1"/>
-          <p:nvPr/>
-        </p:nvSpPr>
-        <p:spPr>
-          <a:xfrm>
-            <a:off x="6053328" y="3319272"/>
-            <a:ext cx="1645920" cy="320040"/>
-          </a:xfrm>
-          <a:prstGeom prst="rect">
-            <a:avLst/>
-          </a:prstGeom>
-          <a:noFill/>
-        </p:spPr>
-        <p:txBody>
-          <a:bodyPr wrap="square">
-            <a:spAutoFit/>
-          </a:bodyPr>
-          <a:lstStyle/>
-          <a:p>
-            <a:pPr algn="l"/>
-            <a:r>
-              <a:rPr sz="1000" b="0" i="1">
-                <a:solidFill>
-                  <a:srgbClr val="666666"/>
-                </a:solidFill>
-                <a:latin typeface="Calibri"/>
-              </a:rPr>
-              <a:t>evento/cola (AMQP)</a:t>
-            </a:r>
-          </a:p>
-        </p:txBody>
-      </p:sp>
-      <p:sp>
-        <p:nvSpPr>
-          <p:cNvPr id="19" name="TextBox 18"/>
-          <p:cNvSpPr txBox="1"/>
-          <p:nvPr/>
-        </p:nvSpPr>
-        <p:spPr>
-          <a:xfrm>
-            <a:off x="457200" y="6263640"/>
-            <a:ext cx="11277295" cy="411480"/>
-          </a:xfrm>
-          <a:prstGeom prst="rect">
-            <a:avLst/>
-          </a:prstGeom>
-          <a:noFill/>
-        </p:spPr>
-        <p:txBody>
-          <a:bodyPr wrap="square">
-            <a:spAutoFit/>
-          </a:bodyPr>
-          <a:lstStyle/>
-          <a:p>
-            <a:r>
-              <a:rPr sz="1100" b="0" i="1">
-                <a:solidFill>
-                  <a:srgbClr val="666666"/>
-                </a:solidFill>
-                <a:latin typeface="Calibri"/>
-              </a:rPr>
-              <a:t>Lo que guarda datos va como ContainerDb, no como un Container más. La cuarta caja (el worker) existe porque el correo tarda: sin esa razón, no va. Y estos nombres deben reaparecer igual en el Deployment (Clase 7).</a:t>
-            </a:r>
-          </a:p>
-        </p:txBody>
-      </p:sp>
-      <p:sp>
-        <p:nvSpPr>
-          <p:cNvPr id="20" name="TextBox 19"/>
+            <a:pPr>
+              <a:spcAft>
+                <a:spcPts val="371"/>
+              </a:spcAft>
+            </a:pPr>
+            <a:r>
+              <a:rPr sz="1300" b="0" i="0">
+                <a:solidFill>
+                  <a:srgbClr val="FFFFFF"/>
+                </a:solidFill>
+                <a:latin typeface="Calibri"/>
+              </a:rPr>
+              <a:t>flowchart TB</a:t>
+            </a:r>
+          </a:p>
+          <a:p>
+            <a:pPr>
+              <a:spcAft>
+                <a:spcPts val="371"/>
+              </a:spcAft>
+            </a:pPr>
+            <a:r>
+              <a:rPr sz="1300" b="0" i="0">
+                <a:solidFill>
+                  <a:srgbClr val="FFFFFF"/>
+                </a:solidFill>
+                <a:latin typeface="Calibri"/>
+              </a:rPr>
+              <a:t>  usuario([Usuario &lt;rol de su dominio&gt;])</a:t>
+            </a:r>
+          </a:p>
+          <a:p>
+            <a:pPr>
+              <a:spcAft>
+                <a:spcPts val="371"/>
+              </a:spcAft>
+            </a:pPr>
+            <a:r>
+              <a:rPr sz="1300" b="0" i="0">
+                <a:solidFill>
+                  <a:srgbClr val="FFFFFF"/>
+                </a:solidFill>
+                <a:latin typeface="Calibri"/>
+              </a:rPr>
+              <a:t/>
+            </a:r>
+          </a:p>
+          <a:p>
+            <a:pPr>
+              <a:spcAft>
+                <a:spcPts val="371"/>
+              </a:spcAft>
+            </a:pPr>
+            <a:r>
+              <a:rPr sz="1300" b="0" i="0">
+                <a:solidFill>
+                  <a:srgbClr val="FFFFFF"/>
+                </a:solidFill>
+                <a:latin typeface="Calibri"/>
+              </a:rPr>
+              <a:t>  subgraph cloudlite[CloudLite App]</a:t>
+            </a:r>
+          </a:p>
+          <a:p>
+            <a:pPr>
+              <a:spcAft>
+                <a:spcPts val="371"/>
+              </a:spcAft>
+            </a:pPr>
+            <a:r>
+              <a:rPr sz="1300" b="0" i="0">
+                <a:solidFill>
+                  <a:srgbClr val="FFFFFF"/>
+                </a:solidFill>
+                <a:latin typeface="Calibri"/>
+              </a:rPr>
+              <a:t>    web[Web SPA&lt;br/&gt;React]</a:t>
+            </a:r>
+          </a:p>
+          <a:p>
+            <a:pPr>
+              <a:spcAft>
+                <a:spcPts val="371"/>
+              </a:spcAft>
+            </a:pPr>
+            <a:r>
+              <a:rPr sz="1300" b="0" i="0">
+                <a:solidFill>
+                  <a:srgbClr val="FFFFFF"/>
+                </a:solidFill>
+                <a:latin typeface="Calibri"/>
+              </a:rPr>
+              <a:t>    api[API REST&lt;br/&gt;Node + Express]</a:t>
+            </a:r>
+          </a:p>
+          <a:p>
+            <a:pPr>
+              <a:spcAft>
+                <a:spcPts val="371"/>
+              </a:spcAft>
+            </a:pPr>
+            <a:r>
+              <a:rPr sz="1300" b="0" i="0">
+                <a:solidFill>
+                  <a:srgbClr val="FFFFFF"/>
+                </a:solidFill>
+                <a:latin typeface="Calibri"/>
+              </a:rPr>
+              <a:t>    db[(Base de datos&lt;br/&gt;PostgreSQL)]</a:t>
+            </a:r>
+          </a:p>
+          <a:p>
+            <a:pPr>
+              <a:spcAft>
+                <a:spcPts val="371"/>
+              </a:spcAft>
+            </a:pPr>
+            <a:r>
+              <a:rPr sz="1300" b="0" i="0">
+                <a:solidFill>
+                  <a:srgbClr val="FFFFFF"/>
+                </a:solidFill>
+                <a:latin typeface="Calibri"/>
+              </a:rPr>
+              <a:t>    cola[[Cola de trabajos&lt;br/&gt;Redis]]</a:t>
+            </a:r>
+          </a:p>
+          <a:p>
+            <a:pPr>
+              <a:spcAft>
+                <a:spcPts val="371"/>
+              </a:spcAft>
+            </a:pPr>
+            <a:r>
+              <a:rPr sz="1300" b="0" i="0">
+                <a:solidFill>
+                  <a:srgbClr val="FFFFFF"/>
+                </a:solidFill>
+                <a:latin typeface="Calibri"/>
+              </a:rPr>
+              <a:t>  end</a:t>
+            </a:r>
+          </a:p>
+          <a:p>
+            <a:pPr>
+              <a:spcAft>
+                <a:spcPts val="371"/>
+              </a:spcAft>
+            </a:pPr>
+            <a:r>
+              <a:rPr sz="1300" b="0" i="0">
+                <a:solidFill>
+                  <a:srgbClr val="FFFFFF"/>
+                </a:solidFill>
+                <a:latin typeface="Calibri"/>
+              </a:rPr>
+              <a:t/>
+            </a:r>
+          </a:p>
+          <a:p>
+            <a:pPr>
+              <a:spcAft>
+                <a:spcPts val="371"/>
+              </a:spcAft>
+            </a:pPr>
+            <a:r>
+              <a:rPr sz="1300" b="0" i="0">
+                <a:solidFill>
+                  <a:srgbClr val="FFFFFF"/>
+                </a:solidFill>
+                <a:latin typeface="Calibri"/>
+              </a:rPr>
+              <a:t>  correo[Servicio de correo&lt;br/&gt;externo]</a:t>
+            </a:r>
+          </a:p>
+          <a:p>
+            <a:pPr>
+              <a:spcAft>
+                <a:spcPts val="371"/>
+              </a:spcAft>
+            </a:pPr>
+            <a:r>
+              <a:rPr sz="1300" b="0" i="0">
+                <a:solidFill>
+                  <a:srgbClr val="FFFFFF"/>
+                </a:solidFill>
+                <a:latin typeface="Calibri"/>
+              </a:rPr>
+              <a:t/>
+            </a:r>
+          </a:p>
+          <a:p>
+            <a:pPr>
+              <a:spcAft>
+                <a:spcPts val="371"/>
+              </a:spcAft>
+            </a:pPr>
+            <a:r>
+              <a:rPr sz="1300" b="0" i="0">
+                <a:solidFill>
+                  <a:srgbClr val="FFFFFF"/>
+                </a:solidFill>
+                <a:latin typeface="Calibri"/>
+              </a:rPr>
+              <a:t>  usuario --&gt;|HTTPS| web</a:t>
+            </a:r>
+          </a:p>
+          <a:p>
+            <a:pPr>
+              <a:spcAft>
+                <a:spcPts val="371"/>
+              </a:spcAft>
+            </a:pPr>
+            <a:r>
+              <a:rPr sz="1300" b="0" i="0">
+                <a:solidFill>
+                  <a:srgbClr val="FFFFFF"/>
+                </a:solidFill>
+                <a:latin typeface="Calibri"/>
+              </a:rPr>
+              <a:t>  web --&gt;|JSON/HTTPS| api</a:t>
+            </a:r>
+          </a:p>
+          <a:p>
+            <a:pPr>
+              <a:spcAft>
+                <a:spcPts val="371"/>
+              </a:spcAft>
+            </a:pPr>
+            <a:r>
+              <a:rPr sz="1300" b="0" i="0">
+                <a:solidFill>
+                  <a:srgbClr val="FFFFFF"/>
+                </a:solidFill>
+                <a:latin typeface="Calibri"/>
+              </a:rPr>
+              <a:t>  api --&gt;|SQL| db</a:t>
+            </a:r>
+          </a:p>
+          <a:p>
+            <a:pPr>
+              <a:spcAft>
+                <a:spcPts val="371"/>
+              </a:spcAft>
+            </a:pPr>
+            <a:r>
+              <a:rPr sz="1300" b="0" i="0">
+                <a:solidFill>
+                  <a:srgbClr val="FFFFFF"/>
+                </a:solidFill>
+                <a:latin typeface="Calibri"/>
+              </a:rPr>
+              <a:t>  api --&gt;|encola| cola</a:t>
+            </a:r>
+          </a:p>
+          <a:p>
+            <a:pPr>
+              <a:spcAft>
+                <a:spcPts val="371"/>
+              </a:spcAft>
+            </a:pPr>
+            <a:r>
+              <a:rPr sz="1300" b="0" i="0">
+                <a:solidFill>
+                  <a:srgbClr val="FFFFFF"/>
+                </a:solidFill>
+                <a:latin typeface="Calibri"/>
+              </a:rPr>
+              <a:t>  cola --&gt;|SMTP| correo</a:t>
+            </a:r>
+          </a:p>
+        </p:txBody>
+      </p:sp>
+      <p:sp>
+        <p:nvSpPr>
+          <p:cNvPr id="9" name="TextBox 8"/>
           <p:cNvSpPr txBox="1"/>
           <p:nvPr/>
         </p:nvSpPr>
@@ -11626,7 +11416,7 @@
                 </a:solidFill>
                 <a:latin typeface="Calibri"/>
               </a:rPr>
-              <a:t>Microservicios de verdad vs microservicios teatro</a:t>
+              <a:t>Lo que se califica del diagrama, y no es el dibujo</a:t>
             </a:r>
           </a:p>
         </p:txBody>
@@ -11640,7 +11430,7 @@
         <p:spPr>
           <a:xfrm>
             <a:off x="457200" y="1261872"/>
-            <a:ext cx="5478627" cy="5093208"/>
+            <a:ext cx="11277295" cy="5093208"/>
           </a:xfrm>
           <a:prstGeom prst="roundRect">
             <a:avLst>
@@ -11648,7 +11438,7 @@
             </a:avLst>
           </a:prstGeom>
           <a:solidFill>
-            <a:srgbClr val="FBE4E4"/>
+            <a:srgbClr val="1E2A38"/>
           </a:solidFill>
           <a:ln>
             <a:noFill/>
@@ -11685,215 +11475,7 @@
         <p:spPr>
           <a:xfrm>
             <a:off x="457200" y="1261872"/>
-            <a:ext cx="5478627" cy="502920"/>
-          </a:xfrm>
-          <a:prstGeom prst="rect">
-            <a:avLst/>
-          </a:prstGeom>
-          <a:solidFill>
-            <a:srgbClr val="A02030"/>
-          </a:solidFill>
-          <a:ln>
-            <a:noFill/>
-          </a:ln>
-        </p:spPr>
-        <p:style>
-          <a:lnRef idx="1">
-            <a:schemeClr val="accent1"/>
-          </a:lnRef>
-          <a:fillRef idx="3">
-            <a:schemeClr val="accent1"/>
-          </a:fillRef>
-          <a:effectRef idx="2">
-            <a:schemeClr val="accent1"/>
-          </a:effectRef>
-          <a:fontRef idx="minor">
-            <a:schemeClr val="lt1"/>
-          </a:fontRef>
-        </p:style>
-        <p:txBody>
-          <a:bodyPr rtlCol="0" anchor="ctr"/>
-          <a:lstStyle/>
-          <a:p>
-            <a:pPr algn="ctr"/>
-          </a:p>
-        </p:txBody>
-      </p:sp>
-      <p:sp>
-        <p:nvSpPr>
-          <p:cNvPr id="7" name="TextBox 6"/>
-          <p:cNvSpPr txBox="1"/>
-          <p:nvPr/>
-        </p:nvSpPr>
-        <p:spPr>
-          <a:xfrm>
-            <a:off x="594360" y="1353312"/>
-            <a:ext cx="5204307" cy="365760"/>
-          </a:xfrm>
-          <a:prstGeom prst="rect">
-            <a:avLst/>
-          </a:prstGeom>
-          <a:noFill/>
-        </p:spPr>
-        <p:txBody>
-          <a:bodyPr wrap="square" anchor="ctr"/>
-          <a:lstStyle/>
-          <a:p>
-            <a:pPr algn="ctr"/>
-            <a:r>
-              <a:rPr sz="1600" b="1" i="0">
-                <a:solidFill>
-                  <a:srgbClr val="FFFFFF"/>
-                </a:solidFill>
-                <a:latin typeface="Calibri"/>
-              </a:rPr>
-              <a:t>Teatro (lo que NO queremos)</a:t>
-            </a:r>
-          </a:p>
-        </p:txBody>
-      </p:sp>
-      <p:sp>
-        <p:nvSpPr>
-          <p:cNvPr id="8" name="TextBox 7"/>
-          <p:cNvSpPr txBox="1"/>
-          <p:nvPr/>
-        </p:nvSpPr>
-        <p:spPr>
-          <a:xfrm>
-            <a:off x="621792" y="1901952"/>
-            <a:ext cx="5158587" cy="4498848"/>
-          </a:xfrm>
-          <a:prstGeom prst="rect">
-            <a:avLst/>
-          </a:prstGeom>
-          <a:noFill/>
-        </p:spPr>
-        <p:txBody>
-          <a:bodyPr wrap="square">
-            <a:spAutoFit/>
-          </a:bodyPr>
-          <a:lstStyle/>
-          <a:p>
-            <a:pPr>
-              <a:spcAft>
-                <a:spcPts val="800"/>
-              </a:spcAft>
-            </a:pPr>
-            <a:r>
-              <a:rPr sz="1500" b="0" i="0">
-                <a:solidFill>
-                  <a:srgbClr val="333333"/>
-                </a:solidFill>
-                <a:latin typeface="Calibri"/>
-              </a:rPr>
-              <a:t>–   12 servicios para un equipo de 3</a:t>
-            </a:r>
-          </a:p>
-          <a:p>
-            <a:pPr>
-              <a:spcAft>
-                <a:spcPts val="800"/>
-              </a:spcAft>
-            </a:pPr>
-            <a:r>
-              <a:rPr sz="1500" b="0" i="0">
-                <a:solidFill>
-                  <a:srgbClr val="333333"/>
-                </a:solidFill>
-                <a:latin typeface="Calibri"/>
-              </a:rPr>
-              <a:t>–   Se separan por capricho tecnico, no por negocio</a:t>
-            </a:r>
-          </a:p>
-          <a:p>
-            <a:pPr>
-              <a:spcAft>
-                <a:spcPts val="800"/>
-              </a:spcAft>
-            </a:pPr>
-            <a:r>
-              <a:rPr sz="1500" b="0" i="0">
-                <a:solidFill>
-                  <a:srgbClr val="333333"/>
-                </a:solidFill>
-                <a:latin typeface="Calibri"/>
-              </a:rPr>
-              <a:t>–   Flechas sin protocolo ni verbo</a:t>
-            </a:r>
-          </a:p>
-          <a:p>
-            <a:pPr>
-              <a:spcAft>
-                <a:spcPts val="800"/>
-              </a:spcAft>
-            </a:pPr>
-            <a:r>
-              <a:rPr sz="1500" b="0" i="0">
-                <a:solidFill>
-                  <a:srgbClr val="333333"/>
-                </a:solidFill>
-                <a:latin typeface="Calibri"/>
-              </a:rPr>
-              <a:t>–   Nadie sabe explicar por que ese corte</a:t>
-            </a:r>
-          </a:p>
-        </p:txBody>
-      </p:sp>
-      <p:sp>
-        <p:nvSpPr>
-          <p:cNvPr id="9" name="Rounded Rectangle 8"/>
-          <p:cNvSpPr/>
-          <p:nvPr/>
-        </p:nvSpPr>
-        <p:spPr>
-          <a:xfrm>
-            <a:off x="6255867" y="1261872"/>
-            <a:ext cx="5478627" cy="5093208"/>
-          </a:xfrm>
-          <a:prstGeom prst="roundRect">
-            <a:avLst>
-              <a:gd name="adj" fmla="val 12000"/>
-            </a:avLst>
-          </a:prstGeom>
-          <a:solidFill>
-            <a:srgbClr val="E8F4FA"/>
-          </a:solidFill>
-          <a:ln>
-            <a:noFill/>
-          </a:ln>
-        </p:spPr>
-        <p:style>
-          <a:lnRef idx="1">
-            <a:schemeClr val="accent1"/>
-          </a:lnRef>
-          <a:fillRef idx="3">
-            <a:schemeClr val="accent1"/>
-          </a:fillRef>
-          <a:effectRef idx="2">
-            <a:schemeClr val="accent1"/>
-          </a:effectRef>
-          <a:fontRef idx="minor">
-            <a:schemeClr val="lt1"/>
-          </a:fontRef>
-        </p:style>
-        <p:txBody>
-          <a:bodyPr rtlCol="0" anchor="ctr"/>
-          <a:lstStyle/>
-          <a:p>
-            <a:pPr algn="ctr"/>
-          </a:p>
-        </p:txBody>
-      </p:sp>
-      <p:sp>
-        <p:nvSpPr>
-          <p:cNvPr id="10" name="Rectangle 9"/>
-          <p:cNvSpPr/>
-          <p:nvPr/>
-        </p:nvSpPr>
-        <p:spPr>
-          <a:xfrm>
-            <a:off x="6255867" y="1261872"/>
-            <a:ext cx="5478627" cy="502920"/>
+            <a:ext cx="11277295" cy="320040"/>
           </a:xfrm>
           <a:prstGeom prst="rect">
             <a:avLst/>
@@ -11929,14 +11511,14 @@
       </p:sp>
       <p:sp>
         <p:nvSpPr>
-          <p:cNvPr id="11" name="TextBox 10"/>
+          <p:cNvPr id="7" name="TextBox 6"/>
           <p:cNvSpPr txBox="1"/>
           <p:nvPr/>
         </p:nvSpPr>
         <p:spPr>
           <a:xfrm>
-            <a:off x="6393027" y="1353312"/>
-            <a:ext cx="5204307" cy="365760"/>
+            <a:off x="685800" y="1307592"/>
+            <a:ext cx="10820095" cy="256032"/>
           </a:xfrm>
           <a:prstGeom prst="rect">
             <a:avLst/>
@@ -11947,29 +11529,28 @@
           <a:bodyPr wrap="square" anchor="ctr"/>
           <a:lstStyle/>
           <a:p>
-            <a:pPr algn="ctr"/>
-            <a:r>
-              <a:rPr sz="1600" b="1" i="0">
-                <a:solidFill>
-                  <a:srgbClr val="FFFFFF"/>
-                </a:solidFill>
-                <a:latin typeface="Calibri"/>
-              </a:rPr>
-              <a:t>Frontera justificada</a:t>
-            </a:r>
-          </a:p>
-        </p:txBody>
-      </p:sp>
-      <p:sp>
-        <p:nvSpPr>
-          <p:cNvPr id="12" name="TextBox 11"/>
+            <a:r>
+              <a:rPr sz="1000" b="1" i="0">
+                <a:solidFill>
+                  <a:srgbClr val="269CCB"/>
+                </a:solidFill>
+                <a:latin typeface="Calibri"/>
+              </a:rPr>
+              <a:t>● ● ●</a:t>
+            </a:r>
+          </a:p>
+        </p:txBody>
+      </p:sp>
+      <p:sp>
+        <p:nvSpPr>
+          <p:cNvPr id="8" name="TextBox 7"/>
           <p:cNvSpPr txBox="1"/>
           <p:nvPr/>
         </p:nvSpPr>
         <p:spPr>
           <a:xfrm>
-            <a:off x="6420459" y="1901952"/>
-            <a:ext cx="5158587" cy="4498848"/>
+            <a:off x="777240" y="1719072"/>
+            <a:ext cx="10637215" cy="4453128"/>
           </a:xfrm>
           <a:prstGeom prst="rect">
             <a:avLst/>
@@ -11984,72 +11565,216 @@
           <a:p>
             <a:pPr>
               <a:spcAft>
-                <a:spcPts val="800"/>
-              </a:spcAft>
-            </a:pPr>
-            <a:r>
-              <a:rPr sz="1500" b="0" i="0">
-                <a:solidFill>
-                  <a:srgbClr val="333333"/>
-                </a:solidFill>
-                <a:latin typeface="Calibri"/>
-              </a:rPr>
-              <a:t>–   2-5 contenedores logicos, cada uno con su razon</a:t>
-            </a:r>
-          </a:p>
-          <a:p>
-            <a:pPr>
-              <a:spcAft>
-                <a:spcPts val="800"/>
-              </a:spcAft>
-            </a:pPr>
-            <a:r>
-              <a:rPr sz="1500" b="0" i="0">
-                <a:solidFill>
-                  <a:srgbClr val="333333"/>
-                </a:solidFill>
-                <a:latin typeface="Calibri"/>
-              </a:rPr>
-              <a:t>–   Frontera = responsabilidad de negocio</a:t>
-            </a:r>
-          </a:p>
-          <a:p>
-            <a:pPr>
-              <a:spcAft>
-                <a:spcPts val="800"/>
-              </a:spcAft>
-            </a:pPr>
-            <a:r>
-              <a:rPr sz="1500" b="0" i="0">
-                <a:solidFill>
-                  <a:srgbClr val="333333"/>
-                </a:solidFill>
-                <a:latin typeface="Calibri"/>
-              </a:rPr>
-              <a:t>–   Cada flecha: protocolo + verbo (HTTP/JSON, 'reserva')</a:t>
-            </a:r>
-          </a:p>
-          <a:p>
-            <a:pPr>
-              <a:spcAft>
-                <a:spcPts val="800"/>
-              </a:spcAft>
-            </a:pPr>
-            <a:r>
-              <a:rPr sz="1500" b="0" i="0">
-                <a:solidFill>
-                  <a:srgbClr val="333333"/>
-                </a:solidFill>
-                <a:latin typeface="Calibri"/>
-              </a:rPr>
-              <a:t>–   Se explica en 60 s sin leer notas</a:t>
-            </a:r>
-          </a:p>
-        </p:txBody>
-      </p:sp>
-      <p:sp>
-        <p:nvSpPr>
-          <p:cNvPr id="13" name="TextBox 12"/>
+                <a:spcPts val="400"/>
+              </a:spcAft>
+            </a:pPr>
+            <a:r>
+              <a:rPr sz="1400" b="0" i="0">
+                <a:solidFill>
+                  <a:srgbClr val="FFFFFF"/>
+                </a:solidFill>
+                <a:latin typeface="Calibri"/>
+              </a:rPr>
+              <a:t>%% Cada caja lleva TECNOLOGIA, no solo nombre:</a:t>
+            </a:r>
+          </a:p>
+          <a:p>
+            <a:pPr>
+              <a:spcAft>
+                <a:spcPts val="400"/>
+              </a:spcAft>
+            </a:pPr>
+            <a:r>
+              <a:rPr sz="1400" b="0" i="0">
+                <a:solidFill>
+                  <a:srgbClr val="FFFFFF"/>
+                </a:solidFill>
+                <a:latin typeface="Calibri"/>
+              </a:rPr>
+              <a:t>%%   mal:  api[API]</a:t>
+            </a:r>
+          </a:p>
+          <a:p>
+            <a:pPr>
+              <a:spcAft>
+                <a:spcPts val="400"/>
+              </a:spcAft>
+            </a:pPr>
+            <a:r>
+              <a:rPr sz="1400" b="0" i="0">
+                <a:solidFill>
+                  <a:srgbClr val="FFFFFF"/>
+                </a:solidFill>
+                <a:latin typeface="Calibri"/>
+              </a:rPr>
+              <a:t>%%   bien: api[API REST&lt;br/&gt;Node + Express]</a:t>
+            </a:r>
+          </a:p>
+          <a:p>
+            <a:pPr>
+              <a:spcAft>
+                <a:spcPts val="400"/>
+              </a:spcAft>
+            </a:pPr>
+            <a:r>
+              <a:rPr sz="1400" b="0" i="0">
+                <a:solidFill>
+                  <a:srgbClr val="FFFFFF"/>
+                </a:solidFill>
+                <a:latin typeface="Calibri"/>
+              </a:rPr>
+              <a:t/>
+            </a:r>
+          </a:p>
+          <a:p>
+            <a:pPr>
+              <a:spcAft>
+                <a:spcPts val="400"/>
+              </a:spcAft>
+            </a:pPr>
+            <a:r>
+              <a:rPr sz="1400" b="0" i="0">
+                <a:solidFill>
+                  <a:srgbClr val="FFFFFF"/>
+                </a:solidFill>
+                <a:latin typeface="Calibri"/>
+              </a:rPr>
+              <a:t>%% Cada flecha lleva PROTOCOLO y sentido:</a:t>
+            </a:r>
+          </a:p>
+          <a:p>
+            <a:pPr>
+              <a:spcAft>
+                <a:spcPts val="400"/>
+              </a:spcAft>
+            </a:pPr>
+            <a:r>
+              <a:rPr sz="1400" b="0" i="0">
+                <a:solidFill>
+                  <a:srgbClr val="FFFFFF"/>
+                </a:solidFill>
+                <a:latin typeface="Calibri"/>
+              </a:rPr>
+              <a:t>%%   mal:  web --- api</a:t>
+            </a:r>
+          </a:p>
+          <a:p>
+            <a:pPr>
+              <a:spcAft>
+                <a:spcPts val="400"/>
+              </a:spcAft>
+            </a:pPr>
+            <a:r>
+              <a:rPr sz="1400" b="0" i="0">
+                <a:solidFill>
+                  <a:srgbClr val="FFFFFF"/>
+                </a:solidFill>
+                <a:latin typeface="Calibri"/>
+              </a:rPr>
+              <a:t>%%   bien: web --&gt;|JSON/HTTPS| api</a:t>
+            </a:r>
+          </a:p>
+          <a:p>
+            <a:pPr>
+              <a:spcAft>
+                <a:spcPts val="400"/>
+              </a:spcAft>
+            </a:pPr>
+            <a:r>
+              <a:rPr sz="1400" b="0" i="0">
+                <a:solidFill>
+                  <a:srgbClr val="FFFFFF"/>
+                </a:solidFill>
+                <a:latin typeface="Calibri"/>
+              </a:rPr>
+              <a:t/>
+            </a:r>
+          </a:p>
+          <a:p>
+            <a:pPr>
+              <a:spcAft>
+                <a:spcPts val="400"/>
+              </a:spcAft>
+            </a:pPr>
+            <a:r>
+              <a:rPr sz="1400" b="0" i="0">
+                <a:solidFill>
+                  <a:srgbClr val="FFFFFF"/>
+                </a:solidFill>
+                <a:latin typeface="Calibri"/>
+              </a:rPr>
+              <a:t>%% Lo externo va FUERA del subgraph del sistema: es la frontera</a:t>
+            </a:r>
+          </a:p>
+          <a:p>
+            <a:pPr>
+              <a:spcAft>
+                <a:spcPts val="400"/>
+              </a:spcAft>
+            </a:pPr>
+            <a:r>
+              <a:rPr sz="1400" b="0" i="0">
+                <a:solidFill>
+                  <a:srgbClr val="FFFFFF"/>
+                </a:solidFill>
+                <a:latin typeface="Calibri"/>
+              </a:rPr>
+              <a:t>%% que define de que se es responsable.</a:t>
+            </a:r>
+          </a:p>
+          <a:p>
+            <a:pPr>
+              <a:spcAft>
+                <a:spcPts val="400"/>
+              </a:spcAft>
+            </a:pPr>
+            <a:r>
+              <a:rPr sz="1400" b="0" i="0">
+                <a:solidFill>
+                  <a:srgbClr val="FFFFFF"/>
+                </a:solidFill>
+                <a:latin typeface="Calibri"/>
+              </a:rPr>
+              <a:t/>
+            </a:r>
+          </a:p>
+          <a:p>
+            <a:pPr>
+              <a:spcAft>
+                <a:spcPts val="400"/>
+              </a:spcAft>
+            </a:pPr>
+            <a:r>
+              <a:rPr sz="1400" b="0" i="0">
+                <a:solidFill>
+                  <a:srgbClr val="FFFFFF"/>
+                </a:solidFill>
+                <a:latin typeface="Calibri"/>
+              </a:rPr>
+              <a:t>%% Y los nombres tienen que ser LOS MISMOS en el C4, en el Despliegue</a:t>
+            </a:r>
+          </a:p>
+          <a:p>
+            <a:pPr>
+              <a:spcAft>
+                <a:spcPts val="400"/>
+              </a:spcAft>
+            </a:pPr>
+            <a:r>
+              <a:rPr sz="1400" b="0" i="0">
+                <a:solidFill>
+                  <a:srgbClr val="FFFFFF"/>
+                </a:solidFill>
+                <a:latin typeface="Calibri"/>
+              </a:rPr>
+              <a:t>%% (Clase 7) y en el Component (Clase 11). Reconciliarlos es la P2 del hito.</a:t>
+            </a:r>
+          </a:p>
+        </p:txBody>
+      </p:sp>
+      <p:sp>
+        <p:nvSpPr>
+          <p:cNvPr id="9" name="TextBox 8"/>
           <p:cNvSpPr txBox="1"/>
           <p:nvPr/>
         </p:nvSpPr>
@@ -12117,7 +11842,7 @@
         <p:spPr>
           <a:xfrm>
             <a:off x="0" y="0"/>
-            <a:ext cx="12191695" cy="960120"/>
+            <a:ext cx="12191695" cy="1170432"/>
           </a:xfrm>
           <a:prstGeom prst="rect">
             <a:avLst/>
@@ -12159,7 +11884,7 @@
         </p:nvSpPr>
         <p:spPr>
           <a:xfrm>
-            <a:off x="0" y="960120"/>
+            <a:off x="0" y="1170432"/>
             <a:ext cx="12191695" cy="41148"/>
           </a:xfrm>
           <a:prstGeom prst="rect">
@@ -12203,7 +11928,7 @@
         <p:spPr>
           <a:xfrm>
             <a:off x="457200" y="164592"/>
-            <a:ext cx="11277295" cy="502920"/>
+            <a:ext cx="11277295" cy="384048"/>
           </a:xfrm>
           <a:prstGeom prst="rect">
             <a:avLst/>
@@ -12223,69 +11948,60 @@
                 </a:solidFill>
                 <a:latin typeface="Calibri"/>
               </a:rPr>
-              <a:t>C4Container en Mermaid: el molde que la plataforma del curso renderiza</a:t>
-            </a:r>
-          </a:p>
-        </p:txBody>
-      </p:sp>
-      <p:sp>
-        <p:nvSpPr>
-          <p:cNvPr id="5" name="Rounded Rectangle 4"/>
+              <a:t>Ejemplo de diagrama C4 — nivel Containers</a:t>
+            </a:r>
+          </a:p>
+        </p:txBody>
+      </p:sp>
+      <p:sp>
+        <p:nvSpPr>
+          <p:cNvPr id="5" name="TextBox 4"/>
+          <p:cNvSpPr txBox="1"/>
+          <p:nvPr/>
+        </p:nvSpPr>
+        <p:spPr>
+          <a:xfrm>
+            <a:off x="457200" y="566928"/>
+            <a:ext cx="11277295" cy="411480"/>
+          </a:xfrm>
+          <a:prstGeom prst="rect">
+            <a:avLst/>
+          </a:prstGeom>
+          <a:noFill/>
+        </p:spPr>
+        <p:txBody>
+          <a:bodyPr wrap="square">
+            <a:spAutoFit/>
+          </a:bodyPr>
+          <a:lstStyle/>
+          <a:p>
+            <a:r>
+              <a:rPr sz="1400" b="0" i="0">
+                <a:solidFill>
+                  <a:srgbClr val="B8D8EE"/>
+                </a:solidFill>
+                <a:latin typeface="Calibri"/>
+              </a:rPr>
+              <a:t>2–5 cajas justificadas, cada flecha con protocolo Y formato</a:t>
+            </a:r>
+          </a:p>
+        </p:txBody>
+      </p:sp>
+      <p:sp>
+        <p:nvSpPr>
+          <p:cNvPr id="6" name="Rounded Rectangle 5"/>
           <p:cNvSpPr/>
           <p:nvPr/>
         </p:nvSpPr>
         <p:spPr>
           <a:xfrm>
-            <a:off x="457200" y="1261872"/>
-            <a:ext cx="11277295" cy="4773168"/>
+            <a:off x="822960" y="2011680"/>
+            <a:ext cx="2377440" cy="1097280"/>
           </a:xfrm>
           <a:prstGeom prst="roundRect">
             <a:avLst>
               <a:gd name="adj" fmla="val 12000"/>
             </a:avLst>
-          </a:prstGeom>
-          <a:solidFill>
-            <a:srgbClr val="1E2A38"/>
-          </a:solidFill>
-          <a:ln>
-            <a:noFill/>
-          </a:ln>
-        </p:spPr>
-        <p:style>
-          <a:lnRef idx="1">
-            <a:schemeClr val="accent1"/>
-          </a:lnRef>
-          <a:fillRef idx="3">
-            <a:schemeClr val="accent1"/>
-          </a:fillRef>
-          <a:effectRef idx="2">
-            <a:schemeClr val="accent1"/>
-          </a:effectRef>
-          <a:fontRef idx="minor">
-            <a:schemeClr val="lt1"/>
-          </a:fontRef>
-        </p:style>
-        <p:txBody>
-          <a:bodyPr rtlCol="0" anchor="ctr"/>
-          <a:lstStyle/>
-          <a:p>
-            <a:pPr algn="ctr"/>
-          </a:p>
-        </p:txBody>
-      </p:sp>
-      <p:sp>
-        <p:nvSpPr>
-          <p:cNvPr id="6" name="Rectangle 5"/>
-          <p:cNvSpPr/>
-          <p:nvPr/>
-        </p:nvSpPr>
-        <p:spPr>
-          <a:xfrm>
-            <a:off x="457200" y="1261872"/>
-            <a:ext cx="11277295" cy="320040"/>
-          </a:xfrm>
-          <a:prstGeom prst="rect">
-            <a:avLst/>
           </a:prstGeom>
           <a:solidFill>
             <a:srgbClr val="095292"/>
@@ -12309,55 +12025,289 @@
           </a:fontRef>
         </p:style>
         <p:txBody>
-          <a:bodyPr rtlCol="0" anchor="ctr"/>
+          <a:bodyPr rtlCol="0" anchor="ctr" wrap="square"/>
           <a:lstStyle/>
           <a:p>
             <a:pPr algn="ctr"/>
-          </a:p>
-        </p:txBody>
-      </p:sp>
-      <p:sp>
-        <p:nvSpPr>
-          <p:cNvPr id="7" name="TextBox 6"/>
+            <a:r>
+              <a:rPr sz="1100" b="1" i="0">
+                <a:solidFill>
+                  <a:srgbClr val="FFFFFF"/>
+                </a:solidFill>
+                <a:latin typeface="Calibri"/>
+              </a:rPr>
+              <a:t>App web
+(Container · React)</a:t>
+            </a:r>
+          </a:p>
+        </p:txBody>
+      </p:sp>
+      <p:sp>
+        <p:nvSpPr>
+          <p:cNvPr id="7" name="Rounded Rectangle 6"/>
+          <p:cNvSpPr/>
+          <p:nvPr/>
+        </p:nvSpPr>
+        <p:spPr>
+          <a:xfrm>
+            <a:off x="4754880" y="2011680"/>
+            <a:ext cx="2377440" cy="1097280"/>
+          </a:xfrm>
+          <a:prstGeom prst="roundRect">
+            <a:avLst>
+              <a:gd name="adj" fmla="val 12000"/>
+            </a:avLst>
+          </a:prstGeom>
+          <a:solidFill>
+            <a:srgbClr val="095292"/>
+          </a:solidFill>
+          <a:ln>
+            <a:noFill/>
+          </a:ln>
+        </p:spPr>
+        <p:style>
+          <a:lnRef idx="1">
+            <a:schemeClr val="accent1"/>
+          </a:lnRef>
+          <a:fillRef idx="3">
+            <a:schemeClr val="accent1"/>
+          </a:fillRef>
+          <a:effectRef idx="2">
+            <a:schemeClr val="accent1"/>
+          </a:effectRef>
+          <a:fontRef idx="minor">
+            <a:schemeClr val="lt1"/>
+          </a:fontRef>
+        </p:style>
+        <p:txBody>
+          <a:bodyPr rtlCol="0" anchor="ctr" wrap="square"/>
+          <a:lstStyle/>
+          <a:p>
+            <a:pPr algn="ctr"/>
+            <a:r>
+              <a:rPr sz="1100" b="1" i="0">
+                <a:solidFill>
+                  <a:srgbClr val="FFFFFF"/>
+                </a:solidFill>
+                <a:latin typeface="Calibri"/>
+              </a:rPr>
+              <a:t>API de turnos
+(Container · Node.js)</a:t>
+            </a:r>
+          </a:p>
+        </p:txBody>
+      </p:sp>
+      <p:sp>
+        <p:nvSpPr>
+          <p:cNvPr id="8" name="Rounded Rectangle 7"/>
+          <p:cNvSpPr/>
+          <p:nvPr/>
+        </p:nvSpPr>
+        <p:spPr>
+          <a:xfrm>
+            <a:off x="8595360" y="2011680"/>
+            <a:ext cx="2377440" cy="1097280"/>
+          </a:xfrm>
+          <a:prstGeom prst="roundRect">
+            <a:avLst>
+              <a:gd name="adj" fmla="val 12000"/>
+            </a:avLst>
+          </a:prstGeom>
+          <a:solidFill>
+            <a:srgbClr val="269CCB"/>
+          </a:solidFill>
+          <a:ln>
+            <a:noFill/>
+          </a:ln>
+        </p:spPr>
+        <p:style>
+          <a:lnRef idx="1">
+            <a:schemeClr val="accent1"/>
+          </a:lnRef>
+          <a:fillRef idx="3">
+            <a:schemeClr val="accent1"/>
+          </a:fillRef>
+          <a:effectRef idx="2">
+            <a:schemeClr val="accent1"/>
+          </a:effectRef>
+          <a:fontRef idx="minor">
+            <a:schemeClr val="lt1"/>
+          </a:fontRef>
+        </p:style>
+        <p:txBody>
+          <a:bodyPr rtlCol="0" anchor="ctr" wrap="square"/>
+          <a:lstStyle/>
+          <a:p>
+            <a:pPr algn="ctr"/>
+            <a:r>
+              <a:rPr sz="1100" b="1" i="0">
+                <a:solidFill>
+                  <a:srgbClr val="FFFFFF"/>
+                </a:solidFill>
+                <a:latin typeface="Calibri"/>
+              </a:rPr>
+              <a:t>Base de turnos
+(ContainerDb · PostgreSQL)</a:t>
+            </a:r>
+          </a:p>
+        </p:txBody>
+      </p:sp>
+      <p:sp>
+        <p:nvSpPr>
+          <p:cNvPr id="9" name="Rounded Rectangle 8"/>
+          <p:cNvSpPr/>
+          <p:nvPr/>
+        </p:nvSpPr>
+        <p:spPr>
+          <a:xfrm>
+            <a:off x="822960" y="3931920"/>
+            <a:ext cx="2377440" cy="914400"/>
+          </a:xfrm>
+          <a:prstGeom prst="roundRect">
+            <a:avLst>
+              <a:gd name="adj" fmla="val 12000"/>
+            </a:avLst>
+          </a:prstGeom>
+          <a:solidFill>
+            <a:srgbClr val="FFD000"/>
+          </a:solidFill>
+          <a:ln>
+            <a:noFill/>
+          </a:ln>
+        </p:spPr>
+        <p:style>
+          <a:lnRef idx="1">
+            <a:schemeClr val="accent1"/>
+          </a:lnRef>
+          <a:fillRef idx="3">
+            <a:schemeClr val="accent1"/>
+          </a:fillRef>
+          <a:effectRef idx="2">
+            <a:schemeClr val="accent1"/>
+          </a:effectRef>
+          <a:fontRef idx="minor">
+            <a:schemeClr val="lt1"/>
+          </a:fontRef>
+        </p:style>
+        <p:txBody>
+          <a:bodyPr rtlCol="0" anchor="ctr" wrap="square"/>
+          <a:lstStyle/>
+          <a:p>
+            <a:pPr algn="ctr"/>
+            <a:r>
+              <a:rPr sz="1300" b="1" i="0">
+                <a:solidFill>
+                  <a:srgbClr val="095292"/>
+                </a:solidFill>
+                <a:latin typeface="Calibri"/>
+              </a:rPr>
+              <a:t>Cliente
+(Person)</a:t>
+            </a:r>
+          </a:p>
+        </p:txBody>
+      </p:sp>
+      <p:sp>
+        <p:nvSpPr>
+          <p:cNvPr id="10" name="Rounded Rectangle 9"/>
+          <p:cNvSpPr/>
+          <p:nvPr/>
+        </p:nvSpPr>
+        <p:spPr>
+          <a:xfrm>
+            <a:off x="4754880" y="3931920"/>
+            <a:ext cx="2377440" cy="914400"/>
+          </a:xfrm>
+          <a:prstGeom prst="roundRect">
+            <a:avLst>
+              <a:gd name="adj" fmla="val 12000"/>
+            </a:avLst>
+          </a:prstGeom>
+          <a:solidFill>
+            <a:srgbClr val="095292"/>
+          </a:solidFill>
+          <a:ln>
+            <a:noFill/>
+          </a:ln>
+        </p:spPr>
+        <p:style>
+          <a:lnRef idx="1">
+            <a:schemeClr val="accent1"/>
+          </a:lnRef>
+          <a:fillRef idx="3">
+            <a:schemeClr val="accent1"/>
+          </a:fillRef>
+          <a:effectRef idx="2">
+            <a:schemeClr val="accent1"/>
+          </a:effectRef>
+          <a:fontRef idx="minor">
+            <a:schemeClr val="lt1"/>
+          </a:fontRef>
+        </p:style>
+        <p:txBody>
+          <a:bodyPr rtlCol="0" anchor="ctr" wrap="square"/>
+          <a:lstStyle/>
+          <a:p>
+            <a:pPr algn="ctr"/>
+            <a:r>
+              <a:rPr sz="1100" b="1" i="0">
+                <a:solidFill>
+                  <a:srgbClr val="FFFFFF"/>
+                </a:solidFill>
+                <a:latin typeface="Calibri"/>
+              </a:rPr>
+              <a:t>Worker de avisos
+(Container · cola)</a:t>
+            </a:r>
+          </a:p>
+        </p:txBody>
+      </p:sp>
+      <p:cxnSp>
+        <p:nvCxnSpPr>
+          <p:cNvPr id="11" name="Connector 10"/>
+          <p:cNvCxnSpPr/>
+          <p:nvPr/>
+        </p:nvCxnSpPr>
+        <p:spPr>
+          <a:xfrm flipV="1">
+            <a:off x="2011680" y="3108960"/>
+            <a:ext cx="0" cy="822960"/>
+          </a:xfrm>
+          <a:prstGeom prst="line">
+            <a:avLst/>
+          </a:prstGeom>
+          <a:ln w="22225">
+            <a:solidFill>
+              <a:srgbClr val="666666"/>
+            </a:solidFill>
+            <a:tailEnd type="triangle" w="med" len="med"/>
+          </a:ln>
+        </p:spPr>
+        <p:style>
+          <a:lnRef idx="2">
+            <a:schemeClr val="accent1"/>
+          </a:lnRef>
+          <a:fillRef idx="0">
+            <a:schemeClr val="accent1"/>
+          </a:fillRef>
+          <a:effectRef idx="1">
+            <a:schemeClr val="accent1"/>
+          </a:effectRef>
+          <a:fontRef idx="minor">
+            <a:schemeClr val="tx1"/>
+          </a:fontRef>
+        </p:style>
+      </p:cxnSp>
+      <p:sp>
+        <p:nvSpPr>
+          <p:cNvPr id="12" name="TextBox 11"/>
           <p:cNvSpPr txBox="1"/>
           <p:nvPr/>
         </p:nvSpPr>
         <p:spPr>
           <a:xfrm>
-            <a:off x="685800" y="1307592"/>
-            <a:ext cx="10820095" cy="256032"/>
-          </a:xfrm>
-          <a:prstGeom prst="rect">
-            <a:avLst/>
-          </a:prstGeom>
-          <a:noFill/>
-        </p:spPr>
-        <p:txBody>
-          <a:bodyPr wrap="square" anchor="ctr"/>
-          <a:lstStyle/>
-          <a:p>
-            <a:r>
-              <a:rPr sz="1000" b="1" i="0">
-                <a:solidFill>
-                  <a:srgbClr val="269CCB"/>
-                </a:solidFill>
-                <a:latin typeface="Calibri"/>
-              </a:rPr>
-              <a:t>● ● ●</a:t>
-            </a:r>
-          </a:p>
-        </p:txBody>
-      </p:sp>
-      <p:sp>
-        <p:nvSpPr>
-          <p:cNvPr id="8" name="TextBox 7"/>
-          <p:cNvSpPr txBox="1"/>
-          <p:nvPr/>
-        </p:nvSpPr>
-        <p:spPr>
-          <a:xfrm>
-            <a:off x="777240" y="1719072"/>
-            <a:ext cx="10637215" cy="4133087"/>
+            <a:off x="2121408" y="3319272"/>
+            <a:ext cx="1645920" cy="320040"/>
           </a:xfrm>
           <a:prstGeom prst="rect">
             <a:avLst/>
@@ -12370,257 +12320,65 @@
           </a:bodyPr>
           <a:lstStyle/>
           <a:p>
-            <a:pPr>
-              <a:spcAft>
-                <a:spcPts val="400"/>
-              </a:spcAft>
-            </a:pPr>
-            <a:r>
-              <a:rPr sz="1400" b="0" i="0">
-                <a:solidFill>
-                  <a:srgbClr val="FFFFFF"/>
-                </a:solidFill>
-                <a:latin typeface="Calibri"/>
-              </a:rPr>
-              <a:t>C4Container</a:t>
-            </a:r>
-          </a:p>
-          <a:p>
-            <a:pPr>
-              <a:spcAft>
-                <a:spcPts val="400"/>
-              </a:spcAft>
-            </a:pPr>
-            <a:r>
-              <a:rPr sz="1400" b="0" i="0">
-                <a:solidFill>
-                  <a:srgbClr val="FFFFFF"/>
-                </a:solidFill>
-                <a:latin typeface="Calibri"/>
-              </a:rPr>
-              <a:t>title Diagrama de contenedores - CloudLite Turnos</a:t>
-            </a:r>
-          </a:p>
-          <a:p>
-            <a:pPr>
-              <a:spcAft>
-                <a:spcPts val="400"/>
-              </a:spcAft>
-            </a:pPr>
-            <a:r>
-              <a:rPr sz="1400" b="0" i="0">
-                <a:solidFill>
-                  <a:srgbClr val="FFFFFF"/>
-                </a:solidFill>
-                <a:latin typeface="Calibri"/>
-              </a:rPr>
-              <a:t>Person(cliente, "Cliente de la barberia", "Reserva y consulta sus turnos")</a:t>
-            </a:r>
-          </a:p>
-          <a:p>
-            <a:pPr>
-              <a:spcAft>
-                <a:spcPts val="400"/>
-              </a:spcAft>
-            </a:pPr>
-            <a:r>
-              <a:rPr sz="1400" b="0" i="0">
-                <a:solidFill>
-                  <a:srgbClr val="FFFFFF"/>
-                </a:solidFill>
-                <a:latin typeface="Calibri"/>
-              </a:rPr>
-              <a:t>System_Boundary(cloudlite, "CloudLite App") {</a:t>
-            </a:r>
-          </a:p>
-          <a:p>
-            <a:pPr>
-              <a:spcAft>
-                <a:spcPts val="400"/>
-              </a:spcAft>
-            </a:pPr>
-            <a:r>
-              <a:rPr sz="1400" b="0" i="0">
-                <a:solidFill>
-                  <a:srgbClr val="FFFFFF"/>
-                </a:solidFill>
-                <a:latin typeface="Calibri"/>
-              </a:rPr>
-              <a:t>  Container(spa, "App web", "React", "Muestra franjas libres y crea la reserva")</a:t>
-            </a:r>
-          </a:p>
-          <a:p>
-            <a:pPr>
-              <a:spcAft>
-                <a:spcPts val="400"/>
-              </a:spcAft>
-            </a:pPr>
-            <a:r>
-              <a:rPr sz="1400" b="0" i="0">
-                <a:solidFill>
-                  <a:srgbClr val="FFFFFF"/>
-                </a:solidFill>
-                <a:latin typeface="Calibri"/>
-              </a:rPr>
-              <a:t>  Container(api, "API de turnos", "Node.js", "Valida la franja y registra el turno")</a:t>
-            </a:r>
-          </a:p>
-          <a:p>
-            <a:pPr>
-              <a:spcAft>
-                <a:spcPts val="400"/>
-              </a:spcAft>
-            </a:pPr>
-            <a:r>
-              <a:rPr sz="1400" b="0" i="0">
-                <a:solidFill>
-                  <a:srgbClr val="FFFFFF"/>
-                </a:solidFill>
-                <a:latin typeface="Calibri"/>
-              </a:rPr>
-              <a:t>  ContainerDb(db, "Base de turnos", "PostgreSQL", "Turnos, clientes y horarios")</a:t>
-            </a:r>
-          </a:p>
-          <a:p>
-            <a:pPr>
-              <a:spcAft>
-                <a:spcPts val="400"/>
-              </a:spcAft>
-            </a:pPr>
-            <a:r>
-              <a:rPr sz="1400" b="0" i="0">
-                <a:solidFill>
-                  <a:srgbClr val="FFFFFF"/>
-                </a:solidFill>
-                <a:latin typeface="Calibri"/>
-              </a:rPr>
-              <a:t>  Container(worker, "Worker de avisos", "cola", "Envia el aviso, con reintentos")</a:t>
-            </a:r>
-          </a:p>
-          <a:p>
-            <a:pPr>
-              <a:spcAft>
-                <a:spcPts val="400"/>
-              </a:spcAft>
-            </a:pPr>
-            <a:r>
-              <a:rPr sz="1400" b="0" i="0">
-                <a:solidFill>
-                  <a:srgbClr val="FFFFFF"/>
-                </a:solidFill>
-                <a:latin typeface="Calibri"/>
-              </a:rPr>
-              <a:t>}</a:t>
-            </a:r>
-          </a:p>
-          <a:p>
-            <a:pPr>
-              <a:spcAft>
-                <a:spcPts val="400"/>
-              </a:spcAft>
-            </a:pPr>
-            <a:r>
-              <a:rPr sz="1400" b="0" i="0">
-                <a:solidFill>
-                  <a:srgbClr val="FFFFFF"/>
-                </a:solidFill>
-                <a:latin typeface="Calibri"/>
-              </a:rPr>
-              <a:t>System_Ext(correo, "Correo transaccional", "Entrega el correo al cliente")</a:t>
-            </a:r>
-          </a:p>
-          <a:p>
-            <a:pPr>
-              <a:spcAft>
-                <a:spcPts val="400"/>
-              </a:spcAft>
-            </a:pPr>
-            <a:r>
-              <a:rPr sz="1400" b="0" i="0">
-                <a:solidFill>
-                  <a:srgbClr val="FFFFFF"/>
-                </a:solidFill>
-                <a:latin typeface="Calibri"/>
-              </a:rPr>
-              <a:t>Rel(cliente, spa, "Reserva un turno", "HTTPS")</a:t>
-            </a:r>
-          </a:p>
-          <a:p>
-            <a:pPr>
-              <a:spcAft>
-                <a:spcPts val="400"/>
-              </a:spcAft>
-            </a:pPr>
-            <a:r>
-              <a:rPr sz="1400" b="0" i="0">
-                <a:solidFill>
-                  <a:srgbClr val="FFFFFF"/>
-                </a:solidFill>
-                <a:latin typeface="Calibri"/>
-              </a:rPr>
-              <a:t>Rel(spa, api, "POST /turnos", "HTTPS/JSON")</a:t>
-            </a:r>
-          </a:p>
-          <a:p>
-            <a:pPr>
-              <a:spcAft>
-                <a:spcPts val="400"/>
-              </a:spcAft>
-            </a:pPr>
-            <a:r>
-              <a:rPr sz="1400" b="0" i="0">
-                <a:solidFill>
-                  <a:srgbClr val="FFFFFF"/>
-                </a:solidFill>
-                <a:latin typeface="Calibri"/>
-              </a:rPr>
-              <a:t>Rel(api, db, "INSERT / SELECT de turnos", "TCP/SQL")</a:t>
-            </a:r>
-          </a:p>
-          <a:p>
-            <a:pPr>
-              <a:spcAft>
-                <a:spcPts val="400"/>
-              </a:spcAft>
-            </a:pPr>
-            <a:r>
-              <a:rPr sz="1400" b="0" i="0">
-                <a:solidFill>
-                  <a:srgbClr val="FFFFFF"/>
-                </a:solidFill>
-                <a:latin typeface="Calibri"/>
-              </a:rPr>
-              <a:t>Rel(api, worker, "Publica aviso-de-turno", "evento/cola (AMQP)")</a:t>
-            </a:r>
-          </a:p>
-          <a:p>
-            <a:pPr>
-              <a:spcAft>
-                <a:spcPts val="400"/>
-              </a:spcAft>
-            </a:pPr>
-            <a:r>
-              <a:rPr sz="1400" b="0" i="0">
-                <a:solidFill>
-                  <a:srgbClr val="FFFFFF"/>
-                </a:solidFill>
-                <a:latin typeface="Calibri"/>
-              </a:rPr>
-              <a:t>Rel(worker, correo, "Envia la confirmacion", "API REST sobre HTTPS")</a:t>
-            </a:r>
-          </a:p>
-        </p:txBody>
-      </p:sp>
-      <p:sp>
-        <p:nvSpPr>
-          <p:cNvPr id="9" name="TextBox 8"/>
+            <a:pPr algn="l"/>
+            <a:r>
+              <a:rPr sz="1000" b="0" i="1">
+                <a:solidFill>
+                  <a:srgbClr val="666666"/>
+                </a:solidFill>
+                <a:latin typeface="Calibri"/>
+              </a:rPr>
+              <a:t>usa · HTTPS</a:t>
+            </a:r>
+          </a:p>
+        </p:txBody>
+      </p:sp>
+      <p:cxnSp>
+        <p:nvCxnSpPr>
+          <p:cNvPr id="13" name="Connector 12"/>
+          <p:cNvCxnSpPr/>
+          <p:nvPr/>
+        </p:nvCxnSpPr>
+        <p:spPr>
+          <a:xfrm>
+            <a:off x="3200400" y="2560320"/>
+            <a:ext cx="1554480" cy="0"/>
+          </a:xfrm>
+          <a:prstGeom prst="line">
+            <a:avLst/>
+          </a:prstGeom>
+          <a:ln w="22225">
+            <a:solidFill>
+              <a:srgbClr val="666666"/>
+            </a:solidFill>
+            <a:tailEnd type="triangle" w="med" len="med"/>
+          </a:ln>
+        </p:spPr>
+        <p:style>
+          <a:lnRef idx="2">
+            <a:schemeClr val="accent1"/>
+          </a:lnRef>
+          <a:fillRef idx="0">
+            <a:schemeClr val="accent1"/>
+          </a:fillRef>
+          <a:effectRef idx="1">
+            <a:schemeClr val="accent1"/>
+          </a:effectRef>
+          <a:fontRef idx="minor">
+            <a:schemeClr val="tx1"/>
+          </a:fontRef>
+        </p:style>
+      </p:cxnSp>
+      <p:sp>
+        <p:nvSpPr>
+          <p:cNvPr id="14" name="TextBox 13"/>
           <p:cNvSpPr txBox="1"/>
           <p:nvPr/>
         </p:nvSpPr>
         <p:spPr>
           <a:xfrm>
-            <a:off x="457200" y="6080760"/>
-            <a:ext cx="11277295" cy="320040"/>
+            <a:off x="3154679" y="2359152"/>
+            <a:ext cx="1645920" cy="320040"/>
           </a:xfrm>
           <a:prstGeom prst="rect">
             <a:avLst/>
@@ -12635,20 +12393,196 @@
           <a:p>
             <a:pPr algn="ctr"/>
             <a:r>
-              <a:rPr sz="1200" b="0" i="1">
+              <a:rPr sz="1000" b="0" i="1">
                 <a:solidFill>
                   <a:srgbClr val="666666"/>
                 </a:solidFill>
                 <a:latin typeface="Calibri"/>
               </a:rPr>
-              <a:t>La base va como «ContainerDb» y cada «Rel» lleva protocolo Y formato. Los externos, FUERA del «System_Boundary».</a:t>
-            </a:r>
-          </a:p>
-        </p:txBody>
-      </p:sp>
-      <p:sp>
-        <p:nvSpPr>
-          <p:cNvPr id="10" name="TextBox 9"/>
+              <a:t>HTTPS/JSON</a:t>
+            </a:r>
+          </a:p>
+        </p:txBody>
+      </p:sp>
+      <p:cxnSp>
+        <p:nvCxnSpPr>
+          <p:cNvPr id="15" name="Connector 14"/>
+          <p:cNvCxnSpPr/>
+          <p:nvPr/>
+        </p:nvCxnSpPr>
+        <p:spPr>
+          <a:xfrm>
+            <a:off x="7132320" y="2560320"/>
+            <a:ext cx="1463040" cy="0"/>
+          </a:xfrm>
+          <a:prstGeom prst="line">
+            <a:avLst/>
+          </a:prstGeom>
+          <a:ln w="22225">
+            <a:solidFill>
+              <a:srgbClr val="666666"/>
+            </a:solidFill>
+            <a:tailEnd type="triangle" w="med" len="med"/>
+          </a:ln>
+        </p:spPr>
+        <p:style>
+          <a:lnRef idx="2">
+            <a:schemeClr val="accent1"/>
+          </a:lnRef>
+          <a:fillRef idx="0">
+            <a:schemeClr val="accent1"/>
+          </a:fillRef>
+          <a:effectRef idx="1">
+            <a:schemeClr val="accent1"/>
+          </a:effectRef>
+          <a:fontRef idx="minor">
+            <a:schemeClr val="tx1"/>
+          </a:fontRef>
+        </p:style>
+      </p:cxnSp>
+      <p:sp>
+        <p:nvSpPr>
+          <p:cNvPr id="16" name="TextBox 15"/>
+          <p:cNvSpPr txBox="1"/>
+          <p:nvPr/>
+        </p:nvSpPr>
+        <p:spPr>
+          <a:xfrm>
+            <a:off x="7040880" y="2359152"/>
+            <a:ext cx="1645920" cy="320040"/>
+          </a:xfrm>
+          <a:prstGeom prst="rect">
+            <a:avLst/>
+          </a:prstGeom>
+          <a:noFill/>
+        </p:spPr>
+        <p:txBody>
+          <a:bodyPr wrap="square">
+            <a:spAutoFit/>
+          </a:bodyPr>
+          <a:lstStyle/>
+          <a:p>
+            <a:pPr algn="ctr"/>
+            <a:r>
+              <a:rPr sz="1000" b="0" i="1">
+                <a:solidFill>
+                  <a:srgbClr val="666666"/>
+                </a:solidFill>
+                <a:latin typeface="Calibri"/>
+              </a:rPr>
+              <a:t>TCP/SQL</a:t>
+            </a:r>
+          </a:p>
+        </p:txBody>
+      </p:sp>
+      <p:cxnSp>
+        <p:nvCxnSpPr>
+          <p:cNvPr id="17" name="Connector 16"/>
+          <p:cNvCxnSpPr/>
+          <p:nvPr/>
+        </p:nvCxnSpPr>
+        <p:spPr>
+          <a:xfrm>
+            <a:off x="5943600" y="3108960"/>
+            <a:ext cx="0" cy="822960"/>
+          </a:xfrm>
+          <a:prstGeom prst="line">
+            <a:avLst/>
+          </a:prstGeom>
+          <a:ln w="22225">
+            <a:solidFill>
+              <a:srgbClr val="666666"/>
+            </a:solidFill>
+            <a:tailEnd type="triangle" w="med" len="med"/>
+          </a:ln>
+        </p:spPr>
+        <p:style>
+          <a:lnRef idx="2">
+            <a:schemeClr val="accent1"/>
+          </a:lnRef>
+          <a:fillRef idx="0">
+            <a:schemeClr val="accent1"/>
+          </a:fillRef>
+          <a:effectRef idx="1">
+            <a:schemeClr val="accent1"/>
+          </a:effectRef>
+          <a:fontRef idx="minor">
+            <a:schemeClr val="tx1"/>
+          </a:fontRef>
+        </p:style>
+      </p:cxnSp>
+      <p:sp>
+        <p:nvSpPr>
+          <p:cNvPr id="18" name="TextBox 17"/>
+          <p:cNvSpPr txBox="1"/>
+          <p:nvPr/>
+        </p:nvSpPr>
+        <p:spPr>
+          <a:xfrm>
+            <a:off x="6053328" y="3319272"/>
+            <a:ext cx="1645920" cy="320040"/>
+          </a:xfrm>
+          <a:prstGeom prst="rect">
+            <a:avLst/>
+          </a:prstGeom>
+          <a:noFill/>
+        </p:spPr>
+        <p:txBody>
+          <a:bodyPr wrap="square">
+            <a:spAutoFit/>
+          </a:bodyPr>
+          <a:lstStyle/>
+          <a:p>
+            <a:pPr algn="l"/>
+            <a:r>
+              <a:rPr sz="1000" b="0" i="1">
+                <a:solidFill>
+                  <a:srgbClr val="666666"/>
+                </a:solidFill>
+                <a:latin typeface="Calibri"/>
+              </a:rPr>
+              <a:t>evento/cola (AMQP)</a:t>
+            </a:r>
+          </a:p>
+        </p:txBody>
+      </p:sp>
+      <p:sp>
+        <p:nvSpPr>
+          <p:cNvPr id="19" name="TextBox 18"/>
+          <p:cNvSpPr txBox="1"/>
+          <p:nvPr/>
+        </p:nvSpPr>
+        <p:spPr>
+          <a:xfrm>
+            <a:off x="457200" y="6263640"/>
+            <a:ext cx="11277295" cy="411480"/>
+          </a:xfrm>
+          <a:prstGeom prst="rect">
+            <a:avLst/>
+          </a:prstGeom>
+          <a:noFill/>
+        </p:spPr>
+        <p:txBody>
+          <a:bodyPr wrap="square">
+            <a:spAutoFit/>
+          </a:bodyPr>
+          <a:lstStyle/>
+          <a:p>
+            <a:r>
+              <a:rPr sz="1100" b="0" i="1">
+                <a:solidFill>
+                  <a:srgbClr val="666666"/>
+                </a:solidFill>
+                <a:latin typeface="Calibri"/>
+              </a:rPr>
+              <a:t>Lo que guarda datos va como ContainerDb, no como un Container más. La cuarta caja (el worker) existe porque el correo tarda: sin esa razón, no va. Y estos nombres deben reaparecer igual en el Deployment (Clase 7).</a:t>
+            </a:r>
+          </a:p>
+        </p:txBody>
+      </p:sp>
+      <p:sp>
+        <p:nvSpPr>
+          <p:cNvPr id="20" name="TextBox 19"/>
           <p:cNvSpPr txBox="1"/>
           <p:nvPr/>
         </p:nvSpPr>
@@ -12716,7 +12650,7 @@
         <p:spPr>
           <a:xfrm>
             <a:off x="0" y="0"/>
-            <a:ext cx="12191695" cy="1170432"/>
+            <a:ext cx="12191695" cy="960120"/>
           </a:xfrm>
           <a:prstGeom prst="rect">
             <a:avLst/>
@@ -12758,7 +12692,7 @@
         </p:nvSpPr>
         <p:spPr>
           <a:xfrm>
-            <a:off x="0" y="1170432"/>
+            <a:off x="0" y="960120"/>
             <a:ext cx="12191695" cy="41148"/>
           </a:xfrm>
           <a:prstGeom prst="rect">
@@ -12802,7 +12736,7 @@
         <p:spPr>
           <a:xfrm>
             <a:off x="457200" y="164592"/>
-            <a:ext cx="11277295" cy="384048"/>
+            <a:ext cx="11277295" cy="502920"/>
           </a:xfrm>
           <a:prstGeom prst="rect">
             <a:avLst/>
@@ -12822,55 +12756,21 @@
                 </a:solidFill>
                 <a:latin typeface="Calibri"/>
               </a:rPr>
-              <a:t>Herramientas de hoy</a:t>
-            </a:r>
-          </a:p>
-        </p:txBody>
-      </p:sp>
-      <p:sp>
-        <p:nvSpPr>
-          <p:cNvPr id="5" name="TextBox 4"/>
-          <p:cNvSpPr txBox="1"/>
-          <p:nvPr/>
-        </p:nvSpPr>
-        <p:spPr>
-          <a:xfrm>
-            <a:off x="457200" y="566928"/>
-            <a:ext cx="11277295" cy="411480"/>
-          </a:xfrm>
-          <a:prstGeom prst="rect">
-            <a:avLst/>
-          </a:prstGeom>
-          <a:noFill/>
-        </p:spPr>
-        <p:txBody>
-          <a:bodyPr wrap="square">
-            <a:spAutoFit/>
-          </a:bodyPr>
-          <a:lstStyle/>
-          <a:p>
-            <a:r>
-              <a:rPr sz="1400" b="0" i="0">
-                <a:solidFill>
-                  <a:srgbClr val="B8D8EE"/>
-                </a:solidFill>
-                <a:latin typeface="Calibri"/>
-              </a:rPr>
-              <a:t>Gratis · navegador o free tier · sin cuenta de pago</a:t>
-            </a:r>
-          </a:p>
-        </p:txBody>
-      </p:sp>
-      <p:sp>
-        <p:nvSpPr>
-          <p:cNvPr id="6" name="Rounded Rectangle 5"/>
+              <a:t>Microservicios de verdad vs microservicios teatro</a:t>
+            </a:r>
+          </a:p>
+        </p:txBody>
+      </p:sp>
+      <p:sp>
+        <p:nvSpPr>
+          <p:cNvPr id="5" name="Rounded Rectangle 4"/>
           <p:cNvSpPr/>
           <p:nvPr/>
         </p:nvSpPr>
         <p:spPr>
           <a:xfrm>
-            <a:off x="457200" y="1591056"/>
-            <a:ext cx="3624986" cy="2299716"/>
+            <a:off x="457200" y="1261872"/>
+            <a:ext cx="5478627" cy="5093208"/>
           </a:xfrm>
           <a:prstGeom prst="roundRect">
             <a:avLst>
@@ -12878,7 +12778,7 @@
             </a:avLst>
           </a:prstGeom>
           <a:solidFill>
-            <a:srgbClr val="F2F2F2"/>
+            <a:srgbClr val="FBE4E4"/>
           </a:solidFill>
           <a:ln>
             <a:noFill/>
@@ -12908,14 +12808,222 @@
       </p:sp>
       <p:sp>
         <p:nvSpPr>
-          <p:cNvPr id="7" name="Rectangle 6"/>
+          <p:cNvPr id="6" name="Rectangle 5"/>
           <p:cNvSpPr/>
           <p:nvPr/>
         </p:nvSpPr>
         <p:spPr>
           <a:xfrm>
-            <a:off x="457200" y="1591056"/>
-            <a:ext cx="3624986" cy="64008"/>
+            <a:off x="457200" y="1261872"/>
+            <a:ext cx="5478627" cy="502920"/>
+          </a:xfrm>
+          <a:prstGeom prst="rect">
+            <a:avLst/>
+          </a:prstGeom>
+          <a:solidFill>
+            <a:srgbClr val="A02030"/>
+          </a:solidFill>
+          <a:ln>
+            <a:noFill/>
+          </a:ln>
+        </p:spPr>
+        <p:style>
+          <a:lnRef idx="1">
+            <a:schemeClr val="accent1"/>
+          </a:lnRef>
+          <a:fillRef idx="3">
+            <a:schemeClr val="accent1"/>
+          </a:fillRef>
+          <a:effectRef idx="2">
+            <a:schemeClr val="accent1"/>
+          </a:effectRef>
+          <a:fontRef idx="minor">
+            <a:schemeClr val="lt1"/>
+          </a:fontRef>
+        </p:style>
+        <p:txBody>
+          <a:bodyPr rtlCol="0" anchor="ctr"/>
+          <a:lstStyle/>
+          <a:p>
+            <a:pPr algn="ctr"/>
+          </a:p>
+        </p:txBody>
+      </p:sp>
+      <p:sp>
+        <p:nvSpPr>
+          <p:cNvPr id="7" name="TextBox 6"/>
+          <p:cNvSpPr txBox="1"/>
+          <p:nvPr/>
+        </p:nvSpPr>
+        <p:spPr>
+          <a:xfrm>
+            <a:off x="594360" y="1353312"/>
+            <a:ext cx="5204307" cy="365760"/>
+          </a:xfrm>
+          <a:prstGeom prst="rect">
+            <a:avLst/>
+          </a:prstGeom>
+          <a:noFill/>
+        </p:spPr>
+        <p:txBody>
+          <a:bodyPr wrap="square" anchor="ctr"/>
+          <a:lstStyle/>
+          <a:p>
+            <a:pPr algn="ctr"/>
+            <a:r>
+              <a:rPr sz="1600" b="1" i="0">
+                <a:solidFill>
+                  <a:srgbClr val="FFFFFF"/>
+                </a:solidFill>
+                <a:latin typeface="Calibri"/>
+              </a:rPr>
+              <a:t>Teatro (lo que NO queremos)</a:t>
+            </a:r>
+          </a:p>
+        </p:txBody>
+      </p:sp>
+      <p:sp>
+        <p:nvSpPr>
+          <p:cNvPr id="8" name="TextBox 7"/>
+          <p:cNvSpPr txBox="1"/>
+          <p:nvPr/>
+        </p:nvSpPr>
+        <p:spPr>
+          <a:xfrm>
+            <a:off x="621792" y="1901952"/>
+            <a:ext cx="5158587" cy="4498848"/>
+          </a:xfrm>
+          <a:prstGeom prst="rect">
+            <a:avLst/>
+          </a:prstGeom>
+          <a:noFill/>
+        </p:spPr>
+        <p:txBody>
+          <a:bodyPr wrap="square">
+            <a:spAutoFit/>
+          </a:bodyPr>
+          <a:lstStyle/>
+          <a:p>
+            <a:pPr>
+              <a:spcAft>
+                <a:spcPts val="800"/>
+              </a:spcAft>
+            </a:pPr>
+            <a:r>
+              <a:rPr sz="1500" b="0" i="0">
+                <a:solidFill>
+                  <a:srgbClr val="333333"/>
+                </a:solidFill>
+                <a:latin typeface="Calibri"/>
+              </a:rPr>
+              <a:t>–   12 servicios para un equipo de 3</a:t>
+            </a:r>
+          </a:p>
+          <a:p>
+            <a:pPr>
+              <a:spcAft>
+                <a:spcPts val="800"/>
+              </a:spcAft>
+            </a:pPr>
+            <a:r>
+              <a:rPr sz="1500" b="0" i="0">
+                <a:solidFill>
+                  <a:srgbClr val="333333"/>
+                </a:solidFill>
+                <a:latin typeface="Calibri"/>
+              </a:rPr>
+              <a:t>–   Se separan por capricho tecnico, no por negocio</a:t>
+            </a:r>
+          </a:p>
+          <a:p>
+            <a:pPr>
+              <a:spcAft>
+                <a:spcPts val="800"/>
+              </a:spcAft>
+            </a:pPr>
+            <a:r>
+              <a:rPr sz="1500" b="0" i="0">
+                <a:solidFill>
+                  <a:srgbClr val="333333"/>
+                </a:solidFill>
+                <a:latin typeface="Calibri"/>
+              </a:rPr>
+              <a:t>–   Flechas sin protocolo ni verbo</a:t>
+            </a:r>
+          </a:p>
+          <a:p>
+            <a:pPr>
+              <a:spcAft>
+                <a:spcPts val="800"/>
+              </a:spcAft>
+            </a:pPr>
+            <a:r>
+              <a:rPr sz="1500" b="0" i="0">
+                <a:solidFill>
+                  <a:srgbClr val="333333"/>
+                </a:solidFill>
+                <a:latin typeface="Calibri"/>
+              </a:rPr>
+              <a:t>–   Nadie sabe explicar por que ese corte</a:t>
+            </a:r>
+          </a:p>
+        </p:txBody>
+      </p:sp>
+      <p:sp>
+        <p:nvSpPr>
+          <p:cNvPr id="9" name="Rounded Rectangle 8"/>
+          <p:cNvSpPr/>
+          <p:nvPr/>
+        </p:nvSpPr>
+        <p:spPr>
+          <a:xfrm>
+            <a:off x="6255867" y="1261872"/>
+            <a:ext cx="5478627" cy="5093208"/>
+          </a:xfrm>
+          <a:prstGeom prst="roundRect">
+            <a:avLst>
+              <a:gd name="adj" fmla="val 12000"/>
+            </a:avLst>
+          </a:prstGeom>
+          <a:solidFill>
+            <a:srgbClr val="E8F4FA"/>
+          </a:solidFill>
+          <a:ln>
+            <a:noFill/>
+          </a:ln>
+        </p:spPr>
+        <p:style>
+          <a:lnRef idx="1">
+            <a:schemeClr val="accent1"/>
+          </a:lnRef>
+          <a:fillRef idx="3">
+            <a:schemeClr val="accent1"/>
+          </a:fillRef>
+          <a:effectRef idx="2">
+            <a:schemeClr val="accent1"/>
+          </a:effectRef>
+          <a:fontRef idx="minor">
+            <a:schemeClr val="lt1"/>
+          </a:fontRef>
+        </p:style>
+        <p:txBody>
+          <a:bodyPr rtlCol="0" anchor="ctr"/>
+          <a:lstStyle/>
+          <a:p>
+            <a:pPr algn="ctr"/>
+          </a:p>
+        </p:txBody>
+      </p:sp>
+      <p:sp>
+        <p:nvSpPr>
+          <p:cNvPr id="10" name="Rectangle 9"/>
+          <p:cNvSpPr/>
+          <p:nvPr/>
+        </p:nvSpPr>
+        <p:spPr>
+          <a:xfrm>
+            <a:off x="6255867" y="1261872"/>
+            <a:ext cx="5478627" cy="502920"/>
           </a:xfrm>
           <a:prstGeom prst="rect">
             <a:avLst/>
@@ -12951,81 +13059,47 @@
       </p:sp>
       <p:sp>
         <p:nvSpPr>
-          <p:cNvPr id="8" name="Rectangle 7"/>
-          <p:cNvSpPr/>
-          <p:nvPr/>
-        </p:nvSpPr>
-        <p:spPr>
-          <a:xfrm>
-            <a:off x="457200" y="1655064"/>
-            <a:ext cx="3624986" cy="27432"/>
-          </a:xfrm>
-          <a:prstGeom prst="rect">
-            <a:avLst/>
-          </a:prstGeom>
-          <a:solidFill>
-            <a:srgbClr val="FFD000"/>
-          </a:solidFill>
-          <a:ln>
-            <a:noFill/>
-          </a:ln>
-        </p:spPr>
-        <p:style>
-          <a:lnRef idx="1">
-            <a:schemeClr val="accent1"/>
-          </a:lnRef>
-          <a:fillRef idx="3">
-            <a:schemeClr val="accent1"/>
-          </a:fillRef>
-          <a:effectRef idx="2">
-            <a:schemeClr val="accent1"/>
-          </a:effectRef>
-          <a:fontRef idx="minor">
-            <a:schemeClr val="lt1"/>
-          </a:fontRef>
-        </p:style>
-        <p:txBody>
-          <a:bodyPr rtlCol="0" anchor="ctr"/>
+          <p:cNvPr id="11" name="TextBox 10"/>
+          <p:cNvSpPr txBox="1"/>
+          <p:nvPr/>
+        </p:nvSpPr>
+        <p:spPr>
+          <a:xfrm>
+            <a:off x="6393027" y="1353312"/>
+            <a:ext cx="5204307" cy="365760"/>
+          </a:xfrm>
+          <a:prstGeom prst="rect">
+            <a:avLst/>
+          </a:prstGeom>
+          <a:noFill/>
+        </p:spPr>
+        <p:txBody>
+          <a:bodyPr wrap="square" anchor="ctr"/>
           <a:lstStyle/>
           <a:p>
             <a:pPr algn="ctr"/>
-          </a:p>
-        </p:txBody>
-      </p:sp>
-      <p:pic>
-        <p:nvPicPr>
-          <p:cNvPr id="9" name="Picture 8" descr="drawio.png"/>
-          <p:cNvPicPr>
-            <a:picLocks noChangeAspect="1"/>
-          </p:cNvPicPr>
-          <p:nvPr/>
-        </p:nvPicPr>
-        <p:blipFill>
-          <a:blip r:embed="rId2"/>
-          <a:stretch>
-            <a:fillRect/>
-          </a:stretch>
-        </p:blipFill>
-        <p:spPr>
-          <a:xfrm>
-            <a:off x="1659331" y="1847087"/>
-            <a:ext cx="1220724" cy="1220724"/>
-          </a:xfrm>
-          <a:prstGeom prst="rect">
-            <a:avLst/>
-          </a:prstGeom>
-        </p:spPr>
-      </p:pic>
-      <p:sp>
-        <p:nvSpPr>
-          <p:cNvPr id="10" name="TextBox 9"/>
+            <a:r>
+              <a:rPr sz="1600" b="1" i="0">
+                <a:solidFill>
+                  <a:srgbClr val="FFFFFF"/>
+                </a:solidFill>
+                <a:latin typeface="Calibri"/>
+              </a:rPr>
+              <a:t>Frontera justificada</a:t>
+            </a:r>
+          </a:p>
+        </p:txBody>
+      </p:sp>
+      <p:sp>
+        <p:nvSpPr>
+          <p:cNvPr id="12" name="TextBox 11"/>
           <p:cNvSpPr txBox="1"/>
           <p:nvPr/>
         </p:nvSpPr>
         <p:spPr>
           <a:xfrm>
-            <a:off x="530352" y="3159251"/>
-            <a:ext cx="3478682" cy="621792"/>
+            <a:off x="6420459" y="1901952"/>
+            <a:ext cx="5158587" cy="4498848"/>
           </a:xfrm>
           <a:prstGeom prst="rect">
             <a:avLst/>
@@ -13033,653 +13107,79 @@
           <a:noFill/>
         </p:spPr>
         <p:txBody>
-          <a:bodyPr wrap="square" anchor="t"/>
-          <a:lstStyle/>
-          <a:p>
-            <a:pPr algn="ctr"/>
-            <a:r>
-              <a:rPr sz="1300" b="1" i="0">
-                <a:solidFill>
-                  <a:srgbClr val="095292"/>
-                </a:solidFill>
-                <a:latin typeface="Calibri"/>
-              </a:rPr>
-              <a:t>draw.io</a:t>
-            </a:r>
-          </a:p>
-          <a:p>
-            <a:pPr algn="ctr">
-              <a:spcBef>
-                <a:spcPts val="200"/>
-              </a:spcBef>
-            </a:pPr>
-            <a:r>
-              <a:rPr sz="1000" b="0" i="0">
-                <a:solidFill>
-                  <a:srgbClr val="666666"/>
-                </a:solidFill>
-                <a:latin typeface="Calibri"/>
-              </a:rPr>
-              <a:t>Boceto del C4</a:t>
-            </a:r>
-          </a:p>
-        </p:txBody>
-      </p:sp>
-      <p:sp>
-        <p:nvSpPr>
-          <p:cNvPr id="11" name="Rounded Rectangle 10"/>
-          <p:cNvSpPr/>
-          <p:nvPr/>
-        </p:nvSpPr>
-        <p:spPr>
-          <a:xfrm>
-            <a:off x="4283354" y="1591056"/>
-            <a:ext cx="3624986" cy="2299716"/>
-          </a:xfrm>
-          <a:prstGeom prst="roundRect">
-            <a:avLst>
-              <a:gd name="adj" fmla="val 12000"/>
-            </a:avLst>
-          </a:prstGeom>
-          <a:solidFill>
-            <a:srgbClr val="F2F2F2"/>
-          </a:solidFill>
-          <a:ln>
-            <a:noFill/>
-          </a:ln>
-        </p:spPr>
-        <p:style>
-          <a:lnRef idx="1">
-            <a:schemeClr val="accent1"/>
-          </a:lnRef>
-          <a:fillRef idx="3">
-            <a:schemeClr val="accent1"/>
-          </a:fillRef>
-          <a:effectRef idx="2">
-            <a:schemeClr val="accent1"/>
-          </a:effectRef>
-          <a:fontRef idx="minor">
-            <a:schemeClr val="lt1"/>
-          </a:fontRef>
-        </p:style>
-        <p:txBody>
-          <a:bodyPr rtlCol="0" anchor="ctr"/>
-          <a:lstStyle/>
-          <a:p>
-            <a:pPr algn="ctr"/>
-          </a:p>
-        </p:txBody>
-      </p:sp>
-      <p:sp>
-        <p:nvSpPr>
-          <p:cNvPr id="12" name="Rectangle 11"/>
-          <p:cNvSpPr/>
-          <p:nvPr/>
-        </p:nvSpPr>
-        <p:spPr>
-          <a:xfrm>
-            <a:off x="4283354" y="1591056"/>
-            <a:ext cx="3624986" cy="64008"/>
-          </a:xfrm>
-          <a:prstGeom prst="rect">
-            <a:avLst/>
-          </a:prstGeom>
-          <a:solidFill>
-            <a:srgbClr val="095292"/>
-          </a:solidFill>
-          <a:ln>
-            <a:noFill/>
-          </a:ln>
-        </p:spPr>
-        <p:style>
-          <a:lnRef idx="1">
-            <a:schemeClr val="accent1"/>
-          </a:lnRef>
-          <a:fillRef idx="3">
-            <a:schemeClr val="accent1"/>
-          </a:fillRef>
-          <a:effectRef idx="2">
-            <a:schemeClr val="accent1"/>
-          </a:effectRef>
-          <a:fontRef idx="minor">
-            <a:schemeClr val="lt1"/>
-          </a:fontRef>
-        </p:style>
-        <p:txBody>
-          <a:bodyPr rtlCol="0" anchor="ctr"/>
-          <a:lstStyle/>
-          <a:p>
-            <a:pPr algn="ctr"/>
-          </a:p>
-        </p:txBody>
-      </p:sp>
-      <p:sp>
-        <p:nvSpPr>
-          <p:cNvPr id="13" name="Rectangle 12"/>
-          <p:cNvSpPr/>
-          <p:nvPr/>
-        </p:nvSpPr>
-        <p:spPr>
-          <a:xfrm>
-            <a:off x="4283354" y="1655064"/>
-            <a:ext cx="3624986" cy="27432"/>
-          </a:xfrm>
-          <a:prstGeom prst="rect">
-            <a:avLst/>
-          </a:prstGeom>
-          <a:solidFill>
-            <a:srgbClr val="FFD000"/>
-          </a:solidFill>
-          <a:ln>
-            <a:noFill/>
-          </a:ln>
-        </p:spPr>
-        <p:style>
-          <a:lnRef idx="1">
-            <a:schemeClr val="accent1"/>
-          </a:lnRef>
-          <a:fillRef idx="3">
-            <a:schemeClr val="accent1"/>
-          </a:fillRef>
-          <a:effectRef idx="2">
-            <a:schemeClr val="accent1"/>
-          </a:effectRef>
-          <a:fontRef idx="minor">
-            <a:schemeClr val="lt1"/>
-          </a:fontRef>
-        </p:style>
-        <p:txBody>
-          <a:bodyPr rtlCol="0" anchor="ctr"/>
-          <a:lstStyle/>
-          <a:p>
-            <a:pPr algn="ctr"/>
-          </a:p>
-        </p:txBody>
-      </p:sp>
-      <p:pic>
-        <p:nvPicPr>
-          <p:cNvPr id="14" name="Picture 13" descr="excalidraw.png"/>
-          <p:cNvPicPr>
-            <a:picLocks noChangeAspect="1"/>
-          </p:cNvPicPr>
-          <p:nvPr/>
-        </p:nvPicPr>
-        <p:blipFill>
-          <a:blip r:embed="rId3"/>
-          <a:stretch>
-            <a:fillRect/>
-          </a:stretch>
-        </p:blipFill>
-        <p:spPr>
-          <a:xfrm>
-            <a:off x="5485485" y="1847087"/>
-            <a:ext cx="1220724" cy="1220724"/>
-          </a:xfrm>
-          <a:prstGeom prst="rect">
-            <a:avLst/>
-          </a:prstGeom>
-        </p:spPr>
-      </p:pic>
-      <p:sp>
-        <p:nvSpPr>
-          <p:cNvPr id="15" name="TextBox 14"/>
-          <p:cNvSpPr txBox="1"/>
-          <p:nvPr/>
-        </p:nvSpPr>
-        <p:spPr>
-          <a:xfrm>
-            <a:off x="4356506" y="3159251"/>
-            <a:ext cx="3478682" cy="621792"/>
-          </a:xfrm>
-          <a:prstGeom prst="rect">
-            <a:avLst/>
-          </a:prstGeom>
-          <a:noFill/>
-        </p:spPr>
-        <p:txBody>
-          <a:bodyPr wrap="square" anchor="t"/>
-          <a:lstStyle/>
-          <a:p>
-            <a:pPr algn="ctr"/>
-            <a:r>
-              <a:rPr sz="1300" b="1" i="0">
-                <a:solidFill>
-                  <a:srgbClr val="095292"/>
-                </a:solidFill>
-                <a:latin typeface="Calibri"/>
-              </a:rPr>
-              <a:t>Excalidraw</a:t>
-            </a:r>
-          </a:p>
-          <a:p>
-            <a:pPr algn="ctr">
-              <a:spcBef>
-                <a:spcPts val="200"/>
-              </a:spcBef>
-            </a:pPr>
-            <a:r>
-              <a:rPr sz="1000" b="0" i="0">
-                <a:solidFill>
-                  <a:srgbClr val="666666"/>
-                </a:solidFill>
-                <a:latin typeface="Calibri"/>
-              </a:rPr>
-              <a:t>Boceto rapido</a:t>
-            </a:r>
-          </a:p>
-        </p:txBody>
-      </p:sp>
-      <p:sp>
-        <p:nvSpPr>
-          <p:cNvPr id="16" name="Rounded Rectangle 15"/>
-          <p:cNvSpPr/>
-          <p:nvPr/>
-        </p:nvSpPr>
-        <p:spPr>
-          <a:xfrm>
-            <a:off x="8109508" y="1591056"/>
-            <a:ext cx="3624986" cy="2299716"/>
-          </a:xfrm>
-          <a:prstGeom prst="roundRect">
-            <a:avLst>
-              <a:gd name="adj" fmla="val 12000"/>
-            </a:avLst>
-          </a:prstGeom>
-          <a:solidFill>
-            <a:srgbClr val="F2F2F2"/>
-          </a:solidFill>
-          <a:ln>
-            <a:noFill/>
-          </a:ln>
-        </p:spPr>
-        <p:style>
-          <a:lnRef idx="1">
-            <a:schemeClr val="accent1"/>
-          </a:lnRef>
-          <a:fillRef idx="3">
-            <a:schemeClr val="accent1"/>
-          </a:fillRef>
-          <a:effectRef idx="2">
-            <a:schemeClr val="accent1"/>
-          </a:effectRef>
-          <a:fontRef idx="minor">
-            <a:schemeClr val="lt1"/>
-          </a:fontRef>
-        </p:style>
-        <p:txBody>
-          <a:bodyPr rtlCol="0" anchor="ctr"/>
-          <a:lstStyle/>
-          <a:p>
-            <a:pPr algn="ctr"/>
-          </a:p>
-        </p:txBody>
-      </p:sp>
-      <p:sp>
-        <p:nvSpPr>
-          <p:cNvPr id="17" name="Rectangle 16"/>
-          <p:cNvSpPr/>
-          <p:nvPr/>
-        </p:nvSpPr>
-        <p:spPr>
-          <a:xfrm>
-            <a:off x="8109508" y="1591056"/>
-            <a:ext cx="3624986" cy="64008"/>
-          </a:xfrm>
-          <a:prstGeom prst="rect">
-            <a:avLst/>
-          </a:prstGeom>
-          <a:solidFill>
-            <a:srgbClr val="095292"/>
-          </a:solidFill>
-          <a:ln>
-            <a:noFill/>
-          </a:ln>
-        </p:spPr>
-        <p:style>
-          <a:lnRef idx="1">
-            <a:schemeClr val="accent1"/>
-          </a:lnRef>
-          <a:fillRef idx="3">
-            <a:schemeClr val="accent1"/>
-          </a:fillRef>
-          <a:effectRef idx="2">
-            <a:schemeClr val="accent1"/>
-          </a:effectRef>
-          <a:fontRef idx="minor">
-            <a:schemeClr val="lt1"/>
-          </a:fontRef>
-        </p:style>
-        <p:txBody>
-          <a:bodyPr rtlCol="0" anchor="ctr"/>
-          <a:lstStyle/>
-          <a:p>
-            <a:pPr algn="ctr"/>
-          </a:p>
-        </p:txBody>
-      </p:sp>
-      <p:sp>
-        <p:nvSpPr>
-          <p:cNvPr id="18" name="Rectangle 17"/>
-          <p:cNvSpPr/>
-          <p:nvPr/>
-        </p:nvSpPr>
-        <p:spPr>
-          <a:xfrm>
-            <a:off x="8109508" y="1655064"/>
-            <a:ext cx="3624986" cy="27432"/>
-          </a:xfrm>
-          <a:prstGeom prst="rect">
-            <a:avLst/>
-          </a:prstGeom>
-          <a:solidFill>
-            <a:srgbClr val="FFD000"/>
-          </a:solidFill>
-          <a:ln>
-            <a:noFill/>
-          </a:ln>
-        </p:spPr>
-        <p:style>
-          <a:lnRef idx="1">
-            <a:schemeClr val="accent1"/>
-          </a:lnRef>
-          <a:fillRef idx="3">
-            <a:schemeClr val="accent1"/>
-          </a:fillRef>
-          <a:effectRef idx="2">
-            <a:schemeClr val="accent1"/>
-          </a:effectRef>
-          <a:fontRef idx="minor">
-            <a:schemeClr val="lt1"/>
-          </a:fontRef>
-        </p:style>
-        <p:txBody>
-          <a:bodyPr rtlCol="0" anchor="ctr"/>
-          <a:lstStyle/>
-          <a:p>
-            <a:pPr algn="ctr"/>
-          </a:p>
-        </p:txBody>
-      </p:sp>
-      <p:pic>
-        <p:nvPicPr>
-          <p:cNvPr id="19" name="Picture 18" descr="mermaid.png"/>
-          <p:cNvPicPr>
-            <a:picLocks noChangeAspect="1"/>
-          </p:cNvPicPr>
-          <p:nvPr/>
-        </p:nvPicPr>
-        <p:blipFill>
-          <a:blip r:embed="rId4"/>
-          <a:stretch>
-            <a:fillRect/>
-          </a:stretch>
-        </p:blipFill>
-        <p:spPr>
-          <a:xfrm>
-            <a:off x="9311640" y="1847087"/>
-            <a:ext cx="1220724" cy="1220724"/>
-          </a:xfrm>
-          <a:prstGeom prst="rect">
-            <a:avLst/>
-          </a:prstGeom>
-        </p:spPr>
-      </p:pic>
-      <p:sp>
-        <p:nvSpPr>
-          <p:cNvPr id="20" name="TextBox 19"/>
-          <p:cNvSpPr txBox="1"/>
-          <p:nvPr/>
-        </p:nvSpPr>
-        <p:spPr>
-          <a:xfrm>
-            <a:off x="8182660" y="3159251"/>
-            <a:ext cx="3478682" cy="621792"/>
-          </a:xfrm>
-          <a:prstGeom prst="rect">
-            <a:avLst/>
-          </a:prstGeom>
-          <a:noFill/>
-        </p:spPr>
-        <p:txBody>
-          <a:bodyPr wrap="square" anchor="t"/>
-          <a:lstStyle/>
-          <a:p>
-            <a:pPr algn="ctr"/>
-            <a:r>
-              <a:rPr sz="1300" b="1" i="0">
-                <a:solidFill>
-                  <a:srgbClr val="095292"/>
-                </a:solidFill>
-                <a:latin typeface="Calibri"/>
-              </a:rPr>
-              <a:t>Mermaid</a:t>
-            </a:r>
-          </a:p>
-          <a:p>
-            <a:pPr algn="ctr">
-              <a:spcBef>
-                <a:spcPts val="200"/>
-              </a:spcBef>
-            </a:pPr>
-            <a:r>
-              <a:rPr sz="1000" b="0" i="0">
-                <a:solidFill>
-                  <a:srgbClr val="666666"/>
-                </a:solidFill>
-                <a:latin typeface="Calibri"/>
-              </a:rPr>
-              <a:t>Codigo del diagrama</a:t>
-            </a:r>
-          </a:p>
-        </p:txBody>
-      </p:sp>
-      <p:sp>
-        <p:nvSpPr>
-          <p:cNvPr id="21" name="Rounded Rectangle 20"/>
-          <p:cNvSpPr/>
-          <p:nvPr/>
-        </p:nvSpPr>
-        <p:spPr>
-          <a:xfrm>
-            <a:off x="4283354" y="4055364"/>
-            <a:ext cx="3624986" cy="2299716"/>
-          </a:xfrm>
-          <a:prstGeom prst="roundRect">
-            <a:avLst>
-              <a:gd name="adj" fmla="val 12000"/>
-            </a:avLst>
-          </a:prstGeom>
-          <a:solidFill>
-            <a:srgbClr val="F2F2F2"/>
-          </a:solidFill>
-          <a:ln>
-            <a:noFill/>
-          </a:ln>
-        </p:spPr>
-        <p:style>
-          <a:lnRef idx="1">
-            <a:schemeClr val="accent1"/>
-          </a:lnRef>
-          <a:fillRef idx="3">
-            <a:schemeClr val="accent1"/>
-          </a:fillRef>
-          <a:effectRef idx="2">
-            <a:schemeClr val="accent1"/>
-          </a:effectRef>
-          <a:fontRef idx="minor">
-            <a:schemeClr val="lt1"/>
-          </a:fontRef>
-        </p:style>
-        <p:txBody>
-          <a:bodyPr rtlCol="0" anchor="ctr"/>
-          <a:lstStyle/>
-          <a:p>
-            <a:pPr algn="ctr"/>
-          </a:p>
-        </p:txBody>
-      </p:sp>
-      <p:sp>
-        <p:nvSpPr>
-          <p:cNvPr id="22" name="Rectangle 21"/>
-          <p:cNvSpPr/>
-          <p:nvPr/>
-        </p:nvSpPr>
-        <p:spPr>
-          <a:xfrm>
-            <a:off x="4283354" y="4055364"/>
-            <a:ext cx="3624986" cy="64008"/>
-          </a:xfrm>
-          <a:prstGeom prst="rect">
-            <a:avLst/>
-          </a:prstGeom>
-          <a:solidFill>
-            <a:srgbClr val="095292"/>
-          </a:solidFill>
-          <a:ln>
-            <a:noFill/>
-          </a:ln>
-        </p:spPr>
-        <p:style>
-          <a:lnRef idx="1">
-            <a:schemeClr val="accent1"/>
-          </a:lnRef>
-          <a:fillRef idx="3">
-            <a:schemeClr val="accent1"/>
-          </a:fillRef>
-          <a:effectRef idx="2">
-            <a:schemeClr val="accent1"/>
-          </a:effectRef>
-          <a:fontRef idx="minor">
-            <a:schemeClr val="lt1"/>
-          </a:fontRef>
-        </p:style>
-        <p:txBody>
-          <a:bodyPr rtlCol="0" anchor="ctr"/>
-          <a:lstStyle/>
-          <a:p>
-            <a:pPr algn="ctr"/>
-          </a:p>
-        </p:txBody>
-      </p:sp>
-      <p:sp>
-        <p:nvSpPr>
-          <p:cNvPr id="23" name="Rectangle 22"/>
-          <p:cNvSpPr/>
-          <p:nvPr/>
-        </p:nvSpPr>
-        <p:spPr>
-          <a:xfrm>
-            <a:off x="4283354" y="4119372"/>
-            <a:ext cx="3624986" cy="27432"/>
-          </a:xfrm>
-          <a:prstGeom prst="rect">
-            <a:avLst/>
-          </a:prstGeom>
-          <a:solidFill>
-            <a:srgbClr val="FFD000"/>
-          </a:solidFill>
-          <a:ln>
-            <a:noFill/>
-          </a:ln>
-        </p:spPr>
-        <p:style>
-          <a:lnRef idx="1">
-            <a:schemeClr val="accent1"/>
-          </a:lnRef>
-          <a:fillRef idx="3">
-            <a:schemeClr val="accent1"/>
-          </a:fillRef>
-          <a:effectRef idx="2">
-            <a:schemeClr val="accent1"/>
-          </a:effectRef>
-          <a:fontRef idx="minor">
-            <a:schemeClr val="lt1"/>
-          </a:fontRef>
-        </p:style>
-        <p:txBody>
-          <a:bodyPr rtlCol="0" anchor="ctr"/>
-          <a:lstStyle/>
-          <a:p>
-            <a:pPr algn="ctr"/>
-          </a:p>
-        </p:txBody>
-      </p:sp>
-      <p:pic>
-        <p:nvPicPr>
-          <p:cNvPr id="24" name="Picture 23" descr="examlab.png"/>
-          <p:cNvPicPr>
-            <a:picLocks noChangeAspect="1"/>
-          </p:cNvPicPr>
-          <p:nvPr/>
-        </p:nvPicPr>
-        <p:blipFill>
-          <a:blip r:embed="rId5"/>
-          <a:stretch>
-            <a:fillRect/>
-          </a:stretch>
-        </p:blipFill>
-        <p:spPr>
-          <a:xfrm>
-            <a:off x="5485485" y="4311396"/>
-            <a:ext cx="1220724" cy="1220724"/>
-          </a:xfrm>
-          <a:prstGeom prst="rect">
-            <a:avLst/>
-          </a:prstGeom>
-        </p:spPr>
-      </p:pic>
-      <p:sp>
-        <p:nvSpPr>
-          <p:cNvPr id="25" name="TextBox 24"/>
-          <p:cNvSpPr txBox="1"/>
-          <p:nvPr/>
-        </p:nvSpPr>
-        <p:spPr>
-          <a:xfrm>
-            <a:off x="4356506" y="5623560"/>
-            <a:ext cx="3478682" cy="621792"/>
-          </a:xfrm>
-          <a:prstGeom prst="rect">
-            <a:avLst/>
-          </a:prstGeom>
-          <a:noFill/>
-        </p:spPr>
-        <p:txBody>
-          <a:bodyPr wrap="square" anchor="t"/>
-          <a:lstStyle/>
-          <a:p>
-            <a:pPr algn="ctr"/>
-            <a:r>
-              <a:rPr sz="1300" b="1" i="0">
-                <a:solidFill>
-                  <a:srgbClr val="095292"/>
-                </a:solidFill>
-                <a:latin typeface="Calibri"/>
-              </a:rPr>
-              <a:t>la plataforma del curso</a:t>
-            </a:r>
-          </a:p>
-          <a:p>
-            <a:pPr algn="ctr">
-              <a:spcBef>
-                <a:spcPts val="200"/>
-              </a:spcBef>
-            </a:pPr>
-            <a:r>
-              <a:rPr sz="1000" b="0" i="0">
-                <a:solidFill>
-                  <a:srgbClr val="666666"/>
-                </a:solidFill>
-                <a:latin typeface="Calibri"/>
-              </a:rPr>
-              <a:t>Donde se entrega</a:t>
-            </a:r>
-          </a:p>
-        </p:txBody>
-      </p:sp>
-      <p:sp>
-        <p:nvSpPr>
-          <p:cNvPr id="26" name="TextBox 25"/>
+          <a:bodyPr wrap="square">
+            <a:spAutoFit/>
+          </a:bodyPr>
+          <a:lstStyle/>
+          <a:p>
+            <a:pPr>
+              <a:spcAft>
+                <a:spcPts val="800"/>
+              </a:spcAft>
+            </a:pPr>
+            <a:r>
+              <a:rPr sz="1500" b="0" i="0">
+                <a:solidFill>
+                  <a:srgbClr val="333333"/>
+                </a:solidFill>
+                <a:latin typeface="Calibri"/>
+              </a:rPr>
+              <a:t>–   2-5 contenedores logicos, cada uno con su razon</a:t>
+            </a:r>
+          </a:p>
+          <a:p>
+            <a:pPr>
+              <a:spcAft>
+                <a:spcPts val="800"/>
+              </a:spcAft>
+            </a:pPr>
+            <a:r>
+              <a:rPr sz="1500" b="0" i="0">
+                <a:solidFill>
+                  <a:srgbClr val="333333"/>
+                </a:solidFill>
+                <a:latin typeface="Calibri"/>
+              </a:rPr>
+              <a:t>–   Frontera = responsabilidad de negocio</a:t>
+            </a:r>
+          </a:p>
+          <a:p>
+            <a:pPr>
+              <a:spcAft>
+                <a:spcPts val="800"/>
+              </a:spcAft>
+            </a:pPr>
+            <a:r>
+              <a:rPr sz="1500" b="0" i="0">
+                <a:solidFill>
+                  <a:srgbClr val="333333"/>
+                </a:solidFill>
+                <a:latin typeface="Calibri"/>
+              </a:rPr>
+              <a:t>–   Cada flecha: protocolo + verbo (HTTP/JSON, 'reserva')</a:t>
+            </a:r>
+          </a:p>
+          <a:p>
+            <a:pPr>
+              <a:spcAft>
+                <a:spcPts val="800"/>
+              </a:spcAft>
+            </a:pPr>
+            <a:r>
+              <a:rPr sz="1500" b="0" i="0">
+                <a:solidFill>
+                  <a:srgbClr val="333333"/>
+                </a:solidFill>
+                <a:latin typeface="Calibri"/>
+              </a:rPr>
+              <a:t>–   Se explica en 60 s sin leer notas</a:t>
+            </a:r>
+          </a:p>
+        </p:txBody>
+      </p:sp>
+      <p:sp>
+        <p:nvSpPr>
+          <p:cNvPr id="13" name="TextBox 12"/>
           <p:cNvSpPr txBox="1"/>
           <p:nvPr/>
         </p:nvSpPr>
@@ -13747,7 +13247,7 @@
         <p:spPr>
           <a:xfrm>
             <a:off x="0" y="0"/>
-            <a:ext cx="12191695" cy="1170432"/>
+            <a:ext cx="12191695" cy="960120"/>
           </a:xfrm>
           <a:prstGeom prst="rect">
             <a:avLst/>
@@ -13789,7 +13289,7 @@
         </p:nvSpPr>
         <p:spPr>
           <a:xfrm>
-            <a:off x="0" y="1170432"/>
+            <a:off x="0" y="960120"/>
             <a:ext cx="12191695" cy="41148"/>
           </a:xfrm>
           <a:prstGeom prst="rect">
@@ -13833,7 +13333,7 @@
         <p:spPr>
           <a:xfrm>
             <a:off x="457200" y="164592"/>
-            <a:ext cx="11277295" cy="384048"/>
+            <a:ext cx="11277295" cy="502920"/>
           </a:xfrm>
           <a:prstGeom prst="rect">
             <a:avLst/>
@@ -13853,55 +13353,21 @@
                 </a:solidFill>
                 <a:latin typeface="Calibri"/>
               </a:rPr>
-              <a:t>Del boceto a la plataforma del curso (diagrama)</a:t>
-            </a:r>
-          </a:p>
-        </p:txBody>
-      </p:sp>
-      <p:sp>
-        <p:nvSpPr>
-          <p:cNvPr id="5" name="TextBox 4"/>
-          <p:cNvSpPr txBox="1"/>
-          <p:nvPr/>
-        </p:nvSpPr>
-        <p:spPr>
-          <a:xfrm>
-            <a:off x="457200" y="566928"/>
-            <a:ext cx="11277295" cy="411480"/>
-          </a:xfrm>
-          <a:prstGeom prst="rect">
-            <a:avLst/>
-          </a:prstGeom>
-          <a:noFill/>
-        </p:spPr>
-        <p:txBody>
-          <a:bodyPr wrap="square">
-            <a:spAutoFit/>
-          </a:bodyPr>
-          <a:lstStyle/>
-          <a:p>
-            <a:r>
-              <a:rPr sz="1400" b="0" i="0">
-                <a:solidFill>
-                  <a:srgbClr val="B8D8EE"/>
-                </a:solidFill>
-                <a:latin typeface="Calibri"/>
-              </a:rPr>
-              <a:t>El diagrama se entrega como código Mermaid dentro de la plataforma del curso, no como imagen</a:t>
-            </a:r>
-          </a:p>
-        </p:txBody>
-      </p:sp>
-      <p:sp>
-        <p:nvSpPr>
-          <p:cNvPr id="6" name="Rounded Rectangle 5"/>
+              <a:t>C4Container en Mermaid: el molde que la plataforma del curso renderiza</a:t>
+            </a:r>
+          </a:p>
+        </p:txBody>
+      </p:sp>
+      <p:sp>
+        <p:nvSpPr>
+          <p:cNvPr id="5" name="Rounded Rectangle 4"/>
           <p:cNvSpPr/>
           <p:nvPr/>
         </p:nvSpPr>
         <p:spPr>
           <a:xfrm>
-            <a:off x="457200" y="1659636"/>
-            <a:ext cx="11277295" cy="1051560"/>
+            <a:off x="457200" y="1261872"/>
+            <a:ext cx="11277295" cy="4773168"/>
           </a:xfrm>
           <a:prstGeom prst="roundRect">
             <a:avLst>
@@ -13909,7 +13375,7 @@
             </a:avLst>
           </a:prstGeom>
           <a:solidFill>
-            <a:srgbClr val="F2F2F2"/>
+            <a:srgbClr val="1E2A38"/>
           </a:solidFill>
           <a:ln>
             <a:noFill/>
@@ -13939,19 +13405,17 @@
       </p:sp>
       <p:sp>
         <p:nvSpPr>
-          <p:cNvPr id="7" name="Rounded Rectangle 6"/>
+          <p:cNvPr id="6" name="Rectangle 5"/>
           <p:cNvSpPr/>
           <p:nvPr/>
         </p:nvSpPr>
         <p:spPr>
           <a:xfrm>
-            <a:off x="594360" y="1965960"/>
-            <a:ext cx="438912" cy="438912"/>
-          </a:xfrm>
-          <a:prstGeom prst="roundRect">
-            <a:avLst>
-              <a:gd name="adj" fmla="val 12000"/>
-            </a:avLst>
+            <a:off x="457200" y="1261872"/>
+            <a:ext cx="11277295" cy="320040"/>
+          </a:xfrm>
+          <a:prstGeom prst="rect">
+            <a:avLst/>
           </a:prstGeom>
           <a:solidFill>
             <a:srgbClr val="095292"/>
@@ -13984,14 +13448,46 @@
       </p:sp>
       <p:sp>
         <p:nvSpPr>
+          <p:cNvPr id="7" name="TextBox 6"/>
+          <p:cNvSpPr txBox="1"/>
+          <p:nvPr/>
+        </p:nvSpPr>
+        <p:spPr>
+          <a:xfrm>
+            <a:off x="685800" y="1307592"/>
+            <a:ext cx="10820095" cy="256032"/>
+          </a:xfrm>
+          <a:prstGeom prst="rect">
+            <a:avLst/>
+          </a:prstGeom>
+          <a:noFill/>
+        </p:spPr>
+        <p:txBody>
+          <a:bodyPr wrap="square" anchor="ctr"/>
+          <a:lstStyle/>
+          <a:p>
+            <a:r>
+              <a:rPr sz="1000" b="1" i="0">
+                <a:solidFill>
+                  <a:srgbClr val="269CCB"/>
+                </a:solidFill>
+                <a:latin typeface="Calibri"/>
+              </a:rPr>
+              <a:t>● ● ●</a:t>
+            </a:r>
+          </a:p>
+        </p:txBody>
+      </p:sp>
+      <p:sp>
+        <p:nvSpPr>
           <p:cNvPr id="8" name="TextBox 7"/>
           <p:cNvSpPr txBox="1"/>
           <p:nvPr/>
         </p:nvSpPr>
         <p:spPr>
           <a:xfrm>
-            <a:off x="594360" y="1965960"/>
-            <a:ext cx="438912" cy="438912"/>
+            <a:off x="777240" y="1719072"/>
+            <a:ext cx="10637215" cy="4133087"/>
           </a:xfrm>
           <a:prstGeom prst="rect">
             <a:avLst/>
@@ -13999,18 +13495,248 @@
           <a:noFill/>
         </p:spPr>
         <p:txBody>
-          <a:bodyPr wrap="square" anchor="ctr"/>
-          <a:lstStyle/>
-          <a:p>
-            <a:pPr algn="ctr"/>
-            <a:r>
-              <a:rPr sz="1600" b="1" i="0">
+          <a:bodyPr wrap="square">
+            <a:spAutoFit/>
+          </a:bodyPr>
+          <a:lstStyle/>
+          <a:p>
+            <a:pPr>
+              <a:spcAft>
+                <a:spcPts val="400"/>
+              </a:spcAft>
+            </a:pPr>
+            <a:r>
+              <a:rPr sz="1400" b="0" i="0">
                 <a:solidFill>
                   <a:srgbClr val="FFFFFF"/>
                 </a:solidFill>
                 <a:latin typeface="Calibri"/>
               </a:rPr>
-              <a:t>1</a:t>
+              <a:t>C4Container</a:t>
+            </a:r>
+          </a:p>
+          <a:p>
+            <a:pPr>
+              <a:spcAft>
+                <a:spcPts val="400"/>
+              </a:spcAft>
+            </a:pPr>
+            <a:r>
+              <a:rPr sz="1400" b="0" i="0">
+                <a:solidFill>
+                  <a:srgbClr val="FFFFFF"/>
+                </a:solidFill>
+                <a:latin typeface="Calibri"/>
+              </a:rPr>
+              <a:t>title Diagrama de contenedores - CloudLite Turnos</a:t>
+            </a:r>
+          </a:p>
+          <a:p>
+            <a:pPr>
+              <a:spcAft>
+                <a:spcPts val="400"/>
+              </a:spcAft>
+            </a:pPr>
+            <a:r>
+              <a:rPr sz="1400" b="0" i="0">
+                <a:solidFill>
+                  <a:srgbClr val="FFFFFF"/>
+                </a:solidFill>
+                <a:latin typeface="Calibri"/>
+              </a:rPr>
+              <a:t>Person(cliente, "Cliente de la barberia", "Reserva y consulta sus turnos")</a:t>
+            </a:r>
+          </a:p>
+          <a:p>
+            <a:pPr>
+              <a:spcAft>
+                <a:spcPts val="400"/>
+              </a:spcAft>
+            </a:pPr>
+            <a:r>
+              <a:rPr sz="1400" b="0" i="0">
+                <a:solidFill>
+                  <a:srgbClr val="FFFFFF"/>
+                </a:solidFill>
+                <a:latin typeface="Calibri"/>
+              </a:rPr>
+              <a:t>System_Boundary(cloudlite, "CloudLite App") {</a:t>
+            </a:r>
+          </a:p>
+          <a:p>
+            <a:pPr>
+              <a:spcAft>
+                <a:spcPts val="400"/>
+              </a:spcAft>
+            </a:pPr>
+            <a:r>
+              <a:rPr sz="1400" b="0" i="0">
+                <a:solidFill>
+                  <a:srgbClr val="FFFFFF"/>
+                </a:solidFill>
+                <a:latin typeface="Calibri"/>
+              </a:rPr>
+              <a:t>  Container(spa, "App web", "React", "Muestra franjas libres y crea la reserva")</a:t>
+            </a:r>
+          </a:p>
+          <a:p>
+            <a:pPr>
+              <a:spcAft>
+                <a:spcPts val="400"/>
+              </a:spcAft>
+            </a:pPr>
+            <a:r>
+              <a:rPr sz="1400" b="0" i="0">
+                <a:solidFill>
+                  <a:srgbClr val="FFFFFF"/>
+                </a:solidFill>
+                <a:latin typeface="Calibri"/>
+              </a:rPr>
+              <a:t>  Container(api, "API de turnos", "Node.js", "Valida la franja y registra el turno")</a:t>
+            </a:r>
+          </a:p>
+          <a:p>
+            <a:pPr>
+              <a:spcAft>
+                <a:spcPts val="400"/>
+              </a:spcAft>
+            </a:pPr>
+            <a:r>
+              <a:rPr sz="1400" b="0" i="0">
+                <a:solidFill>
+                  <a:srgbClr val="FFFFFF"/>
+                </a:solidFill>
+                <a:latin typeface="Calibri"/>
+              </a:rPr>
+              <a:t>  ContainerDb(db, "Base de turnos", "PostgreSQL", "Turnos, clientes y horarios")</a:t>
+            </a:r>
+          </a:p>
+          <a:p>
+            <a:pPr>
+              <a:spcAft>
+                <a:spcPts val="400"/>
+              </a:spcAft>
+            </a:pPr>
+            <a:r>
+              <a:rPr sz="1400" b="0" i="0">
+                <a:solidFill>
+                  <a:srgbClr val="FFFFFF"/>
+                </a:solidFill>
+                <a:latin typeface="Calibri"/>
+              </a:rPr>
+              <a:t>  Container(worker, "Worker de avisos", "cola", "Envia el aviso, con reintentos")</a:t>
+            </a:r>
+          </a:p>
+          <a:p>
+            <a:pPr>
+              <a:spcAft>
+                <a:spcPts val="400"/>
+              </a:spcAft>
+            </a:pPr>
+            <a:r>
+              <a:rPr sz="1400" b="0" i="0">
+                <a:solidFill>
+                  <a:srgbClr val="FFFFFF"/>
+                </a:solidFill>
+                <a:latin typeface="Calibri"/>
+              </a:rPr>
+              <a:t>}</a:t>
+            </a:r>
+          </a:p>
+          <a:p>
+            <a:pPr>
+              <a:spcAft>
+                <a:spcPts val="400"/>
+              </a:spcAft>
+            </a:pPr>
+            <a:r>
+              <a:rPr sz="1400" b="0" i="0">
+                <a:solidFill>
+                  <a:srgbClr val="FFFFFF"/>
+                </a:solidFill>
+                <a:latin typeface="Calibri"/>
+              </a:rPr>
+              <a:t>System_Ext(correo, "Correo transaccional", "Entrega el correo al cliente")</a:t>
+            </a:r>
+          </a:p>
+          <a:p>
+            <a:pPr>
+              <a:spcAft>
+                <a:spcPts val="400"/>
+              </a:spcAft>
+            </a:pPr>
+            <a:r>
+              <a:rPr sz="1400" b="0" i="0">
+                <a:solidFill>
+                  <a:srgbClr val="FFFFFF"/>
+                </a:solidFill>
+                <a:latin typeface="Calibri"/>
+              </a:rPr>
+              <a:t>Rel(cliente, spa, "Reserva un turno", "HTTPS")</a:t>
+            </a:r>
+          </a:p>
+          <a:p>
+            <a:pPr>
+              <a:spcAft>
+                <a:spcPts val="400"/>
+              </a:spcAft>
+            </a:pPr>
+            <a:r>
+              <a:rPr sz="1400" b="0" i="0">
+                <a:solidFill>
+                  <a:srgbClr val="FFFFFF"/>
+                </a:solidFill>
+                <a:latin typeface="Calibri"/>
+              </a:rPr>
+              <a:t>Rel(spa, api, "POST /turnos", "HTTPS/JSON")</a:t>
+            </a:r>
+          </a:p>
+          <a:p>
+            <a:pPr>
+              <a:spcAft>
+                <a:spcPts val="400"/>
+              </a:spcAft>
+            </a:pPr>
+            <a:r>
+              <a:rPr sz="1400" b="0" i="0">
+                <a:solidFill>
+                  <a:srgbClr val="FFFFFF"/>
+                </a:solidFill>
+                <a:latin typeface="Calibri"/>
+              </a:rPr>
+              <a:t>Rel(api, db, "INSERT / SELECT de turnos", "TCP/SQL")</a:t>
+            </a:r>
+          </a:p>
+          <a:p>
+            <a:pPr>
+              <a:spcAft>
+                <a:spcPts val="400"/>
+              </a:spcAft>
+            </a:pPr>
+            <a:r>
+              <a:rPr sz="1400" b="0" i="0">
+                <a:solidFill>
+                  <a:srgbClr val="FFFFFF"/>
+                </a:solidFill>
+                <a:latin typeface="Calibri"/>
+              </a:rPr>
+              <a:t>Rel(api, worker, "Publica aviso-de-turno", "evento/cola (AMQP)")</a:t>
+            </a:r>
+          </a:p>
+          <a:p>
+            <a:pPr>
+              <a:spcAft>
+                <a:spcPts val="400"/>
+              </a:spcAft>
+            </a:pPr>
+            <a:r>
+              <a:rPr sz="1400" b="0" i="0">
+                <a:solidFill>
+                  <a:srgbClr val="FFFFFF"/>
+                </a:solidFill>
+                <a:latin typeface="Calibri"/>
+              </a:rPr>
+              <a:t>Rel(worker, correo, "Envia la confirmacion", "API REST sobre HTTPS")</a:t>
             </a:r>
           </a:p>
         </p:txBody>
@@ -14023,8 +13749,8 @@
         </p:nvSpPr>
         <p:spPr>
           <a:xfrm>
-            <a:off x="1188720" y="1751076"/>
-            <a:ext cx="10271455" cy="886968"/>
+            <a:off x="457200" y="6080760"/>
+            <a:ext cx="11277295" cy="320040"/>
           </a:xfrm>
           <a:prstGeom prst="rect">
             <a:avLst/>
@@ -14032,553 +13758,27 @@
           <a:noFill/>
         </p:spPr>
         <p:txBody>
-          <a:bodyPr wrap="square" anchor="ctr"/>
-          <a:lstStyle/>
-          <a:p>
-            <a:r>
-              <a:rPr sz="1500" b="1" i="0">
-                <a:solidFill>
-                  <a:srgbClr val="095292"/>
-                </a:solidFill>
-                <a:latin typeface="Calibri"/>
-              </a:rPr>
-              <a:t>Disena visual</a:t>
-            </a:r>
-          </a:p>
-          <a:p>
-            <a:pPr>
-              <a:spcBef>
-                <a:spcPts val="200"/>
-              </a:spcBef>
-            </a:pPr>
-            <a:r>
-              <a:rPr sz="1300" b="0" i="0">
-                <a:solidFill>
-                  <a:srgbClr val="333333"/>
-                </a:solidFill>
-                <a:latin typeface="Calibri"/>
-              </a:rPr>
-              <a:t>Dibuja el diagrama como quieras en Excalidraw o draw.io: es mas rapido arrastrar cajas que escribir codigo, y ahi es donde piensas el modelo.</a:t>
-            </a:r>
-          </a:p>
-        </p:txBody>
-      </p:sp>
-      <p:sp>
-        <p:nvSpPr>
-          <p:cNvPr id="10" name="Rounded Rectangle 9"/>
-          <p:cNvSpPr/>
-          <p:nvPr/>
-        </p:nvSpPr>
-        <p:spPr>
-          <a:xfrm>
-            <a:off x="457200" y="2802636"/>
-            <a:ext cx="11277295" cy="1051560"/>
-          </a:xfrm>
-          <a:prstGeom prst="roundRect">
-            <a:avLst>
-              <a:gd name="adj" fmla="val 12000"/>
-            </a:avLst>
-          </a:prstGeom>
-          <a:solidFill>
-            <a:srgbClr val="E8F4FA"/>
-          </a:solidFill>
-          <a:ln>
-            <a:noFill/>
-          </a:ln>
-        </p:spPr>
-        <p:style>
-          <a:lnRef idx="1">
-            <a:schemeClr val="accent1"/>
-          </a:lnRef>
-          <a:fillRef idx="3">
-            <a:schemeClr val="accent1"/>
-          </a:fillRef>
-          <a:effectRef idx="2">
-            <a:schemeClr val="accent1"/>
-          </a:effectRef>
-          <a:fontRef idx="minor">
-            <a:schemeClr val="lt1"/>
-          </a:fontRef>
-        </p:style>
-        <p:txBody>
-          <a:bodyPr rtlCol="0" anchor="ctr"/>
+          <a:bodyPr wrap="square">
+            <a:spAutoFit/>
+          </a:bodyPr>
           <a:lstStyle/>
           <a:p>
             <a:pPr algn="ctr"/>
-          </a:p>
-        </p:txBody>
-      </p:sp>
-      <p:sp>
-        <p:nvSpPr>
-          <p:cNvPr id="11" name="Rounded Rectangle 10"/>
-          <p:cNvSpPr/>
-          <p:nvPr/>
-        </p:nvSpPr>
-        <p:spPr>
-          <a:xfrm>
-            <a:off x="594360" y="3108960"/>
-            <a:ext cx="438912" cy="438912"/>
-          </a:xfrm>
-          <a:prstGeom prst="roundRect">
-            <a:avLst>
-              <a:gd name="adj" fmla="val 12000"/>
-            </a:avLst>
-          </a:prstGeom>
-          <a:solidFill>
-            <a:srgbClr val="095292"/>
-          </a:solidFill>
-          <a:ln>
-            <a:noFill/>
-          </a:ln>
-        </p:spPr>
-        <p:style>
-          <a:lnRef idx="1">
-            <a:schemeClr val="accent1"/>
-          </a:lnRef>
-          <a:fillRef idx="3">
-            <a:schemeClr val="accent1"/>
-          </a:fillRef>
-          <a:effectRef idx="2">
-            <a:schemeClr val="accent1"/>
-          </a:effectRef>
-          <a:fontRef idx="minor">
-            <a:schemeClr val="lt1"/>
-          </a:fontRef>
-        </p:style>
-        <p:txBody>
-          <a:bodyPr rtlCol="0" anchor="ctr"/>
-          <a:lstStyle/>
-          <a:p>
-            <a:pPr algn="ctr"/>
-          </a:p>
-        </p:txBody>
-      </p:sp>
-      <p:sp>
-        <p:nvSpPr>
-          <p:cNvPr id="12" name="TextBox 11"/>
-          <p:cNvSpPr txBox="1"/>
-          <p:nvPr/>
-        </p:nvSpPr>
-        <p:spPr>
-          <a:xfrm>
-            <a:off x="594360" y="3108960"/>
-            <a:ext cx="438912" cy="438912"/>
-          </a:xfrm>
-          <a:prstGeom prst="rect">
-            <a:avLst/>
-          </a:prstGeom>
-          <a:noFill/>
-        </p:spPr>
-        <p:txBody>
-          <a:bodyPr wrap="square" anchor="ctr"/>
-          <a:lstStyle/>
-          <a:p>
-            <a:pPr algn="ctr"/>
-            <a:r>
-              <a:rPr sz="1600" b="1" i="0">
-                <a:solidFill>
-                  <a:srgbClr val="FFFFFF"/>
-                </a:solidFill>
-                <a:latin typeface="Calibri"/>
-              </a:rPr>
-              <a:t>2</a:t>
-            </a:r>
-          </a:p>
-        </p:txBody>
-      </p:sp>
-      <p:sp>
-        <p:nvSpPr>
-          <p:cNvPr id="13" name="TextBox 12"/>
-          <p:cNvSpPr txBox="1"/>
-          <p:nvPr/>
-        </p:nvSpPr>
-        <p:spPr>
-          <a:xfrm>
-            <a:off x="1188720" y="2894076"/>
-            <a:ext cx="10271455" cy="886968"/>
-          </a:xfrm>
-          <a:prstGeom prst="rect">
-            <a:avLst/>
-          </a:prstGeom>
-          <a:noFill/>
-        </p:spPr>
-        <p:txBody>
-          <a:bodyPr wrap="square" anchor="ctr"/>
-          <a:lstStyle/>
-          <a:p>
-            <a:r>
-              <a:rPr sz="1500" b="1" i="0">
-                <a:solidFill>
-                  <a:srgbClr val="095292"/>
-                </a:solidFill>
-                <a:latin typeface="Calibri"/>
-              </a:rPr>
-              <a:t>Traduce con IA</a:t>
-            </a:r>
-          </a:p>
-          <a:p>
-            <a:pPr>
-              <a:spcBef>
-                <a:spcPts val="200"/>
-              </a:spcBef>
-            </a:pPr>
-            <a:r>
-              <a:rPr sz="1300" b="0" i="0">
-                <a:solidFill>
-                  <a:srgbClr val="333333"/>
-                </a:solidFill>
-                <a:latin typeface="Calibri"/>
-              </a:rPr>
-              <a:t>Copia o describe tu boceto a una IA y pidele el codigo Mermaid: «convierte este diagrama a Mermaid usando C4Container». Revisa el resultado: la IA acierta la sintaxis, no tu modelo.</a:t>
-            </a:r>
-          </a:p>
-        </p:txBody>
-      </p:sp>
-      <p:sp>
-        <p:nvSpPr>
-          <p:cNvPr id="14" name="Rounded Rectangle 13"/>
-          <p:cNvSpPr/>
-          <p:nvPr/>
-        </p:nvSpPr>
-        <p:spPr>
-          <a:xfrm>
-            <a:off x="457200" y="3945636"/>
-            <a:ext cx="11277295" cy="1051560"/>
-          </a:xfrm>
-          <a:prstGeom prst="roundRect">
-            <a:avLst>
-              <a:gd name="adj" fmla="val 12000"/>
-            </a:avLst>
-          </a:prstGeom>
-          <a:solidFill>
-            <a:srgbClr val="F2F2F2"/>
-          </a:solidFill>
-          <a:ln>
-            <a:noFill/>
-          </a:ln>
-        </p:spPr>
-        <p:style>
-          <a:lnRef idx="1">
-            <a:schemeClr val="accent1"/>
-          </a:lnRef>
-          <a:fillRef idx="3">
-            <a:schemeClr val="accent1"/>
-          </a:fillRef>
-          <a:effectRef idx="2">
-            <a:schemeClr val="accent1"/>
-          </a:effectRef>
-          <a:fontRef idx="minor">
-            <a:schemeClr val="lt1"/>
-          </a:fontRef>
-        </p:style>
-        <p:txBody>
-          <a:bodyPr rtlCol="0" anchor="ctr"/>
-          <a:lstStyle/>
-          <a:p>
-            <a:pPr algn="ctr"/>
-          </a:p>
-        </p:txBody>
-      </p:sp>
-      <p:sp>
-        <p:nvSpPr>
-          <p:cNvPr id="15" name="Rounded Rectangle 14"/>
-          <p:cNvSpPr/>
-          <p:nvPr/>
-        </p:nvSpPr>
-        <p:spPr>
-          <a:xfrm>
-            <a:off x="594360" y="4251960"/>
-            <a:ext cx="438912" cy="438912"/>
-          </a:xfrm>
-          <a:prstGeom prst="roundRect">
-            <a:avLst>
-              <a:gd name="adj" fmla="val 12000"/>
-            </a:avLst>
-          </a:prstGeom>
-          <a:solidFill>
-            <a:srgbClr val="095292"/>
-          </a:solidFill>
-          <a:ln>
-            <a:noFill/>
-          </a:ln>
-        </p:spPr>
-        <p:style>
-          <a:lnRef idx="1">
-            <a:schemeClr val="accent1"/>
-          </a:lnRef>
-          <a:fillRef idx="3">
-            <a:schemeClr val="accent1"/>
-          </a:fillRef>
-          <a:effectRef idx="2">
-            <a:schemeClr val="accent1"/>
-          </a:effectRef>
-          <a:fontRef idx="minor">
-            <a:schemeClr val="lt1"/>
-          </a:fontRef>
-        </p:style>
-        <p:txBody>
-          <a:bodyPr rtlCol="0" anchor="ctr"/>
-          <a:lstStyle/>
-          <a:p>
-            <a:pPr algn="ctr"/>
-          </a:p>
-        </p:txBody>
-      </p:sp>
-      <p:sp>
-        <p:nvSpPr>
-          <p:cNvPr id="16" name="TextBox 15"/>
-          <p:cNvSpPr txBox="1"/>
-          <p:nvPr/>
-        </p:nvSpPr>
-        <p:spPr>
-          <a:xfrm>
-            <a:off x="594360" y="4251960"/>
-            <a:ext cx="438912" cy="438912"/>
-          </a:xfrm>
-          <a:prstGeom prst="rect">
-            <a:avLst/>
-          </a:prstGeom>
-          <a:noFill/>
-        </p:spPr>
-        <p:txBody>
-          <a:bodyPr wrap="square" anchor="ctr"/>
-          <a:lstStyle/>
-          <a:p>
-            <a:pPr algn="ctr"/>
-            <a:r>
-              <a:rPr sz="1600" b="1" i="0">
-                <a:solidFill>
-                  <a:srgbClr val="FFFFFF"/>
-                </a:solidFill>
-                <a:latin typeface="Calibri"/>
-              </a:rPr>
-              <a:t>3</a:t>
-            </a:r>
-          </a:p>
-        </p:txBody>
-      </p:sp>
-      <p:sp>
-        <p:nvSpPr>
-          <p:cNvPr id="17" name="TextBox 16"/>
-          <p:cNvSpPr txBox="1"/>
-          <p:nvPr/>
-        </p:nvSpPr>
-        <p:spPr>
-          <a:xfrm>
-            <a:off x="1188720" y="4037076"/>
-            <a:ext cx="10271455" cy="886968"/>
-          </a:xfrm>
-          <a:prstGeom prst="rect">
-            <a:avLst/>
-          </a:prstGeom>
-          <a:noFill/>
-        </p:spPr>
-        <p:txBody>
-          <a:bodyPr wrap="square" anchor="ctr"/>
-          <a:lstStyle/>
-          <a:p>
-            <a:r>
-              <a:rPr sz="1500" b="1" i="0">
-                <a:solidFill>
-                  <a:srgbClr val="095292"/>
-                </a:solidFill>
-                <a:latin typeface="Calibri"/>
-              </a:rPr>
-              <a:t>Pega y renderiza en la plataforma del curso</a:t>
-            </a:r>
-          </a:p>
-          <a:p>
-            <a:pPr>
-              <a:spcBef>
-                <a:spcPts val="200"/>
-              </a:spcBef>
-            </a:pPr>
-            <a:r>
-              <a:rPr sz="1300" b="0" i="0">
-                <a:solidFill>
-                  <a:srgbClr val="333333"/>
-                </a:solidFill>
-                <a:latin typeface="Calibri"/>
-              </a:rPr>
-              <a:t>Pega ese codigo en la caja de texto de la pregunta y mira como lo dibuja la plataforma. Si no renderiza, corrige ahi mismo: lo que se califica es el diagrama renderizado dentro de la plataforma del curso.</a:t>
-            </a:r>
-          </a:p>
-        </p:txBody>
-      </p:sp>
-      <p:sp>
-        <p:nvSpPr>
-          <p:cNvPr id="18" name="Rounded Rectangle 17"/>
-          <p:cNvSpPr/>
-          <p:nvPr/>
-        </p:nvSpPr>
-        <p:spPr>
-          <a:xfrm>
-            <a:off x="457200" y="5088636"/>
-            <a:ext cx="11277295" cy="1051560"/>
-          </a:xfrm>
-          <a:prstGeom prst="roundRect">
-            <a:avLst>
-              <a:gd name="adj" fmla="val 12000"/>
-            </a:avLst>
-          </a:prstGeom>
-          <a:solidFill>
-            <a:srgbClr val="E8F4FA"/>
-          </a:solidFill>
-          <a:ln>
-            <a:noFill/>
-          </a:ln>
-        </p:spPr>
-        <p:style>
-          <a:lnRef idx="1">
-            <a:schemeClr val="accent1"/>
-          </a:lnRef>
-          <a:fillRef idx="3">
-            <a:schemeClr val="accent1"/>
-          </a:fillRef>
-          <a:effectRef idx="2">
-            <a:schemeClr val="accent1"/>
-          </a:effectRef>
-          <a:fontRef idx="minor">
-            <a:schemeClr val="lt1"/>
-          </a:fontRef>
-        </p:style>
-        <p:txBody>
-          <a:bodyPr rtlCol="0" anchor="ctr"/>
-          <a:lstStyle/>
-          <a:p>
-            <a:pPr algn="ctr"/>
-          </a:p>
-        </p:txBody>
-      </p:sp>
-      <p:sp>
-        <p:nvSpPr>
-          <p:cNvPr id="19" name="Rounded Rectangle 18"/>
-          <p:cNvSpPr/>
-          <p:nvPr/>
-        </p:nvSpPr>
-        <p:spPr>
-          <a:xfrm>
-            <a:off x="594360" y="5394960"/>
-            <a:ext cx="438912" cy="438912"/>
-          </a:xfrm>
-          <a:prstGeom prst="roundRect">
-            <a:avLst>
-              <a:gd name="adj" fmla="val 12000"/>
-            </a:avLst>
-          </a:prstGeom>
-          <a:solidFill>
-            <a:srgbClr val="095292"/>
-          </a:solidFill>
-          <a:ln>
-            <a:noFill/>
-          </a:ln>
-        </p:spPr>
-        <p:style>
-          <a:lnRef idx="1">
-            <a:schemeClr val="accent1"/>
-          </a:lnRef>
-          <a:fillRef idx="3">
-            <a:schemeClr val="accent1"/>
-          </a:fillRef>
-          <a:effectRef idx="2">
-            <a:schemeClr val="accent1"/>
-          </a:effectRef>
-          <a:fontRef idx="minor">
-            <a:schemeClr val="lt1"/>
-          </a:fontRef>
-        </p:style>
-        <p:txBody>
-          <a:bodyPr rtlCol="0" anchor="ctr"/>
-          <a:lstStyle/>
-          <a:p>
-            <a:pPr algn="ctr"/>
-          </a:p>
-        </p:txBody>
-      </p:sp>
-      <p:sp>
-        <p:nvSpPr>
-          <p:cNvPr id="20" name="TextBox 19"/>
-          <p:cNvSpPr txBox="1"/>
-          <p:nvPr/>
-        </p:nvSpPr>
-        <p:spPr>
-          <a:xfrm>
-            <a:off x="594360" y="5394960"/>
-            <a:ext cx="438912" cy="438912"/>
-          </a:xfrm>
-          <a:prstGeom prst="rect">
-            <a:avLst/>
-          </a:prstGeom>
-          <a:noFill/>
-        </p:spPr>
-        <p:txBody>
-          <a:bodyPr wrap="square" anchor="ctr"/>
-          <a:lstStyle/>
-          <a:p>
-            <a:pPr algn="ctr"/>
-            <a:r>
-              <a:rPr sz="1600" b="1" i="0">
-                <a:solidFill>
-                  <a:srgbClr val="FFFFFF"/>
-                </a:solidFill>
-                <a:latin typeface="Calibri"/>
-              </a:rPr>
-              <a:t>4</a:t>
-            </a:r>
-          </a:p>
-        </p:txBody>
-      </p:sp>
-      <p:sp>
-        <p:nvSpPr>
-          <p:cNvPr id="21" name="TextBox 20"/>
-          <p:cNvSpPr txBox="1"/>
-          <p:nvPr/>
-        </p:nvSpPr>
-        <p:spPr>
-          <a:xfrm>
-            <a:off x="1188720" y="5180076"/>
-            <a:ext cx="10271455" cy="886968"/>
-          </a:xfrm>
-          <a:prstGeom prst="rect">
-            <a:avLst/>
-          </a:prstGeom>
-          <a:noFill/>
-        </p:spPr>
-        <p:txBody>
-          <a:bodyPr wrap="square" anchor="ctr"/>
-          <a:lstStyle/>
-          <a:p>
-            <a:r>
-              <a:rPr sz="1500" b="1" i="0">
-                <a:solidFill>
-                  <a:srgbClr val="095292"/>
-                </a:solidFill>
-                <a:latin typeface="Calibri"/>
-              </a:rPr>
-              <a:t>Guarda el PNG para tu PI</a:t>
-            </a:r>
-          </a:p>
-          <a:p>
-            <a:pPr>
-              <a:spcBef>
-                <a:spcPts val="200"/>
-              </a:spcBef>
-            </a:pPr>
-            <a:r>
-              <a:rPr sz="1300" b="0" i="0">
-                <a:solidFill>
-                  <a:srgbClr val="333333"/>
-                </a:solidFill>
-                <a:latin typeface="Calibri"/>
-              </a:rPr>
-              <a:t>Exporta tambien la imagen a la carpeta de tu Proyecto Integrador. Esa copia es para tu informe; no reemplaza la respuesta en la plataforma.</a:t>
-            </a:r>
-          </a:p>
-        </p:txBody>
-      </p:sp>
-      <p:sp>
-        <p:nvSpPr>
-          <p:cNvPr id="22" name="TextBox 21"/>
+            <a:r>
+              <a:rPr sz="1200" b="0" i="1">
+                <a:solidFill>
+                  <a:srgbClr val="666666"/>
+                </a:solidFill>
+                <a:latin typeface="Calibri"/>
+              </a:rPr>
+              <a:t>La base va como «ContainerDb» y cada «Rel» lleva protocolo Y formato. Los externos, FUERA del «System_Boundary».</a:t>
+            </a:r>
+          </a:p>
+        </p:txBody>
+      </p:sp>
+      <p:sp>
+        <p:nvSpPr>
+          <p:cNvPr id="10" name="TextBox 9"/>
           <p:cNvSpPr txBox="1"/>
           <p:nvPr/>
         </p:nvSpPr>
@@ -14646,7 +13846,7 @@
         <p:spPr>
           <a:xfrm>
             <a:off x="0" y="0"/>
-            <a:ext cx="12191695" cy="960120"/>
+            <a:ext cx="12191695" cy="1170432"/>
           </a:xfrm>
           <a:prstGeom prst="rect">
             <a:avLst/>
@@ -14688,7 +13888,7 @@
         </p:nvSpPr>
         <p:spPr>
           <a:xfrm>
-            <a:off x="0" y="960120"/>
+            <a:off x="0" y="1170432"/>
             <a:ext cx="12191695" cy="41148"/>
           </a:xfrm>
           <a:prstGeom prst="rect">
@@ -14732,7 +13932,7 @@
         <p:spPr>
           <a:xfrm>
             <a:off x="457200" y="164592"/>
-            <a:ext cx="11277295" cy="502920"/>
+            <a:ext cx="11277295" cy="384048"/>
           </a:xfrm>
           <a:prstGeom prst="rect">
             <a:avLst/>
@@ -14752,7 +13952,7 @@
                 </a:solidFill>
                 <a:latin typeface="Calibri"/>
               </a:rPr>
-              <a:t>PI CloudLite — entregable de hoy</a:t>
+              <a:t>Herramientas de hoy</a:t>
             </a:r>
           </a:p>
         </p:txBody>
@@ -14765,8 +13965,8 @@
         </p:nvSpPr>
         <p:spPr>
           <a:xfrm>
-            <a:off x="457200" y="1170432"/>
-            <a:ext cx="11277295" cy="5230368"/>
+            <a:off x="457200" y="566928"/>
+            <a:ext cx="11277295" cy="411480"/>
           </a:xfrm>
           <a:prstGeom prst="rect">
             <a:avLst/>
@@ -14779,119 +13979,837 @@
           </a:bodyPr>
           <a:lstStyle/>
           <a:p>
-            <a:pPr>
-              <a:spcAft>
-                <a:spcPts val="800"/>
-              </a:spcAft>
-            </a:pPr>
-            <a:r>
-              <a:rPr sz="2000" b="0" i="0">
-                <a:solidFill>
-                  <a:srgbClr val="333333"/>
-                </a:solidFill>
-                <a:latin typeface="Calibri"/>
-              </a:rPr>
-              <a:t>–   </a:t>
-            </a:r>
-            <a:r>
-              <a:rPr sz="2000" b="1" i="0">
-                <a:solidFill>
-                  <a:srgbClr val="333333"/>
-                </a:solidFill>
-                <a:latin typeface="Calibri"/>
-              </a:rPr>
-              <a:t>Entregable:</a:t>
-            </a:r>
-            <a:r>
-              <a:rPr sz="2000" b="0" i="0">
-                <a:solidFill>
-                  <a:srgbClr val="333333"/>
-                </a:solidFill>
-                <a:latin typeface="Calibri"/>
-              </a:rPr>
-              <a:t> Diagrama C4 Container en Mermaid + tabla de 3 contratos + 3 riesgos de distribución</a:t>
-            </a:r>
-          </a:p>
-          <a:p>
-            <a:pPr>
-              <a:spcAft>
-                <a:spcPts val="800"/>
-              </a:spcAft>
-            </a:pPr>
-            <a:r>
-              <a:rPr sz="2000" b="0" i="0">
-                <a:solidFill>
-                  <a:srgbClr val="333333"/>
-                </a:solidFill>
-                <a:latin typeface="Calibri"/>
-              </a:rPr>
-              <a:t>–   Herramienta: </a:t>
-            </a:r>
-            <a:r>
-              <a:rPr sz="2000" b="1" i="0">
-                <a:solidFill>
-                  <a:srgbClr val="333333"/>
-                </a:solidFill>
-                <a:latin typeface="Calibri"/>
-              </a:rPr>
-              <a:t>draw.io o Excalidraw para bocetar · Mermaid dentro de la plataforma del curso para entregar</a:t>
-            </a:r>
-          </a:p>
-          <a:p>
-            <a:pPr>
-              <a:spcAft>
-                <a:spcPts val="800"/>
-              </a:spcAft>
-            </a:pPr>
-            <a:r>
-              <a:rPr sz="2000" b="0" i="0">
-                <a:solidFill>
-                  <a:srgbClr val="333333"/>
-                </a:solidFill>
-                <a:latin typeface="Calibri"/>
-              </a:rPr>
-              <a:t>–   Todo lo que construyan hoy entra al </a:t>
-            </a:r>
-            <a:r>
-              <a:rPr sz="2000" b="1" i="0">
-                <a:solidFill>
-                  <a:srgbClr val="333333"/>
-                </a:solidFill>
-                <a:latin typeface="Calibri"/>
-              </a:rPr>
-              <a:t>informe/repo del PI</a:t>
-            </a:r>
-            <a:r>
-              <a:rPr sz="2000" b="0" i="0">
-                <a:solidFill>
-                  <a:srgbClr val="333333"/>
-                </a:solidFill>
-                <a:latin typeface="Calibri"/>
-              </a:rPr>
-              <a:t> (no es lab suelto).</a:t>
-            </a:r>
-          </a:p>
-          <a:p>
-            <a:pPr>
-              <a:spcAft>
-                <a:spcPts val="800"/>
-              </a:spcAft>
-            </a:pPr>
-            <a:r>
-              <a:rPr sz="2000" b="0" i="0">
-                <a:solidFill>
-                  <a:srgbClr val="333333"/>
-                </a:solidFill>
-                <a:latin typeface="Calibri"/>
-              </a:rPr>
-              <a:t>–   Individual por defecto · el docente puede autorizar equipos de 2–3; la entrega en la plataforma del curso siempre es individual.</a:t>
-            </a:r>
-          </a:p>
-        </p:txBody>
-      </p:sp>
-      <p:sp>
-        <p:nvSpPr>
-          <p:cNvPr id="6" name="TextBox 5"/>
+            <a:r>
+              <a:rPr sz="1400" b="0" i="0">
+                <a:solidFill>
+                  <a:srgbClr val="B8D8EE"/>
+                </a:solidFill>
+                <a:latin typeface="Calibri"/>
+              </a:rPr>
+              <a:t>Gratis · navegador o free tier · sin cuenta de pago</a:t>
+            </a:r>
+          </a:p>
+        </p:txBody>
+      </p:sp>
+      <p:sp>
+        <p:nvSpPr>
+          <p:cNvPr id="6" name="Rounded Rectangle 5"/>
+          <p:cNvSpPr/>
+          <p:nvPr/>
+        </p:nvSpPr>
+        <p:spPr>
+          <a:xfrm>
+            <a:off x="457200" y="1591056"/>
+            <a:ext cx="3624986" cy="2299716"/>
+          </a:xfrm>
+          <a:prstGeom prst="roundRect">
+            <a:avLst>
+              <a:gd name="adj" fmla="val 12000"/>
+            </a:avLst>
+          </a:prstGeom>
+          <a:solidFill>
+            <a:srgbClr val="F2F2F2"/>
+          </a:solidFill>
+          <a:ln>
+            <a:noFill/>
+          </a:ln>
+        </p:spPr>
+        <p:style>
+          <a:lnRef idx="1">
+            <a:schemeClr val="accent1"/>
+          </a:lnRef>
+          <a:fillRef idx="3">
+            <a:schemeClr val="accent1"/>
+          </a:fillRef>
+          <a:effectRef idx="2">
+            <a:schemeClr val="accent1"/>
+          </a:effectRef>
+          <a:fontRef idx="minor">
+            <a:schemeClr val="lt1"/>
+          </a:fontRef>
+        </p:style>
+        <p:txBody>
+          <a:bodyPr rtlCol="0" anchor="ctr"/>
+          <a:lstStyle/>
+          <a:p>
+            <a:pPr algn="ctr"/>
+          </a:p>
+        </p:txBody>
+      </p:sp>
+      <p:sp>
+        <p:nvSpPr>
+          <p:cNvPr id="7" name="Rectangle 6"/>
+          <p:cNvSpPr/>
+          <p:nvPr/>
+        </p:nvSpPr>
+        <p:spPr>
+          <a:xfrm>
+            <a:off x="457200" y="1591056"/>
+            <a:ext cx="3624986" cy="64008"/>
+          </a:xfrm>
+          <a:prstGeom prst="rect">
+            <a:avLst/>
+          </a:prstGeom>
+          <a:solidFill>
+            <a:srgbClr val="095292"/>
+          </a:solidFill>
+          <a:ln>
+            <a:noFill/>
+          </a:ln>
+        </p:spPr>
+        <p:style>
+          <a:lnRef idx="1">
+            <a:schemeClr val="accent1"/>
+          </a:lnRef>
+          <a:fillRef idx="3">
+            <a:schemeClr val="accent1"/>
+          </a:fillRef>
+          <a:effectRef idx="2">
+            <a:schemeClr val="accent1"/>
+          </a:effectRef>
+          <a:fontRef idx="minor">
+            <a:schemeClr val="lt1"/>
+          </a:fontRef>
+        </p:style>
+        <p:txBody>
+          <a:bodyPr rtlCol="0" anchor="ctr"/>
+          <a:lstStyle/>
+          <a:p>
+            <a:pPr algn="ctr"/>
+          </a:p>
+        </p:txBody>
+      </p:sp>
+      <p:sp>
+        <p:nvSpPr>
+          <p:cNvPr id="8" name="Rectangle 7"/>
+          <p:cNvSpPr/>
+          <p:nvPr/>
+        </p:nvSpPr>
+        <p:spPr>
+          <a:xfrm>
+            <a:off x="457200" y="1655064"/>
+            <a:ext cx="3624986" cy="27432"/>
+          </a:xfrm>
+          <a:prstGeom prst="rect">
+            <a:avLst/>
+          </a:prstGeom>
+          <a:solidFill>
+            <a:srgbClr val="FFD000"/>
+          </a:solidFill>
+          <a:ln>
+            <a:noFill/>
+          </a:ln>
+        </p:spPr>
+        <p:style>
+          <a:lnRef idx="1">
+            <a:schemeClr val="accent1"/>
+          </a:lnRef>
+          <a:fillRef idx="3">
+            <a:schemeClr val="accent1"/>
+          </a:fillRef>
+          <a:effectRef idx="2">
+            <a:schemeClr val="accent1"/>
+          </a:effectRef>
+          <a:fontRef idx="minor">
+            <a:schemeClr val="lt1"/>
+          </a:fontRef>
+        </p:style>
+        <p:txBody>
+          <a:bodyPr rtlCol="0" anchor="ctr"/>
+          <a:lstStyle/>
+          <a:p>
+            <a:pPr algn="ctr"/>
+          </a:p>
+        </p:txBody>
+      </p:sp>
+      <p:pic>
+        <p:nvPicPr>
+          <p:cNvPr id="9" name="Picture 8" descr="drawio.png"/>
+          <p:cNvPicPr>
+            <a:picLocks noChangeAspect="1"/>
+          </p:cNvPicPr>
+          <p:nvPr/>
+        </p:nvPicPr>
+        <p:blipFill>
+          <a:blip r:embed="rId2"/>
+          <a:stretch>
+            <a:fillRect/>
+          </a:stretch>
+        </p:blipFill>
+        <p:spPr>
+          <a:xfrm>
+            <a:off x="1659331" y="1847087"/>
+            <a:ext cx="1220724" cy="1220724"/>
+          </a:xfrm>
+          <a:prstGeom prst="rect">
+            <a:avLst/>
+          </a:prstGeom>
+        </p:spPr>
+      </p:pic>
+      <p:sp>
+        <p:nvSpPr>
+          <p:cNvPr id="10" name="TextBox 9"/>
+          <p:cNvSpPr txBox="1"/>
+          <p:nvPr/>
+        </p:nvSpPr>
+        <p:spPr>
+          <a:xfrm>
+            <a:off x="530352" y="3159251"/>
+            <a:ext cx="3478682" cy="621792"/>
+          </a:xfrm>
+          <a:prstGeom prst="rect">
+            <a:avLst/>
+          </a:prstGeom>
+          <a:noFill/>
+        </p:spPr>
+        <p:txBody>
+          <a:bodyPr wrap="square" anchor="t"/>
+          <a:lstStyle/>
+          <a:p>
+            <a:pPr algn="ctr"/>
+            <a:r>
+              <a:rPr sz="1300" b="1" i="0">
+                <a:solidFill>
+                  <a:srgbClr val="095292"/>
+                </a:solidFill>
+                <a:latin typeface="Calibri"/>
+              </a:rPr>
+              <a:t>draw.io</a:t>
+            </a:r>
+          </a:p>
+          <a:p>
+            <a:pPr algn="ctr">
+              <a:spcBef>
+                <a:spcPts val="200"/>
+              </a:spcBef>
+            </a:pPr>
+            <a:r>
+              <a:rPr sz="1000" b="0" i="0">
+                <a:solidFill>
+                  <a:srgbClr val="666666"/>
+                </a:solidFill>
+                <a:latin typeface="Calibri"/>
+              </a:rPr>
+              <a:t>Boceto del C4</a:t>
+            </a:r>
+          </a:p>
+        </p:txBody>
+      </p:sp>
+      <p:sp>
+        <p:nvSpPr>
+          <p:cNvPr id="11" name="Rounded Rectangle 10"/>
+          <p:cNvSpPr/>
+          <p:nvPr/>
+        </p:nvSpPr>
+        <p:spPr>
+          <a:xfrm>
+            <a:off x="4283354" y="1591056"/>
+            <a:ext cx="3624986" cy="2299716"/>
+          </a:xfrm>
+          <a:prstGeom prst="roundRect">
+            <a:avLst>
+              <a:gd name="adj" fmla="val 12000"/>
+            </a:avLst>
+          </a:prstGeom>
+          <a:solidFill>
+            <a:srgbClr val="F2F2F2"/>
+          </a:solidFill>
+          <a:ln>
+            <a:noFill/>
+          </a:ln>
+        </p:spPr>
+        <p:style>
+          <a:lnRef idx="1">
+            <a:schemeClr val="accent1"/>
+          </a:lnRef>
+          <a:fillRef idx="3">
+            <a:schemeClr val="accent1"/>
+          </a:fillRef>
+          <a:effectRef idx="2">
+            <a:schemeClr val="accent1"/>
+          </a:effectRef>
+          <a:fontRef idx="minor">
+            <a:schemeClr val="lt1"/>
+          </a:fontRef>
+        </p:style>
+        <p:txBody>
+          <a:bodyPr rtlCol="0" anchor="ctr"/>
+          <a:lstStyle/>
+          <a:p>
+            <a:pPr algn="ctr"/>
+          </a:p>
+        </p:txBody>
+      </p:sp>
+      <p:sp>
+        <p:nvSpPr>
+          <p:cNvPr id="12" name="Rectangle 11"/>
+          <p:cNvSpPr/>
+          <p:nvPr/>
+        </p:nvSpPr>
+        <p:spPr>
+          <a:xfrm>
+            <a:off x="4283354" y="1591056"/>
+            <a:ext cx="3624986" cy="64008"/>
+          </a:xfrm>
+          <a:prstGeom prst="rect">
+            <a:avLst/>
+          </a:prstGeom>
+          <a:solidFill>
+            <a:srgbClr val="095292"/>
+          </a:solidFill>
+          <a:ln>
+            <a:noFill/>
+          </a:ln>
+        </p:spPr>
+        <p:style>
+          <a:lnRef idx="1">
+            <a:schemeClr val="accent1"/>
+          </a:lnRef>
+          <a:fillRef idx="3">
+            <a:schemeClr val="accent1"/>
+          </a:fillRef>
+          <a:effectRef idx="2">
+            <a:schemeClr val="accent1"/>
+          </a:effectRef>
+          <a:fontRef idx="minor">
+            <a:schemeClr val="lt1"/>
+          </a:fontRef>
+        </p:style>
+        <p:txBody>
+          <a:bodyPr rtlCol="0" anchor="ctr"/>
+          <a:lstStyle/>
+          <a:p>
+            <a:pPr algn="ctr"/>
+          </a:p>
+        </p:txBody>
+      </p:sp>
+      <p:sp>
+        <p:nvSpPr>
+          <p:cNvPr id="13" name="Rectangle 12"/>
+          <p:cNvSpPr/>
+          <p:nvPr/>
+        </p:nvSpPr>
+        <p:spPr>
+          <a:xfrm>
+            <a:off x="4283354" y="1655064"/>
+            <a:ext cx="3624986" cy="27432"/>
+          </a:xfrm>
+          <a:prstGeom prst="rect">
+            <a:avLst/>
+          </a:prstGeom>
+          <a:solidFill>
+            <a:srgbClr val="FFD000"/>
+          </a:solidFill>
+          <a:ln>
+            <a:noFill/>
+          </a:ln>
+        </p:spPr>
+        <p:style>
+          <a:lnRef idx="1">
+            <a:schemeClr val="accent1"/>
+          </a:lnRef>
+          <a:fillRef idx="3">
+            <a:schemeClr val="accent1"/>
+          </a:fillRef>
+          <a:effectRef idx="2">
+            <a:schemeClr val="accent1"/>
+          </a:effectRef>
+          <a:fontRef idx="minor">
+            <a:schemeClr val="lt1"/>
+          </a:fontRef>
+        </p:style>
+        <p:txBody>
+          <a:bodyPr rtlCol="0" anchor="ctr"/>
+          <a:lstStyle/>
+          <a:p>
+            <a:pPr algn="ctr"/>
+          </a:p>
+        </p:txBody>
+      </p:sp>
+      <p:pic>
+        <p:nvPicPr>
+          <p:cNvPr id="14" name="Picture 13" descr="excalidraw.png"/>
+          <p:cNvPicPr>
+            <a:picLocks noChangeAspect="1"/>
+          </p:cNvPicPr>
+          <p:nvPr/>
+        </p:nvPicPr>
+        <p:blipFill>
+          <a:blip r:embed="rId3"/>
+          <a:stretch>
+            <a:fillRect/>
+          </a:stretch>
+        </p:blipFill>
+        <p:spPr>
+          <a:xfrm>
+            <a:off x="5485485" y="1847087"/>
+            <a:ext cx="1220724" cy="1220724"/>
+          </a:xfrm>
+          <a:prstGeom prst="rect">
+            <a:avLst/>
+          </a:prstGeom>
+        </p:spPr>
+      </p:pic>
+      <p:sp>
+        <p:nvSpPr>
+          <p:cNvPr id="15" name="TextBox 14"/>
+          <p:cNvSpPr txBox="1"/>
+          <p:nvPr/>
+        </p:nvSpPr>
+        <p:spPr>
+          <a:xfrm>
+            <a:off x="4356506" y="3159251"/>
+            <a:ext cx="3478682" cy="621792"/>
+          </a:xfrm>
+          <a:prstGeom prst="rect">
+            <a:avLst/>
+          </a:prstGeom>
+          <a:noFill/>
+        </p:spPr>
+        <p:txBody>
+          <a:bodyPr wrap="square" anchor="t"/>
+          <a:lstStyle/>
+          <a:p>
+            <a:pPr algn="ctr"/>
+            <a:r>
+              <a:rPr sz="1300" b="1" i="0">
+                <a:solidFill>
+                  <a:srgbClr val="095292"/>
+                </a:solidFill>
+                <a:latin typeface="Calibri"/>
+              </a:rPr>
+              <a:t>Excalidraw</a:t>
+            </a:r>
+          </a:p>
+          <a:p>
+            <a:pPr algn="ctr">
+              <a:spcBef>
+                <a:spcPts val="200"/>
+              </a:spcBef>
+            </a:pPr>
+            <a:r>
+              <a:rPr sz="1000" b="0" i="0">
+                <a:solidFill>
+                  <a:srgbClr val="666666"/>
+                </a:solidFill>
+                <a:latin typeface="Calibri"/>
+              </a:rPr>
+              <a:t>Boceto rapido</a:t>
+            </a:r>
+          </a:p>
+        </p:txBody>
+      </p:sp>
+      <p:sp>
+        <p:nvSpPr>
+          <p:cNvPr id="16" name="Rounded Rectangle 15"/>
+          <p:cNvSpPr/>
+          <p:nvPr/>
+        </p:nvSpPr>
+        <p:spPr>
+          <a:xfrm>
+            <a:off x="8109508" y="1591056"/>
+            <a:ext cx="3624986" cy="2299716"/>
+          </a:xfrm>
+          <a:prstGeom prst="roundRect">
+            <a:avLst>
+              <a:gd name="adj" fmla="val 12000"/>
+            </a:avLst>
+          </a:prstGeom>
+          <a:solidFill>
+            <a:srgbClr val="F2F2F2"/>
+          </a:solidFill>
+          <a:ln>
+            <a:noFill/>
+          </a:ln>
+        </p:spPr>
+        <p:style>
+          <a:lnRef idx="1">
+            <a:schemeClr val="accent1"/>
+          </a:lnRef>
+          <a:fillRef idx="3">
+            <a:schemeClr val="accent1"/>
+          </a:fillRef>
+          <a:effectRef idx="2">
+            <a:schemeClr val="accent1"/>
+          </a:effectRef>
+          <a:fontRef idx="minor">
+            <a:schemeClr val="lt1"/>
+          </a:fontRef>
+        </p:style>
+        <p:txBody>
+          <a:bodyPr rtlCol="0" anchor="ctr"/>
+          <a:lstStyle/>
+          <a:p>
+            <a:pPr algn="ctr"/>
+          </a:p>
+        </p:txBody>
+      </p:sp>
+      <p:sp>
+        <p:nvSpPr>
+          <p:cNvPr id="17" name="Rectangle 16"/>
+          <p:cNvSpPr/>
+          <p:nvPr/>
+        </p:nvSpPr>
+        <p:spPr>
+          <a:xfrm>
+            <a:off x="8109508" y="1591056"/>
+            <a:ext cx="3624986" cy="64008"/>
+          </a:xfrm>
+          <a:prstGeom prst="rect">
+            <a:avLst/>
+          </a:prstGeom>
+          <a:solidFill>
+            <a:srgbClr val="095292"/>
+          </a:solidFill>
+          <a:ln>
+            <a:noFill/>
+          </a:ln>
+        </p:spPr>
+        <p:style>
+          <a:lnRef idx="1">
+            <a:schemeClr val="accent1"/>
+          </a:lnRef>
+          <a:fillRef idx="3">
+            <a:schemeClr val="accent1"/>
+          </a:fillRef>
+          <a:effectRef idx="2">
+            <a:schemeClr val="accent1"/>
+          </a:effectRef>
+          <a:fontRef idx="minor">
+            <a:schemeClr val="lt1"/>
+          </a:fontRef>
+        </p:style>
+        <p:txBody>
+          <a:bodyPr rtlCol="0" anchor="ctr"/>
+          <a:lstStyle/>
+          <a:p>
+            <a:pPr algn="ctr"/>
+          </a:p>
+        </p:txBody>
+      </p:sp>
+      <p:sp>
+        <p:nvSpPr>
+          <p:cNvPr id="18" name="Rectangle 17"/>
+          <p:cNvSpPr/>
+          <p:nvPr/>
+        </p:nvSpPr>
+        <p:spPr>
+          <a:xfrm>
+            <a:off x="8109508" y="1655064"/>
+            <a:ext cx="3624986" cy="27432"/>
+          </a:xfrm>
+          <a:prstGeom prst="rect">
+            <a:avLst/>
+          </a:prstGeom>
+          <a:solidFill>
+            <a:srgbClr val="FFD000"/>
+          </a:solidFill>
+          <a:ln>
+            <a:noFill/>
+          </a:ln>
+        </p:spPr>
+        <p:style>
+          <a:lnRef idx="1">
+            <a:schemeClr val="accent1"/>
+          </a:lnRef>
+          <a:fillRef idx="3">
+            <a:schemeClr val="accent1"/>
+          </a:fillRef>
+          <a:effectRef idx="2">
+            <a:schemeClr val="accent1"/>
+          </a:effectRef>
+          <a:fontRef idx="minor">
+            <a:schemeClr val="lt1"/>
+          </a:fontRef>
+        </p:style>
+        <p:txBody>
+          <a:bodyPr rtlCol="0" anchor="ctr"/>
+          <a:lstStyle/>
+          <a:p>
+            <a:pPr algn="ctr"/>
+          </a:p>
+        </p:txBody>
+      </p:sp>
+      <p:pic>
+        <p:nvPicPr>
+          <p:cNvPr id="19" name="Picture 18" descr="mermaid.png"/>
+          <p:cNvPicPr>
+            <a:picLocks noChangeAspect="1"/>
+          </p:cNvPicPr>
+          <p:nvPr/>
+        </p:nvPicPr>
+        <p:blipFill>
+          <a:blip r:embed="rId4"/>
+          <a:stretch>
+            <a:fillRect/>
+          </a:stretch>
+        </p:blipFill>
+        <p:spPr>
+          <a:xfrm>
+            <a:off x="9311640" y="1847087"/>
+            <a:ext cx="1220724" cy="1220724"/>
+          </a:xfrm>
+          <a:prstGeom prst="rect">
+            <a:avLst/>
+          </a:prstGeom>
+        </p:spPr>
+      </p:pic>
+      <p:sp>
+        <p:nvSpPr>
+          <p:cNvPr id="20" name="TextBox 19"/>
+          <p:cNvSpPr txBox="1"/>
+          <p:nvPr/>
+        </p:nvSpPr>
+        <p:spPr>
+          <a:xfrm>
+            <a:off x="8182660" y="3159251"/>
+            <a:ext cx="3478682" cy="621792"/>
+          </a:xfrm>
+          <a:prstGeom prst="rect">
+            <a:avLst/>
+          </a:prstGeom>
+          <a:noFill/>
+        </p:spPr>
+        <p:txBody>
+          <a:bodyPr wrap="square" anchor="t"/>
+          <a:lstStyle/>
+          <a:p>
+            <a:pPr algn="ctr"/>
+            <a:r>
+              <a:rPr sz="1300" b="1" i="0">
+                <a:solidFill>
+                  <a:srgbClr val="095292"/>
+                </a:solidFill>
+                <a:latin typeface="Calibri"/>
+              </a:rPr>
+              <a:t>Mermaid</a:t>
+            </a:r>
+          </a:p>
+          <a:p>
+            <a:pPr algn="ctr">
+              <a:spcBef>
+                <a:spcPts val="200"/>
+              </a:spcBef>
+            </a:pPr>
+            <a:r>
+              <a:rPr sz="1000" b="0" i="0">
+                <a:solidFill>
+                  <a:srgbClr val="666666"/>
+                </a:solidFill>
+                <a:latin typeface="Calibri"/>
+              </a:rPr>
+              <a:t>Codigo del diagrama</a:t>
+            </a:r>
+          </a:p>
+        </p:txBody>
+      </p:sp>
+      <p:sp>
+        <p:nvSpPr>
+          <p:cNvPr id="21" name="Rounded Rectangle 20"/>
+          <p:cNvSpPr/>
+          <p:nvPr/>
+        </p:nvSpPr>
+        <p:spPr>
+          <a:xfrm>
+            <a:off x="4283354" y="4055364"/>
+            <a:ext cx="3624986" cy="2299716"/>
+          </a:xfrm>
+          <a:prstGeom prst="roundRect">
+            <a:avLst>
+              <a:gd name="adj" fmla="val 12000"/>
+            </a:avLst>
+          </a:prstGeom>
+          <a:solidFill>
+            <a:srgbClr val="F2F2F2"/>
+          </a:solidFill>
+          <a:ln>
+            <a:noFill/>
+          </a:ln>
+        </p:spPr>
+        <p:style>
+          <a:lnRef idx="1">
+            <a:schemeClr val="accent1"/>
+          </a:lnRef>
+          <a:fillRef idx="3">
+            <a:schemeClr val="accent1"/>
+          </a:fillRef>
+          <a:effectRef idx="2">
+            <a:schemeClr val="accent1"/>
+          </a:effectRef>
+          <a:fontRef idx="minor">
+            <a:schemeClr val="lt1"/>
+          </a:fontRef>
+        </p:style>
+        <p:txBody>
+          <a:bodyPr rtlCol="0" anchor="ctr"/>
+          <a:lstStyle/>
+          <a:p>
+            <a:pPr algn="ctr"/>
+          </a:p>
+        </p:txBody>
+      </p:sp>
+      <p:sp>
+        <p:nvSpPr>
+          <p:cNvPr id="22" name="Rectangle 21"/>
+          <p:cNvSpPr/>
+          <p:nvPr/>
+        </p:nvSpPr>
+        <p:spPr>
+          <a:xfrm>
+            <a:off x="4283354" y="4055364"/>
+            <a:ext cx="3624986" cy="64008"/>
+          </a:xfrm>
+          <a:prstGeom prst="rect">
+            <a:avLst/>
+          </a:prstGeom>
+          <a:solidFill>
+            <a:srgbClr val="095292"/>
+          </a:solidFill>
+          <a:ln>
+            <a:noFill/>
+          </a:ln>
+        </p:spPr>
+        <p:style>
+          <a:lnRef idx="1">
+            <a:schemeClr val="accent1"/>
+          </a:lnRef>
+          <a:fillRef idx="3">
+            <a:schemeClr val="accent1"/>
+          </a:fillRef>
+          <a:effectRef idx="2">
+            <a:schemeClr val="accent1"/>
+          </a:effectRef>
+          <a:fontRef idx="minor">
+            <a:schemeClr val="lt1"/>
+          </a:fontRef>
+        </p:style>
+        <p:txBody>
+          <a:bodyPr rtlCol="0" anchor="ctr"/>
+          <a:lstStyle/>
+          <a:p>
+            <a:pPr algn="ctr"/>
+          </a:p>
+        </p:txBody>
+      </p:sp>
+      <p:sp>
+        <p:nvSpPr>
+          <p:cNvPr id="23" name="Rectangle 22"/>
+          <p:cNvSpPr/>
+          <p:nvPr/>
+        </p:nvSpPr>
+        <p:spPr>
+          <a:xfrm>
+            <a:off x="4283354" y="4119372"/>
+            <a:ext cx="3624986" cy="27432"/>
+          </a:xfrm>
+          <a:prstGeom prst="rect">
+            <a:avLst/>
+          </a:prstGeom>
+          <a:solidFill>
+            <a:srgbClr val="FFD000"/>
+          </a:solidFill>
+          <a:ln>
+            <a:noFill/>
+          </a:ln>
+        </p:spPr>
+        <p:style>
+          <a:lnRef idx="1">
+            <a:schemeClr val="accent1"/>
+          </a:lnRef>
+          <a:fillRef idx="3">
+            <a:schemeClr val="accent1"/>
+          </a:fillRef>
+          <a:effectRef idx="2">
+            <a:schemeClr val="accent1"/>
+          </a:effectRef>
+          <a:fontRef idx="minor">
+            <a:schemeClr val="lt1"/>
+          </a:fontRef>
+        </p:style>
+        <p:txBody>
+          <a:bodyPr rtlCol="0" anchor="ctr"/>
+          <a:lstStyle/>
+          <a:p>
+            <a:pPr algn="ctr"/>
+          </a:p>
+        </p:txBody>
+      </p:sp>
+      <p:pic>
+        <p:nvPicPr>
+          <p:cNvPr id="24" name="Picture 23" descr="examlab.png"/>
+          <p:cNvPicPr>
+            <a:picLocks noChangeAspect="1"/>
+          </p:cNvPicPr>
+          <p:nvPr/>
+        </p:nvPicPr>
+        <p:blipFill>
+          <a:blip r:embed="rId5"/>
+          <a:stretch>
+            <a:fillRect/>
+          </a:stretch>
+        </p:blipFill>
+        <p:spPr>
+          <a:xfrm>
+            <a:off x="5485485" y="4311396"/>
+            <a:ext cx="1220724" cy="1220724"/>
+          </a:xfrm>
+          <a:prstGeom prst="rect">
+            <a:avLst/>
+          </a:prstGeom>
+        </p:spPr>
+      </p:pic>
+      <p:sp>
+        <p:nvSpPr>
+          <p:cNvPr id="25" name="TextBox 24"/>
+          <p:cNvSpPr txBox="1"/>
+          <p:nvPr/>
+        </p:nvSpPr>
+        <p:spPr>
+          <a:xfrm>
+            <a:off x="4356506" y="5623560"/>
+            <a:ext cx="3478682" cy="621792"/>
+          </a:xfrm>
+          <a:prstGeom prst="rect">
+            <a:avLst/>
+          </a:prstGeom>
+          <a:noFill/>
+        </p:spPr>
+        <p:txBody>
+          <a:bodyPr wrap="square" anchor="t"/>
+          <a:lstStyle/>
+          <a:p>
+            <a:pPr algn="ctr"/>
+            <a:r>
+              <a:rPr sz="1300" b="1" i="0">
+                <a:solidFill>
+                  <a:srgbClr val="095292"/>
+                </a:solidFill>
+                <a:latin typeface="Calibri"/>
+              </a:rPr>
+              <a:t>la plataforma del curso</a:t>
+            </a:r>
+          </a:p>
+          <a:p>
+            <a:pPr algn="ctr">
+              <a:spcBef>
+                <a:spcPts val="200"/>
+              </a:spcBef>
+            </a:pPr>
+            <a:r>
+              <a:rPr sz="1000" b="0" i="0">
+                <a:solidFill>
+                  <a:srgbClr val="666666"/>
+                </a:solidFill>
+                <a:latin typeface="Calibri"/>
+              </a:rPr>
+              <a:t>Donde se entrega</a:t>
+            </a:r>
+          </a:p>
+        </p:txBody>
+      </p:sp>
+      <p:sp>
+        <p:nvSpPr>
+          <p:cNvPr id="26" name="TextBox 25"/>
           <p:cNvSpPr txBox="1"/>
           <p:nvPr/>
         </p:nvSpPr>
@@ -15331,7 +15249,7 @@
         <p:spPr>
           <a:xfrm>
             <a:off x="0" y="0"/>
-            <a:ext cx="12191695" cy="960120"/>
+            <a:ext cx="12191695" cy="1170432"/>
           </a:xfrm>
           <a:prstGeom prst="rect">
             <a:avLst/>
@@ -15373,7 +15291,7 @@
         </p:nvSpPr>
         <p:spPr>
           <a:xfrm>
-            <a:off x="0" y="960120"/>
+            <a:off x="0" y="1170432"/>
             <a:ext cx="12191695" cy="41148"/>
           </a:xfrm>
           <a:prstGeom prst="rect">
@@ -15417,7 +15335,7 @@
         <p:spPr>
           <a:xfrm>
             <a:off x="457200" y="164592"/>
-            <a:ext cx="11277295" cy="502920"/>
+            <a:ext cx="11277295" cy="384048"/>
           </a:xfrm>
           <a:prstGeom prst="rect">
             <a:avLst/>
@@ -15437,7 +15355,7 @@
                 </a:solidFill>
                 <a:latin typeface="Calibri"/>
               </a:rPr>
-              <a:t>Manos a la obra (paso a paso)</a:t>
+              <a:t>Del boceto a la plataforma del curso (diagrama)</a:t>
             </a:r>
           </a:p>
         </p:txBody>
@@ -15450,8 +15368,8 @@
         </p:nvSpPr>
         <p:spPr>
           <a:xfrm>
-            <a:off x="457200" y="1170432"/>
-            <a:ext cx="11277295" cy="5230368"/>
+            <a:off x="457200" y="566928"/>
+            <a:ext cx="11277295" cy="411480"/>
           </a:xfrm>
           <a:prstGeom prst="rect">
             <a:avLst/>
@@ -15464,137 +15382,705 @@
           </a:bodyPr>
           <a:lstStyle/>
           <a:p>
-            <a:pPr>
-              <a:spcAft>
-                <a:spcPts val="800"/>
-              </a:spcAft>
-            </a:pPr>
-            <a:r>
-              <a:rPr sz="2000" b="1" i="0">
-                <a:solidFill>
-                  <a:srgbClr val="333333"/>
-                </a:solidFill>
-                <a:latin typeface="Calibri"/>
-              </a:rPr>
-              <a:t>1.</a:t>
-            </a:r>
-            <a:r>
-              <a:rPr sz="2000" b="0" i="0">
-                <a:solidFill>
-                  <a:srgbClr val="333333"/>
-                </a:solidFill>
-                <a:latin typeface="Calibri"/>
-              </a:rPr>
-              <a:t> Paso 1: decida en la pregunta 12 si su CloudLite es un monolito modular o microservicios, con los dos criterios aplicados a su caso (tamano del equipo con numero y plazo, y que partes cambian juntas) y lo que gana y pierde; verifique que no escribio «un poco de los dos», porque eso vale cero.</a:t>
-            </a:r>
-          </a:p>
-          <a:p>
-            <a:pPr>
-              <a:spcAft>
-                <a:spcPts val="800"/>
-              </a:spcAft>
-            </a:pPr>
-            <a:r>
-              <a:rPr sz="2000" b="0" i="0">
-                <a:solidFill>
-                  <a:srgbClr val="333333"/>
-                </a:solidFill>
-                <a:latin typeface="Calibri"/>
-              </a:rPr>
-              <a:t>–   </a:t>
-            </a:r>
-            <a:r>
-              <a:rPr sz="2000" b="1" i="0">
-                <a:solidFill>
-                  <a:srgbClr val="333333"/>
-                </a:solidFill>
-                <a:latin typeface="Calibri"/>
-              </a:rPr>
-              <a:t>2.</a:t>
-            </a:r>
-            <a:r>
-              <a:rPr sz="2000" b="0" i="0">
-                <a:solidFill>
-                  <a:srgbClr val="333333"/>
-                </a:solidFill>
-                <a:latin typeface="Calibri"/>
-              </a:rPr>
-              <a:t> Paso 2: modele en la pregunta 13 el C4 Container partiendo del C4 Context de la pregunta 3, con entre 2 y 5 contenedores coherentes con la decision anterior, los almacenes de datos como ContainerDb y toda flecha con protocolo y formato; verifique que los nombres de sistema, actores y sistemas externos sean identicos a los del Context.</a:t>
-            </a:r>
-          </a:p>
-          <a:p>
-            <a:pPr>
-              <a:spcAft>
-                <a:spcPts val="800"/>
-              </a:spcAft>
-            </a:pPr>
-            <a:r>
-              <a:rPr sz="2000" b="0" i="0">
-                <a:solidFill>
-                  <a:srgbClr val="333333"/>
-                </a:solidFill>
-                <a:latin typeface="Calibri"/>
-              </a:rPr>
-              <a:t>–   </a:t>
-            </a:r>
-            <a:r>
-              <a:rPr sz="2000" b="1" i="0">
-                <a:solidFill>
-                  <a:srgbClr val="333333"/>
-                </a:solidFill>
-                <a:latin typeface="Calibri"/>
-              </a:rPr>
-              <a:t>3.</a:t>
-            </a:r>
-            <a:r>
-              <a:rPr sz="2000" b="0" i="0">
-                <a:solidFill>
-                  <a:srgbClr val="333333"/>
-                </a:solidFill>
-                <a:latin typeface="Calibri"/>
-              </a:rPr>
-              <a:t> Paso 3: liste en la pregunta 14 los 3 contratos con quien llama a quien usando los nombres exactos del diagrama, el verbo y la ruta (o el evento) y el error de negocio con su codigo y su significado en el dominio; verifique que al menos uno sea un 409 de conflicto y que ninguno diga «500 error del servidor».</a:t>
-            </a:r>
-          </a:p>
-          <a:p>
-            <a:pPr>
-              <a:spcAft>
-                <a:spcPts val="800"/>
-              </a:spcAft>
-            </a:pPr>
-            <a:r>
-              <a:rPr sz="2000" b="0" i="0">
-                <a:solidFill>
-                  <a:srgbClr val="333333"/>
-                </a:solidFill>
-                <a:latin typeface="Calibri"/>
-              </a:rPr>
-              <a:t>–   </a:t>
-            </a:r>
-            <a:r>
-              <a:rPr sz="2000" b="1" i="0">
-                <a:solidFill>
-                  <a:srgbClr val="333333"/>
-                </a:solidFill>
-                <a:latin typeface="Calibri"/>
-              </a:rPr>
-              <a:t>4.</a:t>
-            </a:r>
-            <a:r>
-              <a:rPr sz="2000" b="0" i="0">
-                <a:solidFill>
-                  <a:srgbClr val="333333"/>
-                </a:solidFill>
-                <a:latin typeface="Calibri"/>
-              </a:rPr>
-              <a:t> Paso 4: analice en la pregunta 15 los tres riesgos de distribucion nombrando una caja concreta que se cae, contando los saltos de red de una operacion de punta a punta y nombrando un dato expuesto a inconsistencia; con esto la actividad del Corte 1 queda completa y se entrega en la plataforma del curso antes del en la fecha que indique el docentede esta semana.</a:t>
-            </a:r>
-          </a:p>
-        </p:txBody>
-      </p:sp>
-      <p:sp>
-        <p:nvSpPr>
-          <p:cNvPr id="6" name="TextBox 5"/>
+            <a:r>
+              <a:rPr sz="1400" b="0" i="0">
+                <a:solidFill>
+                  <a:srgbClr val="B8D8EE"/>
+                </a:solidFill>
+                <a:latin typeface="Calibri"/>
+              </a:rPr>
+              <a:t>El diagrama se entrega como código Mermaid dentro de la plataforma del curso, no como imagen</a:t>
+            </a:r>
+          </a:p>
+        </p:txBody>
+      </p:sp>
+      <p:sp>
+        <p:nvSpPr>
+          <p:cNvPr id="6" name="Rounded Rectangle 5"/>
+          <p:cNvSpPr/>
+          <p:nvPr/>
+        </p:nvSpPr>
+        <p:spPr>
+          <a:xfrm>
+            <a:off x="457200" y="1659636"/>
+            <a:ext cx="11277295" cy="1051560"/>
+          </a:xfrm>
+          <a:prstGeom prst="roundRect">
+            <a:avLst>
+              <a:gd name="adj" fmla="val 12000"/>
+            </a:avLst>
+          </a:prstGeom>
+          <a:solidFill>
+            <a:srgbClr val="F2F2F2"/>
+          </a:solidFill>
+          <a:ln>
+            <a:noFill/>
+          </a:ln>
+        </p:spPr>
+        <p:style>
+          <a:lnRef idx="1">
+            <a:schemeClr val="accent1"/>
+          </a:lnRef>
+          <a:fillRef idx="3">
+            <a:schemeClr val="accent1"/>
+          </a:fillRef>
+          <a:effectRef idx="2">
+            <a:schemeClr val="accent1"/>
+          </a:effectRef>
+          <a:fontRef idx="minor">
+            <a:schemeClr val="lt1"/>
+          </a:fontRef>
+        </p:style>
+        <p:txBody>
+          <a:bodyPr rtlCol="0" anchor="ctr"/>
+          <a:lstStyle/>
+          <a:p>
+            <a:pPr algn="ctr"/>
+          </a:p>
+        </p:txBody>
+      </p:sp>
+      <p:sp>
+        <p:nvSpPr>
+          <p:cNvPr id="7" name="Rounded Rectangle 6"/>
+          <p:cNvSpPr/>
+          <p:nvPr/>
+        </p:nvSpPr>
+        <p:spPr>
+          <a:xfrm>
+            <a:off x="594360" y="1965960"/>
+            <a:ext cx="438912" cy="438912"/>
+          </a:xfrm>
+          <a:prstGeom prst="roundRect">
+            <a:avLst>
+              <a:gd name="adj" fmla="val 12000"/>
+            </a:avLst>
+          </a:prstGeom>
+          <a:solidFill>
+            <a:srgbClr val="095292"/>
+          </a:solidFill>
+          <a:ln>
+            <a:noFill/>
+          </a:ln>
+        </p:spPr>
+        <p:style>
+          <a:lnRef idx="1">
+            <a:schemeClr val="accent1"/>
+          </a:lnRef>
+          <a:fillRef idx="3">
+            <a:schemeClr val="accent1"/>
+          </a:fillRef>
+          <a:effectRef idx="2">
+            <a:schemeClr val="accent1"/>
+          </a:effectRef>
+          <a:fontRef idx="minor">
+            <a:schemeClr val="lt1"/>
+          </a:fontRef>
+        </p:style>
+        <p:txBody>
+          <a:bodyPr rtlCol="0" anchor="ctr"/>
+          <a:lstStyle/>
+          <a:p>
+            <a:pPr algn="ctr"/>
+          </a:p>
+        </p:txBody>
+      </p:sp>
+      <p:sp>
+        <p:nvSpPr>
+          <p:cNvPr id="8" name="TextBox 7"/>
+          <p:cNvSpPr txBox="1"/>
+          <p:nvPr/>
+        </p:nvSpPr>
+        <p:spPr>
+          <a:xfrm>
+            <a:off x="594360" y="1965960"/>
+            <a:ext cx="438912" cy="438912"/>
+          </a:xfrm>
+          <a:prstGeom prst="rect">
+            <a:avLst/>
+          </a:prstGeom>
+          <a:noFill/>
+        </p:spPr>
+        <p:txBody>
+          <a:bodyPr wrap="square" anchor="ctr"/>
+          <a:lstStyle/>
+          <a:p>
+            <a:pPr algn="ctr"/>
+            <a:r>
+              <a:rPr sz="1600" b="1" i="0">
+                <a:solidFill>
+                  <a:srgbClr val="FFFFFF"/>
+                </a:solidFill>
+                <a:latin typeface="Calibri"/>
+              </a:rPr>
+              <a:t>1</a:t>
+            </a:r>
+          </a:p>
+        </p:txBody>
+      </p:sp>
+      <p:sp>
+        <p:nvSpPr>
+          <p:cNvPr id="9" name="TextBox 8"/>
+          <p:cNvSpPr txBox="1"/>
+          <p:nvPr/>
+        </p:nvSpPr>
+        <p:spPr>
+          <a:xfrm>
+            <a:off x="1188720" y="1751076"/>
+            <a:ext cx="10271455" cy="886968"/>
+          </a:xfrm>
+          <a:prstGeom prst="rect">
+            <a:avLst/>
+          </a:prstGeom>
+          <a:noFill/>
+        </p:spPr>
+        <p:txBody>
+          <a:bodyPr wrap="square" anchor="ctr"/>
+          <a:lstStyle/>
+          <a:p>
+            <a:r>
+              <a:rPr sz="1500" b="1" i="0">
+                <a:solidFill>
+                  <a:srgbClr val="095292"/>
+                </a:solidFill>
+                <a:latin typeface="Calibri"/>
+              </a:rPr>
+              <a:t>Disena visual</a:t>
+            </a:r>
+          </a:p>
+          <a:p>
+            <a:pPr>
+              <a:spcBef>
+                <a:spcPts val="200"/>
+              </a:spcBef>
+            </a:pPr>
+            <a:r>
+              <a:rPr sz="1300" b="0" i="0">
+                <a:solidFill>
+                  <a:srgbClr val="333333"/>
+                </a:solidFill>
+                <a:latin typeface="Calibri"/>
+              </a:rPr>
+              <a:t>Dibuja el diagrama como quieras en Excalidraw o draw.io: es mas rapido arrastrar cajas que escribir codigo, y ahi es donde piensas el modelo.</a:t>
+            </a:r>
+          </a:p>
+        </p:txBody>
+      </p:sp>
+      <p:sp>
+        <p:nvSpPr>
+          <p:cNvPr id="10" name="Rounded Rectangle 9"/>
+          <p:cNvSpPr/>
+          <p:nvPr/>
+        </p:nvSpPr>
+        <p:spPr>
+          <a:xfrm>
+            <a:off x="457200" y="2802636"/>
+            <a:ext cx="11277295" cy="1051560"/>
+          </a:xfrm>
+          <a:prstGeom prst="roundRect">
+            <a:avLst>
+              <a:gd name="adj" fmla="val 12000"/>
+            </a:avLst>
+          </a:prstGeom>
+          <a:solidFill>
+            <a:srgbClr val="E8F4FA"/>
+          </a:solidFill>
+          <a:ln>
+            <a:noFill/>
+          </a:ln>
+        </p:spPr>
+        <p:style>
+          <a:lnRef idx="1">
+            <a:schemeClr val="accent1"/>
+          </a:lnRef>
+          <a:fillRef idx="3">
+            <a:schemeClr val="accent1"/>
+          </a:fillRef>
+          <a:effectRef idx="2">
+            <a:schemeClr val="accent1"/>
+          </a:effectRef>
+          <a:fontRef idx="minor">
+            <a:schemeClr val="lt1"/>
+          </a:fontRef>
+        </p:style>
+        <p:txBody>
+          <a:bodyPr rtlCol="0" anchor="ctr"/>
+          <a:lstStyle/>
+          <a:p>
+            <a:pPr algn="ctr"/>
+          </a:p>
+        </p:txBody>
+      </p:sp>
+      <p:sp>
+        <p:nvSpPr>
+          <p:cNvPr id="11" name="Rounded Rectangle 10"/>
+          <p:cNvSpPr/>
+          <p:nvPr/>
+        </p:nvSpPr>
+        <p:spPr>
+          <a:xfrm>
+            <a:off x="594360" y="3108960"/>
+            <a:ext cx="438912" cy="438912"/>
+          </a:xfrm>
+          <a:prstGeom prst="roundRect">
+            <a:avLst>
+              <a:gd name="adj" fmla="val 12000"/>
+            </a:avLst>
+          </a:prstGeom>
+          <a:solidFill>
+            <a:srgbClr val="095292"/>
+          </a:solidFill>
+          <a:ln>
+            <a:noFill/>
+          </a:ln>
+        </p:spPr>
+        <p:style>
+          <a:lnRef idx="1">
+            <a:schemeClr val="accent1"/>
+          </a:lnRef>
+          <a:fillRef idx="3">
+            <a:schemeClr val="accent1"/>
+          </a:fillRef>
+          <a:effectRef idx="2">
+            <a:schemeClr val="accent1"/>
+          </a:effectRef>
+          <a:fontRef idx="minor">
+            <a:schemeClr val="lt1"/>
+          </a:fontRef>
+        </p:style>
+        <p:txBody>
+          <a:bodyPr rtlCol="0" anchor="ctr"/>
+          <a:lstStyle/>
+          <a:p>
+            <a:pPr algn="ctr"/>
+          </a:p>
+        </p:txBody>
+      </p:sp>
+      <p:sp>
+        <p:nvSpPr>
+          <p:cNvPr id="12" name="TextBox 11"/>
+          <p:cNvSpPr txBox="1"/>
+          <p:nvPr/>
+        </p:nvSpPr>
+        <p:spPr>
+          <a:xfrm>
+            <a:off x="594360" y="3108960"/>
+            <a:ext cx="438912" cy="438912"/>
+          </a:xfrm>
+          <a:prstGeom prst="rect">
+            <a:avLst/>
+          </a:prstGeom>
+          <a:noFill/>
+        </p:spPr>
+        <p:txBody>
+          <a:bodyPr wrap="square" anchor="ctr"/>
+          <a:lstStyle/>
+          <a:p>
+            <a:pPr algn="ctr"/>
+            <a:r>
+              <a:rPr sz="1600" b="1" i="0">
+                <a:solidFill>
+                  <a:srgbClr val="FFFFFF"/>
+                </a:solidFill>
+                <a:latin typeface="Calibri"/>
+              </a:rPr>
+              <a:t>2</a:t>
+            </a:r>
+          </a:p>
+        </p:txBody>
+      </p:sp>
+      <p:sp>
+        <p:nvSpPr>
+          <p:cNvPr id="13" name="TextBox 12"/>
+          <p:cNvSpPr txBox="1"/>
+          <p:nvPr/>
+        </p:nvSpPr>
+        <p:spPr>
+          <a:xfrm>
+            <a:off x="1188720" y="2894076"/>
+            <a:ext cx="10271455" cy="886968"/>
+          </a:xfrm>
+          <a:prstGeom prst="rect">
+            <a:avLst/>
+          </a:prstGeom>
+          <a:noFill/>
+        </p:spPr>
+        <p:txBody>
+          <a:bodyPr wrap="square" anchor="ctr"/>
+          <a:lstStyle/>
+          <a:p>
+            <a:r>
+              <a:rPr sz="1500" b="1" i="0">
+                <a:solidFill>
+                  <a:srgbClr val="095292"/>
+                </a:solidFill>
+                <a:latin typeface="Calibri"/>
+              </a:rPr>
+              <a:t>Traduce con IA</a:t>
+            </a:r>
+          </a:p>
+          <a:p>
+            <a:pPr>
+              <a:spcBef>
+                <a:spcPts val="200"/>
+              </a:spcBef>
+            </a:pPr>
+            <a:r>
+              <a:rPr sz="1300" b="0" i="0">
+                <a:solidFill>
+                  <a:srgbClr val="333333"/>
+                </a:solidFill>
+                <a:latin typeface="Calibri"/>
+              </a:rPr>
+              <a:t>Copia o describe tu boceto a una IA y pidele el codigo Mermaid: «convierte este diagrama a Mermaid usando C4Container». Revisa el resultado: la IA acierta la sintaxis, no tu modelo.</a:t>
+            </a:r>
+          </a:p>
+        </p:txBody>
+      </p:sp>
+      <p:sp>
+        <p:nvSpPr>
+          <p:cNvPr id="14" name="Rounded Rectangle 13"/>
+          <p:cNvSpPr/>
+          <p:nvPr/>
+        </p:nvSpPr>
+        <p:spPr>
+          <a:xfrm>
+            <a:off x="457200" y="3945636"/>
+            <a:ext cx="11277295" cy="1051560"/>
+          </a:xfrm>
+          <a:prstGeom prst="roundRect">
+            <a:avLst>
+              <a:gd name="adj" fmla="val 12000"/>
+            </a:avLst>
+          </a:prstGeom>
+          <a:solidFill>
+            <a:srgbClr val="F2F2F2"/>
+          </a:solidFill>
+          <a:ln>
+            <a:noFill/>
+          </a:ln>
+        </p:spPr>
+        <p:style>
+          <a:lnRef idx="1">
+            <a:schemeClr val="accent1"/>
+          </a:lnRef>
+          <a:fillRef idx="3">
+            <a:schemeClr val="accent1"/>
+          </a:fillRef>
+          <a:effectRef idx="2">
+            <a:schemeClr val="accent1"/>
+          </a:effectRef>
+          <a:fontRef idx="minor">
+            <a:schemeClr val="lt1"/>
+          </a:fontRef>
+        </p:style>
+        <p:txBody>
+          <a:bodyPr rtlCol="0" anchor="ctr"/>
+          <a:lstStyle/>
+          <a:p>
+            <a:pPr algn="ctr"/>
+          </a:p>
+        </p:txBody>
+      </p:sp>
+      <p:sp>
+        <p:nvSpPr>
+          <p:cNvPr id="15" name="Rounded Rectangle 14"/>
+          <p:cNvSpPr/>
+          <p:nvPr/>
+        </p:nvSpPr>
+        <p:spPr>
+          <a:xfrm>
+            <a:off x="594360" y="4251960"/>
+            <a:ext cx="438912" cy="438912"/>
+          </a:xfrm>
+          <a:prstGeom prst="roundRect">
+            <a:avLst>
+              <a:gd name="adj" fmla="val 12000"/>
+            </a:avLst>
+          </a:prstGeom>
+          <a:solidFill>
+            <a:srgbClr val="095292"/>
+          </a:solidFill>
+          <a:ln>
+            <a:noFill/>
+          </a:ln>
+        </p:spPr>
+        <p:style>
+          <a:lnRef idx="1">
+            <a:schemeClr val="accent1"/>
+          </a:lnRef>
+          <a:fillRef idx="3">
+            <a:schemeClr val="accent1"/>
+          </a:fillRef>
+          <a:effectRef idx="2">
+            <a:schemeClr val="accent1"/>
+          </a:effectRef>
+          <a:fontRef idx="minor">
+            <a:schemeClr val="lt1"/>
+          </a:fontRef>
+        </p:style>
+        <p:txBody>
+          <a:bodyPr rtlCol="0" anchor="ctr"/>
+          <a:lstStyle/>
+          <a:p>
+            <a:pPr algn="ctr"/>
+          </a:p>
+        </p:txBody>
+      </p:sp>
+      <p:sp>
+        <p:nvSpPr>
+          <p:cNvPr id="16" name="TextBox 15"/>
+          <p:cNvSpPr txBox="1"/>
+          <p:nvPr/>
+        </p:nvSpPr>
+        <p:spPr>
+          <a:xfrm>
+            <a:off x="594360" y="4251960"/>
+            <a:ext cx="438912" cy="438912"/>
+          </a:xfrm>
+          <a:prstGeom prst="rect">
+            <a:avLst/>
+          </a:prstGeom>
+          <a:noFill/>
+        </p:spPr>
+        <p:txBody>
+          <a:bodyPr wrap="square" anchor="ctr"/>
+          <a:lstStyle/>
+          <a:p>
+            <a:pPr algn="ctr"/>
+            <a:r>
+              <a:rPr sz="1600" b="1" i="0">
+                <a:solidFill>
+                  <a:srgbClr val="FFFFFF"/>
+                </a:solidFill>
+                <a:latin typeface="Calibri"/>
+              </a:rPr>
+              <a:t>3</a:t>
+            </a:r>
+          </a:p>
+        </p:txBody>
+      </p:sp>
+      <p:sp>
+        <p:nvSpPr>
+          <p:cNvPr id="17" name="TextBox 16"/>
+          <p:cNvSpPr txBox="1"/>
+          <p:nvPr/>
+        </p:nvSpPr>
+        <p:spPr>
+          <a:xfrm>
+            <a:off x="1188720" y="4037076"/>
+            <a:ext cx="10271455" cy="886968"/>
+          </a:xfrm>
+          <a:prstGeom prst="rect">
+            <a:avLst/>
+          </a:prstGeom>
+          <a:noFill/>
+        </p:spPr>
+        <p:txBody>
+          <a:bodyPr wrap="square" anchor="ctr"/>
+          <a:lstStyle/>
+          <a:p>
+            <a:r>
+              <a:rPr sz="1500" b="1" i="0">
+                <a:solidFill>
+                  <a:srgbClr val="095292"/>
+                </a:solidFill>
+                <a:latin typeface="Calibri"/>
+              </a:rPr>
+              <a:t>Pega y renderiza en la plataforma del curso</a:t>
+            </a:r>
+          </a:p>
+          <a:p>
+            <a:pPr>
+              <a:spcBef>
+                <a:spcPts val="200"/>
+              </a:spcBef>
+            </a:pPr>
+            <a:r>
+              <a:rPr sz="1300" b="0" i="0">
+                <a:solidFill>
+                  <a:srgbClr val="333333"/>
+                </a:solidFill>
+                <a:latin typeface="Calibri"/>
+              </a:rPr>
+              <a:t>Pega ese codigo en la caja de texto de la pregunta y mira como lo dibuja la plataforma. Si no renderiza, corrige ahi mismo: lo que se califica es el diagrama renderizado dentro de la plataforma del curso.</a:t>
+            </a:r>
+          </a:p>
+        </p:txBody>
+      </p:sp>
+      <p:sp>
+        <p:nvSpPr>
+          <p:cNvPr id="18" name="Rounded Rectangle 17"/>
+          <p:cNvSpPr/>
+          <p:nvPr/>
+        </p:nvSpPr>
+        <p:spPr>
+          <a:xfrm>
+            <a:off x="457200" y="5088636"/>
+            <a:ext cx="11277295" cy="1051560"/>
+          </a:xfrm>
+          <a:prstGeom prst="roundRect">
+            <a:avLst>
+              <a:gd name="adj" fmla="val 12000"/>
+            </a:avLst>
+          </a:prstGeom>
+          <a:solidFill>
+            <a:srgbClr val="E8F4FA"/>
+          </a:solidFill>
+          <a:ln>
+            <a:noFill/>
+          </a:ln>
+        </p:spPr>
+        <p:style>
+          <a:lnRef idx="1">
+            <a:schemeClr val="accent1"/>
+          </a:lnRef>
+          <a:fillRef idx="3">
+            <a:schemeClr val="accent1"/>
+          </a:fillRef>
+          <a:effectRef idx="2">
+            <a:schemeClr val="accent1"/>
+          </a:effectRef>
+          <a:fontRef idx="minor">
+            <a:schemeClr val="lt1"/>
+          </a:fontRef>
+        </p:style>
+        <p:txBody>
+          <a:bodyPr rtlCol="0" anchor="ctr"/>
+          <a:lstStyle/>
+          <a:p>
+            <a:pPr algn="ctr"/>
+          </a:p>
+        </p:txBody>
+      </p:sp>
+      <p:sp>
+        <p:nvSpPr>
+          <p:cNvPr id="19" name="Rounded Rectangle 18"/>
+          <p:cNvSpPr/>
+          <p:nvPr/>
+        </p:nvSpPr>
+        <p:spPr>
+          <a:xfrm>
+            <a:off x="594360" y="5394960"/>
+            <a:ext cx="438912" cy="438912"/>
+          </a:xfrm>
+          <a:prstGeom prst="roundRect">
+            <a:avLst>
+              <a:gd name="adj" fmla="val 12000"/>
+            </a:avLst>
+          </a:prstGeom>
+          <a:solidFill>
+            <a:srgbClr val="095292"/>
+          </a:solidFill>
+          <a:ln>
+            <a:noFill/>
+          </a:ln>
+        </p:spPr>
+        <p:style>
+          <a:lnRef idx="1">
+            <a:schemeClr val="accent1"/>
+          </a:lnRef>
+          <a:fillRef idx="3">
+            <a:schemeClr val="accent1"/>
+          </a:fillRef>
+          <a:effectRef idx="2">
+            <a:schemeClr val="accent1"/>
+          </a:effectRef>
+          <a:fontRef idx="minor">
+            <a:schemeClr val="lt1"/>
+          </a:fontRef>
+        </p:style>
+        <p:txBody>
+          <a:bodyPr rtlCol="0" anchor="ctr"/>
+          <a:lstStyle/>
+          <a:p>
+            <a:pPr algn="ctr"/>
+          </a:p>
+        </p:txBody>
+      </p:sp>
+      <p:sp>
+        <p:nvSpPr>
+          <p:cNvPr id="20" name="TextBox 19"/>
+          <p:cNvSpPr txBox="1"/>
+          <p:nvPr/>
+        </p:nvSpPr>
+        <p:spPr>
+          <a:xfrm>
+            <a:off x="594360" y="5394960"/>
+            <a:ext cx="438912" cy="438912"/>
+          </a:xfrm>
+          <a:prstGeom prst="rect">
+            <a:avLst/>
+          </a:prstGeom>
+          <a:noFill/>
+        </p:spPr>
+        <p:txBody>
+          <a:bodyPr wrap="square" anchor="ctr"/>
+          <a:lstStyle/>
+          <a:p>
+            <a:pPr algn="ctr"/>
+            <a:r>
+              <a:rPr sz="1600" b="1" i="0">
+                <a:solidFill>
+                  <a:srgbClr val="FFFFFF"/>
+                </a:solidFill>
+                <a:latin typeface="Calibri"/>
+              </a:rPr>
+              <a:t>4</a:t>
+            </a:r>
+          </a:p>
+        </p:txBody>
+      </p:sp>
+      <p:sp>
+        <p:nvSpPr>
+          <p:cNvPr id="21" name="TextBox 20"/>
+          <p:cNvSpPr txBox="1"/>
+          <p:nvPr/>
+        </p:nvSpPr>
+        <p:spPr>
+          <a:xfrm>
+            <a:off x="1188720" y="5180076"/>
+            <a:ext cx="10271455" cy="886968"/>
+          </a:xfrm>
+          <a:prstGeom prst="rect">
+            <a:avLst/>
+          </a:prstGeom>
+          <a:noFill/>
+        </p:spPr>
+        <p:txBody>
+          <a:bodyPr wrap="square" anchor="ctr"/>
+          <a:lstStyle/>
+          <a:p>
+            <a:r>
+              <a:rPr sz="1500" b="1" i="0">
+                <a:solidFill>
+                  <a:srgbClr val="095292"/>
+                </a:solidFill>
+                <a:latin typeface="Calibri"/>
+              </a:rPr>
+              <a:t>Guarda el PNG para tu PI</a:t>
+            </a:r>
+          </a:p>
+          <a:p>
+            <a:pPr>
+              <a:spcBef>
+                <a:spcPts val="200"/>
+              </a:spcBef>
+            </a:pPr>
+            <a:r>
+              <a:rPr sz="1300" b="0" i="0">
+                <a:solidFill>
+                  <a:srgbClr val="333333"/>
+                </a:solidFill>
+                <a:latin typeface="Calibri"/>
+              </a:rPr>
+              <a:t>Exporta tambien la imagen a la carpeta de tu Proyecto Integrador. Esa copia es para tu informe; no reemplaza la respuesta en la plataforma.</a:t>
+            </a:r>
+          </a:p>
+        </p:txBody>
+      </p:sp>
+      <p:sp>
+        <p:nvSpPr>
+          <p:cNvPr id="22" name="TextBox 21"/>
           <p:cNvSpPr txBox="1"/>
           <p:nvPr/>
         </p:nvSpPr>
@@ -15768,109 +16254,21 @@
                 </a:solidFill>
                 <a:latin typeface="Calibri"/>
               </a:rPr>
-              <a:t>Para continuar (PI)</a:t>
-            </a:r>
-          </a:p>
-        </p:txBody>
-      </p:sp>
-      <p:sp>
-        <p:nvSpPr>
-          <p:cNvPr id="5" name="Rounded Rectangle 4"/>
-          <p:cNvSpPr/>
-          <p:nvPr/>
-        </p:nvSpPr>
-        <p:spPr>
-          <a:xfrm>
-            <a:off x="457200" y="1261872"/>
-            <a:ext cx="11277295" cy="1051560"/>
-          </a:xfrm>
-          <a:prstGeom prst="roundRect">
-            <a:avLst>
-              <a:gd name="adj" fmla="val 12000"/>
-            </a:avLst>
-          </a:prstGeom>
-          <a:solidFill>
-            <a:srgbClr val="E8F4FA"/>
-          </a:solidFill>
-          <a:ln>
-            <a:noFill/>
-          </a:ln>
-        </p:spPr>
-        <p:style>
-          <a:lnRef idx="1">
-            <a:schemeClr val="accent1"/>
-          </a:lnRef>
-          <a:fillRef idx="3">
-            <a:schemeClr val="accent1"/>
-          </a:fillRef>
-          <a:effectRef idx="2">
-            <a:schemeClr val="accent1"/>
-          </a:effectRef>
-          <a:fontRef idx="minor">
-            <a:schemeClr val="lt1"/>
-          </a:fontRef>
-        </p:style>
-        <p:txBody>
-          <a:bodyPr rtlCol="0" anchor="ctr"/>
-          <a:lstStyle/>
-          <a:p>
-            <a:pPr algn="ctr"/>
-          </a:p>
-        </p:txBody>
-      </p:sp>
-      <p:sp>
-        <p:nvSpPr>
-          <p:cNvPr id="6" name="Rectangle 5"/>
-          <p:cNvSpPr/>
-          <p:nvPr/>
-        </p:nvSpPr>
-        <p:spPr>
-          <a:xfrm>
-            <a:off x="457200" y="1261872"/>
-            <a:ext cx="128016" cy="1051560"/>
-          </a:xfrm>
-          <a:prstGeom prst="rect">
-            <a:avLst/>
-          </a:prstGeom>
-          <a:solidFill>
-            <a:srgbClr val="269CCB"/>
-          </a:solidFill>
-          <a:ln>
-            <a:noFill/>
-          </a:ln>
-        </p:spPr>
-        <p:style>
-          <a:lnRef idx="1">
-            <a:schemeClr val="accent1"/>
-          </a:lnRef>
-          <a:fillRef idx="3">
-            <a:schemeClr val="accent1"/>
-          </a:fillRef>
-          <a:effectRef idx="2">
-            <a:schemeClr val="accent1"/>
-          </a:effectRef>
-          <a:fontRef idx="minor">
-            <a:schemeClr val="lt1"/>
-          </a:fontRef>
-        </p:style>
-        <p:txBody>
-          <a:bodyPr rtlCol="0" anchor="ctr"/>
-          <a:lstStyle/>
-          <a:p>
-            <a:pPr algn="ctr"/>
-          </a:p>
-        </p:txBody>
-      </p:sp>
-      <p:sp>
-        <p:nvSpPr>
-          <p:cNvPr id="7" name="TextBox 6"/>
+              <a:t>PI CloudLite — entregable de hoy</a:t>
+            </a:r>
+          </a:p>
+        </p:txBody>
+      </p:sp>
+      <p:sp>
+        <p:nvSpPr>
+          <p:cNvPr id="5" name="TextBox 4"/>
           <p:cNvSpPr txBox="1"/>
           <p:nvPr/>
         </p:nvSpPr>
         <p:spPr>
           <a:xfrm>
-            <a:off x="777240" y="1399031"/>
-            <a:ext cx="10774375" cy="822959"/>
+            <a:off x="457200" y="1170432"/>
+            <a:ext cx="11277295" cy="5230368"/>
           </a:xfrm>
           <a:prstGeom prst="rect">
             <a:avLst/>
@@ -15883,313 +16281,119 @@
           </a:bodyPr>
           <a:lstStyle/>
           <a:p>
-            <a:r>
-              <a:rPr sz="1200" b="1" i="0">
-                <a:solidFill>
-                  <a:srgbClr val="269CCB"/>
-                </a:solidFill>
-                <a:latin typeface="Calibri"/>
-              </a:rPr>
-              <a:t>Info</a:t>
-            </a:r>
-          </a:p>
-          <a:p>
-            <a:pPr>
-              <a:spcBef>
-                <a:spcPts val="400"/>
-              </a:spcBef>
-            </a:pPr>
-            <a:r>
-              <a:rPr sz="1400" b="0" i="0">
-                <a:solidFill>
-                  <a:srgbClr val="333333"/>
-                </a:solidFill>
-                <a:latin typeface="Calibri"/>
-              </a:rPr>
-              <a:t>Entregable: Diagrama C4 Container en Mermaid + tabla de 3 contratos + 3 riesgos de distribución</a:t>
-            </a:r>
-          </a:p>
-        </p:txBody>
-      </p:sp>
-      <p:sp>
-        <p:nvSpPr>
-          <p:cNvPr id="8" name="Rounded Rectangle 7"/>
-          <p:cNvSpPr/>
-          <p:nvPr/>
-        </p:nvSpPr>
-        <p:spPr>
-          <a:xfrm>
-            <a:off x="457200" y="2478024"/>
-            <a:ext cx="11277295" cy="1051560"/>
-          </a:xfrm>
-          <a:prstGeom prst="roundRect">
-            <a:avLst>
-              <a:gd name="adj" fmla="val 12000"/>
-            </a:avLst>
-          </a:prstGeom>
-          <a:solidFill>
-            <a:srgbClr val="FFF8E1"/>
-          </a:solidFill>
-          <a:ln>
-            <a:noFill/>
-          </a:ln>
-        </p:spPr>
-        <p:style>
-          <a:lnRef idx="1">
-            <a:schemeClr val="accent1"/>
-          </a:lnRef>
-          <a:fillRef idx="3">
-            <a:schemeClr val="accent1"/>
-          </a:fillRef>
-          <a:effectRef idx="2">
-            <a:schemeClr val="accent1"/>
-          </a:effectRef>
-          <a:fontRef idx="minor">
-            <a:schemeClr val="lt1"/>
-          </a:fontRef>
-        </p:style>
-        <p:txBody>
-          <a:bodyPr rtlCol="0" anchor="ctr"/>
-          <a:lstStyle/>
-          <a:p>
-            <a:pPr algn="ctr"/>
-          </a:p>
-        </p:txBody>
-      </p:sp>
-      <p:sp>
-        <p:nvSpPr>
-          <p:cNvPr id="9" name="Rectangle 8"/>
-          <p:cNvSpPr/>
-          <p:nvPr/>
-        </p:nvSpPr>
-        <p:spPr>
-          <a:xfrm>
-            <a:off x="457200" y="2478024"/>
-            <a:ext cx="128016" cy="1051560"/>
-          </a:xfrm>
-          <a:prstGeom prst="rect">
-            <a:avLst/>
-          </a:prstGeom>
-          <a:solidFill>
-            <a:srgbClr val="FFD000"/>
-          </a:solidFill>
-          <a:ln>
-            <a:noFill/>
-          </a:ln>
-        </p:spPr>
-        <p:style>
-          <a:lnRef idx="1">
-            <a:schemeClr val="accent1"/>
-          </a:lnRef>
-          <a:fillRef idx="3">
-            <a:schemeClr val="accent1"/>
-          </a:fillRef>
-          <a:effectRef idx="2">
-            <a:schemeClr val="accent1"/>
-          </a:effectRef>
-          <a:fontRef idx="minor">
-            <a:schemeClr val="lt1"/>
-          </a:fontRef>
-        </p:style>
-        <p:txBody>
-          <a:bodyPr rtlCol="0" anchor="ctr"/>
-          <a:lstStyle/>
-          <a:p>
-            <a:pPr algn="ctr"/>
-          </a:p>
-        </p:txBody>
-      </p:sp>
-      <p:sp>
-        <p:nvSpPr>
-          <p:cNvPr id="10" name="TextBox 9"/>
-          <p:cNvSpPr txBox="1"/>
-          <p:nvPr/>
-        </p:nvSpPr>
-        <p:spPr>
-          <a:xfrm>
-            <a:off x="777240" y="2615184"/>
-            <a:ext cx="10774375" cy="822959"/>
-          </a:xfrm>
-          <a:prstGeom prst="rect">
-            <a:avLst/>
-          </a:prstGeom>
-          <a:noFill/>
-        </p:spPr>
-        <p:txBody>
-          <a:bodyPr wrap="square">
-            <a:spAutoFit/>
-          </a:bodyPr>
-          <a:lstStyle/>
-          <a:p>
-            <a:r>
-              <a:rPr sz="1200" b="1" i="0">
-                <a:solidFill>
-                  <a:srgbClr val="FFD000"/>
-                </a:solidFill>
-                <a:latin typeface="Calibri"/>
-              </a:rPr>
-              <a:t>Aclaración</a:t>
-            </a:r>
-          </a:p>
-          <a:p>
-            <a:pPr>
-              <a:spcBef>
-                <a:spcPts val="400"/>
-              </a:spcBef>
-            </a:pPr>
-            <a:r>
-              <a:rPr sz="1400" b="0" i="0">
-                <a:solidFill>
-                  <a:srgbClr val="333333"/>
-                </a:solidFill>
-                <a:latin typeface="Calibri"/>
-              </a:rPr>
-              <a:t>Subir evidencias al paquete CloudLite (Drive/repo) y a la plataforma del curso en la fecha que indique el docente.</a:t>
-            </a:r>
-          </a:p>
-        </p:txBody>
-      </p:sp>
-      <p:sp>
-        <p:nvSpPr>
-          <p:cNvPr id="11" name="Rounded Rectangle 10"/>
-          <p:cNvSpPr/>
-          <p:nvPr/>
-        </p:nvSpPr>
-        <p:spPr>
-          <a:xfrm>
-            <a:off x="457200" y="3694176"/>
-            <a:ext cx="11277295" cy="1051560"/>
-          </a:xfrm>
-          <a:prstGeom prst="roundRect">
-            <a:avLst>
-              <a:gd name="adj" fmla="val 12000"/>
-            </a:avLst>
-          </a:prstGeom>
-          <a:solidFill>
-            <a:srgbClr val="FBE4E4"/>
-          </a:solidFill>
-          <a:ln>
-            <a:noFill/>
-          </a:ln>
-        </p:spPr>
-        <p:style>
-          <a:lnRef idx="1">
-            <a:schemeClr val="accent1"/>
-          </a:lnRef>
-          <a:fillRef idx="3">
-            <a:schemeClr val="accent1"/>
-          </a:fillRef>
-          <a:effectRef idx="2">
-            <a:schemeClr val="accent1"/>
-          </a:effectRef>
-          <a:fontRef idx="minor">
-            <a:schemeClr val="lt1"/>
-          </a:fontRef>
-        </p:style>
-        <p:txBody>
-          <a:bodyPr rtlCol="0" anchor="ctr"/>
-          <a:lstStyle/>
-          <a:p>
-            <a:pPr algn="ctr"/>
-          </a:p>
-        </p:txBody>
-      </p:sp>
-      <p:sp>
-        <p:nvSpPr>
-          <p:cNvPr id="12" name="Rectangle 11"/>
-          <p:cNvSpPr/>
-          <p:nvPr/>
-        </p:nvSpPr>
-        <p:spPr>
-          <a:xfrm>
-            <a:off x="457200" y="3694176"/>
-            <a:ext cx="128016" cy="1051560"/>
-          </a:xfrm>
-          <a:prstGeom prst="rect">
-            <a:avLst/>
-          </a:prstGeom>
-          <a:solidFill>
-            <a:srgbClr val="A02030"/>
-          </a:solidFill>
-          <a:ln>
-            <a:noFill/>
-          </a:ln>
-        </p:spPr>
-        <p:style>
-          <a:lnRef idx="1">
-            <a:schemeClr val="accent1"/>
-          </a:lnRef>
-          <a:fillRef idx="3">
-            <a:schemeClr val="accent1"/>
-          </a:fillRef>
-          <a:effectRef idx="2">
-            <a:schemeClr val="accent1"/>
-          </a:effectRef>
-          <a:fontRef idx="minor">
-            <a:schemeClr val="lt1"/>
-          </a:fontRef>
-        </p:style>
-        <p:txBody>
-          <a:bodyPr rtlCol="0" anchor="ctr"/>
-          <a:lstStyle/>
-          <a:p>
-            <a:pPr algn="ctr"/>
-          </a:p>
-        </p:txBody>
-      </p:sp>
-      <p:sp>
-        <p:nvSpPr>
-          <p:cNvPr id="13" name="TextBox 12"/>
-          <p:cNvSpPr txBox="1"/>
-          <p:nvPr/>
-        </p:nvSpPr>
-        <p:spPr>
-          <a:xfrm>
-            <a:off x="777240" y="3831336"/>
-            <a:ext cx="10774375" cy="822959"/>
-          </a:xfrm>
-          <a:prstGeom prst="rect">
-            <a:avLst/>
-          </a:prstGeom>
-          <a:noFill/>
-        </p:spPr>
-        <p:txBody>
-          <a:bodyPr wrap="square">
-            <a:spAutoFit/>
-          </a:bodyPr>
-          <a:lstStyle/>
-          <a:p>
-            <a:r>
-              <a:rPr sz="1200" b="1" i="0">
-                <a:solidFill>
-                  <a:srgbClr val="A02030"/>
-                </a:solidFill>
-                <a:latin typeface="Calibri"/>
-              </a:rPr>
-              <a:t>Atención</a:t>
-            </a:r>
-          </a:p>
-          <a:p>
-            <a:pPr>
-              <a:spcBef>
-                <a:spcPts val="400"/>
-              </a:spcBef>
-            </a:pPr>
-            <a:r>
-              <a:rPr sz="1400" b="0" i="0">
-                <a:solidFill>
-                  <a:srgbClr val="333333"/>
-                </a:solidFill>
-                <a:latin typeface="Calibri"/>
-              </a:rPr>
-              <a:t>Sin cloud de pago ni instalaciones obligatorias de hipervisores/Docker Desktop.</a:t>
-            </a:r>
-          </a:p>
-        </p:txBody>
-      </p:sp>
-      <p:sp>
-        <p:nvSpPr>
-          <p:cNvPr id="14" name="TextBox 13"/>
+            <a:pPr>
+              <a:spcAft>
+                <a:spcPts val="800"/>
+              </a:spcAft>
+            </a:pPr>
+            <a:r>
+              <a:rPr sz="2000" b="0" i="0">
+                <a:solidFill>
+                  <a:srgbClr val="333333"/>
+                </a:solidFill>
+                <a:latin typeface="Calibri"/>
+              </a:rPr>
+              <a:t>–   </a:t>
+            </a:r>
+            <a:r>
+              <a:rPr sz="2000" b="1" i="0">
+                <a:solidFill>
+                  <a:srgbClr val="333333"/>
+                </a:solidFill>
+                <a:latin typeface="Calibri"/>
+              </a:rPr>
+              <a:t>Entregable:</a:t>
+            </a:r>
+            <a:r>
+              <a:rPr sz="2000" b="0" i="0">
+                <a:solidFill>
+                  <a:srgbClr val="333333"/>
+                </a:solidFill>
+                <a:latin typeface="Calibri"/>
+              </a:rPr>
+              <a:t> Diagrama C4 Container en Mermaid + tabla de 3 contratos + 3 riesgos de distribución</a:t>
+            </a:r>
+          </a:p>
+          <a:p>
+            <a:pPr>
+              <a:spcAft>
+                <a:spcPts val="800"/>
+              </a:spcAft>
+            </a:pPr>
+            <a:r>
+              <a:rPr sz="2000" b="0" i="0">
+                <a:solidFill>
+                  <a:srgbClr val="333333"/>
+                </a:solidFill>
+                <a:latin typeface="Calibri"/>
+              </a:rPr>
+              <a:t>–   Herramienta: </a:t>
+            </a:r>
+            <a:r>
+              <a:rPr sz="2000" b="1" i="0">
+                <a:solidFill>
+                  <a:srgbClr val="333333"/>
+                </a:solidFill>
+                <a:latin typeface="Calibri"/>
+              </a:rPr>
+              <a:t>draw.io o Excalidraw para bocetar · Mermaid dentro de la plataforma del curso para entregar</a:t>
+            </a:r>
+          </a:p>
+          <a:p>
+            <a:pPr>
+              <a:spcAft>
+                <a:spcPts val="800"/>
+              </a:spcAft>
+            </a:pPr>
+            <a:r>
+              <a:rPr sz="2000" b="0" i="0">
+                <a:solidFill>
+                  <a:srgbClr val="333333"/>
+                </a:solidFill>
+                <a:latin typeface="Calibri"/>
+              </a:rPr>
+              <a:t>–   Todo lo que construyan hoy entra al </a:t>
+            </a:r>
+            <a:r>
+              <a:rPr sz="2000" b="1" i="0">
+                <a:solidFill>
+                  <a:srgbClr val="333333"/>
+                </a:solidFill>
+                <a:latin typeface="Calibri"/>
+              </a:rPr>
+              <a:t>informe/repo del PI</a:t>
+            </a:r>
+            <a:r>
+              <a:rPr sz="2000" b="0" i="0">
+                <a:solidFill>
+                  <a:srgbClr val="333333"/>
+                </a:solidFill>
+                <a:latin typeface="Calibri"/>
+              </a:rPr>
+              <a:t> (no es lab suelto).</a:t>
+            </a:r>
+          </a:p>
+          <a:p>
+            <a:pPr>
+              <a:spcAft>
+                <a:spcPts val="800"/>
+              </a:spcAft>
+            </a:pPr>
+            <a:r>
+              <a:rPr sz="2000" b="0" i="0">
+                <a:solidFill>
+                  <a:srgbClr val="333333"/>
+                </a:solidFill>
+                <a:latin typeface="Calibri"/>
+              </a:rPr>
+              <a:t>–   Individual por defecto · el docente puede autorizar equipos de 2–3; la entrega en la plataforma del curso siempre es individual.</a:t>
+            </a:r>
+          </a:p>
+        </p:txBody>
+      </p:sp>
+      <p:sp>
+        <p:nvSpPr>
+          <p:cNvPr id="6" name="TextBox 5"/>
           <p:cNvSpPr txBox="1"/>
           <p:nvPr/>
         </p:nvSpPr>
@@ -16231,6 +16435,932 @@
 </file>
 
 <file path=ppt/slides/slide42.xml><?xml version="1.0" encoding="utf-8"?>
+<p:sld xmlns:a="http://schemas.openxmlformats.org/drawingml/2006/main" xmlns:p="http://schemas.openxmlformats.org/presentationml/2006/main" xmlns:r="http://schemas.openxmlformats.org/officeDocument/2006/relationships">
+  <p:cSld>
+    <p:bg>
+      <p:bgPr>
+        <a:solidFill>
+          <a:srgbClr val="FFFFFF"/>
+        </a:solidFill>
+        <a:effectLst/>
+      </p:bgPr>
+    </p:bg>
+    <p:spTree>
+      <p:nvGrpSpPr>
+        <p:cNvPr id="1" name=""/>
+        <p:cNvGrpSpPr/>
+        <p:nvPr/>
+      </p:nvGrpSpPr>
+      <p:grpSpPr/>
+      <p:sp>
+        <p:nvSpPr>
+          <p:cNvPr id="2" name="Rectangle 1"/>
+          <p:cNvSpPr/>
+          <p:nvPr/>
+        </p:nvSpPr>
+        <p:spPr>
+          <a:xfrm>
+            <a:off x="0" y="0"/>
+            <a:ext cx="12191695" cy="960120"/>
+          </a:xfrm>
+          <a:prstGeom prst="rect">
+            <a:avLst/>
+          </a:prstGeom>
+          <a:solidFill>
+            <a:srgbClr val="095292"/>
+          </a:solidFill>
+          <a:ln>
+            <a:noFill/>
+          </a:ln>
+        </p:spPr>
+        <p:style>
+          <a:lnRef idx="1">
+            <a:schemeClr val="accent1"/>
+          </a:lnRef>
+          <a:fillRef idx="3">
+            <a:schemeClr val="accent1"/>
+          </a:fillRef>
+          <a:effectRef idx="2">
+            <a:schemeClr val="accent1"/>
+          </a:effectRef>
+          <a:fontRef idx="minor">
+            <a:schemeClr val="lt1"/>
+          </a:fontRef>
+        </p:style>
+        <p:txBody>
+          <a:bodyPr rtlCol="0" anchor="ctr"/>
+          <a:lstStyle/>
+          <a:p>
+            <a:pPr algn="ctr"/>
+          </a:p>
+        </p:txBody>
+      </p:sp>
+      <p:sp>
+        <p:nvSpPr>
+          <p:cNvPr id="3" name="Rectangle 2"/>
+          <p:cNvSpPr/>
+          <p:nvPr/>
+        </p:nvSpPr>
+        <p:spPr>
+          <a:xfrm>
+            <a:off x="0" y="960120"/>
+            <a:ext cx="12191695" cy="41148"/>
+          </a:xfrm>
+          <a:prstGeom prst="rect">
+            <a:avLst/>
+          </a:prstGeom>
+          <a:solidFill>
+            <a:srgbClr val="FFD000"/>
+          </a:solidFill>
+          <a:ln>
+            <a:noFill/>
+          </a:ln>
+        </p:spPr>
+        <p:style>
+          <a:lnRef idx="1">
+            <a:schemeClr val="accent1"/>
+          </a:lnRef>
+          <a:fillRef idx="3">
+            <a:schemeClr val="accent1"/>
+          </a:fillRef>
+          <a:effectRef idx="2">
+            <a:schemeClr val="accent1"/>
+          </a:effectRef>
+          <a:fontRef idx="minor">
+            <a:schemeClr val="lt1"/>
+          </a:fontRef>
+        </p:style>
+        <p:txBody>
+          <a:bodyPr rtlCol="0" anchor="ctr"/>
+          <a:lstStyle/>
+          <a:p>
+            <a:pPr algn="ctr"/>
+          </a:p>
+        </p:txBody>
+      </p:sp>
+      <p:sp>
+        <p:nvSpPr>
+          <p:cNvPr id="4" name="TextBox 3"/>
+          <p:cNvSpPr txBox="1"/>
+          <p:nvPr/>
+        </p:nvSpPr>
+        <p:spPr>
+          <a:xfrm>
+            <a:off x="457200" y="164592"/>
+            <a:ext cx="11277295" cy="502920"/>
+          </a:xfrm>
+          <a:prstGeom prst="rect">
+            <a:avLst/>
+          </a:prstGeom>
+          <a:noFill/>
+        </p:spPr>
+        <p:txBody>
+          <a:bodyPr wrap="square">
+            <a:spAutoFit/>
+          </a:bodyPr>
+          <a:lstStyle/>
+          <a:p>
+            <a:r>
+              <a:rPr sz="2600" b="1" i="0">
+                <a:solidFill>
+                  <a:srgbClr val="FFFFFF"/>
+                </a:solidFill>
+                <a:latin typeface="Calibri"/>
+              </a:rPr>
+              <a:t>Manos a la obra (paso a paso)</a:t>
+            </a:r>
+          </a:p>
+        </p:txBody>
+      </p:sp>
+      <p:sp>
+        <p:nvSpPr>
+          <p:cNvPr id="5" name="TextBox 4"/>
+          <p:cNvSpPr txBox="1"/>
+          <p:nvPr/>
+        </p:nvSpPr>
+        <p:spPr>
+          <a:xfrm>
+            <a:off x="457200" y="1170432"/>
+            <a:ext cx="11277295" cy="5230368"/>
+          </a:xfrm>
+          <a:prstGeom prst="rect">
+            <a:avLst/>
+          </a:prstGeom>
+          <a:noFill/>
+        </p:spPr>
+        <p:txBody>
+          <a:bodyPr wrap="square">
+            <a:spAutoFit/>
+          </a:bodyPr>
+          <a:lstStyle/>
+          <a:p>
+            <a:pPr>
+              <a:spcAft>
+                <a:spcPts val="800"/>
+              </a:spcAft>
+            </a:pPr>
+            <a:r>
+              <a:rPr sz="2000" b="1" i="0">
+                <a:solidFill>
+                  <a:srgbClr val="333333"/>
+                </a:solidFill>
+                <a:latin typeface="Calibri"/>
+              </a:rPr>
+              <a:t>1.</a:t>
+            </a:r>
+            <a:r>
+              <a:rPr sz="2000" b="0" i="0">
+                <a:solidFill>
+                  <a:srgbClr val="333333"/>
+                </a:solidFill>
+                <a:latin typeface="Calibri"/>
+              </a:rPr>
+              <a:t> Paso 1: decida en la pregunta 12 si su CloudLite es un monolito modular o microservicios, con los dos criterios aplicados a su caso (tamano del equipo con numero y plazo, y que partes cambian juntas) y lo que gana y pierde; verifique que no escribio «un poco de los dos», porque eso vale cero.</a:t>
+            </a:r>
+          </a:p>
+          <a:p>
+            <a:pPr>
+              <a:spcAft>
+                <a:spcPts val="800"/>
+              </a:spcAft>
+            </a:pPr>
+            <a:r>
+              <a:rPr sz="2000" b="0" i="0">
+                <a:solidFill>
+                  <a:srgbClr val="333333"/>
+                </a:solidFill>
+                <a:latin typeface="Calibri"/>
+              </a:rPr>
+              <a:t>–   </a:t>
+            </a:r>
+            <a:r>
+              <a:rPr sz="2000" b="1" i="0">
+                <a:solidFill>
+                  <a:srgbClr val="333333"/>
+                </a:solidFill>
+                <a:latin typeface="Calibri"/>
+              </a:rPr>
+              <a:t>2.</a:t>
+            </a:r>
+            <a:r>
+              <a:rPr sz="2000" b="0" i="0">
+                <a:solidFill>
+                  <a:srgbClr val="333333"/>
+                </a:solidFill>
+                <a:latin typeface="Calibri"/>
+              </a:rPr>
+              <a:t> Paso 2: modele en la pregunta 13 el C4 Container partiendo del C4 Context de la pregunta 3, con entre 2 y 5 contenedores coherentes con la decision anterior, los almacenes de datos como ContainerDb y toda flecha con protocolo y formato; verifique que los nombres de sistema, actores y sistemas externos sean identicos a los del Context.</a:t>
+            </a:r>
+          </a:p>
+          <a:p>
+            <a:pPr>
+              <a:spcAft>
+                <a:spcPts val="800"/>
+              </a:spcAft>
+            </a:pPr>
+            <a:r>
+              <a:rPr sz="2000" b="0" i="0">
+                <a:solidFill>
+                  <a:srgbClr val="333333"/>
+                </a:solidFill>
+                <a:latin typeface="Calibri"/>
+              </a:rPr>
+              <a:t>–   </a:t>
+            </a:r>
+            <a:r>
+              <a:rPr sz="2000" b="1" i="0">
+                <a:solidFill>
+                  <a:srgbClr val="333333"/>
+                </a:solidFill>
+                <a:latin typeface="Calibri"/>
+              </a:rPr>
+              <a:t>3.</a:t>
+            </a:r>
+            <a:r>
+              <a:rPr sz="2000" b="0" i="0">
+                <a:solidFill>
+                  <a:srgbClr val="333333"/>
+                </a:solidFill>
+                <a:latin typeface="Calibri"/>
+              </a:rPr>
+              <a:t> Paso 3: liste en la pregunta 14 los 3 contratos con quien llama a quien usando los nombres exactos del diagrama, el verbo y la ruta (o el evento) y el error de negocio con su codigo y su significado en el dominio; verifique que al menos uno sea un 409 de conflicto y que ninguno diga «500 error del servidor».</a:t>
+            </a:r>
+          </a:p>
+          <a:p>
+            <a:pPr>
+              <a:spcAft>
+                <a:spcPts val="800"/>
+              </a:spcAft>
+            </a:pPr>
+            <a:r>
+              <a:rPr sz="2000" b="0" i="0">
+                <a:solidFill>
+                  <a:srgbClr val="333333"/>
+                </a:solidFill>
+                <a:latin typeface="Calibri"/>
+              </a:rPr>
+              <a:t>–   </a:t>
+            </a:r>
+            <a:r>
+              <a:rPr sz="2000" b="1" i="0">
+                <a:solidFill>
+                  <a:srgbClr val="333333"/>
+                </a:solidFill>
+                <a:latin typeface="Calibri"/>
+              </a:rPr>
+              <a:t>4.</a:t>
+            </a:r>
+            <a:r>
+              <a:rPr sz="2000" b="0" i="0">
+                <a:solidFill>
+                  <a:srgbClr val="333333"/>
+                </a:solidFill>
+                <a:latin typeface="Calibri"/>
+              </a:rPr>
+              <a:t> Paso 4: analice en la pregunta 15 los tres riesgos de distribucion nombrando una caja concreta que se cae, contando los saltos de red de una operacion de punta a punta y nombrando un dato expuesto a inconsistencia; con esto la actividad del Corte 1 queda completa y se entrega en la plataforma del curso antes del en la fecha que indique el docentede esta semana.</a:t>
+            </a:r>
+          </a:p>
+        </p:txBody>
+      </p:sp>
+      <p:sp>
+        <p:nvSpPr>
+          <p:cNvPr id="6" name="TextBox 5"/>
+          <p:cNvSpPr txBox="1"/>
+          <p:nvPr/>
+        </p:nvSpPr>
+        <p:spPr>
+          <a:xfrm>
+            <a:off x="11185855" y="6473952"/>
+            <a:ext cx="640080" cy="274320"/>
+          </a:xfrm>
+          <a:prstGeom prst="rect">
+            <a:avLst/>
+          </a:prstGeom>
+          <a:noFill/>
+        </p:spPr>
+        <p:txBody>
+          <a:bodyPr wrap="square">
+            <a:spAutoFit/>
+          </a:bodyPr>
+          <a:lstStyle/>
+          <a:p>
+            <a:pPr algn="r"/>
+            <a:r>
+              <a:rPr sz="1100" b="0" i="0">
+                <a:solidFill>
+                  <a:srgbClr val="666666"/>
+                </a:solidFill>
+                <a:latin typeface="Calibri"/>
+              </a:rPr>
+              <a:t>42</a:t>
+            </a:r>
+          </a:p>
+        </p:txBody>
+      </p:sp>
+    </p:spTree>
+  </p:cSld>
+  <p:clrMapOvr>
+    <a:masterClrMapping/>
+  </p:clrMapOvr>
+</p:sld>
+</file>
+
+<file path=ppt/slides/slide43.xml><?xml version="1.0" encoding="utf-8"?>
+<p:sld xmlns:a="http://schemas.openxmlformats.org/drawingml/2006/main" xmlns:p="http://schemas.openxmlformats.org/presentationml/2006/main" xmlns:r="http://schemas.openxmlformats.org/officeDocument/2006/relationships">
+  <p:cSld>
+    <p:bg>
+      <p:bgPr>
+        <a:solidFill>
+          <a:srgbClr val="FFFFFF"/>
+        </a:solidFill>
+        <a:effectLst/>
+      </p:bgPr>
+    </p:bg>
+    <p:spTree>
+      <p:nvGrpSpPr>
+        <p:cNvPr id="1" name=""/>
+        <p:cNvGrpSpPr/>
+        <p:nvPr/>
+      </p:nvGrpSpPr>
+      <p:grpSpPr/>
+      <p:sp>
+        <p:nvSpPr>
+          <p:cNvPr id="2" name="Rectangle 1"/>
+          <p:cNvSpPr/>
+          <p:nvPr/>
+        </p:nvSpPr>
+        <p:spPr>
+          <a:xfrm>
+            <a:off x="0" y="0"/>
+            <a:ext cx="12191695" cy="960120"/>
+          </a:xfrm>
+          <a:prstGeom prst="rect">
+            <a:avLst/>
+          </a:prstGeom>
+          <a:solidFill>
+            <a:srgbClr val="095292"/>
+          </a:solidFill>
+          <a:ln>
+            <a:noFill/>
+          </a:ln>
+        </p:spPr>
+        <p:style>
+          <a:lnRef idx="1">
+            <a:schemeClr val="accent1"/>
+          </a:lnRef>
+          <a:fillRef idx="3">
+            <a:schemeClr val="accent1"/>
+          </a:fillRef>
+          <a:effectRef idx="2">
+            <a:schemeClr val="accent1"/>
+          </a:effectRef>
+          <a:fontRef idx="minor">
+            <a:schemeClr val="lt1"/>
+          </a:fontRef>
+        </p:style>
+        <p:txBody>
+          <a:bodyPr rtlCol="0" anchor="ctr"/>
+          <a:lstStyle/>
+          <a:p>
+            <a:pPr algn="ctr"/>
+          </a:p>
+        </p:txBody>
+      </p:sp>
+      <p:sp>
+        <p:nvSpPr>
+          <p:cNvPr id="3" name="Rectangle 2"/>
+          <p:cNvSpPr/>
+          <p:nvPr/>
+        </p:nvSpPr>
+        <p:spPr>
+          <a:xfrm>
+            <a:off x="0" y="960120"/>
+            <a:ext cx="12191695" cy="41148"/>
+          </a:xfrm>
+          <a:prstGeom prst="rect">
+            <a:avLst/>
+          </a:prstGeom>
+          <a:solidFill>
+            <a:srgbClr val="FFD000"/>
+          </a:solidFill>
+          <a:ln>
+            <a:noFill/>
+          </a:ln>
+        </p:spPr>
+        <p:style>
+          <a:lnRef idx="1">
+            <a:schemeClr val="accent1"/>
+          </a:lnRef>
+          <a:fillRef idx="3">
+            <a:schemeClr val="accent1"/>
+          </a:fillRef>
+          <a:effectRef idx="2">
+            <a:schemeClr val="accent1"/>
+          </a:effectRef>
+          <a:fontRef idx="minor">
+            <a:schemeClr val="lt1"/>
+          </a:fontRef>
+        </p:style>
+        <p:txBody>
+          <a:bodyPr rtlCol="0" anchor="ctr"/>
+          <a:lstStyle/>
+          <a:p>
+            <a:pPr algn="ctr"/>
+          </a:p>
+        </p:txBody>
+      </p:sp>
+      <p:sp>
+        <p:nvSpPr>
+          <p:cNvPr id="4" name="TextBox 3"/>
+          <p:cNvSpPr txBox="1"/>
+          <p:nvPr/>
+        </p:nvSpPr>
+        <p:spPr>
+          <a:xfrm>
+            <a:off x="457200" y="164592"/>
+            <a:ext cx="11277295" cy="502920"/>
+          </a:xfrm>
+          <a:prstGeom prst="rect">
+            <a:avLst/>
+          </a:prstGeom>
+          <a:noFill/>
+        </p:spPr>
+        <p:txBody>
+          <a:bodyPr wrap="square">
+            <a:spAutoFit/>
+          </a:bodyPr>
+          <a:lstStyle/>
+          <a:p>
+            <a:r>
+              <a:rPr sz="2600" b="1" i="0">
+                <a:solidFill>
+                  <a:srgbClr val="FFFFFF"/>
+                </a:solidFill>
+                <a:latin typeface="Calibri"/>
+              </a:rPr>
+              <a:t>Para continuar (PI)</a:t>
+            </a:r>
+          </a:p>
+        </p:txBody>
+      </p:sp>
+      <p:sp>
+        <p:nvSpPr>
+          <p:cNvPr id="5" name="Rounded Rectangle 4"/>
+          <p:cNvSpPr/>
+          <p:nvPr/>
+        </p:nvSpPr>
+        <p:spPr>
+          <a:xfrm>
+            <a:off x="457200" y="1261872"/>
+            <a:ext cx="11277295" cy="1051560"/>
+          </a:xfrm>
+          <a:prstGeom prst="roundRect">
+            <a:avLst>
+              <a:gd name="adj" fmla="val 12000"/>
+            </a:avLst>
+          </a:prstGeom>
+          <a:solidFill>
+            <a:srgbClr val="E8F4FA"/>
+          </a:solidFill>
+          <a:ln>
+            <a:noFill/>
+          </a:ln>
+        </p:spPr>
+        <p:style>
+          <a:lnRef idx="1">
+            <a:schemeClr val="accent1"/>
+          </a:lnRef>
+          <a:fillRef idx="3">
+            <a:schemeClr val="accent1"/>
+          </a:fillRef>
+          <a:effectRef idx="2">
+            <a:schemeClr val="accent1"/>
+          </a:effectRef>
+          <a:fontRef idx="minor">
+            <a:schemeClr val="lt1"/>
+          </a:fontRef>
+        </p:style>
+        <p:txBody>
+          <a:bodyPr rtlCol="0" anchor="ctr"/>
+          <a:lstStyle/>
+          <a:p>
+            <a:pPr algn="ctr"/>
+          </a:p>
+        </p:txBody>
+      </p:sp>
+      <p:sp>
+        <p:nvSpPr>
+          <p:cNvPr id="6" name="Rectangle 5"/>
+          <p:cNvSpPr/>
+          <p:nvPr/>
+        </p:nvSpPr>
+        <p:spPr>
+          <a:xfrm>
+            <a:off x="457200" y="1261872"/>
+            <a:ext cx="128016" cy="1051560"/>
+          </a:xfrm>
+          <a:prstGeom prst="rect">
+            <a:avLst/>
+          </a:prstGeom>
+          <a:solidFill>
+            <a:srgbClr val="269CCB"/>
+          </a:solidFill>
+          <a:ln>
+            <a:noFill/>
+          </a:ln>
+        </p:spPr>
+        <p:style>
+          <a:lnRef idx="1">
+            <a:schemeClr val="accent1"/>
+          </a:lnRef>
+          <a:fillRef idx="3">
+            <a:schemeClr val="accent1"/>
+          </a:fillRef>
+          <a:effectRef idx="2">
+            <a:schemeClr val="accent1"/>
+          </a:effectRef>
+          <a:fontRef idx="minor">
+            <a:schemeClr val="lt1"/>
+          </a:fontRef>
+        </p:style>
+        <p:txBody>
+          <a:bodyPr rtlCol="0" anchor="ctr"/>
+          <a:lstStyle/>
+          <a:p>
+            <a:pPr algn="ctr"/>
+          </a:p>
+        </p:txBody>
+      </p:sp>
+      <p:sp>
+        <p:nvSpPr>
+          <p:cNvPr id="7" name="TextBox 6"/>
+          <p:cNvSpPr txBox="1"/>
+          <p:nvPr/>
+        </p:nvSpPr>
+        <p:spPr>
+          <a:xfrm>
+            <a:off x="777240" y="1399031"/>
+            <a:ext cx="10774375" cy="822959"/>
+          </a:xfrm>
+          <a:prstGeom prst="rect">
+            <a:avLst/>
+          </a:prstGeom>
+          <a:noFill/>
+        </p:spPr>
+        <p:txBody>
+          <a:bodyPr wrap="square">
+            <a:spAutoFit/>
+          </a:bodyPr>
+          <a:lstStyle/>
+          <a:p>
+            <a:r>
+              <a:rPr sz="1200" b="1" i="0">
+                <a:solidFill>
+                  <a:srgbClr val="269CCB"/>
+                </a:solidFill>
+                <a:latin typeface="Calibri"/>
+              </a:rPr>
+              <a:t>Info</a:t>
+            </a:r>
+          </a:p>
+          <a:p>
+            <a:pPr>
+              <a:spcBef>
+                <a:spcPts val="400"/>
+              </a:spcBef>
+            </a:pPr>
+            <a:r>
+              <a:rPr sz="1400" b="0" i="0">
+                <a:solidFill>
+                  <a:srgbClr val="333333"/>
+                </a:solidFill>
+                <a:latin typeface="Calibri"/>
+              </a:rPr>
+              <a:t>Entregable: Diagrama C4 Container en Mermaid + tabla de 3 contratos + 3 riesgos de distribución</a:t>
+            </a:r>
+          </a:p>
+        </p:txBody>
+      </p:sp>
+      <p:sp>
+        <p:nvSpPr>
+          <p:cNvPr id="8" name="Rounded Rectangle 7"/>
+          <p:cNvSpPr/>
+          <p:nvPr/>
+        </p:nvSpPr>
+        <p:spPr>
+          <a:xfrm>
+            <a:off x="457200" y="2478024"/>
+            <a:ext cx="11277295" cy="1051560"/>
+          </a:xfrm>
+          <a:prstGeom prst="roundRect">
+            <a:avLst>
+              <a:gd name="adj" fmla="val 12000"/>
+            </a:avLst>
+          </a:prstGeom>
+          <a:solidFill>
+            <a:srgbClr val="FFF8E1"/>
+          </a:solidFill>
+          <a:ln>
+            <a:noFill/>
+          </a:ln>
+        </p:spPr>
+        <p:style>
+          <a:lnRef idx="1">
+            <a:schemeClr val="accent1"/>
+          </a:lnRef>
+          <a:fillRef idx="3">
+            <a:schemeClr val="accent1"/>
+          </a:fillRef>
+          <a:effectRef idx="2">
+            <a:schemeClr val="accent1"/>
+          </a:effectRef>
+          <a:fontRef idx="minor">
+            <a:schemeClr val="lt1"/>
+          </a:fontRef>
+        </p:style>
+        <p:txBody>
+          <a:bodyPr rtlCol="0" anchor="ctr"/>
+          <a:lstStyle/>
+          <a:p>
+            <a:pPr algn="ctr"/>
+          </a:p>
+        </p:txBody>
+      </p:sp>
+      <p:sp>
+        <p:nvSpPr>
+          <p:cNvPr id="9" name="Rectangle 8"/>
+          <p:cNvSpPr/>
+          <p:nvPr/>
+        </p:nvSpPr>
+        <p:spPr>
+          <a:xfrm>
+            <a:off x="457200" y="2478024"/>
+            <a:ext cx="128016" cy="1051560"/>
+          </a:xfrm>
+          <a:prstGeom prst="rect">
+            <a:avLst/>
+          </a:prstGeom>
+          <a:solidFill>
+            <a:srgbClr val="FFD000"/>
+          </a:solidFill>
+          <a:ln>
+            <a:noFill/>
+          </a:ln>
+        </p:spPr>
+        <p:style>
+          <a:lnRef idx="1">
+            <a:schemeClr val="accent1"/>
+          </a:lnRef>
+          <a:fillRef idx="3">
+            <a:schemeClr val="accent1"/>
+          </a:fillRef>
+          <a:effectRef idx="2">
+            <a:schemeClr val="accent1"/>
+          </a:effectRef>
+          <a:fontRef idx="minor">
+            <a:schemeClr val="lt1"/>
+          </a:fontRef>
+        </p:style>
+        <p:txBody>
+          <a:bodyPr rtlCol="0" anchor="ctr"/>
+          <a:lstStyle/>
+          <a:p>
+            <a:pPr algn="ctr"/>
+          </a:p>
+        </p:txBody>
+      </p:sp>
+      <p:sp>
+        <p:nvSpPr>
+          <p:cNvPr id="10" name="TextBox 9"/>
+          <p:cNvSpPr txBox="1"/>
+          <p:nvPr/>
+        </p:nvSpPr>
+        <p:spPr>
+          <a:xfrm>
+            <a:off x="777240" y="2615184"/>
+            <a:ext cx="10774375" cy="822959"/>
+          </a:xfrm>
+          <a:prstGeom prst="rect">
+            <a:avLst/>
+          </a:prstGeom>
+          <a:noFill/>
+        </p:spPr>
+        <p:txBody>
+          <a:bodyPr wrap="square">
+            <a:spAutoFit/>
+          </a:bodyPr>
+          <a:lstStyle/>
+          <a:p>
+            <a:r>
+              <a:rPr sz="1200" b="1" i="0">
+                <a:solidFill>
+                  <a:srgbClr val="FFD000"/>
+                </a:solidFill>
+                <a:latin typeface="Calibri"/>
+              </a:rPr>
+              <a:t>Aclaración</a:t>
+            </a:r>
+          </a:p>
+          <a:p>
+            <a:pPr>
+              <a:spcBef>
+                <a:spcPts val="400"/>
+              </a:spcBef>
+            </a:pPr>
+            <a:r>
+              <a:rPr sz="1400" b="0" i="0">
+                <a:solidFill>
+                  <a:srgbClr val="333333"/>
+                </a:solidFill>
+                <a:latin typeface="Calibri"/>
+              </a:rPr>
+              <a:t>Subir evidencias al paquete CloudLite (Drive/repo) y a la plataforma del curso en la fecha que indique el docente.</a:t>
+            </a:r>
+          </a:p>
+        </p:txBody>
+      </p:sp>
+      <p:sp>
+        <p:nvSpPr>
+          <p:cNvPr id="11" name="Rounded Rectangle 10"/>
+          <p:cNvSpPr/>
+          <p:nvPr/>
+        </p:nvSpPr>
+        <p:spPr>
+          <a:xfrm>
+            <a:off x="457200" y="3694176"/>
+            <a:ext cx="11277295" cy="1051560"/>
+          </a:xfrm>
+          <a:prstGeom prst="roundRect">
+            <a:avLst>
+              <a:gd name="adj" fmla="val 12000"/>
+            </a:avLst>
+          </a:prstGeom>
+          <a:solidFill>
+            <a:srgbClr val="FBE4E4"/>
+          </a:solidFill>
+          <a:ln>
+            <a:noFill/>
+          </a:ln>
+        </p:spPr>
+        <p:style>
+          <a:lnRef idx="1">
+            <a:schemeClr val="accent1"/>
+          </a:lnRef>
+          <a:fillRef idx="3">
+            <a:schemeClr val="accent1"/>
+          </a:fillRef>
+          <a:effectRef idx="2">
+            <a:schemeClr val="accent1"/>
+          </a:effectRef>
+          <a:fontRef idx="minor">
+            <a:schemeClr val="lt1"/>
+          </a:fontRef>
+        </p:style>
+        <p:txBody>
+          <a:bodyPr rtlCol="0" anchor="ctr"/>
+          <a:lstStyle/>
+          <a:p>
+            <a:pPr algn="ctr"/>
+          </a:p>
+        </p:txBody>
+      </p:sp>
+      <p:sp>
+        <p:nvSpPr>
+          <p:cNvPr id="12" name="Rectangle 11"/>
+          <p:cNvSpPr/>
+          <p:nvPr/>
+        </p:nvSpPr>
+        <p:spPr>
+          <a:xfrm>
+            <a:off x="457200" y="3694176"/>
+            <a:ext cx="128016" cy="1051560"/>
+          </a:xfrm>
+          <a:prstGeom prst="rect">
+            <a:avLst/>
+          </a:prstGeom>
+          <a:solidFill>
+            <a:srgbClr val="A02030"/>
+          </a:solidFill>
+          <a:ln>
+            <a:noFill/>
+          </a:ln>
+        </p:spPr>
+        <p:style>
+          <a:lnRef idx="1">
+            <a:schemeClr val="accent1"/>
+          </a:lnRef>
+          <a:fillRef idx="3">
+            <a:schemeClr val="accent1"/>
+          </a:fillRef>
+          <a:effectRef idx="2">
+            <a:schemeClr val="accent1"/>
+          </a:effectRef>
+          <a:fontRef idx="minor">
+            <a:schemeClr val="lt1"/>
+          </a:fontRef>
+        </p:style>
+        <p:txBody>
+          <a:bodyPr rtlCol="0" anchor="ctr"/>
+          <a:lstStyle/>
+          <a:p>
+            <a:pPr algn="ctr"/>
+          </a:p>
+        </p:txBody>
+      </p:sp>
+      <p:sp>
+        <p:nvSpPr>
+          <p:cNvPr id="13" name="TextBox 12"/>
+          <p:cNvSpPr txBox="1"/>
+          <p:nvPr/>
+        </p:nvSpPr>
+        <p:spPr>
+          <a:xfrm>
+            <a:off x="777240" y="3831336"/>
+            <a:ext cx="10774375" cy="822959"/>
+          </a:xfrm>
+          <a:prstGeom prst="rect">
+            <a:avLst/>
+          </a:prstGeom>
+          <a:noFill/>
+        </p:spPr>
+        <p:txBody>
+          <a:bodyPr wrap="square">
+            <a:spAutoFit/>
+          </a:bodyPr>
+          <a:lstStyle/>
+          <a:p>
+            <a:r>
+              <a:rPr sz="1200" b="1" i="0">
+                <a:solidFill>
+                  <a:srgbClr val="A02030"/>
+                </a:solidFill>
+                <a:latin typeface="Calibri"/>
+              </a:rPr>
+              <a:t>Atención</a:t>
+            </a:r>
+          </a:p>
+          <a:p>
+            <a:pPr>
+              <a:spcBef>
+                <a:spcPts val="400"/>
+              </a:spcBef>
+            </a:pPr>
+            <a:r>
+              <a:rPr sz="1400" b="0" i="0">
+                <a:solidFill>
+                  <a:srgbClr val="333333"/>
+                </a:solidFill>
+                <a:latin typeface="Calibri"/>
+              </a:rPr>
+              <a:t>Sin cloud de pago ni instalaciones obligatorias de hipervisores/Docker Desktop.</a:t>
+            </a:r>
+          </a:p>
+        </p:txBody>
+      </p:sp>
+      <p:sp>
+        <p:nvSpPr>
+          <p:cNvPr id="14" name="TextBox 13"/>
+          <p:cNvSpPr txBox="1"/>
+          <p:nvPr/>
+        </p:nvSpPr>
+        <p:spPr>
+          <a:xfrm>
+            <a:off x="11185855" y="6473952"/>
+            <a:ext cx="640080" cy="274320"/>
+          </a:xfrm>
+          <a:prstGeom prst="rect">
+            <a:avLst/>
+          </a:prstGeom>
+          <a:noFill/>
+        </p:spPr>
+        <p:txBody>
+          <a:bodyPr wrap="square">
+            <a:spAutoFit/>
+          </a:bodyPr>
+          <a:lstStyle/>
+          <a:p>
+            <a:pPr algn="r"/>
+            <a:r>
+              <a:rPr sz="1100" b="0" i="0">
+                <a:solidFill>
+                  <a:srgbClr val="666666"/>
+                </a:solidFill>
+                <a:latin typeface="Calibri"/>
+              </a:rPr>
+              <a:t>43</a:t>
+            </a:r>
+          </a:p>
+        </p:txBody>
+      </p:sp>
+    </p:spTree>
+  </p:cSld>
+  <p:clrMapOvr>
+    <a:masterClrMapping/>
+  </p:clrMapOvr>
+</p:sld>
+</file>
+
+<file path=ppt/slides/slide44.xml><?xml version="1.0" encoding="utf-8"?>
 <p:sld xmlns:a="http://schemas.openxmlformats.org/drawingml/2006/main" xmlns:p="http://schemas.openxmlformats.org/presentationml/2006/main" xmlns:r="http://schemas.openxmlformats.org/officeDocument/2006/relationships">
   <p:cSld>
     <p:bg>

--- a/Arquitectura de Sistemas Computacionales/Clases/Clase 4 - Microservicios y arquitecturas distribuidas/Presentacion.pptx
+++ b/Arquitectura de Sistemas Computacionales/Clases/Clase 4 - Microservicios y arquitecturas distribuidas/Presentacion.pptx
@@ -15389,7 +15389,7 @@
                 </a:solidFill>
                 <a:latin typeface="Calibri"/>
               </a:rPr>
-              <a:t>El diagrama se entrega como código Mermaid dentro de la plataforma del curso, no como imagen</a:t>
+              <a:t>El diagrama se entrega como código Mermaid en la plataforma del curso, no como imagen</a:t>
             </a:r>
           </a:p>
         </p:txBody>
@@ -16336,7 +16336,7 @@
                 </a:solidFill>
                 <a:latin typeface="Calibri"/>
               </a:rPr>
-              <a:t>draw.io o Excalidraw para bocetar · Mermaid dentro de la plataforma del curso para entregar</a:t>
+              <a:t>Navegador · editor de diagramas del curso (Mermaid) · boceto libre opcional</a:t>
             </a:r>
           </a:p>
           <a:p>
@@ -17174,7 +17174,7 @@
                 </a:solidFill>
                 <a:latin typeface="Calibri"/>
               </a:rPr>
-              <a:t>Subir evidencias al paquete CloudLite (Drive/repo) y a la plataforma del curso en la fecha que indique el docente.</a:t>
+              <a:t>Subir evidencias al paquete CloudLite (Drive/repo) y a la plataforma del curso (la plataforma del curso) en la fecha que indique el docente.</a:t>
             </a:r>
           </a:p>
         </p:txBody>

--- a/Arquitectura de Sistemas Computacionales/Clases/Clase 4 - Microservicios y arquitecturas distribuidas/Presentacion.pptx
+++ b/Arquitectura de Sistemas Computacionales/Clases/Clase 4 - Microservicios y arquitecturas distribuidas/Presentacion.pptx
@@ -15,40 +15,35 @@
     <p:sldId id="263" r:id="rId14"/>
     <p:sldId id="264" r:id="rId15"/>
     <p:sldId id="265" r:id="rId16"/>
-    <p:sldId id="266" r:id="rId17"/>
-    <p:sldId id="267" r:id="rId18"/>
-    <p:sldId id="268" r:id="rId19"/>
-    <p:sldId id="269" r:id="rId20"/>
-    <p:sldId id="270" r:id="rId21"/>
-    <p:sldId id="271" r:id="rId22"/>
-    <p:sldId id="272" r:id="rId23"/>
-    <p:sldId id="273" r:id="rId24"/>
-    <p:sldId id="274" r:id="rId25"/>
-    <p:sldId id="275" r:id="rId26"/>
-    <p:sldId id="276" r:id="rId27"/>
-    <p:sldId id="277" r:id="rId28"/>
-    <p:sldId id="278" r:id="rId29"/>
-    <p:sldId id="279" r:id="rId30"/>
-    <p:sldId id="280" r:id="rId31"/>
-    <p:sldId id="281" r:id="rId32"/>
-    <p:sldId id="282" r:id="rId33"/>
-    <p:sldId id="283" r:id="rId34"/>
-    <p:sldId id="284" r:id="rId35"/>
-    <p:sldId id="285" r:id="rId36"/>
-    <p:sldId id="286" r:id="rId37"/>
-    <p:sldId id="287" r:id="rId38"/>
-    <p:sldId id="288" r:id="rId39"/>
-    <p:sldId id="289" r:id="rId40"/>
-    <p:sldId id="290" r:id="rId41"/>
-    <p:sldId id="291" r:id="rId42"/>
-    <p:sldId id="292" r:id="rId43"/>
-    <p:sldId id="293" r:id="rId44"/>
-    <p:sldId id="294" r:id="rId45"/>
-    <p:sldId id="295" r:id="rId46"/>
-    <p:sldId id="296" r:id="rId47"/>
-    <p:sldId id="297" r:id="rId48"/>
-    <p:sldId id="298" r:id="rId49"/>
-    <p:sldId id="299" r:id="rId50"/>
+    <p:sldId id="266" r:id="rId18"/>
+    <p:sldId id="267" r:id="rId19"/>
+    <p:sldId id="268" r:id="rId20"/>
+    <p:sldId id="269" r:id="rId21"/>
+    <p:sldId id="270" r:id="rId22"/>
+    <p:sldId id="271" r:id="rId23"/>
+    <p:sldId id="272" r:id="rId24"/>
+    <p:sldId id="273" r:id="rId25"/>
+    <p:sldId id="274" r:id="rId26"/>
+    <p:sldId id="275" r:id="rId27"/>
+    <p:sldId id="276" r:id="rId28"/>
+    <p:sldId id="277" r:id="rId29"/>
+    <p:sldId id="278" r:id="rId30"/>
+    <p:sldId id="279" r:id="rId31"/>
+    <p:sldId id="280" r:id="rId32"/>
+    <p:sldId id="281" r:id="rId33"/>
+    <p:sldId id="282" r:id="rId34"/>
+    <p:sldId id="283" r:id="rId35"/>
+    <p:sldId id="284" r:id="rId36"/>
+    <p:sldId id="285" r:id="rId37"/>
+    <p:sldId id="286" r:id="rId38"/>
+    <p:sldId id="287" r:id="rId39"/>
+    <p:sldId id="288" r:id="rId40"/>
+    <p:sldId id="289" r:id="rId41"/>
+    <p:sldId id="290" r:id="rId42"/>
+    <p:sldId id="291" r:id="rId43"/>
+    <p:sldId id="292" r:id="rId44"/>
+    <p:sldId id="293" r:id="rId45"/>
+    <p:sldId id="294" r:id="rId46"/>
   </p:sldIdLst>
   <p:sldSz cx="12191695" cy="6858000" type="screen4x3"/>
   <p:notesSz cx="6858000" cy="9144000"/>
@@ -148,6 +143,1088 @@
     </a:lvl9pPr>
   </p:defaultTextStyle>
 </p:presentation>
+</file>
+
+<file path=ppt/notesMasters/notesMaster1.xml><?xml version="1.0" encoding="utf-8"?>
+<p:notesMaster xmlns:a="http://schemas.openxmlformats.org/drawingml/2006/main" xmlns:p="http://schemas.openxmlformats.org/presentationml/2006/main" xmlns:r="http://schemas.openxmlformats.org/officeDocument/2006/relationships">
+  <p:cSld>
+    <p:bg>
+      <p:bgRef idx="1001">
+        <a:schemeClr val="bg1"/>
+      </p:bgRef>
+    </p:bg>
+    <p:spTree>
+      <p:nvGrpSpPr>
+        <p:cNvPr id="1" name=""/>
+        <p:cNvGrpSpPr/>
+        <p:nvPr/>
+      </p:nvGrpSpPr>
+      <p:grpSpPr>
+        <a:xfrm>
+          <a:off x="0" y="0"/>
+          <a:ext cx="0" cy="0"/>
+          <a:chOff x="0" y="0"/>
+          <a:chExt cx="0" cy="0"/>
+        </a:xfrm>
+      </p:grpSpPr>
+      <p:sp>
+        <p:nvSpPr>
+          <p:cNvPr id="2" name="Header Placeholder 1"/>
+          <p:cNvSpPr>
+            <a:spLocks noGrp="1"/>
+          </p:cNvSpPr>
+          <p:nvPr>
+            <p:ph type="hdr" sz="quarter"/>
+          </p:nvPr>
+        </p:nvSpPr>
+        <p:spPr>
+          <a:xfrm>
+            <a:off x="0" y="0"/>
+            <a:ext cx="2971800" cy="457200"/>
+          </a:xfrm>
+          <a:prstGeom prst="rect">
+            <a:avLst/>
+          </a:prstGeom>
+        </p:spPr>
+        <p:txBody>
+          <a:bodyPr vert="horz" lIns="91440" tIns="45720" rIns="91440" bIns="45720" rtlCol="0"/>
+          <a:lstStyle>
+            <a:lvl1pPr algn="l">
+              <a:defRPr sz="1200"/>
+            </a:lvl1pPr>
+          </a:lstStyle>
+          <a:p>
+            <a:endParaRPr lang="en-US"/>
+          </a:p>
+        </p:txBody>
+      </p:sp>
+      <p:sp>
+        <p:nvSpPr>
+          <p:cNvPr id="3" name="Date Placeholder 2"/>
+          <p:cNvSpPr>
+            <a:spLocks noGrp="1"/>
+          </p:cNvSpPr>
+          <p:nvPr>
+            <p:ph type="dt" idx="1"/>
+          </p:nvPr>
+        </p:nvSpPr>
+        <p:spPr>
+          <a:xfrm>
+            <a:off x="3884613" y="0"/>
+            <a:ext cx="2971800" cy="457200"/>
+          </a:xfrm>
+          <a:prstGeom prst="rect">
+            <a:avLst/>
+          </a:prstGeom>
+        </p:spPr>
+        <p:txBody>
+          <a:bodyPr vert="horz" lIns="91440" tIns="45720" rIns="91440" bIns="45720" rtlCol="0"/>
+          <a:lstStyle>
+            <a:lvl1pPr algn="r">
+              <a:defRPr sz="1200"/>
+            </a:lvl1pPr>
+          </a:lstStyle>
+          <a:p>
+            <a:fld id="{0F89C1C7-3DCD-1040-A9CF-14679D8B5DDD}" type="datetimeFigureOut">
+              <a:rPr lang="en-US" smtClean="0"/>
+              <a:t>10/17/16</a:t>
+            </a:fld>
+            <a:endParaRPr lang="en-US"/>
+          </a:p>
+        </p:txBody>
+      </p:sp>
+      <p:sp>
+        <p:nvSpPr>
+          <p:cNvPr id="4" name="Slide Image Placeholder 3"/>
+          <p:cNvSpPr>
+            <a:spLocks noGrp="1" noRot="1" noChangeAspect="1"/>
+          </p:cNvSpPr>
+          <p:nvPr>
+            <p:ph type="sldImg" idx="2"/>
+          </p:nvPr>
+        </p:nvSpPr>
+        <p:spPr>
+          <a:xfrm>
+            <a:off x="1143000" y="685800"/>
+            <a:ext cx="4572000" cy="3429000"/>
+          </a:xfrm>
+          <a:prstGeom prst="rect">
+            <a:avLst/>
+          </a:prstGeom>
+          <a:noFill/>
+          <a:ln w="12700">
+            <a:solidFill>
+              <a:prstClr val="black"/>
+            </a:solidFill>
+          </a:ln>
+        </p:spPr>
+        <p:txBody>
+          <a:bodyPr vert="horz" lIns="91440" tIns="45720" rIns="91440" bIns="45720" rtlCol="0" anchor="ctr"/>
+          <a:lstStyle/>
+          <a:p>
+            <a:endParaRPr lang="en-US"/>
+          </a:p>
+        </p:txBody>
+      </p:sp>
+      <p:sp>
+        <p:nvSpPr>
+          <p:cNvPr id="5" name="Notes Placeholder 4"/>
+          <p:cNvSpPr>
+            <a:spLocks noGrp="1"/>
+          </p:cNvSpPr>
+          <p:nvPr>
+            <p:ph type="body" sz="quarter" idx="3"/>
+          </p:nvPr>
+        </p:nvSpPr>
+        <p:spPr>
+          <a:xfrm>
+            <a:off x="685800" y="4343400"/>
+            <a:ext cx="5486400" cy="4114800"/>
+          </a:xfrm>
+          <a:prstGeom prst="rect">
+            <a:avLst/>
+          </a:prstGeom>
+        </p:spPr>
+        <p:txBody>
+          <a:bodyPr vert="horz" lIns="91440" tIns="45720" rIns="91440" bIns="45720" rtlCol="0"/>
+          <a:lstStyle/>
+          <a:p>
+            <a:pPr lvl="0"/>
+            <a:r>
+              <a:rPr lang="en-US" smtClean="0"/>
+              <a:t>Click to edit Master text styles</a:t>
+            </a:r>
+          </a:p>
+          <a:p>
+            <a:pPr lvl="1"/>
+            <a:r>
+              <a:rPr lang="en-US" smtClean="0"/>
+              <a:t>Second level</a:t>
+            </a:r>
+          </a:p>
+          <a:p>
+            <a:pPr lvl="2"/>
+            <a:r>
+              <a:rPr lang="en-US" smtClean="0"/>
+              <a:t>Third level</a:t>
+            </a:r>
+          </a:p>
+          <a:p>
+            <a:pPr lvl="3"/>
+            <a:r>
+              <a:rPr lang="en-US" smtClean="0"/>
+              <a:t>Fourth level</a:t>
+            </a:r>
+          </a:p>
+          <a:p>
+            <a:pPr lvl="4"/>
+            <a:r>
+              <a:rPr lang="en-US" smtClean="0"/>
+              <a:t>Fifth level</a:t>
+            </a:r>
+            <a:endParaRPr lang="en-US"/>
+          </a:p>
+        </p:txBody>
+      </p:sp>
+      <p:sp>
+        <p:nvSpPr>
+          <p:cNvPr id="6" name="Footer Placeholder 5"/>
+          <p:cNvSpPr>
+            <a:spLocks noGrp="1"/>
+          </p:cNvSpPr>
+          <p:nvPr>
+            <p:ph type="ftr" sz="quarter" idx="4"/>
+          </p:nvPr>
+        </p:nvSpPr>
+        <p:spPr>
+          <a:xfrm>
+            <a:off x="0" y="8685213"/>
+            <a:ext cx="2971800" cy="457200"/>
+          </a:xfrm>
+          <a:prstGeom prst="rect">
+            <a:avLst/>
+          </a:prstGeom>
+        </p:spPr>
+        <p:txBody>
+          <a:bodyPr vert="horz" lIns="91440" tIns="45720" rIns="91440" bIns="45720" rtlCol="0" anchor="b"/>
+          <a:lstStyle>
+            <a:lvl1pPr algn="l">
+              <a:defRPr sz="1200"/>
+            </a:lvl1pPr>
+          </a:lstStyle>
+          <a:p>
+            <a:endParaRPr lang="en-US"/>
+          </a:p>
+        </p:txBody>
+      </p:sp>
+      <p:sp>
+        <p:nvSpPr>
+          <p:cNvPr id="7" name="Slide Number Placeholder 6"/>
+          <p:cNvSpPr>
+            <a:spLocks noGrp="1"/>
+          </p:cNvSpPr>
+          <p:nvPr>
+            <p:ph type="sldNum" sz="quarter" idx="5"/>
+          </p:nvPr>
+        </p:nvSpPr>
+        <p:spPr>
+          <a:xfrm>
+            <a:off x="3884613" y="8685213"/>
+            <a:ext cx="2971800" cy="457200"/>
+          </a:xfrm>
+          <a:prstGeom prst="rect">
+            <a:avLst/>
+          </a:prstGeom>
+        </p:spPr>
+        <p:txBody>
+          <a:bodyPr vert="horz" lIns="91440" tIns="45720" rIns="91440" bIns="45720" rtlCol="0" anchor="b"/>
+          <a:lstStyle>
+            <a:lvl1pPr algn="r">
+              <a:defRPr sz="1200"/>
+            </a:lvl1pPr>
+          </a:lstStyle>
+          <a:p>
+            <a:fld id="{BB5E49A5-4136-284D-997B-48E1D791AD67}" type="slidenum">
+              <a:rPr lang="en-US" smtClean="0"/>
+              <a:t>‹#›</a:t>
+            </a:fld>
+            <a:endParaRPr lang="en-US"/>
+          </a:p>
+        </p:txBody>
+      </p:sp>
+    </p:spTree>
+    <p:extLst>
+      <p:ext uri="{BB962C8B-B14F-4D97-AF65-F5344CB8AC3E}">
+        <p14:creationId xmlns:p14="http://schemas.microsoft.com/office/powerpoint/2010/main" val="2623252185"/>
+      </p:ext>
+    </p:extLst>
+  </p:cSld>
+  <p:clrMap bg1="lt1" tx1="dk1" bg2="lt2" tx2="dk2" accent1="accent1" accent2="accent2" accent3="accent3" accent4="accent4" accent5="accent5" accent6="accent6" hlink="hlink" folHlink="folHlink"/>
+  <p:notesStyle>
+    <a:lvl1pPr marL="0" algn="l" defTabSz="457200" rtl="0" eaLnBrk="1" latinLnBrk="0" hangingPunct="1">
+      <a:defRPr sz="1200" kern="1200">
+        <a:solidFill>
+          <a:schemeClr val="tx1"/>
+        </a:solidFill>
+        <a:latin typeface="+mn-lt"/>
+        <a:ea typeface="+mn-ea"/>
+        <a:cs typeface="+mn-cs"/>
+      </a:defRPr>
+    </a:lvl1pPr>
+    <a:lvl2pPr marL="457200" algn="l" defTabSz="457200" rtl="0" eaLnBrk="1" latinLnBrk="0" hangingPunct="1">
+      <a:defRPr sz="1200" kern="1200">
+        <a:solidFill>
+          <a:schemeClr val="tx1"/>
+        </a:solidFill>
+        <a:latin typeface="+mn-lt"/>
+        <a:ea typeface="+mn-ea"/>
+        <a:cs typeface="+mn-cs"/>
+      </a:defRPr>
+    </a:lvl2pPr>
+    <a:lvl3pPr marL="914400" algn="l" defTabSz="457200" rtl="0" eaLnBrk="1" latinLnBrk="0" hangingPunct="1">
+      <a:defRPr sz="1200" kern="1200">
+        <a:solidFill>
+          <a:schemeClr val="tx1"/>
+        </a:solidFill>
+        <a:latin typeface="+mn-lt"/>
+        <a:ea typeface="+mn-ea"/>
+        <a:cs typeface="+mn-cs"/>
+      </a:defRPr>
+    </a:lvl3pPr>
+    <a:lvl4pPr marL="1371600" algn="l" defTabSz="457200" rtl="0" eaLnBrk="1" latinLnBrk="0" hangingPunct="1">
+      <a:defRPr sz="1200" kern="1200">
+        <a:solidFill>
+          <a:schemeClr val="tx1"/>
+        </a:solidFill>
+        <a:latin typeface="+mn-lt"/>
+        <a:ea typeface="+mn-ea"/>
+        <a:cs typeface="+mn-cs"/>
+      </a:defRPr>
+    </a:lvl4pPr>
+    <a:lvl5pPr marL="1828800" algn="l" defTabSz="457200" rtl="0" eaLnBrk="1" latinLnBrk="0" hangingPunct="1">
+      <a:defRPr sz="1200" kern="1200">
+        <a:solidFill>
+          <a:schemeClr val="tx1"/>
+        </a:solidFill>
+        <a:latin typeface="+mn-lt"/>
+        <a:ea typeface="+mn-ea"/>
+        <a:cs typeface="+mn-cs"/>
+      </a:defRPr>
+    </a:lvl5pPr>
+    <a:lvl6pPr marL="2286000" algn="l" defTabSz="457200" rtl="0" eaLnBrk="1" latinLnBrk="0" hangingPunct="1">
+      <a:defRPr sz="1200" kern="1200">
+        <a:solidFill>
+          <a:schemeClr val="tx1"/>
+        </a:solidFill>
+        <a:latin typeface="+mn-lt"/>
+        <a:ea typeface="+mn-ea"/>
+        <a:cs typeface="+mn-cs"/>
+      </a:defRPr>
+    </a:lvl6pPr>
+    <a:lvl7pPr marL="2743200" algn="l" defTabSz="457200" rtl="0" eaLnBrk="1" latinLnBrk="0" hangingPunct="1">
+      <a:defRPr sz="1200" kern="1200">
+        <a:solidFill>
+          <a:schemeClr val="tx1"/>
+        </a:solidFill>
+        <a:latin typeface="+mn-lt"/>
+        <a:ea typeface="+mn-ea"/>
+        <a:cs typeface="+mn-cs"/>
+      </a:defRPr>
+    </a:lvl7pPr>
+    <a:lvl8pPr marL="3200400" algn="l" defTabSz="457200" rtl="0" eaLnBrk="1" latinLnBrk="0" hangingPunct="1">
+      <a:defRPr sz="1200" kern="1200">
+        <a:solidFill>
+          <a:schemeClr val="tx1"/>
+        </a:solidFill>
+        <a:latin typeface="+mn-lt"/>
+        <a:ea typeface="+mn-ea"/>
+        <a:cs typeface="+mn-cs"/>
+      </a:defRPr>
+    </a:lvl8pPr>
+    <a:lvl9pPr marL="3657600" algn="l" defTabSz="457200" rtl="0" eaLnBrk="1" latinLnBrk="0" hangingPunct="1">
+      <a:defRPr sz="1200" kern="1200">
+        <a:solidFill>
+          <a:schemeClr val="tx1"/>
+        </a:solidFill>
+        <a:latin typeface="+mn-lt"/>
+        <a:ea typeface="+mn-ea"/>
+        <a:cs typeface="+mn-cs"/>
+      </a:defRPr>
+    </a:lvl9pPr>
+  </p:notesStyle>
+</p:notesMaster>
+</file>
+
+<file path=ppt/notesSlides/notesSlide1.xml><?xml version="1.0" encoding="utf-8"?>
+<p:notes xmlns:a="http://schemas.openxmlformats.org/drawingml/2006/main" xmlns:p="http://schemas.openxmlformats.org/presentationml/2006/main" xmlns:r="http://schemas.openxmlformats.org/officeDocument/2006/relationships">
+  <p:cSld>
+    <p:spTree>
+      <p:nvGrpSpPr>
+        <p:cNvPr id="1" name=""/>
+        <p:cNvGrpSpPr/>
+        <p:nvPr/>
+      </p:nvGrpSpPr>
+      <p:grpSpPr>
+        <a:xfrm>
+          <a:off x="0" y="0"/>
+          <a:ext cx="0" cy="0"/>
+          <a:chOff x="0" y="0"/>
+          <a:chExt cx="0" cy="0"/>
+        </a:xfrm>
+      </p:grpSpPr>
+      <p:sp>
+        <p:nvSpPr>
+          <p:cNvPr id="2" name="Slide Image Placeholder 1"/>
+          <p:cNvSpPr>
+            <a:spLocks noGrp="1"/>
+          </p:cNvSpPr>
+          <p:nvPr>
+            <p:ph type="sldImg" idx="2"/>
+          </p:nvPr>
+        </p:nvSpPr>
+        <p:spPr/>
+      </p:sp>
+      <p:sp>
+        <p:nvSpPr>
+          <p:cNvPr id="3" name="Notes Placeholder 2"/>
+          <p:cNvSpPr>
+            <a:spLocks noGrp="1"/>
+          </p:cNvSpPr>
+          <p:nvPr>
+            <p:ph type="body" idx="3" sz="quarter"/>
+          </p:nvPr>
+        </p:nvSpPr>
+        <p:spPr/>
+        <p:txBody>
+          <a:bodyPr/>
+          <a:lstStyle/>
+          <a:p>
+            <a:r>
+              <a:t>Empecemos por el termino que el estudiante trae con mala fama.</a:t>
+            </a:r>
+          </a:p>
+          <a:p/>
+          <a:p>
+            <a:r>
+              <a:t>La palabra decisiva es independiente, y admite una prueba de una linea que el docente debe usar como criterio de correccion: si para poner en produccion el servicio A hay que desplegar tambien el servicio B, entonces A y B no son dos microservicios, son un solo sistema partido en dos repositorios, con todos los costos de la distribucion y ninguno de sus beneficios.</a:t>
+            </a:r>
+          </a:p>
+          <a:p/>
+          <a:p>
+            <a:r>
+              <a:t>La decision se sostiene con exactamente dos criterios.</a:t>
+            </a:r>
+          </a:p>
+          <a:p/>
+          <a:p>
+            <a:r>
+              <a:t>La razon de fondo es la que se repite en el cierre: la cantidad de servicios que una organizacion sostiene es funcion del numero de equipos autonomos, no del gusto por la modularidad.</a:t>
+            </a:r>
+          </a:p>
+        </p:txBody>
+      </p:sp>
+      <p:sp>
+        <p:nvSpPr>
+          <p:cNvPr id="4" name="Slide Number Placeholder 3"/>
+          <p:cNvSpPr>
+            <a:spLocks noGrp="1"/>
+          </p:cNvSpPr>
+          <p:nvPr>
+            <p:ph type="sldNum" idx="5" sz="quarter"/>
+          </p:nvPr>
+        </p:nvSpPr>
+        <p:spPr/>
+      </p:sp>
+    </p:spTree>
+  </p:cSld>
+  <p:clrMapOvr>
+    <a:masterClrMapping/>
+  </p:clrMapOvr>
+</p:notes>
+</file>
+
+<file path=ppt/notesSlides/notesSlide2.xml><?xml version="1.0" encoding="utf-8"?>
+<p:notes xmlns:a="http://schemas.openxmlformats.org/drawingml/2006/main" xmlns:p="http://schemas.openxmlformats.org/presentationml/2006/main" xmlns:r="http://schemas.openxmlformats.org/officeDocument/2006/relationships">
+  <p:cSld>
+    <p:spTree>
+      <p:nvGrpSpPr>
+        <p:cNvPr id="1" name=""/>
+        <p:cNvGrpSpPr/>
+        <p:nvPr/>
+      </p:nvGrpSpPr>
+      <p:grpSpPr>
+        <a:xfrm>
+          <a:off x="0" y="0"/>
+          <a:ext cx="0" cy="0"/>
+          <a:chOff x="0" y="0"/>
+          <a:chExt cx="0" cy="0"/>
+        </a:xfrm>
+      </p:grpSpPr>
+      <p:sp>
+        <p:nvSpPr>
+          <p:cNvPr id="2" name="Slide Image Placeholder 1"/>
+          <p:cNvSpPr>
+            <a:spLocks noGrp="1"/>
+          </p:cNvSpPr>
+          <p:nvPr>
+            <p:ph type="sldImg" idx="2"/>
+          </p:nvPr>
+        </p:nvSpPr>
+        <p:spPr/>
+      </p:sp>
+      <p:sp>
+        <p:nvSpPr>
+          <p:cNvPr id="3" name="Notes Placeholder 2"/>
+          <p:cNvSpPr>
+            <a:spLocks noGrp="1"/>
+          </p:cNvSpPr>
+          <p:nvPr>
+            <p:ph type="body" idx="3" sz="quarter"/>
+          </p:nvPr>
+        </p:nvSpPr>
+        <p:spPr/>
+        <p:txBody>
+          <a:bodyPr/>
+          <a:lstStyle/>
+          <a:p>
+            <a:r>
+              <a:t>Antes del ejemplo conviene fijar las tres reglas con las que se corrige el diagrama, porque cada una tiene puntos asignados y las tres se pierden por descuido y no por no saber.</a:t>
+            </a:r>
+          </a:p>
+          <a:p/>
+          <a:p>
+            <a:r>
+              <a:t>Nombre, tecnologia y responsabilidad en una frase.</a:t>
+            </a:r>
+          </a:p>
+          <a:p/>
+          <a:p>
+            <a:r>
+              <a:t>«HTTP» a secas no dice como viajan los datos y «SQL» a secas no dice sobre que transporte; con las dos mitades, cualquiera que lea el diagrama sabe por donde puede romperse.</a:t>
+            </a:r>
+          </a:p>
+        </p:txBody>
+      </p:sp>
+      <p:sp>
+        <p:nvSpPr>
+          <p:cNvPr id="4" name="Slide Number Placeholder 3"/>
+          <p:cNvSpPr>
+            <a:spLocks noGrp="1"/>
+          </p:cNvSpPr>
+          <p:nvPr>
+            <p:ph type="sldNum" idx="5" sz="quarter"/>
+          </p:nvPr>
+        </p:nvSpPr>
+        <p:spPr/>
+      </p:sp>
+    </p:spTree>
+  </p:cSld>
+  <p:clrMapOvr>
+    <a:masterClrMapping/>
+  </p:clrMapOvr>
+</p:notes>
+</file>
+
+<file path=ppt/notesSlides/notesSlide3.xml><?xml version="1.0" encoding="utf-8"?>
+<p:notes xmlns:a="http://schemas.openxmlformats.org/drawingml/2006/main" xmlns:p="http://schemas.openxmlformats.org/presentationml/2006/main" xmlns:r="http://schemas.openxmlformats.org/officeDocument/2006/relationships">
+  <p:cSld>
+    <p:spTree>
+      <p:nvGrpSpPr>
+        <p:cNvPr id="1" name=""/>
+        <p:cNvGrpSpPr/>
+        <p:nvPr/>
+      </p:nvGrpSpPr>
+      <p:grpSpPr>
+        <a:xfrm>
+          <a:off x="0" y="0"/>
+          <a:ext cx="0" cy="0"/>
+          <a:chOff x="0" y="0"/>
+          <a:chExt cx="0" cy="0"/>
+        </a:xfrm>
+      </p:grpSpPr>
+      <p:sp>
+        <p:nvSpPr>
+          <p:cNvPr id="2" name="Slide Image Placeholder 1"/>
+          <p:cNvSpPr>
+            <a:spLocks noGrp="1"/>
+          </p:cNvSpPr>
+          <p:nvPr>
+            <p:ph type="sldImg" idx="2"/>
+          </p:nvPr>
+        </p:nvSpPr>
+        <p:spPr/>
+      </p:sp>
+      <p:sp>
+        <p:nvSpPr>
+          <p:cNvPr id="3" name="Notes Placeholder 2"/>
+          <p:cNvSpPr>
+            <a:spLocks noGrp="1"/>
+          </p:cNvSpPr>
+          <p:nvPr>
+            <p:ph type="body" idx="3" sz="quarter"/>
+          </p:nvPr>
+        </p:nvSpPr>
+        <p:spPr/>
+        <p:txBody>
+          <a:bodyPr/>
+          <a:lstStyle/>
+          <a:p>
+            <a:r>
+              <a:t>Eso cambia lo que el docente tiene que ensenar, porque un boceto correcto escrito con la sintaxis equivocada no renderiza y entonces no hay diagrama que calificar.</a:t>
+            </a:r>
+          </a:p>
+          <a:p/>
+          <a:p>
+            <a:r>
+              <a:t>Vale la pena decir en voz alta que aqui el uso de una IA es legitimo y ademas recomendado: pasar un boceto a codigo Mermaid es justo la tarea mecanica en la que ayuda sin sustituir el criterio.</a:t>
+            </a:r>
+          </a:p>
+          <a:p/>
+          <a:p>
+            <a:r>
+              <a:t>Lo que NO delega el estudiante es la revision, y hay tres cosas que tiene que verificar el mismo antes de enviar, porque son las que la IA equivoca con frecuencia: que la primera linea sea C4Container, que la base de datos haya quedado como ContainerDb y no como Container, y que ninguna relacion haya perdido la mitad de su etiqueta.</a:t>
+            </a:r>
+          </a:p>
+        </p:txBody>
+      </p:sp>
+      <p:sp>
+        <p:nvSpPr>
+          <p:cNvPr id="4" name="Slide Number Placeholder 3"/>
+          <p:cNvSpPr>
+            <a:spLocks noGrp="1"/>
+          </p:cNvSpPr>
+          <p:nvPr>
+            <p:ph type="sldNum" idx="5" sz="quarter"/>
+          </p:nvPr>
+        </p:nvSpPr>
+        <p:spPr/>
+      </p:sp>
+    </p:spTree>
+  </p:cSld>
+  <p:clrMapOvr>
+    <a:masterClrMapping/>
+  </p:clrMapOvr>
+</p:notes>
+</file>
+
+<file path=ppt/notesSlides/notesSlide4.xml><?xml version="1.0" encoding="utf-8"?>
+<p:notes xmlns:a="http://schemas.openxmlformats.org/drawingml/2006/main" xmlns:p="http://schemas.openxmlformats.org/presentationml/2006/main" xmlns:r="http://schemas.openxmlformats.org/officeDocument/2006/relationships">
+  <p:cSld>
+    <p:spTree>
+      <p:nvGrpSpPr>
+        <p:cNvPr id="1" name=""/>
+        <p:cNvGrpSpPr/>
+        <p:nvPr/>
+      </p:nvGrpSpPr>
+      <p:grpSpPr>
+        <a:xfrm>
+          <a:off x="0" y="0"/>
+          <a:ext cx="0" cy="0"/>
+          <a:chOff x="0" y="0"/>
+          <a:chExt cx="0" cy="0"/>
+        </a:xfrm>
+      </p:grpSpPr>
+      <p:sp>
+        <p:nvSpPr>
+          <p:cNvPr id="2" name="Slide Image Placeholder 1"/>
+          <p:cNvSpPr>
+            <a:spLocks noGrp="1"/>
+          </p:cNvSpPr>
+          <p:nvPr>
+            <p:ph type="sldImg" idx="2"/>
+          </p:nvPr>
+        </p:nvSpPr>
+        <p:spPr/>
+      </p:sp>
+      <p:sp>
+        <p:nvSpPr>
+          <p:cNvPr id="3" name="Notes Placeholder 2"/>
+          <p:cNvSpPr>
+            <a:spLocks noGrp="1"/>
+          </p:cNvSpPr>
+          <p:nvPr>
+            <p:ph type="body" idx="3" sz="quarter"/>
+          </p:nvPr>
+        </p:nvSpPr>
+        <p:spPr/>
+        <p:txBody>
+          <a:bodyPr/>
+          <a:lstStyle/>
+          <a:p>
+            <a:r>
+              <a:t>Primer ejemplo concreto, y conviene construirlo en el tablero en vivo.</a:t>
+            </a:r>
+          </a:p>
+          <a:p/>
+          <a:p>
+            <a:r>
+              <a:t>La flecha entre la web y la API dice «HTTPS/JSON, consulta disponibilidad y crea reservas»; la flecha entre la API y la base de datos dice «TCP, lee y escribe turnos».</a:t>
+            </a:r>
+          </a:p>
+          <a:p/>
+          <a:p>
+            <a:r>
+              <a:t>Con eso ya existe un diagrama valido y defendible.</a:t>
+            </a:r>
+          </a:p>
+          <a:p/>
+          <a:p>
+            <a:r>
+              <a:t>Si la API espera ese envio antes de responder, la reserva de un turno hereda esa latencia y ese riesgo.</a:t>
+            </a:r>
+          </a:p>
+          <a:p/>
+          <a:p>
+            <a:r>
+              <a:t>Esa es una razon legitima para separar: se agrega una cola de mensajes y un trabajador de notificaciones, la API escribe el turno, publica un mensaje y responde en decenas de milisegundos, y el trabajador envia el correo despues, con reintentos si falla.</a:t>
+            </a:r>
+          </a:p>
+        </p:txBody>
+      </p:sp>
+      <p:sp>
+        <p:nvSpPr>
+          <p:cNvPr id="4" name="Slide Number Placeholder 3"/>
+          <p:cNvSpPr>
+            <a:spLocks noGrp="1"/>
+          </p:cNvSpPr>
+          <p:nvPr>
+            <p:ph type="sldNum" idx="5" sz="quarter"/>
+          </p:nvPr>
+        </p:nvSpPr>
+        <p:spPr/>
+      </p:sp>
+    </p:spTree>
+  </p:cSld>
+  <p:clrMapOvr>
+    <a:masterClrMapping/>
+  </p:clrMapOvr>
+</p:notes>
+</file>
+
+<file path=ppt/notesSlides/notesSlide5.xml><?xml version="1.0" encoding="utf-8"?>
+<p:notes xmlns:a="http://schemas.openxmlformats.org/drawingml/2006/main" xmlns:p="http://schemas.openxmlformats.org/presentationml/2006/main" xmlns:r="http://schemas.openxmlformats.org/officeDocument/2006/relationships">
+  <p:cSld>
+    <p:spTree>
+      <p:nvGrpSpPr>
+        <p:cNvPr id="1" name=""/>
+        <p:cNvGrpSpPr/>
+        <p:nvPr/>
+      </p:nvGrpSpPr>
+      <p:grpSpPr>
+        <a:xfrm>
+          <a:off x="0" y="0"/>
+          <a:ext cx="0" cy="0"/>
+          <a:chOff x="0" y="0"/>
+          <a:chExt cx="0" cy="0"/>
+        </a:xfrm>
+      </p:grpSpPr>
+      <p:sp>
+        <p:nvSpPr>
+          <p:cNvPr id="2" name="Slide Image Placeholder 1"/>
+          <p:cNvSpPr>
+            <a:spLocks noGrp="1"/>
+          </p:cNvSpPr>
+          <p:nvPr>
+            <p:ph type="sldImg" idx="2"/>
+          </p:nvPr>
+        </p:nvSpPr>
+        <p:spPr/>
+      </p:sp>
+      <p:sp>
+        <p:nvSpPr>
+          <p:cNvPr id="3" name="Notes Placeholder 2"/>
+          <p:cNvSpPr>
+            <a:spLocks noGrp="1"/>
+          </p:cNvSpPr>
+          <p:nvPr>
+            <p:ph type="body" idx="3" sz="quarter"/>
+          </p:nvPr>
+        </p:nvSpPr>
+        <p:spPr/>
+        <p:txBody>
+          <a:bodyPr/>
+          <a:lstStyle/>
+          <a:p>
+            <a:r>
+              <a:t>Dos exigencias mas, que valen puntos y se pierden sin darse cuenta.</a:t>
+            </a:r>
+          </a:p>
+          <a:p/>
+          <a:p>
+            <a:r>
+              <a:t>Conviene tambien tener a mano la diferencia con sus vecinos, porque se confunden: 400 es que la peticion esta mal formada, 401 que no se sabe quien eres, 403 que se sabe y no te corresponde, 404 que no existe, 422 que esta bien formada pero sus datos no pasan una validacion, y 409 que choca con el estado actual.</a:t>
+            </a:r>
+          </a:p>
+        </p:txBody>
+      </p:sp>
+      <p:sp>
+        <p:nvSpPr>
+          <p:cNvPr id="4" name="Slide Number Placeholder 3"/>
+          <p:cNvSpPr>
+            <a:spLocks noGrp="1"/>
+          </p:cNvSpPr>
+          <p:nvPr>
+            <p:ph type="sldNum" idx="5" sz="quarter"/>
+          </p:nvPr>
+        </p:nvSpPr>
+        <p:spPr/>
+      </p:sp>
+    </p:spTree>
+  </p:cSld>
+  <p:clrMapOvr>
+    <a:masterClrMapping/>
+  </p:clrMapOvr>
+</p:notes>
+</file>
+
+<file path=ppt/notesSlides/notesSlide6.xml><?xml version="1.0" encoding="utf-8"?>
+<p:notes xmlns:a="http://schemas.openxmlformats.org/drawingml/2006/main" xmlns:p="http://schemas.openxmlformats.org/presentationml/2006/main" xmlns:r="http://schemas.openxmlformats.org/officeDocument/2006/relationships">
+  <p:cSld>
+    <p:spTree>
+      <p:nvGrpSpPr>
+        <p:cNvPr id="1" name=""/>
+        <p:cNvGrpSpPr/>
+        <p:nvPr/>
+      </p:nvGrpSpPr>
+      <p:grpSpPr>
+        <a:xfrm>
+          <a:off x="0" y="0"/>
+          <a:ext cx="0" cy="0"/>
+          <a:chOff x="0" y="0"/>
+          <a:chExt cx="0" cy="0"/>
+        </a:xfrm>
+      </p:grpSpPr>
+      <p:sp>
+        <p:nvSpPr>
+          <p:cNvPr id="2" name="Slide Image Placeholder 1"/>
+          <p:cNvSpPr>
+            <a:spLocks noGrp="1"/>
+          </p:cNvSpPr>
+          <p:nvPr>
+            <p:ph type="sldImg" idx="2"/>
+          </p:nvPr>
+        </p:nvSpPr>
+        <p:spPr/>
+      </p:sp>
+      <p:sp>
+        <p:nvSpPr>
+          <p:cNvPr id="3" name="Notes Placeholder 2"/>
+          <p:cNvSpPr>
+            <a:spLocks noGrp="1"/>
+          </p:cNvSpPr>
+          <p:nvPr>
+            <p:ph type="body" idx="3" sz="quarter"/>
+          </p:nvPr>
+        </p:nvSpPr>
+        <p:spPr/>
+        <p:txBody>
+          <a:bodyPr/>
+          <a:lstStyle/>
+          <a:p>
+            <a:r>
+              <a:t>De ahi salen cuatro mecanismos que el diagrama y la tabla deben poder mencionar.</a:t>
+            </a:r>
+          </a:p>
+          <a:p/>
+          <a:p>
+            <a:r>
+              <a:t>Los reintentos exigen idempotencia, que significa que ejecutar la misma operacion dos veces produzca el mismo resultado que ejecutarla una vez.</a:t>
+            </a:r>
+          </a:p>
+        </p:txBody>
+      </p:sp>
+      <p:sp>
+        <p:nvSpPr>
+          <p:cNvPr id="4" name="Slide Number Placeholder 3"/>
+          <p:cNvSpPr>
+            <a:spLocks noGrp="1"/>
+          </p:cNvSpPr>
+          <p:nvPr>
+            <p:ph type="sldNum" idx="5" sz="quarter"/>
+          </p:nvPr>
+        </p:nvSpPr>
+        <p:spPr/>
+      </p:sp>
+    </p:spTree>
+  </p:cSld>
+  <p:clrMapOvr>
+    <a:masterClrMapping/>
+  </p:clrMapOvr>
+</p:notes>
+</file>
+
+<file path=ppt/notesSlides/notesSlide7.xml><?xml version="1.0" encoding="utf-8"?>
+<p:notes xmlns:a="http://schemas.openxmlformats.org/drawingml/2006/main" xmlns:p="http://schemas.openxmlformats.org/presentationml/2006/main" xmlns:r="http://schemas.openxmlformats.org/officeDocument/2006/relationships">
+  <p:cSld>
+    <p:spTree>
+      <p:nvGrpSpPr>
+        <p:cNvPr id="1" name=""/>
+        <p:cNvGrpSpPr/>
+        <p:nvPr/>
+      </p:nvGrpSpPr>
+      <p:grpSpPr>
+        <a:xfrm>
+          <a:off x="0" y="0"/>
+          <a:ext cx="0" cy="0"/>
+          <a:chOff x="0" y="0"/>
+          <a:chExt cx="0" cy="0"/>
+        </a:xfrm>
+      </p:grpSpPr>
+      <p:sp>
+        <p:nvSpPr>
+          <p:cNvPr id="2" name="Slide Image Placeholder 1"/>
+          <p:cNvSpPr>
+            <a:spLocks noGrp="1"/>
+          </p:cNvSpPr>
+          <p:nvPr>
+            <p:ph type="sldImg" idx="2"/>
+          </p:nvPr>
+        </p:nvSpPr>
+        <p:spPr/>
+      </p:sp>
+      <p:sp>
+        <p:nvSpPr>
+          <p:cNvPr id="3" name="Notes Placeholder 2"/>
+          <p:cNvSpPr>
+            <a:spLocks noGrp="1"/>
+          </p:cNvSpPr>
+          <p:nvPr>
+            <p:ph type="body" idx="3" sz="quarter"/>
+          </p:nvPr>
+        </p:nvSpPr>
+        <p:spPr/>
+        <p:txBody>
+          <a:bodyPr/>
+          <a:lstStyle/>
+          <a:p>
+            <a:r>
+              <a:t>Eso introduce consistencia eventual, es decir un lapso durante el cual dos partes del sistema tienen versiones distintas de la verdad, con consecuencias visibles para el usuario.</a:t>
+            </a:r>
+          </a:p>
+        </p:txBody>
+      </p:sp>
+      <p:sp>
+        <p:nvSpPr>
+          <p:cNvPr id="4" name="Slide Number Placeholder 3"/>
+          <p:cNvSpPr>
+            <a:spLocks noGrp="1"/>
+          </p:cNvSpPr>
+          <p:nvPr>
+            <p:ph type="sldNum" idx="5" sz="quarter"/>
+          </p:nvPr>
+        </p:nvSpPr>
+        <p:spPr/>
+      </p:sp>
+    </p:spTree>
+  </p:cSld>
+  <p:clrMapOvr>
+    <a:masterClrMapping/>
+  </p:clrMapOvr>
+</p:notes>
+</file>
+
+<file path=ppt/notesSlides/notesSlide8.xml><?xml version="1.0" encoding="utf-8"?>
+<p:notes xmlns:a="http://schemas.openxmlformats.org/drawingml/2006/main" xmlns:p="http://schemas.openxmlformats.org/presentationml/2006/main" xmlns:r="http://schemas.openxmlformats.org/officeDocument/2006/relationships">
+  <p:cSld>
+    <p:spTree>
+      <p:nvGrpSpPr>
+        <p:cNvPr id="1" name=""/>
+        <p:cNvGrpSpPr/>
+        <p:nvPr/>
+      </p:nvGrpSpPr>
+      <p:grpSpPr>
+        <a:xfrm>
+          <a:off x="0" y="0"/>
+          <a:ext cx="0" cy="0"/>
+          <a:chOff x="0" y="0"/>
+          <a:chExt cx="0" cy="0"/>
+        </a:xfrm>
+      </p:grpSpPr>
+      <p:sp>
+        <p:nvSpPr>
+          <p:cNvPr id="2" name="Slide Image Placeholder 1"/>
+          <p:cNvSpPr>
+            <a:spLocks noGrp="1"/>
+          </p:cNvSpPr>
+          <p:nvPr>
+            <p:ph type="sldImg" idx="2"/>
+          </p:nvPr>
+        </p:nvSpPr>
+        <p:spPr/>
+      </p:sp>
+      <p:sp>
+        <p:nvSpPr>
+          <p:cNvPr id="3" name="Notes Placeholder 2"/>
+          <p:cNvSpPr>
+            <a:spLocks noGrp="1"/>
+          </p:cNvSpPr>
+          <p:nvPr>
+            <p:ph type="body" idx="3" sz="quarter"/>
+          </p:nvPr>
+        </p:nvSpPr>
+        <p:spPr/>
+        <p:txBody>
+          <a:bodyPr/>
+          <a:lstStyle/>
+          <a:p>
+            <a:r>
+              <a:t>Conviene dictarlos asi, porque un estudiante que entiende por que son esos tres no escribe generalidades.</a:t>
+            </a:r>
+          </a:p>
+          <a:p/>
+          <a:p>
+            <a:r>
+              <a:t>El primero pregunta que se cae.</a:t>
+            </a:r>
+          </a:p>
+          <a:p/>
+          <a:p>
+            <a:r>
+              <a:t>El segundo pregunta cuantos saltos de red tiene una operacion de punta a punta, y se responde con un numero, contado sobre el propio dibujo.</a:t>
+            </a:r>
+          </a:p>
+        </p:txBody>
+      </p:sp>
+      <p:sp>
+        <p:nvSpPr>
+          <p:cNvPr id="4" name="Slide Number Placeholder 3"/>
+          <p:cNvSpPr>
+            <a:spLocks noGrp="1"/>
+          </p:cNvSpPr>
+          <p:nvPr>
+            <p:ph type="sldNum" idx="5" sz="quarter"/>
+          </p:nvPr>
+        </p:nvSpPr>
+        <p:spPr/>
+      </p:sp>
+    </p:spTree>
+  </p:cSld>
+  <p:clrMapOvr>
+    <a:masterClrMapping/>
+  </p:clrMapOvr>
+</p:notes>
+</file>
+
+<file path=ppt/notesSlides/notesSlide9.xml><?xml version="1.0" encoding="utf-8"?>
+<p:notes xmlns:a="http://schemas.openxmlformats.org/drawingml/2006/main" xmlns:p="http://schemas.openxmlformats.org/presentationml/2006/main" xmlns:r="http://schemas.openxmlformats.org/officeDocument/2006/relationships">
+  <p:cSld>
+    <p:spTree>
+      <p:nvGrpSpPr>
+        <p:cNvPr id="1" name=""/>
+        <p:cNvGrpSpPr/>
+        <p:nvPr/>
+      </p:nvGrpSpPr>
+      <p:grpSpPr>
+        <a:xfrm>
+          <a:off x="0" y="0"/>
+          <a:ext cx="0" cy="0"/>
+          <a:chOff x="0" y="0"/>
+          <a:chExt cx="0" cy="0"/>
+        </a:xfrm>
+      </p:grpSpPr>
+      <p:sp>
+        <p:nvSpPr>
+          <p:cNvPr id="2" name="Slide Image Placeholder 1"/>
+          <p:cNvSpPr>
+            <a:spLocks noGrp="1"/>
+          </p:cNvSpPr>
+          <p:nvPr>
+            <p:ph type="sldImg" idx="2"/>
+          </p:nvPr>
+        </p:nvSpPr>
+        <p:spPr/>
+      </p:sp>
+      <p:sp>
+        <p:nvSpPr>
+          <p:cNvPr id="3" name="Notes Placeholder 2"/>
+          <p:cNvSpPr>
+            <a:spLocks noGrp="1"/>
+          </p:cNvSpPr>
+          <p:nvPr>
+            <p:ph type="body" idx="3" sz="quarter"/>
+          </p:nvPr>
+        </p:nvSpPr>
+        <p:spPr/>
+        <p:txBody>
+          <a:bodyPr/>
+          <a:lstStyle/>
+          <a:p>
+            <a:r>
+              <a:t>No; esta mal hacerlo sin saber que se eligio, y un monolito modular bien argumentado recibe mejor calificacion que cinco servicios sin razon.</a:t>
+            </a:r>
+          </a:p>
+          <a:p/>
+          <a:p>
+            <a:r>
+              <a:t>Conviene cerrar ubicando el curso: este diagrama es el ultimo insumo del Parcial 1 de la Clase 5; en la Clase 6 cada flecha se convertira en una superficie de ataque que hay que proteger; en la Clase 7 estas mismas cajas se reubicaran en un diagrama de despliegue con zonas publicas y privadas, conservando exactamente los mismos nombres; en la Clase 8 cada contenedor implicara su propio pipeline de integracion continua; y en las Clases 12 y 13 se preguntara cual de estas piezas es el cuello de botella y cual se puede replicar.</a:t>
+            </a:r>
+          </a:p>
+          <a:p/>
+          <a:p>
+            <a:r>
+              <a:t>El numero de servicios no mide calidad arquitectonica; la justificacion de cada frontera si.</a:t>
+            </a:r>
+          </a:p>
+        </p:txBody>
+      </p:sp>
+      <p:sp>
+        <p:nvSpPr>
+          <p:cNvPr id="4" name="Slide Number Placeholder 3"/>
+          <p:cNvSpPr>
+            <a:spLocks noGrp="1"/>
+          </p:cNvSpPr>
+          <p:nvPr>
+            <p:ph type="sldNum" idx="5" sz="quarter"/>
+          </p:nvPr>
+        </p:nvSpPr>
+        <p:spPr/>
+      </p:sp>
+    </p:spTree>
+  </p:cSld>
+  <p:clrMapOvr>
+    <a:masterClrMapping/>
+  </p:clrMapOvr>
+</p:notes>
 </file>
 
 <file path=ppt/slideLayouts/slideLayout1.xml><?xml version="1.0" encoding="utf-8"?>
@@ -3361,13 +4438,22 @@
               </a:spcAft>
             </a:pPr>
             <a:r>
+              <a:rPr sz="1500" b="0" i="0">
+                <a:solidFill>
+                  <a:srgbClr val="333333"/>
+                </a:solidFill>
+                <a:latin typeface="Calibri"/>
+              </a:rPr>
+              <a:t>Bloque </a:t>
+            </a:r>
+            <a:r>
               <a:rPr sz="1500" b="1" i="0">
                 <a:solidFill>
                   <a:srgbClr val="333333"/>
                 </a:solidFill>
                 <a:latin typeface="Calibri"/>
               </a:rPr>
-              <a:t>Hoy avanzamos el PI en:</a:t>
+              <a:t>120 min</a:t>
             </a:r>
             <a:r>
               <a:rPr sz="1500" b="0" i="0">
@@ -3376,7 +4462,25 @@
                 </a:solidFill>
                 <a:latin typeface="Calibri"/>
               </a:rPr>
-              <a:t> Diagramar componentes/servicios de CloudLite y sus contratos</a:t>
+              <a:t> · sesión </a:t>
+            </a:r>
+            <a:r>
+              <a:rPr sz="1500" b="1" i="0">
+                <a:solidFill>
+                  <a:srgbClr val="333333"/>
+                </a:solidFill>
+                <a:latin typeface="Calibri"/>
+              </a:rPr>
+              <a:t>virtual síncrona</a:t>
+            </a:r>
+            <a:r>
+              <a:rPr sz="1500" b="0" i="0">
+                <a:solidFill>
+                  <a:srgbClr val="333333"/>
+                </a:solidFill>
+                <a:latin typeface="Calibri"/>
+              </a:rPr>
+              <a:t> por Google Meet.</a:t>
             </a:r>
           </a:p>
           <a:p>
@@ -3392,41 +4496,7 @@
                 </a:solidFill>
                 <a:latin typeface="Calibri"/>
               </a:rPr>
-              <a:t>Bloque </a:t>
-            </a:r>
-            <a:r>
-              <a:rPr sz="1500" b="1" i="0">
-                <a:solidFill>
-                  <a:srgbClr val="333333"/>
-                </a:solidFill>
-                <a:latin typeface="Calibri"/>
-              </a:rPr>
-              <a:t>120 min</a:t>
-            </a:r>
-            <a:r>
-              <a:rPr sz="1500" b="0" i="0">
-                <a:solidFill>
-                  <a:srgbClr val="333333"/>
-                </a:solidFill>
-                <a:latin typeface="Calibri"/>
-              </a:rPr>
-              <a:t> · Teoría breve · Taller PI · cierre.</a:t>
-            </a:r>
-          </a:p>
-          <a:p>
-            <a:pPr>
-              <a:spcAft>
-                <a:spcPts val="800"/>
-              </a:spcAft>
-            </a:pPr>
-            <a:r>
-              <a:rPr sz="1500" b="0" i="0">
-                <a:solidFill>
-                  <a:srgbClr val="333333"/>
-                </a:solidFill>
-                <a:latin typeface="Calibri"/>
-              </a:rPr>
-              <a:t>Herramientas gratis + navegador · sin AWS/GCP/Oracle Cloud.</a:t>
+              <a:t>Conceptos del tema, ejemplos resueltos sobre CloudLite y cierre conceptual.</a:t>
             </a:r>
           </a:p>
         </p:txBody>
@@ -6504,7 +7574,7 @@
                 </a:solidFill>
                 <a:latin typeface="Calibri"/>
               </a:rPr>
-              <a:t> Encuadre: hoy avanzamos el PI en… + entregable concreto.</a:t>
+              <a:t> Encuadre del tema y objetivos de la clase.</a:t>
             </a:r>
           </a:p>
           <a:p>
@@ -6520,7 +7590,7 @@
                 </a:solidFill>
                 <a:latin typeface="Calibri"/>
               </a:rPr>
-              <a:t>10–40</a:t>
+              <a:t>10–70</a:t>
             </a:r>
             <a:r>
               <a:rPr sz="2000" b="0" i="0">
@@ -6529,7 +7599,7 @@
                 </a:solidFill>
                 <a:latin typeface="Calibri"/>
               </a:rPr>
-              <a:t> Teoría Core breve (solo lo necesario para el taller PI).</a:t>
+              <a:t> Conceptos del tema, uno por lámina, con ejemplos sobre CloudLite.</a:t>
             </a:r>
           </a:p>
           <a:p>
@@ -6554,7 +7624,7 @@
                 </a:solidFill>
                 <a:latin typeface="Calibri"/>
               </a:rPr>
-              <a:t>40–100</a:t>
+              <a:t>70–100</a:t>
             </a:r>
             <a:r>
               <a:rPr sz="2000" b="0" i="0">
@@ -6563,7 +7633,7 @@
                 </a:solidFill>
                 <a:latin typeface="Calibri"/>
               </a:rPr>
-              <a:t> Trabajo guiado del PI (demo en vivo + avance individual).</a:t>
+              <a:t> Ejemplos resueltos y demo del docente sobre el tema.</a:t>
             </a:r>
           </a:p>
           <a:p>
@@ -6588,7 +7658,7 @@
                 </a:solidFill>
                 <a:latin typeface="Calibri"/>
               </a:rPr>
-              <a:t> Revisión de evidencias del PI.</a:t>
+              <a:t> Práctica (opcional, guía en la carpeta de la clase).</a:t>
             </a:r>
           </a:p>
           <a:p>
@@ -6613,7 +7683,7 @@
                 </a:solidFill>
                 <a:latin typeface="Calibri"/>
               </a:rPr>
-              <a:t> Cierre: criterio de éxito + plazo en la fecha que indique el docente.</a:t>
+              <a:t> Preguntas y cierre conceptual.</a:t>
             </a:r>
           </a:p>
         </p:txBody>
@@ -13846,13 +14916,13 @@
         <p:spPr>
           <a:xfrm>
             <a:off x="0" y="0"/>
-            <a:ext cx="12191695" cy="1170432"/>
+            <a:ext cx="12191695" cy="164592"/>
           </a:xfrm>
           <a:prstGeom prst="rect">
             <a:avLst/>
           </a:prstGeom>
           <a:solidFill>
-            <a:srgbClr val="095292"/>
+            <a:srgbClr val="269CCB"/>
           </a:solidFill>
           <a:ln>
             <a:noFill/>
@@ -13880,251 +14950,9 @@
           </a:p>
         </p:txBody>
       </p:sp>
-      <p:sp>
-        <p:nvSpPr>
-          <p:cNvPr id="3" name="Rectangle 2"/>
-          <p:cNvSpPr/>
-          <p:nvPr/>
-        </p:nvSpPr>
-        <p:spPr>
-          <a:xfrm>
-            <a:off x="0" y="1170432"/>
-            <a:ext cx="12191695" cy="41148"/>
-          </a:xfrm>
-          <a:prstGeom prst="rect">
-            <a:avLst/>
-          </a:prstGeom>
-          <a:solidFill>
-            <a:srgbClr val="FFD000"/>
-          </a:solidFill>
-          <a:ln>
-            <a:noFill/>
-          </a:ln>
-        </p:spPr>
-        <p:style>
-          <a:lnRef idx="1">
-            <a:schemeClr val="accent1"/>
-          </a:lnRef>
-          <a:fillRef idx="3">
-            <a:schemeClr val="accent1"/>
-          </a:fillRef>
-          <a:effectRef idx="2">
-            <a:schemeClr val="accent1"/>
-          </a:effectRef>
-          <a:fontRef idx="minor">
-            <a:schemeClr val="lt1"/>
-          </a:fontRef>
-        </p:style>
-        <p:txBody>
-          <a:bodyPr rtlCol="0" anchor="ctr"/>
-          <a:lstStyle/>
-          <a:p>
-            <a:pPr algn="ctr"/>
-          </a:p>
-        </p:txBody>
-      </p:sp>
-      <p:sp>
-        <p:nvSpPr>
-          <p:cNvPr id="4" name="TextBox 3"/>
-          <p:cNvSpPr txBox="1"/>
-          <p:nvPr/>
-        </p:nvSpPr>
-        <p:spPr>
-          <a:xfrm>
-            <a:off x="457200" y="164592"/>
-            <a:ext cx="11277295" cy="384048"/>
-          </a:xfrm>
-          <a:prstGeom prst="rect">
-            <a:avLst/>
-          </a:prstGeom>
-          <a:noFill/>
-        </p:spPr>
-        <p:txBody>
-          <a:bodyPr wrap="square">
-            <a:spAutoFit/>
-          </a:bodyPr>
-          <a:lstStyle/>
-          <a:p>
-            <a:r>
-              <a:rPr sz="2600" b="1" i="0">
-                <a:solidFill>
-                  <a:srgbClr val="FFFFFF"/>
-                </a:solidFill>
-                <a:latin typeface="Calibri"/>
-              </a:rPr>
-              <a:t>Herramientas de hoy</a:t>
-            </a:r>
-          </a:p>
-        </p:txBody>
-      </p:sp>
-      <p:sp>
-        <p:nvSpPr>
-          <p:cNvPr id="5" name="TextBox 4"/>
-          <p:cNvSpPr txBox="1"/>
-          <p:nvPr/>
-        </p:nvSpPr>
-        <p:spPr>
-          <a:xfrm>
-            <a:off x="457200" y="566928"/>
-            <a:ext cx="11277295" cy="411480"/>
-          </a:xfrm>
-          <a:prstGeom prst="rect">
-            <a:avLst/>
-          </a:prstGeom>
-          <a:noFill/>
-        </p:spPr>
-        <p:txBody>
-          <a:bodyPr wrap="square">
-            <a:spAutoFit/>
-          </a:bodyPr>
-          <a:lstStyle/>
-          <a:p>
-            <a:r>
-              <a:rPr sz="1400" b="0" i="0">
-                <a:solidFill>
-                  <a:srgbClr val="B8D8EE"/>
-                </a:solidFill>
-                <a:latin typeface="Calibri"/>
-              </a:rPr>
-              <a:t>Gratis · navegador o free tier · sin cuenta de pago</a:t>
-            </a:r>
-          </a:p>
-        </p:txBody>
-      </p:sp>
-      <p:sp>
-        <p:nvSpPr>
-          <p:cNvPr id="6" name="Rounded Rectangle 5"/>
-          <p:cNvSpPr/>
-          <p:nvPr/>
-        </p:nvSpPr>
-        <p:spPr>
-          <a:xfrm>
-            <a:off x="457200" y="1591056"/>
-            <a:ext cx="3624986" cy="2299716"/>
-          </a:xfrm>
-          <a:prstGeom prst="roundRect">
-            <a:avLst>
-              <a:gd name="adj" fmla="val 12000"/>
-            </a:avLst>
-          </a:prstGeom>
-          <a:solidFill>
-            <a:srgbClr val="F2F2F2"/>
-          </a:solidFill>
-          <a:ln>
-            <a:noFill/>
-          </a:ln>
-        </p:spPr>
-        <p:style>
-          <a:lnRef idx="1">
-            <a:schemeClr val="accent1"/>
-          </a:lnRef>
-          <a:fillRef idx="3">
-            <a:schemeClr val="accent1"/>
-          </a:fillRef>
-          <a:effectRef idx="2">
-            <a:schemeClr val="accent1"/>
-          </a:effectRef>
-          <a:fontRef idx="minor">
-            <a:schemeClr val="lt1"/>
-          </a:fontRef>
-        </p:style>
-        <p:txBody>
-          <a:bodyPr rtlCol="0" anchor="ctr"/>
-          <a:lstStyle/>
-          <a:p>
-            <a:pPr algn="ctr"/>
-          </a:p>
-        </p:txBody>
-      </p:sp>
-      <p:sp>
-        <p:nvSpPr>
-          <p:cNvPr id="7" name="Rectangle 6"/>
-          <p:cNvSpPr/>
-          <p:nvPr/>
-        </p:nvSpPr>
-        <p:spPr>
-          <a:xfrm>
-            <a:off x="457200" y="1591056"/>
-            <a:ext cx="3624986" cy="64008"/>
-          </a:xfrm>
-          <a:prstGeom prst="rect">
-            <a:avLst/>
-          </a:prstGeom>
-          <a:solidFill>
-            <a:srgbClr val="095292"/>
-          </a:solidFill>
-          <a:ln>
-            <a:noFill/>
-          </a:ln>
-        </p:spPr>
-        <p:style>
-          <a:lnRef idx="1">
-            <a:schemeClr val="accent1"/>
-          </a:lnRef>
-          <a:fillRef idx="3">
-            <a:schemeClr val="accent1"/>
-          </a:fillRef>
-          <a:effectRef idx="2">
-            <a:schemeClr val="accent1"/>
-          </a:effectRef>
-          <a:fontRef idx="minor">
-            <a:schemeClr val="lt1"/>
-          </a:fontRef>
-        </p:style>
-        <p:txBody>
-          <a:bodyPr rtlCol="0" anchor="ctr"/>
-          <a:lstStyle/>
-          <a:p>
-            <a:pPr algn="ctr"/>
-          </a:p>
-        </p:txBody>
-      </p:sp>
-      <p:sp>
-        <p:nvSpPr>
-          <p:cNvPr id="8" name="Rectangle 7"/>
-          <p:cNvSpPr/>
-          <p:nvPr/>
-        </p:nvSpPr>
-        <p:spPr>
-          <a:xfrm>
-            <a:off x="457200" y="1655064"/>
-            <a:ext cx="3624986" cy="27432"/>
-          </a:xfrm>
-          <a:prstGeom prst="rect">
-            <a:avLst/>
-          </a:prstGeom>
-          <a:solidFill>
-            <a:srgbClr val="FFD000"/>
-          </a:solidFill>
-          <a:ln>
-            <a:noFill/>
-          </a:ln>
-        </p:spPr>
-        <p:style>
-          <a:lnRef idx="1">
-            <a:schemeClr val="accent1"/>
-          </a:lnRef>
-          <a:fillRef idx="3">
-            <a:schemeClr val="accent1"/>
-          </a:fillRef>
-          <a:effectRef idx="2">
-            <a:schemeClr val="accent1"/>
-          </a:effectRef>
-          <a:fontRef idx="minor">
-            <a:schemeClr val="lt1"/>
-          </a:fontRef>
-        </p:style>
-        <p:txBody>
-          <a:bodyPr rtlCol="0" anchor="ctr"/>
-          <a:lstStyle/>
-          <a:p>
-            <a:pPr algn="ctr"/>
-          </a:p>
-        </p:txBody>
-      </p:sp>
       <p:pic>
         <p:nvPicPr>
-          <p:cNvPr id="9" name="Picture 8" descr="drawio.png"/>
+          <p:cNvPr id="3" name="Picture 2" descr="logo_uniajc_color.png"/>
           <p:cNvPicPr>
             <a:picLocks noChangeAspect="1"/>
           </p:cNvPicPr>
@@ -14138,8 +14966,8 @@
         </p:blipFill>
         <p:spPr>
           <a:xfrm>
-            <a:off x="1659331" y="1847087"/>
-            <a:ext cx="1220724" cy="1220724"/>
+            <a:off x="10271455" y="5998464"/>
+            <a:ext cx="1463040" cy="643233"/>
           </a:xfrm>
           <a:prstGeom prst="rect">
             <a:avLst/>
@@ -14148,14 +14976,14 @@
       </p:pic>
       <p:sp>
         <p:nvSpPr>
-          <p:cNvPr id="10" name="TextBox 9"/>
+          <p:cNvPr id="4" name="TextBox 3"/>
           <p:cNvSpPr txBox="1"/>
           <p:nvPr/>
         </p:nvSpPr>
         <p:spPr>
           <a:xfrm>
-            <a:off x="530352" y="3159251"/>
-            <a:ext cx="3478682" cy="621792"/>
+            <a:off x="457200" y="1737360"/>
+            <a:ext cx="11277295" cy="1097280"/>
           </a:xfrm>
           <a:prstGeom prst="rect">
             <a:avLst/>
@@ -14163,660 +14991,32 @@
           <a:noFill/>
         </p:spPr>
         <p:txBody>
-          <a:bodyPr wrap="square" anchor="t"/>
+          <a:bodyPr wrap="square" anchor="ctr"/>
           <a:lstStyle/>
           <a:p>
             <a:pPr algn="ctr"/>
             <a:r>
-              <a:rPr sz="1300" b="1" i="0">
+              <a:rPr sz="3400" b="1" i="0">
                 <a:solidFill>
                   <a:srgbClr val="095292"/>
                 </a:solidFill>
                 <a:latin typeface="Calibri"/>
               </a:rPr>
-              <a:t>draw.io</a:t>
-            </a:r>
-          </a:p>
-          <a:p>
-            <a:pPr algn="ctr">
-              <a:spcBef>
-                <a:spcPts val="200"/>
-              </a:spcBef>
-            </a:pPr>
-            <a:r>
-              <a:rPr sz="1000" b="0" i="0">
-                <a:solidFill>
-                  <a:srgbClr val="666666"/>
-                </a:solidFill>
-                <a:latin typeface="Calibri"/>
-              </a:rPr>
-              <a:t>Boceto del C4</a:t>
-            </a:r>
-          </a:p>
-        </p:txBody>
-      </p:sp>
-      <p:sp>
-        <p:nvSpPr>
-          <p:cNvPr id="11" name="Rounded Rectangle 10"/>
-          <p:cNvSpPr/>
-          <p:nvPr/>
-        </p:nvSpPr>
-        <p:spPr>
-          <a:xfrm>
-            <a:off x="4283354" y="1591056"/>
-            <a:ext cx="3624986" cy="2299716"/>
-          </a:xfrm>
-          <a:prstGeom prst="roundRect">
-            <a:avLst>
-              <a:gd name="adj" fmla="val 12000"/>
-            </a:avLst>
-          </a:prstGeom>
-          <a:solidFill>
-            <a:srgbClr val="F2F2F2"/>
-          </a:solidFill>
-          <a:ln>
-            <a:noFill/>
-          </a:ln>
-        </p:spPr>
-        <p:style>
-          <a:lnRef idx="1">
-            <a:schemeClr val="accent1"/>
-          </a:lnRef>
-          <a:fillRef idx="3">
-            <a:schemeClr val="accent1"/>
-          </a:fillRef>
-          <a:effectRef idx="2">
-            <a:schemeClr val="accent1"/>
-          </a:effectRef>
-          <a:fontRef idx="minor">
-            <a:schemeClr val="lt1"/>
-          </a:fontRef>
-        </p:style>
-        <p:txBody>
-          <a:bodyPr rtlCol="0" anchor="ctr"/>
-          <a:lstStyle/>
-          <a:p>
-            <a:pPr algn="ctr"/>
-          </a:p>
-        </p:txBody>
-      </p:sp>
-      <p:sp>
-        <p:nvSpPr>
-          <p:cNvPr id="12" name="Rectangle 11"/>
-          <p:cNvSpPr/>
-          <p:nvPr/>
-        </p:nvSpPr>
-        <p:spPr>
-          <a:xfrm>
-            <a:off x="4283354" y="1591056"/>
-            <a:ext cx="3624986" cy="64008"/>
-          </a:xfrm>
-          <a:prstGeom prst="rect">
-            <a:avLst/>
-          </a:prstGeom>
-          <a:solidFill>
-            <a:srgbClr val="095292"/>
-          </a:solidFill>
-          <a:ln>
-            <a:noFill/>
-          </a:ln>
-        </p:spPr>
-        <p:style>
-          <a:lnRef idx="1">
-            <a:schemeClr val="accent1"/>
-          </a:lnRef>
-          <a:fillRef idx="3">
-            <a:schemeClr val="accent1"/>
-          </a:fillRef>
-          <a:effectRef idx="2">
-            <a:schemeClr val="accent1"/>
-          </a:effectRef>
-          <a:fontRef idx="minor">
-            <a:schemeClr val="lt1"/>
-          </a:fontRef>
-        </p:style>
-        <p:txBody>
-          <a:bodyPr rtlCol="0" anchor="ctr"/>
-          <a:lstStyle/>
-          <a:p>
-            <a:pPr algn="ctr"/>
-          </a:p>
-        </p:txBody>
-      </p:sp>
-      <p:sp>
-        <p:nvSpPr>
-          <p:cNvPr id="13" name="Rectangle 12"/>
-          <p:cNvSpPr/>
-          <p:nvPr/>
-        </p:nvSpPr>
-        <p:spPr>
-          <a:xfrm>
-            <a:off x="4283354" y="1655064"/>
-            <a:ext cx="3624986" cy="27432"/>
-          </a:xfrm>
-          <a:prstGeom prst="rect">
-            <a:avLst/>
-          </a:prstGeom>
-          <a:solidFill>
-            <a:srgbClr val="FFD000"/>
-          </a:solidFill>
-          <a:ln>
-            <a:noFill/>
-          </a:ln>
-        </p:spPr>
-        <p:style>
-          <a:lnRef idx="1">
-            <a:schemeClr val="accent1"/>
-          </a:lnRef>
-          <a:fillRef idx="3">
-            <a:schemeClr val="accent1"/>
-          </a:fillRef>
-          <a:effectRef idx="2">
-            <a:schemeClr val="accent1"/>
-          </a:effectRef>
-          <a:fontRef idx="minor">
-            <a:schemeClr val="lt1"/>
-          </a:fontRef>
-        </p:style>
-        <p:txBody>
-          <a:bodyPr rtlCol="0" anchor="ctr"/>
-          <a:lstStyle/>
-          <a:p>
-            <a:pPr algn="ctr"/>
-          </a:p>
-        </p:txBody>
-      </p:sp>
-      <p:pic>
-        <p:nvPicPr>
-          <p:cNvPr id="14" name="Picture 13" descr="excalidraw.png"/>
-          <p:cNvPicPr>
-            <a:picLocks noChangeAspect="1"/>
-          </p:cNvPicPr>
-          <p:nvPr/>
-        </p:nvPicPr>
-        <p:blipFill>
-          <a:blip r:embed="rId3"/>
-          <a:stretch>
-            <a:fillRect/>
-          </a:stretch>
-        </p:blipFill>
-        <p:spPr>
-          <a:xfrm>
-            <a:off x="5485485" y="1847087"/>
-            <a:ext cx="1220724" cy="1220724"/>
-          </a:xfrm>
-          <a:prstGeom prst="rect">
-            <a:avLst/>
-          </a:prstGeom>
-        </p:spPr>
-      </p:pic>
-      <p:sp>
-        <p:nvSpPr>
-          <p:cNvPr id="15" name="TextBox 14"/>
+              <a:t>Clase 4 · cierre conceptual</a:t>
+            </a:r>
+          </a:p>
+        </p:txBody>
+      </p:sp>
+      <p:sp>
+        <p:nvSpPr>
+          <p:cNvPr id="5" name="TextBox 4"/>
           <p:cNvSpPr txBox="1"/>
           <p:nvPr/>
         </p:nvSpPr>
         <p:spPr>
           <a:xfrm>
-            <a:off x="4356506" y="3159251"/>
-            <a:ext cx="3478682" cy="621792"/>
-          </a:xfrm>
-          <a:prstGeom prst="rect">
-            <a:avLst/>
-          </a:prstGeom>
-          <a:noFill/>
-        </p:spPr>
-        <p:txBody>
-          <a:bodyPr wrap="square" anchor="t"/>
-          <a:lstStyle/>
-          <a:p>
-            <a:pPr algn="ctr"/>
-            <a:r>
-              <a:rPr sz="1300" b="1" i="0">
-                <a:solidFill>
-                  <a:srgbClr val="095292"/>
-                </a:solidFill>
-                <a:latin typeface="Calibri"/>
-              </a:rPr>
-              <a:t>Excalidraw</a:t>
-            </a:r>
-          </a:p>
-          <a:p>
-            <a:pPr algn="ctr">
-              <a:spcBef>
-                <a:spcPts val="200"/>
-              </a:spcBef>
-            </a:pPr>
-            <a:r>
-              <a:rPr sz="1000" b="0" i="0">
-                <a:solidFill>
-                  <a:srgbClr val="666666"/>
-                </a:solidFill>
-                <a:latin typeface="Calibri"/>
-              </a:rPr>
-              <a:t>Boceto rapido</a:t>
-            </a:r>
-          </a:p>
-        </p:txBody>
-      </p:sp>
-      <p:sp>
-        <p:nvSpPr>
-          <p:cNvPr id="16" name="Rounded Rectangle 15"/>
-          <p:cNvSpPr/>
-          <p:nvPr/>
-        </p:nvSpPr>
-        <p:spPr>
-          <a:xfrm>
-            <a:off x="8109508" y="1591056"/>
-            <a:ext cx="3624986" cy="2299716"/>
-          </a:xfrm>
-          <a:prstGeom prst="roundRect">
-            <a:avLst>
-              <a:gd name="adj" fmla="val 12000"/>
-            </a:avLst>
-          </a:prstGeom>
-          <a:solidFill>
-            <a:srgbClr val="F2F2F2"/>
-          </a:solidFill>
-          <a:ln>
-            <a:noFill/>
-          </a:ln>
-        </p:spPr>
-        <p:style>
-          <a:lnRef idx="1">
-            <a:schemeClr val="accent1"/>
-          </a:lnRef>
-          <a:fillRef idx="3">
-            <a:schemeClr val="accent1"/>
-          </a:fillRef>
-          <a:effectRef idx="2">
-            <a:schemeClr val="accent1"/>
-          </a:effectRef>
-          <a:fontRef idx="minor">
-            <a:schemeClr val="lt1"/>
-          </a:fontRef>
-        </p:style>
-        <p:txBody>
-          <a:bodyPr rtlCol="0" anchor="ctr"/>
-          <a:lstStyle/>
-          <a:p>
-            <a:pPr algn="ctr"/>
-          </a:p>
-        </p:txBody>
-      </p:sp>
-      <p:sp>
-        <p:nvSpPr>
-          <p:cNvPr id="17" name="Rectangle 16"/>
-          <p:cNvSpPr/>
-          <p:nvPr/>
-        </p:nvSpPr>
-        <p:spPr>
-          <a:xfrm>
-            <a:off x="8109508" y="1591056"/>
-            <a:ext cx="3624986" cy="64008"/>
-          </a:xfrm>
-          <a:prstGeom prst="rect">
-            <a:avLst/>
-          </a:prstGeom>
-          <a:solidFill>
-            <a:srgbClr val="095292"/>
-          </a:solidFill>
-          <a:ln>
-            <a:noFill/>
-          </a:ln>
-        </p:spPr>
-        <p:style>
-          <a:lnRef idx="1">
-            <a:schemeClr val="accent1"/>
-          </a:lnRef>
-          <a:fillRef idx="3">
-            <a:schemeClr val="accent1"/>
-          </a:fillRef>
-          <a:effectRef idx="2">
-            <a:schemeClr val="accent1"/>
-          </a:effectRef>
-          <a:fontRef idx="minor">
-            <a:schemeClr val="lt1"/>
-          </a:fontRef>
-        </p:style>
-        <p:txBody>
-          <a:bodyPr rtlCol="0" anchor="ctr"/>
-          <a:lstStyle/>
-          <a:p>
-            <a:pPr algn="ctr"/>
-          </a:p>
-        </p:txBody>
-      </p:sp>
-      <p:sp>
-        <p:nvSpPr>
-          <p:cNvPr id="18" name="Rectangle 17"/>
-          <p:cNvSpPr/>
-          <p:nvPr/>
-        </p:nvSpPr>
-        <p:spPr>
-          <a:xfrm>
-            <a:off x="8109508" y="1655064"/>
-            <a:ext cx="3624986" cy="27432"/>
-          </a:xfrm>
-          <a:prstGeom prst="rect">
-            <a:avLst/>
-          </a:prstGeom>
-          <a:solidFill>
-            <a:srgbClr val="FFD000"/>
-          </a:solidFill>
-          <a:ln>
-            <a:noFill/>
-          </a:ln>
-        </p:spPr>
-        <p:style>
-          <a:lnRef idx="1">
-            <a:schemeClr val="accent1"/>
-          </a:lnRef>
-          <a:fillRef idx="3">
-            <a:schemeClr val="accent1"/>
-          </a:fillRef>
-          <a:effectRef idx="2">
-            <a:schemeClr val="accent1"/>
-          </a:effectRef>
-          <a:fontRef idx="minor">
-            <a:schemeClr val="lt1"/>
-          </a:fontRef>
-        </p:style>
-        <p:txBody>
-          <a:bodyPr rtlCol="0" anchor="ctr"/>
-          <a:lstStyle/>
-          <a:p>
-            <a:pPr algn="ctr"/>
-          </a:p>
-        </p:txBody>
-      </p:sp>
-      <p:pic>
-        <p:nvPicPr>
-          <p:cNvPr id="19" name="Picture 18" descr="mermaid.png"/>
-          <p:cNvPicPr>
-            <a:picLocks noChangeAspect="1"/>
-          </p:cNvPicPr>
-          <p:nvPr/>
-        </p:nvPicPr>
-        <p:blipFill>
-          <a:blip r:embed="rId4"/>
-          <a:stretch>
-            <a:fillRect/>
-          </a:stretch>
-        </p:blipFill>
-        <p:spPr>
-          <a:xfrm>
-            <a:off x="9311640" y="1847087"/>
-            <a:ext cx="1220724" cy="1220724"/>
-          </a:xfrm>
-          <a:prstGeom prst="rect">
-            <a:avLst/>
-          </a:prstGeom>
-        </p:spPr>
-      </p:pic>
-      <p:sp>
-        <p:nvSpPr>
-          <p:cNvPr id="20" name="TextBox 19"/>
-          <p:cNvSpPr txBox="1"/>
-          <p:nvPr/>
-        </p:nvSpPr>
-        <p:spPr>
-          <a:xfrm>
-            <a:off x="8182660" y="3159251"/>
-            <a:ext cx="3478682" cy="621792"/>
-          </a:xfrm>
-          <a:prstGeom prst="rect">
-            <a:avLst/>
-          </a:prstGeom>
-          <a:noFill/>
-        </p:spPr>
-        <p:txBody>
-          <a:bodyPr wrap="square" anchor="t"/>
-          <a:lstStyle/>
-          <a:p>
-            <a:pPr algn="ctr"/>
-            <a:r>
-              <a:rPr sz="1300" b="1" i="0">
-                <a:solidFill>
-                  <a:srgbClr val="095292"/>
-                </a:solidFill>
-                <a:latin typeface="Calibri"/>
-              </a:rPr>
-              <a:t>Mermaid</a:t>
-            </a:r>
-          </a:p>
-          <a:p>
-            <a:pPr algn="ctr">
-              <a:spcBef>
-                <a:spcPts val="200"/>
-              </a:spcBef>
-            </a:pPr>
-            <a:r>
-              <a:rPr sz="1000" b="0" i="0">
-                <a:solidFill>
-                  <a:srgbClr val="666666"/>
-                </a:solidFill>
-                <a:latin typeface="Calibri"/>
-              </a:rPr>
-              <a:t>Codigo del diagrama</a:t>
-            </a:r>
-          </a:p>
-        </p:txBody>
-      </p:sp>
-      <p:sp>
-        <p:nvSpPr>
-          <p:cNvPr id="21" name="Rounded Rectangle 20"/>
-          <p:cNvSpPr/>
-          <p:nvPr/>
-        </p:nvSpPr>
-        <p:spPr>
-          <a:xfrm>
-            <a:off x="4283354" y="4055364"/>
-            <a:ext cx="3624986" cy="2299716"/>
-          </a:xfrm>
-          <a:prstGeom prst="roundRect">
-            <a:avLst>
-              <a:gd name="adj" fmla="val 12000"/>
-            </a:avLst>
-          </a:prstGeom>
-          <a:solidFill>
-            <a:srgbClr val="F2F2F2"/>
-          </a:solidFill>
-          <a:ln>
-            <a:noFill/>
-          </a:ln>
-        </p:spPr>
-        <p:style>
-          <a:lnRef idx="1">
-            <a:schemeClr val="accent1"/>
-          </a:lnRef>
-          <a:fillRef idx="3">
-            <a:schemeClr val="accent1"/>
-          </a:fillRef>
-          <a:effectRef idx="2">
-            <a:schemeClr val="accent1"/>
-          </a:effectRef>
-          <a:fontRef idx="minor">
-            <a:schemeClr val="lt1"/>
-          </a:fontRef>
-        </p:style>
-        <p:txBody>
-          <a:bodyPr rtlCol="0" anchor="ctr"/>
-          <a:lstStyle/>
-          <a:p>
-            <a:pPr algn="ctr"/>
-          </a:p>
-        </p:txBody>
-      </p:sp>
-      <p:sp>
-        <p:nvSpPr>
-          <p:cNvPr id="22" name="Rectangle 21"/>
-          <p:cNvSpPr/>
-          <p:nvPr/>
-        </p:nvSpPr>
-        <p:spPr>
-          <a:xfrm>
-            <a:off x="4283354" y="4055364"/>
-            <a:ext cx="3624986" cy="64008"/>
-          </a:xfrm>
-          <a:prstGeom prst="rect">
-            <a:avLst/>
-          </a:prstGeom>
-          <a:solidFill>
-            <a:srgbClr val="095292"/>
-          </a:solidFill>
-          <a:ln>
-            <a:noFill/>
-          </a:ln>
-        </p:spPr>
-        <p:style>
-          <a:lnRef idx="1">
-            <a:schemeClr val="accent1"/>
-          </a:lnRef>
-          <a:fillRef idx="3">
-            <a:schemeClr val="accent1"/>
-          </a:fillRef>
-          <a:effectRef idx="2">
-            <a:schemeClr val="accent1"/>
-          </a:effectRef>
-          <a:fontRef idx="minor">
-            <a:schemeClr val="lt1"/>
-          </a:fontRef>
-        </p:style>
-        <p:txBody>
-          <a:bodyPr rtlCol="0" anchor="ctr"/>
-          <a:lstStyle/>
-          <a:p>
-            <a:pPr algn="ctr"/>
-          </a:p>
-        </p:txBody>
-      </p:sp>
-      <p:sp>
-        <p:nvSpPr>
-          <p:cNvPr id="23" name="Rectangle 22"/>
-          <p:cNvSpPr/>
-          <p:nvPr/>
-        </p:nvSpPr>
-        <p:spPr>
-          <a:xfrm>
-            <a:off x="4283354" y="4119372"/>
-            <a:ext cx="3624986" cy="27432"/>
-          </a:xfrm>
-          <a:prstGeom prst="rect">
-            <a:avLst/>
-          </a:prstGeom>
-          <a:solidFill>
-            <a:srgbClr val="FFD000"/>
-          </a:solidFill>
-          <a:ln>
-            <a:noFill/>
-          </a:ln>
-        </p:spPr>
-        <p:style>
-          <a:lnRef idx="1">
-            <a:schemeClr val="accent1"/>
-          </a:lnRef>
-          <a:fillRef idx="3">
-            <a:schemeClr val="accent1"/>
-          </a:fillRef>
-          <a:effectRef idx="2">
-            <a:schemeClr val="accent1"/>
-          </a:effectRef>
-          <a:fontRef idx="minor">
-            <a:schemeClr val="lt1"/>
-          </a:fontRef>
-        </p:style>
-        <p:txBody>
-          <a:bodyPr rtlCol="0" anchor="ctr"/>
-          <a:lstStyle/>
-          <a:p>
-            <a:pPr algn="ctr"/>
-          </a:p>
-        </p:txBody>
-      </p:sp>
-      <p:pic>
-        <p:nvPicPr>
-          <p:cNvPr id="24" name="Picture 23" descr="examlab.png"/>
-          <p:cNvPicPr>
-            <a:picLocks noChangeAspect="1"/>
-          </p:cNvPicPr>
-          <p:nvPr/>
-        </p:nvPicPr>
-        <p:blipFill>
-          <a:blip r:embed="rId5"/>
-          <a:stretch>
-            <a:fillRect/>
-          </a:stretch>
-        </p:blipFill>
-        <p:spPr>
-          <a:xfrm>
-            <a:off x="5485485" y="4311396"/>
-            <a:ext cx="1220724" cy="1220724"/>
-          </a:xfrm>
-          <a:prstGeom prst="rect">
-            <a:avLst/>
-          </a:prstGeom>
-        </p:spPr>
-      </p:pic>
-      <p:sp>
-        <p:nvSpPr>
-          <p:cNvPr id="25" name="TextBox 24"/>
-          <p:cNvSpPr txBox="1"/>
-          <p:nvPr/>
-        </p:nvSpPr>
-        <p:spPr>
-          <a:xfrm>
-            <a:off x="4356506" y="5623560"/>
-            <a:ext cx="3478682" cy="621792"/>
-          </a:xfrm>
-          <a:prstGeom prst="rect">
-            <a:avLst/>
-          </a:prstGeom>
-          <a:noFill/>
-        </p:spPr>
-        <p:txBody>
-          <a:bodyPr wrap="square" anchor="t"/>
-          <a:lstStyle/>
-          <a:p>
-            <a:pPr algn="ctr"/>
-            <a:r>
-              <a:rPr sz="1300" b="1" i="0">
-                <a:solidFill>
-                  <a:srgbClr val="095292"/>
-                </a:solidFill>
-                <a:latin typeface="Calibri"/>
-              </a:rPr>
-              <a:t>la plataforma del curso</a:t>
-            </a:r>
-          </a:p>
-          <a:p>
-            <a:pPr algn="ctr">
-              <a:spcBef>
-                <a:spcPts val="200"/>
-              </a:spcBef>
-            </a:pPr>
-            <a:r>
-              <a:rPr sz="1000" b="0" i="0">
-                <a:solidFill>
-                  <a:srgbClr val="666666"/>
-                </a:solidFill>
-                <a:latin typeface="Calibri"/>
-              </a:rPr>
-              <a:t>Donde se entrega</a:t>
-            </a:r>
-          </a:p>
-        </p:txBody>
-      </p:sp>
-      <p:sp>
-        <p:nvSpPr>
-          <p:cNvPr id="26" name="TextBox 25"/>
-          <p:cNvSpPr txBox="1"/>
-          <p:nvPr/>
-        </p:nvSpPr>
-        <p:spPr>
-          <a:xfrm>
-            <a:off x="11185855" y="6473952"/>
-            <a:ext cx="640080" cy="274320"/>
+            <a:off x="457200" y="3017520"/>
+            <a:ext cx="11277295" cy="1645920"/>
           </a:xfrm>
           <a:prstGeom prst="rect">
             <a:avLst/>
@@ -14829,15 +15029,86 @@
           </a:bodyPr>
           <a:lstStyle/>
           <a:p>
-            <a:pPr algn="r"/>
-            <a:r>
-              <a:rPr sz="1100" b="0" i="0">
-                <a:solidFill>
-                  <a:srgbClr val="666666"/>
-                </a:solidFill>
-                <a:latin typeface="Calibri"/>
-              </a:rPr>
-              <a:t>39</a:t>
+            <a:pPr algn="ctr">
+              <a:spcAft>
+                <a:spcPts val="600"/>
+              </a:spcAft>
+            </a:pPr>
+            <a:r>
+              <a:rPr sz="1600" b="0" i="0">
+                <a:solidFill>
+                  <a:srgbClr val="333333"/>
+                </a:solidFill>
+                <a:latin typeface="Calibri"/>
+              </a:rPr>
+              <a:t>Contrastar monolito vs microservicios con criterios de equipo y acoplamiento.</a:t>
+            </a:r>
+          </a:p>
+          <a:p>
+            <a:pPr algn="ctr">
+              <a:spcAft>
+                <a:spcPts val="600"/>
+              </a:spcAft>
+            </a:pPr>
+            <a:r>
+              <a:rPr sz="1600" b="0" i="0">
+                <a:solidFill>
+                  <a:srgbClr val="333333"/>
+                </a:solidFill>
+                <a:latin typeface="Calibri"/>
+              </a:rPr>
+              <a:t>Modelar CloudLite en C4 Container (Mermaid) con 2–5 cajas justificadas.</a:t>
+            </a:r>
+          </a:p>
+          <a:p>
+            <a:pPr algn="ctr">
+              <a:spcAft>
+                <a:spcPts val="600"/>
+              </a:spcAft>
+            </a:pPr>
+            <a:r>
+              <a:rPr sz="1600" b="0" i="0">
+                <a:solidFill>
+                  <a:srgbClr val="333333"/>
+                </a:solidFill>
+                <a:latin typeface="Calibri"/>
+              </a:rPr>
+              <a:t>Definir 3 contratos con verbo, ruta y error de negocio, y nombrar 3 riesgos de distribución.</a:t>
+            </a:r>
+          </a:p>
+        </p:txBody>
+      </p:sp>
+      <p:sp>
+        <p:nvSpPr>
+          <p:cNvPr id="6" name="TextBox 5"/>
+          <p:cNvSpPr txBox="1"/>
+          <p:nvPr/>
+        </p:nvSpPr>
+        <p:spPr>
+          <a:xfrm>
+            <a:off x="457200" y="4754880"/>
+            <a:ext cx="11277295" cy="640080"/>
+          </a:xfrm>
+          <a:prstGeom prst="rect">
+            <a:avLst/>
+          </a:prstGeom>
+          <a:noFill/>
+        </p:spPr>
+        <p:txBody>
+          <a:bodyPr wrap="square">
+            <a:spAutoFit/>
+          </a:bodyPr>
+          <a:lstStyle/>
+          <a:p>
+            <a:pPr algn="ctr"/>
+            <a:r>
+              <a:rPr sz="2000" b="1" i="0">
+                <a:solidFill>
+                  <a:srgbClr val="269CCB"/>
+                </a:solidFill>
+                <a:latin typeface="Calibri"/>
+              </a:rPr>
+              <a:t>Teoría al servicio del diseño</a:t>
             </a:r>
           </a:p>
         </p:txBody>
@@ -15210,2376 +15481,6 @@
                 <a:latin typeface="Calibri"/>
               </a:rPr>
               <a:t>4</a:t>
-            </a:r>
-          </a:p>
-        </p:txBody>
-      </p:sp>
-    </p:spTree>
-  </p:cSld>
-  <p:clrMapOvr>
-    <a:masterClrMapping/>
-  </p:clrMapOvr>
-</p:sld>
-</file>
-
-<file path=ppt/slides/slide40.xml><?xml version="1.0" encoding="utf-8"?>
-<p:sld xmlns:a="http://schemas.openxmlformats.org/drawingml/2006/main" xmlns:p="http://schemas.openxmlformats.org/presentationml/2006/main" xmlns:r="http://schemas.openxmlformats.org/officeDocument/2006/relationships">
-  <p:cSld>
-    <p:bg>
-      <p:bgPr>
-        <a:solidFill>
-          <a:srgbClr val="FFFFFF"/>
-        </a:solidFill>
-        <a:effectLst/>
-      </p:bgPr>
-    </p:bg>
-    <p:spTree>
-      <p:nvGrpSpPr>
-        <p:cNvPr id="1" name=""/>
-        <p:cNvGrpSpPr/>
-        <p:nvPr/>
-      </p:nvGrpSpPr>
-      <p:grpSpPr/>
-      <p:sp>
-        <p:nvSpPr>
-          <p:cNvPr id="2" name="Rectangle 1"/>
-          <p:cNvSpPr/>
-          <p:nvPr/>
-        </p:nvSpPr>
-        <p:spPr>
-          <a:xfrm>
-            <a:off x="0" y="0"/>
-            <a:ext cx="12191695" cy="1170432"/>
-          </a:xfrm>
-          <a:prstGeom prst="rect">
-            <a:avLst/>
-          </a:prstGeom>
-          <a:solidFill>
-            <a:srgbClr val="095292"/>
-          </a:solidFill>
-          <a:ln>
-            <a:noFill/>
-          </a:ln>
-        </p:spPr>
-        <p:style>
-          <a:lnRef idx="1">
-            <a:schemeClr val="accent1"/>
-          </a:lnRef>
-          <a:fillRef idx="3">
-            <a:schemeClr val="accent1"/>
-          </a:fillRef>
-          <a:effectRef idx="2">
-            <a:schemeClr val="accent1"/>
-          </a:effectRef>
-          <a:fontRef idx="minor">
-            <a:schemeClr val="lt1"/>
-          </a:fontRef>
-        </p:style>
-        <p:txBody>
-          <a:bodyPr rtlCol="0" anchor="ctr"/>
-          <a:lstStyle/>
-          <a:p>
-            <a:pPr algn="ctr"/>
-          </a:p>
-        </p:txBody>
-      </p:sp>
-      <p:sp>
-        <p:nvSpPr>
-          <p:cNvPr id="3" name="Rectangle 2"/>
-          <p:cNvSpPr/>
-          <p:nvPr/>
-        </p:nvSpPr>
-        <p:spPr>
-          <a:xfrm>
-            <a:off x="0" y="1170432"/>
-            <a:ext cx="12191695" cy="41148"/>
-          </a:xfrm>
-          <a:prstGeom prst="rect">
-            <a:avLst/>
-          </a:prstGeom>
-          <a:solidFill>
-            <a:srgbClr val="FFD000"/>
-          </a:solidFill>
-          <a:ln>
-            <a:noFill/>
-          </a:ln>
-        </p:spPr>
-        <p:style>
-          <a:lnRef idx="1">
-            <a:schemeClr val="accent1"/>
-          </a:lnRef>
-          <a:fillRef idx="3">
-            <a:schemeClr val="accent1"/>
-          </a:fillRef>
-          <a:effectRef idx="2">
-            <a:schemeClr val="accent1"/>
-          </a:effectRef>
-          <a:fontRef idx="minor">
-            <a:schemeClr val="lt1"/>
-          </a:fontRef>
-        </p:style>
-        <p:txBody>
-          <a:bodyPr rtlCol="0" anchor="ctr"/>
-          <a:lstStyle/>
-          <a:p>
-            <a:pPr algn="ctr"/>
-          </a:p>
-        </p:txBody>
-      </p:sp>
-      <p:sp>
-        <p:nvSpPr>
-          <p:cNvPr id="4" name="TextBox 3"/>
-          <p:cNvSpPr txBox="1"/>
-          <p:nvPr/>
-        </p:nvSpPr>
-        <p:spPr>
-          <a:xfrm>
-            <a:off x="457200" y="164592"/>
-            <a:ext cx="11277295" cy="384048"/>
-          </a:xfrm>
-          <a:prstGeom prst="rect">
-            <a:avLst/>
-          </a:prstGeom>
-          <a:noFill/>
-        </p:spPr>
-        <p:txBody>
-          <a:bodyPr wrap="square">
-            <a:spAutoFit/>
-          </a:bodyPr>
-          <a:lstStyle/>
-          <a:p>
-            <a:r>
-              <a:rPr sz="2600" b="1" i="0">
-                <a:solidFill>
-                  <a:srgbClr val="FFFFFF"/>
-                </a:solidFill>
-                <a:latin typeface="Calibri"/>
-              </a:rPr>
-              <a:t>Del boceto a la plataforma del curso (diagrama)</a:t>
-            </a:r>
-          </a:p>
-        </p:txBody>
-      </p:sp>
-      <p:sp>
-        <p:nvSpPr>
-          <p:cNvPr id="5" name="TextBox 4"/>
-          <p:cNvSpPr txBox="1"/>
-          <p:nvPr/>
-        </p:nvSpPr>
-        <p:spPr>
-          <a:xfrm>
-            <a:off x="457200" y="566928"/>
-            <a:ext cx="11277295" cy="411480"/>
-          </a:xfrm>
-          <a:prstGeom prst="rect">
-            <a:avLst/>
-          </a:prstGeom>
-          <a:noFill/>
-        </p:spPr>
-        <p:txBody>
-          <a:bodyPr wrap="square">
-            <a:spAutoFit/>
-          </a:bodyPr>
-          <a:lstStyle/>
-          <a:p>
-            <a:r>
-              <a:rPr sz="1400" b="0" i="0">
-                <a:solidFill>
-                  <a:srgbClr val="B8D8EE"/>
-                </a:solidFill>
-                <a:latin typeface="Calibri"/>
-              </a:rPr>
-              <a:t>El diagrama se entrega como código Mermaid en la plataforma del curso, no como imagen</a:t>
-            </a:r>
-          </a:p>
-        </p:txBody>
-      </p:sp>
-      <p:sp>
-        <p:nvSpPr>
-          <p:cNvPr id="6" name="Rounded Rectangle 5"/>
-          <p:cNvSpPr/>
-          <p:nvPr/>
-        </p:nvSpPr>
-        <p:spPr>
-          <a:xfrm>
-            <a:off x="457200" y="1659636"/>
-            <a:ext cx="11277295" cy="1051560"/>
-          </a:xfrm>
-          <a:prstGeom prst="roundRect">
-            <a:avLst>
-              <a:gd name="adj" fmla="val 12000"/>
-            </a:avLst>
-          </a:prstGeom>
-          <a:solidFill>
-            <a:srgbClr val="F2F2F2"/>
-          </a:solidFill>
-          <a:ln>
-            <a:noFill/>
-          </a:ln>
-        </p:spPr>
-        <p:style>
-          <a:lnRef idx="1">
-            <a:schemeClr val="accent1"/>
-          </a:lnRef>
-          <a:fillRef idx="3">
-            <a:schemeClr val="accent1"/>
-          </a:fillRef>
-          <a:effectRef idx="2">
-            <a:schemeClr val="accent1"/>
-          </a:effectRef>
-          <a:fontRef idx="minor">
-            <a:schemeClr val="lt1"/>
-          </a:fontRef>
-        </p:style>
-        <p:txBody>
-          <a:bodyPr rtlCol="0" anchor="ctr"/>
-          <a:lstStyle/>
-          <a:p>
-            <a:pPr algn="ctr"/>
-          </a:p>
-        </p:txBody>
-      </p:sp>
-      <p:sp>
-        <p:nvSpPr>
-          <p:cNvPr id="7" name="Rounded Rectangle 6"/>
-          <p:cNvSpPr/>
-          <p:nvPr/>
-        </p:nvSpPr>
-        <p:spPr>
-          <a:xfrm>
-            <a:off x="594360" y="1965960"/>
-            <a:ext cx="438912" cy="438912"/>
-          </a:xfrm>
-          <a:prstGeom prst="roundRect">
-            <a:avLst>
-              <a:gd name="adj" fmla="val 12000"/>
-            </a:avLst>
-          </a:prstGeom>
-          <a:solidFill>
-            <a:srgbClr val="095292"/>
-          </a:solidFill>
-          <a:ln>
-            <a:noFill/>
-          </a:ln>
-        </p:spPr>
-        <p:style>
-          <a:lnRef idx="1">
-            <a:schemeClr val="accent1"/>
-          </a:lnRef>
-          <a:fillRef idx="3">
-            <a:schemeClr val="accent1"/>
-          </a:fillRef>
-          <a:effectRef idx="2">
-            <a:schemeClr val="accent1"/>
-          </a:effectRef>
-          <a:fontRef idx="minor">
-            <a:schemeClr val="lt1"/>
-          </a:fontRef>
-        </p:style>
-        <p:txBody>
-          <a:bodyPr rtlCol="0" anchor="ctr"/>
-          <a:lstStyle/>
-          <a:p>
-            <a:pPr algn="ctr"/>
-          </a:p>
-        </p:txBody>
-      </p:sp>
-      <p:sp>
-        <p:nvSpPr>
-          <p:cNvPr id="8" name="TextBox 7"/>
-          <p:cNvSpPr txBox="1"/>
-          <p:nvPr/>
-        </p:nvSpPr>
-        <p:spPr>
-          <a:xfrm>
-            <a:off x="594360" y="1965960"/>
-            <a:ext cx="438912" cy="438912"/>
-          </a:xfrm>
-          <a:prstGeom prst="rect">
-            <a:avLst/>
-          </a:prstGeom>
-          <a:noFill/>
-        </p:spPr>
-        <p:txBody>
-          <a:bodyPr wrap="square" anchor="ctr"/>
-          <a:lstStyle/>
-          <a:p>
-            <a:pPr algn="ctr"/>
-            <a:r>
-              <a:rPr sz="1600" b="1" i="0">
-                <a:solidFill>
-                  <a:srgbClr val="FFFFFF"/>
-                </a:solidFill>
-                <a:latin typeface="Calibri"/>
-              </a:rPr>
-              <a:t>1</a:t>
-            </a:r>
-          </a:p>
-        </p:txBody>
-      </p:sp>
-      <p:sp>
-        <p:nvSpPr>
-          <p:cNvPr id="9" name="TextBox 8"/>
-          <p:cNvSpPr txBox="1"/>
-          <p:nvPr/>
-        </p:nvSpPr>
-        <p:spPr>
-          <a:xfrm>
-            <a:off x="1188720" y="1751076"/>
-            <a:ext cx="10271455" cy="886968"/>
-          </a:xfrm>
-          <a:prstGeom prst="rect">
-            <a:avLst/>
-          </a:prstGeom>
-          <a:noFill/>
-        </p:spPr>
-        <p:txBody>
-          <a:bodyPr wrap="square" anchor="ctr"/>
-          <a:lstStyle/>
-          <a:p>
-            <a:r>
-              <a:rPr sz="1500" b="1" i="0">
-                <a:solidFill>
-                  <a:srgbClr val="095292"/>
-                </a:solidFill>
-                <a:latin typeface="Calibri"/>
-              </a:rPr>
-              <a:t>Disena visual</a:t>
-            </a:r>
-          </a:p>
-          <a:p>
-            <a:pPr>
-              <a:spcBef>
-                <a:spcPts val="200"/>
-              </a:spcBef>
-            </a:pPr>
-            <a:r>
-              <a:rPr sz="1300" b="0" i="0">
-                <a:solidFill>
-                  <a:srgbClr val="333333"/>
-                </a:solidFill>
-                <a:latin typeface="Calibri"/>
-              </a:rPr>
-              <a:t>Dibuja el diagrama como quieras en Excalidraw o draw.io: es mas rapido arrastrar cajas que escribir codigo, y ahi es donde piensas el modelo.</a:t>
-            </a:r>
-          </a:p>
-        </p:txBody>
-      </p:sp>
-      <p:sp>
-        <p:nvSpPr>
-          <p:cNvPr id="10" name="Rounded Rectangle 9"/>
-          <p:cNvSpPr/>
-          <p:nvPr/>
-        </p:nvSpPr>
-        <p:spPr>
-          <a:xfrm>
-            <a:off x="457200" y="2802636"/>
-            <a:ext cx="11277295" cy="1051560"/>
-          </a:xfrm>
-          <a:prstGeom prst="roundRect">
-            <a:avLst>
-              <a:gd name="adj" fmla="val 12000"/>
-            </a:avLst>
-          </a:prstGeom>
-          <a:solidFill>
-            <a:srgbClr val="E8F4FA"/>
-          </a:solidFill>
-          <a:ln>
-            <a:noFill/>
-          </a:ln>
-        </p:spPr>
-        <p:style>
-          <a:lnRef idx="1">
-            <a:schemeClr val="accent1"/>
-          </a:lnRef>
-          <a:fillRef idx="3">
-            <a:schemeClr val="accent1"/>
-          </a:fillRef>
-          <a:effectRef idx="2">
-            <a:schemeClr val="accent1"/>
-          </a:effectRef>
-          <a:fontRef idx="minor">
-            <a:schemeClr val="lt1"/>
-          </a:fontRef>
-        </p:style>
-        <p:txBody>
-          <a:bodyPr rtlCol="0" anchor="ctr"/>
-          <a:lstStyle/>
-          <a:p>
-            <a:pPr algn="ctr"/>
-          </a:p>
-        </p:txBody>
-      </p:sp>
-      <p:sp>
-        <p:nvSpPr>
-          <p:cNvPr id="11" name="Rounded Rectangle 10"/>
-          <p:cNvSpPr/>
-          <p:nvPr/>
-        </p:nvSpPr>
-        <p:spPr>
-          <a:xfrm>
-            <a:off x="594360" y="3108960"/>
-            <a:ext cx="438912" cy="438912"/>
-          </a:xfrm>
-          <a:prstGeom prst="roundRect">
-            <a:avLst>
-              <a:gd name="adj" fmla="val 12000"/>
-            </a:avLst>
-          </a:prstGeom>
-          <a:solidFill>
-            <a:srgbClr val="095292"/>
-          </a:solidFill>
-          <a:ln>
-            <a:noFill/>
-          </a:ln>
-        </p:spPr>
-        <p:style>
-          <a:lnRef idx="1">
-            <a:schemeClr val="accent1"/>
-          </a:lnRef>
-          <a:fillRef idx="3">
-            <a:schemeClr val="accent1"/>
-          </a:fillRef>
-          <a:effectRef idx="2">
-            <a:schemeClr val="accent1"/>
-          </a:effectRef>
-          <a:fontRef idx="minor">
-            <a:schemeClr val="lt1"/>
-          </a:fontRef>
-        </p:style>
-        <p:txBody>
-          <a:bodyPr rtlCol="0" anchor="ctr"/>
-          <a:lstStyle/>
-          <a:p>
-            <a:pPr algn="ctr"/>
-          </a:p>
-        </p:txBody>
-      </p:sp>
-      <p:sp>
-        <p:nvSpPr>
-          <p:cNvPr id="12" name="TextBox 11"/>
-          <p:cNvSpPr txBox="1"/>
-          <p:nvPr/>
-        </p:nvSpPr>
-        <p:spPr>
-          <a:xfrm>
-            <a:off x="594360" y="3108960"/>
-            <a:ext cx="438912" cy="438912"/>
-          </a:xfrm>
-          <a:prstGeom prst="rect">
-            <a:avLst/>
-          </a:prstGeom>
-          <a:noFill/>
-        </p:spPr>
-        <p:txBody>
-          <a:bodyPr wrap="square" anchor="ctr"/>
-          <a:lstStyle/>
-          <a:p>
-            <a:pPr algn="ctr"/>
-            <a:r>
-              <a:rPr sz="1600" b="1" i="0">
-                <a:solidFill>
-                  <a:srgbClr val="FFFFFF"/>
-                </a:solidFill>
-                <a:latin typeface="Calibri"/>
-              </a:rPr>
-              <a:t>2</a:t>
-            </a:r>
-          </a:p>
-        </p:txBody>
-      </p:sp>
-      <p:sp>
-        <p:nvSpPr>
-          <p:cNvPr id="13" name="TextBox 12"/>
-          <p:cNvSpPr txBox="1"/>
-          <p:nvPr/>
-        </p:nvSpPr>
-        <p:spPr>
-          <a:xfrm>
-            <a:off x="1188720" y="2894076"/>
-            <a:ext cx="10271455" cy="886968"/>
-          </a:xfrm>
-          <a:prstGeom prst="rect">
-            <a:avLst/>
-          </a:prstGeom>
-          <a:noFill/>
-        </p:spPr>
-        <p:txBody>
-          <a:bodyPr wrap="square" anchor="ctr"/>
-          <a:lstStyle/>
-          <a:p>
-            <a:r>
-              <a:rPr sz="1500" b="1" i="0">
-                <a:solidFill>
-                  <a:srgbClr val="095292"/>
-                </a:solidFill>
-                <a:latin typeface="Calibri"/>
-              </a:rPr>
-              <a:t>Traduce con IA</a:t>
-            </a:r>
-          </a:p>
-          <a:p>
-            <a:pPr>
-              <a:spcBef>
-                <a:spcPts val="200"/>
-              </a:spcBef>
-            </a:pPr>
-            <a:r>
-              <a:rPr sz="1300" b="0" i="0">
-                <a:solidFill>
-                  <a:srgbClr val="333333"/>
-                </a:solidFill>
-                <a:latin typeface="Calibri"/>
-              </a:rPr>
-              <a:t>Copia o describe tu boceto a una IA y pidele el codigo Mermaid: «convierte este diagrama a Mermaid usando C4Container». Revisa el resultado: la IA acierta la sintaxis, no tu modelo.</a:t>
-            </a:r>
-          </a:p>
-        </p:txBody>
-      </p:sp>
-      <p:sp>
-        <p:nvSpPr>
-          <p:cNvPr id="14" name="Rounded Rectangle 13"/>
-          <p:cNvSpPr/>
-          <p:nvPr/>
-        </p:nvSpPr>
-        <p:spPr>
-          <a:xfrm>
-            <a:off x="457200" y="3945636"/>
-            <a:ext cx="11277295" cy="1051560"/>
-          </a:xfrm>
-          <a:prstGeom prst="roundRect">
-            <a:avLst>
-              <a:gd name="adj" fmla="val 12000"/>
-            </a:avLst>
-          </a:prstGeom>
-          <a:solidFill>
-            <a:srgbClr val="F2F2F2"/>
-          </a:solidFill>
-          <a:ln>
-            <a:noFill/>
-          </a:ln>
-        </p:spPr>
-        <p:style>
-          <a:lnRef idx="1">
-            <a:schemeClr val="accent1"/>
-          </a:lnRef>
-          <a:fillRef idx="3">
-            <a:schemeClr val="accent1"/>
-          </a:fillRef>
-          <a:effectRef idx="2">
-            <a:schemeClr val="accent1"/>
-          </a:effectRef>
-          <a:fontRef idx="minor">
-            <a:schemeClr val="lt1"/>
-          </a:fontRef>
-        </p:style>
-        <p:txBody>
-          <a:bodyPr rtlCol="0" anchor="ctr"/>
-          <a:lstStyle/>
-          <a:p>
-            <a:pPr algn="ctr"/>
-          </a:p>
-        </p:txBody>
-      </p:sp>
-      <p:sp>
-        <p:nvSpPr>
-          <p:cNvPr id="15" name="Rounded Rectangle 14"/>
-          <p:cNvSpPr/>
-          <p:nvPr/>
-        </p:nvSpPr>
-        <p:spPr>
-          <a:xfrm>
-            <a:off x="594360" y="4251960"/>
-            <a:ext cx="438912" cy="438912"/>
-          </a:xfrm>
-          <a:prstGeom prst="roundRect">
-            <a:avLst>
-              <a:gd name="adj" fmla="val 12000"/>
-            </a:avLst>
-          </a:prstGeom>
-          <a:solidFill>
-            <a:srgbClr val="095292"/>
-          </a:solidFill>
-          <a:ln>
-            <a:noFill/>
-          </a:ln>
-        </p:spPr>
-        <p:style>
-          <a:lnRef idx="1">
-            <a:schemeClr val="accent1"/>
-          </a:lnRef>
-          <a:fillRef idx="3">
-            <a:schemeClr val="accent1"/>
-          </a:fillRef>
-          <a:effectRef idx="2">
-            <a:schemeClr val="accent1"/>
-          </a:effectRef>
-          <a:fontRef idx="minor">
-            <a:schemeClr val="lt1"/>
-          </a:fontRef>
-        </p:style>
-        <p:txBody>
-          <a:bodyPr rtlCol="0" anchor="ctr"/>
-          <a:lstStyle/>
-          <a:p>
-            <a:pPr algn="ctr"/>
-          </a:p>
-        </p:txBody>
-      </p:sp>
-      <p:sp>
-        <p:nvSpPr>
-          <p:cNvPr id="16" name="TextBox 15"/>
-          <p:cNvSpPr txBox="1"/>
-          <p:nvPr/>
-        </p:nvSpPr>
-        <p:spPr>
-          <a:xfrm>
-            <a:off x="594360" y="4251960"/>
-            <a:ext cx="438912" cy="438912"/>
-          </a:xfrm>
-          <a:prstGeom prst="rect">
-            <a:avLst/>
-          </a:prstGeom>
-          <a:noFill/>
-        </p:spPr>
-        <p:txBody>
-          <a:bodyPr wrap="square" anchor="ctr"/>
-          <a:lstStyle/>
-          <a:p>
-            <a:pPr algn="ctr"/>
-            <a:r>
-              <a:rPr sz="1600" b="1" i="0">
-                <a:solidFill>
-                  <a:srgbClr val="FFFFFF"/>
-                </a:solidFill>
-                <a:latin typeface="Calibri"/>
-              </a:rPr>
-              <a:t>3</a:t>
-            </a:r>
-          </a:p>
-        </p:txBody>
-      </p:sp>
-      <p:sp>
-        <p:nvSpPr>
-          <p:cNvPr id="17" name="TextBox 16"/>
-          <p:cNvSpPr txBox="1"/>
-          <p:nvPr/>
-        </p:nvSpPr>
-        <p:spPr>
-          <a:xfrm>
-            <a:off x="1188720" y="4037076"/>
-            <a:ext cx="10271455" cy="886968"/>
-          </a:xfrm>
-          <a:prstGeom prst="rect">
-            <a:avLst/>
-          </a:prstGeom>
-          <a:noFill/>
-        </p:spPr>
-        <p:txBody>
-          <a:bodyPr wrap="square" anchor="ctr"/>
-          <a:lstStyle/>
-          <a:p>
-            <a:r>
-              <a:rPr sz="1500" b="1" i="0">
-                <a:solidFill>
-                  <a:srgbClr val="095292"/>
-                </a:solidFill>
-                <a:latin typeface="Calibri"/>
-              </a:rPr>
-              <a:t>Pega y renderiza en la plataforma del curso</a:t>
-            </a:r>
-          </a:p>
-          <a:p>
-            <a:pPr>
-              <a:spcBef>
-                <a:spcPts val="200"/>
-              </a:spcBef>
-            </a:pPr>
-            <a:r>
-              <a:rPr sz="1300" b="0" i="0">
-                <a:solidFill>
-                  <a:srgbClr val="333333"/>
-                </a:solidFill>
-                <a:latin typeface="Calibri"/>
-              </a:rPr>
-              <a:t>Pega ese codigo en la caja de texto de la pregunta y mira como lo dibuja la plataforma. Si no renderiza, corrige ahi mismo: lo que se califica es el diagrama renderizado dentro de la plataforma del curso.</a:t>
-            </a:r>
-          </a:p>
-        </p:txBody>
-      </p:sp>
-      <p:sp>
-        <p:nvSpPr>
-          <p:cNvPr id="18" name="Rounded Rectangle 17"/>
-          <p:cNvSpPr/>
-          <p:nvPr/>
-        </p:nvSpPr>
-        <p:spPr>
-          <a:xfrm>
-            <a:off x="457200" y="5088636"/>
-            <a:ext cx="11277295" cy="1051560"/>
-          </a:xfrm>
-          <a:prstGeom prst="roundRect">
-            <a:avLst>
-              <a:gd name="adj" fmla="val 12000"/>
-            </a:avLst>
-          </a:prstGeom>
-          <a:solidFill>
-            <a:srgbClr val="E8F4FA"/>
-          </a:solidFill>
-          <a:ln>
-            <a:noFill/>
-          </a:ln>
-        </p:spPr>
-        <p:style>
-          <a:lnRef idx="1">
-            <a:schemeClr val="accent1"/>
-          </a:lnRef>
-          <a:fillRef idx="3">
-            <a:schemeClr val="accent1"/>
-          </a:fillRef>
-          <a:effectRef idx="2">
-            <a:schemeClr val="accent1"/>
-          </a:effectRef>
-          <a:fontRef idx="minor">
-            <a:schemeClr val="lt1"/>
-          </a:fontRef>
-        </p:style>
-        <p:txBody>
-          <a:bodyPr rtlCol="0" anchor="ctr"/>
-          <a:lstStyle/>
-          <a:p>
-            <a:pPr algn="ctr"/>
-          </a:p>
-        </p:txBody>
-      </p:sp>
-      <p:sp>
-        <p:nvSpPr>
-          <p:cNvPr id="19" name="Rounded Rectangle 18"/>
-          <p:cNvSpPr/>
-          <p:nvPr/>
-        </p:nvSpPr>
-        <p:spPr>
-          <a:xfrm>
-            <a:off x="594360" y="5394960"/>
-            <a:ext cx="438912" cy="438912"/>
-          </a:xfrm>
-          <a:prstGeom prst="roundRect">
-            <a:avLst>
-              <a:gd name="adj" fmla="val 12000"/>
-            </a:avLst>
-          </a:prstGeom>
-          <a:solidFill>
-            <a:srgbClr val="095292"/>
-          </a:solidFill>
-          <a:ln>
-            <a:noFill/>
-          </a:ln>
-        </p:spPr>
-        <p:style>
-          <a:lnRef idx="1">
-            <a:schemeClr val="accent1"/>
-          </a:lnRef>
-          <a:fillRef idx="3">
-            <a:schemeClr val="accent1"/>
-          </a:fillRef>
-          <a:effectRef idx="2">
-            <a:schemeClr val="accent1"/>
-          </a:effectRef>
-          <a:fontRef idx="minor">
-            <a:schemeClr val="lt1"/>
-          </a:fontRef>
-        </p:style>
-        <p:txBody>
-          <a:bodyPr rtlCol="0" anchor="ctr"/>
-          <a:lstStyle/>
-          <a:p>
-            <a:pPr algn="ctr"/>
-          </a:p>
-        </p:txBody>
-      </p:sp>
-      <p:sp>
-        <p:nvSpPr>
-          <p:cNvPr id="20" name="TextBox 19"/>
-          <p:cNvSpPr txBox="1"/>
-          <p:nvPr/>
-        </p:nvSpPr>
-        <p:spPr>
-          <a:xfrm>
-            <a:off x="594360" y="5394960"/>
-            <a:ext cx="438912" cy="438912"/>
-          </a:xfrm>
-          <a:prstGeom prst="rect">
-            <a:avLst/>
-          </a:prstGeom>
-          <a:noFill/>
-        </p:spPr>
-        <p:txBody>
-          <a:bodyPr wrap="square" anchor="ctr"/>
-          <a:lstStyle/>
-          <a:p>
-            <a:pPr algn="ctr"/>
-            <a:r>
-              <a:rPr sz="1600" b="1" i="0">
-                <a:solidFill>
-                  <a:srgbClr val="FFFFFF"/>
-                </a:solidFill>
-                <a:latin typeface="Calibri"/>
-              </a:rPr>
-              <a:t>4</a:t>
-            </a:r>
-          </a:p>
-        </p:txBody>
-      </p:sp>
-      <p:sp>
-        <p:nvSpPr>
-          <p:cNvPr id="21" name="TextBox 20"/>
-          <p:cNvSpPr txBox="1"/>
-          <p:nvPr/>
-        </p:nvSpPr>
-        <p:spPr>
-          <a:xfrm>
-            <a:off x="1188720" y="5180076"/>
-            <a:ext cx="10271455" cy="886968"/>
-          </a:xfrm>
-          <a:prstGeom prst="rect">
-            <a:avLst/>
-          </a:prstGeom>
-          <a:noFill/>
-        </p:spPr>
-        <p:txBody>
-          <a:bodyPr wrap="square" anchor="ctr"/>
-          <a:lstStyle/>
-          <a:p>
-            <a:r>
-              <a:rPr sz="1500" b="1" i="0">
-                <a:solidFill>
-                  <a:srgbClr val="095292"/>
-                </a:solidFill>
-                <a:latin typeface="Calibri"/>
-              </a:rPr>
-              <a:t>Guarda el PNG para tu PI</a:t>
-            </a:r>
-          </a:p>
-          <a:p>
-            <a:pPr>
-              <a:spcBef>
-                <a:spcPts val="200"/>
-              </a:spcBef>
-            </a:pPr>
-            <a:r>
-              <a:rPr sz="1300" b="0" i="0">
-                <a:solidFill>
-                  <a:srgbClr val="333333"/>
-                </a:solidFill>
-                <a:latin typeface="Calibri"/>
-              </a:rPr>
-              <a:t>Exporta tambien la imagen a la carpeta de tu Proyecto Integrador. Esa copia es para tu informe; no reemplaza la respuesta en la plataforma.</a:t>
-            </a:r>
-          </a:p>
-        </p:txBody>
-      </p:sp>
-      <p:sp>
-        <p:nvSpPr>
-          <p:cNvPr id="22" name="TextBox 21"/>
-          <p:cNvSpPr txBox="1"/>
-          <p:nvPr/>
-        </p:nvSpPr>
-        <p:spPr>
-          <a:xfrm>
-            <a:off x="11185855" y="6473952"/>
-            <a:ext cx="640080" cy="274320"/>
-          </a:xfrm>
-          <a:prstGeom prst="rect">
-            <a:avLst/>
-          </a:prstGeom>
-          <a:noFill/>
-        </p:spPr>
-        <p:txBody>
-          <a:bodyPr wrap="square">
-            <a:spAutoFit/>
-          </a:bodyPr>
-          <a:lstStyle/>
-          <a:p>
-            <a:pPr algn="r"/>
-            <a:r>
-              <a:rPr sz="1100" b="0" i="0">
-                <a:solidFill>
-                  <a:srgbClr val="666666"/>
-                </a:solidFill>
-                <a:latin typeface="Calibri"/>
-              </a:rPr>
-              <a:t>40</a:t>
-            </a:r>
-          </a:p>
-        </p:txBody>
-      </p:sp>
-    </p:spTree>
-  </p:cSld>
-  <p:clrMapOvr>
-    <a:masterClrMapping/>
-  </p:clrMapOvr>
-</p:sld>
-</file>
-
-<file path=ppt/slides/slide41.xml><?xml version="1.0" encoding="utf-8"?>
-<p:sld xmlns:a="http://schemas.openxmlformats.org/drawingml/2006/main" xmlns:p="http://schemas.openxmlformats.org/presentationml/2006/main" xmlns:r="http://schemas.openxmlformats.org/officeDocument/2006/relationships">
-  <p:cSld>
-    <p:bg>
-      <p:bgPr>
-        <a:solidFill>
-          <a:srgbClr val="FFFFFF"/>
-        </a:solidFill>
-        <a:effectLst/>
-      </p:bgPr>
-    </p:bg>
-    <p:spTree>
-      <p:nvGrpSpPr>
-        <p:cNvPr id="1" name=""/>
-        <p:cNvGrpSpPr/>
-        <p:nvPr/>
-      </p:nvGrpSpPr>
-      <p:grpSpPr/>
-      <p:sp>
-        <p:nvSpPr>
-          <p:cNvPr id="2" name="Rectangle 1"/>
-          <p:cNvSpPr/>
-          <p:nvPr/>
-        </p:nvSpPr>
-        <p:spPr>
-          <a:xfrm>
-            <a:off x="0" y="0"/>
-            <a:ext cx="12191695" cy="960120"/>
-          </a:xfrm>
-          <a:prstGeom prst="rect">
-            <a:avLst/>
-          </a:prstGeom>
-          <a:solidFill>
-            <a:srgbClr val="095292"/>
-          </a:solidFill>
-          <a:ln>
-            <a:noFill/>
-          </a:ln>
-        </p:spPr>
-        <p:style>
-          <a:lnRef idx="1">
-            <a:schemeClr val="accent1"/>
-          </a:lnRef>
-          <a:fillRef idx="3">
-            <a:schemeClr val="accent1"/>
-          </a:fillRef>
-          <a:effectRef idx="2">
-            <a:schemeClr val="accent1"/>
-          </a:effectRef>
-          <a:fontRef idx="minor">
-            <a:schemeClr val="lt1"/>
-          </a:fontRef>
-        </p:style>
-        <p:txBody>
-          <a:bodyPr rtlCol="0" anchor="ctr"/>
-          <a:lstStyle/>
-          <a:p>
-            <a:pPr algn="ctr"/>
-          </a:p>
-        </p:txBody>
-      </p:sp>
-      <p:sp>
-        <p:nvSpPr>
-          <p:cNvPr id="3" name="Rectangle 2"/>
-          <p:cNvSpPr/>
-          <p:nvPr/>
-        </p:nvSpPr>
-        <p:spPr>
-          <a:xfrm>
-            <a:off x="0" y="960120"/>
-            <a:ext cx="12191695" cy="41148"/>
-          </a:xfrm>
-          <a:prstGeom prst="rect">
-            <a:avLst/>
-          </a:prstGeom>
-          <a:solidFill>
-            <a:srgbClr val="FFD000"/>
-          </a:solidFill>
-          <a:ln>
-            <a:noFill/>
-          </a:ln>
-        </p:spPr>
-        <p:style>
-          <a:lnRef idx="1">
-            <a:schemeClr val="accent1"/>
-          </a:lnRef>
-          <a:fillRef idx="3">
-            <a:schemeClr val="accent1"/>
-          </a:fillRef>
-          <a:effectRef idx="2">
-            <a:schemeClr val="accent1"/>
-          </a:effectRef>
-          <a:fontRef idx="minor">
-            <a:schemeClr val="lt1"/>
-          </a:fontRef>
-        </p:style>
-        <p:txBody>
-          <a:bodyPr rtlCol="0" anchor="ctr"/>
-          <a:lstStyle/>
-          <a:p>
-            <a:pPr algn="ctr"/>
-          </a:p>
-        </p:txBody>
-      </p:sp>
-      <p:sp>
-        <p:nvSpPr>
-          <p:cNvPr id="4" name="TextBox 3"/>
-          <p:cNvSpPr txBox="1"/>
-          <p:nvPr/>
-        </p:nvSpPr>
-        <p:spPr>
-          <a:xfrm>
-            <a:off x="457200" y="164592"/>
-            <a:ext cx="11277295" cy="502920"/>
-          </a:xfrm>
-          <a:prstGeom prst="rect">
-            <a:avLst/>
-          </a:prstGeom>
-          <a:noFill/>
-        </p:spPr>
-        <p:txBody>
-          <a:bodyPr wrap="square">
-            <a:spAutoFit/>
-          </a:bodyPr>
-          <a:lstStyle/>
-          <a:p>
-            <a:r>
-              <a:rPr sz="2600" b="1" i="0">
-                <a:solidFill>
-                  <a:srgbClr val="FFFFFF"/>
-                </a:solidFill>
-                <a:latin typeface="Calibri"/>
-              </a:rPr>
-              <a:t>PI CloudLite — entregable de hoy</a:t>
-            </a:r>
-          </a:p>
-        </p:txBody>
-      </p:sp>
-      <p:sp>
-        <p:nvSpPr>
-          <p:cNvPr id="5" name="TextBox 4"/>
-          <p:cNvSpPr txBox="1"/>
-          <p:nvPr/>
-        </p:nvSpPr>
-        <p:spPr>
-          <a:xfrm>
-            <a:off x="457200" y="1170432"/>
-            <a:ext cx="11277295" cy="5230368"/>
-          </a:xfrm>
-          <a:prstGeom prst="rect">
-            <a:avLst/>
-          </a:prstGeom>
-          <a:noFill/>
-        </p:spPr>
-        <p:txBody>
-          <a:bodyPr wrap="square">
-            <a:spAutoFit/>
-          </a:bodyPr>
-          <a:lstStyle/>
-          <a:p>
-            <a:pPr>
-              <a:spcAft>
-                <a:spcPts val="800"/>
-              </a:spcAft>
-            </a:pPr>
-            <a:r>
-              <a:rPr sz="2000" b="0" i="0">
-                <a:solidFill>
-                  <a:srgbClr val="333333"/>
-                </a:solidFill>
-                <a:latin typeface="Calibri"/>
-              </a:rPr>
-              <a:t>–   </a:t>
-            </a:r>
-            <a:r>
-              <a:rPr sz="2000" b="1" i="0">
-                <a:solidFill>
-                  <a:srgbClr val="333333"/>
-                </a:solidFill>
-                <a:latin typeface="Calibri"/>
-              </a:rPr>
-              <a:t>Entregable:</a:t>
-            </a:r>
-            <a:r>
-              <a:rPr sz="2000" b="0" i="0">
-                <a:solidFill>
-                  <a:srgbClr val="333333"/>
-                </a:solidFill>
-                <a:latin typeface="Calibri"/>
-              </a:rPr>
-              <a:t> Diagrama C4 Container en Mermaid + tabla de 3 contratos + 3 riesgos de distribución</a:t>
-            </a:r>
-          </a:p>
-          <a:p>
-            <a:pPr>
-              <a:spcAft>
-                <a:spcPts val="800"/>
-              </a:spcAft>
-            </a:pPr>
-            <a:r>
-              <a:rPr sz="2000" b="0" i="0">
-                <a:solidFill>
-                  <a:srgbClr val="333333"/>
-                </a:solidFill>
-                <a:latin typeface="Calibri"/>
-              </a:rPr>
-              <a:t>–   Herramienta: </a:t>
-            </a:r>
-            <a:r>
-              <a:rPr sz="2000" b="1" i="0">
-                <a:solidFill>
-                  <a:srgbClr val="333333"/>
-                </a:solidFill>
-                <a:latin typeface="Calibri"/>
-              </a:rPr>
-              <a:t>Navegador · editor de diagramas del curso (Mermaid) · boceto libre opcional</a:t>
-            </a:r>
-          </a:p>
-          <a:p>
-            <a:pPr>
-              <a:spcAft>
-                <a:spcPts val="800"/>
-              </a:spcAft>
-            </a:pPr>
-            <a:r>
-              <a:rPr sz="2000" b="0" i="0">
-                <a:solidFill>
-                  <a:srgbClr val="333333"/>
-                </a:solidFill>
-                <a:latin typeface="Calibri"/>
-              </a:rPr>
-              <a:t>–   Todo lo que construyan hoy entra al </a:t>
-            </a:r>
-            <a:r>
-              <a:rPr sz="2000" b="1" i="0">
-                <a:solidFill>
-                  <a:srgbClr val="333333"/>
-                </a:solidFill>
-                <a:latin typeface="Calibri"/>
-              </a:rPr>
-              <a:t>informe/repo del PI</a:t>
-            </a:r>
-            <a:r>
-              <a:rPr sz="2000" b="0" i="0">
-                <a:solidFill>
-                  <a:srgbClr val="333333"/>
-                </a:solidFill>
-                <a:latin typeface="Calibri"/>
-              </a:rPr>
-              <a:t> (no es lab suelto).</a:t>
-            </a:r>
-          </a:p>
-          <a:p>
-            <a:pPr>
-              <a:spcAft>
-                <a:spcPts val="800"/>
-              </a:spcAft>
-            </a:pPr>
-            <a:r>
-              <a:rPr sz="2000" b="0" i="0">
-                <a:solidFill>
-                  <a:srgbClr val="333333"/>
-                </a:solidFill>
-                <a:latin typeface="Calibri"/>
-              </a:rPr>
-              <a:t>–   Individual por defecto · el docente puede autorizar equipos de 2–3; la entrega en la plataforma del curso siempre es individual.</a:t>
-            </a:r>
-          </a:p>
-        </p:txBody>
-      </p:sp>
-      <p:sp>
-        <p:nvSpPr>
-          <p:cNvPr id="6" name="TextBox 5"/>
-          <p:cNvSpPr txBox="1"/>
-          <p:nvPr/>
-        </p:nvSpPr>
-        <p:spPr>
-          <a:xfrm>
-            <a:off x="11185855" y="6473952"/>
-            <a:ext cx="640080" cy="274320"/>
-          </a:xfrm>
-          <a:prstGeom prst="rect">
-            <a:avLst/>
-          </a:prstGeom>
-          <a:noFill/>
-        </p:spPr>
-        <p:txBody>
-          <a:bodyPr wrap="square">
-            <a:spAutoFit/>
-          </a:bodyPr>
-          <a:lstStyle/>
-          <a:p>
-            <a:pPr algn="r"/>
-            <a:r>
-              <a:rPr sz="1100" b="0" i="0">
-                <a:solidFill>
-                  <a:srgbClr val="666666"/>
-                </a:solidFill>
-                <a:latin typeface="Calibri"/>
-              </a:rPr>
-              <a:t>41</a:t>
-            </a:r>
-          </a:p>
-        </p:txBody>
-      </p:sp>
-    </p:spTree>
-  </p:cSld>
-  <p:clrMapOvr>
-    <a:masterClrMapping/>
-  </p:clrMapOvr>
-</p:sld>
-</file>
-
-<file path=ppt/slides/slide42.xml><?xml version="1.0" encoding="utf-8"?>
-<p:sld xmlns:a="http://schemas.openxmlformats.org/drawingml/2006/main" xmlns:p="http://schemas.openxmlformats.org/presentationml/2006/main" xmlns:r="http://schemas.openxmlformats.org/officeDocument/2006/relationships">
-  <p:cSld>
-    <p:bg>
-      <p:bgPr>
-        <a:solidFill>
-          <a:srgbClr val="FFFFFF"/>
-        </a:solidFill>
-        <a:effectLst/>
-      </p:bgPr>
-    </p:bg>
-    <p:spTree>
-      <p:nvGrpSpPr>
-        <p:cNvPr id="1" name=""/>
-        <p:cNvGrpSpPr/>
-        <p:nvPr/>
-      </p:nvGrpSpPr>
-      <p:grpSpPr/>
-      <p:sp>
-        <p:nvSpPr>
-          <p:cNvPr id="2" name="Rectangle 1"/>
-          <p:cNvSpPr/>
-          <p:nvPr/>
-        </p:nvSpPr>
-        <p:spPr>
-          <a:xfrm>
-            <a:off x="0" y="0"/>
-            <a:ext cx="12191695" cy="960120"/>
-          </a:xfrm>
-          <a:prstGeom prst="rect">
-            <a:avLst/>
-          </a:prstGeom>
-          <a:solidFill>
-            <a:srgbClr val="095292"/>
-          </a:solidFill>
-          <a:ln>
-            <a:noFill/>
-          </a:ln>
-        </p:spPr>
-        <p:style>
-          <a:lnRef idx="1">
-            <a:schemeClr val="accent1"/>
-          </a:lnRef>
-          <a:fillRef idx="3">
-            <a:schemeClr val="accent1"/>
-          </a:fillRef>
-          <a:effectRef idx="2">
-            <a:schemeClr val="accent1"/>
-          </a:effectRef>
-          <a:fontRef idx="minor">
-            <a:schemeClr val="lt1"/>
-          </a:fontRef>
-        </p:style>
-        <p:txBody>
-          <a:bodyPr rtlCol="0" anchor="ctr"/>
-          <a:lstStyle/>
-          <a:p>
-            <a:pPr algn="ctr"/>
-          </a:p>
-        </p:txBody>
-      </p:sp>
-      <p:sp>
-        <p:nvSpPr>
-          <p:cNvPr id="3" name="Rectangle 2"/>
-          <p:cNvSpPr/>
-          <p:nvPr/>
-        </p:nvSpPr>
-        <p:spPr>
-          <a:xfrm>
-            <a:off x="0" y="960120"/>
-            <a:ext cx="12191695" cy="41148"/>
-          </a:xfrm>
-          <a:prstGeom prst="rect">
-            <a:avLst/>
-          </a:prstGeom>
-          <a:solidFill>
-            <a:srgbClr val="FFD000"/>
-          </a:solidFill>
-          <a:ln>
-            <a:noFill/>
-          </a:ln>
-        </p:spPr>
-        <p:style>
-          <a:lnRef idx="1">
-            <a:schemeClr val="accent1"/>
-          </a:lnRef>
-          <a:fillRef idx="3">
-            <a:schemeClr val="accent1"/>
-          </a:fillRef>
-          <a:effectRef idx="2">
-            <a:schemeClr val="accent1"/>
-          </a:effectRef>
-          <a:fontRef idx="minor">
-            <a:schemeClr val="lt1"/>
-          </a:fontRef>
-        </p:style>
-        <p:txBody>
-          <a:bodyPr rtlCol="0" anchor="ctr"/>
-          <a:lstStyle/>
-          <a:p>
-            <a:pPr algn="ctr"/>
-          </a:p>
-        </p:txBody>
-      </p:sp>
-      <p:sp>
-        <p:nvSpPr>
-          <p:cNvPr id="4" name="TextBox 3"/>
-          <p:cNvSpPr txBox="1"/>
-          <p:nvPr/>
-        </p:nvSpPr>
-        <p:spPr>
-          <a:xfrm>
-            <a:off x="457200" y="164592"/>
-            <a:ext cx="11277295" cy="502920"/>
-          </a:xfrm>
-          <a:prstGeom prst="rect">
-            <a:avLst/>
-          </a:prstGeom>
-          <a:noFill/>
-        </p:spPr>
-        <p:txBody>
-          <a:bodyPr wrap="square">
-            <a:spAutoFit/>
-          </a:bodyPr>
-          <a:lstStyle/>
-          <a:p>
-            <a:r>
-              <a:rPr sz="2600" b="1" i="0">
-                <a:solidFill>
-                  <a:srgbClr val="FFFFFF"/>
-                </a:solidFill>
-                <a:latin typeface="Calibri"/>
-              </a:rPr>
-              <a:t>Manos a la obra (paso a paso)</a:t>
-            </a:r>
-          </a:p>
-        </p:txBody>
-      </p:sp>
-      <p:sp>
-        <p:nvSpPr>
-          <p:cNvPr id="5" name="TextBox 4"/>
-          <p:cNvSpPr txBox="1"/>
-          <p:nvPr/>
-        </p:nvSpPr>
-        <p:spPr>
-          <a:xfrm>
-            <a:off x="457200" y="1170432"/>
-            <a:ext cx="11277295" cy="5230368"/>
-          </a:xfrm>
-          <a:prstGeom prst="rect">
-            <a:avLst/>
-          </a:prstGeom>
-          <a:noFill/>
-        </p:spPr>
-        <p:txBody>
-          <a:bodyPr wrap="square">
-            <a:spAutoFit/>
-          </a:bodyPr>
-          <a:lstStyle/>
-          <a:p>
-            <a:pPr>
-              <a:spcAft>
-                <a:spcPts val="800"/>
-              </a:spcAft>
-            </a:pPr>
-            <a:r>
-              <a:rPr sz="2000" b="1" i="0">
-                <a:solidFill>
-                  <a:srgbClr val="333333"/>
-                </a:solidFill>
-                <a:latin typeface="Calibri"/>
-              </a:rPr>
-              <a:t>1.</a:t>
-            </a:r>
-            <a:r>
-              <a:rPr sz="2000" b="0" i="0">
-                <a:solidFill>
-                  <a:srgbClr val="333333"/>
-                </a:solidFill>
-                <a:latin typeface="Calibri"/>
-              </a:rPr>
-              <a:t> Paso 1: decida en la pregunta 12 si su CloudLite es un monolito modular o microservicios, con los dos criterios aplicados a su caso (tamano del equipo con numero y plazo, y que partes cambian juntas) y lo que gana y pierde; verifique que no escribio «un poco de los dos», porque eso vale cero.</a:t>
-            </a:r>
-          </a:p>
-          <a:p>
-            <a:pPr>
-              <a:spcAft>
-                <a:spcPts val="800"/>
-              </a:spcAft>
-            </a:pPr>
-            <a:r>
-              <a:rPr sz="2000" b="0" i="0">
-                <a:solidFill>
-                  <a:srgbClr val="333333"/>
-                </a:solidFill>
-                <a:latin typeface="Calibri"/>
-              </a:rPr>
-              <a:t>–   </a:t>
-            </a:r>
-            <a:r>
-              <a:rPr sz="2000" b="1" i="0">
-                <a:solidFill>
-                  <a:srgbClr val="333333"/>
-                </a:solidFill>
-                <a:latin typeface="Calibri"/>
-              </a:rPr>
-              <a:t>2.</a:t>
-            </a:r>
-            <a:r>
-              <a:rPr sz="2000" b="0" i="0">
-                <a:solidFill>
-                  <a:srgbClr val="333333"/>
-                </a:solidFill>
-                <a:latin typeface="Calibri"/>
-              </a:rPr>
-              <a:t> Paso 2: modele en la pregunta 13 el C4 Container partiendo del C4 Context de la pregunta 3, con entre 2 y 5 contenedores coherentes con la decision anterior, los almacenes de datos como ContainerDb y toda flecha con protocolo y formato; verifique que los nombres de sistema, actores y sistemas externos sean identicos a los del Context.</a:t>
-            </a:r>
-          </a:p>
-          <a:p>
-            <a:pPr>
-              <a:spcAft>
-                <a:spcPts val="800"/>
-              </a:spcAft>
-            </a:pPr>
-            <a:r>
-              <a:rPr sz="2000" b="0" i="0">
-                <a:solidFill>
-                  <a:srgbClr val="333333"/>
-                </a:solidFill>
-                <a:latin typeface="Calibri"/>
-              </a:rPr>
-              <a:t>–   </a:t>
-            </a:r>
-            <a:r>
-              <a:rPr sz="2000" b="1" i="0">
-                <a:solidFill>
-                  <a:srgbClr val="333333"/>
-                </a:solidFill>
-                <a:latin typeface="Calibri"/>
-              </a:rPr>
-              <a:t>3.</a:t>
-            </a:r>
-            <a:r>
-              <a:rPr sz="2000" b="0" i="0">
-                <a:solidFill>
-                  <a:srgbClr val="333333"/>
-                </a:solidFill>
-                <a:latin typeface="Calibri"/>
-              </a:rPr>
-              <a:t> Paso 3: liste en la pregunta 14 los 3 contratos con quien llama a quien usando los nombres exactos del diagrama, el verbo y la ruta (o el evento) y el error de negocio con su codigo y su significado en el dominio; verifique que al menos uno sea un 409 de conflicto y que ninguno diga «500 error del servidor».</a:t>
-            </a:r>
-          </a:p>
-          <a:p>
-            <a:pPr>
-              <a:spcAft>
-                <a:spcPts val="800"/>
-              </a:spcAft>
-            </a:pPr>
-            <a:r>
-              <a:rPr sz="2000" b="0" i="0">
-                <a:solidFill>
-                  <a:srgbClr val="333333"/>
-                </a:solidFill>
-                <a:latin typeface="Calibri"/>
-              </a:rPr>
-              <a:t>–   </a:t>
-            </a:r>
-            <a:r>
-              <a:rPr sz="2000" b="1" i="0">
-                <a:solidFill>
-                  <a:srgbClr val="333333"/>
-                </a:solidFill>
-                <a:latin typeface="Calibri"/>
-              </a:rPr>
-              <a:t>4.</a:t>
-            </a:r>
-            <a:r>
-              <a:rPr sz="2000" b="0" i="0">
-                <a:solidFill>
-                  <a:srgbClr val="333333"/>
-                </a:solidFill>
-                <a:latin typeface="Calibri"/>
-              </a:rPr>
-              <a:t> Paso 4: analice en la pregunta 15 los tres riesgos de distribucion nombrando una caja concreta que se cae, contando los saltos de red de una operacion de punta a punta y nombrando un dato expuesto a inconsistencia; con esto la actividad del Corte 1 queda completa y se entrega en la plataforma del curso antes del en la fecha que indique el docentede esta semana.</a:t>
-            </a:r>
-          </a:p>
-        </p:txBody>
-      </p:sp>
-      <p:sp>
-        <p:nvSpPr>
-          <p:cNvPr id="6" name="TextBox 5"/>
-          <p:cNvSpPr txBox="1"/>
-          <p:nvPr/>
-        </p:nvSpPr>
-        <p:spPr>
-          <a:xfrm>
-            <a:off x="11185855" y="6473952"/>
-            <a:ext cx="640080" cy="274320"/>
-          </a:xfrm>
-          <a:prstGeom prst="rect">
-            <a:avLst/>
-          </a:prstGeom>
-          <a:noFill/>
-        </p:spPr>
-        <p:txBody>
-          <a:bodyPr wrap="square">
-            <a:spAutoFit/>
-          </a:bodyPr>
-          <a:lstStyle/>
-          <a:p>
-            <a:pPr algn="r"/>
-            <a:r>
-              <a:rPr sz="1100" b="0" i="0">
-                <a:solidFill>
-                  <a:srgbClr val="666666"/>
-                </a:solidFill>
-                <a:latin typeface="Calibri"/>
-              </a:rPr>
-              <a:t>42</a:t>
-            </a:r>
-          </a:p>
-        </p:txBody>
-      </p:sp>
-    </p:spTree>
-  </p:cSld>
-  <p:clrMapOvr>
-    <a:masterClrMapping/>
-  </p:clrMapOvr>
-</p:sld>
-</file>
-
-<file path=ppt/slides/slide43.xml><?xml version="1.0" encoding="utf-8"?>
-<p:sld xmlns:a="http://schemas.openxmlformats.org/drawingml/2006/main" xmlns:p="http://schemas.openxmlformats.org/presentationml/2006/main" xmlns:r="http://schemas.openxmlformats.org/officeDocument/2006/relationships">
-  <p:cSld>
-    <p:bg>
-      <p:bgPr>
-        <a:solidFill>
-          <a:srgbClr val="FFFFFF"/>
-        </a:solidFill>
-        <a:effectLst/>
-      </p:bgPr>
-    </p:bg>
-    <p:spTree>
-      <p:nvGrpSpPr>
-        <p:cNvPr id="1" name=""/>
-        <p:cNvGrpSpPr/>
-        <p:nvPr/>
-      </p:nvGrpSpPr>
-      <p:grpSpPr/>
-      <p:sp>
-        <p:nvSpPr>
-          <p:cNvPr id="2" name="Rectangle 1"/>
-          <p:cNvSpPr/>
-          <p:nvPr/>
-        </p:nvSpPr>
-        <p:spPr>
-          <a:xfrm>
-            <a:off x="0" y="0"/>
-            <a:ext cx="12191695" cy="960120"/>
-          </a:xfrm>
-          <a:prstGeom prst="rect">
-            <a:avLst/>
-          </a:prstGeom>
-          <a:solidFill>
-            <a:srgbClr val="095292"/>
-          </a:solidFill>
-          <a:ln>
-            <a:noFill/>
-          </a:ln>
-        </p:spPr>
-        <p:style>
-          <a:lnRef idx="1">
-            <a:schemeClr val="accent1"/>
-          </a:lnRef>
-          <a:fillRef idx="3">
-            <a:schemeClr val="accent1"/>
-          </a:fillRef>
-          <a:effectRef idx="2">
-            <a:schemeClr val="accent1"/>
-          </a:effectRef>
-          <a:fontRef idx="minor">
-            <a:schemeClr val="lt1"/>
-          </a:fontRef>
-        </p:style>
-        <p:txBody>
-          <a:bodyPr rtlCol="0" anchor="ctr"/>
-          <a:lstStyle/>
-          <a:p>
-            <a:pPr algn="ctr"/>
-          </a:p>
-        </p:txBody>
-      </p:sp>
-      <p:sp>
-        <p:nvSpPr>
-          <p:cNvPr id="3" name="Rectangle 2"/>
-          <p:cNvSpPr/>
-          <p:nvPr/>
-        </p:nvSpPr>
-        <p:spPr>
-          <a:xfrm>
-            <a:off x="0" y="960120"/>
-            <a:ext cx="12191695" cy="41148"/>
-          </a:xfrm>
-          <a:prstGeom prst="rect">
-            <a:avLst/>
-          </a:prstGeom>
-          <a:solidFill>
-            <a:srgbClr val="FFD000"/>
-          </a:solidFill>
-          <a:ln>
-            <a:noFill/>
-          </a:ln>
-        </p:spPr>
-        <p:style>
-          <a:lnRef idx="1">
-            <a:schemeClr val="accent1"/>
-          </a:lnRef>
-          <a:fillRef idx="3">
-            <a:schemeClr val="accent1"/>
-          </a:fillRef>
-          <a:effectRef idx="2">
-            <a:schemeClr val="accent1"/>
-          </a:effectRef>
-          <a:fontRef idx="minor">
-            <a:schemeClr val="lt1"/>
-          </a:fontRef>
-        </p:style>
-        <p:txBody>
-          <a:bodyPr rtlCol="0" anchor="ctr"/>
-          <a:lstStyle/>
-          <a:p>
-            <a:pPr algn="ctr"/>
-          </a:p>
-        </p:txBody>
-      </p:sp>
-      <p:sp>
-        <p:nvSpPr>
-          <p:cNvPr id="4" name="TextBox 3"/>
-          <p:cNvSpPr txBox="1"/>
-          <p:nvPr/>
-        </p:nvSpPr>
-        <p:spPr>
-          <a:xfrm>
-            <a:off x="457200" y="164592"/>
-            <a:ext cx="11277295" cy="502920"/>
-          </a:xfrm>
-          <a:prstGeom prst="rect">
-            <a:avLst/>
-          </a:prstGeom>
-          <a:noFill/>
-        </p:spPr>
-        <p:txBody>
-          <a:bodyPr wrap="square">
-            <a:spAutoFit/>
-          </a:bodyPr>
-          <a:lstStyle/>
-          <a:p>
-            <a:r>
-              <a:rPr sz="2600" b="1" i="0">
-                <a:solidFill>
-                  <a:srgbClr val="FFFFFF"/>
-                </a:solidFill>
-                <a:latin typeface="Calibri"/>
-              </a:rPr>
-              <a:t>Para continuar (PI)</a:t>
-            </a:r>
-          </a:p>
-        </p:txBody>
-      </p:sp>
-      <p:sp>
-        <p:nvSpPr>
-          <p:cNvPr id="5" name="Rounded Rectangle 4"/>
-          <p:cNvSpPr/>
-          <p:nvPr/>
-        </p:nvSpPr>
-        <p:spPr>
-          <a:xfrm>
-            <a:off x="457200" y="1261872"/>
-            <a:ext cx="11277295" cy="1051560"/>
-          </a:xfrm>
-          <a:prstGeom prst="roundRect">
-            <a:avLst>
-              <a:gd name="adj" fmla="val 12000"/>
-            </a:avLst>
-          </a:prstGeom>
-          <a:solidFill>
-            <a:srgbClr val="E8F4FA"/>
-          </a:solidFill>
-          <a:ln>
-            <a:noFill/>
-          </a:ln>
-        </p:spPr>
-        <p:style>
-          <a:lnRef idx="1">
-            <a:schemeClr val="accent1"/>
-          </a:lnRef>
-          <a:fillRef idx="3">
-            <a:schemeClr val="accent1"/>
-          </a:fillRef>
-          <a:effectRef idx="2">
-            <a:schemeClr val="accent1"/>
-          </a:effectRef>
-          <a:fontRef idx="minor">
-            <a:schemeClr val="lt1"/>
-          </a:fontRef>
-        </p:style>
-        <p:txBody>
-          <a:bodyPr rtlCol="0" anchor="ctr"/>
-          <a:lstStyle/>
-          <a:p>
-            <a:pPr algn="ctr"/>
-          </a:p>
-        </p:txBody>
-      </p:sp>
-      <p:sp>
-        <p:nvSpPr>
-          <p:cNvPr id="6" name="Rectangle 5"/>
-          <p:cNvSpPr/>
-          <p:nvPr/>
-        </p:nvSpPr>
-        <p:spPr>
-          <a:xfrm>
-            <a:off x="457200" y="1261872"/>
-            <a:ext cx="128016" cy="1051560"/>
-          </a:xfrm>
-          <a:prstGeom prst="rect">
-            <a:avLst/>
-          </a:prstGeom>
-          <a:solidFill>
-            <a:srgbClr val="269CCB"/>
-          </a:solidFill>
-          <a:ln>
-            <a:noFill/>
-          </a:ln>
-        </p:spPr>
-        <p:style>
-          <a:lnRef idx="1">
-            <a:schemeClr val="accent1"/>
-          </a:lnRef>
-          <a:fillRef idx="3">
-            <a:schemeClr val="accent1"/>
-          </a:fillRef>
-          <a:effectRef idx="2">
-            <a:schemeClr val="accent1"/>
-          </a:effectRef>
-          <a:fontRef idx="minor">
-            <a:schemeClr val="lt1"/>
-          </a:fontRef>
-        </p:style>
-        <p:txBody>
-          <a:bodyPr rtlCol="0" anchor="ctr"/>
-          <a:lstStyle/>
-          <a:p>
-            <a:pPr algn="ctr"/>
-          </a:p>
-        </p:txBody>
-      </p:sp>
-      <p:sp>
-        <p:nvSpPr>
-          <p:cNvPr id="7" name="TextBox 6"/>
-          <p:cNvSpPr txBox="1"/>
-          <p:nvPr/>
-        </p:nvSpPr>
-        <p:spPr>
-          <a:xfrm>
-            <a:off x="777240" y="1399031"/>
-            <a:ext cx="10774375" cy="822959"/>
-          </a:xfrm>
-          <a:prstGeom prst="rect">
-            <a:avLst/>
-          </a:prstGeom>
-          <a:noFill/>
-        </p:spPr>
-        <p:txBody>
-          <a:bodyPr wrap="square">
-            <a:spAutoFit/>
-          </a:bodyPr>
-          <a:lstStyle/>
-          <a:p>
-            <a:r>
-              <a:rPr sz="1200" b="1" i="0">
-                <a:solidFill>
-                  <a:srgbClr val="269CCB"/>
-                </a:solidFill>
-                <a:latin typeface="Calibri"/>
-              </a:rPr>
-              <a:t>Info</a:t>
-            </a:r>
-          </a:p>
-          <a:p>
-            <a:pPr>
-              <a:spcBef>
-                <a:spcPts val="400"/>
-              </a:spcBef>
-            </a:pPr>
-            <a:r>
-              <a:rPr sz="1400" b="0" i="0">
-                <a:solidFill>
-                  <a:srgbClr val="333333"/>
-                </a:solidFill>
-                <a:latin typeface="Calibri"/>
-              </a:rPr>
-              <a:t>Entregable: Diagrama C4 Container en Mermaid + tabla de 3 contratos + 3 riesgos de distribución</a:t>
-            </a:r>
-          </a:p>
-        </p:txBody>
-      </p:sp>
-      <p:sp>
-        <p:nvSpPr>
-          <p:cNvPr id="8" name="Rounded Rectangle 7"/>
-          <p:cNvSpPr/>
-          <p:nvPr/>
-        </p:nvSpPr>
-        <p:spPr>
-          <a:xfrm>
-            <a:off x="457200" y="2478024"/>
-            <a:ext cx="11277295" cy="1051560"/>
-          </a:xfrm>
-          <a:prstGeom prst="roundRect">
-            <a:avLst>
-              <a:gd name="adj" fmla="val 12000"/>
-            </a:avLst>
-          </a:prstGeom>
-          <a:solidFill>
-            <a:srgbClr val="FFF8E1"/>
-          </a:solidFill>
-          <a:ln>
-            <a:noFill/>
-          </a:ln>
-        </p:spPr>
-        <p:style>
-          <a:lnRef idx="1">
-            <a:schemeClr val="accent1"/>
-          </a:lnRef>
-          <a:fillRef idx="3">
-            <a:schemeClr val="accent1"/>
-          </a:fillRef>
-          <a:effectRef idx="2">
-            <a:schemeClr val="accent1"/>
-          </a:effectRef>
-          <a:fontRef idx="minor">
-            <a:schemeClr val="lt1"/>
-          </a:fontRef>
-        </p:style>
-        <p:txBody>
-          <a:bodyPr rtlCol="0" anchor="ctr"/>
-          <a:lstStyle/>
-          <a:p>
-            <a:pPr algn="ctr"/>
-          </a:p>
-        </p:txBody>
-      </p:sp>
-      <p:sp>
-        <p:nvSpPr>
-          <p:cNvPr id="9" name="Rectangle 8"/>
-          <p:cNvSpPr/>
-          <p:nvPr/>
-        </p:nvSpPr>
-        <p:spPr>
-          <a:xfrm>
-            <a:off x="457200" y="2478024"/>
-            <a:ext cx="128016" cy="1051560"/>
-          </a:xfrm>
-          <a:prstGeom prst="rect">
-            <a:avLst/>
-          </a:prstGeom>
-          <a:solidFill>
-            <a:srgbClr val="FFD000"/>
-          </a:solidFill>
-          <a:ln>
-            <a:noFill/>
-          </a:ln>
-        </p:spPr>
-        <p:style>
-          <a:lnRef idx="1">
-            <a:schemeClr val="accent1"/>
-          </a:lnRef>
-          <a:fillRef idx="3">
-            <a:schemeClr val="accent1"/>
-          </a:fillRef>
-          <a:effectRef idx="2">
-            <a:schemeClr val="accent1"/>
-          </a:effectRef>
-          <a:fontRef idx="minor">
-            <a:schemeClr val="lt1"/>
-          </a:fontRef>
-        </p:style>
-        <p:txBody>
-          <a:bodyPr rtlCol="0" anchor="ctr"/>
-          <a:lstStyle/>
-          <a:p>
-            <a:pPr algn="ctr"/>
-          </a:p>
-        </p:txBody>
-      </p:sp>
-      <p:sp>
-        <p:nvSpPr>
-          <p:cNvPr id="10" name="TextBox 9"/>
-          <p:cNvSpPr txBox="1"/>
-          <p:nvPr/>
-        </p:nvSpPr>
-        <p:spPr>
-          <a:xfrm>
-            <a:off x="777240" y="2615184"/>
-            <a:ext cx="10774375" cy="822959"/>
-          </a:xfrm>
-          <a:prstGeom prst="rect">
-            <a:avLst/>
-          </a:prstGeom>
-          <a:noFill/>
-        </p:spPr>
-        <p:txBody>
-          <a:bodyPr wrap="square">
-            <a:spAutoFit/>
-          </a:bodyPr>
-          <a:lstStyle/>
-          <a:p>
-            <a:r>
-              <a:rPr sz="1200" b="1" i="0">
-                <a:solidFill>
-                  <a:srgbClr val="FFD000"/>
-                </a:solidFill>
-                <a:latin typeface="Calibri"/>
-              </a:rPr>
-              <a:t>Aclaración</a:t>
-            </a:r>
-          </a:p>
-          <a:p>
-            <a:pPr>
-              <a:spcBef>
-                <a:spcPts val="400"/>
-              </a:spcBef>
-            </a:pPr>
-            <a:r>
-              <a:rPr sz="1400" b="0" i="0">
-                <a:solidFill>
-                  <a:srgbClr val="333333"/>
-                </a:solidFill>
-                <a:latin typeface="Calibri"/>
-              </a:rPr>
-              <a:t>Subir evidencias al paquete CloudLite (Drive/repo) y a la plataforma del curso (la plataforma del curso) en la fecha que indique el docente.</a:t>
-            </a:r>
-          </a:p>
-        </p:txBody>
-      </p:sp>
-      <p:sp>
-        <p:nvSpPr>
-          <p:cNvPr id="11" name="Rounded Rectangle 10"/>
-          <p:cNvSpPr/>
-          <p:nvPr/>
-        </p:nvSpPr>
-        <p:spPr>
-          <a:xfrm>
-            <a:off x="457200" y="3694176"/>
-            <a:ext cx="11277295" cy="1051560"/>
-          </a:xfrm>
-          <a:prstGeom prst="roundRect">
-            <a:avLst>
-              <a:gd name="adj" fmla="val 12000"/>
-            </a:avLst>
-          </a:prstGeom>
-          <a:solidFill>
-            <a:srgbClr val="FBE4E4"/>
-          </a:solidFill>
-          <a:ln>
-            <a:noFill/>
-          </a:ln>
-        </p:spPr>
-        <p:style>
-          <a:lnRef idx="1">
-            <a:schemeClr val="accent1"/>
-          </a:lnRef>
-          <a:fillRef idx="3">
-            <a:schemeClr val="accent1"/>
-          </a:fillRef>
-          <a:effectRef idx="2">
-            <a:schemeClr val="accent1"/>
-          </a:effectRef>
-          <a:fontRef idx="minor">
-            <a:schemeClr val="lt1"/>
-          </a:fontRef>
-        </p:style>
-        <p:txBody>
-          <a:bodyPr rtlCol="0" anchor="ctr"/>
-          <a:lstStyle/>
-          <a:p>
-            <a:pPr algn="ctr"/>
-          </a:p>
-        </p:txBody>
-      </p:sp>
-      <p:sp>
-        <p:nvSpPr>
-          <p:cNvPr id="12" name="Rectangle 11"/>
-          <p:cNvSpPr/>
-          <p:nvPr/>
-        </p:nvSpPr>
-        <p:spPr>
-          <a:xfrm>
-            <a:off x="457200" y="3694176"/>
-            <a:ext cx="128016" cy="1051560"/>
-          </a:xfrm>
-          <a:prstGeom prst="rect">
-            <a:avLst/>
-          </a:prstGeom>
-          <a:solidFill>
-            <a:srgbClr val="A02030"/>
-          </a:solidFill>
-          <a:ln>
-            <a:noFill/>
-          </a:ln>
-        </p:spPr>
-        <p:style>
-          <a:lnRef idx="1">
-            <a:schemeClr val="accent1"/>
-          </a:lnRef>
-          <a:fillRef idx="3">
-            <a:schemeClr val="accent1"/>
-          </a:fillRef>
-          <a:effectRef idx="2">
-            <a:schemeClr val="accent1"/>
-          </a:effectRef>
-          <a:fontRef idx="minor">
-            <a:schemeClr val="lt1"/>
-          </a:fontRef>
-        </p:style>
-        <p:txBody>
-          <a:bodyPr rtlCol="0" anchor="ctr"/>
-          <a:lstStyle/>
-          <a:p>
-            <a:pPr algn="ctr"/>
-          </a:p>
-        </p:txBody>
-      </p:sp>
-      <p:sp>
-        <p:nvSpPr>
-          <p:cNvPr id="13" name="TextBox 12"/>
-          <p:cNvSpPr txBox="1"/>
-          <p:nvPr/>
-        </p:nvSpPr>
-        <p:spPr>
-          <a:xfrm>
-            <a:off x="777240" y="3831336"/>
-            <a:ext cx="10774375" cy="822959"/>
-          </a:xfrm>
-          <a:prstGeom prst="rect">
-            <a:avLst/>
-          </a:prstGeom>
-          <a:noFill/>
-        </p:spPr>
-        <p:txBody>
-          <a:bodyPr wrap="square">
-            <a:spAutoFit/>
-          </a:bodyPr>
-          <a:lstStyle/>
-          <a:p>
-            <a:r>
-              <a:rPr sz="1200" b="1" i="0">
-                <a:solidFill>
-                  <a:srgbClr val="A02030"/>
-                </a:solidFill>
-                <a:latin typeface="Calibri"/>
-              </a:rPr>
-              <a:t>Atención</a:t>
-            </a:r>
-          </a:p>
-          <a:p>
-            <a:pPr>
-              <a:spcBef>
-                <a:spcPts val="400"/>
-              </a:spcBef>
-            </a:pPr>
-            <a:r>
-              <a:rPr sz="1400" b="0" i="0">
-                <a:solidFill>
-                  <a:srgbClr val="333333"/>
-                </a:solidFill>
-                <a:latin typeface="Calibri"/>
-              </a:rPr>
-              <a:t>Sin cloud de pago ni instalaciones obligatorias de hipervisores/Docker Desktop.</a:t>
-            </a:r>
-          </a:p>
-        </p:txBody>
-      </p:sp>
-      <p:sp>
-        <p:nvSpPr>
-          <p:cNvPr id="14" name="TextBox 13"/>
-          <p:cNvSpPr txBox="1"/>
-          <p:nvPr/>
-        </p:nvSpPr>
-        <p:spPr>
-          <a:xfrm>
-            <a:off x="11185855" y="6473952"/>
-            <a:ext cx="640080" cy="274320"/>
-          </a:xfrm>
-          <a:prstGeom prst="rect">
-            <a:avLst/>
-          </a:prstGeom>
-          <a:noFill/>
-        </p:spPr>
-        <p:txBody>
-          <a:bodyPr wrap="square">
-            <a:spAutoFit/>
-          </a:bodyPr>
-          <a:lstStyle/>
-          <a:p>
-            <a:pPr algn="r"/>
-            <a:r>
-              <a:rPr sz="1100" b="0" i="0">
-                <a:solidFill>
-                  <a:srgbClr val="666666"/>
-                </a:solidFill>
-                <a:latin typeface="Calibri"/>
-              </a:rPr>
-              <a:t>43</a:t>
-            </a:r>
-          </a:p>
-        </p:txBody>
-      </p:sp>
-    </p:spTree>
-  </p:cSld>
-  <p:clrMapOvr>
-    <a:masterClrMapping/>
-  </p:clrMapOvr>
-</p:sld>
-</file>
-
-<file path=ppt/slides/slide44.xml><?xml version="1.0" encoding="utf-8"?>
-<p:sld xmlns:a="http://schemas.openxmlformats.org/drawingml/2006/main" xmlns:p="http://schemas.openxmlformats.org/presentationml/2006/main" xmlns:r="http://schemas.openxmlformats.org/officeDocument/2006/relationships">
-  <p:cSld>
-    <p:bg>
-      <p:bgPr>
-        <a:solidFill>
-          <a:srgbClr val="FFFFFF"/>
-        </a:solidFill>
-        <a:effectLst/>
-      </p:bgPr>
-    </p:bg>
-    <p:spTree>
-      <p:nvGrpSpPr>
-        <p:cNvPr id="1" name=""/>
-        <p:cNvGrpSpPr/>
-        <p:nvPr/>
-      </p:nvGrpSpPr>
-      <p:grpSpPr/>
-      <p:sp>
-        <p:nvSpPr>
-          <p:cNvPr id="2" name="Rectangle 1"/>
-          <p:cNvSpPr/>
-          <p:nvPr/>
-        </p:nvSpPr>
-        <p:spPr>
-          <a:xfrm>
-            <a:off x="0" y="0"/>
-            <a:ext cx="12191695" cy="164592"/>
-          </a:xfrm>
-          <a:prstGeom prst="rect">
-            <a:avLst/>
-          </a:prstGeom>
-          <a:solidFill>
-            <a:srgbClr val="269CCB"/>
-          </a:solidFill>
-          <a:ln>
-            <a:noFill/>
-          </a:ln>
-        </p:spPr>
-        <p:style>
-          <a:lnRef idx="1">
-            <a:schemeClr val="accent1"/>
-          </a:lnRef>
-          <a:fillRef idx="3">
-            <a:schemeClr val="accent1"/>
-          </a:fillRef>
-          <a:effectRef idx="2">
-            <a:schemeClr val="accent1"/>
-          </a:effectRef>
-          <a:fontRef idx="minor">
-            <a:schemeClr val="lt1"/>
-          </a:fontRef>
-        </p:style>
-        <p:txBody>
-          <a:bodyPr rtlCol="0" anchor="ctr"/>
-          <a:lstStyle/>
-          <a:p>
-            <a:pPr algn="ctr"/>
-          </a:p>
-        </p:txBody>
-      </p:sp>
-      <p:pic>
-        <p:nvPicPr>
-          <p:cNvPr id="3" name="Picture 2" descr="logo_uniajc_color.png"/>
-          <p:cNvPicPr>
-            <a:picLocks noChangeAspect="1"/>
-          </p:cNvPicPr>
-          <p:nvPr/>
-        </p:nvPicPr>
-        <p:blipFill>
-          <a:blip r:embed="rId2"/>
-          <a:stretch>
-            <a:fillRect/>
-          </a:stretch>
-        </p:blipFill>
-        <p:spPr>
-          <a:xfrm>
-            <a:off x="10271455" y="5998464"/>
-            <a:ext cx="1463040" cy="643233"/>
-          </a:xfrm>
-          <a:prstGeom prst="rect">
-            <a:avLst/>
-          </a:prstGeom>
-        </p:spPr>
-      </p:pic>
-      <p:sp>
-        <p:nvSpPr>
-          <p:cNvPr id="4" name="TextBox 3"/>
-          <p:cNvSpPr txBox="1"/>
-          <p:nvPr/>
-        </p:nvSpPr>
-        <p:spPr>
-          <a:xfrm>
-            <a:off x="457200" y="1737360"/>
-            <a:ext cx="11277295" cy="1097280"/>
-          </a:xfrm>
-          <a:prstGeom prst="rect">
-            <a:avLst/>
-          </a:prstGeom>
-          <a:noFill/>
-        </p:spPr>
-        <p:txBody>
-          <a:bodyPr wrap="square" anchor="ctr"/>
-          <a:lstStyle/>
-          <a:p>
-            <a:pPr algn="ctr"/>
-            <a:r>
-              <a:rPr sz="3400" b="1" i="0">
-                <a:solidFill>
-                  <a:srgbClr val="095292"/>
-                </a:solidFill>
-                <a:latin typeface="Calibri"/>
-              </a:rPr>
-              <a:t>Clase 4 · PI en movimiento</a:t>
-            </a:r>
-          </a:p>
-        </p:txBody>
-      </p:sp>
-      <p:sp>
-        <p:nvSpPr>
-          <p:cNvPr id="5" name="TextBox 4"/>
-          <p:cNvSpPr txBox="1"/>
-          <p:nvPr/>
-        </p:nvSpPr>
-        <p:spPr>
-          <a:xfrm>
-            <a:off x="457200" y="3017520"/>
-            <a:ext cx="11277295" cy="1645920"/>
-          </a:xfrm>
-          <a:prstGeom prst="rect">
-            <a:avLst/>
-          </a:prstGeom>
-          <a:noFill/>
-        </p:spPr>
-        <p:txBody>
-          <a:bodyPr wrap="square">
-            <a:spAutoFit/>
-          </a:bodyPr>
-          <a:lstStyle/>
-          <a:p>
-            <a:pPr algn="ctr">
-              <a:spcAft>
-                <a:spcPts val="600"/>
-              </a:spcAft>
-            </a:pPr>
-            <a:r>
-              <a:rPr sz="1600" b="0" i="0">
-                <a:solidFill>
-                  <a:srgbClr val="333333"/>
-                </a:solidFill>
-                <a:latin typeface="Calibri"/>
-              </a:rPr>
-              <a:t>Diagramar componentes/servicios de CloudLite y sus contratos</a:t>
-            </a:r>
-          </a:p>
-          <a:p>
-            <a:pPr algn="ctr">
-              <a:spcAft>
-                <a:spcPts val="600"/>
-              </a:spcAft>
-            </a:pPr>
-            <a:r>
-              <a:rPr sz="1600" b="0" i="0">
-                <a:solidFill>
-                  <a:srgbClr val="333333"/>
-                </a:solidFill>
-                <a:latin typeface="Calibri"/>
-              </a:rPr>
-              <a:t>Evidencia: Diagrama C4 Container en Mermaid + tabla de 3 contratos + 3 riesgos de distribución</a:t>
-            </a:r>
-          </a:p>
-          <a:p>
-            <a:pPr algn="ctr">
-              <a:spcAft>
-                <a:spcPts val="600"/>
-              </a:spcAft>
-            </a:pPr>
-            <a:r>
-              <a:rPr sz="1600" b="0" i="0">
-                <a:solidFill>
-                  <a:srgbClr val="333333"/>
-                </a:solidFill>
-                <a:latin typeface="Calibri"/>
-              </a:rPr>
-              <a:t>Siguiente paso = siguiente hito del PI CloudLite</a:t>
-            </a:r>
-          </a:p>
-        </p:txBody>
-      </p:sp>
-      <p:sp>
-        <p:nvSpPr>
-          <p:cNvPr id="6" name="TextBox 5"/>
-          <p:cNvSpPr txBox="1"/>
-          <p:nvPr/>
-        </p:nvSpPr>
-        <p:spPr>
-          <a:xfrm>
-            <a:off x="457200" y="4754880"/>
-            <a:ext cx="11277295" cy="640080"/>
-          </a:xfrm>
-          <a:prstGeom prst="rect">
-            <a:avLst/>
-          </a:prstGeom>
-          <a:noFill/>
-        </p:spPr>
-        <p:txBody>
-          <a:bodyPr wrap="square">
-            <a:spAutoFit/>
-          </a:bodyPr>
-          <a:lstStyle/>
-          <a:p>
-            <a:pPr algn="ctr"/>
-            <a:r>
-              <a:rPr sz="2000" b="1" i="0">
-                <a:solidFill>
-                  <a:srgbClr val="269CCB"/>
-                </a:solidFill>
-                <a:latin typeface="Calibri"/>
-              </a:rPr>
-              <a:t>Teoría al servicio del proyecto</a:t>
             </a:r>
           </a:p>
         </p:txBody>
@@ -19815,4 +17716,324 @@
   </a:objectDefaults>
   <a:extraClrSchemeLst/>
 </a:theme>
+</file>
+
+<file path=ppt/theme/theme2.xml><?xml version="1.0" encoding="utf-8"?>
+<a:theme xmlns:a="http://schemas.openxmlformats.org/drawingml/2006/main" name="Office Theme">
+  <a:themeElements>
+    <a:clrScheme name="Office">
+      <a:dk1>
+        <a:sysClr val="windowText" lastClr="000000"/>
+      </a:dk1>
+      <a:lt1>
+        <a:sysClr val="window" lastClr="FFFFFF"/>
+      </a:lt1>
+      <a:dk2>
+        <a:srgbClr val="1F497D"/>
+      </a:dk2>
+      <a:lt2>
+        <a:srgbClr val="EEECE1"/>
+      </a:lt2>
+      <a:accent1>
+        <a:srgbClr val="4F81BD"/>
+      </a:accent1>
+      <a:accent2>
+        <a:srgbClr val="C0504D"/>
+      </a:accent2>
+      <a:accent3>
+        <a:srgbClr val="9BBB59"/>
+      </a:accent3>
+      <a:accent4>
+        <a:srgbClr val="8064A2"/>
+      </a:accent4>
+      <a:accent5>
+        <a:srgbClr val="4BACC6"/>
+      </a:accent5>
+      <a:accent6>
+        <a:srgbClr val="F79646"/>
+      </a:accent6>
+      <a:hlink>
+        <a:srgbClr val="0000FF"/>
+      </a:hlink>
+      <a:folHlink>
+        <a:srgbClr val="800080"/>
+      </a:folHlink>
+    </a:clrScheme>
+    <a:fontScheme name="Office">
+      <a:majorFont>
+        <a:latin typeface="Calibri"/>
+        <a:ea typeface=""/>
+        <a:cs typeface=""/>
+        <a:font script="Jpan" typeface="ＭＳ Ｐゴシック"/>
+        <a:font script="Hang" typeface="맑은 고딕"/>
+        <a:font script="Hans" typeface="宋体"/>
+        <a:font script="Hant" typeface="新細明體"/>
+        <a:font script="Arab" typeface="Times New Roman"/>
+        <a:font script="Hebr" typeface="Times New Roman"/>
+        <a:font script="Thai" typeface="Angsana New"/>
+        <a:font script="Ethi" typeface="Nyala"/>
+        <a:font script="Beng" typeface="Vrinda"/>
+        <a:font script="Gujr" typeface="Shruti"/>
+        <a:font script="Khmr" typeface="MoolBoran"/>
+        <a:font script="Knda" typeface="Tunga"/>
+        <a:font script="Guru" typeface="Raavi"/>
+        <a:font script="Cans" typeface="Euphemia"/>
+        <a:font script="Cher" typeface="Plantagenet Cherokee"/>
+        <a:font script="Yiii" typeface="Microsoft Yi Baiti"/>
+        <a:font script="Tibt" typeface="Microsoft Himalaya"/>
+        <a:font script="Thaa" typeface="MV Boli"/>
+        <a:font script="Deva" typeface="Mangal"/>
+        <a:font script="Telu" typeface="Gautami"/>
+        <a:font script="Taml" typeface="Latha"/>
+        <a:font script="Syrc" typeface="Estrangelo Edessa"/>
+        <a:font script="Orya" typeface="Kalinga"/>
+        <a:font script="Mlym" typeface="Kartika"/>
+        <a:font script="Laoo" typeface="DokChampa"/>
+        <a:font script="Sinh" typeface="Iskoola Pota"/>
+        <a:font script="Mong" typeface="Mongolian Baiti"/>
+        <a:font script="Viet" typeface="Times New Roman"/>
+        <a:font script="Uigh" typeface="Microsoft Uighur"/>
+        <a:font script="Geor" typeface="Sylfaen"/>
+      </a:majorFont>
+      <a:minorFont>
+        <a:latin typeface="Calibri"/>
+        <a:ea typeface=""/>
+        <a:cs typeface=""/>
+        <a:font script="Jpan" typeface="ＭＳ Ｐゴシック"/>
+        <a:font script="Hang" typeface="맑은 고딕"/>
+        <a:font script="Hans" typeface="宋体"/>
+        <a:font script="Hant" typeface="新細明體"/>
+        <a:font script="Arab" typeface="Arial"/>
+        <a:font script="Hebr" typeface="Arial"/>
+        <a:font script="Thai" typeface="Cordia New"/>
+        <a:font script="Ethi" typeface="Nyala"/>
+        <a:font script="Beng" typeface="Vrinda"/>
+        <a:font script="Gujr" typeface="Shruti"/>
+        <a:font script="Khmr" typeface="DaunPenh"/>
+        <a:font script="Knda" typeface="Tunga"/>
+        <a:font script="Guru" typeface="Raavi"/>
+        <a:font script="Cans" typeface="Euphemia"/>
+        <a:font script="Cher" typeface="Plantagenet Cherokee"/>
+        <a:font script="Yiii" typeface="Microsoft Yi Baiti"/>
+        <a:font script="Tibt" typeface="Microsoft Himalaya"/>
+        <a:font script="Thaa" typeface="MV Boli"/>
+        <a:font script="Deva" typeface="Mangal"/>
+        <a:font script="Telu" typeface="Gautami"/>
+        <a:font script="Taml" typeface="Latha"/>
+        <a:font script="Syrc" typeface="Estrangelo Edessa"/>
+        <a:font script="Orya" typeface="Kalinga"/>
+        <a:font script="Mlym" typeface="Kartika"/>
+        <a:font script="Laoo" typeface="DokChampa"/>
+        <a:font script="Sinh" typeface="Iskoola Pota"/>
+        <a:font script="Mong" typeface="Mongolian Baiti"/>
+        <a:font script="Viet" typeface="Arial"/>
+        <a:font script="Uigh" typeface="Microsoft Uighur"/>
+        <a:font script="Geor" typeface="Sylfaen"/>
+      </a:minorFont>
+    </a:fontScheme>
+    <a:fmtScheme name="Office">
+      <a:fillStyleLst>
+        <a:solidFill>
+          <a:schemeClr val="phClr"/>
+        </a:solidFill>
+        <a:gradFill rotWithShape="1">
+          <a:gsLst>
+            <a:gs pos="0">
+              <a:schemeClr val="phClr">
+                <a:tint val="50000"/>
+                <a:satMod val="300000"/>
+              </a:schemeClr>
+            </a:gs>
+            <a:gs pos="35000">
+              <a:schemeClr val="phClr">
+                <a:tint val="37000"/>
+                <a:satMod val="300000"/>
+              </a:schemeClr>
+            </a:gs>
+            <a:gs pos="100000">
+              <a:schemeClr val="phClr">
+                <a:tint val="15000"/>
+                <a:satMod val="350000"/>
+              </a:schemeClr>
+            </a:gs>
+          </a:gsLst>
+          <a:lin ang="16200000" scaled="1"/>
+        </a:gradFill>
+        <a:gradFill rotWithShape="1">
+          <a:gsLst>
+            <a:gs pos="0">
+              <a:schemeClr val="phClr">
+                <a:tint val="100000"/>
+                <a:shade val="100000"/>
+                <a:satMod val="130000"/>
+              </a:schemeClr>
+            </a:gs>
+            <a:gs pos="100000">
+              <a:schemeClr val="phClr">
+                <a:tint val="50000"/>
+                <a:shade val="100000"/>
+                <a:satMod val="350000"/>
+              </a:schemeClr>
+            </a:gs>
+          </a:gsLst>
+          <a:lin ang="16200000" scaled="0"/>
+        </a:gradFill>
+      </a:fillStyleLst>
+      <a:lnStyleLst>
+        <a:ln w="9525" cap="flat" cmpd="sng" algn="ctr">
+          <a:solidFill>
+            <a:schemeClr val="phClr">
+              <a:shade val="95000"/>
+              <a:satMod val="105000"/>
+            </a:schemeClr>
+          </a:solidFill>
+          <a:prstDash val="solid"/>
+        </a:ln>
+        <a:ln w="25400" cap="flat" cmpd="sng" algn="ctr">
+          <a:solidFill>
+            <a:schemeClr val="phClr"/>
+          </a:solidFill>
+          <a:prstDash val="solid"/>
+        </a:ln>
+        <a:ln w="38100" cap="flat" cmpd="sng" algn="ctr">
+          <a:solidFill>
+            <a:schemeClr val="phClr"/>
+          </a:solidFill>
+          <a:prstDash val="solid"/>
+        </a:ln>
+      </a:lnStyleLst>
+      <a:effectStyleLst>
+        <a:effectStyle>
+          <a:effectLst>
+            <a:outerShdw blurRad="40000" dist="20000" dir="5400000" rotWithShape="0">
+              <a:srgbClr val="000000">
+                <a:alpha val="38000"/>
+              </a:srgbClr>
+            </a:outerShdw>
+          </a:effectLst>
+        </a:effectStyle>
+        <a:effectStyle>
+          <a:effectLst>
+            <a:outerShdw blurRad="40000" dist="23000" dir="5400000" rotWithShape="0">
+              <a:srgbClr val="000000">
+                <a:alpha val="35000"/>
+              </a:srgbClr>
+            </a:outerShdw>
+          </a:effectLst>
+        </a:effectStyle>
+        <a:effectStyle>
+          <a:effectLst>
+            <a:outerShdw blurRad="40000" dist="23000" dir="5400000" rotWithShape="0">
+              <a:srgbClr val="000000">
+                <a:alpha val="35000"/>
+              </a:srgbClr>
+            </a:outerShdw>
+          </a:effectLst>
+          <a:scene3d>
+            <a:camera prst="orthographicFront">
+              <a:rot lat="0" lon="0" rev="0"/>
+            </a:camera>
+            <a:lightRig rig="threePt" dir="t">
+              <a:rot lat="0" lon="0" rev="1200000"/>
+            </a:lightRig>
+          </a:scene3d>
+          <a:sp3d>
+            <a:bevelT w="63500" h="25400"/>
+          </a:sp3d>
+        </a:effectStyle>
+      </a:effectStyleLst>
+      <a:bgFillStyleLst>
+        <a:solidFill>
+          <a:schemeClr val="phClr"/>
+        </a:solidFill>
+        <a:gradFill rotWithShape="1">
+          <a:gsLst>
+            <a:gs pos="0">
+              <a:schemeClr val="phClr">
+                <a:tint val="40000"/>
+                <a:satMod val="350000"/>
+              </a:schemeClr>
+            </a:gs>
+            <a:gs pos="40000">
+              <a:schemeClr val="phClr">
+                <a:tint val="45000"/>
+                <a:shade val="99000"/>
+                <a:satMod val="350000"/>
+              </a:schemeClr>
+            </a:gs>
+            <a:gs pos="100000">
+              <a:schemeClr val="phClr">
+                <a:shade val="20000"/>
+                <a:satMod val="255000"/>
+              </a:schemeClr>
+            </a:gs>
+          </a:gsLst>
+          <a:path path="circle">
+            <a:fillToRect l="50000" t="-80000" r="50000" b="180000"/>
+          </a:path>
+        </a:gradFill>
+        <a:gradFill rotWithShape="1">
+          <a:gsLst>
+            <a:gs pos="0">
+              <a:schemeClr val="phClr">
+                <a:tint val="80000"/>
+                <a:satMod val="300000"/>
+              </a:schemeClr>
+            </a:gs>
+            <a:gs pos="100000">
+              <a:schemeClr val="phClr">
+                <a:shade val="30000"/>
+                <a:satMod val="200000"/>
+              </a:schemeClr>
+            </a:gs>
+          </a:gsLst>
+          <a:path path="circle">
+            <a:fillToRect l="50000" t="50000" r="50000" b="50000"/>
+          </a:path>
+        </a:gradFill>
+      </a:bgFillStyleLst>
+    </a:fmtScheme>
+  </a:themeElements>
+  <a:objectDefaults>
+    <a:spDef>
+      <a:spPr/>
+      <a:bodyPr/>
+      <a:lstStyle/>
+      <a:style>
+        <a:lnRef idx="1">
+          <a:schemeClr val="accent1"/>
+        </a:lnRef>
+        <a:fillRef idx="3">
+          <a:schemeClr val="accent1"/>
+        </a:fillRef>
+        <a:effectRef idx="2">
+          <a:schemeClr val="accent1"/>
+        </a:effectRef>
+        <a:fontRef idx="minor">
+          <a:schemeClr val="lt1"/>
+        </a:fontRef>
+      </a:style>
+    </a:spDef>
+    <a:lnDef>
+      <a:spPr/>
+      <a:bodyPr/>
+      <a:lstStyle/>
+      <a:style>
+        <a:lnRef idx="2">
+          <a:schemeClr val="accent1"/>
+        </a:lnRef>
+        <a:fillRef idx="0">
+          <a:schemeClr val="accent1"/>
+        </a:fillRef>
+        <a:effectRef idx="1">
+          <a:schemeClr val="accent1"/>
+        </a:effectRef>
+        <a:fontRef idx="minor">
+          <a:schemeClr val="tx1"/>
+        </a:fontRef>
+      </a:style>
+    </a:lnDef>
+  </a:objectDefaults>
+  <a:extraClrSchemeLst/>
+</a:theme>
 </file>
--- a/Arquitectura de Sistemas Computacionales/Clases/Clase 4 - Microservicios y arquitecturas distribuidas/Presentacion.pptx
+++ b/Arquitectura de Sistemas Computacionales/Clases/Clase 4 - Microservicios y arquitecturas distribuidas/Presentacion.pptx
@@ -44,6 +44,7 @@
     <p:sldId id="292" r:id="rId44"/>
     <p:sldId id="293" r:id="rId45"/>
     <p:sldId id="294" r:id="rId46"/>
+    <p:sldId id="295" r:id="rId47"/>
   </p:sldIdLst>
   <p:sldSz cx="12191695" cy="6858000" type="screen4x3"/>
   <p:notesSz cx="6858000" cy="9144000"/>
@@ -628,19 +629,19 @@
           <a:lstStyle/>
           <a:p>
             <a:r>
-              <a:t>Antes del ejemplo conviene fijar las tres reglas con las que se corrige el diagrama, porque cada una tiene puntos asignados y las tres se pierden por descuido y no por no saber.</a:t>
+              <a:t>Nombre, tecnologia y responsabilidad en una frase.</a:t>
             </a:r>
           </a:p>
           <a:p/>
           <a:p>
             <a:r>
-              <a:t>Nombre, tecnologia y responsabilidad en una frase.</a:t>
+              <a:t>«HTTP» a secas no dice como viajan los datos y «SQL» a secas no dice sobre que transporte; con las dos mitades, cualquiera que lea el diagrama sabe por donde puede romperse.</a:t>
             </a:r>
           </a:p>
           <a:p/>
           <a:p>
             <a:r>
-              <a:t>«HTTP» a secas no dice como viajan los datos y «SQL» a secas no dice sobre que transporte; con las dos mitades, cualquiera que lea el diagrama sabe por donde puede romperse.</a:t>
+              <a:t>(Sobre la actividad, no se proyecta) Antes del ejemplo conviene fijar las tres reglas con las que se corrige el diagrama, porque cada una tiene puntos asignados y las tres se pierden por descuido y no por no saber.</a:t>
             </a:r>
           </a:p>
         </p:txBody>
@@ -710,19 +711,25 @@
           <a:lstStyle/>
           <a:p>
             <a:r>
-              <a:t>Eso cambia lo que el docente tiene que ensenar, porque un boceto correcto escrito con la sintaxis equivocada no renderiza y entonces no hay diagrama que calificar.</a:t>
+              <a:t>Vale la pena decir en voz alta que aqui el uso de una IA es legitimo y ademas recomendado: pasar un boceto a codigo Mermaid es justo la tarea mecanica en la que ayuda sin sustituir el criterio.</a:t>
             </a:r>
           </a:p>
           <a:p/>
           <a:p>
             <a:r>
-              <a:t>Vale la pena decir en voz alta que aqui el uso de una IA es legitimo y ademas recomendado: pasar un boceto a codigo Mermaid es justo la tarea mecanica en la que ayuda sin sustituir el criterio.</a:t>
+              <a:t>Lo que NO delega el estudiante es la revision, y hay tres cosas que tiene que verificar el mismo antes de enviar, porque son las que la IA equivoca con frecuencia: que la primera linea sea C4Container, que la base de datos haya quedado como ContainerDb y no como Container, y que ninguna relacion haya perdido la mitad de su etiqueta.</a:t>
             </a:r>
           </a:p>
           <a:p/>
           <a:p>
             <a:r>
-              <a:t>Lo que NO delega el estudiante es la revision, y hay tres cosas que tiene que verificar el mismo antes de enviar, porque son las que la IA equivoca con frecuencia: que la primera linea sea C4Container, que la base de datos haya quedado como ContainerDb y no como Container, y que ninguna relacion haya perdido la mitad de su etiqueta.</a:t>
+              <a:t>(Sobre la actividad, no se proyecta) Eso cambia lo que el docente tiene que ensenar, porque un boceto correcto escrito con la sintaxis equivocada no renderiza y entonces no hay diagrama que calificar.</a:t>
+            </a:r>
+          </a:p>
+          <a:p/>
+          <a:p>
+            <a:r>
+              <a:t>(Sobre la actividad, no se proyecta) Un codigo que no renderiza vale cero, y es el unico punto del taller donde el estudiante puede comprobar su propia nota antes de entregar.</a:t>
             </a:r>
           </a:p>
         </p:txBody>
@@ -886,13 +893,13 @@
           <a:lstStyle/>
           <a:p>
             <a:r>
-              <a:t>Dos exigencias mas, que valen puntos y se pierden sin darse cuenta.</a:t>
+              <a:t>Conviene tambien tener a mano la diferencia con sus vecinos, porque se confunden: 400 es que la peticion esta mal formada, 401 que no se sabe quien eres, 403 que se sabe y no te corresponde, 404 que no existe, 422 que esta bien formada pero sus datos no pasan una validacion, y 409 que choca con el estado actual.</a:t>
             </a:r>
           </a:p>
           <a:p/>
           <a:p>
             <a:r>
-              <a:t>Conviene tambien tener a mano la diferencia con sus vecinos, porque se confunden: 400 es que la peticion esta mal formada, 401 que no se sabe quien eres, 403 que se sabe y no te corresponde, 404 que no existe, 422 que esta bien formada pero sus datos no pasan una validacion, y 409 que choca con el estado actual.</a:t>
+              <a:t>(Sobre la actividad, no se proyecta) Dos exigencias mas, que valen puntos y se pierden sin darse cuenta.</a:t>
             </a:r>
           </a:p>
         </p:txBody>
@@ -1123,6 +1130,12 @@
               <a:t>El segundo pregunta cuantos saltos de red tiene una operacion de punta a punta, y se responde con un numero, contado sobre el propio dibujo.</a:t>
             </a:r>
           </a:p>
+          <a:p/>
+          <a:p>
+            <a:r>
+              <a:t>(Sobre la actividad, no se proyecta) «Se cae todo» vale la mitad de los puntos, y con razon: en un sistema bien partido nunca se cae todo, y el ejercicio consiste precisamente en descubrir que algunas cosas sobreviven.</a:t>
+            </a:r>
+          </a:p>
         </p:txBody>
       </p:sp>
       <p:sp>
@@ -1190,19 +1203,19 @@
           <a:lstStyle/>
           <a:p>
             <a:r>
-              <a:t>No; esta mal hacerlo sin saber que se eligio, y un monolito modular bien argumentado recibe mejor calificacion que cinco servicios sin razon.</a:t>
+              <a:t>Conviene cerrar ubicando el curso: este diagrama es el ultimo insumo del Parcial 1 de la Clase 5; en la Clase 6 cada flecha se convertira en una superficie de ataque que hay que proteger; en la Clase 7 estas mismas cajas se reubicaran en un diagrama de despliegue con zonas publicas y privadas, conservando exactamente los mismos nombres; en la Clase 8 cada contenedor implicara su propio pipeline de integracion continua; y en las Clases 12 y 13 se preguntara cual de estas piezas es el cuello de botella y cual se puede replicar.</a:t>
             </a:r>
           </a:p>
           <a:p/>
           <a:p>
             <a:r>
-              <a:t>Conviene cerrar ubicando el curso: este diagrama es el ultimo insumo del Parcial 1 de la Clase 5; en la Clase 6 cada flecha se convertira en una superficie de ataque que hay que proteger; en la Clase 7 estas mismas cajas se reubicaran en un diagrama de despliegue con zonas publicas y privadas, conservando exactamente los mismos nombres; en la Clase 8 cada contenedor implicara su propio pipeline de integracion continua; y en las Clases 12 y 13 se preguntara cual de estas piezas es el cuello de botella y cual se puede replicar.</a:t>
+              <a:t>El numero de servicios no mide calidad arquitectonica; la justificacion de cada frontera si.</a:t>
             </a:r>
           </a:p>
           <a:p/>
           <a:p>
             <a:r>
-              <a:t>El numero de servicios no mide calidad arquitectonica; la justificacion de cada frontera si.</a:t>
+              <a:t>(Sobre la actividad, no se proyecta) No; esta mal hacerlo sin saber que se eligio, y un monolito modular bien argumentado recibe mejor calificacion que cinco servicios sin razon.</a:t>
             </a:r>
           </a:p>
         </p:txBody>
@@ -5300,7 +5313,7 @@
                 </a:solidFill>
                 <a:latin typeface="Calibri"/>
               </a:rPr>
-              <a:t>–   «Un poco de los dos» vale cero, y hay que decir por que: no es una posicion intermedia sensata, es la frase de quien no decidio, y un sistema no se puede desplegar de las dos formas a la vez.</a:t>
+              <a:t>–   «Un poco de los dos» no es una respuesta: no es una posicion intermedia sensata, es la frase de quien no decidio, y un sistema no se puede desplegar de las dos formas a la vez.</a:t>
             </a:r>
           </a:p>
           <a:p>
@@ -6365,7 +6378,7 @@
                 </a:solidFill>
                 <a:latin typeface="Calibri"/>
               </a:rPr>
-              <a:t>C4Container en Mermaid: la sintaxis que la plataforma renderiza (1/2)</a:t>
+              <a:t>C4Container en Mermaid: la sintaxis que se renderiza (1/2)</a:t>
             </a:r>
           </a:p>
         </p:txBody>
@@ -6404,7 +6417,7 @@
                 </a:solidFill>
                 <a:latin typeface="Calibri"/>
               </a:rPr>
-              <a:t>–   El diagrama no se entrega como imagen: se entrega como codigo, y la plataforma lo renderiza.</a:t>
+              <a:t>–   En este curso el diagrama se escribe como codigo Mermaid, y un visor Mermaid lo renderiza.</a:t>
             </a:r>
           </a:p>
           <a:p>
@@ -6665,7 +6678,7 @@
                 </a:solidFill>
                 <a:latin typeface="Calibri"/>
               </a:rPr>
-              <a:t>C4Container en Mermaid: la sintaxis que la plataforma renderiza (2/2)</a:t>
+              <a:t>C4Container en Mermaid: la sintaxis que se renderiza (2/2)</a:t>
             </a:r>
           </a:p>
         </p:txBody>
@@ -6737,22 +6750,6 @@
                 <a:latin typeface="Calibri"/>
               </a:rPr>
               <a:t>–   La regla operativa del dia se dice como consecuencia y no como consejo: se pega el codigo, se mira renderizado, y solo entonces se envia.</a:t>
-            </a:r>
-          </a:p>
-          <a:p>
-            <a:pPr>
-              <a:spcAft>
-                <a:spcPts val="800"/>
-              </a:spcAft>
-            </a:pPr>
-            <a:r>
-              <a:rPr sz="2000" b="0" i="0">
-                <a:solidFill>
-                  <a:srgbClr val="333333"/>
-                </a:solidFill>
-                <a:latin typeface="Calibri"/>
-              </a:rPr>
-              <a:t>–   Un codigo que no renderiza vale cero, y es el unico punto del taller donde el estudiante puede comprobar su propia nota antes de entregar.</a:t>
             </a:r>
           </a:p>
         </p:txBody>
@@ -9944,7 +9941,7 @@
                 </a:solidFill>
                 <a:latin typeface="Calibri"/>
               </a:rPr>
-              <a:t>El tercer entregable: los tres riesgos, y por que son esos tres (1/3)</a:t>
+              <a:t>Los tres riesgos de distribuir, y por que son esos tres (1/3)</a:t>
             </a:r>
           </a:p>
         </p:txBody>
@@ -9983,7 +9980,7 @@
                 </a:solidFill>
                 <a:latin typeface="Calibri"/>
               </a:rPr>
-              <a:t>–   El tercer entregable es lo que impide que la clase quede en pura teoria, y no es una tabla libre de riesgos: son TRES riesgos, cada uno responde una pregunta distinta, y estan elegidos para que ninguno se pueda contestar sin mirar el propio diagrama.</a:t>
+              <a:t>–   Los riesgos de distribucion no son una lista libre: son TRES riesgos, cada uno responde una pregunta distinta, y estan elegidos para que ninguno se pueda contestar sin mirar el propio diagrama.</a:t>
             </a:r>
           </a:p>
           <a:p>
@@ -10015,7 +10012,7 @@
                 </a:solidFill>
                 <a:latin typeface="Calibri"/>
               </a:rPr>
-              <a:t>–   «Se cae todo» vale la mitad de los puntos, y con razon: en un sistema bien partido nunca se cae todo, y el ejercicio consiste precisamente en descubrir que algunas cosas sobreviven.</a:t>
+              <a:t>–   En CloudLite Turnos, si se cae el trabajador de notificaciones, los turnos se siguen reservando y lo que se pierde es el correo de confirmacion; si se cae la base de turnos, no se reserva nada</a:t>
             </a:r>
           </a:p>
           <a:p>
@@ -10031,7 +10028,23 @@
                 </a:solidFill>
                 <a:latin typeface="Calibri"/>
               </a:rPr>
-              <a:t>–   En CloudLite Turnos, si se cae el trabajador de notificaciones, los turnos se siguen reservando y lo que se pierde es el correo de confirmacion; si se cae la base de turnos, no se reserva nada</a:t>
+              <a:t>–   Pero la aplicacion web sigue cargando y puede mostrar un mensaje decente en lugar de una pantalla en blanco.</a:t>
+            </a:r>
+          </a:p>
+          <a:p>
+            <a:pPr>
+              <a:spcAft>
+                <a:spcPts val="800"/>
+              </a:spcAft>
+            </a:pPr>
+            <a:r>
+              <a:rPr sz="2000" b="0" i="0">
+                <a:solidFill>
+                  <a:srgbClr val="333333"/>
+                </a:solidFill>
+                <a:latin typeface="Calibri"/>
+              </a:rPr>
+              <a:t>–   Ese razonamiento es el que en la Clase 7 permite decidir que va en cada zona de red y en la Clase 13 que pieza vale la pena replicar.</a:t>
             </a:r>
           </a:p>
         </p:txBody>
@@ -10212,7 +10225,7 @@
                 </a:solidFill>
                 <a:latin typeface="Calibri"/>
               </a:rPr>
-              <a:t>El tercer entregable: los tres riesgos, y por que son esos tres (2/3)</a:t>
+              <a:t>Los tres riesgos de distribuir, y por que son esos tres (2/3)</a:t>
             </a:r>
           </a:p>
         </p:txBody>
@@ -10251,7 +10264,7 @@
                 </a:solidFill>
                 <a:latin typeface="Calibri"/>
               </a:rPr>
-              <a:t>–   Pero la aplicacion web sigue cargando y puede mostrar un mensaje decente en lugar de una pantalla en blanco.</a:t>
+              <a:t>–   Reservar un turno en el ejemplo de tres cajas son tres saltos: el navegador a la aplicacion web, la aplicacion web a la API, y la API a la base de datos; si se agrega el correo son cuatro, y si el correo se envia por cola, cinco.</a:t>
             </a:r>
           </a:p>
           <a:p>
@@ -10267,7 +10280,7 @@
                 </a:solidFill>
                 <a:latin typeface="Calibri"/>
               </a:rPr>
-              <a:t>–   Ese razonamiento es el que en la Clase 7 permite decidir que va en cada zona de red y en la Clase 13 que pieza vale la pena replicar.</a:t>
+              <a:t>–   El numero importa por lo que se explico arriba: cada salto agrega latencia y una probabilidad de fallo, y esa aritmetica es la unica defensa contra multiplicar cajas por gusto.</a:t>
             </a:r>
           </a:p>
           <a:p>
@@ -10283,7 +10296,7 @@
                 </a:solidFill>
                 <a:latin typeface="Calibri"/>
               </a:rPr>
-              <a:t>–   Reservar un turno en el ejemplo de tres cajas son tres saltos: el navegador a la aplicacion web, la aplicacion web a la API, y la API a la base de datos; si se agrega el correo son cuatro, y si el correo se envia por cola, cinco.</a:t>
+              <a:t>–   Un estudiante que no puede contar sus saltos no esta leyendo su diagrama, esta recordandolo.</a:t>
             </a:r>
           </a:p>
           <a:p>
@@ -10299,7 +10312,7 @@
                 </a:solidFill>
                 <a:latin typeface="Calibri"/>
               </a:rPr>
-              <a:t>–   El numero importa por lo que se explico arriba: cada salto agrega latencia y una probabilidad de fallo, y esa aritmetica es la unica defensa contra multiplicar cajas por gusto.</a:t>
+              <a:t>–   El tercero pregunta por un dato que se escribe en dos pasos, y es el mas dificil de los tres porque exige mirar la escritura y no la lectura.</a:t>
             </a:r>
           </a:p>
           <a:p>
@@ -10315,23 +10328,7 @@
                 </a:solidFill>
                 <a:latin typeface="Calibri"/>
               </a:rPr>
-              <a:t>–   Un estudiante que no puede contar sus saltos no esta leyendo su diagrama, esta recordandolo.</a:t>
-            </a:r>
-          </a:p>
-          <a:p>
-            <a:pPr>
-              <a:spcAft>
-                <a:spcPts val="800"/>
-              </a:spcAft>
-            </a:pPr>
-            <a:r>
-              <a:rPr sz="2000" b="0" i="0">
-                <a:solidFill>
-                  <a:srgbClr val="333333"/>
-                </a:solidFill>
-                <a:latin typeface="Calibri"/>
-              </a:rPr>
-              <a:t>–   El tercero pregunta por un dato que se escribe en dos pasos, y es el mas dificil de los tres porque exige mirar la escritura y no la lectura.</a:t>
+              <a:t>–   En el ejemplo, el turno se escribe en la base y despues se publica el mensaje del correo: si el segundo paso falla, el turno existe y el cliente nunca se entero.</a:t>
             </a:r>
           </a:p>
         </p:txBody>
@@ -10818,7 +10815,7 @@
                 </a:solidFill>
                 <a:latin typeface="Calibri"/>
               </a:rPr>
-              <a:t>El tercer entregable: los tres riesgos, y por que son esos tres (3/3)</a:t>
+              <a:t>Los tres riesgos de distribuir, y por que son esos tres (3/3)</a:t>
             </a:r>
           </a:p>
         </p:txBody>
@@ -10844,22 +10841,6 @@
             <a:spAutoFit/>
           </a:bodyPr>
           <a:lstStyle/>
-          <a:p>
-            <a:pPr>
-              <a:spcAft>
-                <a:spcPts val="800"/>
-              </a:spcAft>
-            </a:pPr>
-            <a:r>
-              <a:rPr sz="2000" b="0" i="0">
-                <a:solidFill>
-                  <a:srgbClr val="333333"/>
-                </a:solidFill>
-                <a:latin typeface="Calibri"/>
-              </a:rPr>
-              <a:t>–   En el ejemplo, el turno se escribe en la base y despues se publica el mensaje del correo: si el segundo paso falla, el turno existe y el cliente nunca se entero.</a:t>
-            </a:r>
-          </a:p>
           <a:p>
             <a:pPr>
               <a:spcAft>
@@ -11890,7 +11871,7 @@
                 </a:solidFill>
                 <a:latin typeface="Calibri"/>
               </a:rPr>
-              <a:t>El C4 Container en Mermaid: la forma que la plataforma del curso renderiza</a:t>
+              <a:t>El C4 Container en Mermaid: la forma que un visor renderiza</a:t>
             </a:r>
           </a:p>
         </p:txBody>
@@ -12486,7 +12467,7 @@
                 </a:solidFill>
                 <a:latin typeface="Calibri"/>
               </a:rPr>
-              <a:t>Lo que se califica del diagrama, y no es el dibujo</a:t>
+              <a:t>Lo que importa del diagrama, y no es el dibujo</a:t>
             </a:r>
           </a:p>
         </p:txBody>
@@ -12837,7 +12818,7 @@
                 </a:solidFill>
                 <a:latin typeface="Calibri"/>
               </a:rPr>
-              <a:t>%% (Clase 7) y en el Component (Clase 11). Reconciliarlos es la P2 del hito.</a:t>
+              <a:t>%% (Clase 7) y en el Component (Clase 11). Hay que reconciliarlos.</a:t>
             </a:r>
           </a:p>
         </p:txBody>
@@ -14423,7 +14404,7 @@
                 </a:solidFill>
                 <a:latin typeface="Calibri"/>
               </a:rPr>
-              <a:t>C4Container en Mermaid: el molde que la plataforma del curso renderiza</a:t>
+              <a:t>C4Container en Mermaid: el molde que un visor renderiza</a:t>
             </a:r>
           </a:p>
         </p:txBody>
@@ -14916,13 +14897,13 @@
         <p:spPr>
           <a:xfrm>
             <a:off x="0" y="0"/>
-            <a:ext cx="12191695" cy="164592"/>
+            <a:ext cx="12191695" cy="1170432"/>
           </a:xfrm>
           <a:prstGeom prst="rect">
             <a:avLst/>
           </a:prstGeom>
           <a:solidFill>
-            <a:srgbClr val="269CCB"/>
+            <a:srgbClr val="095292"/>
           </a:solidFill>
           <a:ln>
             <a:noFill/>
@@ -14950,30 +14931,49 @@
           </a:p>
         </p:txBody>
       </p:sp>
-      <p:pic>
-        <p:nvPicPr>
-          <p:cNvPr id="3" name="Picture 2" descr="logo_uniajc_color.png"/>
-          <p:cNvPicPr>
-            <a:picLocks noChangeAspect="1"/>
-          </p:cNvPicPr>
-          <p:nvPr/>
-        </p:nvPicPr>
-        <p:blipFill>
-          <a:blip r:embed="rId2"/>
-          <a:stretch>
-            <a:fillRect/>
-          </a:stretch>
-        </p:blipFill>
-        <p:spPr>
-          <a:xfrm>
-            <a:off x="10271455" y="5998464"/>
-            <a:ext cx="1463040" cy="643233"/>
-          </a:xfrm>
-          <a:prstGeom prst="rect">
-            <a:avLst/>
-          </a:prstGeom>
-        </p:spPr>
-      </p:pic>
+      <p:sp>
+        <p:nvSpPr>
+          <p:cNvPr id="3" name="Rectangle 2"/>
+          <p:cNvSpPr/>
+          <p:nvPr/>
+        </p:nvSpPr>
+        <p:spPr>
+          <a:xfrm>
+            <a:off x="0" y="1170432"/>
+            <a:ext cx="12191695" cy="41148"/>
+          </a:xfrm>
+          <a:prstGeom prst="rect">
+            <a:avLst/>
+          </a:prstGeom>
+          <a:solidFill>
+            <a:srgbClr val="FFD000"/>
+          </a:solidFill>
+          <a:ln>
+            <a:noFill/>
+          </a:ln>
+        </p:spPr>
+        <p:style>
+          <a:lnRef idx="1">
+            <a:schemeClr val="accent1"/>
+          </a:lnRef>
+          <a:fillRef idx="3">
+            <a:schemeClr val="accent1"/>
+          </a:fillRef>
+          <a:effectRef idx="2">
+            <a:schemeClr val="accent1"/>
+          </a:effectRef>
+          <a:fontRef idx="minor">
+            <a:schemeClr val="lt1"/>
+          </a:fontRef>
+        </p:style>
+        <p:txBody>
+          <a:bodyPr rtlCol="0" anchor="ctr"/>
+          <a:lstStyle/>
+          <a:p>
+            <a:pPr algn="ctr"/>
+          </a:p>
+        </p:txBody>
+      </p:sp>
       <p:sp>
         <p:nvSpPr>
           <p:cNvPr id="4" name="TextBox 3"/>
@@ -14982,41 +14982,8 @@
         </p:nvSpPr>
         <p:spPr>
           <a:xfrm>
-            <a:off x="457200" y="1737360"/>
-            <a:ext cx="11277295" cy="1097280"/>
-          </a:xfrm>
-          <a:prstGeom prst="rect">
-            <a:avLst/>
-          </a:prstGeom>
-          <a:noFill/>
-        </p:spPr>
-        <p:txBody>
-          <a:bodyPr wrap="square" anchor="ctr"/>
-          <a:lstStyle/>
-          <a:p>
-            <a:pPr algn="ctr"/>
-            <a:r>
-              <a:rPr sz="3400" b="1" i="0">
-                <a:solidFill>
-                  <a:srgbClr val="095292"/>
-                </a:solidFill>
-                <a:latin typeface="Calibri"/>
-              </a:rPr>
-              <a:t>Clase 4 · cierre conceptual</a:t>
-            </a:r>
-          </a:p>
-        </p:txBody>
-      </p:sp>
-      <p:sp>
-        <p:nvSpPr>
-          <p:cNvPr id="5" name="TextBox 4"/>
-          <p:cNvSpPr txBox="1"/>
-          <p:nvPr/>
-        </p:nvSpPr>
-        <p:spPr>
-          <a:xfrm>
-            <a:off x="457200" y="3017520"/>
-            <a:ext cx="11277295" cy="1645920"/>
+            <a:off x="457200" y="164592"/>
+            <a:ext cx="11277295" cy="384048"/>
           </a:xfrm>
           <a:prstGeom prst="rect">
             <a:avLst/>
@@ -15029,65 +14996,28 @@
           </a:bodyPr>
           <a:lstStyle/>
           <a:p>
-            <a:pPr algn="ctr">
-              <a:spcAft>
-                <a:spcPts val="600"/>
-              </a:spcAft>
-            </a:pPr>
-            <a:r>
-              <a:rPr sz="1600" b="0" i="0">
-                <a:solidFill>
-                  <a:srgbClr val="333333"/>
-                </a:solidFill>
-                <a:latin typeface="Calibri"/>
-              </a:rPr>
-              <a:t>Contrastar monolito vs microservicios con criterios de equipo y acoplamiento.</a:t>
-            </a:r>
-          </a:p>
-          <a:p>
-            <a:pPr algn="ctr">
-              <a:spcAft>
-                <a:spcPts val="600"/>
-              </a:spcAft>
-            </a:pPr>
-            <a:r>
-              <a:rPr sz="1600" b="0" i="0">
-                <a:solidFill>
-                  <a:srgbClr val="333333"/>
-                </a:solidFill>
-                <a:latin typeface="Calibri"/>
-              </a:rPr>
-              <a:t>Modelar CloudLite en C4 Container (Mermaid) con 2–5 cajas justificadas.</a:t>
-            </a:r>
-          </a:p>
-          <a:p>
-            <a:pPr algn="ctr">
-              <a:spcAft>
-                <a:spcPts val="600"/>
-              </a:spcAft>
-            </a:pPr>
-            <a:r>
-              <a:rPr sz="1600" b="0" i="0">
-                <a:solidFill>
-                  <a:srgbClr val="333333"/>
-                </a:solidFill>
-                <a:latin typeface="Calibri"/>
-              </a:rPr>
-              <a:t>Definir 3 contratos con verbo, ruta y error de negocio, y nombrar 3 riesgos de distribución.</a:t>
-            </a:r>
-          </a:p>
-        </p:txBody>
-      </p:sp>
-      <p:sp>
-        <p:nvSpPr>
-          <p:cNvPr id="6" name="TextBox 5"/>
+            <a:r>
+              <a:rPr sz="2600" b="1" i="0">
+                <a:solidFill>
+                  <a:srgbClr val="FFFFFF"/>
+                </a:solidFill>
+                <a:latin typeface="Calibri"/>
+              </a:rPr>
+              <a:t>Del boceto al código Mermaid</a:t>
+            </a:r>
+          </a:p>
+        </p:txBody>
+      </p:sp>
+      <p:sp>
+        <p:nvSpPr>
+          <p:cNvPr id="5" name="TextBox 4"/>
           <p:cNvSpPr txBox="1"/>
           <p:nvPr/>
         </p:nvSpPr>
         <p:spPr>
           <a:xfrm>
-            <a:off x="457200" y="4754880"/>
-            <a:ext cx="11277295" cy="640080"/>
+            <a:off x="457200" y="566928"/>
+            <a:ext cx="11277295" cy="411480"/>
           </a:xfrm>
           <a:prstGeom prst="rect">
             <a:avLst/>
@@ -15100,15 +15030,733 @@
           </a:bodyPr>
           <a:lstStyle/>
           <a:p>
+            <a:r>
+              <a:rPr sz="1400" b="0" i="0">
+                <a:solidFill>
+                  <a:srgbClr val="B8D8EE"/>
+                </a:solidFill>
+                <a:latin typeface="Calibri"/>
+              </a:rPr>
+              <a:t>El diagrama se escribe como código: se versiona, se compara y se corrige</a:t>
+            </a:r>
+          </a:p>
+        </p:txBody>
+      </p:sp>
+      <p:sp>
+        <p:nvSpPr>
+          <p:cNvPr id="6" name="Rounded Rectangle 5"/>
+          <p:cNvSpPr/>
+          <p:nvPr/>
+        </p:nvSpPr>
+        <p:spPr>
+          <a:xfrm>
+            <a:off x="457200" y="1659636"/>
+            <a:ext cx="11277295" cy="1051560"/>
+          </a:xfrm>
+          <a:prstGeom prst="roundRect">
+            <a:avLst>
+              <a:gd name="adj" fmla="val 12000"/>
+            </a:avLst>
+          </a:prstGeom>
+          <a:solidFill>
+            <a:srgbClr val="F2F2F2"/>
+          </a:solidFill>
+          <a:ln>
+            <a:noFill/>
+          </a:ln>
+        </p:spPr>
+        <p:style>
+          <a:lnRef idx="1">
+            <a:schemeClr val="accent1"/>
+          </a:lnRef>
+          <a:fillRef idx="3">
+            <a:schemeClr val="accent1"/>
+          </a:fillRef>
+          <a:effectRef idx="2">
+            <a:schemeClr val="accent1"/>
+          </a:effectRef>
+          <a:fontRef idx="minor">
+            <a:schemeClr val="lt1"/>
+          </a:fontRef>
+        </p:style>
+        <p:txBody>
+          <a:bodyPr rtlCol="0" anchor="ctr"/>
+          <a:lstStyle/>
+          <a:p>
             <a:pPr algn="ctr"/>
-            <a:r>
-              <a:rPr sz="2000" b="1" i="0">
-                <a:solidFill>
-                  <a:srgbClr val="269CCB"/>
-                </a:solidFill>
-                <a:latin typeface="Calibri"/>
-              </a:rPr>
-              <a:t>Teoría al servicio del diseño</a:t>
+          </a:p>
+        </p:txBody>
+      </p:sp>
+      <p:sp>
+        <p:nvSpPr>
+          <p:cNvPr id="7" name="Rounded Rectangle 6"/>
+          <p:cNvSpPr/>
+          <p:nvPr/>
+        </p:nvSpPr>
+        <p:spPr>
+          <a:xfrm>
+            <a:off x="594360" y="1965960"/>
+            <a:ext cx="438912" cy="438912"/>
+          </a:xfrm>
+          <a:prstGeom prst="roundRect">
+            <a:avLst>
+              <a:gd name="adj" fmla="val 12000"/>
+            </a:avLst>
+          </a:prstGeom>
+          <a:solidFill>
+            <a:srgbClr val="095292"/>
+          </a:solidFill>
+          <a:ln>
+            <a:noFill/>
+          </a:ln>
+        </p:spPr>
+        <p:style>
+          <a:lnRef idx="1">
+            <a:schemeClr val="accent1"/>
+          </a:lnRef>
+          <a:fillRef idx="3">
+            <a:schemeClr val="accent1"/>
+          </a:fillRef>
+          <a:effectRef idx="2">
+            <a:schemeClr val="accent1"/>
+          </a:effectRef>
+          <a:fontRef idx="minor">
+            <a:schemeClr val="lt1"/>
+          </a:fontRef>
+        </p:style>
+        <p:txBody>
+          <a:bodyPr rtlCol="0" anchor="ctr"/>
+          <a:lstStyle/>
+          <a:p>
+            <a:pPr algn="ctr"/>
+          </a:p>
+        </p:txBody>
+      </p:sp>
+      <p:sp>
+        <p:nvSpPr>
+          <p:cNvPr id="8" name="TextBox 7"/>
+          <p:cNvSpPr txBox="1"/>
+          <p:nvPr/>
+        </p:nvSpPr>
+        <p:spPr>
+          <a:xfrm>
+            <a:off x="594360" y="1965960"/>
+            <a:ext cx="438912" cy="438912"/>
+          </a:xfrm>
+          <a:prstGeom prst="rect">
+            <a:avLst/>
+          </a:prstGeom>
+          <a:noFill/>
+        </p:spPr>
+        <p:txBody>
+          <a:bodyPr wrap="square" anchor="ctr"/>
+          <a:lstStyle/>
+          <a:p>
+            <a:pPr algn="ctr"/>
+            <a:r>
+              <a:rPr sz="1600" b="1" i="0">
+                <a:solidFill>
+                  <a:srgbClr val="FFFFFF"/>
+                </a:solidFill>
+                <a:latin typeface="Calibri"/>
+              </a:rPr>
+              <a:t>1</a:t>
+            </a:r>
+          </a:p>
+        </p:txBody>
+      </p:sp>
+      <p:sp>
+        <p:nvSpPr>
+          <p:cNvPr id="9" name="TextBox 8"/>
+          <p:cNvSpPr txBox="1"/>
+          <p:nvPr/>
+        </p:nvSpPr>
+        <p:spPr>
+          <a:xfrm>
+            <a:off x="1188720" y="1751076"/>
+            <a:ext cx="10271455" cy="886968"/>
+          </a:xfrm>
+          <a:prstGeom prst="rect">
+            <a:avLst/>
+          </a:prstGeom>
+          <a:noFill/>
+        </p:spPr>
+        <p:txBody>
+          <a:bodyPr wrap="square" anchor="ctr"/>
+          <a:lstStyle/>
+          <a:p>
+            <a:r>
+              <a:rPr sz="1500" b="1" i="0">
+                <a:solidFill>
+                  <a:srgbClr val="095292"/>
+                </a:solidFill>
+                <a:latin typeface="Calibri"/>
+              </a:rPr>
+              <a:t>Diseña visual</a:t>
+            </a:r>
+          </a:p>
+          <a:p>
+            <a:pPr>
+              <a:spcBef>
+                <a:spcPts val="200"/>
+              </a:spcBef>
+            </a:pPr>
+            <a:r>
+              <a:rPr sz="1300" b="0" i="0">
+                <a:solidFill>
+                  <a:srgbClr val="333333"/>
+                </a:solidFill>
+                <a:latin typeface="Calibri"/>
+              </a:rPr>
+              <a:t>Dibuja el diagrama como quieras en Excalidraw o draw.io: es más rápido arrastrar cajas que escribir código, y ahí es donde se piensa el modelo.</a:t>
+            </a:r>
+          </a:p>
+        </p:txBody>
+      </p:sp>
+      <p:sp>
+        <p:nvSpPr>
+          <p:cNvPr id="10" name="Rounded Rectangle 9"/>
+          <p:cNvSpPr/>
+          <p:nvPr/>
+        </p:nvSpPr>
+        <p:spPr>
+          <a:xfrm>
+            <a:off x="457200" y="2802636"/>
+            <a:ext cx="11277295" cy="1051560"/>
+          </a:xfrm>
+          <a:prstGeom prst="roundRect">
+            <a:avLst>
+              <a:gd name="adj" fmla="val 12000"/>
+            </a:avLst>
+          </a:prstGeom>
+          <a:solidFill>
+            <a:srgbClr val="E8F4FA"/>
+          </a:solidFill>
+          <a:ln>
+            <a:noFill/>
+          </a:ln>
+        </p:spPr>
+        <p:style>
+          <a:lnRef idx="1">
+            <a:schemeClr val="accent1"/>
+          </a:lnRef>
+          <a:fillRef idx="3">
+            <a:schemeClr val="accent1"/>
+          </a:fillRef>
+          <a:effectRef idx="2">
+            <a:schemeClr val="accent1"/>
+          </a:effectRef>
+          <a:fontRef idx="minor">
+            <a:schemeClr val="lt1"/>
+          </a:fontRef>
+        </p:style>
+        <p:txBody>
+          <a:bodyPr rtlCol="0" anchor="ctr"/>
+          <a:lstStyle/>
+          <a:p>
+            <a:pPr algn="ctr"/>
+          </a:p>
+        </p:txBody>
+      </p:sp>
+      <p:sp>
+        <p:nvSpPr>
+          <p:cNvPr id="11" name="Rounded Rectangle 10"/>
+          <p:cNvSpPr/>
+          <p:nvPr/>
+        </p:nvSpPr>
+        <p:spPr>
+          <a:xfrm>
+            <a:off x="594360" y="3108960"/>
+            <a:ext cx="438912" cy="438912"/>
+          </a:xfrm>
+          <a:prstGeom prst="roundRect">
+            <a:avLst>
+              <a:gd name="adj" fmla="val 12000"/>
+            </a:avLst>
+          </a:prstGeom>
+          <a:solidFill>
+            <a:srgbClr val="095292"/>
+          </a:solidFill>
+          <a:ln>
+            <a:noFill/>
+          </a:ln>
+        </p:spPr>
+        <p:style>
+          <a:lnRef idx="1">
+            <a:schemeClr val="accent1"/>
+          </a:lnRef>
+          <a:fillRef idx="3">
+            <a:schemeClr val="accent1"/>
+          </a:fillRef>
+          <a:effectRef idx="2">
+            <a:schemeClr val="accent1"/>
+          </a:effectRef>
+          <a:fontRef idx="minor">
+            <a:schemeClr val="lt1"/>
+          </a:fontRef>
+        </p:style>
+        <p:txBody>
+          <a:bodyPr rtlCol="0" anchor="ctr"/>
+          <a:lstStyle/>
+          <a:p>
+            <a:pPr algn="ctr"/>
+          </a:p>
+        </p:txBody>
+      </p:sp>
+      <p:sp>
+        <p:nvSpPr>
+          <p:cNvPr id="12" name="TextBox 11"/>
+          <p:cNvSpPr txBox="1"/>
+          <p:nvPr/>
+        </p:nvSpPr>
+        <p:spPr>
+          <a:xfrm>
+            <a:off x="594360" y="3108960"/>
+            <a:ext cx="438912" cy="438912"/>
+          </a:xfrm>
+          <a:prstGeom prst="rect">
+            <a:avLst/>
+          </a:prstGeom>
+          <a:noFill/>
+        </p:spPr>
+        <p:txBody>
+          <a:bodyPr wrap="square" anchor="ctr"/>
+          <a:lstStyle/>
+          <a:p>
+            <a:pPr algn="ctr"/>
+            <a:r>
+              <a:rPr sz="1600" b="1" i="0">
+                <a:solidFill>
+                  <a:srgbClr val="FFFFFF"/>
+                </a:solidFill>
+                <a:latin typeface="Calibri"/>
+              </a:rPr>
+              <a:t>2</a:t>
+            </a:r>
+          </a:p>
+        </p:txBody>
+      </p:sp>
+      <p:sp>
+        <p:nvSpPr>
+          <p:cNvPr id="13" name="TextBox 12"/>
+          <p:cNvSpPr txBox="1"/>
+          <p:nvPr/>
+        </p:nvSpPr>
+        <p:spPr>
+          <a:xfrm>
+            <a:off x="1188720" y="2894076"/>
+            <a:ext cx="10271455" cy="886968"/>
+          </a:xfrm>
+          <a:prstGeom prst="rect">
+            <a:avLst/>
+          </a:prstGeom>
+          <a:noFill/>
+        </p:spPr>
+        <p:txBody>
+          <a:bodyPr wrap="square" anchor="ctr"/>
+          <a:lstStyle/>
+          <a:p>
+            <a:r>
+              <a:rPr sz="1500" b="1" i="0">
+                <a:solidFill>
+                  <a:srgbClr val="095292"/>
+                </a:solidFill>
+                <a:latin typeface="Calibri"/>
+              </a:rPr>
+              <a:t>Traduce con IA</a:t>
+            </a:r>
+          </a:p>
+          <a:p>
+            <a:pPr>
+              <a:spcBef>
+                <a:spcPts val="200"/>
+              </a:spcBef>
+            </a:pPr>
+            <a:r>
+              <a:rPr sz="1300" b="0" i="0">
+                <a:solidFill>
+                  <a:srgbClr val="333333"/>
+                </a:solidFill>
+                <a:latin typeface="Calibri"/>
+              </a:rPr>
+              <a:t>Describe tu boceto a una IA y pídele el código Mermaid usando C4Container. Revisa el resultado: la IA acierta la sintaxis, no tu modelo.</a:t>
+            </a:r>
+          </a:p>
+        </p:txBody>
+      </p:sp>
+      <p:sp>
+        <p:nvSpPr>
+          <p:cNvPr id="14" name="Rounded Rectangle 13"/>
+          <p:cNvSpPr/>
+          <p:nvPr/>
+        </p:nvSpPr>
+        <p:spPr>
+          <a:xfrm>
+            <a:off x="457200" y="3945636"/>
+            <a:ext cx="11277295" cy="1051560"/>
+          </a:xfrm>
+          <a:prstGeom prst="roundRect">
+            <a:avLst>
+              <a:gd name="adj" fmla="val 12000"/>
+            </a:avLst>
+          </a:prstGeom>
+          <a:solidFill>
+            <a:srgbClr val="F2F2F2"/>
+          </a:solidFill>
+          <a:ln>
+            <a:noFill/>
+          </a:ln>
+        </p:spPr>
+        <p:style>
+          <a:lnRef idx="1">
+            <a:schemeClr val="accent1"/>
+          </a:lnRef>
+          <a:fillRef idx="3">
+            <a:schemeClr val="accent1"/>
+          </a:fillRef>
+          <a:effectRef idx="2">
+            <a:schemeClr val="accent1"/>
+          </a:effectRef>
+          <a:fontRef idx="minor">
+            <a:schemeClr val="lt1"/>
+          </a:fontRef>
+        </p:style>
+        <p:txBody>
+          <a:bodyPr rtlCol="0" anchor="ctr"/>
+          <a:lstStyle/>
+          <a:p>
+            <a:pPr algn="ctr"/>
+          </a:p>
+        </p:txBody>
+      </p:sp>
+      <p:sp>
+        <p:nvSpPr>
+          <p:cNvPr id="15" name="Rounded Rectangle 14"/>
+          <p:cNvSpPr/>
+          <p:nvPr/>
+        </p:nvSpPr>
+        <p:spPr>
+          <a:xfrm>
+            <a:off x="594360" y="4251960"/>
+            <a:ext cx="438912" cy="438912"/>
+          </a:xfrm>
+          <a:prstGeom prst="roundRect">
+            <a:avLst>
+              <a:gd name="adj" fmla="val 12000"/>
+            </a:avLst>
+          </a:prstGeom>
+          <a:solidFill>
+            <a:srgbClr val="095292"/>
+          </a:solidFill>
+          <a:ln>
+            <a:noFill/>
+          </a:ln>
+        </p:spPr>
+        <p:style>
+          <a:lnRef idx="1">
+            <a:schemeClr val="accent1"/>
+          </a:lnRef>
+          <a:fillRef idx="3">
+            <a:schemeClr val="accent1"/>
+          </a:fillRef>
+          <a:effectRef idx="2">
+            <a:schemeClr val="accent1"/>
+          </a:effectRef>
+          <a:fontRef idx="minor">
+            <a:schemeClr val="lt1"/>
+          </a:fontRef>
+        </p:style>
+        <p:txBody>
+          <a:bodyPr rtlCol="0" anchor="ctr"/>
+          <a:lstStyle/>
+          <a:p>
+            <a:pPr algn="ctr"/>
+          </a:p>
+        </p:txBody>
+      </p:sp>
+      <p:sp>
+        <p:nvSpPr>
+          <p:cNvPr id="16" name="TextBox 15"/>
+          <p:cNvSpPr txBox="1"/>
+          <p:nvPr/>
+        </p:nvSpPr>
+        <p:spPr>
+          <a:xfrm>
+            <a:off x="594360" y="4251960"/>
+            <a:ext cx="438912" cy="438912"/>
+          </a:xfrm>
+          <a:prstGeom prst="rect">
+            <a:avLst/>
+          </a:prstGeom>
+          <a:noFill/>
+        </p:spPr>
+        <p:txBody>
+          <a:bodyPr wrap="square" anchor="ctr"/>
+          <a:lstStyle/>
+          <a:p>
+            <a:pPr algn="ctr"/>
+            <a:r>
+              <a:rPr sz="1600" b="1" i="0">
+                <a:solidFill>
+                  <a:srgbClr val="FFFFFF"/>
+                </a:solidFill>
+                <a:latin typeface="Calibri"/>
+              </a:rPr>
+              <a:t>3</a:t>
+            </a:r>
+          </a:p>
+        </p:txBody>
+      </p:sp>
+      <p:sp>
+        <p:nvSpPr>
+          <p:cNvPr id="17" name="TextBox 16"/>
+          <p:cNvSpPr txBox="1"/>
+          <p:nvPr/>
+        </p:nvSpPr>
+        <p:spPr>
+          <a:xfrm>
+            <a:off x="1188720" y="4037076"/>
+            <a:ext cx="10271455" cy="886968"/>
+          </a:xfrm>
+          <a:prstGeom prst="rect">
+            <a:avLst/>
+          </a:prstGeom>
+          <a:noFill/>
+        </p:spPr>
+        <p:txBody>
+          <a:bodyPr wrap="square" anchor="ctr"/>
+          <a:lstStyle/>
+          <a:p>
+            <a:r>
+              <a:rPr sz="1500" b="1" i="0">
+                <a:solidFill>
+                  <a:srgbClr val="095292"/>
+                </a:solidFill>
+                <a:latin typeface="Calibri"/>
+              </a:rPr>
+              <a:t>Renderiza en un visor</a:t>
+            </a:r>
+          </a:p>
+          <a:p>
+            <a:pPr>
+              <a:spcBef>
+                <a:spcPts val="200"/>
+              </a:spcBef>
+            </a:pPr>
+            <a:r>
+              <a:rPr sz="1300" b="0" i="0">
+                <a:solidFill>
+                  <a:srgbClr val="333333"/>
+                </a:solidFill>
+                <a:latin typeface="Calibri"/>
+              </a:rPr>
+              <a:t>Pega el código en un visor Mermaid (mermaid.live o la vista previa de tu editor) y míralo dibujado. Si no renderiza, corrige ahí: un end faltante o un rótulo sin comillas.</a:t>
+            </a:r>
+          </a:p>
+        </p:txBody>
+      </p:sp>
+      <p:sp>
+        <p:nvSpPr>
+          <p:cNvPr id="18" name="Rounded Rectangle 17"/>
+          <p:cNvSpPr/>
+          <p:nvPr/>
+        </p:nvSpPr>
+        <p:spPr>
+          <a:xfrm>
+            <a:off x="457200" y="5088636"/>
+            <a:ext cx="11277295" cy="1051560"/>
+          </a:xfrm>
+          <a:prstGeom prst="roundRect">
+            <a:avLst>
+              <a:gd name="adj" fmla="val 12000"/>
+            </a:avLst>
+          </a:prstGeom>
+          <a:solidFill>
+            <a:srgbClr val="E8F4FA"/>
+          </a:solidFill>
+          <a:ln>
+            <a:noFill/>
+          </a:ln>
+        </p:spPr>
+        <p:style>
+          <a:lnRef idx="1">
+            <a:schemeClr val="accent1"/>
+          </a:lnRef>
+          <a:fillRef idx="3">
+            <a:schemeClr val="accent1"/>
+          </a:fillRef>
+          <a:effectRef idx="2">
+            <a:schemeClr val="accent1"/>
+          </a:effectRef>
+          <a:fontRef idx="minor">
+            <a:schemeClr val="lt1"/>
+          </a:fontRef>
+        </p:style>
+        <p:txBody>
+          <a:bodyPr rtlCol="0" anchor="ctr"/>
+          <a:lstStyle/>
+          <a:p>
+            <a:pPr algn="ctr"/>
+          </a:p>
+        </p:txBody>
+      </p:sp>
+      <p:sp>
+        <p:nvSpPr>
+          <p:cNvPr id="19" name="Rounded Rectangle 18"/>
+          <p:cNvSpPr/>
+          <p:nvPr/>
+        </p:nvSpPr>
+        <p:spPr>
+          <a:xfrm>
+            <a:off x="594360" y="5394960"/>
+            <a:ext cx="438912" cy="438912"/>
+          </a:xfrm>
+          <a:prstGeom prst="roundRect">
+            <a:avLst>
+              <a:gd name="adj" fmla="val 12000"/>
+            </a:avLst>
+          </a:prstGeom>
+          <a:solidFill>
+            <a:srgbClr val="095292"/>
+          </a:solidFill>
+          <a:ln>
+            <a:noFill/>
+          </a:ln>
+        </p:spPr>
+        <p:style>
+          <a:lnRef idx="1">
+            <a:schemeClr val="accent1"/>
+          </a:lnRef>
+          <a:fillRef idx="3">
+            <a:schemeClr val="accent1"/>
+          </a:fillRef>
+          <a:effectRef idx="2">
+            <a:schemeClr val="accent1"/>
+          </a:effectRef>
+          <a:fontRef idx="minor">
+            <a:schemeClr val="lt1"/>
+          </a:fontRef>
+        </p:style>
+        <p:txBody>
+          <a:bodyPr rtlCol="0" anchor="ctr"/>
+          <a:lstStyle/>
+          <a:p>
+            <a:pPr algn="ctr"/>
+          </a:p>
+        </p:txBody>
+      </p:sp>
+      <p:sp>
+        <p:nvSpPr>
+          <p:cNvPr id="20" name="TextBox 19"/>
+          <p:cNvSpPr txBox="1"/>
+          <p:nvPr/>
+        </p:nvSpPr>
+        <p:spPr>
+          <a:xfrm>
+            <a:off x="594360" y="5394960"/>
+            <a:ext cx="438912" cy="438912"/>
+          </a:xfrm>
+          <a:prstGeom prst="rect">
+            <a:avLst/>
+          </a:prstGeom>
+          <a:noFill/>
+        </p:spPr>
+        <p:txBody>
+          <a:bodyPr wrap="square" anchor="ctr"/>
+          <a:lstStyle/>
+          <a:p>
+            <a:pPr algn="ctr"/>
+            <a:r>
+              <a:rPr sz="1600" b="1" i="0">
+                <a:solidFill>
+                  <a:srgbClr val="FFFFFF"/>
+                </a:solidFill>
+                <a:latin typeface="Calibri"/>
+              </a:rPr>
+              <a:t>4</a:t>
+            </a:r>
+          </a:p>
+        </p:txBody>
+      </p:sp>
+      <p:sp>
+        <p:nvSpPr>
+          <p:cNvPr id="21" name="TextBox 20"/>
+          <p:cNvSpPr txBox="1"/>
+          <p:nvPr/>
+        </p:nvSpPr>
+        <p:spPr>
+          <a:xfrm>
+            <a:off x="1188720" y="5180076"/>
+            <a:ext cx="10271455" cy="886968"/>
+          </a:xfrm>
+          <a:prstGeom prst="rect">
+            <a:avLst/>
+          </a:prstGeom>
+          <a:noFill/>
+        </p:spPr>
+        <p:txBody>
+          <a:bodyPr wrap="square" anchor="ctr"/>
+          <a:lstStyle/>
+          <a:p>
+            <a:r>
+              <a:rPr sz="1500" b="1" i="0">
+                <a:solidFill>
+                  <a:srgbClr val="095292"/>
+                </a:solidFill>
+                <a:latin typeface="Calibri"/>
+              </a:rPr>
+              <a:t>Guarda código e imagen</a:t>
+            </a:r>
+          </a:p>
+          <a:p>
+            <a:pPr>
+              <a:spcBef>
+                <a:spcPts val="200"/>
+              </a:spcBef>
+            </a:pPr>
+            <a:r>
+              <a:rPr sz="1300" b="0" i="0">
+                <a:solidFill>
+                  <a:srgbClr val="333333"/>
+                </a:solidFill>
+                <a:latin typeface="Calibri"/>
+              </a:rPr>
+              <a:t>El código es la fuente del diagrama: guárdalo con tu proyecto junto con el PNG exportado.</a:t>
+            </a:r>
+          </a:p>
+        </p:txBody>
+      </p:sp>
+      <p:sp>
+        <p:nvSpPr>
+          <p:cNvPr id="22" name="TextBox 21"/>
+          <p:cNvSpPr txBox="1"/>
+          <p:nvPr/>
+        </p:nvSpPr>
+        <p:spPr>
+          <a:xfrm>
+            <a:off x="11185855" y="6473952"/>
+            <a:ext cx="640080" cy="274320"/>
+          </a:xfrm>
+          <a:prstGeom prst="rect">
+            <a:avLst/>
+          </a:prstGeom>
+          <a:noFill/>
+        </p:spPr>
+        <p:txBody>
+          <a:bodyPr wrap="square">
+            <a:spAutoFit/>
+          </a:bodyPr>
+          <a:lstStyle/>
+          <a:p>
+            <a:pPr algn="r"/>
+            <a:r>
+              <a:rPr sz="1100" b="0" i="0">
+                <a:solidFill>
+                  <a:srgbClr val="666666"/>
+                </a:solidFill>
+                <a:latin typeface="Calibri"/>
+              </a:rPr>
+              <a:t>39</a:t>
             </a:r>
           </a:p>
         </p:txBody>
@@ -15481,6 +16129,238 @@
                 <a:latin typeface="Calibri"/>
               </a:rPr>
               <a:t>4</a:t>
+            </a:r>
+          </a:p>
+        </p:txBody>
+      </p:sp>
+    </p:spTree>
+  </p:cSld>
+  <p:clrMapOvr>
+    <a:masterClrMapping/>
+  </p:clrMapOvr>
+</p:sld>
+</file>
+
+<file path=ppt/slides/slide40.xml><?xml version="1.0" encoding="utf-8"?>
+<p:sld xmlns:a="http://schemas.openxmlformats.org/drawingml/2006/main" xmlns:p="http://schemas.openxmlformats.org/presentationml/2006/main" xmlns:r="http://schemas.openxmlformats.org/officeDocument/2006/relationships">
+  <p:cSld>
+    <p:bg>
+      <p:bgPr>
+        <a:solidFill>
+          <a:srgbClr val="FFFFFF"/>
+        </a:solidFill>
+        <a:effectLst/>
+      </p:bgPr>
+    </p:bg>
+    <p:spTree>
+      <p:nvGrpSpPr>
+        <p:cNvPr id="1" name=""/>
+        <p:cNvGrpSpPr/>
+        <p:nvPr/>
+      </p:nvGrpSpPr>
+      <p:grpSpPr/>
+      <p:sp>
+        <p:nvSpPr>
+          <p:cNvPr id="2" name="Rectangle 1"/>
+          <p:cNvSpPr/>
+          <p:nvPr/>
+        </p:nvSpPr>
+        <p:spPr>
+          <a:xfrm>
+            <a:off x="0" y="0"/>
+            <a:ext cx="12191695" cy="164592"/>
+          </a:xfrm>
+          <a:prstGeom prst="rect">
+            <a:avLst/>
+          </a:prstGeom>
+          <a:solidFill>
+            <a:srgbClr val="269CCB"/>
+          </a:solidFill>
+          <a:ln>
+            <a:noFill/>
+          </a:ln>
+        </p:spPr>
+        <p:style>
+          <a:lnRef idx="1">
+            <a:schemeClr val="accent1"/>
+          </a:lnRef>
+          <a:fillRef idx="3">
+            <a:schemeClr val="accent1"/>
+          </a:fillRef>
+          <a:effectRef idx="2">
+            <a:schemeClr val="accent1"/>
+          </a:effectRef>
+          <a:fontRef idx="minor">
+            <a:schemeClr val="lt1"/>
+          </a:fontRef>
+        </p:style>
+        <p:txBody>
+          <a:bodyPr rtlCol="0" anchor="ctr"/>
+          <a:lstStyle/>
+          <a:p>
+            <a:pPr algn="ctr"/>
+          </a:p>
+        </p:txBody>
+      </p:sp>
+      <p:pic>
+        <p:nvPicPr>
+          <p:cNvPr id="3" name="Picture 2" descr="logo_uniajc_color.png"/>
+          <p:cNvPicPr>
+            <a:picLocks noChangeAspect="1"/>
+          </p:cNvPicPr>
+          <p:nvPr/>
+        </p:nvPicPr>
+        <p:blipFill>
+          <a:blip r:embed="rId2"/>
+          <a:stretch>
+            <a:fillRect/>
+          </a:stretch>
+        </p:blipFill>
+        <p:spPr>
+          <a:xfrm>
+            <a:off x="10271455" y="5998464"/>
+            <a:ext cx="1463040" cy="643233"/>
+          </a:xfrm>
+          <a:prstGeom prst="rect">
+            <a:avLst/>
+          </a:prstGeom>
+        </p:spPr>
+      </p:pic>
+      <p:sp>
+        <p:nvSpPr>
+          <p:cNvPr id="4" name="TextBox 3"/>
+          <p:cNvSpPr txBox="1"/>
+          <p:nvPr/>
+        </p:nvSpPr>
+        <p:spPr>
+          <a:xfrm>
+            <a:off x="457200" y="1737360"/>
+            <a:ext cx="11277295" cy="1097280"/>
+          </a:xfrm>
+          <a:prstGeom prst="rect">
+            <a:avLst/>
+          </a:prstGeom>
+          <a:noFill/>
+        </p:spPr>
+        <p:txBody>
+          <a:bodyPr wrap="square" anchor="ctr"/>
+          <a:lstStyle/>
+          <a:p>
+            <a:pPr algn="ctr"/>
+            <a:r>
+              <a:rPr sz="3400" b="1" i="0">
+                <a:solidFill>
+                  <a:srgbClr val="095292"/>
+                </a:solidFill>
+                <a:latin typeface="Calibri"/>
+              </a:rPr>
+              <a:t>Clase 4 · cierre conceptual</a:t>
+            </a:r>
+          </a:p>
+        </p:txBody>
+      </p:sp>
+      <p:sp>
+        <p:nvSpPr>
+          <p:cNvPr id="5" name="TextBox 4"/>
+          <p:cNvSpPr txBox="1"/>
+          <p:nvPr/>
+        </p:nvSpPr>
+        <p:spPr>
+          <a:xfrm>
+            <a:off x="457200" y="3017520"/>
+            <a:ext cx="11277295" cy="1645920"/>
+          </a:xfrm>
+          <a:prstGeom prst="rect">
+            <a:avLst/>
+          </a:prstGeom>
+          <a:noFill/>
+        </p:spPr>
+        <p:txBody>
+          <a:bodyPr wrap="square">
+            <a:spAutoFit/>
+          </a:bodyPr>
+          <a:lstStyle/>
+          <a:p>
+            <a:pPr algn="ctr">
+              <a:spcAft>
+                <a:spcPts val="600"/>
+              </a:spcAft>
+            </a:pPr>
+            <a:r>
+              <a:rPr sz="1600" b="0" i="0">
+                <a:solidFill>
+                  <a:srgbClr val="333333"/>
+                </a:solidFill>
+                <a:latin typeface="Calibri"/>
+              </a:rPr>
+              <a:t>Contrastar monolito vs microservicios con criterios de equipo y acoplamiento.</a:t>
+            </a:r>
+          </a:p>
+          <a:p>
+            <a:pPr algn="ctr">
+              <a:spcAft>
+                <a:spcPts val="600"/>
+              </a:spcAft>
+            </a:pPr>
+            <a:r>
+              <a:rPr sz="1600" b="0" i="0">
+                <a:solidFill>
+                  <a:srgbClr val="333333"/>
+                </a:solidFill>
+                <a:latin typeface="Calibri"/>
+              </a:rPr>
+              <a:t>Modelar CloudLite en C4 Container (Mermaid) con 2–5 cajas justificadas.</a:t>
+            </a:r>
+          </a:p>
+          <a:p>
+            <a:pPr algn="ctr">
+              <a:spcAft>
+                <a:spcPts val="600"/>
+              </a:spcAft>
+            </a:pPr>
+            <a:r>
+              <a:rPr sz="1600" b="0" i="0">
+                <a:solidFill>
+                  <a:srgbClr val="333333"/>
+                </a:solidFill>
+                <a:latin typeface="Calibri"/>
+              </a:rPr>
+              <a:t>Definir 3 contratos con verbo, ruta y error de negocio, y nombrar 3 riesgos de distribución.</a:t>
+            </a:r>
+          </a:p>
+        </p:txBody>
+      </p:sp>
+      <p:sp>
+        <p:nvSpPr>
+          <p:cNvPr id="6" name="TextBox 5"/>
+          <p:cNvSpPr txBox="1"/>
+          <p:nvPr/>
+        </p:nvSpPr>
+        <p:spPr>
+          <a:xfrm>
+            <a:off x="457200" y="4754880"/>
+            <a:ext cx="11277295" cy="640080"/>
+          </a:xfrm>
+          <a:prstGeom prst="rect">
+            <a:avLst/>
+          </a:prstGeom>
+          <a:noFill/>
+        </p:spPr>
+        <p:txBody>
+          <a:bodyPr wrap="square">
+            <a:spAutoFit/>
+          </a:bodyPr>
+          <a:lstStyle/>
+          <a:p>
+            <a:pPr algn="ctr"/>
+            <a:r>
+              <a:rPr sz="2000" b="1" i="0">
+                <a:solidFill>
+                  <a:srgbClr val="269CCB"/>
+                </a:solidFill>
+                <a:latin typeface="Calibri"/>
+              </a:rPr>
+              <a:t>Teoría al servicio del diseño</a:t>
             </a:r>
           </a:p>
         </p:txBody>
@@ -17114,7 +17994,23 @@
                 </a:solidFill>
                 <a:latin typeface="Calibri"/>
               </a:rPr>
-              <a:t>–   Ese es el nivel 2 del modelo C4, el de contenedores, y el entregable son tres cosas: la decision de arquitectura en una frase con sus dos criterios, el diagrama de contenedores escrito en Mermaid, y una tabla de tres contratos mas tres riesgos de distribucion.</a:t>
+              <a:t>–   Ese es el nivel 2 del modelo C4, el de contenedores, y el trabajo de este nivel son tres cosas: la decision de arquitectura en una frase con sus dos criterios</a:t>
+            </a:r>
+          </a:p>
+          <a:p>
+            <a:pPr>
+              <a:spcAft>
+                <a:spcPts val="800"/>
+              </a:spcAft>
+            </a:pPr>
+            <a:r>
+              <a:rPr sz="2000" b="0" i="0">
+                <a:solidFill>
+                  <a:srgbClr val="333333"/>
+                </a:solidFill>
+                <a:latin typeface="Calibri"/>
+              </a:rPr>
+              <a:t>–   El diagrama de contenedores escrito en Mermaid, y una tabla de tres contratos mas tres riesgos de distribucion.</a:t>
             </a:r>
           </a:p>
         </p:txBody>

--- a/Arquitectura de Sistemas Computacionales/Clases/Clase 4 - Microservicios y arquitecturas distribuidas/Presentacion.pptx
+++ b/Arquitectura de Sistemas Computacionales/Clases/Clase 4 - Microservicios y arquitecturas distribuidas/Presentacion.pptx
@@ -560,6 +560,12 @@
           <a:p>
             <a:r>
               <a:t>La razon de fondo es la que se repite en el cierre: la cantidad de servicios que una organizacion sostiene es funcion del numero de equipos autonomos, no del gusto por la modularidad.</a:t>
+            </a:r>
+          </a:p>
+          <a:p/>
+          <a:p>
+            <a:r>
+              <a:t>Esa frase tiene decision, 2 criterios y las 2 mitades del trade-off.</a:t>
             </a:r>
           </a:p>
         </p:txBody>
@@ -5597,7 +5603,39 @@
                 </a:solidFill>
                 <a:latin typeface="Calibri"/>
               </a:rPr>
-              <a:t>–   Sin la segunda mitad no hubo decision, hubo una justificacion escrita despues de los hechos —el mismo defecto que la Clase 2 senalaba en los ADR sin consecuencias negativas—, y esa simetria entre las dos clases vale la pena nombrarla en voz alta.</a:t>
+              <a:t>–   Sin la segunda mitad no hubo decision, hubo una justificacion escrita despues de los hechos —el mismo defecto que la Clase 2 senalaba en los ADR sin consecuencias negativas—.</a:t>
+            </a:r>
+          </a:p>
+          <a:p>
+            <a:pPr>
+              <a:spcAft>
+                <a:spcPts val="800"/>
+              </a:spcAft>
+            </a:pPr>
+            <a:r>
+              <a:rPr sz="2000" b="0" i="0">
+                <a:solidFill>
+                  <a:srgbClr val="333333"/>
+                </a:solidFill>
+                <a:latin typeface="Calibri"/>
+              </a:rPr>
+              <a:t>–   Un ejemplo completo para CloudLite Turnos es: «Elegimos un monolito modular porque el equipo es de 1 persona y el dominio tiene 3 capacidades</a:t>
+            </a:r>
+          </a:p>
+          <a:p>
+            <a:pPr>
+              <a:spcAft>
+                <a:spcPts val="800"/>
+              </a:spcAft>
+            </a:pPr>
+            <a:r>
+              <a:rPr sz="2000" b="0" i="0">
+                <a:solidFill>
+                  <a:srgbClr val="333333"/>
+                </a:solidFill>
+                <a:latin typeface="Calibri"/>
+              </a:rPr>
+              <a:t>–   Ganamos un solo despliegue y transacciones simples; perdemos la posibilidad de escalar el envio de avisos por separado».</a:t>
             </a:r>
           </a:p>
         </p:txBody>
@@ -9511,6 +9549,22 @@
               <a:t>–   Y una operacion que abarca dos servicios ya no puede ser una transaccion unica sino una secuencia de pasos con compensaciones.</a:t>
             </a:r>
           </a:p>
+          <a:p>
+            <a:pPr>
+              <a:spcAft>
+                <a:spcPts val="800"/>
+              </a:spcAft>
+            </a:pPr>
+            <a:r>
+              <a:rPr sz="2000" b="0" i="0">
+                <a:solidFill>
+                  <a:srgbClr val="333333"/>
+                </a:solidFill>
+                <a:latin typeface="Calibri"/>
+              </a:rPr>
+              <a:t>–   La postura honesta para este curso es que un CloudLite con una base de datos compartida y propiedad de tablas claramente documentada resulta aceptable</a:t>
+            </a:r>
+          </a:p>
         </p:txBody>
       </p:sp>
       <p:sp>
@@ -9728,7 +9782,7 @@
                 </a:solidFill>
                 <a:latin typeface="Calibri"/>
               </a:rPr>
-              <a:t>–   La postura honesta para este curso, y hay que enunciarla en voz alta, es que un CloudLite con una base de datos compartida y propiedad de tablas claramente documentada resulta aceptable</a:t>
+              <a:t>–   Siempre que el estudiante lo registre como un trade-off consciente en su informe y no lo presente como microservicios puros.</a:t>
             </a:r>
           </a:p>
           <a:p>
@@ -9744,7 +9798,7 @@
                 </a:solidFill>
                 <a:latin typeface="Calibri"/>
               </a:rPr>
-              <a:t>–   Siempre que el estudiante lo registre como un trade-off consciente en su informe y no lo presente como microservicios puros.</a:t>
+              <a:t>–   Fingir ortodoxia es peor que documentar una concesion.</a:t>
             </a:r>
           </a:p>
           <a:p>
@@ -9760,7 +9814,39 @@
                 </a:solidFill>
                 <a:latin typeface="Calibri"/>
               </a:rPr>
-              <a:t>–   Fingir ortodoxia es peor que documentar una concesion.</a:t>
+              <a:t>–   La regla de propiedad es: cada tabla tiene un solo servicio dueno, que es el unico que escribe en ella; los demas la consultan por su API.</a:t>
+            </a:r>
+          </a:p>
+          <a:p>
+            <a:pPr>
+              <a:spcAft>
+                <a:spcPts val="800"/>
+              </a:spcAft>
+            </a:pPr>
+            <a:r>
+              <a:rPr sz="2000" b="0" i="0">
+                <a:solidFill>
+                  <a:srgbClr val="333333"/>
+                </a:solidFill>
+                <a:latin typeface="Calibri"/>
+              </a:rPr>
+              <a:t>–   En CloudLite Turnos la tabla de turnos es de la API de turnos, y el worker de avisos no la toca: recibe por la cola el dato que necesita.</a:t>
+            </a:r>
+          </a:p>
+          <a:p>
+            <a:pPr>
+              <a:spcAft>
+                <a:spcPts val="800"/>
+              </a:spcAft>
+            </a:pPr>
+            <a:r>
+              <a:rPr sz="2000" b="0" i="0">
+                <a:solidFill>
+                  <a:srgbClr val="333333"/>
+                </a:solidFill>
+                <a:latin typeface="Calibri"/>
+              </a:rPr>
+              <a:t>–   Dos servicios que escriben en la misma tabla quedan acoplados aunque se desplieguen por separado, y ese es el error mas comun.</a:t>
             </a:r>
           </a:p>
         </p:txBody>

--- a/Arquitectura de Sistemas Computacionales/Clases/Clase 4 - Microservicios y arquitecturas distribuidas/Presentacion.pptx
+++ b/Arquitectura de Sistemas Computacionales/Clases/Clase 4 - Microservicios y arquitecturas distribuidas/Presentacion.pptx
@@ -4515,7 +4515,7 @@
                 </a:solidFill>
                 <a:latin typeface="Calibri"/>
               </a:rPr>
-              <a:t>Conceptos del tema, ejemplos resueltos sobre CloudLite y cierre conceptual.</a:t>
+              <a:t>Conceptos del tema, ejemplos resueltos sobre la app y cierre conceptual.</a:t>
             </a:r>
           </a:p>
         </p:txBody>
@@ -5619,7 +5619,7 @@
                 </a:solidFill>
                 <a:latin typeface="Calibri"/>
               </a:rPr>
-              <a:t>–   Un ejemplo completo para CloudLite Turnos es: «Elegimos un monolito modular porque el equipo es de 1 persona y el dominio tiene 3 capacidades</a:t>
+              <a:t>–   Un ejemplo completo para la app de turnos es: «Elegimos un monolito modular porque el equipo es de 1 persona y el dominio tiene 3 capacidades</a:t>
             </a:r>
           </a:p>
           <a:p>
@@ -6968,7 +6968,7 @@
                 </a:solidFill>
                 <a:latin typeface="Calibri"/>
               </a:rPr>
-              <a:t>Primer ejemplo: los tres contenedores de CloudLite Turnos</a:t>
+              <a:t>Primer ejemplo: los tres contenedores de la app de turnos</a:t>
             </a:r>
           </a:p>
         </p:txBody>
@@ -7007,7 +7007,7 @@
                 </a:solidFill>
                 <a:latin typeface="Calibri"/>
               </a:rPr>
-              <a:t>–   CloudLite Turnos, el sistema de agendamiento de la barberia, empieza con tres contenedores: una aplicacion web que corre en el navegador del cliente, una API que atiende peticiones HTTP con cuerpo en formato JSON</a:t>
+              <a:t>–   la app de turnos, el sistema de agendamiento de la barberia, empieza con tres contenedores: una aplicacion web que corre en el navegador del cliente, una API que atiende peticiones HTTP con cuerpo en formato JSON</a:t>
             </a:r>
           </a:p>
           <a:p>
@@ -7634,7 +7634,7 @@
                 </a:solidFill>
                 <a:latin typeface="Calibri"/>
               </a:rPr>
-              <a:t> Conceptos del tema, uno por lámina, con ejemplos sobre CloudLite.</a:t>
+              <a:t> Conceptos del tema, uno por lámina, con ejemplos sobre la app.</a:t>
             </a:r>
           </a:p>
           <a:p>
@@ -7938,7 +7938,7 @@
                 </a:solidFill>
                 <a:latin typeface="Calibri"/>
               </a:rPr>
-              <a:t>–   La diapositiva proyecta los tres contratos resueltos sobre CloudLite Turnos y conviene recorrerlos leyendo la cuarta columna en voz alta, porque es lo que hay que replicar.</a:t>
+              <a:t>–   La diapositiva proyecta los tres contratos resueltos sobre la app de turnos y conviene recorrerlos leyendo la cuarta columna en voz alta, porque es lo que hay que replicar.</a:t>
             </a:r>
           </a:p>
           <a:p>
@@ -9246,7 +9246,7 @@
                 </a:solidFill>
                 <a:latin typeface="Calibri"/>
               </a:rPr>
-              <a:t>–   En CloudLite eso es literal: si el reintento de crear turno no es idempotente, el cliente termina con dos reservas para el mismo horario, y la solucion habitual es que la peticion lleve un identificador unico que el servidor reconozca como repetido.</a:t>
+              <a:t>–   En la app eso es literal: si el reintento de crear turno no es idempotente, el cliente termina con dos reservas para el mismo horario, y la solucion habitual es que la peticion lleve un identificador unico que el servidor reconozca como repetido.</a:t>
             </a:r>
           </a:p>
           <a:p>
@@ -9562,7 +9562,7 @@
                 </a:solidFill>
                 <a:latin typeface="Calibri"/>
               </a:rPr>
-              <a:t>–   La postura honesta para este curso es que un CloudLite con una base de datos compartida y propiedad de tablas claramente documentada resulta aceptable</a:t>
+              <a:t>–   La postura honesta para este curso es que un la app con una base de datos compartida y propiedad de tablas claramente documentada resulta aceptable</a:t>
             </a:r>
           </a:p>
         </p:txBody>
@@ -9830,7 +9830,7 @@
                 </a:solidFill>
                 <a:latin typeface="Calibri"/>
               </a:rPr>
-              <a:t>–   En CloudLite Turnos la tabla de turnos es de la API de turnos, y el worker de avisos no la toca: recibe por la cola el dato que necesita.</a:t>
+              <a:t>–   En la app de turnos la tabla de turnos es de la API de turnos, y el worker de avisos no la toca: recibe por la cola el dato que necesita.</a:t>
             </a:r>
           </a:p>
           <a:p>
@@ -10098,7 +10098,7 @@
                 </a:solidFill>
                 <a:latin typeface="Calibri"/>
               </a:rPr>
-              <a:t>–   En CloudLite Turnos, si se cae el trabajador de notificaciones, los turnos se siguen reservando y lo que se pierde es el correo de confirmacion; si se cae la base de turnos, no se reserva nada</a:t>
+              <a:t>–   En la app de turnos, si se cae el trabajador de notificaciones, los turnos se siguen reservando y lo que se pierde es el correo de confirmacion; si se cae la base de turnos, no se reserva nada</a:t>
             </a:r>
           </a:p>
           <a:p>
@@ -10650,7 +10650,7 @@
                 </a:solidFill>
                 <a:latin typeface="Calibri"/>
               </a:rPr>
-              <a:t>–   Modelar CloudLite en </a:t>
+              <a:t>–   Modelar la app en </a:t>
             </a:r>
             <a:r>
               <a:rPr sz="2000" b="1" i="0">
@@ -12164,7 +12164,7 @@
                 </a:solidFill>
                 <a:latin typeface="Calibri"/>
               </a:rPr>
-              <a:t>  subgraph cloudlite[CloudLite App]</a:t>
+              <a:t>  subgraph turnos[la app]</a:t>
             </a:r>
           </a:p>
           <a:p>
@@ -14665,7 +14665,7 @@
                 </a:solidFill>
                 <a:latin typeface="Calibri"/>
               </a:rPr>
-              <a:t>title Diagrama de contenedores - CloudLite Turnos</a:t>
+              <a:t>title Diagrama de contenedores - la app de turnos</a:t>
             </a:r>
           </a:p>
           <a:p>
@@ -14697,7 +14697,7 @@
                 </a:solidFill>
                 <a:latin typeface="Calibri"/>
               </a:rPr>
-              <a:t>System_Boundary(cloudlite, "CloudLite App") {</a:t>
+              <a:t>System_Boundary(turnos, "la app") {</a:t>
             </a:r>
           </a:p>
           <a:p>
@@ -15988,7 +15988,7 @@
                 </a:solidFill>
                 <a:latin typeface="Calibri"/>
               </a:rPr>
-              <a:t>Monolito vs microservicios (para el PI)</a:t>
+              <a:t>Monolito vs microservicios ()</a:t>
             </a:r>
           </a:p>
         </p:txBody>
@@ -16395,7 +16395,7 @@
                 </a:solidFill>
                 <a:latin typeface="Calibri"/>
               </a:rPr>
-              <a:t>Modelar CloudLite en C4 Container (Mermaid) con 2–5 cajas justificadas.</a:t>
+              <a:t>Modelar la app en C4 Container (Mermaid) con 2–5 cajas justificadas.</a:t>
             </a:r>
           </a:p>
           <a:p>
@@ -16982,7 +16982,7 @@
                 </a:solidFill>
                 <a:latin typeface="Calibri"/>
               </a:rPr>
-              <a:t>Los tres contratos de CloudLite: cuatro datos por fila</a:t>
+              <a:t>Los tres contratos de la app: cuatro datos por fila</a:t>
             </a:r>
           </a:p>
         </p:txBody>
@@ -18048,7 +18048,7 @@
                 </a:solidFill>
                 <a:latin typeface="Calibri"/>
               </a:rPr>
-              <a:t>–   La Clase 1 le dejo una caja negra llamada CloudLite App con actores y sistemas externos alrededor.</a:t>
+              <a:t>–   La Clase 1 le dejo una caja negra llamada Turnos con actores y sistemas externos alrededor.</a:t>
             </a:r>
           </a:p>
           <a:p>

--- a/Arquitectura de Sistemas Computacionales/Clases/Clase 4 - Microservicios y arquitecturas distribuidas/Presentacion.pptx
+++ b/Arquitectura de Sistemas Computacionales/Clases/Clase 4 - Microservicios y arquitecturas distribuidas/Presentacion.pptx
@@ -13,8 +13,8 @@
     <p:sldId id="261" r:id="rId12"/>
     <p:sldId id="262" r:id="rId13"/>
     <p:sldId id="263" r:id="rId14"/>
-    <p:sldId id="264" r:id="rId15"/>
-    <p:sldId id="265" r:id="rId16"/>
+    <p:sldId id="264" r:id="rId16"/>
+    <p:sldId id="265" r:id="rId17"/>
     <p:sldId id="266" r:id="rId18"/>
     <p:sldId id="267" r:id="rId19"/>
     <p:sldId id="268" r:id="rId20"/>
@@ -40,11 +40,6 @@
     <p:sldId id="288" r:id="rId40"/>
     <p:sldId id="289" r:id="rId41"/>
     <p:sldId id="290" r:id="rId42"/>
-    <p:sldId id="291" r:id="rId43"/>
-    <p:sldId id="292" r:id="rId44"/>
-    <p:sldId id="293" r:id="rId45"/>
-    <p:sldId id="294" r:id="rId46"/>
-    <p:sldId id="295" r:id="rId47"/>
   </p:sldIdLst>
   <p:sldSz cx="12191695" cy="6858000" type="screen4x3"/>
   <p:notesSz cx="6858000" cy="9144000"/>
@@ -541,31 +536,125 @@
           <a:lstStyle/>
           <a:p>
             <a:r>
-              <a:t>Empecemos por el termino que el estudiante trae con mala fama.</a:t>
+              <a:t>(No se proyecta) La Clase 3 dejo al estudiante con una unidad de despliegue concreta en las manos: una imagen que se ejecuta como contenedor.</a:t>
             </a:r>
           </a:p>
           <a:p/>
           <a:p>
             <a:r>
-              <a:t>La palabra decisiva es independiente, y admite una prueba de una linea que el docente debe usar como criterio de correccion: si para poner en produccion el servicio A hay que desplegar tambien el servicio B, entonces A y B no son dos microservicios, son un solo sistema partido en dos repositorios, con todos los costos de la distribucion y ninguno de sus beneficios.</a:t>
+              <a:t>(No se proyecta) La Clase 1 le dejo una caja negra llamada CloudLite App con actores y sistemas externos alrededor.</a:t>
             </a:r>
           </a:p>
           <a:p/>
           <a:p>
             <a:r>
-              <a:t>La decision se sostiene con exactamente dos criterios.</a:t>
+              <a:t>(No se proyecta) La pregunta que organiza la clase no es que son los microservicios, sino una mas incomoda y mas util: cada vez que un sistema se parte en dos, se gana algo y se paga algo, y hoy hay que decir explicitamente que se gana y que se paga.</a:t>
             </a:r>
           </a:p>
           <a:p/>
           <a:p>
             <a:r>
-              <a:t>La razon de fondo es la que se repite en el cierre: la cantidad de servicios que una organizacion sostiene es funcion del numero de equipos autonomos, no del gusto por la modularidad.</a:t>
+              <a:t>(No se proyecta) Un estudiante que solo aprende la primera mitad de esa frase sale convencido de que mas servicios es mejor arquitectura, que es exactamente el error que esta clase debe prevenir.</a:t>
+            </a:r>
+          </a:p>
+        </p:txBody>
+      </p:sp>
+      <p:sp>
+        <p:nvSpPr>
+          <p:cNvPr id="4" name="Slide Number Placeholder 3"/>
+          <p:cNvSpPr>
+            <a:spLocks noGrp="1"/>
+          </p:cNvSpPr>
+          <p:nvPr>
+            <p:ph type="sldNum" idx="5" sz="quarter"/>
+          </p:nvPr>
+        </p:nvSpPr>
+        <p:spPr/>
+      </p:sp>
+    </p:spTree>
+  </p:cSld>
+  <p:clrMapOvr>
+    <a:masterClrMapping/>
+  </p:clrMapOvr>
+</p:notes>
+</file>
+
+<file path=ppt/notesSlides/notesSlide10.xml><?xml version="1.0" encoding="utf-8"?>
+<p:notes xmlns:a="http://schemas.openxmlformats.org/drawingml/2006/main" xmlns:p="http://schemas.openxmlformats.org/presentationml/2006/main" xmlns:r="http://schemas.openxmlformats.org/officeDocument/2006/relationships">
+  <p:cSld>
+    <p:spTree>
+      <p:nvGrpSpPr>
+        <p:cNvPr id="1" name=""/>
+        <p:cNvGrpSpPr/>
+        <p:nvPr/>
+      </p:nvGrpSpPr>
+      <p:grpSpPr>
+        <a:xfrm>
+          <a:off x="0" y="0"/>
+          <a:ext cx="0" cy="0"/>
+          <a:chOff x="0" y="0"/>
+          <a:chExt cx="0" cy="0"/>
+        </a:xfrm>
+      </p:grpSpPr>
+      <p:sp>
+        <p:nvSpPr>
+          <p:cNvPr id="2" name="Slide Image Placeholder 1"/>
+          <p:cNvSpPr>
+            <a:spLocks noGrp="1"/>
+          </p:cNvSpPr>
+          <p:nvPr>
+            <p:ph type="sldImg" idx="2"/>
+          </p:nvPr>
+        </p:nvSpPr>
+        <p:spPr/>
+      </p:sp>
+      <p:sp>
+        <p:nvSpPr>
+          <p:cNvPr id="3" name="Notes Placeholder 2"/>
+          <p:cNvSpPr>
+            <a:spLocks noGrp="1"/>
+          </p:cNvSpPr>
+          <p:nvPr>
+            <p:ph type="body" idx="3" sz="quarter"/>
+          </p:nvPr>
+        </p:nvSpPr>
+        <p:spPr/>
+        <p:txBody>
+          <a:bodyPr/>
+          <a:lstStyle/>
+          <a:p>
+            <a:r>
+              <a:t>El primero pregunta que se cae.</a:t>
             </a:r>
           </a:p>
           <a:p/>
           <a:p>
             <a:r>
-              <a:t>Esa frase tiene decision, 2 criterios y las 2 mitades del trade-off.</a:t>
+              <a:t>El segundo pregunta cuantos saltos de red tiene una operacion de punta a punta, y se responde con un numero, contado sobre el propio dibujo.</a:t>
+            </a:r>
+          </a:p>
+          <a:p/>
+          <a:p>
+            <a:r>
+              <a:t>(No se proyecta) Conviene dictarlos asi, porque un estudiante que entiende por que son esos tres no escribe generalidades.</a:t>
+            </a:r>
+          </a:p>
+          <a:p/>
+          <a:p>
+            <a:r>
+              <a:t>(No se proyecta) «Se cae todo» vale la mitad de los puntos, y con razon: en un sistema bien partido nunca se cae todo, y el ejercicio consiste precisamente en descubrir que algunas cosas sobreviven.</a:t>
+            </a:r>
+          </a:p>
+          <a:p/>
+          <a:p>
+            <a:r>
+              <a:t>(No se proyecta) Ese razonamiento es el que en la Clase 7 permite decidir que va en cada zona de red y en la Clase 13 que pieza vale la pena replicar.</a:t>
+            </a:r>
+          </a:p>
+          <a:p/>
+          <a:p>
+            <a:r>
+              <a:t>(No se proyecta) Devolverle el diagrama es mas util que darle un ejemplo.</a:t>
             </a:r>
           </a:p>
         </p:txBody>
@@ -635,19 +724,55 @@
           <a:lstStyle/>
           <a:p>
             <a:r>
-              <a:t>Nombre, tecnologia y responsabilidad en una frase.</a:t>
+              <a:t>La decision se sostiene con exactamente dos criterios.</a:t>
             </a:r>
           </a:p>
           <a:p/>
           <a:p>
             <a:r>
-              <a:t>«HTTP» a secas no dice como viajan los datos y «SQL» a secas no dice sobre que transporte; con las dos mitades, cualquiera que lea el diagrama sabe por donde puede romperse.</a:t>
+              <a:t>La razon de fondo es la que se repite en el cierre: la cantidad de servicios que una organizacion sostiene es funcion del numero de equipos autonomos, no del gusto por la modularidad.</a:t>
             </a:r>
           </a:p>
           <a:p/>
           <a:p>
             <a:r>
-              <a:t>(Sobre la actividad, no se proyecta) Antes del ejemplo conviene fijar las tres reglas con las que se corrige el diagrama, porque cada una tiene puntos asignados y las tres se pierden por descuido y no por no saber.</a:t>
+              <a:t>Esa frase tiene decision, 2 criterios y las 2 mitades del trade-off.</a:t>
+            </a:r>
+          </a:p>
+          <a:p/>
+          <a:p>
+            <a:r>
+              <a:t>El modular conserva la opcion de extraer un servicio despues.</a:t>
+            </a:r>
+          </a:p>
+          <a:p/>
+          <a:p>
+            <a:r>
+              <a:t>(No se proyecta) Empecemos por el termino que el estudiante trae con mala fama.</a:t>
+            </a:r>
+          </a:p>
+          <a:p/>
+          <a:p>
+            <a:r>
+              <a:t>(No se proyecta) La palabra decisiva es independiente, y admite una prueba de una linea que el docente debe usar como criterio de correccion: si para poner en produccion el servicio A hay que desplegar tambien el servicio B, entonces A y B no son dos microservicios, son un solo sistema partido en dos repositorios, con todos los costos de la distribucion y ninguno de sus beneficios.</a:t>
+            </a:r>
+          </a:p>
+          <a:p/>
+          <a:p>
+            <a:r>
+              <a:t>(No se proyecta) Aqui hay que repetir la advertencia de la clase pasada, porque es la fuente numero uno de confusion: contenedor en C4 no significa contenedor de Docker.</a:t>
+            </a:r>
+          </a:p>
+          <a:p/>
+          <a:p>
+            <a:r>
+              <a:t>(No se proyecta) Con eso claro, lo primero que el estudiante entrega hoy es la decision, y tiene una forma exigida que conviene dictar literal porque se corrige asi.</a:t>
+            </a:r>
+          </a:p>
+          <a:p/>
+          <a:p>
+            <a:r>
+              <a:t>(No se proyecta) Sin la segunda mitad no hubo decision, hubo una justificacion escrita despues de los hechos —el mismo defecto que la Clase 2 senalaba en los ADR sin consecuencias negativas—.</a:t>
             </a:r>
           </a:p>
         </p:txBody>
@@ -717,25 +842,37 @@
           <a:lstStyle/>
           <a:p>
             <a:r>
-              <a:t>Vale la pena decir en voz alta que aqui el uso de una IA es legitimo y ademas recomendado: pasar un boceto a codigo Mermaid es justo la tarea mecanica en la que ayuda sin sustituir el criterio.</a:t>
+              <a:t>Nombre, tecnologia y responsabilidad en una frase.</a:t>
             </a:r>
           </a:p>
           <a:p/>
           <a:p>
             <a:r>
-              <a:t>Lo que NO delega el estudiante es la revision, y hay tres cosas que tiene que verificar el mismo antes de enviar, porque son las que la IA equivoca con frecuencia: que la primera linea sea C4Container, que la base de datos haya quedado como ContainerDb y no como Container, y que ninguna relacion haya perdido la mitad de su etiqueta.</a:t>
+              <a:t>«HTTP» a secas no dice como viajan los datos y «SQL» a secas no dice sobre que transporte; con las dos mitades, cualquiera que lea el diagrama sabe por donde puede romperse.</a:t>
             </a:r>
           </a:p>
           <a:p/>
           <a:p>
             <a:r>
-              <a:t>(Sobre la actividad, no se proyecta) Eso cambia lo que el docente tiene que ensenar, porque un boceto correcto escrito con la sintaxis equivocada no renderiza y entonces no hay diagrama que calificar.</a:t>
+              <a:t>(No se proyecta) Antes del ejemplo conviene fijar las tres reglas con las que se corrige el diagrama, porque cada una tiene puntos asignados y las tres se pierden por descuido y no por no saber.</a:t>
             </a:r>
           </a:p>
           <a:p/>
           <a:p>
             <a:r>
-              <a:t>(Sobre la actividad, no se proyecta) Un codigo que no renderiza vale cero, y es el unico punto del taller donde el estudiante puede comprobar su propia nota antes de entregar.</a:t>
+              <a:t>(No se proyecta) Y hay una cuarta condicion que no es del nivel sino de la continuidad del proyecto: los nombres tienen que ser IDENTICOS a los del C4 Context de la Clase 1.</a:t>
+            </a:r>
+          </a:p>
+          <a:p/>
+          <a:p>
+            <a:r>
+              <a:t>(No se proyecta) No es pedanteria de notacion; es lo unico que permite afirmar que los dos dibujos son el mismo sistema visto desde distinta altura, y es exactamente lo que se volvera a verificar en la Clase 7 contra el diagrama de despliegue y en la Clase 11 en la auditoria del paquete.</a:t>
+            </a:r>
+          </a:p>
+          <a:p/>
+          <a:p>
+            <a:r>
+              <a:t>(No se proyecta) Ese es el error de dibujo mas comun de la clase, meter al usuario o a la pasarela de pagos dentro del sistema propio, y se detecta en dos segundos preguntando quien lo opera.</a:t>
             </a:r>
           </a:p>
         </p:txBody>
@@ -805,31 +942,37 @@
           <a:lstStyle/>
           <a:p>
             <a:r>
-              <a:t>Primer ejemplo concreto, y conviene construirlo en el tablero en vivo.</a:t>
+              <a:t>(No se proyecta) Eso cambia lo que el docente tiene que ensenar, porque un boceto correcto escrito con la sintaxis equivocada no renderiza y entonces no hay diagrama que calificar.</a:t>
             </a:r>
           </a:p>
           <a:p/>
           <a:p>
             <a:r>
-              <a:t>La flecha entre la web y la API dice «HTTPS/JSON, consulta disponibilidad y crea reservas»; la flecha entre la API y la base de datos dice «TCP, lee y escribe turnos».</a:t>
+              <a:t>(No se proyecta) Son cinco reglas de escritura y conviene recorrerlas sobre la diapositiva, linea por linea.</a:t>
             </a:r>
           </a:p>
           <a:p/>
           <a:p>
             <a:r>
-              <a:t>Con eso ya existe un diagrama valido y defendible.</a:t>
+              <a:t>(No se proyecta) C4Context es el nivel de la Clase 1 y graph TD es otro tipo de diagrama, y cualquiera de los dos deja la respuesta en el nivel equivocado.</a:t>
             </a:r>
           </a:p>
           <a:p/>
           <a:p>
             <a:r>
-              <a:t>Si la API espera ese envio antes de responder, la reserva de un turno hereda esa latencia y ese riesgo.</a:t>
+              <a:t>(No se proyecta) Vale la pena decir en voz alta que aqui el uso de una IA es legitimo y ademas recomendado: pasar un boceto a codigo Mermaid es justo la tarea mecanica en la que ayuda sin sustituir el criterio.</a:t>
             </a:r>
           </a:p>
           <a:p/>
           <a:p>
             <a:r>
-              <a:t>Esa es una razon legitima para separar: se agrega una cola de mensajes y un trabajador de notificaciones, la API escribe el turno, publica un mensaje y responde en decenas de milisegundos, y el trabajador envia el correo despues, con reintentos si falla.</a:t>
+              <a:t>(No se proyecta) Lo que NO delega el estudiante es la revision, y hay tres cosas que tiene que verificar el mismo antes de enviar, porque son las que la IA equivoca con frecuencia: que la primera linea sea C4Container, que la base de datos haya quedado como ContainerDb y no como Container, y que ninguna relacion haya perdido la mitad de su etiqueta.</a:t>
+            </a:r>
+          </a:p>
+          <a:p/>
+          <a:p>
+            <a:r>
+              <a:t>(No se proyecta) Un codigo que no renderiza vale cero, y es el unico punto del taller donde el estudiante puede comprobar su propia nota antes de entregar.</a:t>
             </a:r>
           </a:p>
         </p:txBody>
@@ -899,13 +1042,31 @@
           <a:lstStyle/>
           <a:p>
             <a:r>
-              <a:t>Conviene tambien tener a mano la diferencia con sus vecinos, porque se confunden: 400 es que la peticion esta mal formada, 401 que no se sabe quien eres, 403 que se sabe y no te corresponde, 404 que no existe, 422 que esta bien formada pero sus datos no pasan una validacion, y 409 que choca con el estado actual.</a:t>
+              <a:t>La flecha entre la web y la API dice «HTTPS/JSON, consulta disponibilidad y crea reservas»; la flecha entre la API y la base de datos dice «TCP, lee y escribe turnos».</a:t>
             </a:r>
           </a:p>
           <a:p/>
           <a:p>
             <a:r>
-              <a:t>(Sobre la actividad, no se proyecta) Dos exigencias mas, que valen puntos y se pierden sin darse cuenta.</a:t>
+              <a:t>Con eso ya existe un diagrama valido y defendible.</a:t>
+            </a:r>
+          </a:p>
+          <a:p/>
+          <a:p>
+            <a:r>
+              <a:t>Si la API espera ese envio antes de responder, la reserva de un turno hereda esa latencia y ese riesgo.</a:t>
+            </a:r>
+          </a:p>
+          <a:p/>
+          <a:p>
+            <a:r>
+              <a:t>Esa es una razon legitima para separar: se agrega una cola de mensajes y un trabajador de notificaciones, la API escribe el turno, publica un mensaje y responde en decenas de milisegundos, y el trabajador envia el correo despues, con reintentos si falla.</a:t>
+            </a:r>
+          </a:p>
+          <a:p/>
+          <a:p>
+            <a:r>
+              <a:t>(No se proyecta) Primer ejemplo concreto, y conviene construirlo en el tablero en vivo.</a:t>
             </a:r>
           </a:p>
         </p:txBody>
@@ -975,13 +1136,31 @@
           <a:lstStyle/>
           <a:p>
             <a:r>
-              <a:t>De ahi salen cuatro mecanismos que el diagrama y la tabla deben poder mencionar.</a:t>
+              <a:t>(No se proyecta) Un 500 no es un error de negocio, es una falla del sistema; nadie lo disena, y por eso poner 500 en esa columna es la senal de que el estudiante no distinguio las dos cosas.</a:t>
             </a:r>
           </a:p>
           <a:p/>
           <a:p>
             <a:r>
-              <a:t>Los reintentos exigen idempotencia, que significa que ejecutar la misma operacion dos veces produzca el mismo resultado que ejecutarla una vez.</a:t>
+              <a:t>(No se proyecta) La diapositiva proyecta los tres contratos resueltos sobre CloudLite Turnos y conviene recorrerlos leyendo la cuarta columna en voz alta, porque es lo que hay que replicar.</a:t>
+            </a:r>
+          </a:p>
+          <a:p/>
+          <a:p>
+            <a:r>
+              <a:t>(No se proyecta) Dos exigencias mas, que valen puntos y se pierden sin darse cuenta.</a:t>
+            </a:r>
+          </a:p>
+          <a:p/>
+          <a:p>
+            <a:r>
+              <a:t>(No se proyecta) Conviene tambien tener a mano la diferencia con sus vecinos, porque se confunden: 400 es que la peticion esta mal formada, 401 que no se sabe quien eres, 403 que se sabe y no te corresponde, 404 que no existe, 422 que esta bien formada pero sus datos no pasan una validacion, y 409 que choca con el estado actual.</a:t>
+            </a:r>
+          </a:p>
+          <a:p/>
+          <a:p>
+            <a:r>
+              <a:t>(No se proyecta) Tres filas que digan «App web → API» describen un solo canal contado tres veces, y lo que se esta evaluando es si el estudiante entendio que su sistema tiene varias fronteras.</a:t>
             </a:r>
           </a:p>
         </p:txBody>
@@ -1051,7 +1230,7 @@
           <a:lstStyle/>
           <a:p>
             <a:r>
-              <a:t>Eso introduce consistencia eventual, es decir un lapso durante el cual dos partes del sistema tienen versiones distintas de la verdad, con consecuencias visibles para el usuario.</a:t>
+              <a:t>(No se proyecta) Hay una aritmetica que conviene mostrar porque impresiona con razon: si una peticion del usuario atraviesa en cadena cinco servicios y cada uno esta disponible el 99,9 % del tiempo, la disponibilidad del recorrido completo es 0,999 elevado a la quinta potencia, alrededor del 99,5 %, lo que pasa de unos 43 minutos de indisponibilidad al mes a mas de tres horas.</a:t>
             </a:r>
           </a:p>
         </p:txBody>
@@ -1121,25 +1300,13 @@
           <a:lstStyle/>
           <a:p>
             <a:r>
-              <a:t>Conviene dictarlos asi, porque un estudiante que entiende por que son esos tres no escribe generalidades.</a:t>
+              <a:t>De ahi salen cuatro mecanismos que el diagrama y la tabla deben poder mencionar.</a:t>
             </a:r>
           </a:p>
           <a:p/>
           <a:p>
             <a:r>
-              <a:t>El primero pregunta que se cae.</a:t>
-            </a:r>
-          </a:p>
-          <a:p/>
-          <a:p>
-            <a:r>
-              <a:t>El segundo pregunta cuantos saltos de red tiene una operacion de punta a punta, y se responde con un numero, contado sobre el propio dibujo.</a:t>
-            </a:r>
-          </a:p>
-          <a:p/>
-          <a:p>
-            <a:r>
-              <a:t>(Sobre la actividad, no se proyecta) «Se cae todo» vale la mitad de los puntos, y con razon: en un sistema bien partido nunca se cae todo, y el ejercicio consiste precisamente en descubrir que algunas cosas sobreviven.</a:t>
+              <a:t>Los reintentos exigen idempotencia, que significa que ejecutar la misma operacion dos veces produzca el mismo resultado que ejecutarla una vez.</a:t>
             </a:r>
           </a:p>
         </p:txBody>
@@ -1209,19 +1376,13 @@
           <a:lstStyle/>
           <a:p>
             <a:r>
-              <a:t>Conviene cerrar ubicando el curso: este diagrama es el ultimo insumo del Parcial 1 de la Clase 5; en la Clase 6 cada flecha se convertira en una superficie de ataque que hay que proteger; en la Clase 7 estas mismas cajas se reubicaran en un diagrama de despliegue con zonas publicas y privadas, conservando exactamente los mismos nombres; en la Clase 8 cada contenedor implicara su propio pipeline de integracion continua; y en las Clases 12 y 13 se preguntara cual de estas piezas es el cuello de botella y cual se puede replicar.</a:t>
+              <a:t>Eso introduce consistencia eventual, es decir un lapso durante el cual dos partes del sistema tienen versiones distintas de la verdad, con consecuencias visibles para el usuario.</a:t>
             </a:r>
           </a:p>
           <a:p/>
           <a:p>
             <a:r>
-              <a:t>El numero de servicios no mide calidad arquitectonica; la justificacion de cada frontera si.</a:t>
-            </a:r>
-          </a:p>
-          <a:p/>
-          <a:p>
-            <a:r>
-              <a:t>(Sobre la actividad, no se proyecta) No; esta mal hacerlo sin saber que se eligio, y un monolito modular bien argumentado recibe mejor calificacion que cinco servicios sin razon.</a:t>
+              <a:t>(No se proyecta) La postura honesta para este curso es que un CloudLite con una base de datos compartida y propiedad de tablas claramente documentada resulta aceptable, siempre que el estudiante lo registre como un trade-off consciente en su informe y no lo presente como microservicios puros.</a:t>
             </a:r>
           </a:p>
         </p:txBody>
@@ -4696,7 +4857,7 @@
                 </a:solidFill>
                 <a:latin typeface="Calibri"/>
               </a:rPr>
-              <a:t>Monolito: lo que la palabra realmente significa (1/4)</a:t>
+              <a:t>Monolito: lo que la palabra realmente significa (2/4)</a:t>
             </a:r>
           </a:p>
         </p:txBody>
@@ -4735,7 +4896,7 @@
                 </a:solidFill>
                 <a:latin typeface="Calibri"/>
               </a:rPr>
-              <a:t>–   Un monolito es un sistema que se despliega como una sola unidad: todo su codigo se construye junto y sale al aire junto.</a:t>
+              <a:t>–   Con tres datos obligatorios por caja (nombre, tecnologia y responsabilidad en una frase) y cada flecha etiquetada con protocolo y formato, nunca una linea muda.</a:t>
             </a:r>
           </a:p>
           <a:p>
@@ -4751,7 +4912,7 @@
                 </a:solidFill>
                 <a:latin typeface="Calibri"/>
               </a:rPr>
-              <a:t>–   No es un insulto ni un error, es la arquitectura correcta por defecto para la mayoria de los sistemas pequenos, y varios proyectos de este curso deberian ser monolitos bien organizados.</a:t>
+              <a:t>–   Una aplicacion web de una sola pagina que corre en el navegador, una API, una base de datos gestionada, una cola de mensajes y un proceso trabajador en segundo plano son cinco contenedores C4, aunque solo dos de ellos esten dockerizados.</a:t>
             </a:r>
           </a:p>
           <a:p>
@@ -4767,7 +4928,7 @@
                 </a:solidFill>
                 <a:latin typeface="Calibri"/>
               </a:rPr>
-              <a:t>–   Un microservicio, en cambio, es una unidad de despliegue independiente con una frontera de responsabilidad de negocio propia.</a:t>
+              <a:t>–   Confundirlo lleva al estudiante a creer que debe empaquetar cada caja con Docker para que el diagrama sea valido, lo cual no es cierto y desvia el trabajo de la semana hacia una tarea que nadie pidio.</a:t>
             </a:r>
           </a:p>
           <a:p>
@@ -4783,23 +4944,7 @@
                 </a:solidFill>
                 <a:latin typeface="Calibri"/>
               </a:rPr>
-              <a:t>–   Tres senales de una frontera real: el servicio es dueno de sus propios datos, puede liberarse a su propio ritmo y corresponde a una capacidad de negocio que se puede nombrar sin usar palabras tecnicas.</a:t>
-            </a:r>
-          </a:p>
-          <a:p>
-            <a:pPr>
-              <a:spcAft>
-                <a:spcPts val="800"/>
-              </a:spcAft>
-            </a:pPr>
-            <a:r>
-              <a:rPr sz="2000" b="0" i="0">
-                <a:solidFill>
-                  <a:srgbClr val="333333"/>
-                </a:solidFill>
-                <a:latin typeface="Calibri"/>
-              </a:rPr>
-              <a:t>–   En cuanto a la notacion, el nivel de contenedores del modelo C4 pide dibujar, dentro del sistema, cada cosa que se ejecuta o almacena de forma independiente</a:t>
+              <a:t>–   Es UNA frase y elige UNA de las dos opciones: monolito modular o microservicios.</a:t>
             </a:r>
           </a:p>
         </p:txBody>
@@ -4980,7 +5125,7 @@
                 </a:solidFill>
                 <a:latin typeface="Calibri"/>
               </a:rPr>
-              <a:t>Monolito: lo que la palabra realmente significa (2/4)</a:t>
+              <a:t>Monolito: lo que la palabra realmente significa (3/4)</a:t>
             </a:r>
           </a:p>
         </p:txBody>
@@ -5019,7 +5164,7 @@
                 </a:solidFill>
                 <a:latin typeface="Calibri"/>
               </a:rPr>
-              <a:t>–   Con tres datos obligatorios por caja (nombre, tecnologia y responsabilidad en una frase) y cada flecha etiquetada con protocolo y formato, nunca una linea muda.</a:t>
+              <a:t>–   «Un poco de los dos» no es una respuesta: no es una posicion intermedia sensata, es la frase de quien no decidio, y un sistema no se puede desplegar de las dos formas a la vez.</a:t>
             </a:r>
           </a:p>
           <a:p>
@@ -5035,7 +5180,7 @@
                 </a:solidFill>
                 <a:latin typeface="Calibri"/>
               </a:rPr>
-              <a:t>–   Aqui hay que repetir la advertencia de la clase pasada, porque es la fuente numero uno de confusion: contenedor en C4 no significa contenedor de Docker.</a:t>
+              <a:t>–   El primero es el tamano del equipo, y se exige CON numero y CON plazo: «somos dos personas y tenemos doce semanas» es un criterio</a:t>
             </a:r>
           </a:p>
           <a:p>
@@ -5051,7 +5196,7 @@
                 </a:solidFill>
                 <a:latin typeface="Calibri"/>
               </a:rPr>
-              <a:t>–   Una aplicacion web de una sola pagina que corre en el navegador, una API, una base de datos gestionada, una cola de mensajes y un proceso trabajador en segundo plano son cinco contenedores C4, aunque solo dos de ellos esten dockerizados.</a:t>
+              <a:t>–   «el equipo es pequeno» no lo es, porque no permite verificar nada.</a:t>
             </a:r>
           </a:p>
           <a:p>
@@ -5067,7 +5212,23 @@
                 </a:solidFill>
                 <a:latin typeface="Calibri"/>
               </a:rPr>
-              <a:t>–   Confundirlo lleva al estudiante a creer que debe empaquetar cada caja con Docker para que el diagrama sea valido, lo cual no es cierto y desvia el trabajo de la semana hacia una tarea que nadie pidio.</a:t>
+              <a:t>–   El segundo criterio es el acoplamiento, y se responde diciendo QUE partes cambian juntas: si al tocar el calendario de disponibilidad hay que tocar tambien el registro de clientes, esas dos cosas no son dos servicios.</a:t>
+            </a:r>
+          </a:p>
+          <a:p>
+            <a:pPr>
+              <a:spcAft>
+                <a:spcPts val="800"/>
+              </a:spcAft>
+            </a:pPr>
+            <a:r>
+              <a:rPr sz="2000" b="0" i="0">
+                <a:solidFill>
+                  <a:srgbClr val="333333"/>
+                </a:solidFill>
+                <a:latin typeface="Calibri"/>
+              </a:rPr>
+              <a:t>–   Y la frase se cierra con las dos mitades del trade-off: lo que se gana y lo que se pierde.</a:t>
             </a:r>
           </a:p>
         </p:txBody>
@@ -5248,7 +5409,7 @@
                 </a:solidFill>
                 <a:latin typeface="Calibri"/>
               </a:rPr>
-              <a:t>Monolito: lo que la palabra realmente significa (3/4)</a:t>
+              <a:t>Monolito: lo que la palabra realmente significa (4/4)</a:t>
             </a:r>
           </a:p>
         </p:txBody>
@@ -5287,7 +5448,7 @@
                 </a:solidFill>
                 <a:latin typeface="Calibri"/>
               </a:rPr>
-              <a:t>–   Con eso claro, lo primero que el estudiante entrega hoy es la decision, y tiene una forma exigida que conviene dictar literal porque se corrige asi.</a:t>
+              <a:t>–   Un ejemplo completo para la app de turnos es: «Elegimos un monolito modular porque el equipo es de 1 persona y el dominio tiene 3 capacidades</a:t>
             </a:r>
           </a:p>
           <a:p>
@@ -5303,7 +5464,7 @@
                 </a:solidFill>
                 <a:latin typeface="Calibri"/>
               </a:rPr>
-              <a:t>–   Es UNA frase y elige UNA de las dos opciones: monolito modular o microservicios.</a:t>
+              <a:t>–   Ganamos un solo despliegue y transacciones simples; perdemos la posibilidad de escalar el envio de avisos por separado».</a:t>
             </a:r>
           </a:p>
           <a:p>
@@ -5319,55 +5480,7 @@
                 </a:solidFill>
                 <a:latin typeface="Calibri"/>
               </a:rPr>
-              <a:t>–   «Un poco de los dos» no es una respuesta: no es una posicion intermedia sensata, es la frase de quien no decidio, y un sistema no se puede desplegar de las dos formas a la vez.</a:t>
-            </a:r>
-          </a:p>
-          <a:p>
-            <a:pPr>
-              <a:spcAft>
-                <a:spcPts val="800"/>
-              </a:spcAft>
-            </a:pPr>
-            <a:r>
-              <a:rPr sz="2000" b="0" i="0">
-                <a:solidFill>
-                  <a:srgbClr val="333333"/>
-                </a:solidFill>
-                <a:latin typeface="Calibri"/>
-              </a:rPr>
-              <a:t>–   El primero es el tamano del equipo, y se exige CON numero y CON plazo: «somos dos personas y tenemos doce semanas» es un criterio</a:t>
-            </a:r>
-          </a:p>
-          <a:p>
-            <a:pPr>
-              <a:spcAft>
-                <a:spcPts val="800"/>
-              </a:spcAft>
-            </a:pPr>
-            <a:r>
-              <a:rPr sz="2000" b="0" i="0">
-                <a:solidFill>
-                  <a:srgbClr val="333333"/>
-                </a:solidFill>
-                <a:latin typeface="Calibri"/>
-              </a:rPr>
-              <a:t>–   «el equipo es pequeno» no lo es, porque no permite verificar nada.</a:t>
-            </a:r>
-          </a:p>
-          <a:p>
-            <a:pPr>
-              <a:spcAft>
-                <a:spcPts val="800"/>
-              </a:spcAft>
-            </a:pPr>
-            <a:r>
-              <a:rPr sz="2000" b="0" i="0">
-                <a:solidFill>
-                  <a:srgbClr val="333333"/>
-                </a:solidFill>
-                <a:latin typeface="Calibri"/>
-              </a:rPr>
-              <a:t>–   El segundo criterio es el acoplamiento, y se responde diciendo QUE partes cambian juntas: si al tocar el calendario de disponibilidad hay que tocar tambien el registro de clientes, esas dos cosas no son dos servicios.</a:t>
+              <a:t>–   Un monolito modular es un solo desplegable dividido por dentro en modulos con fronteras claras; es distinto del monolito enredado, donde cualquier parte llama a cualquier otra.</a:t>
             </a:r>
           </a:p>
         </p:txBody>
@@ -5548,7 +5661,7 @@
                 </a:solidFill>
                 <a:latin typeface="Calibri"/>
               </a:rPr>
-              <a:t>Monolito: lo que la palabra realmente significa (4/4)</a:t>
+              <a:t>Las tres reglas del nivel Container y la trazabilidad con el Context (1/2)</a:t>
             </a:r>
           </a:p>
         </p:txBody>
@@ -5587,7 +5700,7 @@
                 </a:solidFill>
                 <a:latin typeface="Calibri"/>
               </a:rPr>
-              <a:t>–   Y la frase se cierra con las dos mitades del trade-off: lo que se gana y lo que se pierde.</a:t>
+              <a:t>–   La primera: cada caja lleva TRES datos, no uno.</a:t>
             </a:r>
           </a:p>
           <a:p>
@@ -5603,7 +5716,7 @@
                 </a:solidFill>
                 <a:latin typeface="Calibri"/>
               </a:rPr>
-              <a:t>–   Sin la segunda mitad no hubo decision, hubo una justificacion escrita despues de los hechos —el mismo defecto que la Clase 2 senalaba en los ADR sin consecuencias negativas—.</a:t>
+              <a:t>–   Una caja que dice solo «API» no es un contenedor descrito, es una etiqueta; con «API de turnos · Node.js · valida la franja y registra el turno» ya se puede discutir si esa frontera tiene sentido.</a:t>
             </a:r>
           </a:p>
           <a:p>
@@ -5619,7 +5732,7 @@
                 </a:solidFill>
                 <a:latin typeface="Calibri"/>
               </a:rPr>
-              <a:t>–   Un ejemplo completo para la app de turnos es: «Elegimos un monolito modular porque el equipo es de 1 persona y el dominio tiene 3 capacidades</a:t>
+              <a:t>–   La segunda: lo que guarda datos no es una caja mas.</a:t>
             </a:r>
           </a:p>
           <a:p>
@@ -5635,7 +5748,23 @@
                 </a:solidFill>
                 <a:latin typeface="Calibri"/>
               </a:rPr>
-              <a:t>–   Ganamos un solo despliegue y transacciones simples; perdemos la posibilidad de escalar el envio de avisos por separado».</a:t>
+              <a:t>–   En la notacion se marca como almacen —en el codigo, ContainerDb en lugar de Container— y esa distincion no es cosmetica: un almacen no se replica igual que un servicio, no se despliega igual y no falla igual, y todo eso se retoma en las Clases 7 y 13.</a:t>
+            </a:r>
+          </a:p>
+          <a:p>
+            <a:pPr>
+              <a:spcAft>
+                <a:spcPts val="800"/>
+              </a:spcAft>
+            </a:pPr>
+            <a:r>
+              <a:rPr sz="2000" b="0" i="0">
+                <a:solidFill>
+                  <a:srgbClr val="333333"/>
+                </a:solidFill>
+                <a:latin typeface="Calibri"/>
+              </a:rPr>
+              <a:t>–   La tercera: ninguna flecha queda muda, y media etiqueta tampoco alcanza.</a:t>
             </a:r>
           </a:p>
         </p:txBody>
@@ -5816,7 +5945,7 @@
                 </a:solidFill>
                 <a:latin typeface="Calibri"/>
               </a:rPr>
-              <a:t>Las tres reglas del nivel Container y la trazabilidad con el Context (1/2)</a:t>
+              <a:t>Las tres reglas del nivel Container y la trazabilidad con el Context (2/2)</a:t>
             </a:r>
           </a:p>
         </p:txBody>
@@ -5855,7 +5984,7 @@
                 </a:solidFill>
                 <a:latin typeface="Calibri"/>
               </a:rPr>
-              <a:t>–   La primera: cada caja lleva TRES datos, no uno.</a:t>
+              <a:t>–   Cada flecha lleva protocolo Y formato: HTTPS/JSON, TCP/SQL.</a:t>
             </a:r>
           </a:p>
           <a:p>
@@ -5871,7 +6000,7 @@
                 </a:solidFill>
                 <a:latin typeface="Calibri"/>
               </a:rPr>
-              <a:t>–   Una caja que dice solo «API» no es un contenedor descrito, es una etiqueta; con «API de turnos · Node.js · valida la franja y registra el turno» ya se puede discutir si esa frontera tiene sentido.</a:t>
+              <a:t>–   Si alli decia «Pasarela de pagos», aqui no puede decir «Pagos».</a:t>
             </a:r>
           </a:p>
           <a:p>
@@ -5887,7 +6016,7 @@
                 </a:solidFill>
                 <a:latin typeface="Calibri"/>
               </a:rPr>
-              <a:t>–   La segunda: lo que guarda datos no es una caja mas.</a:t>
+              <a:t>–   Los actores y los sistemas externos del Context siguen existiendo hoy y siguen estando FUERA del recuadro del sistema: abrir la caja no elimina lo que la rodeaba.</a:t>
             </a:r>
           </a:p>
           <a:p>
@@ -5903,39 +6032,7 @@
                 </a:solidFill>
                 <a:latin typeface="Calibri"/>
               </a:rPr>
-              <a:t>–   En la notacion se marca como almacen —en el codigo, ContainerDb en lugar de Container— y esa distincion no es cosmetica: un almacen no se replica igual que un servicio, no se despliega igual y no falla igual, y todo eso se retoma en las Clases 7 y 13.</a:t>
-            </a:r>
-          </a:p>
-          <a:p>
-            <a:pPr>
-              <a:spcAft>
-                <a:spcPts val="800"/>
-              </a:spcAft>
-            </a:pPr>
-            <a:r>
-              <a:rPr sz="2000" b="0" i="0">
-                <a:solidFill>
-                  <a:srgbClr val="333333"/>
-                </a:solidFill>
-                <a:latin typeface="Calibri"/>
-              </a:rPr>
-              <a:t>–   La tercera: ninguna flecha queda muda, y media etiqueta tampoco alcanza.</a:t>
-            </a:r>
-          </a:p>
-          <a:p>
-            <a:pPr>
-              <a:spcAft>
-                <a:spcPts val="800"/>
-              </a:spcAft>
-            </a:pPr>
-            <a:r>
-              <a:rPr sz="2000" b="0" i="0">
-                <a:solidFill>
-                  <a:srgbClr val="333333"/>
-                </a:solidFill>
-                <a:latin typeface="Calibri"/>
-              </a:rPr>
-              <a:t>–   Cada flecha lleva protocolo Y formato: HTTPS/JSON, TCP/SQL.</a:t>
+              <a:t>–   Un ejemplo de trazabilidad: si el Context muestra «Proveedor de correo» como System_Ext, en el Containers aparece con el mismo nombre, fuera del recuadro, y la flecha que llega a el sale del contenedor que envia los avisos.</a:t>
             </a:r>
           </a:p>
         </p:txBody>
@@ -6116,7 +6213,7 @@
                 </a:solidFill>
                 <a:latin typeface="Calibri"/>
               </a:rPr>
-              <a:t>Las tres reglas del nivel Container y la trazabilidad con el Context (2/2)</a:t>
+              <a:t>C4Container en Mermaid: la sintaxis que se renderiza (1/2)</a:t>
             </a:r>
           </a:p>
         </p:txBody>
@@ -6155,7 +6252,7 @@
                 </a:solidFill>
                 <a:latin typeface="Calibri"/>
               </a:rPr>
-              <a:t>–   Y hay una cuarta condicion que no es del nivel sino de la continuidad del proyecto: los nombres tienen que ser IDENTICOS a los del C4 Context de la Clase 1.</a:t>
+              <a:t>–   En este curso el diagrama se escribe como codigo Mermaid, y un visor Mermaid lo renderiza.</a:t>
             </a:r>
           </a:p>
           <a:p>
@@ -6171,7 +6268,7 @@
                 </a:solidFill>
                 <a:latin typeface="Calibri"/>
               </a:rPr>
-              <a:t>–   Si alli decia «Pasarela de pagos», aqui no puede decir «Pagos».</a:t>
+              <a:t>–   La primera linea es exactamente C4Container, sin nada antes</a:t>
             </a:r>
           </a:p>
           <a:p>
@@ -6187,7 +6284,7 @@
                 </a:solidFill>
                 <a:latin typeface="Calibri"/>
               </a:rPr>
-              <a:t>–   No es pedanteria de notacion; es lo unico que permite afirmar que los dos dibujos son el mismo sistema visto desde distinta altura</a:t>
+              <a:t>–   Los actores se declaran con Person y los sistemas ajenos con System_Ext, los dos por fuera del bloque del sistema.</a:t>
             </a:r>
           </a:p>
           <a:p>
@@ -6203,39 +6300,7 @@
                 </a:solidFill>
                 <a:latin typeface="Calibri"/>
               </a:rPr>
-              <a:t>–   Y es exactamente lo que se volvera a verificar en la Clase 7 contra el diagrama de despliegue y en la Clase 11 en la auditoria del paquete.</a:t>
-            </a:r>
-          </a:p>
-          <a:p>
-            <a:pPr>
-              <a:spcAft>
-                <a:spcPts val="800"/>
-              </a:spcAft>
-            </a:pPr>
-            <a:r>
-              <a:rPr sz="2000" b="0" i="0">
-                <a:solidFill>
-                  <a:srgbClr val="333333"/>
-                </a:solidFill>
-                <a:latin typeface="Calibri"/>
-              </a:rPr>
-              <a:t>–   Los actores y los sistemas externos del Context siguen existiendo hoy y siguen estando FUERA del recuadro del sistema: abrir la caja no elimina lo que la rodeaba.</a:t>
-            </a:r>
-          </a:p>
-          <a:p>
-            <a:pPr>
-              <a:spcAft>
-                <a:spcPts val="800"/>
-              </a:spcAft>
-            </a:pPr>
-            <a:r>
-              <a:rPr sz="2000" b="0" i="0">
-                <a:solidFill>
-                  <a:srgbClr val="333333"/>
-                </a:solidFill>
-                <a:latin typeface="Calibri"/>
-              </a:rPr>
-              <a:t>–   Ese es el error de dibujo mas comun de la clase, meter al usuario o a la pasarela de pagos dentro del sistema propio, y se detecta en dos segundos preguntando quien lo opera.</a:t>
+              <a:t>–   El sistema propio se abre con System_Boundary y una llave, y dentro van las cajas: Container para lo que ejecuta y ContainerDb para lo que almacena, cada una con identificador, nombre, tecnologia y responsabilidad.</a:t>
             </a:r>
           </a:p>
         </p:txBody>
@@ -6416,7 +6481,7 @@
                 </a:solidFill>
                 <a:latin typeface="Calibri"/>
               </a:rPr>
-              <a:t>C4Container en Mermaid: la sintaxis que se renderiza (1/2)</a:t>
+              <a:t>C4Container en Mermaid: la sintaxis que se renderiza (2/2)</a:t>
             </a:r>
           </a:p>
         </p:txBody>
@@ -6455,7 +6520,7 @@
                 </a:solidFill>
                 <a:latin typeface="Calibri"/>
               </a:rPr>
-              <a:t>–   En este curso el diagrama se escribe como codigo Mermaid, y un visor Mermaid lo renderiza.</a:t>
+              <a:t>–   La llave se cierra, y las relaciones van despues, con Rel y cuatro datos: origen, destino, que hace y con que protocolo y formato.</a:t>
             </a:r>
           </a:p>
           <a:p>
@@ -6471,7 +6536,7 @@
                 </a:solidFill>
                 <a:latin typeface="Calibri"/>
               </a:rPr>
-              <a:t>–   Son cinco reglas de escritura y conviene recorrerlas sobre la diapositiva, linea por linea.</a:t>
+              <a:t>–   El identificador corto de cada caja —en el molde proyectado son spa, api, db y worker— es el que usan las relaciones; si no coincide, no dibuja la flecha y tampoco avisa con claridad.</a:t>
             </a:r>
           </a:p>
           <a:p>
@@ -6487,55 +6552,7 @@
                 </a:solidFill>
                 <a:latin typeface="Calibri"/>
               </a:rPr>
-              <a:t>–   La primera linea es exactamente C4Container, sin nada antes</a:t>
-            </a:r>
-          </a:p>
-          <a:p>
-            <a:pPr>
-              <a:spcAft>
-                <a:spcPts val="800"/>
-              </a:spcAft>
-            </a:pPr>
-            <a:r>
-              <a:rPr sz="2000" b="0" i="0">
-                <a:solidFill>
-                  <a:srgbClr val="333333"/>
-                </a:solidFill>
-                <a:latin typeface="Calibri"/>
-              </a:rPr>
-              <a:t>–   C4Context es el nivel de la Clase 1 y graph TD es otro tipo de diagrama, y cualquiera de los dos deja la respuesta en el nivel equivocado.</a:t>
-            </a:r>
-          </a:p>
-          <a:p>
-            <a:pPr>
-              <a:spcAft>
-                <a:spcPts val="800"/>
-              </a:spcAft>
-            </a:pPr>
-            <a:r>
-              <a:rPr sz="2000" b="0" i="0">
-                <a:solidFill>
-                  <a:srgbClr val="333333"/>
-                </a:solidFill>
-                <a:latin typeface="Calibri"/>
-              </a:rPr>
-              <a:t>–   Los actores se declaran con Person y los sistemas ajenos con System_Ext, los dos por fuera del bloque del sistema.</a:t>
-            </a:r>
-          </a:p>
-          <a:p>
-            <a:pPr>
-              <a:spcAft>
-                <a:spcPts val="800"/>
-              </a:spcAft>
-            </a:pPr>
-            <a:r>
-              <a:rPr sz="2000" b="0" i="0">
-                <a:solidFill>
-                  <a:srgbClr val="333333"/>
-                </a:solidFill>
-                <a:latin typeface="Calibri"/>
-              </a:rPr>
-              <a:t>–   El sistema propio se abre con System_Boundary y una llave, y dentro van las cajas: Container para lo que ejecuta y ContainerDb para lo que almacena, cada una con identificador, nombre, tecnologia y responsabilidad.</a:t>
+              <a:t>–   La regla operativa del dia se dice como consecuencia y no como consejo: se pega el codigo, se mira renderizado, y solo entonces se envia.</a:t>
             </a:r>
           </a:p>
         </p:txBody>
@@ -6716,7 +6733,7 @@
                 </a:solidFill>
                 <a:latin typeface="Calibri"/>
               </a:rPr>
-              <a:t>C4Container en Mermaid: la sintaxis que se renderiza (2/2)</a:t>
+              <a:t>Primer ejemplo: los tres contenedores de la app de turnos</a:t>
             </a:r>
           </a:p>
         </p:txBody>
@@ -6755,7 +6772,7 @@
                 </a:solidFill>
                 <a:latin typeface="Calibri"/>
               </a:rPr>
-              <a:t>–   La llave se cierra, y las relaciones van despues, con Rel y cuatro datos: origen, destino, que hace y con que protocolo y formato.</a:t>
+              <a:t>–   la app de turnos, el sistema de agendamiento de la barberia, empieza con tres contenedores: una aplicacion web que corre en el navegador del cliente, una API que atiende peticiones HTTP con cuerpo en formato JSON</a:t>
             </a:r>
           </a:p>
           <a:p>
@@ -6771,7 +6788,7 @@
                 </a:solidFill>
                 <a:latin typeface="Calibri"/>
               </a:rPr>
-              <a:t>–   El identificador corto de cada caja —en el molde proyectado son spa, api, db y worker— es el que usan las relaciones; si no coincide, no dibuja la flecha y tampoco avisa con claridad.</a:t>
+              <a:t>–   Y una base de datos relacional donde viven turnos, clientes y horarios.</a:t>
             </a:r>
           </a:p>
           <a:p>
@@ -6787,7 +6804,39 @@
                 </a:solidFill>
                 <a:latin typeface="Calibri"/>
               </a:rPr>
-              <a:t>–   La regla operativa del dia se dice como consecuencia y no como consejo: se pega el codigo, se mira renderizado, y solo entonces se envia.</a:t>
+              <a:t>–   Ahora viene la parte interesante: la cuarta caja aparece solo si hay una razon.</a:t>
+            </a:r>
+          </a:p>
+          <a:p>
+            <a:pPr>
+              <a:spcAft>
+                <a:spcPts val="800"/>
+              </a:spcAft>
+            </a:pPr>
+            <a:r>
+              <a:rPr sz="2000" b="0" i="0">
+                <a:solidFill>
+                  <a:srgbClr val="333333"/>
+                </a:solidFill>
+                <a:latin typeface="Calibri"/>
+              </a:rPr>
+              <a:t>–   El envio del correo de confirmacion tarda, con proveedores reales de correo, entre 300 y 2000 milisegundos, y puede fallar por causas ajenas al sistema.</a:t>
+            </a:r>
+          </a:p>
+          <a:p>
+            <a:pPr>
+              <a:spcAft>
+                <a:spcPts val="800"/>
+              </a:spcAft>
+            </a:pPr>
+            <a:r>
+              <a:rPr sz="2000" b="0" i="0">
+                <a:solidFill>
+                  <a:srgbClr val="333333"/>
+                </a:solidFill>
+                <a:latin typeface="Calibri"/>
+              </a:rPr>
+              <a:t>–   Cuatro contenedores con una justificacion medible es mejor arquitectura que ocho por moda.</a:t>
             </a:r>
           </a:p>
         </p:txBody>
@@ -6968,7 +7017,7 @@
                 </a:solidFill>
                 <a:latin typeface="Calibri"/>
               </a:rPr>
-              <a:t>Primer ejemplo: los tres contenedores de la app de turnos</a:t>
+              <a:t>Los contratos: cuatro datos por fila y un 409 obligatorio (1/2)</a:t>
             </a:r>
           </a:p>
         </p:txBody>
@@ -7007,7 +7056,7 @@
                 </a:solidFill>
                 <a:latin typeface="Calibri"/>
               </a:rPr>
-              <a:t>–   la app de turnos, el sistema de agendamiento de la barberia, empieza con tres contenedores: una aplicacion web que corre en el navegador del cliente, una API que atiende peticiones HTTP con cuerpo en formato JSON</a:t>
+              <a:t>–   Si cada flecha del diagrama lleva protocolo y formato, el paso siguiente es decir QUE se negocia por esa flecha, y eso es un contrato.</a:t>
             </a:r>
           </a:p>
           <a:p>
@@ -7023,7 +7072,7 @@
                 </a:solidFill>
                 <a:latin typeface="Calibri"/>
               </a:rPr>
-              <a:t>–   Y una base de datos relacional donde viven turnos, clientes y horarios.</a:t>
+              <a:t>–   Un contrato entre dos piezas de un sistema tiene cuatro datos y los cuatro se piden por separado: como se llama la interaccion en terminos de negocio</a:t>
             </a:r>
           </a:p>
           <a:p>
@@ -7039,7 +7088,7 @@
                 </a:solidFill>
                 <a:latin typeface="Calibri"/>
               </a:rPr>
-              <a:t>–   Ahora viene la parte interesante: la cuarta caja aparece solo si hay una razon.</a:t>
+              <a:t>–   Quien llama a quien, con que verbo y ruta —o con que nombre de evento, si es asincrono—, y cual es el error de negocio que puede devolver.</a:t>
             </a:r>
           </a:p>
           <a:p>
@@ -7055,7 +7104,7 @@
                 </a:solidFill>
                 <a:latin typeface="Calibri"/>
               </a:rPr>
-              <a:t>–   El envio del correo de confirmacion tarda, con proveedores reales de correo, entre 300 y 2000 milisegundos, y puede fallar por causas ajenas al sistema.</a:t>
+              <a:t>–   El cuarto es el que se olvida y el que hace util al contrato.</a:t>
             </a:r>
           </a:p>
           <a:p>
@@ -7071,7 +7120,23 @@
                 </a:solidFill>
                 <a:latin typeface="Calibri"/>
               </a:rPr>
-              <a:t>–   Cuatro contenedores con una justificacion medible es mejor arquitectura que ocho por moda.</a:t>
+              <a:t>–   Un error de negocio es una respuesta prevista, que forma parte del diseno: la franja ya esta tomada, el cupo se agoto, el usuario no tiene permiso.</a:t>
+            </a:r>
+          </a:p>
+          <a:p>
+            <a:pPr>
+              <a:spcAft>
+                <a:spcPts val="800"/>
+              </a:spcAft>
+            </a:pPr>
+            <a:r>
+              <a:rPr sz="2000" b="0" i="0">
+                <a:solidFill>
+                  <a:srgbClr val="333333"/>
+                </a:solidFill>
+                <a:latin typeface="Calibri"/>
+              </a:rPr>
+              <a:t>–   La primera: al menos uno de los tres contratos tiene que ser un 409 de conflicto, y la razon es de dominio y no de capricho.</a:t>
             </a:r>
           </a:p>
         </p:txBody>
@@ -7252,7 +7317,7 @@
                 </a:solidFill>
                 <a:latin typeface="Calibri"/>
               </a:rPr>
-              <a:t>Los contratos: cuatro datos por fila y un 409 obligatorio (1/3)</a:t>
+              <a:t>Los contratos: cuatro datos por fila y un 409 obligatorio (2/2)</a:t>
             </a:r>
           </a:p>
         </p:txBody>
@@ -7291,7 +7356,7 @@
                 </a:solidFill>
                 <a:latin typeface="Calibri"/>
               </a:rPr>
-              <a:t>–   Si cada flecha del diagrama lleva protocolo y formato, el paso siguiente es decir QUE se negocia por esa flecha, y eso es un contrato.</a:t>
+              <a:t>–   El 409 es la respuesta que dice «tu peticion es valida, pero el estado actual del sistema no la admite», y en cualquier dominio de reservas ese caso existe siempre: dos clientes quieren la misma franja.</a:t>
             </a:r>
           </a:p>
           <a:p>
@@ -7307,7 +7372,7 @@
                 </a:solidFill>
                 <a:latin typeface="Calibri"/>
               </a:rPr>
-              <a:t>–   Un contrato entre dos piezas de un sistema tiene cuatro datos y los cuatro se piden por separado: como se llama la interaccion en terminos de negocio</a:t>
+              <a:t>–   Un estudiante que no encuentra ningun 409 en su sistema casi nunca tiene un dominio sin conflictos; lo que tiene es un diagrama que no modela ninguna regla de negocio.</a:t>
             </a:r>
           </a:p>
           <a:p>
@@ -7323,7 +7388,7 @@
                 </a:solidFill>
                 <a:latin typeface="Calibri"/>
               </a:rPr>
-              <a:t>–   Quien llama a quien, con que verbo y ruta —o con que nombre de evento, si es asincrono—, y cual es el error de negocio que puede devolver.</a:t>
+              <a:t>–   La segunda exigencia: los tres contratos no pueden ser entre el mismo par de cajas.</a:t>
             </a:r>
           </a:p>
           <a:p>
@@ -7339,7 +7404,7 @@
                 </a:solidFill>
                 <a:latin typeface="Calibri"/>
               </a:rPr>
-              <a:t>–   El cuarto es el que se olvida y el que hace util al contrato.</a:t>
+              <a:t>–   Y si el contrato es con la base de datos, en la columna del verbo va la sentencia (INSERT, SELECT) y no una ruta REST</a:t>
             </a:r>
           </a:p>
           <a:p>
@@ -7355,23 +7420,7 @@
                 </a:solidFill>
                 <a:latin typeface="Calibri"/>
               </a:rPr>
-              <a:t>–   Un error de negocio es una respuesta prevista, que forma parte del diseno: la franja ya esta tomada, el cupo se agoto, el usuario no tiene permiso.</a:t>
-            </a:r>
-          </a:p>
-          <a:p>
-            <a:pPr>
-              <a:spcAft>
-                <a:spcPts val="800"/>
-              </a:spcAft>
-            </a:pPr>
-            <a:r>
-              <a:rPr sz="2000" b="0" i="0">
-                <a:solidFill>
-                  <a:srgbClr val="333333"/>
-                </a:solidFill>
-                <a:latin typeface="Calibri"/>
-              </a:rPr>
-              <a:t>–   Un 500 no es un error de negocio, es una falla del sistema; nadie lo disena, y por eso poner 500 en esa columna es la senal de que el estudiante no distinguio las dos cosas.</a:t>
+              <a:t>–   Porque la base no expone rutas; ponerle POST /turnos a la base de datos es el error que delata que se lleno la tabla por analogia y no leyendo el propio diagrama.</a:t>
             </a:r>
           </a:p>
         </p:txBody>
@@ -7668,7 +7717,7 @@
                 </a:solidFill>
                 <a:latin typeface="Calibri"/>
               </a:rPr>
-              <a:t> Ejemplos resueltos y demo del docente sobre el tema.</a:t>
+              <a:t> Ejemplos resueltos y demostración sobre el tema.</a:t>
             </a:r>
           </a:p>
           <a:p>
@@ -7899,7 +7948,7 @@
                 </a:solidFill>
                 <a:latin typeface="Calibri"/>
               </a:rPr>
-              <a:t>Los contratos: cuatro datos por fila y un 409 obligatorio (2/3)</a:t>
+              <a:t>Lo que se paga al distribuir: la red no es una llamada de funcion</a:t>
             </a:r>
           </a:p>
         </p:txBody>
@@ -7938,7 +7987,7 @@
                 </a:solidFill>
                 <a:latin typeface="Calibri"/>
               </a:rPr>
-              <a:t>–   La diapositiva proyecta los tres contratos resueltos sobre la app de turnos y conviene recorrerlos leyendo la cuarta columna en voz alta, porque es lo que hay que replicar.</a:t>
+              <a:t>–   El segundo bloque de contenido es el mas importante del dia: que se paga al distribuir.</a:t>
             </a:r>
           </a:p>
           <a:p>
@@ -7954,7 +8003,7 @@
                 </a:solidFill>
                 <a:latin typeface="Calibri"/>
               </a:rPr>
-              <a:t>–   La primera: al menos uno de los tres contratos tiene que ser un 409 de conflicto, y la razon es de dominio y no de capricho.</a:t>
+              <a:t>–   Una llamada a una funcion dentro del mismo proceso cuesta del orden de nanosegundos y no puede fallar por causas de red.</a:t>
             </a:r>
           </a:p>
           <a:p>
@@ -7970,7 +8019,7 @@
                 </a:solidFill>
                 <a:latin typeface="Calibri"/>
               </a:rPr>
-              <a:t>–   El 409 es la respuesta que dice «tu peticion es valida, pero el estado actual del sistema no la admite», y en cualquier dominio de reservas ese caso existe siempre: dos clientes quieren la misma franja.</a:t>
+              <a:t>–   La misma llamada convertida en peticion HTTP entre dos contenedores de la misma maquina o del mismo centro de datos cuesta tipicamente entre 1 y 5 milisegundos, y entre regiones geograficas distintas puede subir a 50 o 200 milisegundos.</a:t>
             </a:r>
           </a:p>
           <a:p>
@@ -7986,7 +8035,7 @@
                 </a:solidFill>
                 <a:latin typeface="Calibri"/>
               </a:rPr>
-              <a:t>–   Un estudiante que no encuentra ningun 409 en su sistema casi nunca tiene un dominio sin conflictos; lo que tiene es un diagrama que no modela ninguna regla de negocio.</a:t>
+              <a:t>–   Es decir, convertir una llamada local en remota empeora el costo en varios ordenes de magnitud, y a eso se suma que ahora la llamada puede perderse, llegar duplicada o tardar indefinidamente.</a:t>
             </a:r>
           </a:p>
           <a:p>
@@ -8002,7 +8051,7 @@
                 </a:solidFill>
                 <a:latin typeface="Calibri"/>
               </a:rPr>
-              <a:t>–   La segunda exigencia: los tres contratos no pueden ser entre el mismo par de cajas.</a:t>
+              <a:t>–   Ese calculo es exacto y no una convencion, y es el argumento mas contundente contra multiplicar servicios sin necesidad.</a:t>
             </a:r>
           </a:p>
         </p:txBody>
@@ -8183,7 +8232,7 @@
                 </a:solidFill>
                 <a:latin typeface="Calibri"/>
               </a:rPr>
-              <a:t>Los contratos: cuatro datos por fila y un 409 obligatorio (3/3)</a:t>
+              <a:t>Timeout, reintento, idempotencia y circuit breaker (1/2)</a:t>
             </a:r>
           </a:p>
         </p:txBody>
@@ -8222,7 +8271,7 @@
                 </a:solidFill>
                 <a:latin typeface="Calibri"/>
               </a:rPr>
-              <a:t>–   Tres filas que digan «App web → API» describen un solo canal contado tres veces, y lo que se esta evaluando es si el estudiante entendio que su sistema tiene varias fronteras.</a:t>
+              <a:t>–   Un timeout es el tiempo maximo que un servicio espera respuesta antes de darse por vencido; sin timeout explicito, un servicio lento no falla sino que deja colgado a quien lo llamo, y el bloqueo se propaga hacia arriba hasta tumbar el sistema completo.</a:t>
             </a:r>
           </a:p>
           <a:p>
@@ -8238,7 +8287,7 @@
                 </a:solidFill>
                 <a:latin typeface="Calibri"/>
               </a:rPr>
-              <a:t>–   Y si el contrato es con la base de datos, en la columna del verbo va la sentencia (INSERT, SELECT) y no una ruta REST</a:t>
+              <a:t>–   Los valores tipicos para llamadas internas estan entre 2 y 5 segundos, y son convencion, no ley.</a:t>
             </a:r>
           </a:p>
           <a:p>
@@ -8254,7 +8303,7 @@
                 </a:solidFill>
                 <a:latin typeface="Calibri"/>
               </a:rPr>
-              <a:t>–   Porque la base no expone rutas; ponerle POST /turnos a la base de datos es el error que delata que se lleno la tabla por analogia y no leyendo el propio diagrama.</a:t>
+              <a:t>–   Un reintento es volver a intentar la llamada fallida, y trae una trampa: si todos los clientes reintentan de inmediato contra un servicio ya saturado, lo hunden mas, por lo que se limita a dos o tres reintentos con espera creciente entre uno y otro.</a:t>
             </a:r>
           </a:p>
         </p:txBody>
@@ -8435,7 +8484,7 @@
                 </a:solidFill>
                 <a:latin typeface="Calibri"/>
               </a:rPr>
-              <a:t>Lo que se paga al distribuir: la red no es una llamada de funcion (1/2)</a:t>
+              <a:t>Timeout, reintento, idempotencia y circuit breaker (2/2)</a:t>
             </a:r>
           </a:p>
         </p:txBody>
@@ -8474,7 +8523,7 @@
                 </a:solidFill>
                 <a:latin typeface="Calibri"/>
               </a:rPr>
-              <a:t>–   El segundo bloque de contenido es el mas importante del dia: que se paga al distribuir.</a:t>
+              <a:t>–   En la app eso es literal: si el reintento de crear turno no es idempotente, el cliente termina con dos reservas para el mismo horario, y la solucion habitual es que la peticion lleve un identificador unico que el servidor reconozca como repetido.</a:t>
             </a:r>
           </a:p>
           <a:p>
@@ -8490,39 +8539,7 @@
                 </a:solidFill>
                 <a:latin typeface="Calibri"/>
               </a:rPr>
-              <a:t>–   Una llamada a una funcion dentro del mismo proceso cuesta del orden de nanosegundos y no puede fallar por causas de red.</a:t>
-            </a:r>
-          </a:p>
-          <a:p>
-            <a:pPr>
-              <a:spcAft>
-                <a:spcPts val="800"/>
-              </a:spcAft>
-            </a:pPr>
-            <a:r>
-              <a:rPr sz="2000" b="0" i="0">
-                <a:solidFill>
-                  <a:srgbClr val="333333"/>
-                </a:solidFill>
-                <a:latin typeface="Calibri"/>
-              </a:rPr>
-              <a:t>–   La misma llamada convertida en peticion HTTP entre dos contenedores de la misma maquina o del mismo centro de datos cuesta tipicamente entre 1 y 5 milisegundos, y entre regiones geograficas distintas puede subir a 50 o 200 milisegundos.</a:t>
-            </a:r>
-          </a:p>
-          <a:p>
-            <a:pPr>
-              <a:spcAft>
-                <a:spcPts val="800"/>
-              </a:spcAft>
-            </a:pPr>
-            <a:r>
-              <a:rPr sz="2000" b="0" i="0">
-                <a:solidFill>
-                  <a:srgbClr val="333333"/>
-                </a:solidFill>
-                <a:latin typeface="Calibri"/>
-              </a:rPr>
-              <a:t>–   Es decir, convertir una llamada local en remota empeora el costo en varios ordenes de magnitud, y a eso se suma que ahora la llamada puede perderse, llegar duplicada o tardar indefinidamente.</a:t>
+              <a:t>–   El cuarto mecanismo es el interruptor de circuito, o circuit breaker, que tras varias fallas consecutivas deja de intentar por un rato y responde de inmediato con un error controlado, para no gastar recursos golpeando algo que esta caido.</a:t>
             </a:r>
           </a:p>
         </p:txBody>
@@ -8703,7 +8720,7 @@
                 </a:solidFill>
                 <a:latin typeface="Calibri"/>
               </a:rPr>
-              <a:t>Lo que se paga al distribuir: la red no es una llamada de funcion (2/2)</a:t>
+              <a:t>Los datos: donde se rompen los proyectos academicos (1/2)</a:t>
             </a:r>
           </a:p>
         </p:txBody>
@@ -8742,7 +8759,7 @@
                 </a:solidFill>
                 <a:latin typeface="Calibri"/>
               </a:rPr>
-              <a:t>–   Hay una aritmetica que conviene mostrar porque impresiona con razon: si una peticion del usuario atraviesa en cadena cinco servicios y cada uno esta disponible el 99,9 % del tiempo</a:t>
+              <a:t>–   El punto donde los proyectos academicos se rompen es el de los datos.</a:t>
             </a:r>
           </a:p>
           <a:p>
@@ -8758,7 +8775,7 @@
                 </a:solidFill>
                 <a:latin typeface="Calibri"/>
               </a:rPr>
-              <a:t>–   La disponibilidad del recorrido completo es 0,999 elevado a la quinta potencia, alrededor del 99,5 %, lo que pasa de unos 43 minutos de indisponibilidad al mes a mas de tres horas.</a:t>
+              <a:t>–   La regla ortodoxa de los microservicios dice que cada servicio es dueno exclusivo de su base de datos y que nadie mas la consulta directamente</a:t>
             </a:r>
           </a:p>
           <a:p>
@@ -8774,7 +8791,39 @@
                 </a:solidFill>
                 <a:latin typeface="Calibri"/>
               </a:rPr>
-              <a:t>–   Ese calculo es exacto y no una convencion, y es el argumento mas contundente contra multiplicar servicios sin necesidad.</a:t>
+              <a:t>–   Si dos servicios comparten tablas, estan acoplados y no pueden desplegarse por separado, lo que contradice la definicion.</a:t>
+            </a:r>
+          </a:p>
+          <a:p>
+            <a:pPr>
+              <a:spcAft>
+                <a:spcPts val="800"/>
+              </a:spcAft>
+            </a:pPr>
+            <a:r>
+              <a:rPr sz="2000" b="0" i="0">
+                <a:solidFill>
+                  <a:srgbClr val="333333"/>
+                </a:solidFill>
+                <a:latin typeface="Calibri"/>
+              </a:rPr>
+              <a:t>–   Pero cumplir esa regla tiene un precio real: una consulta que antes era un join deja de existir y hay que resolverla llamando a otro servicio</a:t>
+            </a:r>
+          </a:p>
+          <a:p>
+            <a:pPr>
+              <a:spcAft>
+                <a:spcPts val="800"/>
+              </a:spcAft>
+            </a:pPr>
+            <a:r>
+              <a:rPr sz="2000" b="0" i="0">
+                <a:solidFill>
+                  <a:srgbClr val="333333"/>
+                </a:solidFill>
+                <a:latin typeface="Calibri"/>
+              </a:rPr>
+              <a:t>–   Y una operacion que abarca dos servicios ya no puede ser una transaccion unica sino una secuencia de pasos con compensaciones.</a:t>
             </a:r>
           </a:p>
         </p:txBody>
@@ -8955,7 +9004,7 @@
                 </a:solidFill>
                 <a:latin typeface="Calibri"/>
               </a:rPr>
-              <a:t>Timeout, reintento, idempotencia y circuit breaker (1/2)</a:t>
+              <a:t>Los datos: donde se rompen los proyectos academicos (2/2)</a:t>
             </a:r>
           </a:p>
         </p:txBody>
@@ -8994,7 +9043,7 @@
                 </a:solidFill>
                 <a:latin typeface="Calibri"/>
               </a:rPr>
-              <a:t>–   Un timeout es el tiempo maximo que un servicio espera respuesta antes de darse por vencido; sin timeout explicito, un servicio lento no falla sino que deja colgado a quien lo llamo, y el bloqueo se propaga hacia arriba hasta tumbar el sistema completo.</a:t>
+              <a:t>–   Fingir ortodoxia es peor que documentar una concesion.</a:t>
             </a:r>
           </a:p>
           <a:p>
@@ -9010,7 +9059,7 @@
                 </a:solidFill>
                 <a:latin typeface="Calibri"/>
               </a:rPr>
-              <a:t>–   Los valores tipicos para llamadas internas estan entre 2 y 5 segundos, y son convencion, no ley.</a:t>
+              <a:t>–   La regla de propiedad es: cada tabla tiene un solo servicio dueno, que es el unico que escribe en ella; los demas la consultan por su API.</a:t>
             </a:r>
           </a:p>
           <a:p>
@@ -9026,7 +9075,23 @@
                 </a:solidFill>
                 <a:latin typeface="Calibri"/>
               </a:rPr>
-              <a:t>–   Un reintento es volver a intentar la llamada fallida, y trae una trampa: si todos los clientes reintentan de inmediato contra un servicio ya saturado, lo hunden mas, por lo que se limita a dos o tres reintentos con espera creciente entre uno y otro.</a:t>
+              <a:t>–   En la app de turnos la tabla de turnos es de la API de turnos, y el worker de avisos no la toca: recibe por la cola el dato que necesita.</a:t>
+            </a:r>
+          </a:p>
+          <a:p>
+            <a:pPr>
+              <a:spcAft>
+                <a:spcPts val="800"/>
+              </a:spcAft>
+            </a:pPr>
+            <a:r>
+              <a:rPr sz="2000" b="0" i="0">
+                <a:solidFill>
+                  <a:srgbClr val="333333"/>
+                </a:solidFill>
+                <a:latin typeface="Calibri"/>
+              </a:rPr>
+              <a:t>–   Dos servicios que escriben en la misma tabla quedan acoplados aunque se desplieguen por separado, y ese es el error mas comun.</a:t>
             </a:r>
           </a:p>
         </p:txBody>
@@ -9207,7 +9272,7 @@
                 </a:solidFill>
                 <a:latin typeface="Calibri"/>
               </a:rPr>
-              <a:t>Timeout, reintento, idempotencia y circuit breaker (2/2)</a:t>
+              <a:t>Los tres riesgos de distribuir, y por que son esos tres (1/3)</a:t>
             </a:r>
           </a:p>
         </p:txBody>
@@ -9246,7 +9311,7 @@
                 </a:solidFill>
                 <a:latin typeface="Calibri"/>
               </a:rPr>
-              <a:t>–   En la app eso es literal: si el reintento de crear turno no es idempotente, el cliente termina con dos reservas para el mismo horario, y la solucion habitual es que la peticion lleve un identificador unico que el servidor reconozca como repetido.</a:t>
+              <a:t>–   Los riesgos de distribucion no son una lista libre: son TRES riesgos, cada uno responde una pregunta distinta, y estan elegidos para que ninguno se pueda contestar sin mirar el propio diagrama.</a:t>
             </a:r>
           </a:p>
           <a:p>
@@ -9262,7 +9327,55 @@
                 </a:solidFill>
                 <a:latin typeface="Calibri"/>
               </a:rPr>
-              <a:t>–   El cuarto mecanismo es el interruptor de circuito, o circuit breaker, que tras varias fallas consecutivas deja de intentar por un rato y responde de inmediato con un error controlado, para no gastar recursos golpeando algo que esta caido.</a:t>
+              <a:t>–   Se nombra UNA caja del diagrama y se dice que deja de funcionar y —esta es la mitad que se olvida— que SIGUE funcionando.</a:t>
+            </a:r>
+          </a:p>
+          <a:p>
+            <a:pPr>
+              <a:spcAft>
+                <a:spcPts val="800"/>
+              </a:spcAft>
+            </a:pPr>
+            <a:r>
+              <a:rPr sz="2000" b="0" i="0">
+                <a:solidFill>
+                  <a:srgbClr val="333333"/>
+                </a:solidFill>
+                <a:latin typeface="Calibri"/>
+              </a:rPr>
+              <a:t>–   En la app de turnos, si se cae el trabajador de notificaciones, los turnos se siguen reservando y lo que se pierde es el correo de confirmacion; si se cae la base de turnos, no se reserva nada</a:t>
+            </a:r>
+          </a:p>
+          <a:p>
+            <a:pPr>
+              <a:spcAft>
+                <a:spcPts val="800"/>
+              </a:spcAft>
+            </a:pPr>
+            <a:r>
+              <a:rPr sz="2000" b="0" i="0">
+                <a:solidFill>
+                  <a:srgbClr val="333333"/>
+                </a:solidFill>
+                <a:latin typeface="Calibri"/>
+              </a:rPr>
+              <a:t>–   Pero la aplicacion web sigue cargando y puede mostrar un mensaje decente en lugar de una pantalla en blanco.</a:t>
+            </a:r>
+          </a:p>
+          <a:p>
+            <a:pPr>
+              <a:spcAft>
+                <a:spcPts val="800"/>
+              </a:spcAft>
+            </a:pPr>
+            <a:r>
+              <a:rPr sz="2000" b="0" i="0">
+                <a:solidFill>
+                  <a:srgbClr val="333333"/>
+                </a:solidFill>
+                <a:latin typeface="Calibri"/>
+              </a:rPr>
+              <a:t>–   Reservar un turno en el ejemplo de tres cajas son tres saltos: el navegador a la aplicacion web, la aplicacion web a la API, y la API a la base de datos; si se agrega el correo son cuatro, y si el correo se envia por cola, cinco.</a:t>
             </a:r>
           </a:p>
         </p:txBody>
@@ -9443,7 +9556,7 @@
                 </a:solidFill>
                 <a:latin typeface="Calibri"/>
               </a:rPr>
-              <a:t>Los datos: donde se rompen los proyectos academicos (1/2)</a:t>
+              <a:t>Los tres riesgos de distribuir, y por que son esos tres (2/3)</a:t>
             </a:r>
           </a:p>
         </p:txBody>
@@ -9482,7 +9595,7 @@
                 </a:solidFill>
                 <a:latin typeface="Calibri"/>
               </a:rPr>
-              <a:t>–   El punto donde los proyectos academicos se rompen es el de los datos.</a:t>
+              <a:t>–   El numero importa por lo que se explico arriba: cada salto agrega latencia y una probabilidad de fallo, y esa aritmetica es la unica defensa contra multiplicar cajas por gusto.</a:t>
             </a:r>
           </a:p>
           <a:p>
@@ -9498,7 +9611,7 @@
                 </a:solidFill>
                 <a:latin typeface="Calibri"/>
               </a:rPr>
-              <a:t>–   La regla ortodoxa de los microservicios dice que cada servicio es dueno exclusivo de su base de datos y que nadie mas la consulta directamente</a:t>
+              <a:t>–   Un estudiante que no puede contar sus saltos no esta leyendo su diagrama, esta recordandolo.</a:t>
             </a:r>
           </a:p>
           <a:p>
@@ -9514,7 +9627,7 @@
                 </a:solidFill>
                 <a:latin typeface="Calibri"/>
               </a:rPr>
-              <a:t>–   Si dos servicios comparten tablas, estan acoplados y no pueden desplegarse por separado, lo que contradice la definicion.</a:t>
+              <a:t>–   El tercero pregunta por un dato que se escribe en dos pasos, y es el mas dificil de los tres porque exige mirar la escritura y no la lectura.</a:t>
             </a:r>
           </a:p>
           <a:p>
@@ -9530,7 +9643,7 @@
                 </a:solidFill>
                 <a:latin typeface="Calibri"/>
               </a:rPr>
-              <a:t>–   Pero cumplir esa regla tiene un precio real: una consulta que antes era un join deja de existir y hay que resolverla llamando a otro servicio</a:t>
+              <a:t>–   En el ejemplo, el turno se escribe en la base y despues se publica el mensaje del correo: si el segundo paso falla, el turno existe y el cliente nunca se entero.</a:t>
             </a:r>
           </a:p>
           <a:p>
@@ -9546,23 +9659,7 @@
                 </a:solidFill>
                 <a:latin typeface="Calibri"/>
               </a:rPr>
-              <a:t>–   Y una operacion que abarca dos servicios ya no puede ser una transaccion unica sino una secuencia de pasos con compensaciones.</a:t>
-            </a:r>
-          </a:p>
-          <a:p>
-            <a:pPr>
-              <a:spcAft>
-                <a:spcPts val="800"/>
-              </a:spcAft>
-            </a:pPr>
-            <a:r>
-              <a:rPr sz="2000" b="0" i="0">
-                <a:solidFill>
-                  <a:srgbClr val="333333"/>
-                </a:solidFill>
-                <a:latin typeface="Calibri"/>
-              </a:rPr>
-              <a:t>–   La postura honesta para este curso es que un la app con una base de datos compartida y propiedad de tablas claramente documentada resulta aceptable</a:t>
+              <a:t>–   Ese es el problema de fondo de todo sistema distribuido, y hoy no se resuelve con una saga completa: se reconoce, se nombra el dato concreto y se dice que queda inconsistente.</a:t>
             </a:r>
           </a:p>
         </p:txBody>
@@ -9743,7 +9840,7 @@
                 </a:solidFill>
                 <a:latin typeface="Calibri"/>
               </a:rPr>
-              <a:t>Los datos: donde se rompen los proyectos academicos (2/2)</a:t>
+              <a:t>Los tres riesgos de distribuir, y por que son esos tres (3/3)</a:t>
             </a:r>
           </a:p>
         </p:txBody>
@@ -9782,7 +9879,7 @@
                 </a:solidFill>
                 <a:latin typeface="Calibri"/>
               </a:rPr>
-              <a:t>–   Siempre que el estudiante lo registre como un trade-off consciente en su informe y no lo presente como microservicios puros.</a:t>
+              <a:t>–   Si un estudiante dice que no encuentra ningun riesgo, casi siempre es porque su diagrama tiene flechas sin protocolo o sin formato: no sabe por donde puede romperse porque nunca definio como se comunican las piezas.</a:t>
             </a:r>
           </a:p>
           <a:p>
@@ -9798,7 +9895,7 @@
                 </a:solidFill>
                 <a:latin typeface="Calibri"/>
               </a:rPr>
-              <a:t>–   Fingir ortodoxia es peor que documentar una concesion.</a:t>
+              <a:t>–   Los tres riesgos clasicos de un sistema distribuido son: la red falla o se demora, un servicio deja de responder mientras los demas siguen, y los datos quedan inconsistentes entre dos servicios.</a:t>
             </a:r>
           </a:p>
           <a:p>
@@ -9814,39 +9911,7 @@
                 </a:solidFill>
                 <a:latin typeface="Calibri"/>
               </a:rPr>
-              <a:t>–   La regla de propiedad es: cada tabla tiene un solo servicio dueno, que es el unico que escribe en ella; los demas la consultan por su API.</a:t>
-            </a:r>
-          </a:p>
-          <a:p>
-            <a:pPr>
-              <a:spcAft>
-                <a:spcPts val="800"/>
-              </a:spcAft>
-            </a:pPr>
-            <a:r>
-              <a:rPr sz="2000" b="0" i="0">
-                <a:solidFill>
-                  <a:srgbClr val="333333"/>
-                </a:solidFill>
-                <a:latin typeface="Calibri"/>
-              </a:rPr>
-              <a:t>–   En la app de turnos la tabla de turnos es de la API de turnos, y el worker de avisos no la toca: recibe por la cola el dato que necesita.</a:t>
-            </a:r>
-          </a:p>
-          <a:p>
-            <a:pPr>
-              <a:spcAft>
-                <a:spcPts val="800"/>
-              </a:spcAft>
-            </a:pPr>
-            <a:r>
-              <a:rPr sz="2000" b="0" i="0">
-                <a:solidFill>
-                  <a:srgbClr val="333333"/>
-                </a:solidFill>
-                <a:latin typeface="Calibri"/>
-              </a:rPr>
-              <a:t>–   Dos servicios que escriben en la misma tabla quedan acoplados aunque se desplieguen por separado, y ese es el error mas comun.</a:t>
+              <a:t>–   En la app de turnos, si el worker de avisos cae, los turnos se siguen reservando y los avisos esperan en la cola: el fallo queda contenido.</a:t>
             </a:r>
           </a:p>
         </p:txBody>
@@ -10027,7 +10092,7 @@
                 </a:solidFill>
                 <a:latin typeface="Calibri"/>
               </a:rPr>
-              <a:t>Los tres riesgos de distribuir, y por que son esos tres (1/3)</a:t>
+              <a:t>Preguntas frecuentes y cierre conceptual</a:t>
             </a:r>
           </a:p>
         </p:txBody>
@@ -10066,7 +10131,7 @@
                 </a:solidFill>
                 <a:latin typeface="Calibri"/>
               </a:rPr>
-              <a:t>–   Los riesgos de distribucion no son una lista libre: son TRES riesgos, cada uno responde una pregunta distinta, y estan elegidos para que ninguno se pueda contestar sin mirar el propio diagrama.</a:t>
+              <a:t>–   Cuantos microservicios son los correctos: no hay numero correcto, hay justificacion por frontera</a:t>
             </a:r>
           </a:p>
           <a:p>
@@ -10082,7 +10147,7 @@
                 </a:solidFill>
                 <a:latin typeface="Calibri"/>
               </a:rPr>
-              <a:t>–   Se nombra UNA caja del diagrama y se dice que deja de funcionar y —esta es la mitad que se olvida— que SIGUE funcionando.</a:t>
+              <a:t>–   Y el rango de dos a cinco contenedores que exige el curso es una restriccion pedagogica pensada para proyectos de una a tres personas en doce semanas, no un hallazgo de la ingenieria.</a:t>
             </a:r>
           </a:p>
           <a:p>
@@ -10098,7 +10163,7 @@
                 </a:solidFill>
                 <a:latin typeface="Calibri"/>
               </a:rPr>
-              <a:t>–   En la app de turnos, si se cae el trabajador de notificaciones, los turnos se siguen reservando y lo que se pierde es el correo de confirmacion; si se cae la base de turnos, no se reserva nada</a:t>
+              <a:t>–   Si las empresas grandes tienen cientos de servicios, por que nosotros solo tres: porque el numero de servicios que una organizacion puede sostener es funcion del numero de equipos autonomos y de la madurez de su automatizacion de despliegue y observabilidad</a:t>
             </a:r>
           </a:p>
           <a:p>
@@ -10114,7 +10179,7 @@
                 </a:solidFill>
                 <a:latin typeface="Calibri"/>
               </a:rPr>
-              <a:t>–   Pero la aplicacion web sigue cargando y puede mostrar un mensaje decente en lugar de una pantalla en blanco.</a:t>
+              <a:t>–   Condiciones que un equipo de tres no tiene, y copiar la forma sin las condiciones produce lo que aqui se llama microservicios teatro.</a:t>
             </a:r>
           </a:p>
           <a:p>
@@ -10130,7 +10195,7 @@
                 </a:solidFill>
                 <a:latin typeface="Calibri"/>
               </a:rPr>
-              <a:t>–   Ese razonamiento es el que en la Clase 7 permite decidir que va en cada zona de red y en la Clase 13 que pieza vale la pena replicar.</a:t>
+              <a:t>–   Y la tercera, que hay que responder sin ambiguedad: esta mal hacer un monolito.</a:t>
             </a:r>
           </a:p>
         </p:txBody>
@@ -10311,21 +10376,141 @@
                 </a:solidFill>
                 <a:latin typeface="Calibri"/>
               </a:rPr>
-              <a:t>Los tres riesgos de distribuir, y por que son esos tres (2/3)</a:t>
-            </a:r>
-          </a:p>
-        </p:txBody>
-      </p:sp>
-      <p:sp>
-        <p:nvSpPr>
-          <p:cNvPr id="5" name="TextBox 4"/>
+              <a:t>El C4 Container en Mermaid: la forma que un visor renderiza</a:t>
+            </a:r>
+          </a:p>
+        </p:txBody>
+      </p:sp>
+      <p:sp>
+        <p:nvSpPr>
+          <p:cNvPr id="5" name="Rounded Rectangle 4"/>
+          <p:cNvSpPr/>
+          <p:nvPr/>
+        </p:nvSpPr>
+        <p:spPr>
+          <a:xfrm>
+            <a:off x="457200" y="1261872"/>
+            <a:ext cx="11277295" cy="5093208"/>
+          </a:xfrm>
+          <a:prstGeom prst="roundRect">
+            <a:avLst>
+              <a:gd name="adj" fmla="val 12000"/>
+            </a:avLst>
+          </a:prstGeom>
+          <a:solidFill>
+            <a:srgbClr val="1E2A38"/>
+          </a:solidFill>
+          <a:ln>
+            <a:noFill/>
+          </a:ln>
+        </p:spPr>
+        <p:style>
+          <a:lnRef idx="1">
+            <a:schemeClr val="accent1"/>
+          </a:lnRef>
+          <a:fillRef idx="3">
+            <a:schemeClr val="accent1"/>
+          </a:fillRef>
+          <a:effectRef idx="2">
+            <a:schemeClr val="accent1"/>
+          </a:effectRef>
+          <a:fontRef idx="minor">
+            <a:schemeClr val="lt1"/>
+          </a:fontRef>
+        </p:style>
+        <p:txBody>
+          <a:bodyPr rtlCol="0" anchor="ctr"/>
+          <a:lstStyle/>
+          <a:p>
+            <a:pPr algn="ctr"/>
+          </a:p>
+        </p:txBody>
+      </p:sp>
+      <p:sp>
+        <p:nvSpPr>
+          <p:cNvPr id="6" name="Rectangle 5"/>
+          <p:cNvSpPr/>
+          <p:nvPr/>
+        </p:nvSpPr>
+        <p:spPr>
+          <a:xfrm>
+            <a:off x="457200" y="1261872"/>
+            <a:ext cx="11277295" cy="320040"/>
+          </a:xfrm>
+          <a:prstGeom prst="rect">
+            <a:avLst/>
+          </a:prstGeom>
+          <a:solidFill>
+            <a:srgbClr val="095292"/>
+          </a:solidFill>
+          <a:ln>
+            <a:noFill/>
+          </a:ln>
+        </p:spPr>
+        <p:style>
+          <a:lnRef idx="1">
+            <a:schemeClr val="accent1"/>
+          </a:lnRef>
+          <a:fillRef idx="3">
+            <a:schemeClr val="accent1"/>
+          </a:fillRef>
+          <a:effectRef idx="2">
+            <a:schemeClr val="accent1"/>
+          </a:effectRef>
+          <a:fontRef idx="minor">
+            <a:schemeClr val="lt1"/>
+          </a:fontRef>
+        </p:style>
+        <p:txBody>
+          <a:bodyPr rtlCol="0" anchor="ctr"/>
+          <a:lstStyle/>
+          <a:p>
+            <a:pPr algn="ctr"/>
+          </a:p>
+        </p:txBody>
+      </p:sp>
+      <p:sp>
+        <p:nvSpPr>
+          <p:cNvPr id="7" name="TextBox 6"/>
           <p:cNvSpPr txBox="1"/>
           <p:nvPr/>
         </p:nvSpPr>
         <p:spPr>
           <a:xfrm>
-            <a:off x="457200" y="1170432"/>
-            <a:ext cx="11277295" cy="5230368"/>
+            <a:off x="685800" y="1307592"/>
+            <a:ext cx="10820095" cy="256032"/>
+          </a:xfrm>
+          <a:prstGeom prst="rect">
+            <a:avLst/>
+          </a:prstGeom>
+          <a:noFill/>
+        </p:spPr>
+        <p:txBody>
+          <a:bodyPr wrap="square" anchor="ctr"/>
+          <a:lstStyle/>
+          <a:p>
+            <a:r>
+              <a:rPr sz="1000" b="1" i="0">
+                <a:solidFill>
+                  <a:srgbClr val="269CCB"/>
+                </a:solidFill>
+                <a:latin typeface="Calibri"/>
+              </a:rPr>
+              <a:t>● ● ●</a:t>
+            </a:r>
+          </a:p>
+        </p:txBody>
+      </p:sp>
+      <p:sp>
+        <p:nvSpPr>
+          <p:cNvPr id="8" name="TextBox 7"/>
+          <p:cNvSpPr txBox="1"/>
+          <p:nvPr/>
+        </p:nvSpPr>
+        <p:spPr>
+          <a:xfrm>
+            <a:off x="777240" y="1719072"/>
+            <a:ext cx="10637215" cy="4453128"/>
           </a:xfrm>
           <a:prstGeom prst="rect">
             <a:avLst/>
@@ -10340,88 +10525,280 @@
           <a:p>
             <a:pPr>
               <a:spcAft>
-                <a:spcPts val="800"/>
+                <a:spcPts val="371"/>
               </a:spcAft>
             </a:pPr>
             <a:r>
-              <a:rPr sz="2000" b="0" i="0">
-                <a:solidFill>
-                  <a:srgbClr val="333333"/>
-                </a:solidFill>
-                <a:latin typeface="Calibri"/>
-              </a:rPr>
-              <a:t>–   Reservar un turno en el ejemplo de tres cajas son tres saltos: el navegador a la aplicacion web, la aplicacion web a la API, y la API a la base de datos; si se agrega el correo son cuatro, y si el correo se envia por cola, cinco.</a:t>
+              <a:rPr sz="1300" b="0" i="0">
+                <a:solidFill>
+                  <a:srgbClr val="FFFFFF"/>
+                </a:solidFill>
+                <a:latin typeface="Calibri"/>
+              </a:rPr>
+              <a:t>flowchart TB</a:t>
             </a:r>
           </a:p>
           <a:p>
             <a:pPr>
               <a:spcAft>
-                <a:spcPts val="800"/>
+                <a:spcPts val="371"/>
               </a:spcAft>
             </a:pPr>
             <a:r>
-              <a:rPr sz="2000" b="0" i="0">
-                <a:solidFill>
-                  <a:srgbClr val="333333"/>
-                </a:solidFill>
-                <a:latin typeface="Calibri"/>
-              </a:rPr>
-              <a:t>–   El numero importa por lo que se explico arriba: cada salto agrega latencia y una probabilidad de fallo, y esa aritmetica es la unica defensa contra multiplicar cajas por gusto.</a:t>
+              <a:rPr sz="1300" b="0" i="0">
+                <a:solidFill>
+                  <a:srgbClr val="FFFFFF"/>
+                </a:solidFill>
+                <a:latin typeface="Calibri"/>
+              </a:rPr>
+              <a:t>  usuario([Usuario &lt;rol de su dominio&gt;])</a:t>
             </a:r>
           </a:p>
           <a:p>
             <a:pPr>
               <a:spcAft>
-                <a:spcPts val="800"/>
+                <a:spcPts val="371"/>
               </a:spcAft>
             </a:pPr>
             <a:r>
-              <a:rPr sz="2000" b="0" i="0">
-                <a:solidFill>
-                  <a:srgbClr val="333333"/>
-                </a:solidFill>
-                <a:latin typeface="Calibri"/>
-              </a:rPr>
-              <a:t>–   Un estudiante que no puede contar sus saltos no esta leyendo su diagrama, esta recordandolo.</a:t>
+              <a:rPr sz="1300" b="0" i="0">
+                <a:solidFill>
+                  <a:srgbClr val="FFFFFF"/>
+                </a:solidFill>
+                <a:latin typeface="Calibri"/>
+              </a:rPr>
+              <a:t/>
             </a:r>
           </a:p>
           <a:p>
             <a:pPr>
               <a:spcAft>
-                <a:spcPts val="800"/>
+                <a:spcPts val="371"/>
               </a:spcAft>
             </a:pPr>
             <a:r>
-              <a:rPr sz="2000" b="0" i="0">
-                <a:solidFill>
-                  <a:srgbClr val="333333"/>
-                </a:solidFill>
-                <a:latin typeface="Calibri"/>
-              </a:rPr>
-              <a:t>–   El tercero pregunta por un dato que se escribe en dos pasos, y es el mas dificil de los tres porque exige mirar la escritura y no la lectura.</a:t>
+              <a:rPr sz="1300" b="0" i="0">
+                <a:solidFill>
+                  <a:srgbClr val="FFFFFF"/>
+                </a:solidFill>
+                <a:latin typeface="Calibri"/>
+              </a:rPr>
+              <a:t>  subgraph turnos[la app]</a:t>
             </a:r>
           </a:p>
           <a:p>
             <a:pPr>
               <a:spcAft>
-                <a:spcPts val="800"/>
+                <a:spcPts val="371"/>
               </a:spcAft>
             </a:pPr>
             <a:r>
-              <a:rPr sz="2000" b="0" i="0">
-                <a:solidFill>
-                  <a:srgbClr val="333333"/>
-                </a:solidFill>
-                <a:latin typeface="Calibri"/>
-              </a:rPr>
-              <a:t>–   En el ejemplo, el turno se escribe en la base y despues se publica el mensaje del correo: si el segundo paso falla, el turno existe y el cliente nunca se entero.</a:t>
-            </a:r>
-          </a:p>
-        </p:txBody>
-      </p:sp>
-      <p:sp>
-        <p:nvSpPr>
-          <p:cNvPr id="6" name="TextBox 5"/>
+              <a:rPr sz="1300" b="0" i="0">
+                <a:solidFill>
+                  <a:srgbClr val="FFFFFF"/>
+                </a:solidFill>
+                <a:latin typeface="Calibri"/>
+              </a:rPr>
+              <a:t>    web[Web SPA&lt;br/&gt;React]</a:t>
+            </a:r>
+          </a:p>
+          <a:p>
+            <a:pPr>
+              <a:spcAft>
+                <a:spcPts val="371"/>
+              </a:spcAft>
+            </a:pPr>
+            <a:r>
+              <a:rPr sz="1300" b="0" i="0">
+                <a:solidFill>
+                  <a:srgbClr val="FFFFFF"/>
+                </a:solidFill>
+                <a:latin typeface="Calibri"/>
+              </a:rPr>
+              <a:t>    api[API REST&lt;br/&gt;Node + Express]</a:t>
+            </a:r>
+          </a:p>
+          <a:p>
+            <a:pPr>
+              <a:spcAft>
+                <a:spcPts val="371"/>
+              </a:spcAft>
+            </a:pPr>
+            <a:r>
+              <a:rPr sz="1300" b="0" i="0">
+                <a:solidFill>
+                  <a:srgbClr val="FFFFFF"/>
+                </a:solidFill>
+                <a:latin typeface="Calibri"/>
+              </a:rPr>
+              <a:t>    db[(Base de datos&lt;br/&gt;PostgreSQL)]</a:t>
+            </a:r>
+          </a:p>
+          <a:p>
+            <a:pPr>
+              <a:spcAft>
+                <a:spcPts val="371"/>
+              </a:spcAft>
+            </a:pPr>
+            <a:r>
+              <a:rPr sz="1300" b="0" i="0">
+                <a:solidFill>
+                  <a:srgbClr val="FFFFFF"/>
+                </a:solidFill>
+                <a:latin typeface="Calibri"/>
+              </a:rPr>
+              <a:t>    cola[[Cola de trabajos&lt;br/&gt;Redis]]</a:t>
+            </a:r>
+          </a:p>
+          <a:p>
+            <a:pPr>
+              <a:spcAft>
+                <a:spcPts val="371"/>
+              </a:spcAft>
+            </a:pPr>
+            <a:r>
+              <a:rPr sz="1300" b="0" i="0">
+                <a:solidFill>
+                  <a:srgbClr val="FFFFFF"/>
+                </a:solidFill>
+                <a:latin typeface="Calibri"/>
+              </a:rPr>
+              <a:t>  end</a:t>
+            </a:r>
+          </a:p>
+          <a:p>
+            <a:pPr>
+              <a:spcAft>
+                <a:spcPts val="371"/>
+              </a:spcAft>
+            </a:pPr>
+            <a:r>
+              <a:rPr sz="1300" b="0" i="0">
+                <a:solidFill>
+                  <a:srgbClr val="FFFFFF"/>
+                </a:solidFill>
+                <a:latin typeface="Calibri"/>
+              </a:rPr>
+              <a:t/>
+            </a:r>
+          </a:p>
+          <a:p>
+            <a:pPr>
+              <a:spcAft>
+                <a:spcPts val="371"/>
+              </a:spcAft>
+            </a:pPr>
+            <a:r>
+              <a:rPr sz="1300" b="0" i="0">
+                <a:solidFill>
+                  <a:srgbClr val="FFFFFF"/>
+                </a:solidFill>
+                <a:latin typeface="Calibri"/>
+              </a:rPr>
+              <a:t>  correo[Servicio de correo&lt;br/&gt;externo]</a:t>
+            </a:r>
+          </a:p>
+          <a:p>
+            <a:pPr>
+              <a:spcAft>
+                <a:spcPts val="371"/>
+              </a:spcAft>
+            </a:pPr>
+            <a:r>
+              <a:rPr sz="1300" b="0" i="0">
+                <a:solidFill>
+                  <a:srgbClr val="FFFFFF"/>
+                </a:solidFill>
+                <a:latin typeface="Calibri"/>
+              </a:rPr>
+              <a:t/>
+            </a:r>
+          </a:p>
+          <a:p>
+            <a:pPr>
+              <a:spcAft>
+                <a:spcPts val="371"/>
+              </a:spcAft>
+            </a:pPr>
+            <a:r>
+              <a:rPr sz="1300" b="0" i="0">
+                <a:solidFill>
+                  <a:srgbClr val="FFFFFF"/>
+                </a:solidFill>
+                <a:latin typeface="Calibri"/>
+              </a:rPr>
+              <a:t>  usuario --&gt;|HTTPS| web</a:t>
+            </a:r>
+          </a:p>
+          <a:p>
+            <a:pPr>
+              <a:spcAft>
+                <a:spcPts val="371"/>
+              </a:spcAft>
+            </a:pPr>
+            <a:r>
+              <a:rPr sz="1300" b="0" i="0">
+                <a:solidFill>
+                  <a:srgbClr val="FFFFFF"/>
+                </a:solidFill>
+                <a:latin typeface="Calibri"/>
+              </a:rPr>
+              <a:t>  web --&gt;|JSON/HTTPS| api</a:t>
+            </a:r>
+          </a:p>
+          <a:p>
+            <a:pPr>
+              <a:spcAft>
+                <a:spcPts val="371"/>
+              </a:spcAft>
+            </a:pPr>
+            <a:r>
+              <a:rPr sz="1300" b="0" i="0">
+                <a:solidFill>
+                  <a:srgbClr val="FFFFFF"/>
+                </a:solidFill>
+                <a:latin typeface="Calibri"/>
+              </a:rPr>
+              <a:t>  api --&gt;|SQL| db</a:t>
+            </a:r>
+          </a:p>
+          <a:p>
+            <a:pPr>
+              <a:spcAft>
+                <a:spcPts val="371"/>
+              </a:spcAft>
+            </a:pPr>
+            <a:r>
+              <a:rPr sz="1300" b="0" i="0">
+                <a:solidFill>
+                  <a:srgbClr val="FFFFFF"/>
+                </a:solidFill>
+                <a:latin typeface="Calibri"/>
+              </a:rPr>
+              <a:t>  api --&gt;|encola| cola</a:t>
+            </a:r>
+          </a:p>
+          <a:p>
+            <a:pPr>
+              <a:spcAft>
+                <a:spcPts val="371"/>
+              </a:spcAft>
+            </a:pPr>
+            <a:r>
+              <a:rPr sz="1300" b="0" i="0">
+                <a:solidFill>
+                  <a:srgbClr val="FFFFFF"/>
+                </a:solidFill>
+                <a:latin typeface="Calibri"/>
+              </a:rPr>
+              <a:t>  cola --&gt;|SMTP| correo</a:t>
+            </a:r>
+          </a:p>
+        </p:txBody>
+      </p:sp>
+      <p:sp>
+        <p:nvSpPr>
+          <p:cNvPr id="9" name="TextBox 8"/>
           <p:cNvSpPr txBox="1"/>
           <p:nvPr/>
         </p:nvSpPr>
@@ -10901,21 +11278,141 @@
                 </a:solidFill>
                 <a:latin typeface="Calibri"/>
               </a:rPr>
-              <a:t>Los tres riesgos de distribuir, y por que son esos tres (3/3)</a:t>
-            </a:r>
-          </a:p>
-        </p:txBody>
-      </p:sp>
-      <p:sp>
-        <p:nvSpPr>
-          <p:cNvPr id="5" name="TextBox 4"/>
+              <a:t>Lo que importa del diagrama, y no es el dibujo</a:t>
+            </a:r>
+          </a:p>
+        </p:txBody>
+      </p:sp>
+      <p:sp>
+        <p:nvSpPr>
+          <p:cNvPr id="5" name="Rounded Rectangle 4"/>
+          <p:cNvSpPr/>
+          <p:nvPr/>
+        </p:nvSpPr>
+        <p:spPr>
+          <a:xfrm>
+            <a:off x="457200" y="1261872"/>
+            <a:ext cx="11277295" cy="5093208"/>
+          </a:xfrm>
+          <a:prstGeom prst="roundRect">
+            <a:avLst>
+              <a:gd name="adj" fmla="val 12000"/>
+            </a:avLst>
+          </a:prstGeom>
+          <a:solidFill>
+            <a:srgbClr val="1E2A38"/>
+          </a:solidFill>
+          <a:ln>
+            <a:noFill/>
+          </a:ln>
+        </p:spPr>
+        <p:style>
+          <a:lnRef idx="1">
+            <a:schemeClr val="accent1"/>
+          </a:lnRef>
+          <a:fillRef idx="3">
+            <a:schemeClr val="accent1"/>
+          </a:fillRef>
+          <a:effectRef idx="2">
+            <a:schemeClr val="accent1"/>
+          </a:effectRef>
+          <a:fontRef idx="minor">
+            <a:schemeClr val="lt1"/>
+          </a:fontRef>
+        </p:style>
+        <p:txBody>
+          <a:bodyPr rtlCol="0" anchor="ctr"/>
+          <a:lstStyle/>
+          <a:p>
+            <a:pPr algn="ctr"/>
+          </a:p>
+        </p:txBody>
+      </p:sp>
+      <p:sp>
+        <p:nvSpPr>
+          <p:cNvPr id="6" name="Rectangle 5"/>
+          <p:cNvSpPr/>
+          <p:nvPr/>
+        </p:nvSpPr>
+        <p:spPr>
+          <a:xfrm>
+            <a:off x="457200" y="1261872"/>
+            <a:ext cx="11277295" cy="320040"/>
+          </a:xfrm>
+          <a:prstGeom prst="rect">
+            <a:avLst/>
+          </a:prstGeom>
+          <a:solidFill>
+            <a:srgbClr val="095292"/>
+          </a:solidFill>
+          <a:ln>
+            <a:noFill/>
+          </a:ln>
+        </p:spPr>
+        <p:style>
+          <a:lnRef idx="1">
+            <a:schemeClr val="accent1"/>
+          </a:lnRef>
+          <a:fillRef idx="3">
+            <a:schemeClr val="accent1"/>
+          </a:fillRef>
+          <a:effectRef idx="2">
+            <a:schemeClr val="accent1"/>
+          </a:effectRef>
+          <a:fontRef idx="minor">
+            <a:schemeClr val="lt1"/>
+          </a:fontRef>
+        </p:style>
+        <p:txBody>
+          <a:bodyPr rtlCol="0" anchor="ctr"/>
+          <a:lstStyle/>
+          <a:p>
+            <a:pPr algn="ctr"/>
+          </a:p>
+        </p:txBody>
+      </p:sp>
+      <p:sp>
+        <p:nvSpPr>
+          <p:cNvPr id="7" name="TextBox 6"/>
           <p:cNvSpPr txBox="1"/>
           <p:nvPr/>
         </p:nvSpPr>
         <p:spPr>
           <a:xfrm>
-            <a:off x="457200" y="1170432"/>
-            <a:ext cx="11277295" cy="5230368"/>
+            <a:off x="685800" y="1307592"/>
+            <a:ext cx="10820095" cy="256032"/>
+          </a:xfrm>
+          <a:prstGeom prst="rect">
+            <a:avLst/>
+          </a:prstGeom>
+          <a:noFill/>
+        </p:spPr>
+        <p:txBody>
+          <a:bodyPr wrap="square" anchor="ctr"/>
+          <a:lstStyle/>
+          <a:p>
+            <a:r>
+              <a:rPr sz="1000" b="1" i="0">
+                <a:solidFill>
+                  <a:srgbClr val="269CCB"/>
+                </a:solidFill>
+                <a:latin typeface="Calibri"/>
+              </a:rPr>
+              <a:t>● ● ●</a:t>
+            </a:r>
+          </a:p>
+        </p:txBody>
+      </p:sp>
+      <p:sp>
+        <p:nvSpPr>
+          <p:cNvPr id="8" name="TextBox 7"/>
+          <p:cNvSpPr txBox="1"/>
+          <p:nvPr/>
+        </p:nvSpPr>
+        <p:spPr>
+          <a:xfrm>
+            <a:off x="777240" y="1719072"/>
+            <a:ext cx="10637215" cy="4453128"/>
           </a:xfrm>
           <a:prstGeom prst="rect">
             <a:avLst/>
@@ -10930,56 +11427,216 @@
           <a:p>
             <a:pPr>
               <a:spcAft>
-                <a:spcPts val="800"/>
+                <a:spcPts val="400"/>
               </a:spcAft>
             </a:pPr>
             <a:r>
-              <a:rPr sz="2000" b="0" i="0">
-                <a:solidFill>
-                  <a:srgbClr val="333333"/>
-                </a:solidFill>
-                <a:latin typeface="Calibri"/>
-              </a:rPr>
-              <a:t>–   Ese es el problema de fondo de todo sistema distribuido, y hoy no se resuelve con una saga completa: se reconoce, se nombra el dato concreto y se dice que queda inconsistente.</a:t>
+              <a:rPr sz="1400" b="0" i="0">
+                <a:solidFill>
+                  <a:srgbClr val="FFFFFF"/>
+                </a:solidFill>
+                <a:latin typeface="Calibri"/>
+              </a:rPr>
+              <a:t>%% Cada caja lleva TECNOLOGIA, no solo nombre:</a:t>
             </a:r>
           </a:p>
           <a:p>
             <a:pPr>
               <a:spcAft>
-                <a:spcPts val="800"/>
+                <a:spcPts val="400"/>
               </a:spcAft>
             </a:pPr>
             <a:r>
-              <a:rPr sz="2000" b="0" i="0">
-                <a:solidFill>
-                  <a:srgbClr val="333333"/>
-                </a:solidFill>
-                <a:latin typeface="Calibri"/>
-              </a:rPr>
-              <a:t>–   Si un estudiante dice que no encuentra ningun riesgo, casi siempre es porque su diagrama tiene flechas sin protocolo o sin formato: no sabe por donde puede romperse porque nunca definio como se comunican las piezas.</a:t>
+              <a:rPr sz="1400" b="0" i="0">
+                <a:solidFill>
+                  <a:srgbClr val="FFFFFF"/>
+                </a:solidFill>
+                <a:latin typeface="Calibri"/>
+              </a:rPr>
+              <a:t>%%   mal:  api[API]</a:t>
             </a:r>
           </a:p>
           <a:p>
             <a:pPr>
               <a:spcAft>
-                <a:spcPts val="800"/>
+                <a:spcPts val="400"/>
               </a:spcAft>
             </a:pPr>
             <a:r>
-              <a:rPr sz="2000" b="0" i="0">
-                <a:solidFill>
-                  <a:srgbClr val="333333"/>
-                </a:solidFill>
-                <a:latin typeface="Calibri"/>
-              </a:rPr>
-              <a:t>–   Devolverle el diagrama es mas util que darle un ejemplo.</a:t>
-            </a:r>
-          </a:p>
-        </p:txBody>
-      </p:sp>
-      <p:sp>
-        <p:nvSpPr>
-          <p:cNvPr id="6" name="TextBox 5"/>
+              <a:rPr sz="1400" b="0" i="0">
+                <a:solidFill>
+                  <a:srgbClr val="FFFFFF"/>
+                </a:solidFill>
+                <a:latin typeface="Calibri"/>
+              </a:rPr>
+              <a:t>%%   bien: api[API REST&lt;br/&gt;Node + Express]</a:t>
+            </a:r>
+          </a:p>
+          <a:p>
+            <a:pPr>
+              <a:spcAft>
+                <a:spcPts val="400"/>
+              </a:spcAft>
+            </a:pPr>
+            <a:r>
+              <a:rPr sz="1400" b="0" i="0">
+                <a:solidFill>
+                  <a:srgbClr val="FFFFFF"/>
+                </a:solidFill>
+                <a:latin typeface="Calibri"/>
+              </a:rPr>
+              <a:t/>
+            </a:r>
+          </a:p>
+          <a:p>
+            <a:pPr>
+              <a:spcAft>
+                <a:spcPts val="400"/>
+              </a:spcAft>
+            </a:pPr>
+            <a:r>
+              <a:rPr sz="1400" b="0" i="0">
+                <a:solidFill>
+                  <a:srgbClr val="FFFFFF"/>
+                </a:solidFill>
+                <a:latin typeface="Calibri"/>
+              </a:rPr>
+              <a:t>%% Cada flecha lleva PROTOCOLO y sentido:</a:t>
+            </a:r>
+          </a:p>
+          <a:p>
+            <a:pPr>
+              <a:spcAft>
+                <a:spcPts val="400"/>
+              </a:spcAft>
+            </a:pPr>
+            <a:r>
+              <a:rPr sz="1400" b="0" i="0">
+                <a:solidFill>
+                  <a:srgbClr val="FFFFFF"/>
+                </a:solidFill>
+                <a:latin typeface="Calibri"/>
+              </a:rPr>
+              <a:t>%%   mal:  web --- api</a:t>
+            </a:r>
+          </a:p>
+          <a:p>
+            <a:pPr>
+              <a:spcAft>
+                <a:spcPts val="400"/>
+              </a:spcAft>
+            </a:pPr>
+            <a:r>
+              <a:rPr sz="1400" b="0" i="0">
+                <a:solidFill>
+                  <a:srgbClr val="FFFFFF"/>
+                </a:solidFill>
+                <a:latin typeface="Calibri"/>
+              </a:rPr>
+              <a:t>%%   bien: web --&gt;|JSON/HTTPS| api</a:t>
+            </a:r>
+          </a:p>
+          <a:p>
+            <a:pPr>
+              <a:spcAft>
+                <a:spcPts val="400"/>
+              </a:spcAft>
+            </a:pPr>
+            <a:r>
+              <a:rPr sz="1400" b="0" i="0">
+                <a:solidFill>
+                  <a:srgbClr val="FFFFFF"/>
+                </a:solidFill>
+                <a:latin typeface="Calibri"/>
+              </a:rPr>
+              <a:t/>
+            </a:r>
+          </a:p>
+          <a:p>
+            <a:pPr>
+              <a:spcAft>
+                <a:spcPts val="400"/>
+              </a:spcAft>
+            </a:pPr>
+            <a:r>
+              <a:rPr sz="1400" b="0" i="0">
+                <a:solidFill>
+                  <a:srgbClr val="FFFFFF"/>
+                </a:solidFill>
+                <a:latin typeface="Calibri"/>
+              </a:rPr>
+              <a:t>%% Lo externo va FUERA del subgraph del sistema: es la frontera</a:t>
+            </a:r>
+          </a:p>
+          <a:p>
+            <a:pPr>
+              <a:spcAft>
+                <a:spcPts val="400"/>
+              </a:spcAft>
+            </a:pPr>
+            <a:r>
+              <a:rPr sz="1400" b="0" i="0">
+                <a:solidFill>
+                  <a:srgbClr val="FFFFFF"/>
+                </a:solidFill>
+                <a:latin typeface="Calibri"/>
+              </a:rPr>
+              <a:t>%% que define de que se es responsable.</a:t>
+            </a:r>
+          </a:p>
+          <a:p>
+            <a:pPr>
+              <a:spcAft>
+                <a:spcPts val="400"/>
+              </a:spcAft>
+            </a:pPr>
+            <a:r>
+              <a:rPr sz="1400" b="0" i="0">
+                <a:solidFill>
+                  <a:srgbClr val="FFFFFF"/>
+                </a:solidFill>
+                <a:latin typeface="Calibri"/>
+              </a:rPr>
+              <a:t/>
+            </a:r>
+          </a:p>
+          <a:p>
+            <a:pPr>
+              <a:spcAft>
+                <a:spcPts val="400"/>
+              </a:spcAft>
+            </a:pPr>
+            <a:r>
+              <a:rPr sz="1400" b="0" i="0">
+                <a:solidFill>
+                  <a:srgbClr val="FFFFFF"/>
+                </a:solidFill>
+                <a:latin typeface="Calibri"/>
+              </a:rPr>
+              <a:t>%% Y los nombres tienen que ser LOS MISMOS en el C4, en el Despliegue</a:t>
+            </a:r>
+          </a:p>
+          <a:p>
+            <a:pPr>
+              <a:spcAft>
+                <a:spcPts val="400"/>
+              </a:spcAft>
+            </a:pPr>
+            <a:r>
+              <a:rPr sz="1400" b="0" i="0">
+                <a:solidFill>
+                  <a:srgbClr val="FFFFFF"/>
+                </a:solidFill>
+                <a:latin typeface="Calibri"/>
+              </a:rPr>
+              <a:t>%% (Clase 7) y en el Component (Clase 11). Hay que reconciliarlos.</a:t>
+            </a:r>
+          </a:p>
+        </p:txBody>
+      </p:sp>
+      <p:sp>
+        <p:nvSpPr>
+          <p:cNvPr id="9" name="TextBox 8"/>
           <p:cNvSpPr txBox="1"/>
           <p:nvPr/>
         </p:nvSpPr>
@@ -11047,7 +11704,7 @@
         <p:spPr>
           <a:xfrm>
             <a:off x="0" y="0"/>
-            <a:ext cx="12191695" cy="960120"/>
+            <a:ext cx="12191695" cy="1170432"/>
           </a:xfrm>
           <a:prstGeom prst="rect">
             <a:avLst/>
@@ -11089,7 +11746,7 @@
         </p:nvSpPr>
         <p:spPr>
           <a:xfrm>
-            <a:off x="0" y="960120"/>
+            <a:off x="0" y="1170432"/>
             <a:ext cx="12191695" cy="41148"/>
           </a:xfrm>
           <a:prstGeom prst="rect">
@@ -11133,7 +11790,7 @@
         <p:spPr>
           <a:xfrm>
             <a:off x="457200" y="164592"/>
-            <a:ext cx="11277295" cy="502920"/>
+            <a:ext cx="11277295" cy="384048"/>
           </a:xfrm>
           <a:prstGeom prst="rect">
             <a:avLst/>
@@ -11153,7 +11810,7 @@
                 </a:solidFill>
                 <a:latin typeface="Calibri"/>
               </a:rPr>
-              <a:t>Preguntas frecuentes y cierre conceptual () (1/3)</a:t>
+              <a:t>Ejemplo de diagrama C4 — nivel Containers</a:t>
             </a:r>
           </a:p>
         </p:txBody>
@@ -11166,8 +11823,8 @@
         </p:nvSpPr>
         <p:spPr>
           <a:xfrm>
-            <a:off x="457200" y="1170432"/>
-            <a:ext cx="11277295" cy="5230368"/>
+            <a:off x="457200" y="566928"/>
+            <a:ext cx="11277295" cy="411480"/>
           </a:xfrm>
           <a:prstGeom prst="rect">
             <a:avLst/>
@@ -11180,74 +11837,614 @@
           </a:bodyPr>
           <a:lstStyle/>
           <a:p>
-            <a:pPr>
-              <a:spcAft>
-                <a:spcPts val="800"/>
-              </a:spcAft>
-            </a:pPr>
-            <a:r>
-              <a:rPr sz="2000" b="0" i="0">
-                <a:solidFill>
-                  <a:srgbClr val="333333"/>
-                </a:solidFill>
-                <a:latin typeface="Calibri"/>
-              </a:rPr>
-              <a:t>–   Las preguntas de esta clase son predecibles y conviene responderlas con firmeza.</a:t>
-            </a:r>
-          </a:p>
-          <a:p>
-            <a:pPr>
-              <a:spcAft>
-                <a:spcPts val="800"/>
-              </a:spcAft>
-            </a:pPr>
-            <a:r>
-              <a:rPr sz="2000" b="0" i="0">
-                <a:solidFill>
-                  <a:srgbClr val="333333"/>
-                </a:solidFill>
-                <a:latin typeface="Calibri"/>
-              </a:rPr>
-              <a:t>–   Cuantos microservicios son los correctos: no hay numero correcto, hay justificacion por frontera</a:t>
-            </a:r>
-          </a:p>
-          <a:p>
-            <a:pPr>
-              <a:spcAft>
-                <a:spcPts val="800"/>
-              </a:spcAft>
-            </a:pPr>
-            <a:r>
-              <a:rPr sz="2000" b="0" i="0">
-                <a:solidFill>
-                  <a:srgbClr val="333333"/>
-                </a:solidFill>
-                <a:latin typeface="Calibri"/>
-              </a:rPr>
-              <a:t>–   Y el rango de dos a cinco contenedores que exige el curso es una restriccion pedagogica pensada para proyectos de una a tres personas en doce semanas, no un hallazgo de la ingenieria.</a:t>
-            </a:r>
-          </a:p>
-          <a:p>
-            <a:pPr>
-              <a:spcAft>
-                <a:spcPts val="800"/>
-              </a:spcAft>
-            </a:pPr>
-            <a:r>
-              <a:rPr sz="2000" b="0" i="0">
-                <a:solidFill>
-                  <a:srgbClr val="333333"/>
-                </a:solidFill>
-                <a:latin typeface="Calibri"/>
-              </a:rPr>
-              <a:t>–   Si las empresas grandes tienen cientos de servicios, por que nosotros solo tres: porque el numero de servicios que una organizacion puede sostener es funcion del numero de equipos autonomos y de la madurez de su automatizacion de despliegue y observabilidad</a:t>
-            </a:r>
-          </a:p>
-        </p:txBody>
-      </p:sp>
-      <p:sp>
-        <p:nvSpPr>
-          <p:cNvPr id="6" name="TextBox 5"/>
+            <a:r>
+              <a:rPr sz="1400" b="0" i="0">
+                <a:solidFill>
+                  <a:srgbClr val="B8D8EE"/>
+                </a:solidFill>
+                <a:latin typeface="Calibri"/>
+              </a:rPr>
+              <a:t>2–5 cajas justificadas, cada flecha con protocolo Y formato</a:t>
+            </a:r>
+          </a:p>
+        </p:txBody>
+      </p:sp>
+      <p:sp>
+        <p:nvSpPr>
+          <p:cNvPr id="6" name="Rounded Rectangle 5"/>
+          <p:cNvSpPr/>
+          <p:nvPr/>
+        </p:nvSpPr>
+        <p:spPr>
+          <a:xfrm>
+            <a:off x="822960" y="2011680"/>
+            <a:ext cx="2377440" cy="1097280"/>
+          </a:xfrm>
+          <a:prstGeom prst="roundRect">
+            <a:avLst>
+              <a:gd name="adj" fmla="val 12000"/>
+            </a:avLst>
+          </a:prstGeom>
+          <a:solidFill>
+            <a:srgbClr val="095292"/>
+          </a:solidFill>
+          <a:ln>
+            <a:noFill/>
+          </a:ln>
+        </p:spPr>
+        <p:style>
+          <a:lnRef idx="1">
+            <a:schemeClr val="accent1"/>
+          </a:lnRef>
+          <a:fillRef idx="3">
+            <a:schemeClr val="accent1"/>
+          </a:fillRef>
+          <a:effectRef idx="2">
+            <a:schemeClr val="accent1"/>
+          </a:effectRef>
+          <a:fontRef idx="minor">
+            <a:schemeClr val="lt1"/>
+          </a:fontRef>
+        </p:style>
+        <p:txBody>
+          <a:bodyPr rtlCol="0" anchor="ctr" wrap="square"/>
+          <a:lstStyle/>
+          <a:p>
+            <a:pPr algn="ctr"/>
+            <a:r>
+              <a:rPr sz="1100" b="1" i="0">
+                <a:solidFill>
+                  <a:srgbClr val="FFFFFF"/>
+                </a:solidFill>
+                <a:latin typeface="Calibri"/>
+              </a:rPr>
+              <a:t>App web
+(Container · React)</a:t>
+            </a:r>
+          </a:p>
+        </p:txBody>
+      </p:sp>
+      <p:sp>
+        <p:nvSpPr>
+          <p:cNvPr id="7" name="Rounded Rectangle 6"/>
+          <p:cNvSpPr/>
+          <p:nvPr/>
+        </p:nvSpPr>
+        <p:spPr>
+          <a:xfrm>
+            <a:off x="4754880" y="2011680"/>
+            <a:ext cx="2377440" cy="1097280"/>
+          </a:xfrm>
+          <a:prstGeom prst="roundRect">
+            <a:avLst>
+              <a:gd name="adj" fmla="val 12000"/>
+            </a:avLst>
+          </a:prstGeom>
+          <a:solidFill>
+            <a:srgbClr val="095292"/>
+          </a:solidFill>
+          <a:ln>
+            <a:noFill/>
+          </a:ln>
+        </p:spPr>
+        <p:style>
+          <a:lnRef idx="1">
+            <a:schemeClr val="accent1"/>
+          </a:lnRef>
+          <a:fillRef idx="3">
+            <a:schemeClr val="accent1"/>
+          </a:fillRef>
+          <a:effectRef idx="2">
+            <a:schemeClr val="accent1"/>
+          </a:effectRef>
+          <a:fontRef idx="minor">
+            <a:schemeClr val="lt1"/>
+          </a:fontRef>
+        </p:style>
+        <p:txBody>
+          <a:bodyPr rtlCol="0" anchor="ctr" wrap="square"/>
+          <a:lstStyle/>
+          <a:p>
+            <a:pPr algn="ctr"/>
+            <a:r>
+              <a:rPr sz="1100" b="1" i="0">
+                <a:solidFill>
+                  <a:srgbClr val="FFFFFF"/>
+                </a:solidFill>
+                <a:latin typeface="Calibri"/>
+              </a:rPr>
+              <a:t>API de turnos
+(Container · Node.js)</a:t>
+            </a:r>
+          </a:p>
+        </p:txBody>
+      </p:sp>
+      <p:sp>
+        <p:nvSpPr>
+          <p:cNvPr id="8" name="Rounded Rectangle 7"/>
+          <p:cNvSpPr/>
+          <p:nvPr/>
+        </p:nvSpPr>
+        <p:spPr>
+          <a:xfrm>
+            <a:off x="8595360" y="2011680"/>
+            <a:ext cx="2377440" cy="1097280"/>
+          </a:xfrm>
+          <a:prstGeom prst="roundRect">
+            <a:avLst>
+              <a:gd name="adj" fmla="val 12000"/>
+            </a:avLst>
+          </a:prstGeom>
+          <a:solidFill>
+            <a:srgbClr val="269CCB"/>
+          </a:solidFill>
+          <a:ln>
+            <a:noFill/>
+          </a:ln>
+        </p:spPr>
+        <p:style>
+          <a:lnRef idx="1">
+            <a:schemeClr val="accent1"/>
+          </a:lnRef>
+          <a:fillRef idx="3">
+            <a:schemeClr val="accent1"/>
+          </a:fillRef>
+          <a:effectRef idx="2">
+            <a:schemeClr val="accent1"/>
+          </a:effectRef>
+          <a:fontRef idx="minor">
+            <a:schemeClr val="lt1"/>
+          </a:fontRef>
+        </p:style>
+        <p:txBody>
+          <a:bodyPr rtlCol="0" anchor="ctr" wrap="square"/>
+          <a:lstStyle/>
+          <a:p>
+            <a:pPr algn="ctr"/>
+            <a:r>
+              <a:rPr sz="1100" b="1" i="0">
+                <a:solidFill>
+                  <a:srgbClr val="FFFFFF"/>
+                </a:solidFill>
+                <a:latin typeface="Calibri"/>
+              </a:rPr>
+              <a:t>Base de turnos
+(ContainerDb · PostgreSQL)</a:t>
+            </a:r>
+          </a:p>
+        </p:txBody>
+      </p:sp>
+      <p:sp>
+        <p:nvSpPr>
+          <p:cNvPr id="9" name="Rounded Rectangle 8"/>
+          <p:cNvSpPr/>
+          <p:nvPr/>
+        </p:nvSpPr>
+        <p:spPr>
+          <a:xfrm>
+            <a:off x="822960" y="3931920"/>
+            <a:ext cx="2377440" cy="914400"/>
+          </a:xfrm>
+          <a:prstGeom prst="roundRect">
+            <a:avLst>
+              <a:gd name="adj" fmla="val 12000"/>
+            </a:avLst>
+          </a:prstGeom>
+          <a:solidFill>
+            <a:srgbClr val="FFD000"/>
+          </a:solidFill>
+          <a:ln>
+            <a:noFill/>
+          </a:ln>
+        </p:spPr>
+        <p:style>
+          <a:lnRef idx="1">
+            <a:schemeClr val="accent1"/>
+          </a:lnRef>
+          <a:fillRef idx="3">
+            <a:schemeClr val="accent1"/>
+          </a:fillRef>
+          <a:effectRef idx="2">
+            <a:schemeClr val="accent1"/>
+          </a:effectRef>
+          <a:fontRef idx="minor">
+            <a:schemeClr val="lt1"/>
+          </a:fontRef>
+        </p:style>
+        <p:txBody>
+          <a:bodyPr rtlCol="0" anchor="ctr" wrap="square"/>
+          <a:lstStyle/>
+          <a:p>
+            <a:pPr algn="ctr"/>
+            <a:r>
+              <a:rPr sz="1300" b="1" i="0">
+                <a:solidFill>
+                  <a:srgbClr val="095292"/>
+                </a:solidFill>
+                <a:latin typeface="Calibri"/>
+              </a:rPr>
+              <a:t>Cliente
+(Person)</a:t>
+            </a:r>
+          </a:p>
+        </p:txBody>
+      </p:sp>
+      <p:sp>
+        <p:nvSpPr>
+          <p:cNvPr id="10" name="Rounded Rectangle 9"/>
+          <p:cNvSpPr/>
+          <p:nvPr/>
+        </p:nvSpPr>
+        <p:spPr>
+          <a:xfrm>
+            <a:off x="4754880" y="3931920"/>
+            <a:ext cx="2377440" cy="914400"/>
+          </a:xfrm>
+          <a:prstGeom prst="roundRect">
+            <a:avLst>
+              <a:gd name="adj" fmla="val 12000"/>
+            </a:avLst>
+          </a:prstGeom>
+          <a:solidFill>
+            <a:srgbClr val="095292"/>
+          </a:solidFill>
+          <a:ln>
+            <a:noFill/>
+          </a:ln>
+        </p:spPr>
+        <p:style>
+          <a:lnRef idx="1">
+            <a:schemeClr val="accent1"/>
+          </a:lnRef>
+          <a:fillRef idx="3">
+            <a:schemeClr val="accent1"/>
+          </a:fillRef>
+          <a:effectRef idx="2">
+            <a:schemeClr val="accent1"/>
+          </a:effectRef>
+          <a:fontRef idx="minor">
+            <a:schemeClr val="lt1"/>
+          </a:fontRef>
+        </p:style>
+        <p:txBody>
+          <a:bodyPr rtlCol="0" anchor="ctr" wrap="square"/>
+          <a:lstStyle/>
+          <a:p>
+            <a:pPr algn="ctr"/>
+            <a:r>
+              <a:rPr sz="1100" b="1" i="0">
+                <a:solidFill>
+                  <a:srgbClr val="FFFFFF"/>
+                </a:solidFill>
+                <a:latin typeface="Calibri"/>
+              </a:rPr>
+              <a:t>Worker de avisos
+(Container · cola)</a:t>
+            </a:r>
+          </a:p>
+        </p:txBody>
+      </p:sp>
+      <p:cxnSp>
+        <p:nvCxnSpPr>
+          <p:cNvPr id="11" name="Connector 10"/>
+          <p:cNvCxnSpPr/>
+          <p:nvPr/>
+        </p:nvCxnSpPr>
+        <p:spPr>
+          <a:xfrm flipV="1">
+            <a:off x="2011680" y="3108960"/>
+            <a:ext cx="0" cy="822960"/>
+          </a:xfrm>
+          <a:prstGeom prst="line">
+            <a:avLst/>
+          </a:prstGeom>
+          <a:ln w="22225">
+            <a:solidFill>
+              <a:srgbClr val="666666"/>
+            </a:solidFill>
+            <a:tailEnd type="triangle" w="med" len="med"/>
+          </a:ln>
+        </p:spPr>
+        <p:style>
+          <a:lnRef idx="2">
+            <a:schemeClr val="accent1"/>
+          </a:lnRef>
+          <a:fillRef idx="0">
+            <a:schemeClr val="accent1"/>
+          </a:fillRef>
+          <a:effectRef idx="1">
+            <a:schemeClr val="accent1"/>
+          </a:effectRef>
+          <a:fontRef idx="minor">
+            <a:schemeClr val="tx1"/>
+          </a:fontRef>
+        </p:style>
+      </p:cxnSp>
+      <p:sp>
+        <p:nvSpPr>
+          <p:cNvPr id="12" name="TextBox 11"/>
+          <p:cNvSpPr txBox="1"/>
+          <p:nvPr/>
+        </p:nvSpPr>
+        <p:spPr>
+          <a:xfrm>
+            <a:off x="2121408" y="3319272"/>
+            <a:ext cx="1645920" cy="320040"/>
+          </a:xfrm>
+          <a:prstGeom prst="rect">
+            <a:avLst/>
+          </a:prstGeom>
+          <a:noFill/>
+        </p:spPr>
+        <p:txBody>
+          <a:bodyPr wrap="square">
+            <a:spAutoFit/>
+          </a:bodyPr>
+          <a:lstStyle/>
+          <a:p>
+            <a:pPr algn="l"/>
+            <a:r>
+              <a:rPr sz="1000" b="0" i="1">
+                <a:solidFill>
+                  <a:srgbClr val="666666"/>
+                </a:solidFill>
+                <a:latin typeface="Calibri"/>
+              </a:rPr>
+              <a:t>usa · HTTPS</a:t>
+            </a:r>
+          </a:p>
+        </p:txBody>
+      </p:sp>
+      <p:cxnSp>
+        <p:nvCxnSpPr>
+          <p:cNvPr id="13" name="Connector 12"/>
+          <p:cNvCxnSpPr/>
+          <p:nvPr/>
+        </p:nvCxnSpPr>
+        <p:spPr>
+          <a:xfrm>
+            <a:off x="3200400" y="2560320"/>
+            <a:ext cx="1554480" cy="0"/>
+          </a:xfrm>
+          <a:prstGeom prst="line">
+            <a:avLst/>
+          </a:prstGeom>
+          <a:ln w="22225">
+            <a:solidFill>
+              <a:srgbClr val="666666"/>
+            </a:solidFill>
+            <a:tailEnd type="triangle" w="med" len="med"/>
+          </a:ln>
+        </p:spPr>
+        <p:style>
+          <a:lnRef idx="2">
+            <a:schemeClr val="accent1"/>
+          </a:lnRef>
+          <a:fillRef idx="0">
+            <a:schemeClr val="accent1"/>
+          </a:fillRef>
+          <a:effectRef idx="1">
+            <a:schemeClr val="accent1"/>
+          </a:effectRef>
+          <a:fontRef idx="minor">
+            <a:schemeClr val="tx1"/>
+          </a:fontRef>
+        </p:style>
+      </p:cxnSp>
+      <p:sp>
+        <p:nvSpPr>
+          <p:cNvPr id="14" name="TextBox 13"/>
+          <p:cNvSpPr txBox="1"/>
+          <p:nvPr/>
+        </p:nvSpPr>
+        <p:spPr>
+          <a:xfrm>
+            <a:off x="3154679" y="2359152"/>
+            <a:ext cx="1645920" cy="320040"/>
+          </a:xfrm>
+          <a:prstGeom prst="rect">
+            <a:avLst/>
+          </a:prstGeom>
+          <a:noFill/>
+        </p:spPr>
+        <p:txBody>
+          <a:bodyPr wrap="square">
+            <a:spAutoFit/>
+          </a:bodyPr>
+          <a:lstStyle/>
+          <a:p>
+            <a:pPr algn="ctr"/>
+            <a:r>
+              <a:rPr sz="1000" b="0" i="1">
+                <a:solidFill>
+                  <a:srgbClr val="666666"/>
+                </a:solidFill>
+                <a:latin typeface="Calibri"/>
+              </a:rPr>
+              <a:t>HTTPS/JSON</a:t>
+            </a:r>
+          </a:p>
+        </p:txBody>
+      </p:sp>
+      <p:cxnSp>
+        <p:nvCxnSpPr>
+          <p:cNvPr id="15" name="Connector 14"/>
+          <p:cNvCxnSpPr/>
+          <p:nvPr/>
+        </p:nvCxnSpPr>
+        <p:spPr>
+          <a:xfrm>
+            <a:off x="7132320" y="2560320"/>
+            <a:ext cx="1463040" cy="0"/>
+          </a:xfrm>
+          <a:prstGeom prst="line">
+            <a:avLst/>
+          </a:prstGeom>
+          <a:ln w="22225">
+            <a:solidFill>
+              <a:srgbClr val="666666"/>
+            </a:solidFill>
+            <a:tailEnd type="triangle" w="med" len="med"/>
+          </a:ln>
+        </p:spPr>
+        <p:style>
+          <a:lnRef idx="2">
+            <a:schemeClr val="accent1"/>
+          </a:lnRef>
+          <a:fillRef idx="0">
+            <a:schemeClr val="accent1"/>
+          </a:fillRef>
+          <a:effectRef idx="1">
+            <a:schemeClr val="accent1"/>
+          </a:effectRef>
+          <a:fontRef idx="minor">
+            <a:schemeClr val="tx1"/>
+          </a:fontRef>
+        </p:style>
+      </p:cxnSp>
+      <p:sp>
+        <p:nvSpPr>
+          <p:cNvPr id="16" name="TextBox 15"/>
+          <p:cNvSpPr txBox="1"/>
+          <p:nvPr/>
+        </p:nvSpPr>
+        <p:spPr>
+          <a:xfrm>
+            <a:off x="7040880" y="2359152"/>
+            <a:ext cx="1645920" cy="320040"/>
+          </a:xfrm>
+          <a:prstGeom prst="rect">
+            <a:avLst/>
+          </a:prstGeom>
+          <a:noFill/>
+        </p:spPr>
+        <p:txBody>
+          <a:bodyPr wrap="square">
+            <a:spAutoFit/>
+          </a:bodyPr>
+          <a:lstStyle/>
+          <a:p>
+            <a:pPr algn="ctr"/>
+            <a:r>
+              <a:rPr sz="1000" b="0" i="1">
+                <a:solidFill>
+                  <a:srgbClr val="666666"/>
+                </a:solidFill>
+                <a:latin typeface="Calibri"/>
+              </a:rPr>
+              <a:t>TCP/SQL</a:t>
+            </a:r>
+          </a:p>
+        </p:txBody>
+      </p:sp>
+      <p:cxnSp>
+        <p:nvCxnSpPr>
+          <p:cNvPr id="17" name="Connector 16"/>
+          <p:cNvCxnSpPr/>
+          <p:nvPr/>
+        </p:nvCxnSpPr>
+        <p:spPr>
+          <a:xfrm>
+            <a:off x="5943600" y="3108960"/>
+            <a:ext cx="0" cy="822960"/>
+          </a:xfrm>
+          <a:prstGeom prst="line">
+            <a:avLst/>
+          </a:prstGeom>
+          <a:ln w="22225">
+            <a:solidFill>
+              <a:srgbClr val="666666"/>
+            </a:solidFill>
+            <a:tailEnd type="triangle" w="med" len="med"/>
+          </a:ln>
+        </p:spPr>
+        <p:style>
+          <a:lnRef idx="2">
+            <a:schemeClr val="accent1"/>
+          </a:lnRef>
+          <a:fillRef idx="0">
+            <a:schemeClr val="accent1"/>
+          </a:fillRef>
+          <a:effectRef idx="1">
+            <a:schemeClr val="accent1"/>
+          </a:effectRef>
+          <a:fontRef idx="minor">
+            <a:schemeClr val="tx1"/>
+          </a:fontRef>
+        </p:style>
+      </p:cxnSp>
+      <p:sp>
+        <p:nvSpPr>
+          <p:cNvPr id="18" name="TextBox 17"/>
+          <p:cNvSpPr txBox="1"/>
+          <p:nvPr/>
+        </p:nvSpPr>
+        <p:spPr>
+          <a:xfrm>
+            <a:off x="6053328" y="3319272"/>
+            <a:ext cx="1645920" cy="320040"/>
+          </a:xfrm>
+          <a:prstGeom prst="rect">
+            <a:avLst/>
+          </a:prstGeom>
+          <a:noFill/>
+        </p:spPr>
+        <p:txBody>
+          <a:bodyPr wrap="square">
+            <a:spAutoFit/>
+          </a:bodyPr>
+          <a:lstStyle/>
+          <a:p>
+            <a:pPr algn="l"/>
+            <a:r>
+              <a:rPr sz="1000" b="0" i="1">
+                <a:solidFill>
+                  <a:srgbClr val="666666"/>
+                </a:solidFill>
+                <a:latin typeface="Calibri"/>
+              </a:rPr>
+              <a:t>evento/cola (AMQP)</a:t>
+            </a:r>
+          </a:p>
+        </p:txBody>
+      </p:sp>
+      <p:sp>
+        <p:nvSpPr>
+          <p:cNvPr id="19" name="TextBox 18"/>
+          <p:cNvSpPr txBox="1"/>
+          <p:nvPr/>
+        </p:nvSpPr>
+        <p:spPr>
+          <a:xfrm>
+            <a:off x="457200" y="6263640"/>
+            <a:ext cx="11277295" cy="411480"/>
+          </a:xfrm>
+          <a:prstGeom prst="rect">
+            <a:avLst/>
+          </a:prstGeom>
+          <a:noFill/>
+        </p:spPr>
+        <p:txBody>
+          <a:bodyPr wrap="square">
+            <a:spAutoFit/>
+          </a:bodyPr>
+          <a:lstStyle/>
+          <a:p>
+            <a:r>
+              <a:rPr sz="1100" b="0" i="1">
+                <a:solidFill>
+                  <a:srgbClr val="666666"/>
+                </a:solidFill>
+                <a:latin typeface="Calibri"/>
+              </a:rPr>
+              <a:t>Lo que guarda datos va como ContainerDb, no como un Container más. La cuarta caja (el worker) existe porque el correo tarda: sin esa razón, no va. Y estos nombres deben reaparecer igual en el Deployment (Clase 7).</a:t>
+            </a:r>
+          </a:p>
+        </p:txBody>
+      </p:sp>
+      <p:sp>
+        <p:nvSpPr>
+          <p:cNvPr id="20" name="TextBox 19"/>
           <p:cNvSpPr txBox="1"/>
           <p:nvPr/>
         </p:nvSpPr>
@@ -11421,21 +12618,142 @@
                 </a:solidFill>
                 <a:latin typeface="Calibri"/>
               </a:rPr>
-              <a:t>Preguntas frecuentes y cierre conceptual () (2/3)</a:t>
-            </a:r>
-          </a:p>
-        </p:txBody>
-      </p:sp>
-      <p:sp>
-        <p:nvSpPr>
-          <p:cNvPr id="5" name="TextBox 4"/>
+              <a:t>Microservicios de verdad vs microservicios teatro</a:t>
+            </a:r>
+          </a:p>
+        </p:txBody>
+      </p:sp>
+      <p:sp>
+        <p:nvSpPr>
+          <p:cNvPr id="5" name="Rounded Rectangle 4"/>
+          <p:cNvSpPr/>
+          <p:nvPr/>
+        </p:nvSpPr>
+        <p:spPr>
+          <a:xfrm>
+            <a:off x="457200" y="1261872"/>
+            <a:ext cx="5478627" cy="5093208"/>
+          </a:xfrm>
+          <a:prstGeom prst="roundRect">
+            <a:avLst>
+              <a:gd name="adj" fmla="val 12000"/>
+            </a:avLst>
+          </a:prstGeom>
+          <a:solidFill>
+            <a:srgbClr val="FBE4E4"/>
+          </a:solidFill>
+          <a:ln>
+            <a:noFill/>
+          </a:ln>
+        </p:spPr>
+        <p:style>
+          <a:lnRef idx="1">
+            <a:schemeClr val="accent1"/>
+          </a:lnRef>
+          <a:fillRef idx="3">
+            <a:schemeClr val="accent1"/>
+          </a:fillRef>
+          <a:effectRef idx="2">
+            <a:schemeClr val="accent1"/>
+          </a:effectRef>
+          <a:fontRef idx="minor">
+            <a:schemeClr val="lt1"/>
+          </a:fontRef>
+        </p:style>
+        <p:txBody>
+          <a:bodyPr rtlCol="0" anchor="ctr"/>
+          <a:lstStyle/>
+          <a:p>
+            <a:pPr algn="ctr"/>
+          </a:p>
+        </p:txBody>
+      </p:sp>
+      <p:sp>
+        <p:nvSpPr>
+          <p:cNvPr id="6" name="Rectangle 5"/>
+          <p:cNvSpPr/>
+          <p:nvPr/>
+        </p:nvSpPr>
+        <p:spPr>
+          <a:xfrm>
+            <a:off x="457200" y="1261872"/>
+            <a:ext cx="5478627" cy="502920"/>
+          </a:xfrm>
+          <a:prstGeom prst="rect">
+            <a:avLst/>
+          </a:prstGeom>
+          <a:solidFill>
+            <a:srgbClr val="A02030"/>
+          </a:solidFill>
+          <a:ln>
+            <a:noFill/>
+          </a:ln>
+        </p:spPr>
+        <p:style>
+          <a:lnRef idx="1">
+            <a:schemeClr val="accent1"/>
+          </a:lnRef>
+          <a:fillRef idx="3">
+            <a:schemeClr val="accent1"/>
+          </a:fillRef>
+          <a:effectRef idx="2">
+            <a:schemeClr val="accent1"/>
+          </a:effectRef>
+          <a:fontRef idx="minor">
+            <a:schemeClr val="lt1"/>
+          </a:fontRef>
+        </p:style>
+        <p:txBody>
+          <a:bodyPr rtlCol="0" anchor="ctr"/>
+          <a:lstStyle/>
+          <a:p>
+            <a:pPr algn="ctr"/>
+          </a:p>
+        </p:txBody>
+      </p:sp>
+      <p:sp>
+        <p:nvSpPr>
+          <p:cNvPr id="7" name="TextBox 6"/>
           <p:cNvSpPr txBox="1"/>
           <p:nvPr/>
         </p:nvSpPr>
         <p:spPr>
           <a:xfrm>
-            <a:off x="457200" y="1170432"/>
-            <a:ext cx="11277295" cy="5230368"/>
+            <a:off x="594360" y="1353312"/>
+            <a:ext cx="5204307" cy="365760"/>
+          </a:xfrm>
+          <a:prstGeom prst="rect">
+            <a:avLst/>
+          </a:prstGeom>
+          <a:noFill/>
+        </p:spPr>
+        <p:txBody>
+          <a:bodyPr wrap="square" anchor="ctr"/>
+          <a:lstStyle/>
+          <a:p>
+            <a:pPr algn="ctr"/>
+            <a:r>
+              <a:rPr sz="1600" b="1" i="0">
+                <a:solidFill>
+                  <a:srgbClr val="FFFFFF"/>
+                </a:solidFill>
+                <a:latin typeface="Calibri"/>
+              </a:rPr>
+              <a:t>Teatro (lo que NO queremos)</a:t>
+            </a:r>
+          </a:p>
+        </p:txBody>
+      </p:sp>
+      <p:sp>
+        <p:nvSpPr>
+          <p:cNvPr id="8" name="TextBox 7"/>
+          <p:cNvSpPr txBox="1"/>
+          <p:nvPr/>
+        </p:nvSpPr>
+        <p:spPr>
+          <a:xfrm>
+            <a:off x="621792" y="1901952"/>
+            <a:ext cx="5158587" cy="4498848"/>
           </a:xfrm>
           <a:prstGeom prst="rect">
             <a:avLst/>
@@ -11454,13 +12772,13 @@
               </a:spcAft>
             </a:pPr>
             <a:r>
-              <a:rPr sz="2000" b="0" i="0">
-                <a:solidFill>
-                  <a:srgbClr val="333333"/>
-                </a:solidFill>
-                <a:latin typeface="Calibri"/>
-              </a:rPr>
-              <a:t>–   Condiciones que un equipo de tres no tiene, y copiar la forma sin las condiciones produce lo que aqui se llama microservicios teatro.</a:t>
+              <a:rPr sz="1500" b="0" i="0">
+                <a:solidFill>
+                  <a:srgbClr val="333333"/>
+                </a:solidFill>
+                <a:latin typeface="Calibri"/>
+              </a:rPr>
+              <a:t>–   12 servicios para un equipo de 3</a:t>
             </a:r>
           </a:p>
           <a:p>
@@ -11470,13 +12788,13 @@
               </a:spcAft>
             </a:pPr>
             <a:r>
-              <a:rPr sz="2000" b="0" i="0">
-                <a:solidFill>
-                  <a:srgbClr val="333333"/>
-                </a:solidFill>
-                <a:latin typeface="Calibri"/>
-              </a:rPr>
-              <a:t>–   Y la tercera, que hay que responder sin ambiguedad: esta mal hacer un monolito.</a:t>
+              <a:rPr sz="1500" b="0" i="0">
+                <a:solidFill>
+                  <a:srgbClr val="333333"/>
+                </a:solidFill>
+                <a:latin typeface="Calibri"/>
+              </a:rPr>
+              <a:t>–   Se separan por capricho tecnico, no por negocio</a:t>
             </a:r>
           </a:p>
           <a:p>
@@ -11486,13 +12804,13 @@
               </a:spcAft>
             </a:pPr>
             <a:r>
-              <a:rPr sz="2000" b="0" i="0">
-                <a:solidFill>
-                  <a:srgbClr val="333333"/>
-                </a:solidFill>
-                <a:latin typeface="Calibri"/>
-              </a:rPr>
-              <a:t>–   Error tipico del docente que no domina el tema: aplaudir un diagrama con ocho microservicios sin preguntar por que existe cada uno.</a:t>
+              <a:rPr sz="1500" b="0" i="0">
+                <a:solidFill>
+                  <a:srgbClr val="333333"/>
+                </a:solidFill>
+                <a:latin typeface="Calibri"/>
+              </a:rPr>
+              <a:t>–   Flechas sin protocolo ni verbo</a:t>
             </a:r>
           </a:p>
           <a:p>
@@ -11502,15 +12820,159 @@
               </a:spcAft>
             </a:pPr>
             <a:r>
-              <a:rPr sz="2000" b="0" i="0">
-                <a:solidFill>
-                  <a:srgbClr val="333333"/>
-                </a:solidFill>
-                <a:latin typeface="Calibri"/>
-              </a:rPr>
-              <a:t>–   La consecuencia aguas abajo es que ese estudiante llega a la Clase 7 con ocho cajas que no puede ubicar en zonas de red</a:t>
-            </a:r>
-          </a:p>
+              <a:rPr sz="1500" b="0" i="0">
+                <a:solidFill>
+                  <a:srgbClr val="333333"/>
+                </a:solidFill>
+                <a:latin typeface="Calibri"/>
+              </a:rPr>
+              <a:t>–   Nadie sabe explicar por que ese corte</a:t>
+            </a:r>
+          </a:p>
+        </p:txBody>
+      </p:sp>
+      <p:sp>
+        <p:nvSpPr>
+          <p:cNvPr id="9" name="Rounded Rectangle 8"/>
+          <p:cNvSpPr/>
+          <p:nvPr/>
+        </p:nvSpPr>
+        <p:spPr>
+          <a:xfrm>
+            <a:off x="6255867" y="1261872"/>
+            <a:ext cx="5478627" cy="5093208"/>
+          </a:xfrm>
+          <a:prstGeom prst="roundRect">
+            <a:avLst>
+              <a:gd name="adj" fmla="val 12000"/>
+            </a:avLst>
+          </a:prstGeom>
+          <a:solidFill>
+            <a:srgbClr val="E8F4FA"/>
+          </a:solidFill>
+          <a:ln>
+            <a:noFill/>
+          </a:ln>
+        </p:spPr>
+        <p:style>
+          <a:lnRef idx="1">
+            <a:schemeClr val="accent1"/>
+          </a:lnRef>
+          <a:fillRef idx="3">
+            <a:schemeClr val="accent1"/>
+          </a:fillRef>
+          <a:effectRef idx="2">
+            <a:schemeClr val="accent1"/>
+          </a:effectRef>
+          <a:fontRef idx="minor">
+            <a:schemeClr val="lt1"/>
+          </a:fontRef>
+        </p:style>
+        <p:txBody>
+          <a:bodyPr rtlCol="0" anchor="ctr"/>
+          <a:lstStyle/>
+          <a:p>
+            <a:pPr algn="ctr"/>
+          </a:p>
+        </p:txBody>
+      </p:sp>
+      <p:sp>
+        <p:nvSpPr>
+          <p:cNvPr id="10" name="Rectangle 9"/>
+          <p:cNvSpPr/>
+          <p:nvPr/>
+        </p:nvSpPr>
+        <p:spPr>
+          <a:xfrm>
+            <a:off x="6255867" y="1261872"/>
+            <a:ext cx="5478627" cy="502920"/>
+          </a:xfrm>
+          <a:prstGeom prst="rect">
+            <a:avLst/>
+          </a:prstGeom>
+          <a:solidFill>
+            <a:srgbClr val="095292"/>
+          </a:solidFill>
+          <a:ln>
+            <a:noFill/>
+          </a:ln>
+        </p:spPr>
+        <p:style>
+          <a:lnRef idx="1">
+            <a:schemeClr val="accent1"/>
+          </a:lnRef>
+          <a:fillRef idx="3">
+            <a:schemeClr val="accent1"/>
+          </a:fillRef>
+          <a:effectRef idx="2">
+            <a:schemeClr val="accent1"/>
+          </a:effectRef>
+          <a:fontRef idx="minor">
+            <a:schemeClr val="lt1"/>
+          </a:fontRef>
+        </p:style>
+        <p:txBody>
+          <a:bodyPr rtlCol="0" anchor="ctr"/>
+          <a:lstStyle/>
+          <a:p>
+            <a:pPr algn="ctr"/>
+          </a:p>
+        </p:txBody>
+      </p:sp>
+      <p:sp>
+        <p:nvSpPr>
+          <p:cNvPr id="11" name="TextBox 10"/>
+          <p:cNvSpPr txBox="1"/>
+          <p:nvPr/>
+        </p:nvSpPr>
+        <p:spPr>
+          <a:xfrm>
+            <a:off x="6393027" y="1353312"/>
+            <a:ext cx="5204307" cy="365760"/>
+          </a:xfrm>
+          <a:prstGeom prst="rect">
+            <a:avLst/>
+          </a:prstGeom>
+          <a:noFill/>
+        </p:spPr>
+        <p:txBody>
+          <a:bodyPr wrap="square" anchor="ctr"/>
+          <a:lstStyle/>
+          <a:p>
+            <a:pPr algn="ctr"/>
+            <a:r>
+              <a:rPr sz="1600" b="1" i="0">
+                <a:solidFill>
+                  <a:srgbClr val="FFFFFF"/>
+                </a:solidFill>
+                <a:latin typeface="Calibri"/>
+              </a:rPr>
+              <a:t>Frontera justificada</a:t>
+            </a:r>
+          </a:p>
+        </p:txBody>
+      </p:sp>
+      <p:sp>
+        <p:nvSpPr>
+          <p:cNvPr id="12" name="TextBox 11"/>
+          <p:cNvSpPr txBox="1"/>
+          <p:nvPr/>
+        </p:nvSpPr>
+        <p:spPr>
+          <a:xfrm>
+            <a:off x="6420459" y="1901952"/>
+            <a:ext cx="5158587" cy="4498848"/>
+          </a:xfrm>
+          <a:prstGeom prst="rect">
+            <a:avLst/>
+          </a:prstGeom>
+          <a:noFill/>
+        </p:spPr>
+        <p:txBody>
+          <a:bodyPr wrap="square">
+            <a:spAutoFit/>
+          </a:bodyPr>
+          <a:lstStyle/>
           <a:p>
             <a:pPr>
               <a:spcAft>
@@ -11518,20 +12980,68 @@
               </a:spcAft>
             </a:pPr>
             <a:r>
-              <a:rPr sz="2000" b="0" i="0">
-                <a:solidFill>
-                  <a:srgbClr val="333333"/>
-                </a:solidFill>
-                <a:latin typeface="Calibri"/>
-              </a:rPr>
-              <a:t>–   A la Clase 8 con ocho pipelines que nunca construira y a la Clase 12 sin poder identificar un cuello de botella, porque no entiende el flujo de su propio sistema.</a:t>
-            </a:r>
-          </a:p>
-        </p:txBody>
-      </p:sp>
-      <p:sp>
-        <p:nvSpPr>
-          <p:cNvPr id="6" name="TextBox 5"/>
+              <a:rPr sz="1500" b="0" i="0">
+                <a:solidFill>
+                  <a:srgbClr val="333333"/>
+                </a:solidFill>
+                <a:latin typeface="Calibri"/>
+              </a:rPr>
+              <a:t>–   2-5 contenedores logicos, cada uno con su razon</a:t>
+            </a:r>
+          </a:p>
+          <a:p>
+            <a:pPr>
+              <a:spcAft>
+                <a:spcPts val="800"/>
+              </a:spcAft>
+            </a:pPr>
+            <a:r>
+              <a:rPr sz="1500" b="0" i="0">
+                <a:solidFill>
+                  <a:srgbClr val="333333"/>
+                </a:solidFill>
+                <a:latin typeface="Calibri"/>
+              </a:rPr>
+              <a:t>–   Frontera = responsabilidad de negocio</a:t>
+            </a:r>
+          </a:p>
+          <a:p>
+            <a:pPr>
+              <a:spcAft>
+                <a:spcPts val="800"/>
+              </a:spcAft>
+            </a:pPr>
+            <a:r>
+              <a:rPr sz="1500" b="0" i="0">
+                <a:solidFill>
+                  <a:srgbClr val="333333"/>
+                </a:solidFill>
+                <a:latin typeface="Calibri"/>
+              </a:rPr>
+              <a:t>–   Cada flecha: protocolo + verbo (HTTP/JSON, 'reserva')</a:t>
+            </a:r>
+          </a:p>
+          <a:p>
+            <a:pPr>
+              <a:spcAft>
+                <a:spcPts val="800"/>
+              </a:spcAft>
+            </a:pPr>
+            <a:r>
+              <a:rPr sz="1500" b="0" i="0">
+                <a:solidFill>
+                  <a:srgbClr val="333333"/>
+                </a:solidFill>
+                <a:latin typeface="Calibri"/>
+              </a:rPr>
+              <a:t>–   Se explica en 60 s sin leer notas</a:t>
+            </a:r>
+          </a:p>
+        </p:txBody>
+      </p:sp>
+      <p:sp>
+        <p:nvSpPr>
+          <p:cNvPr id="13" name="TextBox 12"/>
           <p:cNvSpPr txBox="1"/>
           <p:nvPr/>
         </p:nvSpPr>
@@ -11705,21 +13215,141 @@
                 </a:solidFill>
                 <a:latin typeface="Calibri"/>
               </a:rPr>
-              <a:t>Preguntas frecuentes y cierre conceptual () (3/3)</a:t>
-            </a:r>
-          </a:p>
-        </p:txBody>
-      </p:sp>
-      <p:sp>
-        <p:nvSpPr>
-          <p:cNvPr id="5" name="TextBox 4"/>
+              <a:t>C4Container en Mermaid: el molde que un visor renderiza</a:t>
+            </a:r>
+          </a:p>
+        </p:txBody>
+      </p:sp>
+      <p:sp>
+        <p:nvSpPr>
+          <p:cNvPr id="5" name="Rounded Rectangle 4"/>
+          <p:cNvSpPr/>
+          <p:nvPr/>
+        </p:nvSpPr>
+        <p:spPr>
+          <a:xfrm>
+            <a:off x="457200" y="1261872"/>
+            <a:ext cx="11277295" cy="4773168"/>
+          </a:xfrm>
+          <a:prstGeom prst="roundRect">
+            <a:avLst>
+              <a:gd name="adj" fmla="val 12000"/>
+            </a:avLst>
+          </a:prstGeom>
+          <a:solidFill>
+            <a:srgbClr val="1E2A38"/>
+          </a:solidFill>
+          <a:ln>
+            <a:noFill/>
+          </a:ln>
+        </p:spPr>
+        <p:style>
+          <a:lnRef idx="1">
+            <a:schemeClr val="accent1"/>
+          </a:lnRef>
+          <a:fillRef idx="3">
+            <a:schemeClr val="accent1"/>
+          </a:fillRef>
+          <a:effectRef idx="2">
+            <a:schemeClr val="accent1"/>
+          </a:effectRef>
+          <a:fontRef idx="minor">
+            <a:schemeClr val="lt1"/>
+          </a:fontRef>
+        </p:style>
+        <p:txBody>
+          <a:bodyPr rtlCol="0" anchor="ctr"/>
+          <a:lstStyle/>
+          <a:p>
+            <a:pPr algn="ctr"/>
+          </a:p>
+        </p:txBody>
+      </p:sp>
+      <p:sp>
+        <p:nvSpPr>
+          <p:cNvPr id="6" name="Rectangle 5"/>
+          <p:cNvSpPr/>
+          <p:nvPr/>
+        </p:nvSpPr>
+        <p:spPr>
+          <a:xfrm>
+            <a:off x="457200" y="1261872"/>
+            <a:ext cx="11277295" cy="320040"/>
+          </a:xfrm>
+          <a:prstGeom prst="rect">
+            <a:avLst/>
+          </a:prstGeom>
+          <a:solidFill>
+            <a:srgbClr val="095292"/>
+          </a:solidFill>
+          <a:ln>
+            <a:noFill/>
+          </a:ln>
+        </p:spPr>
+        <p:style>
+          <a:lnRef idx="1">
+            <a:schemeClr val="accent1"/>
+          </a:lnRef>
+          <a:fillRef idx="3">
+            <a:schemeClr val="accent1"/>
+          </a:fillRef>
+          <a:effectRef idx="2">
+            <a:schemeClr val="accent1"/>
+          </a:effectRef>
+          <a:fontRef idx="minor">
+            <a:schemeClr val="lt1"/>
+          </a:fontRef>
+        </p:style>
+        <p:txBody>
+          <a:bodyPr rtlCol="0" anchor="ctr"/>
+          <a:lstStyle/>
+          <a:p>
+            <a:pPr algn="ctr"/>
+          </a:p>
+        </p:txBody>
+      </p:sp>
+      <p:sp>
+        <p:nvSpPr>
+          <p:cNvPr id="7" name="TextBox 6"/>
           <p:cNvSpPr txBox="1"/>
           <p:nvPr/>
         </p:nvSpPr>
         <p:spPr>
           <a:xfrm>
-            <a:off x="457200" y="1170432"/>
-            <a:ext cx="11277295" cy="5230368"/>
+            <a:off x="685800" y="1307592"/>
+            <a:ext cx="10820095" cy="256032"/>
+          </a:xfrm>
+          <a:prstGeom prst="rect">
+            <a:avLst/>
+          </a:prstGeom>
+          <a:noFill/>
+        </p:spPr>
+        <p:txBody>
+          <a:bodyPr wrap="square" anchor="ctr"/>
+          <a:lstStyle/>
+          <a:p>
+            <a:r>
+              <a:rPr sz="1000" b="1" i="0">
+                <a:solidFill>
+                  <a:srgbClr val="269CCB"/>
+                </a:solidFill>
+                <a:latin typeface="Calibri"/>
+              </a:rPr>
+              <a:t>● ● ●</a:t>
+            </a:r>
+          </a:p>
+        </p:txBody>
+      </p:sp>
+      <p:sp>
+        <p:nvSpPr>
+          <p:cNvPr id="8" name="TextBox 7"/>
+          <p:cNvSpPr txBox="1"/>
+          <p:nvPr/>
+        </p:nvSpPr>
+        <p:spPr>
+          <a:xfrm>
+            <a:off x="777240" y="1719072"/>
+            <a:ext cx="10637215" cy="4133087"/>
           </a:xfrm>
           <a:prstGeom prst="rect">
             <a:avLst/>
@@ -11734,56 +13364,283 @@
           <a:p>
             <a:pPr>
               <a:spcAft>
-                <a:spcPts val="800"/>
+                <a:spcPts val="400"/>
               </a:spcAft>
             </a:pPr>
             <a:r>
-              <a:rPr sz="2000" b="0" i="0">
-                <a:solidFill>
-                  <a:srgbClr val="333333"/>
-                </a:solidFill>
-                <a:latin typeface="Calibri"/>
-              </a:rPr>
-              <a:t>–   El segundo error es tratar la latencia y los fallos parciales como un detalle de implementacion que se vera despues: si hoy no se dice que una flecha en el diagrama es una llamada de red que puede fallar</a:t>
+              <a:rPr sz="1400" b="0" i="0">
+                <a:solidFill>
+                  <a:srgbClr val="FFFFFF"/>
+                </a:solidFill>
+                <a:latin typeface="Calibri"/>
+              </a:rPr>
+              <a:t>C4Container</a:t>
             </a:r>
           </a:p>
           <a:p>
             <a:pPr>
               <a:spcAft>
-                <a:spcPts val="800"/>
+                <a:spcPts val="400"/>
               </a:spcAft>
             </a:pPr>
             <a:r>
-              <a:rPr sz="2000" b="0" i="0">
-                <a:solidFill>
-                  <a:srgbClr val="333333"/>
-                </a:solidFill>
-                <a:latin typeface="Calibri"/>
-              </a:rPr>
-              <a:t>–   El estudiante disenara como si distribuir fuera gratis, no incluira timeouts ni idempotencia en su tabla de riesgos</a:t>
+              <a:rPr sz="1400" b="0" i="0">
+                <a:solidFill>
+                  <a:srgbClr val="FFFFFF"/>
+                </a:solidFill>
+                <a:latin typeface="Calibri"/>
+              </a:rPr>
+              <a:t>title Diagrama de contenedores - la app de turnos</a:t>
             </a:r>
           </a:p>
           <a:p>
             <a:pPr>
               <a:spcAft>
-                <a:spcPts val="800"/>
+                <a:spcPts val="400"/>
               </a:spcAft>
             </a:pPr>
             <a:r>
-              <a:rPr sz="2000" b="0" i="0">
-                <a:solidFill>
-                  <a:srgbClr val="333333"/>
-                </a:solidFill>
-                <a:latin typeface="Calibri"/>
-              </a:rPr>
-              <a:t>–   Y en la Clase 13 pedira autoescalado como solucion magica a un problema de diseno originado precisamente en esta clase.</a:t>
-            </a:r>
-          </a:p>
-        </p:txBody>
-      </p:sp>
-      <p:sp>
-        <p:nvSpPr>
-          <p:cNvPr id="6" name="TextBox 5"/>
+              <a:rPr sz="1400" b="0" i="0">
+                <a:solidFill>
+                  <a:srgbClr val="FFFFFF"/>
+                </a:solidFill>
+                <a:latin typeface="Calibri"/>
+              </a:rPr>
+              <a:t>Person(cliente, "Cliente de la barberia", "Reserva y consulta sus turnos")</a:t>
+            </a:r>
+          </a:p>
+          <a:p>
+            <a:pPr>
+              <a:spcAft>
+                <a:spcPts val="400"/>
+              </a:spcAft>
+            </a:pPr>
+            <a:r>
+              <a:rPr sz="1400" b="0" i="0">
+                <a:solidFill>
+                  <a:srgbClr val="FFFFFF"/>
+                </a:solidFill>
+                <a:latin typeface="Calibri"/>
+              </a:rPr>
+              <a:t>System_Boundary(turnos, "la app") {</a:t>
+            </a:r>
+          </a:p>
+          <a:p>
+            <a:pPr>
+              <a:spcAft>
+                <a:spcPts val="400"/>
+              </a:spcAft>
+            </a:pPr>
+            <a:r>
+              <a:rPr sz="1400" b="0" i="0">
+                <a:solidFill>
+                  <a:srgbClr val="FFFFFF"/>
+                </a:solidFill>
+                <a:latin typeface="Calibri"/>
+              </a:rPr>
+              <a:t>  Container(spa, "App web", "React", "Muestra franjas libres y crea la reserva")</a:t>
+            </a:r>
+          </a:p>
+          <a:p>
+            <a:pPr>
+              <a:spcAft>
+                <a:spcPts val="400"/>
+              </a:spcAft>
+            </a:pPr>
+            <a:r>
+              <a:rPr sz="1400" b="0" i="0">
+                <a:solidFill>
+                  <a:srgbClr val="FFFFFF"/>
+                </a:solidFill>
+                <a:latin typeface="Calibri"/>
+              </a:rPr>
+              <a:t>  Container(api, "API de turnos", "Node.js", "Valida la franja y registra el turno")</a:t>
+            </a:r>
+          </a:p>
+          <a:p>
+            <a:pPr>
+              <a:spcAft>
+                <a:spcPts val="400"/>
+              </a:spcAft>
+            </a:pPr>
+            <a:r>
+              <a:rPr sz="1400" b="0" i="0">
+                <a:solidFill>
+                  <a:srgbClr val="FFFFFF"/>
+                </a:solidFill>
+                <a:latin typeface="Calibri"/>
+              </a:rPr>
+              <a:t>  ContainerDb(db, "Base de turnos", "PostgreSQL", "Turnos, clientes y horarios")</a:t>
+            </a:r>
+          </a:p>
+          <a:p>
+            <a:pPr>
+              <a:spcAft>
+                <a:spcPts val="400"/>
+              </a:spcAft>
+            </a:pPr>
+            <a:r>
+              <a:rPr sz="1400" b="0" i="0">
+                <a:solidFill>
+                  <a:srgbClr val="FFFFFF"/>
+                </a:solidFill>
+                <a:latin typeface="Calibri"/>
+              </a:rPr>
+              <a:t>  Container(worker, "Worker de avisos", "cola", "Envia el aviso, con reintentos")</a:t>
+            </a:r>
+          </a:p>
+          <a:p>
+            <a:pPr>
+              <a:spcAft>
+                <a:spcPts val="400"/>
+              </a:spcAft>
+            </a:pPr>
+            <a:r>
+              <a:rPr sz="1400" b="0" i="0">
+                <a:solidFill>
+                  <a:srgbClr val="FFFFFF"/>
+                </a:solidFill>
+                <a:latin typeface="Calibri"/>
+              </a:rPr>
+              <a:t>}</a:t>
+            </a:r>
+          </a:p>
+          <a:p>
+            <a:pPr>
+              <a:spcAft>
+                <a:spcPts val="400"/>
+              </a:spcAft>
+            </a:pPr>
+            <a:r>
+              <a:rPr sz="1400" b="0" i="0">
+                <a:solidFill>
+                  <a:srgbClr val="FFFFFF"/>
+                </a:solidFill>
+                <a:latin typeface="Calibri"/>
+              </a:rPr>
+              <a:t>System_Ext(correo, "Correo transaccional", "Entrega el correo al cliente")</a:t>
+            </a:r>
+          </a:p>
+          <a:p>
+            <a:pPr>
+              <a:spcAft>
+                <a:spcPts val="400"/>
+              </a:spcAft>
+            </a:pPr>
+            <a:r>
+              <a:rPr sz="1400" b="0" i="0">
+                <a:solidFill>
+                  <a:srgbClr val="FFFFFF"/>
+                </a:solidFill>
+                <a:latin typeface="Calibri"/>
+              </a:rPr>
+              <a:t>Rel(cliente, spa, "Reserva un turno", "HTTPS")</a:t>
+            </a:r>
+          </a:p>
+          <a:p>
+            <a:pPr>
+              <a:spcAft>
+                <a:spcPts val="400"/>
+              </a:spcAft>
+            </a:pPr>
+            <a:r>
+              <a:rPr sz="1400" b="0" i="0">
+                <a:solidFill>
+                  <a:srgbClr val="FFFFFF"/>
+                </a:solidFill>
+                <a:latin typeface="Calibri"/>
+              </a:rPr>
+              <a:t>Rel(spa, api, "POST /turnos", "HTTPS/JSON")</a:t>
+            </a:r>
+          </a:p>
+          <a:p>
+            <a:pPr>
+              <a:spcAft>
+                <a:spcPts val="400"/>
+              </a:spcAft>
+            </a:pPr>
+            <a:r>
+              <a:rPr sz="1400" b="0" i="0">
+                <a:solidFill>
+                  <a:srgbClr val="FFFFFF"/>
+                </a:solidFill>
+                <a:latin typeface="Calibri"/>
+              </a:rPr>
+              <a:t>Rel(api, db, "INSERT / SELECT de turnos", "TCP/SQL")</a:t>
+            </a:r>
+          </a:p>
+          <a:p>
+            <a:pPr>
+              <a:spcAft>
+                <a:spcPts val="400"/>
+              </a:spcAft>
+            </a:pPr>
+            <a:r>
+              <a:rPr sz="1400" b="0" i="0">
+                <a:solidFill>
+                  <a:srgbClr val="FFFFFF"/>
+                </a:solidFill>
+                <a:latin typeface="Calibri"/>
+              </a:rPr>
+              <a:t>Rel(api, worker, "Publica aviso-de-turno", "evento/cola (AMQP)")</a:t>
+            </a:r>
+          </a:p>
+          <a:p>
+            <a:pPr>
+              <a:spcAft>
+                <a:spcPts val="400"/>
+              </a:spcAft>
+            </a:pPr>
+            <a:r>
+              <a:rPr sz="1400" b="0" i="0">
+                <a:solidFill>
+                  <a:srgbClr val="FFFFFF"/>
+                </a:solidFill>
+                <a:latin typeface="Calibri"/>
+              </a:rPr>
+              <a:t>Rel(worker, correo, "Envia la confirmacion", "API REST sobre HTTPS")</a:t>
+            </a:r>
+          </a:p>
+        </p:txBody>
+      </p:sp>
+      <p:sp>
+        <p:nvSpPr>
+          <p:cNvPr id="9" name="TextBox 8"/>
+          <p:cNvSpPr txBox="1"/>
+          <p:nvPr/>
+        </p:nvSpPr>
+        <p:spPr>
+          <a:xfrm>
+            <a:off x="457200" y="6080760"/>
+            <a:ext cx="11277295" cy="320040"/>
+          </a:xfrm>
+          <a:prstGeom prst="rect">
+            <a:avLst/>
+          </a:prstGeom>
+          <a:noFill/>
+        </p:spPr>
+        <p:txBody>
+          <a:bodyPr wrap="square">
+            <a:spAutoFit/>
+          </a:bodyPr>
+          <a:lstStyle/>
+          <a:p>
+            <a:pPr algn="ctr"/>
+            <a:r>
+              <a:rPr sz="1200" b="0" i="1">
+                <a:solidFill>
+                  <a:srgbClr val="666666"/>
+                </a:solidFill>
+                <a:latin typeface="Calibri"/>
+              </a:rPr>
+              <a:t>La base va como «ContainerDb» y cada «Rel» lleva protocolo Y formato. Los externos, FUERA del «System_Boundary».</a:t>
+            </a:r>
+          </a:p>
+        </p:txBody>
+      </p:sp>
+      <p:sp>
+        <p:nvSpPr>
+          <p:cNvPr id="10" name="TextBox 9"/>
           <p:cNvSpPr txBox="1"/>
           <p:nvPr/>
         </p:nvSpPr>
@@ -11851,7 +13708,7 @@
         <p:spPr>
           <a:xfrm>
             <a:off x="0" y="0"/>
-            <a:ext cx="12191695" cy="960120"/>
+            <a:ext cx="12191695" cy="1170432"/>
           </a:xfrm>
           <a:prstGeom prst="rect">
             <a:avLst/>
@@ -11893,7 +13750,7 @@
         </p:nvSpPr>
         <p:spPr>
           <a:xfrm>
-            <a:off x="0" y="960120"/>
+            <a:off x="0" y="1170432"/>
             <a:ext cx="12191695" cy="41148"/>
           </a:xfrm>
           <a:prstGeom prst="rect">
@@ -11937,7 +13794,7 @@
         <p:spPr>
           <a:xfrm>
             <a:off x="457200" y="164592"/>
-            <a:ext cx="11277295" cy="502920"/>
+            <a:ext cx="11277295" cy="384048"/>
           </a:xfrm>
           <a:prstGeom prst="rect">
             <a:avLst/>
@@ -11957,21 +13814,55 @@
                 </a:solidFill>
                 <a:latin typeface="Calibri"/>
               </a:rPr>
-              <a:t>El C4 Container en Mermaid: la forma que un visor renderiza</a:t>
-            </a:r>
-          </a:p>
-        </p:txBody>
-      </p:sp>
-      <p:sp>
-        <p:nvSpPr>
-          <p:cNvPr id="5" name="Rounded Rectangle 4"/>
+              <a:t>Del boceto al código Mermaid</a:t>
+            </a:r>
+          </a:p>
+        </p:txBody>
+      </p:sp>
+      <p:sp>
+        <p:nvSpPr>
+          <p:cNvPr id="5" name="TextBox 4"/>
+          <p:cNvSpPr txBox="1"/>
+          <p:nvPr/>
+        </p:nvSpPr>
+        <p:spPr>
+          <a:xfrm>
+            <a:off x="457200" y="566928"/>
+            <a:ext cx="11277295" cy="411480"/>
+          </a:xfrm>
+          <a:prstGeom prst="rect">
+            <a:avLst/>
+          </a:prstGeom>
+          <a:noFill/>
+        </p:spPr>
+        <p:txBody>
+          <a:bodyPr wrap="square">
+            <a:spAutoFit/>
+          </a:bodyPr>
+          <a:lstStyle/>
+          <a:p>
+            <a:r>
+              <a:rPr sz="1400" b="0" i="0">
+                <a:solidFill>
+                  <a:srgbClr val="B8D8EE"/>
+                </a:solidFill>
+                <a:latin typeface="Calibri"/>
+              </a:rPr>
+              <a:t>El diagrama se escribe como código: se versiona, se compara y se corrige</a:t>
+            </a:r>
+          </a:p>
+        </p:txBody>
+      </p:sp>
+      <p:sp>
+        <p:nvSpPr>
+          <p:cNvPr id="6" name="Rounded Rectangle 5"/>
           <p:cNvSpPr/>
           <p:nvPr/>
         </p:nvSpPr>
         <p:spPr>
           <a:xfrm>
-            <a:off x="457200" y="1261872"/>
-            <a:ext cx="11277295" cy="5093208"/>
+            <a:off x="457200" y="1659636"/>
+            <a:ext cx="11277295" cy="1051560"/>
           </a:xfrm>
           <a:prstGeom prst="roundRect">
             <a:avLst>
@@ -11979,7 +13870,7 @@
             </a:avLst>
           </a:prstGeom>
           <a:solidFill>
-            <a:srgbClr val="1E2A38"/>
+            <a:srgbClr val="F2F2F2"/>
           </a:solidFill>
           <a:ln>
             <a:noFill/>
@@ -12009,17 +13900,19 @@
       </p:sp>
       <p:sp>
         <p:nvSpPr>
-          <p:cNvPr id="6" name="Rectangle 5"/>
+          <p:cNvPr id="7" name="Rounded Rectangle 6"/>
           <p:cNvSpPr/>
           <p:nvPr/>
         </p:nvSpPr>
         <p:spPr>
           <a:xfrm>
-            <a:off x="457200" y="1261872"/>
-            <a:ext cx="11277295" cy="320040"/>
-          </a:xfrm>
-          <a:prstGeom prst="rect">
-            <a:avLst/>
+            <a:off x="594360" y="1965960"/>
+            <a:ext cx="438912" cy="438912"/>
+          </a:xfrm>
+          <a:prstGeom prst="roundRect">
+            <a:avLst>
+              <a:gd name="adj" fmla="val 12000"/>
+            </a:avLst>
           </a:prstGeom>
           <a:solidFill>
             <a:srgbClr val="095292"/>
@@ -12052,46 +13945,14 @@
       </p:sp>
       <p:sp>
         <p:nvSpPr>
-          <p:cNvPr id="7" name="TextBox 6"/>
-          <p:cNvSpPr txBox="1"/>
-          <p:nvPr/>
-        </p:nvSpPr>
-        <p:spPr>
-          <a:xfrm>
-            <a:off x="685800" y="1307592"/>
-            <a:ext cx="10820095" cy="256032"/>
-          </a:xfrm>
-          <a:prstGeom prst="rect">
-            <a:avLst/>
-          </a:prstGeom>
-          <a:noFill/>
-        </p:spPr>
-        <p:txBody>
-          <a:bodyPr wrap="square" anchor="ctr"/>
-          <a:lstStyle/>
-          <a:p>
-            <a:r>
-              <a:rPr sz="1000" b="1" i="0">
-                <a:solidFill>
-                  <a:srgbClr val="269CCB"/>
-                </a:solidFill>
-                <a:latin typeface="Calibri"/>
-              </a:rPr>
-              <a:t>● ● ●</a:t>
-            </a:r>
-          </a:p>
-        </p:txBody>
-      </p:sp>
-      <p:sp>
-        <p:nvSpPr>
           <p:cNvPr id="8" name="TextBox 7"/>
           <p:cNvSpPr txBox="1"/>
           <p:nvPr/>
         </p:nvSpPr>
         <p:spPr>
           <a:xfrm>
-            <a:off x="777240" y="1719072"/>
-            <a:ext cx="10637215" cy="4453128"/>
+            <a:off x="594360" y="1965960"/>
+            <a:ext cx="438912" cy="438912"/>
           </a:xfrm>
           <a:prstGeom prst="rect">
             <a:avLst/>
@@ -12099,287 +13960,586 @@
           <a:noFill/>
         </p:spPr>
         <p:txBody>
-          <a:bodyPr wrap="square">
-            <a:spAutoFit/>
-          </a:bodyPr>
-          <a:lstStyle/>
+          <a:bodyPr wrap="square" anchor="ctr"/>
+          <a:lstStyle/>
+          <a:p>
+            <a:pPr algn="ctr"/>
+            <a:r>
+              <a:rPr sz="1600" b="1" i="0">
+                <a:solidFill>
+                  <a:srgbClr val="FFFFFF"/>
+                </a:solidFill>
+                <a:latin typeface="Calibri"/>
+              </a:rPr>
+              <a:t>1</a:t>
+            </a:r>
+          </a:p>
+        </p:txBody>
+      </p:sp>
+      <p:sp>
+        <p:nvSpPr>
+          <p:cNvPr id="9" name="TextBox 8"/>
+          <p:cNvSpPr txBox="1"/>
+          <p:nvPr/>
+        </p:nvSpPr>
+        <p:spPr>
+          <a:xfrm>
+            <a:off x="1188720" y="1751076"/>
+            <a:ext cx="10271455" cy="886968"/>
+          </a:xfrm>
+          <a:prstGeom prst="rect">
+            <a:avLst/>
+          </a:prstGeom>
+          <a:noFill/>
+        </p:spPr>
+        <p:txBody>
+          <a:bodyPr wrap="square" anchor="ctr"/>
+          <a:lstStyle/>
+          <a:p>
+            <a:r>
+              <a:rPr sz="1500" b="1" i="0">
+                <a:solidFill>
+                  <a:srgbClr val="095292"/>
+                </a:solidFill>
+                <a:latin typeface="Calibri"/>
+              </a:rPr>
+              <a:t>Diseña visual</a:t>
+            </a:r>
+          </a:p>
           <a:p>
             <a:pPr>
-              <a:spcAft>
-                <a:spcPts val="371"/>
-              </a:spcAft>
+              <a:spcBef>
+                <a:spcPts val="200"/>
+              </a:spcBef>
             </a:pPr>
             <a:r>
               <a:rPr sz="1300" b="0" i="0">
                 <a:solidFill>
+                  <a:srgbClr val="333333"/>
+                </a:solidFill>
+                <a:latin typeface="Calibri"/>
+              </a:rPr>
+              <a:t>Dibuja el diagrama como quieras en Excalidraw o draw.io: es más rápido arrastrar cajas que escribir código, y ahí es donde se piensa el modelo.</a:t>
+            </a:r>
+          </a:p>
+        </p:txBody>
+      </p:sp>
+      <p:sp>
+        <p:nvSpPr>
+          <p:cNvPr id="10" name="Rounded Rectangle 9"/>
+          <p:cNvSpPr/>
+          <p:nvPr/>
+        </p:nvSpPr>
+        <p:spPr>
+          <a:xfrm>
+            <a:off x="457200" y="2802636"/>
+            <a:ext cx="11277295" cy="1051560"/>
+          </a:xfrm>
+          <a:prstGeom prst="roundRect">
+            <a:avLst>
+              <a:gd name="adj" fmla="val 12000"/>
+            </a:avLst>
+          </a:prstGeom>
+          <a:solidFill>
+            <a:srgbClr val="E8F4FA"/>
+          </a:solidFill>
+          <a:ln>
+            <a:noFill/>
+          </a:ln>
+        </p:spPr>
+        <p:style>
+          <a:lnRef idx="1">
+            <a:schemeClr val="accent1"/>
+          </a:lnRef>
+          <a:fillRef idx="3">
+            <a:schemeClr val="accent1"/>
+          </a:fillRef>
+          <a:effectRef idx="2">
+            <a:schemeClr val="accent1"/>
+          </a:effectRef>
+          <a:fontRef idx="minor">
+            <a:schemeClr val="lt1"/>
+          </a:fontRef>
+        </p:style>
+        <p:txBody>
+          <a:bodyPr rtlCol="0" anchor="ctr"/>
+          <a:lstStyle/>
+          <a:p>
+            <a:pPr algn="ctr"/>
+          </a:p>
+        </p:txBody>
+      </p:sp>
+      <p:sp>
+        <p:nvSpPr>
+          <p:cNvPr id="11" name="Rounded Rectangle 10"/>
+          <p:cNvSpPr/>
+          <p:nvPr/>
+        </p:nvSpPr>
+        <p:spPr>
+          <a:xfrm>
+            <a:off x="594360" y="3108960"/>
+            <a:ext cx="438912" cy="438912"/>
+          </a:xfrm>
+          <a:prstGeom prst="roundRect">
+            <a:avLst>
+              <a:gd name="adj" fmla="val 12000"/>
+            </a:avLst>
+          </a:prstGeom>
+          <a:solidFill>
+            <a:srgbClr val="095292"/>
+          </a:solidFill>
+          <a:ln>
+            <a:noFill/>
+          </a:ln>
+        </p:spPr>
+        <p:style>
+          <a:lnRef idx="1">
+            <a:schemeClr val="accent1"/>
+          </a:lnRef>
+          <a:fillRef idx="3">
+            <a:schemeClr val="accent1"/>
+          </a:fillRef>
+          <a:effectRef idx="2">
+            <a:schemeClr val="accent1"/>
+          </a:effectRef>
+          <a:fontRef idx="minor">
+            <a:schemeClr val="lt1"/>
+          </a:fontRef>
+        </p:style>
+        <p:txBody>
+          <a:bodyPr rtlCol="0" anchor="ctr"/>
+          <a:lstStyle/>
+          <a:p>
+            <a:pPr algn="ctr"/>
+          </a:p>
+        </p:txBody>
+      </p:sp>
+      <p:sp>
+        <p:nvSpPr>
+          <p:cNvPr id="12" name="TextBox 11"/>
+          <p:cNvSpPr txBox="1"/>
+          <p:nvPr/>
+        </p:nvSpPr>
+        <p:spPr>
+          <a:xfrm>
+            <a:off x="594360" y="3108960"/>
+            <a:ext cx="438912" cy="438912"/>
+          </a:xfrm>
+          <a:prstGeom prst="rect">
+            <a:avLst/>
+          </a:prstGeom>
+          <a:noFill/>
+        </p:spPr>
+        <p:txBody>
+          <a:bodyPr wrap="square" anchor="ctr"/>
+          <a:lstStyle/>
+          <a:p>
+            <a:pPr algn="ctr"/>
+            <a:r>
+              <a:rPr sz="1600" b="1" i="0">
+                <a:solidFill>
                   <a:srgbClr val="FFFFFF"/>
                 </a:solidFill>
                 <a:latin typeface="Calibri"/>
               </a:rPr>
-              <a:t>flowchart TB</a:t>
+              <a:t>2</a:t>
+            </a:r>
+          </a:p>
+        </p:txBody>
+      </p:sp>
+      <p:sp>
+        <p:nvSpPr>
+          <p:cNvPr id="13" name="TextBox 12"/>
+          <p:cNvSpPr txBox="1"/>
+          <p:nvPr/>
+        </p:nvSpPr>
+        <p:spPr>
+          <a:xfrm>
+            <a:off x="1188720" y="2894076"/>
+            <a:ext cx="10271455" cy="886968"/>
+          </a:xfrm>
+          <a:prstGeom prst="rect">
+            <a:avLst/>
+          </a:prstGeom>
+          <a:noFill/>
+        </p:spPr>
+        <p:txBody>
+          <a:bodyPr wrap="square" anchor="ctr"/>
+          <a:lstStyle/>
+          <a:p>
+            <a:r>
+              <a:rPr sz="1500" b="1" i="0">
+                <a:solidFill>
+                  <a:srgbClr val="095292"/>
+                </a:solidFill>
+                <a:latin typeface="Calibri"/>
+              </a:rPr>
+              <a:t>Traduce con IA</a:t>
             </a:r>
           </a:p>
           <a:p>
             <a:pPr>
-              <a:spcAft>
-                <a:spcPts val="371"/>
-              </a:spcAft>
+              <a:spcBef>
+                <a:spcPts val="200"/>
+              </a:spcBef>
             </a:pPr>
             <a:r>
               <a:rPr sz="1300" b="0" i="0">
                 <a:solidFill>
+                  <a:srgbClr val="333333"/>
+                </a:solidFill>
+                <a:latin typeface="Calibri"/>
+              </a:rPr>
+              <a:t>Describe tu boceto a una IA y pídele el código Mermaid usando C4Container. Revisa el resultado: la IA acierta la sintaxis, no tu modelo.</a:t>
+            </a:r>
+          </a:p>
+        </p:txBody>
+      </p:sp>
+      <p:sp>
+        <p:nvSpPr>
+          <p:cNvPr id="14" name="Rounded Rectangle 13"/>
+          <p:cNvSpPr/>
+          <p:nvPr/>
+        </p:nvSpPr>
+        <p:spPr>
+          <a:xfrm>
+            <a:off x="457200" y="3945636"/>
+            <a:ext cx="11277295" cy="1051560"/>
+          </a:xfrm>
+          <a:prstGeom prst="roundRect">
+            <a:avLst>
+              <a:gd name="adj" fmla="val 12000"/>
+            </a:avLst>
+          </a:prstGeom>
+          <a:solidFill>
+            <a:srgbClr val="F2F2F2"/>
+          </a:solidFill>
+          <a:ln>
+            <a:noFill/>
+          </a:ln>
+        </p:spPr>
+        <p:style>
+          <a:lnRef idx="1">
+            <a:schemeClr val="accent1"/>
+          </a:lnRef>
+          <a:fillRef idx="3">
+            <a:schemeClr val="accent1"/>
+          </a:fillRef>
+          <a:effectRef idx="2">
+            <a:schemeClr val="accent1"/>
+          </a:effectRef>
+          <a:fontRef idx="minor">
+            <a:schemeClr val="lt1"/>
+          </a:fontRef>
+        </p:style>
+        <p:txBody>
+          <a:bodyPr rtlCol="0" anchor="ctr"/>
+          <a:lstStyle/>
+          <a:p>
+            <a:pPr algn="ctr"/>
+          </a:p>
+        </p:txBody>
+      </p:sp>
+      <p:sp>
+        <p:nvSpPr>
+          <p:cNvPr id="15" name="Rounded Rectangle 14"/>
+          <p:cNvSpPr/>
+          <p:nvPr/>
+        </p:nvSpPr>
+        <p:spPr>
+          <a:xfrm>
+            <a:off x="594360" y="4251960"/>
+            <a:ext cx="438912" cy="438912"/>
+          </a:xfrm>
+          <a:prstGeom prst="roundRect">
+            <a:avLst>
+              <a:gd name="adj" fmla="val 12000"/>
+            </a:avLst>
+          </a:prstGeom>
+          <a:solidFill>
+            <a:srgbClr val="095292"/>
+          </a:solidFill>
+          <a:ln>
+            <a:noFill/>
+          </a:ln>
+        </p:spPr>
+        <p:style>
+          <a:lnRef idx="1">
+            <a:schemeClr val="accent1"/>
+          </a:lnRef>
+          <a:fillRef idx="3">
+            <a:schemeClr val="accent1"/>
+          </a:fillRef>
+          <a:effectRef idx="2">
+            <a:schemeClr val="accent1"/>
+          </a:effectRef>
+          <a:fontRef idx="minor">
+            <a:schemeClr val="lt1"/>
+          </a:fontRef>
+        </p:style>
+        <p:txBody>
+          <a:bodyPr rtlCol="0" anchor="ctr"/>
+          <a:lstStyle/>
+          <a:p>
+            <a:pPr algn="ctr"/>
+          </a:p>
+        </p:txBody>
+      </p:sp>
+      <p:sp>
+        <p:nvSpPr>
+          <p:cNvPr id="16" name="TextBox 15"/>
+          <p:cNvSpPr txBox="1"/>
+          <p:nvPr/>
+        </p:nvSpPr>
+        <p:spPr>
+          <a:xfrm>
+            <a:off x="594360" y="4251960"/>
+            <a:ext cx="438912" cy="438912"/>
+          </a:xfrm>
+          <a:prstGeom prst="rect">
+            <a:avLst/>
+          </a:prstGeom>
+          <a:noFill/>
+        </p:spPr>
+        <p:txBody>
+          <a:bodyPr wrap="square" anchor="ctr"/>
+          <a:lstStyle/>
+          <a:p>
+            <a:pPr algn="ctr"/>
+            <a:r>
+              <a:rPr sz="1600" b="1" i="0">
+                <a:solidFill>
                   <a:srgbClr val="FFFFFF"/>
                 </a:solidFill>
                 <a:latin typeface="Calibri"/>
               </a:rPr>
-              <a:t>  usuario([Usuario &lt;rol de su dominio&gt;])</a:t>
+              <a:t>3</a:t>
+            </a:r>
+          </a:p>
+        </p:txBody>
+      </p:sp>
+      <p:sp>
+        <p:nvSpPr>
+          <p:cNvPr id="17" name="TextBox 16"/>
+          <p:cNvSpPr txBox="1"/>
+          <p:nvPr/>
+        </p:nvSpPr>
+        <p:spPr>
+          <a:xfrm>
+            <a:off x="1188720" y="4037076"/>
+            <a:ext cx="10271455" cy="886968"/>
+          </a:xfrm>
+          <a:prstGeom prst="rect">
+            <a:avLst/>
+          </a:prstGeom>
+          <a:noFill/>
+        </p:spPr>
+        <p:txBody>
+          <a:bodyPr wrap="square" anchor="ctr"/>
+          <a:lstStyle/>
+          <a:p>
+            <a:r>
+              <a:rPr sz="1500" b="1" i="0">
+                <a:solidFill>
+                  <a:srgbClr val="095292"/>
+                </a:solidFill>
+                <a:latin typeface="Calibri"/>
+              </a:rPr>
+              <a:t>Renderiza en un visor</a:t>
             </a:r>
           </a:p>
           <a:p>
             <a:pPr>
-              <a:spcAft>
-                <a:spcPts val="371"/>
-              </a:spcAft>
+              <a:spcBef>
+                <a:spcPts val="200"/>
+              </a:spcBef>
             </a:pPr>
             <a:r>
               <a:rPr sz="1300" b="0" i="0">
                 <a:solidFill>
+                  <a:srgbClr val="333333"/>
+                </a:solidFill>
+                <a:latin typeface="Calibri"/>
+              </a:rPr>
+              <a:t>Pega el código en un visor Mermaid (mermaid.live o la vista previa de tu editor) y míralo dibujado. Si no renderiza, corrige ahí: un end faltante o un rótulo sin comillas.</a:t>
+            </a:r>
+          </a:p>
+        </p:txBody>
+      </p:sp>
+      <p:sp>
+        <p:nvSpPr>
+          <p:cNvPr id="18" name="Rounded Rectangle 17"/>
+          <p:cNvSpPr/>
+          <p:nvPr/>
+        </p:nvSpPr>
+        <p:spPr>
+          <a:xfrm>
+            <a:off x="457200" y="5088636"/>
+            <a:ext cx="11277295" cy="1051560"/>
+          </a:xfrm>
+          <a:prstGeom prst="roundRect">
+            <a:avLst>
+              <a:gd name="adj" fmla="val 12000"/>
+            </a:avLst>
+          </a:prstGeom>
+          <a:solidFill>
+            <a:srgbClr val="E8F4FA"/>
+          </a:solidFill>
+          <a:ln>
+            <a:noFill/>
+          </a:ln>
+        </p:spPr>
+        <p:style>
+          <a:lnRef idx="1">
+            <a:schemeClr val="accent1"/>
+          </a:lnRef>
+          <a:fillRef idx="3">
+            <a:schemeClr val="accent1"/>
+          </a:fillRef>
+          <a:effectRef idx="2">
+            <a:schemeClr val="accent1"/>
+          </a:effectRef>
+          <a:fontRef idx="minor">
+            <a:schemeClr val="lt1"/>
+          </a:fontRef>
+        </p:style>
+        <p:txBody>
+          <a:bodyPr rtlCol="0" anchor="ctr"/>
+          <a:lstStyle/>
+          <a:p>
+            <a:pPr algn="ctr"/>
+          </a:p>
+        </p:txBody>
+      </p:sp>
+      <p:sp>
+        <p:nvSpPr>
+          <p:cNvPr id="19" name="Rounded Rectangle 18"/>
+          <p:cNvSpPr/>
+          <p:nvPr/>
+        </p:nvSpPr>
+        <p:spPr>
+          <a:xfrm>
+            <a:off x="594360" y="5394960"/>
+            <a:ext cx="438912" cy="438912"/>
+          </a:xfrm>
+          <a:prstGeom prst="roundRect">
+            <a:avLst>
+              <a:gd name="adj" fmla="val 12000"/>
+            </a:avLst>
+          </a:prstGeom>
+          <a:solidFill>
+            <a:srgbClr val="095292"/>
+          </a:solidFill>
+          <a:ln>
+            <a:noFill/>
+          </a:ln>
+        </p:spPr>
+        <p:style>
+          <a:lnRef idx="1">
+            <a:schemeClr val="accent1"/>
+          </a:lnRef>
+          <a:fillRef idx="3">
+            <a:schemeClr val="accent1"/>
+          </a:fillRef>
+          <a:effectRef idx="2">
+            <a:schemeClr val="accent1"/>
+          </a:effectRef>
+          <a:fontRef idx="minor">
+            <a:schemeClr val="lt1"/>
+          </a:fontRef>
+        </p:style>
+        <p:txBody>
+          <a:bodyPr rtlCol="0" anchor="ctr"/>
+          <a:lstStyle/>
+          <a:p>
+            <a:pPr algn="ctr"/>
+          </a:p>
+        </p:txBody>
+      </p:sp>
+      <p:sp>
+        <p:nvSpPr>
+          <p:cNvPr id="20" name="TextBox 19"/>
+          <p:cNvSpPr txBox="1"/>
+          <p:nvPr/>
+        </p:nvSpPr>
+        <p:spPr>
+          <a:xfrm>
+            <a:off x="594360" y="5394960"/>
+            <a:ext cx="438912" cy="438912"/>
+          </a:xfrm>
+          <a:prstGeom prst="rect">
+            <a:avLst/>
+          </a:prstGeom>
+          <a:noFill/>
+        </p:spPr>
+        <p:txBody>
+          <a:bodyPr wrap="square" anchor="ctr"/>
+          <a:lstStyle/>
+          <a:p>
+            <a:pPr algn="ctr"/>
+            <a:r>
+              <a:rPr sz="1600" b="1" i="0">
+                <a:solidFill>
                   <a:srgbClr val="FFFFFF"/>
                 </a:solidFill>
                 <a:latin typeface="Calibri"/>
               </a:rPr>
-              <a:t/>
+              <a:t>4</a:t>
+            </a:r>
+          </a:p>
+        </p:txBody>
+      </p:sp>
+      <p:sp>
+        <p:nvSpPr>
+          <p:cNvPr id="21" name="TextBox 20"/>
+          <p:cNvSpPr txBox="1"/>
+          <p:nvPr/>
+        </p:nvSpPr>
+        <p:spPr>
+          <a:xfrm>
+            <a:off x="1188720" y="5180076"/>
+            <a:ext cx="10271455" cy="886968"/>
+          </a:xfrm>
+          <a:prstGeom prst="rect">
+            <a:avLst/>
+          </a:prstGeom>
+          <a:noFill/>
+        </p:spPr>
+        <p:txBody>
+          <a:bodyPr wrap="square" anchor="ctr"/>
+          <a:lstStyle/>
+          <a:p>
+            <a:r>
+              <a:rPr sz="1500" b="1" i="0">
+                <a:solidFill>
+                  <a:srgbClr val="095292"/>
+                </a:solidFill>
+                <a:latin typeface="Calibri"/>
+              </a:rPr>
+              <a:t>Guarda código e imagen</a:t>
             </a:r>
           </a:p>
           <a:p>
             <a:pPr>
-              <a:spcAft>
-                <a:spcPts val="371"/>
-              </a:spcAft>
+              <a:spcBef>
+                <a:spcPts val="200"/>
+              </a:spcBef>
             </a:pPr>
             <a:r>
               <a:rPr sz="1300" b="0" i="0">
                 <a:solidFill>
-                  <a:srgbClr val="FFFFFF"/>
-                </a:solidFill>
-                <a:latin typeface="Calibri"/>
-              </a:rPr>
-              <a:t>  subgraph turnos[la app]</a:t>
-            </a:r>
-          </a:p>
-          <a:p>
-            <a:pPr>
-              <a:spcAft>
-                <a:spcPts val="371"/>
-              </a:spcAft>
-            </a:pPr>
-            <a:r>
-              <a:rPr sz="1300" b="0" i="0">
-                <a:solidFill>
-                  <a:srgbClr val="FFFFFF"/>
-                </a:solidFill>
-                <a:latin typeface="Calibri"/>
-              </a:rPr>
-              <a:t>    web[Web SPA&lt;br/&gt;React]</a:t>
-            </a:r>
-          </a:p>
-          <a:p>
-            <a:pPr>
-              <a:spcAft>
-                <a:spcPts val="371"/>
-              </a:spcAft>
-            </a:pPr>
-            <a:r>
-              <a:rPr sz="1300" b="0" i="0">
-                <a:solidFill>
-                  <a:srgbClr val="FFFFFF"/>
-                </a:solidFill>
-                <a:latin typeface="Calibri"/>
-              </a:rPr>
-              <a:t>    api[API REST&lt;br/&gt;Node + Express]</a:t>
-            </a:r>
-          </a:p>
-          <a:p>
-            <a:pPr>
-              <a:spcAft>
-                <a:spcPts val="371"/>
-              </a:spcAft>
-            </a:pPr>
-            <a:r>
-              <a:rPr sz="1300" b="0" i="0">
-                <a:solidFill>
-                  <a:srgbClr val="FFFFFF"/>
-                </a:solidFill>
-                <a:latin typeface="Calibri"/>
-              </a:rPr>
-              <a:t>    db[(Base de datos&lt;br/&gt;PostgreSQL)]</a:t>
-            </a:r>
-          </a:p>
-          <a:p>
-            <a:pPr>
-              <a:spcAft>
-                <a:spcPts val="371"/>
-              </a:spcAft>
-            </a:pPr>
-            <a:r>
-              <a:rPr sz="1300" b="0" i="0">
-                <a:solidFill>
-                  <a:srgbClr val="FFFFFF"/>
-                </a:solidFill>
-                <a:latin typeface="Calibri"/>
-              </a:rPr>
-              <a:t>    cola[[Cola de trabajos&lt;br/&gt;Redis]]</a:t>
-            </a:r>
-          </a:p>
-          <a:p>
-            <a:pPr>
-              <a:spcAft>
-                <a:spcPts val="371"/>
-              </a:spcAft>
-            </a:pPr>
-            <a:r>
-              <a:rPr sz="1300" b="0" i="0">
-                <a:solidFill>
-                  <a:srgbClr val="FFFFFF"/>
-                </a:solidFill>
-                <a:latin typeface="Calibri"/>
-              </a:rPr>
-              <a:t>  end</a:t>
-            </a:r>
-          </a:p>
-          <a:p>
-            <a:pPr>
-              <a:spcAft>
-                <a:spcPts val="371"/>
-              </a:spcAft>
-            </a:pPr>
-            <a:r>
-              <a:rPr sz="1300" b="0" i="0">
-                <a:solidFill>
-                  <a:srgbClr val="FFFFFF"/>
-                </a:solidFill>
-                <a:latin typeface="Calibri"/>
-              </a:rPr>
-              <a:t/>
-            </a:r>
-          </a:p>
-          <a:p>
-            <a:pPr>
-              <a:spcAft>
-                <a:spcPts val="371"/>
-              </a:spcAft>
-            </a:pPr>
-            <a:r>
-              <a:rPr sz="1300" b="0" i="0">
-                <a:solidFill>
-                  <a:srgbClr val="FFFFFF"/>
-                </a:solidFill>
-                <a:latin typeface="Calibri"/>
-              </a:rPr>
-              <a:t>  correo[Servicio de correo&lt;br/&gt;externo]</a:t>
-            </a:r>
-          </a:p>
-          <a:p>
-            <a:pPr>
-              <a:spcAft>
-                <a:spcPts val="371"/>
-              </a:spcAft>
-            </a:pPr>
-            <a:r>
-              <a:rPr sz="1300" b="0" i="0">
-                <a:solidFill>
-                  <a:srgbClr val="FFFFFF"/>
-                </a:solidFill>
-                <a:latin typeface="Calibri"/>
-              </a:rPr>
-              <a:t/>
-            </a:r>
-          </a:p>
-          <a:p>
-            <a:pPr>
-              <a:spcAft>
-                <a:spcPts val="371"/>
-              </a:spcAft>
-            </a:pPr>
-            <a:r>
-              <a:rPr sz="1300" b="0" i="0">
-                <a:solidFill>
-                  <a:srgbClr val="FFFFFF"/>
-                </a:solidFill>
-                <a:latin typeface="Calibri"/>
-              </a:rPr>
-              <a:t>  usuario --&gt;|HTTPS| web</a:t>
-            </a:r>
-          </a:p>
-          <a:p>
-            <a:pPr>
-              <a:spcAft>
-                <a:spcPts val="371"/>
-              </a:spcAft>
-            </a:pPr>
-            <a:r>
-              <a:rPr sz="1300" b="0" i="0">
-                <a:solidFill>
-                  <a:srgbClr val="FFFFFF"/>
-                </a:solidFill>
-                <a:latin typeface="Calibri"/>
-              </a:rPr>
-              <a:t>  web --&gt;|JSON/HTTPS| api</a:t>
-            </a:r>
-          </a:p>
-          <a:p>
-            <a:pPr>
-              <a:spcAft>
-                <a:spcPts val="371"/>
-              </a:spcAft>
-            </a:pPr>
-            <a:r>
-              <a:rPr sz="1300" b="0" i="0">
-                <a:solidFill>
-                  <a:srgbClr val="FFFFFF"/>
-                </a:solidFill>
-                <a:latin typeface="Calibri"/>
-              </a:rPr>
-              <a:t>  api --&gt;|SQL| db</a:t>
-            </a:r>
-          </a:p>
-          <a:p>
-            <a:pPr>
-              <a:spcAft>
-                <a:spcPts val="371"/>
-              </a:spcAft>
-            </a:pPr>
-            <a:r>
-              <a:rPr sz="1300" b="0" i="0">
-                <a:solidFill>
-                  <a:srgbClr val="FFFFFF"/>
-                </a:solidFill>
-                <a:latin typeface="Calibri"/>
-              </a:rPr>
-              <a:t>  api --&gt;|encola| cola</a:t>
-            </a:r>
-          </a:p>
-          <a:p>
-            <a:pPr>
-              <a:spcAft>
-                <a:spcPts val="371"/>
-              </a:spcAft>
-            </a:pPr>
-            <a:r>
-              <a:rPr sz="1300" b="0" i="0">
-                <a:solidFill>
-                  <a:srgbClr val="FFFFFF"/>
-                </a:solidFill>
-                <a:latin typeface="Calibri"/>
-              </a:rPr>
-              <a:t>  cola --&gt;|SMTP| correo</a:t>
-            </a:r>
-          </a:p>
-        </p:txBody>
-      </p:sp>
-      <p:sp>
-        <p:nvSpPr>
-          <p:cNvPr id="9" name="TextBox 8"/>
+                  <a:srgbClr val="333333"/>
+                </a:solidFill>
+                <a:latin typeface="Calibri"/>
+              </a:rPr>
+              <a:t>El código es la fuente del diagrama: guárdalo con tu proyecto junto con el PNG exportado.</a:t>
+            </a:r>
+          </a:p>
+        </p:txBody>
+      </p:sp>
+      <p:sp>
+        <p:nvSpPr>
+          <p:cNvPr id="22" name="TextBox 21"/>
           <p:cNvSpPr txBox="1"/>
           <p:nvPr/>
         </p:nvSpPr>
@@ -12447,808 +14607,10 @@
         <p:spPr>
           <a:xfrm>
             <a:off x="0" y="0"/>
-            <a:ext cx="12191695" cy="960120"/>
-          </a:xfrm>
-          <a:prstGeom prst="rect">
-            <a:avLst/>
-          </a:prstGeom>
-          <a:solidFill>
-            <a:srgbClr val="095292"/>
-          </a:solidFill>
-          <a:ln>
-            <a:noFill/>
-          </a:ln>
-        </p:spPr>
-        <p:style>
-          <a:lnRef idx="1">
-            <a:schemeClr val="accent1"/>
-          </a:lnRef>
-          <a:fillRef idx="3">
-            <a:schemeClr val="accent1"/>
-          </a:fillRef>
-          <a:effectRef idx="2">
-            <a:schemeClr val="accent1"/>
-          </a:effectRef>
-          <a:fontRef idx="minor">
-            <a:schemeClr val="lt1"/>
-          </a:fontRef>
-        </p:style>
-        <p:txBody>
-          <a:bodyPr rtlCol="0" anchor="ctr"/>
-          <a:lstStyle/>
-          <a:p>
-            <a:pPr algn="ctr"/>
-          </a:p>
-        </p:txBody>
-      </p:sp>
-      <p:sp>
-        <p:nvSpPr>
-          <p:cNvPr id="3" name="Rectangle 2"/>
-          <p:cNvSpPr/>
-          <p:nvPr/>
-        </p:nvSpPr>
-        <p:spPr>
-          <a:xfrm>
-            <a:off x="0" y="960120"/>
-            <a:ext cx="12191695" cy="41148"/>
-          </a:xfrm>
-          <a:prstGeom prst="rect">
-            <a:avLst/>
-          </a:prstGeom>
-          <a:solidFill>
-            <a:srgbClr val="FFD000"/>
-          </a:solidFill>
-          <a:ln>
-            <a:noFill/>
-          </a:ln>
-        </p:spPr>
-        <p:style>
-          <a:lnRef idx="1">
-            <a:schemeClr val="accent1"/>
-          </a:lnRef>
-          <a:fillRef idx="3">
-            <a:schemeClr val="accent1"/>
-          </a:fillRef>
-          <a:effectRef idx="2">
-            <a:schemeClr val="accent1"/>
-          </a:effectRef>
-          <a:fontRef idx="minor">
-            <a:schemeClr val="lt1"/>
-          </a:fontRef>
-        </p:style>
-        <p:txBody>
-          <a:bodyPr rtlCol="0" anchor="ctr"/>
-          <a:lstStyle/>
-          <a:p>
-            <a:pPr algn="ctr"/>
-          </a:p>
-        </p:txBody>
-      </p:sp>
-      <p:sp>
-        <p:nvSpPr>
-          <p:cNvPr id="4" name="TextBox 3"/>
-          <p:cNvSpPr txBox="1"/>
-          <p:nvPr/>
-        </p:nvSpPr>
-        <p:spPr>
-          <a:xfrm>
-            <a:off x="457200" y="164592"/>
-            <a:ext cx="11277295" cy="502920"/>
-          </a:xfrm>
-          <a:prstGeom prst="rect">
-            <a:avLst/>
-          </a:prstGeom>
-          <a:noFill/>
-        </p:spPr>
-        <p:txBody>
-          <a:bodyPr wrap="square">
-            <a:spAutoFit/>
-          </a:bodyPr>
-          <a:lstStyle/>
-          <a:p>
-            <a:r>
-              <a:rPr sz="2600" b="1" i="0">
-                <a:solidFill>
-                  <a:srgbClr val="FFFFFF"/>
-                </a:solidFill>
-                <a:latin typeface="Calibri"/>
-              </a:rPr>
-              <a:t>Lo que importa del diagrama, y no es el dibujo</a:t>
-            </a:r>
-          </a:p>
-        </p:txBody>
-      </p:sp>
-      <p:sp>
-        <p:nvSpPr>
-          <p:cNvPr id="5" name="Rounded Rectangle 4"/>
-          <p:cNvSpPr/>
-          <p:nvPr/>
-        </p:nvSpPr>
-        <p:spPr>
-          <a:xfrm>
-            <a:off x="457200" y="1261872"/>
-            <a:ext cx="11277295" cy="5093208"/>
-          </a:xfrm>
-          <a:prstGeom prst="roundRect">
-            <a:avLst>
-              <a:gd name="adj" fmla="val 12000"/>
-            </a:avLst>
-          </a:prstGeom>
-          <a:solidFill>
-            <a:srgbClr val="1E2A38"/>
-          </a:solidFill>
-          <a:ln>
-            <a:noFill/>
-          </a:ln>
-        </p:spPr>
-        <p:style>
-          <a:lnRef idx="1">
-            <a:schemeClr val="accent1"/>
-          </a:lnRef>
-          <a:fillRef idx="3">
-            <a:schemeClr val="accent1"/>
-          </a:fillRef>
-          <a:effectRef idx="2">
-            <a:schemeClr val="accent1"/>
-          </a:effectRef>
-          <a:fontRef idx="minor">
-            <a:schemeClr val="lt1"/>
-          </a:fontRef>
-        </p:style>
-        <p:txBody>
-          <a:bodyPr rtlCol="0" anchor="ctr"/>
-          <a:lstStyle/>
-          <a:p>
-            <a:pPr algn="ctr"/>
-          </a:p>
-        </p:txBody>
-      </p:sp>
-      <p:sp>
-        <p:nvSpPr>
-          <p:cNvPr id="6" name="Rectangle 5"/>
-          <p:cNvSpPr/>
-          <p:nvPr/>
-        </p:nvSpPr>
-        <p:spPr>
-          <a:xfrm>
-            <a:off x="457200" y="1261872"/>
-            <a:ext cx="11277295" cy="320040"/>
-          </a:xfrm>
-          <a:prstGeom prst="rect">
-            <a:avLst/>
-          </a:prstGeom>
-          <a:solidFill>
-            <a:srgbClr val="095292"/>
-          </a:solidFill>
-          <a:ln>
-            <a:noFill/>
-          </a:ln>
-        </p:spPr>
-        <p:style>
-          <a:lnRef idx="1">
-            <a:schemeClr val="accent1"/>
-          </a:lnRef>
-          <a:fillRef idx="3">
-            <a:schemeClr val="accent1"/>
-          </a:fillRef>
-          <a:effectRef idx="2">
-            <a:schemeClr val="accent1"/>
-          </a:effectRef>
-          <a:fontRef idx="minor">
-            <a:schemeClr val="lt1"/>
-          </a:fontRef>
-        </p:style>
-        <p:txBody>
-          <a:bodyPr rtlCol="0" anchor="ctr"/>
-          <a:lstStyle/>
-          <a:p>
-            <a:pPr algn="ctr"/>
-          </a:p>
-        </p:txBody>
-      </p:sp>
-      <p:sp>
-        <p:nvSpPr>
-          <p:cNvPr id="7" name="TextBox 6"/>
-          <p:cNvSpPr txBox="1"/>
-          <p:nvPr/>
-        </p:nvSpPr>
-        <p:spPr>
-          <a:xfrm>
-            <a:off x="685800" y="1307592"/>
-            <a:ext cx="10820095" cy="256032"/>
-          </a:xfrm>
-          <a:prstGeom prst="rect">
-            <a:avLst/>
-          </a:prstGeom>
-          <a:noFill/>
-        </p:spPr>
-        <p:txBody>
-          <a:bodyPr wrap="square" anchor="ctr"/>
-          <a:lstStyle/>
-          <a:p>
-            <a:r>
-              <a:rPr sz="1000" b="1" i="0">
-                <a:solidFill>
-                  <a:srgbClr val="269CCB"/>
-                </a:solidFill>
-                <a:latin typeface="Calibri"/>
-              </a:rPr>
-              <a:t>● ● ●</a:t>
-            </a:r>
-          </a:p>
-        </p:txBody>
-      </p:sp>
-      <p:sp>
-        <p:nvSpPr>
-          <p:cNvPr id="8" name="TextBox 7"/>
-          <p:cNvSpPr txBox="1"/>
-          <p:nvPr/>
-        </p:nvSpPr>
-        <p:spPr>
-          <a:xfrm>
-            <a:off x="777240" y="1719072"/>
-            <a:ext cx="10637215" cy="4453128"/>
-          </a:xfrm>
-          <a:prstGeom prst="rect">
-            <a:avLst/>
-          </a:prstGeom>
-          <a:noFill/>
-        </p:spPr>
-        <p:txBody>
-          <a:bodyPr wrap="square">
-            <a:spAutoFit/>
-          </a:bodyPr>
-          <a:lstStyle/>
-          <a:p>
-            <a:pPr>
-              <a:spcAft>
-                <a:spcPts val="400"/>
-              </a:spcAft>
-            </a:pPr>
-            <a:r>
-              <a:rPr sz="1400" b="0" i="0">
-                <a:solidFill>
-                  <a:srgbClr val="FFFFFF"/>
-                </a:solidFill>
-                <a:latin typeface="Calibri"/>
-              </a:rPr>
-              <a:t>%% Cada caja lleva TECNOLOGIA, no solo nombre:</a:t>
-            </a:r>
-          </a:p>
-          <a:p>
-            <a:pPr>
-              <a:spcAft>
-                <a:spcPts val="400"/>
-              </a:spcAft>
-            </a:pPr>
-            <a:r>
-              <a:rPr sz="1400" b="0" i="0">
-                <a:solidFill>
-                  <a:srgbClr val="FFFFFF"/>
-                </a:solidFill>
-                <a:latin typeface="Calibri"/>
-              </a:rPr>
-              <a:t>%%   mal:  api[API]</a:t>
-            </a:r>
-          </a:p>
-          <a:p>
-            <a:pPr>
-              <a:spcAft>
-                <a:spcPts val="400"/>
-              </a:spcAft>
-            </a:pPr>
-            <a:r>
-              <a:rPr sz="1400" b="0" i="0">
-                <a:solidFill>
-                  <a:srgbClr val="FFFFFF"/>
-                </a:solidFill>
-                <a:latin typeface="Calibri"/>
-              </a:rPr>
-              <a:t>%%   bien: api[API REST&lt;br/&gt;Node + Express]</a:t>
-            </a:r>
-          </a:p>
-          <a:p>
-            <a:pPr>
-              <a:spcAft>
-                <a:spcPts val="400"/>
-              </a:spcAft>
-            </a:pPr>
-            <a:r>
-              <a:rPr sz="1400" b="0" i="0">
-                <a:solidFill>
-                  <a:srgbClr val="FFFFFF"/>
-                </a:solidFill>
-                <a:latin typeface="Calibri"/>
-              </a:rPr>
-              <a:t/>
-            </a:r>
-          </a:p>
-          <a:p>
-            <a:pPr>
-              <a:spcAft>
-                <a:spcPts val="400"/>
-              </a:spcAft>
-            </a:pPr>
-            <a:r>
-              <a:rPr sz="1400" b="0" i="0">
-                <a:solidFill>
-                  <a:srgbClr val="FFFFFF"/>
-                </a:solidFill>
-                <a:latin typeface="Calibri"/>
-              </a:rPr>
-              <a:t>%% Cada flecha lleva PROTOCOLO y sentido:</a:t>
-            </a:r>
-          </a:p>
-          <a:p>
-            <a:pPr>
-              <a:spcAft>
-                <a:spcPts val="400"/>
-              </a:spcAft>
-            </a:pPr>
-            <a:r>
-              <a:rPr sz="1400" b="0" i="0">
-                <a:solidFill>
-                  <a:srgbClr val="FFFFFF"/>
-                </a:solidFill>
-                <a:latin typeface="Calibri"/>
-              </a:rPr>
-              <a:t>%%   mal:  web --- api</a:t>
-            </a:r>
-          </a:p>
-          <a:p>
-            <a:pPr>
-              <a:spcAft>
-                <a:spcPts val="400"/>
-              </a:spcAft>
-            </a:pPr>
-            <a:r>
-              <a:rPr sz="1400" b="0" i="0">
-                <a:solidFill>
-                  <a:srgbClr val="FFFFFF"/>
-                </a:solidFill>
-                <a:latin typeface="Calibri"/>
-              </a:rPr>
-              <a:t>%%   bien: web --&gt;|JSON/HTTPS| api</a:t>
-            </a:r>
-          </a:p>
-          <a:p>
-            <a:pPr>
-              <a:spcAft>
-                <a:spcPts val="400"/>
-              </a:spcAft>
-            </a:pPr>
-            <a:r>
-              <a:rPr sz="1400" b="0" i="0">
-                <a:solidFill>
-                  <a:srgbClr val="FFFFFF"/>
-                </a:solidFill>
-                <a:latin typeface="Calibri"/>
-              </a:rPr>
-              <a:t/>
-            </a:r>
-          </a:p>
-          <a:p>
-            <a:pPr>
-              <a:spcAft>
-                <a:spcPts val="400"/>
-              </a:spcAft>
-            </a:pPr>
-            <a:r>
-              <a:rPr sz="1400" b="0" i="0">
-                <a:solidFill>
-                  <a:srgbClr val="FFFFFF"/>
-                </a:solidFill>
-                <a:latin typeface="Calibri"/>
-              </a:rPr>
-              <a:t>%% Lo externo va FUERA del subgraph del sistema: es la frontera</a:t>
-            </a:r>
-          </a:p>
-          <a:p>
-            <a:pPr>
-              <a:spcAft>
-                <a:spcPts val="400"/>
-              </a:spcAft>
-            </a:pPr>
-            <a:r>
-              <a:rPr sz="1400" b="0" i="0">
-                <a:solidFill>
-                  <a:srgbClr val="FFFFFF"/>
-                </a:solidFill>
-                <a:latin typeface="Calibri"/>
-              </a:rPr>
-              <a:t>%% que define de que se es responsable.</a:t>
-            </a:r>
-          </a:p>
-          <a:p>
-            <a:pPr>
-              <a:spcAft>
-                <a:spcPts val="400"/>
-              </a:spcAft>
-            </a:pPr>
-            <a:r>
-              <a:rPr sz="1400" b="0" i="0">
-                <a:solidFill>
-                  <a:srgbClr val="FFFFFF"/>
-                </a:solidFill>
-                <a:latin typeface="Calibri"/>
-              </a:rPr>
-              <a:t/>
-            </a:r>
-          </a:p>
-          <a:p>
-            <a:pPr>
-              <a:spcAft>
-                <a:spcPts val="400"/>
-              </a:spcAft>
-            </a:pPr>
-            <a:r>
-              <a:rPr sz="1400" b="0" i="0">
-                <a:solidFill>
-                  <a:srgbClr val="FFFFFF"/>
-                </a:solidFill>
-                <a:latin typeface="Calibri"/>
-              </a:rPr>
-              <a:t>%% Y los nombres tienen que ser LOS MISMOS en el C4, en el Despliegue</a:t>
-            </a:r>
-          </a:p>
-          <a:p>
-            <a:pPr>
-              <a:spcAft>
-                <a:spcPts val="400"/>
-              </a:spcAft>
-            </a:pPr>
-            <a:r>
-              <a:rPr sz="1400" b="0" i="0">
-                <a:solidFill>
-                  <a:srgbClr val="FFFFFF"/>
-                </a:solidFill>
-                <a:latin typeface="Calibri"/>
-              </a:rPr>
-              <a:t>%% (Clase 7) y en el Component (Clase 11). Hay que reconciliarlos.</a:t>
-            </a:r>
-          </a:p>
-        </p:txBody>
-      </p:sp>
-      <p:sp>
-        <p:nvSpPr>
-          <p:cNvPr id="9" name="TextBox 8"/>
-          <p:cNvSpPr txBox="1"/>
-          <p:nvPr/>
-        </p:nvSpPr>
-        <p:spPr>
-          <a:xfrm>
-            <a:off x="11185855" y="6473952"/>
-            <a:ext cx="640080" cy="274320"/>
-          </a:xfrm>
-          <a:prstGeom prst="rect">
-            <a:avLst/>
-          </a:prstGeom>
-          <a:noFill/>
-        </p:spPr>
-        <p:txBody>
-          <a:bodyPr wrap="square">
-            <a:spAutoFit/>
-          </a:bodyPr>
-          <a:lstStyle/>
-          <a:p>
-            <a:pPr algn="r"/>
-            <a:r>
-              <a:rPr sz="1100" b="0" i="0">
-                <a:solidFill>
-                  <a:srgbClr val="666666"/>
-                </a:solidFill>
-                <a:latin typeface="Calibri"/>
-              </a:rPr>
-              <a:t>35</a:t>
-            </a:r>
-          </a:p>
-        </p:txBody>
-      </p:sp>
-    </p:spTree>
-  </p:cSld>
-  <p:clrMapOvr>
-    <a:masterClrMapping/>
-  </p:clrMapOvr>
-</p:sld>
-</file>
-
-<file path=ppt/slides/slide36.xml><?xml version="1.0" encoding="utf-8"?>
-<p:sld xmlns:a="http://schemas.openxmlformats.org/drawingml/2006/main" xmlns:p="http://schemas.openxmlformats.org/presentationml/2006/main" xmlns:r="http://schemas.openxmlformats.org/officeDocument/2006/relationships">
-  <p:cSld>
-    <p:bg>
-      <p:bgPr>
-        <a:solidFill>
-          <a:srgbClr val="FFFFFF"/>
-        </a:solidFill>
-        <a:effectLst/>
-      </p:bgPr>
-    </p:bg>
-    <p:spTree>
-      <p:nvGrpSpPr>
-        <p:cNvPr id="1" name=""/>
-        <p:cNvGrpSpPr/>
-        <p:nvPr/>
-      </p:nvGrpSpPr>
-      <p:grpSpPr/>
-      <p:sp>
-        <p:nvSpPr>
-          <p:cNvPr id="2" name="Rectangle 1"/>
-          <p:cNvSpPr/>
-          <p:nvPr/>
-        </p:nvSpPr>
-        <p:spPr>
-          <a:xfrm>
-            <a:off x="0" y="0"/>
-            <a:ext cx="12191695" cy="1170432"/>
-          </a:xfrm>
-          <a:prstGeom prst="rect">
-            <a:avLst/>
-          </a:prstGeom>
-          <a:solidFill>
-            <a:srgbClr val="095292"/>
-          </a:solidFill>
-          <a:ln>
-            <a:noFill/>
-          </a:ln>
-        </p:spPr>
-        <p:style>
-          <a:lnRef idx="1">
-            <a:schemeClr val="accent1"/>
-          </a:lnRef>
-          <a:fillRef idx="3">
-            <a:schemeClr val="accent1"/>
-          </a:fillRef>
-          <a:effectRef idx="2">
-            <a:schemeClr val="accent1"/>
-          </a:effectRef>
-          <a:fontRef idx="minor">
-            <a:schemeClr val="lt1"/>
-          </a:fontRef>
-        </p:style>
-        <p:txBody>
-          <a:bodyPr rtlCol="0" anchor="ctr"/>
-          <a:lstStyle/>
-          <a:p>
-            <a:pPr algn="ctr"/>
-          </a:p>
-        </p:txBody>
-      </p:sp>
-      <p:sp>
-        <p:nvSpPr>
-          <p:cNvPr id="3" name="Rectangle 2"/>
-          <p:cNvSpPr/>
-          <p:nvPr/>
-        </p:nvSpPr>
-        <p:spPr>
-          <a:xfrm>
-            <a:off x="0" y="1170432"/>
-            <a:ext cx="12191695" cy="41148"/>
-          </a:xfrm>
-          <a:prstGeom prst="rect">
-            <a:avLst/>
-          </a:prstGeom>
-          <a:solidFill>
-            <a:srgbClr val="FFD000"/>
-          </a:solidFill>
-          <a:ln>
-            <a:noFill/>
-          </a:ln>
-        </p:spPr>
-        <p:style>
-          <a:lnRef idx="1">
-            <a:schemeClr val="accent1"/>
-          </a:lnRef>
-          <a:fillRef idx="3">
-            <a:schemeClr val="accent1"/>
-          </a:fillRef>
-          <a:effectRef idx="2">
-            <a:schemeClr val="accent1"/>
-          </a:effectRef>
-          <a:fontRef idx="minor">
-            <a:schemeClr val="lt1"/>
-          </a:fontRef>
-        </p:style>
-        <p:txBody>
-          <a:bodyPr rtlCol="0" anchor="ctr"/>
-          <a:lstStyle/>
-          <a:p>
-            <a:pPr algn="ctr"/>
-          </a:p>
-        </p:txBody>
-      </p:sp>
-      <p:sp>
-        <p:nvSpPr>
-          <p:cNvPr id="4" name="TextBox 3"/>
-          <p:cNvSpPr txBox="1"/>
-          <p:nvPr/>
-        </p:nvSpPr>
-        <p:spPr>
-          <a:xfrm>
-            <a:off x="457200" y="164592"/>
-            <a:ext cx="11277295" cy="384048"/>
-          </a:xfrm>
-          <a:prstGeom prst="rect">
-            <a:avLst/>
-          </a:prstGeom>
-          <a:noFill/>
-        </p:spPr>
-        <p:txBody>
-          <a:bodyPr wrap="square">
-            <a:spAutoFit/>
-          </a:bodyPr>
-          <a:lstStyle/>
-          <a:p>
-            <a:r>
-              <a:rPr sz="2600" b="1" i="0">
-                <a:solidFill>
-                  <a:srgbClr val="FFFFFF"/>
-                </a:solidFill>
-                <a:latin typeface="Calibri"/>
-              </a:rPr>
-              <a:t>Ejemplo de diagrama C4 — nivel Containers</a:t>
-            </a:r>
-          </a:p>
-        </p:txBody>
-      </p:sp>
-      <p:sp>
-        <p:nvSpPr>
-          <p:cNvPr id="5" name="TextBox 4"/>
-          <p:cNvSpPr txBox="1"/>
-          <p:nvPr/>
-        </p:nvSpPr>
-        <p:spPr>
-          <a:xfrm>
-            <a:off x="457200" y="566928"/>
-            <a:ext cx="11277295" cy="411480"/>
-          </a:xfrm>
-          <a:prstGeom prst="rect">
-            <a:avLst/>
-          </a:prstGeom>
-          <a:noFill/>
-        </p:spPr>
-        <p:txBody>
-          <a:bodyPr wrap="square">
-            <a:spAutoFit/>
-          </a:bodyPr>
-          <a:lstStyle/>
-          <a:p>
-            <a:r>
-              <a:rPr sz="1400" b="0" i="0">
-                <a:solidFill>
-                  <a:srgbClr val="B8D8EE"/>
-                </a:solidFill>
-                <a:latin typeface="Calibri"/>
-              </a:rPr>
-              <a:t>2–5 cajas justificadas, cada flecha con protocolo Y formato</a:t>
-            </a:r>
-          </a:p>
-        </p:txBody>
-      </p:sp>
-      <p:sp>
-        <p:nvSpPr>
-          <p:cNvPr id="6" name="Rounded Rectangle 5"/>
-          <p:cNvSpPr/>
-          <p:nvPr/>
-        </p:nvSpPr>
-        <p:spPr>
-          <a:xfrm>
-            <a:off x="822960" y="2011680"/>
-            <a:ext cx="2377440" cy="1097280"/>
-          </a:xfrm>
-          <a:prstGeom prst="roundRect">
-            <a:avLst>
-              <a:gd name="adj" fmla="val 12000"/>
-            </a:avLst>
-          </a:prstGeom>
-          <a:solidFill>
-            <a:srgbClr val="095292"/>
-          </a:solidFill>
-          <a:ln>
-            <a:noFill/>
-          </a:ln>
-        </p:spPr>
-        <p:style>
-          <a:lnRef idx="1">
-            <a:schemeClr val="accent1"/>
-          </a:lnRef>
-          <a:fillRef idx="3">
-            <a:schemeClr val="accent1"/>
-          </a:fillRef>
-          <a:effectRef idx="2">
-            <a:schemeClr val="accent1"/>
-          </a:effectRef>
-          <a:fontRef idx="minor">
-            <a:schemeClr val="lt1"/>
-          </a:fontRef>
-        </p:style>
-        <p:txBody>
-          <a:bodyPr rtlCol="0" anchor="ctr" wrap="square"/>
-          <a:lstStyle/>
-          <a:p>
-            <a:pPr algn="ctr"/>
-            <a:r>
-              <a:rPr sz="1100" b="1" i="0">
-                <a:solidFill>
-                  <a:srgbClr val="FFFFFF"/>
-                </a:solidFill>
-                <a:latin typeface="Calibri"/>
-              </a:rPr>
-              <a:t>App web
-(Container · React)</a:t>
-            </a:r>
-          </a:p>
-        </p:txBody>
-      </p:sp>
-      <p:sp>
-        <p:nvSpPr>
-          <p:cNvPr id="7" name="Rounded Rectangle 6"/>
-          <p:cNvSpPr/>
-          <p:nvPr/>
-        </p:nvSpPr>
-        <p:spPr>
-          <a:xfrm>
-            <a:off x="4754880" y="2011680"/>
-            <a:ext cx="2377440" cy="1097280"/>
-          </a:xfrm>
-          <a:prstGeom prst="roundRect">
-            <a:avLst>
-              <a:gd name="adj" fmla="val 12000"/>
-            </a:avLst>
-          </a:prstGeom>
-          <a:solidFill>
-            <a:srgbClr val="095292"/>
-          </a:solidFill>
-          <a:ln>
-            <a:noFill/>
-          </a:ln>
-        </p:spPr>
-        <p:style>
-          <a:lnRef idx="1">
-            <a:schemeClr val="accent1"/>
-          </a:lnRef>
-          <a:fillRef idx="3">
-            <a:schemeClr val="accent1"/>
-          </a:fillRef>
-          <a:effectRef idx="2">
-            <a:schemeClr val="accent1"/>
-          </a:effectRef>
-          <a:fontRef idx="minor">
-            <a:schemeClr val="lt1"/>
-          </a:fontRef>
-        </p:style>
-        <p:txBody>
-          <a:bodyPr rtlCol="0" anchor="ctr" wrap="square"/>
-          <a:lstStyle/>
-          <a:p>
-            <a:pPr algn="ctr"/>
-            <a:r>
-              <a:rPr sz="1100" b="1" i="0">
-                <a:solidFill>
-                  <a:srgbClr val="FFFFFF"/>
-                </a:solidFill>
-                <a:latin typeface="Calibri"/>
-              </a:rPr>
-              <a:t>API de turnos
-(Container · Node.js)</a:t>
-            </a:r>
-          </a:p>
-        </p:txBody>
-      </p:sp>
-      <p:sp>
-        <p:nvSpPr>
-          <p:cNvPr id="8" name="Rounded Rectangle 7"/>
-          <p:cNvSpPr/>
-          <p:nvPr/>
-        </p:nvSpPr>
-        <p:spPr>
-          <a:xfrm>
-            <a:off x="8595360" y="2011680"/>
-            <a:ext cx="2377440" cy="1097280"/>
-          </a:xfrm>
-          <a:prstGeom prst="roundRect">
-            <a:avLst>
-              <a:gd name="adj" fmla="val 12000"/>
-            </a:avLst>
+            <a:ext cx="12191695" cy="164592"/>
+          </a:xfrm>
+          <a:prstGeom prst="rect">
+            <a:avLst/>
           </a:prstGeom>
           <a:solidFill>
             <a:srgbClr val="269CCB"/>
@@ -13272,179 +14634,80 @@
           </a:fontRef>
         </p:style>
         <p:txBody>
-          <a:bodyPr rtlCol="0" anchor="ctr" wrap="square"/>
+          <a:bodyPr rtlCol="0" anchor="ctr"/>
           <a:lstStyle/>
           <a:p>
             <a:pPr algn="ctr"/>
-            <a:r>
-              <a:rPr sz="1100" b="1" i="0">
-                <a:solidFill>
-                  <a:srgbClr val="FFFFFF"/>
-                </a:solidFill>
-                <a:latin typeface="Calibri"/>
-              </a:rPr>
-              <a:t>Base de turnos
-(ContainerDb · PostgreSQL)</a:t>
-            </a:r>
-          </a:p>
-        </p:txBody>
-      </p:sp>
-      <p:sp>
-        <p:nvSpPr>
-          <p:cNvPr id="9" name="Rounded Rectangle 8"/>
-          <p:cNvSpPr/>
-          <p:nvPr/>
-        </p:nvSpPr>
-        <p:spPr>
-          <a:xfrm>
-            <a:off x="822960" y="3931920"/>
-            <a:ext cx="2377440" cy="914400"/>
-          </a:xfrm>
-          <a:prstGeom prst="roundRect">
-            <a:avLst>
-              <a:gd name="adj" fmla="val 12000"/>
-            </a:avLst>
-          </a:prstGeom>
-          <a:solidFill>
-            <a:srgbClr val="FFD000"/>
-          </a:solidFill>
-          <a:ln>
-            <a:noFill/>
-          </a:ln>
-        </p:spPr>
-        <p:style>
-          <a:lnRef idx="1">
-            <a:schemeClr val="accent1"/>
-          </a:lnRef>
-          <a:fillRef idx="3">
-            <a:schemeClr val="accent1"/>
-          </a:fillRef>
-          <a:effectRef idx="2">
-            <a:schemeClr val="accent1"/>
-          </a:effectRef>
-          <a:fontRef idx="minor">
-            <a:schemeClr val="lt1"/>
-          </a:fontRef>
-        </p:style>
-        <p:txBody>
-          <a:bodyPr rtlCol="0" anchor="ctr" wrap="square"/>
+          </a:p>
+        </p:txBody>
+      </p:sp>
+      <p:pic>
+        <p:nvPicPr>
+          <p:cNvPr id="3" name="Picture 2" descr="logo_uniajc_color.png"/>
+          <p:cNvPicPr>
+            <a:picLocks noChangeAspect="1"/>
+          </p:cNvPicPr>
+          <p:nvPr/>
+        </p:nvPicPr>
+        <p:blipFill>
+          <a:blip r:embed="rId2"/>
+          <a:stretch>
+            <a:fillRect/>
+          </a:stretch>
+        </p:blipFill>
+        <p:spPr>
+          <a:xfrm>
+            <a:off x="10271455" y="5998464"/>
+            <a:ext cx="1463040" cy="643233"/>
+          </a:xfrm>
+          <a:prstGeom prst="rect">
+            <a:avLst/>
+          </a:prstGeom>
+        </p:spPr>
+      </p:pic>
+      <p:sp>
+        <p:nvSpPr>
+          <p:cNvPr id="4" name="TextBox 3"/>
+          <p:cNvSpPr txBox="1"/>
+          <p:nvPr/>
+        </p:nvSpPr>
+        <p:spPr>
+          <a:xfrm>
+            <a:off x="457200" y="1737360"/>
+            <a:ext cx="11277295" cy="1097280"/>
+          </a:xfrm>
+          <a:prstGeom prst="rect">
+            <a:avLst/>
+          </a:prstGeom>
+          <a:noFill/>
+        </p:spPr>
+        <p:txBody>
+          <a:bodyPr wrap="square" anchor="ctr"/>
           <a:lstStyle/>
           <a:p>
             <a:pPr algn="ctr"/>
             <a:r>
-              <a:rPr sz="1300" b="1" i="0">
+              <a:rPr sz="3400" b="1" i="0">
                 <a:solidFill>
                   <a:srgbClr val="095292"/>
                 </a:solidFill>
                 <a:latin typeface="Calibri"/>
               </a:rPr>
-              <a:t>Cliente
-(Person)</a:t>
-            </a:r>
-          </a:p>
-        </p:txBody>
-      </p:sp>
-      <p:sp>
-        <p:nvSpPr>
-          <p:cNvPr id="10" name="Rounded Rectangle 9"/>
-          <p:cNvSpPr/>
-          <p:nvPr/>
-        </p:nvSpPr>
-        <p:spPr>
-          <a:xfrm>
-            <a:off x="4754880" y="3931920"/>
-            <a:ext cx="2377440" cy="914400"/>
-          </a:xfrm>
-          <a:prstGeom prst="roundRect">
-            <a:avLst>
-              <a:gd name="adj" fmla="val 12000"/>
-            </a:avLst>
-          </a:prstGeom>
-          <a:solidFill>
-            <a:srgbClr val="095292"/>
-          </a:solidFill>
-          <a:ln>
-            <a:noFill/>
-          </a:ln>
-        </p:spPr>
-        <p:style>
-          <a:lnRef idx="1">
-            <a:schemeClr val="accent1"/>
-          </a:lnRef>
-          <a:fillRef idx="3">
-            <a:schemeClr val="accent1"/>
-          </a:fillRef>
-          <a:effectRef idx="2">
-            <a:schemeClr val="accent1"/>
-          </a:effectRef>
-          <a:fontRef idx="minor">
-            <a:schemeClr val="lt1"/>
-          </a:fontRef>
-        </p:style>
-        <p:txBody>
-          <a:bodyPr rtlCol="0" anchor="ctr" wrap="square"/>
-          <a:lstStyle/>
-          <a:p>
-            <a:pPr algn="ctr"/>
-            <a:r>
-              <a:rPr sz="1100" b="1" i="0">
-                <a:solidFill>
-                  <a:srgbClr val="FFFFFF"/>
-                </a:solidFill>
-                <a:latin typeface="Calibri"/>
-              </a:rPr>
-              <a:t>Worker de avisos
-(Container · cola)</a:t>
-            </a:r>
-          </a:p>
-        </p:txBody>
-      </p:sp>
-      <p:cxnSp>
-        <p:nvCxnSpPr>
-          <p:cNvPr id="11" name="Connector 10"/>
-          <p:cNvCxnSpPr/>
-          <p:nvPr/>
-        </p:nvCxnSpPr>
-        <p:spPr>
-          <a:xfrm flipV="1">
-            <a:off x="2011680" y="3108960"/>
-            <a:ext cx="0" cy="822960"/>
-          </a:xfrm>
-          <a:prstGeom prst="line">
-            <a:avLst/>
-          </a:prstGeom>
-          <a:ln w="22225">
-            <a:solidFill>
-              <a:srgbClr val="666666"/>
-            </a:solidFill>
-            <a:tailEnd type="triangle" w="med" len="med"/>
-          </a:ln>
-        </p:spPr>
-        <p:style>
-          <a:lnRef idx="2">
-            <a:schemeClr val="accent1"/>
-          </a:lnRef>
-          <a:fillRef idx="0">
-            <a:schemeClr val="accent1"/>
-          </a:fillRef>
-          <a:effectRef idx="1">
-            <a:schemeClr val="accent1"/>
-          </a:effectRef>
-          <a:fontRef idx="minor">
-            <a:schemeClr val="tx1"/>
-          </a:fontRef>
-        </p:style>
-      </p:cxnSp>
-      <p:sp>
-        <p:nvSpPr>
-          <p:cNvPr id="12" name="TextBox 11"/>
+              <a:t>Clase 4 · cierre conceptual</a:t>
+            </a:r>
+          </a:p>
+        </p:txBody>
+      </p:sp>
+      <p:sp>
+        <p:nvSpPr>
+          <p:cNvPr id="5" name="TextBox 4"/>
           <p:cNvSpPr txBox="1"/>
           <p:nvPr/>
         </p:nvSpPr>
         <p:spPr>
           <a:xfrm>
-            <a:off x="2121408" y="3319272"/>
-            <a:ext cx="1645920" cy="320040"/>
+            <a:off x="457200" y="3017520"/>
+            <a:ext cx="11277295" cy="1645920"/>
           </a:xfrm>
           <a:prstGeom prst="rect">
             <a:avLst/>
@@ -13457,65 +14720,65 @@
           </a:bodyPr>
           <a:lstStyle/>
           <a:p>
-            <a:pPr algn="l"/>
-            <a:r>
-              <a:rPr sz="1000" b="0" i="1">
-                <a:solidFill>
-                  <a:srgbClr val="666666"/>
-                </a:solidFill>
-                <a:latin typeface="Calibri"/>
-              </a:rPr>
-              <a:t>usa · HTTPS</a:t>
-            </a:r>
-          </a:p>
-        </p:txBody>
-      </p:sp>
-      <p:cxnSp>
-        <p:nvCxnSpPr>
-          <p:cNvPr id="13" name="Connector 12"/>
-          <p:cNvCxnSpPr/>
-          <p:nvPr/>
-        </p:nvCxnSpPr>
-        <p:spPr>
-          <a:xfrm>
-            <a:off x="3200400" y="2560320"/>
-            <a:ext cx="1554480" cy="0"/>
-          </a:xfrm>
-          <a:prstGeom prst="line">
-            <a:avLst/>
-          </a:prstGeom>
-          <a:ln w="22225">
-            <a:solidFill>
-              <a:srgbClr val="666666"/>
-            </a:solidFill>
-            <a:tailEnd type="triangle" w="med" len="med"/>
-          </a:ln>
-        </p:spPr>
-        <p:style>
-          <a:lnRef idx="2">
-            <a:schemeClr val="accent1"/>
-          </a:lnRef>
-          <a:fillRef idx="0">
-            <a:schemeClr val="accent1"/>
-          </a:fillRef>
-          <a:effectRef idx="1">
-            <a:schemeClr val="accent1"/>
-          </a:effectRef>
-          <a:fontRef idx="minor">
-            <a:schemeClr val="tx1"/>
-          </a:fontRef>
-        </p:style>
-      </p:cxnSp>
-      <p:sp>
-        <p:nvSpPr>
-          <p:cNvPr id="14" name="TextBox 13"/>
+            <a:pPr algn="ctr">
+              <a:spcAft>
+                <a:spcPts val="600"/>
+              </a:spcAft>
+            </a:pPr>
+            <a:r>
+              <a:rPr sz="1600" b="0" i="0">
+                <a:solidFill>
+                  <a:srgbClr val="333333"/>
+                </a:solidFill>
+                <a:latin typeface="Calibri"/>
+              </a:rPr>
+              <a:t>Contrastar monolito vs microservicios con criterios de equipo y acoplamiento.</a:t>
+            </a:r>
+          </a:p>
+          <a:p>
+            <a:pPr algn="ctr">
+              <a:spcAft>
+                <a:spcPts val="600"/>
+              </a:spcAft>
+            </a:pPr>
+            <a:r>
+              <a:rPr sz="1600" b="0" i="0">
+                <a:solidFill>
+                  <a:srgbClr val="333333"/>
+                </a:solidFill>
+                <a:latin typeface="Calibri"/>
+              </a:rPr>
+              <a:t>Modelar la app en C4 Container (Mermaid) con 2–5 cajas justificadas.</a:t>
+            </a:r>
+          </a:p>
+          <a:p>
+            <a:pPr algn="ctr">
+              <a:spcAft>
+                <a:spcPts val="600"/>
+              </a:spcAft>
+            </a:pPr>
+            <a:r>
+              <a:rPr sz="1600" b="0" i="0">
+                <a:solidFill>
+                  <a:srgbClr val="333333"/>
+                </a:solidFill>
+                <a:latin typeface="Calibri"/>
+              </a:rPr>
+              <a:t>Definir 3 contratos con verbo, ruta y error de negocio, y nombrar 3 riesgos de distribución.</a:t>
+            </a:r>
+          </a:p>
+        </p:txBody>
+      </p:sp>
+      <p:sp>
+        <p:nvSpPr>
+          <p:cNvPr id="6" name="TextBox 5"/>
           <p:cNvSpPr txBox="1"/>
           <p:nvPr/>
         </p:nvSpPr>
         <p:spPr>
           <a:xfrm>
-            <a:off x="3154679" y="2359152"/>
-            <a:ext cx="1645920" cy="320040"/>
+            <a:off x="457200" y="4754880"/>
+            <a:ext cx="11277295" cy="640080"/>
           </a:xfrm>
           <a:prstGeom prst="rect">
             <a:avLst/>
@@ -13530,2319 +14793,13 @@
           <a:p>
             <a:pPr algn="ctr"/>
             <a:r>
-              <a:rPr sz="1000" b="0" i="1">
-                <a:solidFill>
-                  <a:srgbClr val="666666"/>
-                </a:solidFill>
-                <a:latin typeface="Calibri"/>
-              </a:rPr>
-              <a:t>HTTPS/JSON</a:t>
-            </a:r>
-          </a:p>
-        </p:txBody>
-      </p:sp>
-      <p:cxnSp>
-        <p:nvCxnSpPr>
-          <p:cNvPr id="15" name="Connector 14"/>
-          <p:cNvCxnSpPr/>
-          <p:nvPr/>
-        </p:nvCxnSpPr>
-        <p:spPr>
-          <a:xfrm>
-            <a:off x="7132320" y="2560320"/>
-            <a:ext cx="1463040" cy="0"/>
-          </a:xfrm>
-          <a:prstGeom prst="line">
-            <a:avLst/>
-          </a:prstGeom>
-          <a:ln w="22225">
-            <a:solidFill>
-              <a:srgbClr val="666666"/>
-            </a:solidFill>
-            <a:tailEnd type="triangle" w="med" len="med"/>
-          </a:ln>
-        </p:spPr>
-        <p:style>
-          <a:lnRef idx="2">
-            <a:schemeClr val="accent1"/>
-          </a:lnRef>
-          <a:fillRef idx="0">
-            <a:schemeClr val="accent1"/>
-          </a:fillRef>
-          <a:effectRef idx="1">
-            <a:schemeClr val="accent1"/>
-          </a:effectRef>
-          <a:fontRef idx="minor">
-            <a:schemeClr val="tx1"/>
-          </a:fontRef>
-        </p:style>
-      </p:cxnSp>
-      <p:sp>
-        <p:nvSpPr>
-          <p:cNvPr id="16" name="TextBox 15"/>
-          <p:cNvSpPr txBox="1"/>
-          <p:nvPr/>
-        </p:nvSpPr>
-        <p:spPr>
-          <a:xfrm>
-            <a:off x="7040880" y="2359152"/>
-            <a:ext cx="1645920" cy="320040"/>
-          </a:xfrm>
-          <a:prstGeom prst="rect">
-            <a:avLst/>
-          </a:prstGeom>
-          <a:noFill/>
-        </p:spPr>
-        <p:txBody>
-          <a:bodyPr wrap="square">
-            <a:spAutoFit/>
-          </a:bodyPr>
-          <a:lstStyle/>
-          <a:p>
-            <a:pPr algn="ctr"/>
-            <a:r>
-              <a:rPr sz="1000" b="0" i="1">
-                <a:solidFill>
-                  <a:srgbClr val="666666"/>
-                </a:solidFill>
-                <a:latin typeface="Calibri"/>
-              </a:rPr>
-              <a:t>TCP/SQL</a:t>
-            </a:r>
-          </a:p>
-        </p:txBody>
-      </p:sp>
-      <p:cxnSp>
-        <p:nvCxnSpPr>
-          <p:cNvPr id="17" name="Connector 16"/>
-          <p:cNvCxnSpPr/>
-          <p:nvPr/>
-        </p:nvCxnSpPr>
-        <p:spPr>
-          <a:xfrm>
-            <a:off x="5943600" y="3108960"/>
-            <a:ext cx="0" cy="822960"/>
-          </a:xfrm>
-          <a:prstGeom prst="line">
-            <a:avLst/>
-          </a:prstGeom>
-          <a:ln w="22225">
-            <a:solidFill>
-              <a:srgbClr val="666666"/>
-            </a:solidFill>
-            <a:tailEnd type="triangle" w="med" len="med"/>
-          </a:ln>
-        </p:spPr>
-        <p:style>
-          <a:lnRef idx="2">
-            <a:schemeClr val="accent1"/>
-          </a:lnRef>
-          <a:fillRef idx="0">
-            <a:schemeClr val="accent1"/>
-          </a:fillRef>
-          <a:effectRef idx="1">
-            <a:schemeClr val="accent1"/>
-          </a:effectRef>
-          <a:fontRef idx="minor">
-            <a:schemeClr val="tx1"/>
-          </a:fontRef>
-        </p:style>
-      </p:cxnSp>
-      <p:sp>
-        <p:nvSpPr>
-          <p:cNvPr id="18" name="TextBox 17"/>
-          <p:cNvSpPr txBox="1"/>
-          <p:nvPr/>
-        </p:nvSpPr>
-        <p:spPr>
-          <a:xfrm>
-            <a:off x="6053328" y="3319272"/>
-            <a:ext cx="1645920" cy="320040"/>
-          </a:xfrm>
-          <a:prstGeom prst="rect">
-            <a:avLst/>
-          </a:prstGeom>
-          <a:noFill/>
-        </p:spPr>
-        <p:txBody>
-          <a:bodyPr wrap="square">
-            <a:spAutoFit/>
-          </a:bodyPr>
-          <a:lstStyle/>
-          <a:p>
-            <a:pPr algn="l"/>
-            <a:r>
-              <a:rPr sz="1000" b="0" i="1">
-                <a:solidFill>
-                  <a:srgbClr val="666666"/>
-                </a:solidFill>
-                <a:latin typeface="Calibri"/>
-              </a:rPr>
-              <a:t>evento/cola (AMQP)</a:t>
-            </a:r>
-          </a:p>
-        </p:txBody>
-      </p:sp>
-      <p:sp>
-        <p:nvSpPr>
-          <p:cNvPr id="19" name="TextBox 18"/>
-          <p:cNvSpPr txBox="1"/>
-          <p:nvPr/>
-        </p:nvSpPr>
-        <p:spPr>
-          <a:xfrm>
-            <a:off x="457200" y="6263640"/>
-            <a:ext cx="11277295" cy="411480"/>
-          </a:xfrm>
-          <a:prstGeom prst="rect">
-            <a:avLst/>
-          </a:prstGeom>
-          <a:noFill/>
-        </p:spPr>
-        <p:txBody>
-          <a:bodyPr wrap="square">
-            <a:spAutoFit/>
-          </a:bodyPr>
-          <a:lstStyle/>
-          <a:p>
-            <a:r>
-              <a:rPr sz="1100" b="0" i="1">
-                <a:solidFill>
-                  <a:srgbClr val="666666"/>
-                </a:solidFill>
-                <a:latin typeface="Calibri"/>
-              </a:rPr>
-              <a:t>Lo que guarda datos va como ContainerDb, no como un Container más. La cuarta caja (el worker) existe porque el correo tarda: sin esa razón, no va. Y estos nombres deben reaparecer igual en el Deployment (Clase 7).</a:t>
-            </a:r>
-          </a:p>
-        </p:txBody>
-      </p:sp>
-      <p:sp>
-        <p:nvSpPr>
-          <p:cNvPr id="20" name="TextBox 19"/>
-          <p:cNvSpPr txBox="1"/>
-          <p:nvPr/>
-        </p:nvSpPr>
-        <p:spPr>
-          <a:xfrm>
-            <a:off x="11185855" y="6473952"/>
-            <a:ext cx="640080" cy="274320"/>
-          </a:xfrm>
-          <a:prstGeom prst="rect">
-            <a:avLst/>
-          </a:prstGeom>
-          <a:noFill/>
-        </p:spPr>
-        <p:txBody>
-          <a:bodyPr wrap="square">
-            <a:spAutoFit/>
-          </a:bodyPr>
-          <a:lstStyle/>
-          <a:p>
-            <a:pPr algn="r"/>
-            <a:r>
-              <a:rPr sz="1100" b="0" i="0">
-                <a:solidFill>
-                  <a:srgbClr val="666666"/>
-                </a:solidFill>
-                <a:latin typeface="Calibri"/>
-              </a:rPr>
-              <a:t>36</a:t>
-            </a:r>
-          </a:p>
-        </p:txBody>
-      </p:sp>
-    </p:spTree>
-  </p:cSld>
-  <p:clrMapOvr>
-    <a:masterClrMapping/>
-  </p:clrMapOvr>
-</p:sld>
-</file>
-
-<file path=ppt/slides/slide37.xml><?xml version="1.0" encoding="utf-8"?>
-<p:sld xmlns:a="http://schemas.openxmlformats.org/drawingml/2006/main" xmlns:p="http://schemas.openxmlformats.org/presentationml/2006/main" xmlns:r="http://schemas.openxmlformats.org/officeDocument/2006/relationships">
-  <p:cSld>
-    <p:bg>
-      <p:bgPr>
-        <a:solidFill>
-          <a:srgbClr val="FFFFFF"/>
-        </a:solidFill>
-        <a:effectLst/>
-      </p:bgPr>
-    </p:bg>
-    <p:spTree>
-      <p:nvGrpSpPr>
-        <p:cNvPr id="1" name=""/>
-        <p:cNvGrpSpPr/>
-        <p:nvPr/>
-      </p:nvGrpSpPr>
-      <p:grpSpPr/>
-      <p:sp>
-        <p:nvSpPr>
-          <p:cNvPr id="2" name="Rectangle 1"/>
-          <p:cNvSpPr/>
-          <p:nvPr/>
-        </p:nvSpPr>
-        <p:spPr>
-          <a:xfrm>
-            <a:off x="0" y="0"/>
-            <a:ext cx="12191695" cy="960120"/>
-          </a:xfrm>
-          <a:prstGeom prst="rect">
-            <a:avLst/>
-          </a:prstGeom>
-          <a:solidFill>
-            <a:srgbClr val="095292"/>
-          </a:solidFill>
-          <a:ln>
-            <a:noFill/>
-          </a:ln>
-        </p:spPr>
-        <p:style>
-          <a:lnRef idx="1">
-            <a:schemeClr val="accent1"/>
-          </a:lnRef>
-          <a:fillRef idx="3">
-            <a:schemeClr val="accent1"/>
-          </a:fillRef>
-          <a:effectRef idx="2">
-            <a:schemeClr val="accent1"/>
-          </a:effectRef>
-          <a:fontRef idx="minor">
-            <a:schemeClr val="lt1"/>
-          </a:fontRef>
-        </p:style>
-        <p:txBody>
-          <a:bodyPr rtlCol="0" anchor="ctr"/>
-          <a:lstStyle/>
-          <a:p>
-            <a:pPr algn="ctr"/>
-          </a:p>
-        </p:txBody>
-      </p:sp>
-      <p:sp>
-        <p:nvSpPr>
-          <p:cNvPr id="3" name="Rectangle 2"/>
-          <p:cNvSpPr/>
-          <p:nvPr/>
-        </p:nvSpPr>
-        <p:spPr>
-          <a:xfrm>
-            <a:off x="0" y="960120"/>
-            <a:ext cx="12191695" cy="41148"/>
-          </a:xfrm>
-          <a:prstGeom prst="rect">
-            <a:avLst/>
-          </a:prstGeom>
-          <a:solidFill>
-            <a:srgbClr val="FFD000"/>
-          </a:solidFill>
-          <a:ln>
-            <a:noFill/>
-          </a:ln>
-        </p:spPr>
-        <p:style>
-          <a:lnRef idx="1">
-            <a:schemeClr val="accent1"/>
-          </a:lnRef>
-          <a:fillRef idx="3">
-            <a:schemeClr val="accent1"/>
-          </a:fillRef>
-          <a:effectRef idx="2">
-            <a:schemeClr val="accent1"/>
-          </a:effectRef>
-          <a:fontRef idx="minor">
-            <a:schemeClr val="lt1"/>
-          </a:fontRef>
-        </p:style>
-        <p:txBody>
-          <a:bodyPr rtlCol="0" anchor="ctr"/>
-          <a:lstStyle/>
-          <a:p>
-            <a:pPr algn="ctr"/>
-          </a:p>
-        </p:txBody>
-      </p:sp>
-      <p:sp>
-        <p:nvSpPr>
-          <p:cNvPr id="4" name="TextBox 3"/>
-          <p:cNvSpPr txBox="1"/>
-          <p:nvPr/>
-        </p:nvSpPr>
-        <p:spPr>
-          <a:xfrm>
-            <a:off x="457200" y="164592"/>
-            <a:ext cx="11277295" cy="502920"/>
-          </a:xfrm>
-          <a:prstGeom prst="rect">
-            <a:avLst/>
-          </a:prstGeom>
-          <a:noFill/>
-        </p:spPr>
-        <p:txBody>
-          <a:bodyPr wrap="square">
-            <a:spAutoFit/>
-          </a:bodyPr>
-          <a:lstStyle/>
-          <a:p>
-            <a:r>
-              <a:rPr sz="2600" b="1" i="0">
-                <a:solidFill>
-                  <a:srgbClr val="FFFFFF"/>
-                </a:solidFill>
-                <a:latin typeface="Calibri"/>
-              </a:rPr>
-              <a:t>Microservicios de verdad vs microservicios teatro</a:t>
-            </a:r>
-          </a:p>
-        </p:txBody>
-      </p:sp>
-      <p:sp>
-        <p:nvSpPr>
-          <p:cNvPr id="5" name="Rounded Rectangle 4"/>
-          <p:cNvSpPr/>
-          <p:nvPr/>
-        </p:nvSpPr>
-        <p:spPr>
-          <a:xfrm>
-            <a:off x="457200" y="1261872"/>
-            <a:ext cx="5478627" cy="5093208"/>
-          </a:xfrm>
-          <a:prstGeom prst="roundRect">
-            <a:avLst>
-              <a:gd name="adj" fmla="val 12000"/>
-            </a:avLst>
-          </a:prstGeom>
-          <a:solidFill>
-            <a:srgbClr val="FBE4E4"/>
-          </a:solidFill>
-          <a:ln>
-            <a:noFill/>
-          </a:ln>
-        </p:spPr>
-        <p:style>
-          <a:lnRef idx="1">
-            <a:schemeClr val="accent1"/>
-          </a:lnRef>
-          <a:fillRef idx="3">
-            <a:schemeClr val="accent1"/>
-          </a:fillRef>
-          <a:effectRef idx="2">
-            <a:schemeClr val="accent1"/>
-          </a:effectRef>
-          <a:fontRef idx="minor">
-            <a:schemeClr val="lt1"/>
-          </a:fontRef>
-        </p:style>
-        <p:txBody>
-          <a:bodyPr rtlCol="0" anchor="ctr"/>
-          <a:lstStyle/>
-          <a:p>
-            <a:pPr algn="ctr"/>
-          </a:p>
-        </p:txBody>
-      </p:sp>
-      <p:sp>
-        <p:nvSpPr>
-          <p:cNvPr id="6" name="Rectangle 5"/>
-          <p:cNvSpPr/>
-          <p:nvPr/>
-        </p:nvSpPr>
-        <p:spPr>
-          <a:xfrm>
-            <a:off x="457200" y="1261872"/>
-            <a:ext cx="5478627" cy="502920"/>
-          </a:xfrm>
-          <a:prstGeom prst="rect">
-            <a:avLst/>
-          </a:prstGeom>
-          <a:solidFill>
-            <a:srgbClr val="A02030"/>
-          </a:solidFill>
-          <a:ln>
-            <a:noFill/>
-          </a:ln>
-        </p:spPr>
-        <p:style>
-          <a:lnRef idx="1">
-            <a:schemeClr val="accent1"/>
-          </a:lnRef>
-          <a:fillRef idx="3">
-            <a:schemeClr val="accent1"/>
-          </a:fillRef>
-          <a:effectRef idx="2">
-            <a:schemeClr val="accent1"/>
-          </a:effectRef>
-          <a:fontRef idx="minor">
-            <a:schemeClr val="lt1"/>
-          </a:fontRef>
-        </p:style>
-        <p:txBody>
-          <a:bodyPr rtlCol="0" anchor="ctr"/>
-          <a:lstStyle/>
-          <a:p>
-            <a:pPr algn="ctr"/>
-          </a:p>
-        </p:txBody>
-      </p:sp>
-      <p:sp>
-        <p:nvSpPr>
-          <p:cNvPr id="7" name="TextBox 6"/>
-          <p:cNvSpPr txBox="1"/>
-          <p:nvPr/>
-        </p:nvSpPr>
-        <p:spPr>
-          <a:xfrm>
-            <a:off x="594360" y="1353312"/>
-            <a:ext cx="5204307" cy="365760"/>
-          </a:xfrm>
-          <a:prstGeom prst="rect">
-            <a:avLst/>
-          </a:prstGeom>
-          <a:noFill/>
-        </p:spPr>
-        <p:txBody>
-          <a:bodyPr wrap="square" anchor="ctr"/>
-          <a:lstStyle/>
-          <a:p>
-            <a:pPr algn="ctr"/>
-            <a:r>
-              <a:rPr sz="1600" b="1" i="0">
-                <a:solidFill>
-                  <a:srgbClr val="FFFFFF"/>
-                </a:solidFill>
-                <a:latin typeface="Calibri"/>
-              </a:rPr>
-              <a:t>Teatro (lo que NO queremos)</a:t>
-            </a:r>
-          </a:p>
-        </p:txBody>
-      </p:sp>
-      <p:sp>
-        <p:nvSpPr>
-          <p:cNvPr id="8" name="TextBox 7"/>
-          <p:cNvSpPr txBox="1"/>
-          <p:nvPr/>
-        </p:nvSpPr>
-        <p:spPr>
-          <a:xfrm>
-            <a:off x="621792" y="1901952"/>
-            <a:ext cx="5158587" cy="4498848"/>
-          </a:xfrm>
-          <a:prstGeom prst="rect">
-            <a:avLst/>
-          </a:prstGeom>
-          <a:noFill/>
-        </p:spPr>
-        <p:txBody>
-          <a:bodyPr wrap="square">
-            <a:spAutoFit/>
-          </a:bodyPr>
-          <a:lstStyle/>
-          <a:p>
-            <a:pPr>
-              <a:spcAft>
-                <a:spcPts val="800"/>
-              </a:spcAft>
-            </a:pPr>
-            <a:r>
-              <a:rPr sz="1500" b="0" i="0">
-                <a:solidFill>
-                  <a:srgbClr val="333333"/>
-                </a:solidFill>
-                <a:latin typeface="Calibri"/>
-              </a:rPr>
-              <a:t>–   12 servicios para un equipo de 3</a:t>
-            </a:r>
-          </a:p>
-          <a:p>
-            <a:pPr>
-              <a:spcAft>
-                <a:spcPts val="800"/>
-              </a:spcAft>
-            </a:pPr>
-            <a:r>
-              <a:rPr sz="1500" b="0" i="0">
-                <a:solidFill>
-                  <a:srgbClr val="333333"/>
-                </a:solidFill>
-                <a:latin typeface="Calibri"/>
-              </a:rPr>
-              <a:t>–   Se separan por capricho tecnico, no por negocio</a:t>
-            </a:r>
-          </a:p>
-          <a:p>
-            <a:pPr>
-              <a:spcAft>
-                <a:spcPts val="800"/>
-              </a:spcAft>
-            </a:pPr>
-            <a:r>
-              <a:rPr sz="1500" b="0" i="0">
-                <a:solidFill>
-                  <a:srgbClr val="333333"/>
-                </a:solidFill>
-                <a:latin typeface="Calibri"/>
-              </a:rPr>
-              <a:t>–   Flechas sin protocolo ni verbo</a:t>
-            </a:r>
-          </a:p>
-          <a:p>
-            <a:pPr>
-              <a:spcAft>
-                <a:spcPts val="800"/>
-              </a:spcAft>
-            </a:pPr>
-            <a:r>
-              <a:rPr sz="1500" b="0" i="0">
-                <a:solidFill>
-                  <a:srgbClr val="333333"/>
-                </a:solidFill>
-                <a:latin typeface="Calibri"/>
-              </a:rPr>
-              <a:t>–   Nadie sabe explicar por que ese corte</a:t>
-            </a:r>
-          </a:p>
-        </p:txBody>
-      </p:sp>
-      <p:sp>
-        <p:nvSpPr>
-          <p:cNvPr id="9" name="Rounded Rectangle 8"/>
-          <p:cNvSpPr/>
-          <p:nvPr/>
-        </p:nvSpPr>
-        <p:spPr>
-          <a:xfrm>
-            <a:off x="6255867" y="1261872"/>
-            <a:ext cx="5478627" cy="5093208"/>
-          </a:xfrm>
-          <a:prstGeom prst="roundRect">
-            <a:avLst>
-              <a:gd name="adj" fmla="val 12000"/>
-            </a:avLst>
-          </a:prstGeom>
-          <a:solidFill>
-            <a:srgbClr val="E8F4FA"/>
-          </a:solidFill>
-          <a:ln>
-            <a:noFill/>
-          </a:ln>
-        </p:spPr>
-        <p:style>
-          <a:lnRef idx="1">
-            <a:schemeClr val="accent1"/>
-          </a:lnRef>
-          <a:fillRef idx="3">
-            <a:schemeClr val="accent1"/>
-          </a:fillRef>
-          <a:effectRef idx="2">
-            <a:schemeClr val="accent1"/>
-          </a:effectRef>
-          <a:fontRef idx="minor">
-            <a:schemeClr val="lt1"/>
-          </a:fontRef>
-        </p:style>
-        <p:txBody>
-          <a:bodyPr rtlCol="0" anchor="ctr"/>
-          <a:lstStyle/>
-          <a:p>
-            <a:pPr algn="ctr"/>
-          </a:p>
-        </p:txBody>
-      </p:sp>
-      <p:sp>
-        <p:nvSpPr>
-          <p:cNvPr id="10" name="Rectangle 9"/>
-          <p:cNvSpPr/>
-          <p:nvPr/>
-        </p:nvSpPr>
-        <p:spPr>
-          <a:xfrm>
-            <a:off x="6255867" y="1261872"/>
-            <a:ext cx="5478627" cy="502920"/>
-          </a:xfrm>
-          <a:prstGeom prst="rect">
-            <a:avLst/>
-          </a:prstGeom>
-          <a:solidFill>
-            <a:srgbClr val="095292"/>
-          </a:solidFill>
-          <a:ln>
-            <a:noFill/>
-          </a:ln>
-        </p:spPr>
-        <p:style>
-          <a:lnRef idx="1">
-            <a:schemeClr val="accent1"/>
-          </a:lnRef>
-          <a:fillRef idx="3">
-            <a:schemeClr val="accent1"/>
-          </a:fillRef>
-          <a:effectRef idx="2">
-            <a:schemeClr val="accent1"/>
-          </a:effectRef>
-          <a:fontRef idx="minor">
-            <a:schemeClr val="lt1"/>
-          </a:fontRef>
-        </p:style>
-        <p:txBody>
-          <a:bodyPr rtlCol="0" anchor="ctr"/>
-          <a:lstStyle/>
-          <a:p>
-            <a:pPr algn="ctr"/>
-          </a:p>
-        </p:txBody>
-      </p:sp>
-      <p:sp>
-        <p:nvSpPr>
-          <p:cNvPr id="11" name="TextBox 10"/>
-          <p:cNvSpPr txBox="1"/>
-          <p:nvPr/>
-        </p:nvSpPr>
-        <p:spPr>
-          <a:xfrm>
-            <a:off x="6393027" y="1353312"/>
-            <a:ext cx="5204307" cy="365760"/>
-          </a:xfrm>
-          <a:prstGeom prst="rect">
-            <a:avLst/>
-          </a:prstGeom>
-          <a:noFill/>
-        </p:spPr>
-        <p:txBody>
-          <a:bodyPr wrap="square" anchor="ctr"/>
-          <a:lstStyle/>
-          <a:p>
-            <a:pPr algn="ctr"/>
-            <a:r>
-              <a:rPr sz="1600" b="1" i="0">
-                <a:solidFill>
-                  <a:srgbClr val="FFFFFF"/>
-                </a:solidFill>
-                <a:latin typeface="Calibri"/>
-              </a:rPr>
-              <a:t>Frontera justificada</a:t>
-            </a:r>
-          </a:p>
-        </p:txBody>
-      </p:sp>
-      <p:sp>
-        <p:nvSpPr>
-          <p:cNvPr id="12" name="TextBox 11"/>
-          <p:cNvSpPr txBox="1"/>
-          <p:nvPr/>
-        </p:nvSpPr>
-        <p:spPr>
-          <a:xfrm>
-            <a:off x="6420459" y="1901952"/>
-            <a:ext cx="5158587" cy="4498848"/>
-          </a:xfrm>
-          <a:prstGeom prst="rect">
-            <a:avLst/>
-          </a:prstGeom>
-          <a:noFill/>
-        </p:spPr>
-        <p:txBody>
-          <a:bodyPr wrap="square">
-            <a:spAutoFit/>
-          </a:bodyPr>
-          <a:lstStyle/>
-          <a:p>
-            <a:pPr>
-              <a:spcAft>
-                <a:spcPts val="800"/>
-              </a:spcAft>
-            </a:pPr>
-            <a:r>
-              <a:rPr sz="1500" b="0" i="0">
-                <a:solidFill>
-                  <a:srgbClr val="333333"/>
-                </a:solidFill>
-                <a:latin typeface="Calibri"/>
-              </a:rPr>
-              <a:t>–   2-5 contenedores logicos, cada uno con su razon</a:t>
-            </a:r>
-          </a:p>
-          <a:p>
-            <a:pPr>
-              <a:spcAft>
-                <a:spcPts val="800"/>
-              </a:spcAft>
-            </a:pPr>
-            <a:r>
-              <a:rPr sz="1500" b="0" i="0">
-                <a:solidFill>
-                  <a:srgbClr val="333333"/>
-                </a:solidFill>
-                <a:latin typeface="Calibri"/>
-              </a:rPr>
-              <a:t>–   Frontera = responsabilidad de negocio</a:t>
-            </a:r>
-          </a:p>
-          <a:p>
-            <a:pPr>
-              <a:spcAft>
-                <a:spcPts val="800"/>
-              </a:spcAft>
-            </a:pPr>
-            <a:r>
-              <a:rPr sz="1500" b="0" i="0">
-                <a:solidFill>
-                  <a:srgbClr val="333333"/>
-                </a:solidFill>
-                <a:latin typeface="Calibri"/>
-              </a:rPr>
-              <a:t>–   Cada flecha: protocolo + verbo (HTTP/JSON, 'reserva')</a:t>
-            </a:r>
-          </a:p>
-          <a:p>
-            <a:pPr>
-              <a:spcAft>
-                <a:spcPts val="800"/>
-              </a:spcAft>
-            </a:pPr>
-            <a:r>
-              <a:rPr sz="1500" b="0" i="0">
-                <a:solidFill>
-                  <a:srgbClr val="333333"/>
-                </a:solidFill>
-                <a:latin typeface="Calibri"/>
-              </a:rPr>
-              <a:t>–   Se explica en 60 s sin leer notas</a:t>
-            </a:r>
-          </a:p>
-        </p:txBody>
-      </p:sp>
-      <p:sp>
-        <p:nvSpPr>
-          <p:cNvPr id="13" name="TextBox 12"/>
-          <p:cNvSpPr txBox="1"/>
-          <p:nvPr/>
-        </p:nvSpPr>
-        <p:spPr>
-          <a:xfrm>
-            <a:off x="11185855" y="6473952"/>
-            <a:ext cx="640080" cy="274320"/>
-          </a:xfrm>
-          <a:prstGeom prst="rect">
-            <a:avLst/>
-          </a:prstGeom>
-          <a:noFill/>
-        </p:spPr>
-        <p:txBody>
-          <a:bodyPr wrap="square">
-            <a:spAutoFit/>
-          </a:bodyPr>
-          <a:lstStyle/>
-          <a:p>
-            <a:pPr algn="r"/>
-            <a:r>
-              <a:rPr sz="1100" b="0" i="0">
-                <a:solidFill>
-                  <a:srgbClr val="666666"/>
-                </a:solidFill>
-                <a:latin typeface="Calibri"/>
-              </a:rPr>
-              <a:t>37</a:t>
-            </a:r>
-          </a:p>
-        </p:txBody>
-      </p:sp>
-    </p:spTree>
-  </p:cSld>
-  <p:clrMapOvr>
-    <a:masterClrMapping/>
-  </p:clrMapOvr>
-</p:sld>
-</file>
-
-<file path=ppt/slides/slide38.xml><?xml version="1.0" encoding="utf-8"?>
-<p:sld xmlns:a="http://schemas.openxmlformats.org/drawingml/2006/main" xmlns:p="http://schemas.openxmlformats.org/presentationml/2006/main" xmlns:r="http://schemas.openxmlformats.org/officeDocument/2006/relationships">
-  <p:cSld>
-    <p:bg>
-      <p:bgPr>
-        <a:solidFill>
-          <a:srgbClr val="FFFFFF"/>
-        </a:solidFill>
-        <a:effectLst/>
-      </p:bgPr>
-    </p:bg>
-    <p:spTree>
-      <p:nvGrpSpPr>
-        <p:cNvPr id="1" name=""/>
-        <p:cNvGrpSpPr/>
-        <p:nvPr/>
-      </p:nvGrpSpPr>
-      <p:grpSpPr/>
-      <p:sp>
-        <p:nvSpPr>
-          <p:cNvPr id="2" name="Rectangle 1"/>
-          <p:cNvSpPr/>
-          <p:nvPr/>
-        </p:nvSpPr>
-        <p:spPr>
-          <a:xfrm>
-            <a:off x="0" y="0"/>
-            <a:ext cx="12191695" cy="960120"/>
-          </a:xfrm>
-          <a:prstGeom prst="rect">
-            <a:avLst/>
-          </a:prstGeom>
-          <a:solidFill>
-            <a:srgbClr val="095292"/>
-          </a:solidFill>
-          <a:ln>
-            <a:noFill/>
-          </a:ln>
-        </p:spPr>
-        <p:style>
-          <a:lnRef idx="1">
-            <a:schemeClr val="accent1"/>
-          </a:lnRef>
-          <a:fillRef idx="3">
-            <a:schemeClr val="accent1"/>
-          </a:fillRef>
-          <a:effectRef idx="2">
-            <a:schemeClr val="accent1"/>
-          </a:effectRef>
-          <a:fontRef idx="minor">
-            <a:schemeClr val="lt1"/>
-          </a:fontRef>
-        </p:style>
-        <p:txBody>
-          <a:bodyPr rtlCol="0" anchor="ctr"/>
-          <a:lstStyle/>
-          <a:p>
-            <a:pPr algn="ctr"/>
-          </a:p>
-        </p:txBody>
-      </p:sp>
-      <p:sp>
-        <p:nvSpPr>
-          <p:cNvPr id="3" name="Rectangle 2"/>
-          <p:cNvSpPr/>
-          <p:nvPr/>
-        </p:nvSpPr>
-        <p:spPr>
-          <a:xfrm>
-            <a:off x="0" y="960120"/>
-            <a:ext cx="12191695" cy="41148"/>
-          </a:xfrm>
-          <a:prstGeom prst="rect">
-            <a:avLst/>
-          </a:prstGeom>
-          <a:solidFill>
-            <a:srgbClr val="FFD000"/>
-          </a:solidFill>
-          <a:ln>
-            <a:noFill/>
-          </a:ln>
-        </p:spPr>
-        <p:style>
-          <a:lnRef idx="1">
-            <a:schemeClr val="accent1"/>
-          </a:lnRef>
-          <a:fillRef idx="3">
-            <a:schemeClr val="accent1"/>
-          </a:fillRef>
-          <a:effectRef idx="2">
-            <a:schemeClr val="accent1"/>
-          </a:effectRef>
-          <a:fontRef idx="minor">
-            <a:schemeClr val="lt1"/>
-          </a:fontRef>
-        </p:style>
-        <p:txBody>
-          <a:bodyPr rtlCol="0" anchor="ctr"/>
-          <a:lstStyle/>
-          <a:p>
-            <a:pPr algn="ctr"/>
-          </a:p>
-        </p:txBody>
-      </p:sp>
-      <p:sp>
-        <p:nvSpPr>
-          <p:cNvPr id="4" name="TextBox 3"/>
-          <p:cNvSpPr txBox="1"/>
-          <p:nvPr/>
-        </p:nvSpPr>
-        <p:spPr>
-          <a:xfrm>
-            <a:off x="457200" y="164592"/>
-            <a:ext cx="11277295" cy="502920"/>
-          </a:xfrm>
-          <a:prstGeom prst="rect">
-            <a:avLst/>
-          </a:prstGeom>
-          <a:noFill/>
-        </p:spPr>
-        <p:txBody>
-          <a:bodyPr wrap="square">
-            <a:spAutoFit/>
-          </a:bodyPr>
-          <a:lstStyle/>
-          <a:p>
-            <a:r>
-              <a:rPr sz="2600" b="1" i="0">
-                <a:solidFill>
-                  <a:srgbClr val="FFFFFF"/>
-                </a:solidFill>
-                <a:latin typeface="Calibri"/>
-              </a:rPr>
-              <a:t>C4Container en Mermaid: el molde que un visor renderiza</a:t>
-            </a:r>
-          </a:p>
-        </p:txBody>
-      </p:sp>
-      <p:sp>
-        <p:nvSpPr>
-          <p:cNvPr id="5" name="Rounded Rectangle 4"/>
-          <p:cNvSpPr/>
-          <p:nvPr/>
-        </p:nvSpPr>
-        <p:spPr>
-          <a:xfrm>
-            <a:off x="457200" y="1261872"/>
-            <a:ext cx="11277295" cy="4773168"/>
-          </a:xfrm>
-          <a:prstGeom prst="roundRect">
-            <a:avLst>
-              <a:gd name="adj" fmla="val 12000"/>
-            </a:avLst>
-          </a:prstGeom>
-          <a:solidFill>
-            <a:srgbClr val="1E2A38"/>
-          </a:solidFill>
-          <a:ln>
-            <a:noFill/>
-          </a:ln>
-        </p:spPr>
-        <p:style>
-          <a:lnRef idx="1">
-            <a:schemeClr val="accent1"/>
-          </a:lnRef>
-          <a:fillRef idx="3">
-            <a:schemeClr val="accent1"/>
-          </a:fillRef>
-          <a:effectRef idx="2">
-            <a:schemeClr val="accent1"/>
-          </a:effectRef>
-          <a:fontRef idx="minor">
-            <a:schemeClr val="lt1"/>
-          </a:fontRef>
-        </p:style>
-        <p:txBody>
-          <a:bodyPr rtlCol="0" anchor="ctr"/>
-          <a:lstStyle/>
-          <a:p>
-            <a:pPr algn="ctr"/>
-          </a:p>
-        </p:txBody>
-      </p:sp>
-      <p:sp>
-        <p:nvSpPr>
-          <p:cNvPr id="6" name="Rectangle 5"/>
-          <p:cNvSpPr/>
-          <p:nvPr/>
-        </p:nvSpPr>
-        <p:spPr>
-          <a:xfrm>
-            <a:off x="457200" y="1261872"/>
-            <a:ext cx="11277295" cy="320040"/>
-          </a:xfrm>
-          <a:prstGeom prst="rect">
-            <a:avLst/>
-          </a:prstGeom>
-          <a:solidFill>
-            <a:srgbClr val="095292"/>
-          </a:solidFill>
-          <a:ln>
-            <a:noFill/>
-          </a:ln>
-        </p:spPr>
-        <p:style>
-          <a:lnRef idx="1">
-            <a:schemeClr val="accent1"/>
-          </a:lnRef>
-          <a:fillRef idx="3">
-            <a:schemeClr val="accent1"/>
-          </a:fillRef>
-          <a:effectRef idx="2">
-            <a:schemeClr val="accent1"/>
-          </a:effectRef>
-          <a:fontRef idx="minor">
-            <a:schemeClr val="lt1"/>
-          </a:fontRef>
-        </p:style>
-        <p:txBody>
-          <a:bodyPr rtlCol="0" anchor="ctr"/>
-          <a:lstStyle/>
-          <a:p>
-            <a:pPr algn="ctr"/>
-          </a:p>
-        </p:txBody>
-      </p:sp>
-      <p:sp>
-        <p:nvSpPr>
-          <p:cNvPr id="7" name="TextBox 6"/>
-          <p:cNvSpPr txBox="1"/>
-          <p:nvPr/>
-        </p:nvSpPr>
-        <p:spPr>
-          <a:xfrm>
-            <a:off x="685800" y="1307592"/>
-            <a:ext cx="10820095" cy="256032"/>
-          </a:xfrm>
-          <a:prstGeom prst="rect">
-            <a:avLst/>
-          </a:prstGeom>
-          <a:noFill/>
-        </p:spPr>
-        <p:txBody>
-          <a:bodyPr wrap="square" anchor="ctr"/>
-          <a:lstStyle/>
-          <a:p>
-            <a:r>
-              <a:rPr sz="1000" b="1" i="0">
+              <a:rPr sz="2000" b="1" i="0">
                 <a:solidFill>
                   <a:srgbClr val="269CCB"/>
                 </a:solidFill>
                 <a:latin typeface="Calibri"/>
               </a:rPr>
-              <a:t>● ● ●</a:t>
-            </a:r>
-          </a:p>
-        </p:txBody>
-      </p:sp>
-      <p:sp>
-        <p:nvSpPr>
-          <p:cNvPr id="8" name="TextBox 7"/>
-          <p:cNvSpPr txBox="1"/>
-          <p:nvPr/>
-        </p:nvSpPr>
-        <p:spPr>
-          <a:xfrm>
-            <a:off x="777240" y="1719072"/>
-            <a:ext cx="10637215" cy="4133087"/>
-          </a:xfrm>
-          <a:prstGeom prst="rect">
-            <a:avLst/>
-          </a:prstGeom>
-          <a:noFill/>
-        </p:spPr>
-        <p:txBody>
-          <a:bodyPr wrap="square">
-            <a:spAutoFit/>
-          </a:bodyPr>
-          <a:lstStyle/>
-          <a:p>
-            <a:pPr>
-              <a:spcAft>
-                <a:spcPts val="400"/>
-              </a:spcAft>
-            </a:pPr>
-            <a:r>
-              <a:rPr sz="1400" b="0" i="0">
-                <a:solidFill>
-                  <a:srgbClr val="FFFFFF"/>
-                </a:solidFill>
-                <a:latin typeface="Calibri"/>
-              </a:rPr>
-              <a:t>C4Container</a:t>
-            </a:r>
-          </a:p>
-          <a:p>
-            <a:pPr>
-              <a:spcAft>
-                <a:spcPts val="400"/>
-              </a:spcAft>
-            </a:pPr>
-            <a:r>
-              <a:rPr sz="1400" b="0" i="0">
-                <a:solidFill>
-                  <a:srgbClr val="FFFFFF"/>
-                </a:solidFill>
-                <a:latin typeface="Calibri"/>
-              </a:rPr>
-              <a:t>title Diagrama de contenedores - la app de turnos</a:t>
-            </a:r>
-          </a:p>
-          <a:p>
-            <a:pPr>
-              <a:spcAft>
-                <a:spcPts val="400"/>
-              </a:spcAft>
-            </a:pPr>
-            <a:r>
-              <a:rPr sz="1400" b="0" i="0">
-                <a:solidFill>
-                  <a:srgbClr val="FFFFFF"/>
-                </a:solidFill>
-                <a:latin typeface="Calibri"/>
-              </a:rPr>
-              <a:t>Person(cliente, "Cliente de la barberia", "Reserva y consulta sus turnos")</a:t>
-            </a:r>
-          </a:p>
-          <a:p>
-            <a:pPr>
-              <a:spcAft>
-                <a:spcPts val="400"/>
-              </a:spcAft>
-            </a:pPr>
-            <a:r>
-              <a:rPr sz="1400" b="0" i="0">
-                <a:solidFill>
-                  <a:srgbClr val="FFFFFF"/>
-                </a:solidFill>
-                <a:latin typeface="Calibri"/>
-              </a:rPr>
-              <a:t>System_Boundary(turnos, "la app") {</a:t>
-            </a:r>
-          </a:p>
-          <a:p>
-            <a:pPr>
-              <a:spcAft>
-                <a:spcPts val="400"/>
-              </a:spcAft>
-            </a:pPr>
-            <a:r>
-              <a:rPr sz="1400" b="0" i="0">
-                <a:solidFill>
-                  <a:srgbClr val="FFFFFF"/>
-                </a:solidFill>
-                <a:latin typeface="Calibri"/>
-              </a:rPr>
-              <a:t>  Container(spa, "App web", "React", "Muestra franjas libres y crea la reserva")</a:t>
-            </a:r>
-          </a:p>
-          <a:p>
-            <a:pPr>
-              <a:spcAft>
-                <a:spcPts val="400"/>
-              </a:spcAft>
-            </a:pPr>
-            <a:r>
-              <a:rPr sz="1400" b="0" i="0">
-                <a:solidFill>
-                  <a:srgbClr val="FFFFFF"/>
-                </a:solidFill>
-                <a:latin typeface="Calibri"/>
-              </a:rPr>
-              <a:t>  Container(api, "API de turnos", "Node.js", "Valida la franja y registra el turno")</a:t>
-            </a:r>
-          </a:p>
-          <a:p>
-            <a:pPr>
-              <a:spcAft>
-                <a:spcPts val="400"/>
-              </a:spcAft>
-            </a:pPr>
-            <a:r>
-              <a:rPr sz="1400" b="0" i="0">
-                <a:solidFill>
-                  <a:srgbClr val="FFFFFF"/>
-                </a:solidFill>
-                <a:latin typeface="Calibri"/>
-              </a:rPr>
-              <a:t>  ContainerDb(db, "Base de turnos", "PostgreSQL", "Turnos, clientes y horarios")</a:t>
-            </a:r>
-          </a:p>
-          <a:p>
-            <a:pPr>
-              <a:spcAft>
-                <a:spcPts val="400"/>
-              </a:spcAft>
-            </a:pPr>
-            <a:r>
-              <a:rPr sz="1400" b="0" i="0">
-                <a:solidFill>
-                  <a:srgbClr val="FFFFFF"/>
-                </a:solidFill>
-                <a:latin typeface="Calibri"/>
-              </a:rPr>
-              <a:t>  Container(worker, "Worker de avisos", "cola", "Envia el aviso, con reintentos")</a:t>
-            </a:r>
-          </a:p>
-          <a:p>
-            <a:pPr>
-              <a:spcAft>
-                <a:spcPts val="400"/>
-              </a:spcAft>
-            </a:pPr>
-            <a:r>
-              <a:rPr sz="1400" b="0" i="0">
-                <a:solidFill>
-                  <a:srgbClr val="FFFFFF"/>
-                </a:solidFill>
-                <a:latin typeface="Calibri"/>
-              </a:rPr>
-              <a:t>}</a:t>
-            </a:r>
-          </a:p>
-          <a:p>
-            <a:pPr>
-              <a:spcAft>
-                <a:spcPts val="400"/>
-              </a:spcAft>
-            </a:pPr>
-            <a:r>
-              <a:rPr sz="1400" b="0" i="0">
-                <a:solidFill>
-                  <a:srgbClr val="FFFFFF"/>
-                </a:solidFill>
-                <a:latin typeface="Calibri"/>
-              </a:rPr>
-              <a:t>System_Ext(correo, "Correo transaccional", "Entrega el correo al cliente")</a:t>
-            </a:r>
-          </a:p>
-          <a:p>
-            <a:pPr>
-              <a:spcAft>
-                <a:spcPts val="400"/>
-              </a:spcAft>
-            </a:pPr>
-            <a:r>
-              <a:rPr sz="1400" b="0" i="0">
-                <a:solidFill>
-                  <a:srgbClr val="FFFFFF"/>
-                </a:solidFill>
-                <a:latin typeface="Calibri"/>
-              </a:rPr>
-              <a:t>Rel(cliente, spa, "Reserva un turno", "HTTPS")</a:t>
-            </a:r>
-          </a:p>
-          <a:p>
-            <a:pPr>
-              <a:spcAft>
-                <a:spcPts val="400"/>
-              </a:spcAft>
-            </a:pPr>
-            <a:r>
-              <a:rPr sz="1400" b="0" i="0">
-                <a:solidFill>
-                  <a:srgbClr val="FFFFFF"/>
-                </a:solidFill>
-                <a:latin typeface="Calibri"/>
-              </a:rPr>
-              <a:t>Rel(spa, api, "POST /turnos", "HTTPS/JSON")</a:t>
-            </a:r>
-          </a:p>
-          <a:p>
-            <a:pPr>
-              <a:spcAft>
-                <a:spcPts val="400"/>
-              </a:spcAft>
-            </a:pPr>
-            <a:r>
-              <a:rPr sz="1400" b="0" i="0">
-                <a:solidFill>
-                  <a:srgbClr val="FFFFFF"/>
-                </a:solidFill>
-                <a:latin typeface="Calibri"/>
-              </a:rPr>
-              <a:t>Rel(api, db, "INSERT / SELECT de turnos", "TCP/SQL")</a:t>
-            </a:r>
-          </a:p>
-          <a:p>
-            <a:pPr>
-              <a:spcAft>
-                <a:spcPts val="400"/>
-              </a:spcAft>
-            </a:pPr>
-            <a:r>
-              <a:rPr sz="1400" b="0" i="0">
-                <a:solidFill>
-                  <a:srgbClr val="FFFFFF"/>
-                </a:solidFill>
-                <a:latin typeface="Calibri"/>
-              </a:rPr>
-              <a:t>Rel(api, worker, "Publica aviso-de-turno", "evento/cola (AMQP)")</a:t>
-            </a:r>
-          </a:p>
-          <a:p>
-            <a:pPr>
-              <a:spcAft>
-                <a:spcPts val="400"/>
-              </a:spcAft>
-            </a:pPr>
-            <a:r>
-              <a:rPr sz="1400" b="0" i="0">
-                <a:solidFill>
-                  <a:srgbClr val="FFFFFF"/>
-                </a:solidFill>
-                <a:latin typeface="Calibri"/>
-              </a:rPr>
-              <a:t>Rel(worker, correo, "Envia la confirmacion", "API REST sobre HTTPS")</a:t>
-            </a:r>
-          </a:p>
-        </p:txBody>
-      </p:sp>
-      <p:sp>
-        <p:nvSpPr>
-          <p:cNvPr id="9" name="TextBox 8"/>
-          <p:cNvSpPr txBox="1"/>
-          <p:nvPr/>
-        </p:nvSpPr>
-        <p:spPr>
-          <a:xfrm>
-            <a:off x="457200" y="6080760"/>
-            <a:ext cx="11277295" cy="320040"/>
-          </a:xfrm>
-          <a:prstGeom prst="rect">
-            <a:avLst/>
-          </a:prstGeom>
-          <a:noFill/>
-        </p:spPr>
-        <p:txBody>
-          <a:bodyPr wrap="square">
-            <a:spAutoFit/>
-          </a:bodyPr>
-          <a:lstStyle/>
-          <a:p>
-            <a:pPr algn="ctr"/>
-            <a:r>
-              <a:rPr sz="1200" b="0" i="1">
-                <a:solidFill>
-                  <a:srgbClr val="666666"/>
-                </a:solidFill>
-                <a:latin typeface="Calibri"/>
-              </a:rPr>
-              <a:t>La base va como «ContainerDb» y cada «Rel» lleva protocolo Y formato. Los externos, FUERA del «System_Boundary».</a:t>
-            </a:r>
-          </a:p>
-        </p:txBody>
-      </p:sp>
-      <p:sp>
-        <p:nvSpPr>
-          <p:cNvPr id="10" name="TextBox 9"/>
-          <p:cNvSpPr txBox="1"/>
-          <p:nvPr/>
-        </p:nvSpPr>
-        <p:spPr>
-          <a:xfrm>
-            <a:off x="11185855" y="6473952"/>
-            <a:ext cx="640080" cy="274320"/>
-          </a:xfrm>
-          <a:prstGeom prst="rect">
-            <a:avLst/>
-          </a:prstGeom>
-          <a:noFill/>
-        </p:spPr>
-        <p:txBody>
-          <a:bodyPr wrap="square">
-            <a:spAutoFit/>
-          </a:bodyPr>
-          <a:lstStyle/>
-          <a:p>
-            <a:pPr algn="r"/>
-            <a:r>
-              <a:rPr sz="1100" b="0" i="0">
-                <a:solidFill>
-                  <a:srgbClr val="666666"/>
-                </a:solidFill>
-                <a:latin typeface="Calibri"/>
-              </a:rPr>
-              <a:t>38</a:t>
-            </a:r>
-          </a:p>
-        </p:txBody>
-      </p:sp>
-    </p:spTree>
-  </p:cSld>
-  <p:clrMapOvr>
-    <a:masterClrMapping/>
-  </p:clrMapOvr>
-</p:sld>
-</file>
-
-<file path=ppt/slides/slide39.xml><?xml version="1.0" encoding="utf-8"?>
-<p:sld xmlns:a="http://schemas.openxmlformats.org/drawingml/2006/main" xmlns:p="http://schemas.openxmlformats.org/presentationml/2006/main" xmlns:r="http://schemas.openxmlformats.org/officeDocument/2006/relationships">
-  <p:cSld>
-    <p:bg>
-      <p:bgPr>
-        <a:solidFill>
-          <a:srgbClr val="FFFFFF"/>
-        </a:solidFill>
-        <a:effectLst/>
-      </p:bgPr>
-    </p:bg>
-    <p:spTree>
-      <p:nvGrpSpPr>
-        <p:cNvPr id="1" name=""/>
-        <p:cNvGrpSpPr/>
-        <p:nvPr/>
-      </p:nvGrpSpPr>
-      <p:grpSpPr/>
-      <p:sp>
-        <p:nvSpPr>
-          <p:cNvPr id="2" name="Rectangle 1"/>
-          <p:cNvSpPr/>
-          <p:nvPr/>
-        </p:nvSpPr>
-        <p:spPr>
-          <a:xfrm>
-            <a:off x="0" y="0"/>
-            <a:ext cx="12191695" cy="1170432"/>
-          </a:xfrm>
-          <a:prstGeom prst="rect">
-            <a:avLst/>
-          </a:prstGeom>
-          <a:solidFill>
-            <a:srgbClr val="095292"/>
-          </a:solidFill>
-          <a:ln>
-            <a:noFill/>
-          </a:ln>
-        </p:spPr>
-        <p:style>
-          <a:lnRef idx="1">
-            <a:schemeClr val="accent1"/>
-          </a:lnRef>
-          <a:fillRef idx="3">
-            <a:schemeClr val="accent1"/>
-          </a:fillRef>
-          <a:effectRef idx="2">
-            <a:schemeClr val="accent1"/>
-          </a:effectRef>
-          <a:fontRef idx="minor">
-            <a:schemeClr val="lt1"/>
-          </a:fontRef>
-        </p:style>
-        <p:txBody>
-          <a:bodyPr rtlCol="0" anchor="ctr"/>
-          <a:lstStyle/>
-          <a:p>
-            <a:pPr algn="ctr"/>
-          </a:p>
-        </p:txBody>
-      </p:sp>
-      <p:sp>
-        <p:nvSpPr>
-          <p:cNvPr id="3" name="Rectangle 2"/>
-          <p:cNvSpPr/>
-          <p:nvPr/>
-        </p:nvSpPr>
-        <p:spPr>
-          <a:xfrm>
-            <a:off x="0" y="1170432"/>
-            <a:ext cx="12191695" cy="41148"/>
-          </a:xfrm>
-          <a:prstGeom prst="rect">
-            <a:avLst/>
-          </a:prstGeom>
-          <a:solidFill>
-            <a:srgbClr val="FFD000"/>
-          </a:solidFill>
-          <a:ln>
-            <a:noFill/>
-          </a:ln>
-        </p:spPr>
-        <p:style>
-          <a:lnRef idx="1">
-            <a:schemeClr val="accent1"/>
-          </a:lnRef>
-          <a:fillRef idx="3">
-            <a:schemeClr val="accent1"/>
-          </a:fillRef>
-          <a:effectRef idx="2">
-            <a:schemeClr val="accent1"/>
-          </a:effectRef>
-          <a:fontRef idx="minor">
-            <a:schemeClr val="lt1"/>
-          </a:fontRef>
-        </p:style>
-        <p:txBody>
-          <a:bodyPr rtlCol="0" anchor="ctr"/>
-          <a:lstStyle/>
-          <a:p>
-            <a:pPr algn="ctr"/>
-          </a:p>
-        </p:txBody>
-      </p:sp>
-      <p:sp>
-        <p:nvSpPr>
-          <p:cNvPr id="4" name="TextBox 3"/>
-          <p:cNvSpPr txBox="1"/>
-          <p:nvPr/>
-        </p:nvSpPr>
-        <p:spPr>
-          <a:xfrm>
-            <a:off x="457200" y="164592"/>
-            <a:ext cx="11277295" cy="384048"/>
-          </a:xfrm>
-          <a:prstGeom prst="rect">
-            <a:avLst/>
-          </a:prstGeom>
-          <a:noFill/>
-        </p:spPr>
-        <p:txBody>
-          <a:bodyPr wrap="square">
-            <a:spAutoFit/>
-          </a:bodyPr>
-          <a:lstStyle/>
-          <a:p>
-            <a:r>
-              <a:rPr sz="2600" b="1" i="0">
-                <a:solidFill>
-                  <a:srgbClr val="FFFFFF"/>
-                </a:solidFill>
-                <a:latin typeface="Calibri"/>
-              </a:rPr>
-              <a:t>Del boceto al código Mermaid</a:t>
-            </a:r>
-          </a:p>
-        </p:txBody>
-      </p:sp>
-      <p:sp>
-        <p:nvSpPr>
-          <p:cNvPr id="5" name="TextBox 4"/>
-          <p:cNvSpPr txBox="1"/>
-          <p:nvPr/>
-        </p:nvSpPr>
-        <p:spPr>
-          <a:xfrm>
-            <a:off x="457200" y="566928"/>
-            <a:ext cx="11277295" cy="411480"/>
-          </a:xfrm>
-          <a:prstGeom prst="rect">
-            <a:avLst/>
-          </a:prstGeom>
-          <a:noFill/>
-        </p:spPr>
-        <p:txBody>
-          <a:bodyPr wrap="square">
-            <a:spAutoFit/>
-          </a:bodyPr>
-          <a:lstStyle/>
-          <a:p>
-            <a:r>
-              <a:rPr sz="1400" b="0" i="0">
-                <a:solidFill>
-                  <a:srgbClr val="B8D8EE"/>
-                </a:solidFill>
-                <a:latin typeface="Calibri"/>
-              </a:rPr>
-              <a:t>El diagrama se escribe como código: se versiona, se compara y se corrige</a:t>
-            </a:r>
-          </a:p>
-        </p:txBody>
-      </p:sp>
-      <p:sp>
-        <p:nvSpPr>
-          <p:cNvPr id="6" name="Rounded Rectangle 5"/>
-          <p:cNvSpPr/>
-          <p:nvPr/>
-        </p:nvSpPr>
-        <p:spPr>
-          <a:xfrm>
-            <a:off x="457200" y="1659636"/>
-            <a:ext cx="11277295" cy="1051560"/>
-          </a:xfrm>
-          <a:prstGeom prst="roundRect">
-            <a:avLst>
-              <a:gd name="adj" fmla="val 12000"/>
-            </a:avLst>
-          </a:prstGeom>
-          <a:solidFill>
-            <a:srgbClr val="F2F2F2"/>
-          </a:solidFill>
-          <a:ln>
-            <a:noFill/>
-          </a:ln>
-        </p:spPr>
-        <p:style>
-          <a:lnRef idx="1">
-            <a:schemeClr val="accent1"/>
-          </a:lnRef>
-          <a:fillRef idx="3">
-            <a:schemeClr val="accent1"/>
-          </a:fillRef>
-          <a:effectRef idx="2">
-            <a:schemeClr val="accent1"/>
-          </a:effectRef>
-          <a:fontRef idx="minor">
-            <a:schemeClr val="lt1"/>
-          </a:fontRef>
-        </p:style>
-        <p:txBody>
-          <a:bodyPr rtlCol="0" anchor="ctr"/>
-          <a:lstStyle/>
-          <a:p>
-            <a:pPr algn="ctr"/>
-          </a:p>
-        </p:txBody>
-      </p:sp>
-      <p:sp>
-        <p:nvSpPr>
-          <p:cNvPr id="7" name="Rounded Rectangle 6"/>
-          <p:cNvSpPr/>
-          <p:nvPr/>
-        </p:nvSpPr>
-        <p:spPr>
-          <a:xfrm>
-            <a:off x="594360" y="1965960"/>
-            <a:ext cx="438912" cy="438912"/>
-          </a:xfrm>
-          <a:prstGeom prst="roundRect">
-            <a:avLst>
-              <a:gd name="adj" fmla="val 12000"/>
-            </a:avLst>
-          </a:prstGeom>
-          <a:solidFill>
-            <a:srgbClr val="095292"/>
-          </a:solidFill>
-          <a:ln>
-            <a:noFill/>
-          </a:ln>
-        </p:spPr>
-        <p:style>
-          <a:lnRef idx="1">
-            <a:schemeClr val="accent1"/>
-          </a:lnRef>
-          <a:fillRef idx="3">
-            <a:schemeClr val="accent1"/>
-          </a:fillRef>
-          <a:effectRef idx="2">
-            <a:schemeClr val="accent1"/>
-          </a:effectRef>
-          <a:fontRef idx="minor">
-            <a:schemeClr val="lt1"/>
-          </a:fontRef>
-        </p:style>
-        <p:txBody>
-          <a:bodyPr rtlCol="0" anchor="ctr"/>
-          <a:lstStyle/>
-          <a:p>
-            <a:pPr algn="ctr"/>
-          </a:p>
-        </p:txBody>
-      </p:sp>
-      <p:sp>
-        <p:nvSpPr>
-          <p:cNvPr id="8" name="TextBox 7"/>
-          <p:cNvSpPr txBox="1"/>
-          <p:nvPr/>
-        </p:nvSpPr>
-        <p:spPr>
-          <a:xfrm>
-            <a:off x="594360" y="1965960"/>
-            <a:ext cx="438912" cy="438912"/>
-          </a:xfrm>
-          <a:prstGeom prst="rect">
-            <a:avLst/>
-          </a:prstGeom>
-          <a:noFill/>
-        </p:spPr>
-        <p:txBody>
-          <a:bodyPr wrap="square" anchor="ctr"/>
-          <a:lstStyle/>
-          <a:p>
-            <a:pPr algn="ctr"/>
-            <a:r>
-              <a:rPr sz="1600" b="1" i="0">
-                <a:solidFill>
-                  <a:srgbClr val="FFFFFF"/>
-                </a:solidFill>
-                <a:latin typeface="Calibri"/>
-              </a:rPr>
-              <a:t>1</a:t>
-            </a:r>
-          </a:p>
-        </p:txBody>
-      </p:sp>
-      <p:sp>
-        <p:nvSpPr>
-          <p:cNvPr id="9" name="TextBox 8"/>
-          <p:cNvSpPr txBox="1"/>
-          <p:nvPr/>
-        </p:nvSpPr>
-        <p:spPr>
-          <a:xfrm>
-            <a:off x="1188720" y="1751076"/>
-            <a:ext cx="10271455" cy="886968"/>
-          </a:xfrm>
-          <a:prstGeom prst="rect">
-            <a:avLst/>
-          </a:prstGeom>
-          <a:noFill/>
-        </p:spPr>
-        <p:txBody>
-          <a:bodyPr wrap="square" anchor="ctr"/>
-          <a:lstStyle/>
-          <a:p>
-            <a:r>
-              <a:rPr sz="1500" b="1" i="0">
-                <a:solidFill>
-                  <a:srgbClr val="095292"/>
-                </a:solidFill>
-                <a:latin typeface="Calibri"/>
-              </a:rPr>
-              <a:t>Diseña visual</a:t>
-            </a:r>
-          </a:p>
-          <a:p>
-            <a:pPr>
-              <a:spcBef>
-                <a:spcPts val="200"/>
-              </a:spcBef>
-            </a:pPr>
-            <a:r>
-              <a:rPr sz="1300" b="0" i="0">
-                <a:solidFill>
-                  <a:srgbClr val="333333"/>
-                </a:solidFill>
-                <a:latin typeface="Calibri"/>
-              </a:rPr>
-              <a:t>Dibuja el diagrama como quieras en Excalidraw o draw.io: es más rápido arrastrar cajas que escribir código, y ahí es donde se piensa el modelo.</a:t>
-            </a:r>
-          </a:p>
-        </p:txBody>
-      </p:sp>
-      <p:sp>
-        <p:nvSpPr>
-          <p:cNvPr id="10" name="Rounded Rectangle 9"/>
-          <p:cNvSpPr/>
-          <p:nvPr/>
-        </p:nvSpPr>
-        <p:spPr>
-          <a:xfrm>
-            <a:off x="457200" y="2802636"/>
-            <a:ext cx="11277295" cy="1051560"/>
-          </a:xfrm>
-          <a:prstGeom prst="roundRect">
-            <a:avLst>
-              <a:gd name="adj" fmla="val 12000"/>
-            </a:avLst>
-          </a:prstGeom>
-          <a:solidFill>
-            <a:srgbClr val="E8F4FA"/>
-          </a:solidFill>
-          <a:ln>
-            <a:noFill/>
-          </a:ln>
-        </p:spPr>
-        <p:style>
-          <a:lnRef idx="1">
-            <a:schemeClr val="accent1"/>
-          </a:lnRef>
-          <a:fillRef idx="3">
-            <a:schemeClr val="accent1"/>
-          </a:fillRef>
-          <a:effectRef idx="2">
-            <a:schemeClr val="accent1"/>
-          </a:effectRef>
-          <a:fontRef idx="minor">
-            <a:schemeClr val="lt1"/>
-          </a:fontRef>
-        </p:style>
-        <p:txBody>
-          <a:bodyPr rtlCol="0" anchor="ctr"/>
-          <a:lstStyle/>
-          <a:p>
-            <a:pPr algn="ctr"/>
-          </a:p>
-        </p:txBody>
-      </p:sp>
-      <p:sp>
-        <p:nvSpPr>
-          <p:cNvPr id="11" name="Rounded Rectangle 10"/>
-          <p:cNvSpPr/>
-          <p:nvPr/>
-        </p:nvSpPr>
-        <p:spPr>
-          <a:xfrm>
-            <a:off x="594360" y="3108960"/>
-            <a:ext cx="438912" cy="438912"/>
-          </a:xfrm>
-          <a:prstGeom prst="roundRect">
-            <a:avLst>
-              <a:gd name="adj" fmla="val 12000"/>
-            </a:avLst>
-          </a:prstGeom>
-          <a:solidFill>
-            <a:srgbClr val="095292"/>
-          </a:solidFill>
-          <a:ln>
-            <a:noFill/>
-          </a:ln>
-        </p:spPr>
-        <p:style>
-          <a:lnRef idx="1">
-            <a:schemeClr val="accent1"/>
-          </a:lnRef>
-          <a:fillRef idx="3">
-            <a:schemeClr val="accent1"/>
-          </a:fillRef>
-          <a:effectRef idx="2">
-            <a:schemeClr val="accent1"/>
-          </a:effectRef>
-          <a:fontRef idx="minor">
-            <a:schemeClr val="lt1"/>
-          </a:fontRef>
-        </p:style>
-        <p:txBody>
-          <a:bodyPr rtlCol="0" anchor="ctr"/>
-          <a:lstStyle/>
-          <a:p>
-            <a:pPr algn="ctr"/>
-          </a:p>
-        </p:txBody>
-      </p:sp>
-      <p:sp>
-        <p:nvSpPr>
-          <p:cNvPr id="12" name="TextBox 11"/>
-          <p:cNvSpPr txBox="1"/>
-          <p:nvPr/>
-        </p:nvSpPr>
-        <p:spPr>
-          <a:xfrm>
-            <a:off x="594360" y="3108960"/>
-            <a:ext cx="438912" cy="438912"/>
-          </a:xfrm>
-          <a:prstGeom prst="rect">
-            <a:avLst/>
-          </a:prstGeom>
-          <a:noFill/>
-        </p:spPr>
-        <p:txBody>
-          <a:bodyPr wrap="square" anchor="ctr"/>
-          <a:lstStyle/>
-          <a:p>
-            <a:pPr algn="ctr"/>
-            <a:r>
-              <a:rPr sz="1600" b="1" i="0">
-                <a:solidFill>
-                  <a:srgbClr val="FFFFFF"/>
-                </a:solidFill>
-                <a:latin typeface="Calibri"/>
-              </a:rPr>
-              <a:t>2</a:t>
-            </a:r>
-          </a:p>
-        </p:txBody>
-      </p:sp>
-      <p:sp>
-        <p:nvSpPr>
-          <p:cNvPr id="13" name="TextBox 12"/>
-          <p:cNvSpPr txBox="1"/>
-          <p:nvPr/>
-        </p:nvSpPr>
-        <p:spPr>
-          <a:xfrm>
-            <a:off x="1188720" y="2894076"/>
-            <a:ext cx="10271455" cy="886968"/>
-          </a:xfrm>
-          <a:prstGeom prst="rect">
-            <a:avLst/>
-          </a:prstGeom>
-          <a:noFill/>
-        </p:spPr>
-        <p:txBody>
-          <a:bodyPr wrap="square" anchor="ctr"/>
-          <a:lstStyle/>
-          <a:p>
-            <a:r>
-              <a:rPr sz="1500" b="1" i="0">
-                <a:solidFill>
-                  <a:srgbClr val="095292"/>
-                </a:solidFill>
-                <a:latin typeface="Calibri"/>
-              </a:rPr>
-              <a:t>Traduce con IA</a:t>
-            </a:r>
-          </a:p>
-          <a:p>
-            <a:pPr>
-              <a:spcBef>
-                <a:spcPts val="200"/>
-              </a:spcBef>
-            </a:pPr>
-            <a:r>
-              <a:rPr sz="1300" b="0" i="0">
-                <a:solidFill>
-                  <a:srgbClr val="333333"/>
-                </a:solidFill>
-                <a:latin typeface="Calibri"/>
-              </a:rPr>
-              <a:t>Describe tu boceto a una IA y pídele el código Mermaid usando C4Container. Revisa el resultado: la IA acierta la sintaxis, no tu modelo.</a:t>
-            </a:r>
-          </a:p>
-        </p:txBody>
-      </p:sp>
-      <p:sp>
-        <p:nvSpPr>
-          <p:cNvPr id="14" name="Rounded Rectangle 13"/>
-          <p:cNvSpPr/>
-          <p:nvPr/>
-        </p:nvSpPr>
-        <p:spPr>
-          <a:xfrm>
-            <a:off x="457200" y="3945636"/>
-            <a:ext cx="11277295" cy="1051560"/>
-          </a:xfrm>
-          <a:prstGeom prst="roundRect">
-            <a:avLst>
-              <a:gd name="adj" fmla="val 12000"/>
-            </a:avLst>
-          </a:prstGeom>
-          <a:solidFill>
-            <a:srgbClr val="F2F2F2"/>
-          </a:solidFill>
-          <a:ln>
-            <a:noFill/>
-          </a:ln>
-        </p:spPr>
-        <p:style>
-          <a:lnRef idx="1">
-            <a:schemeClr val="accent1"/>
-          </a:lnRef>
-          <a:fillRef idx="3">
-            <a:schemeClr val="accent1"/>
-          </a:fillRef>
-          <a:effectRef idx="2">
-            <a:schemeClr val="accent1"/>
-          </a:effectRef>
-          <a:fontRef idx="minor">
-            <a:schemeClr val="lt1"/>
-          </a:fontRef>
-        </p:style>
-        <p:txBody>
-          <a:bodyPr rtlCol="0" anchor="ctr"/>
-          <a:lstStyle/>
-          <a:p>
-            <a:pPr algn="ctr"/>
-          </a:p>
-        </p:txBody>
-      </p:sp>
-      <p:sp>
-        <p:nvSpPr>
-          <p:cNvPr id="15" name="Rounded Rectangle 14"/>
-          <p:cNvSpPr/>
-          <p:nvPr/>
-        </p:nvSpPr>
-        <p:spPr>
-          <a:xfrm>
-            <a:off x="594360" y="4251960"/>
-            <a:ext cx="438912" cy="438912"/>
-          </a:xfrm>
-          <a:prstGeom prst="roundRect">
-            <a:avLst>
-              <a:gd name="adj" fmla="val 12000"/>
-            </a:avLst>
-          </a:prstGeom>
-          <a:solidFill>
-            <a:srgbClr val="095292"/>
-          </a:solidFill>
-          <a:ln>
-            <a:noFill/>
-          </a:ln>
-        </p:spPr>
-        <p:style>
-          <a:lnRef idx="1">
-            <a:schemeClr val="accent1"/>
-          </a:lnRef>
-          <a:fillRef idx="3">
-            <a:schemeClr val="accent1"/>
-          </a:fillRef>
-          <a:effectRef idx="2">
-            <a:schemeClr val="accent1"/>
-          </a:effectRef>
-          <a:fontRef idx="minor">
-            <a:schemeClr val="lt1"/>
-          </a:fontRef>
-        </p:style>
-        <p:txBody>
-          <a:bodyPr rtlCol="0" anchor="ctr"/>
-          <a:lstStyle/>
-          <a:p>
-            <a:pPr algn="ctr"/>
-          </a:p>
-        </p:txBody>
-      </p:sp>
-      <p:sp>
-        <p:nvSpPr>
-          <p:cNvPr id="16" name="TextBox 15"/>
-          <p:cNvSpPr txBox="1"/>
-          <p:nvPr/>
-        </p:nvSpPr>
-        <p:spPr>
-          <a:xfrm>
-            <a:off x="594360" y="4251960"/>
-            <a:ext cx="438912" cy="438912"/>
-          </a:xfrm>
-          <a:prstGeom prst="rect">
-            <a:avLst/>
-          </a:prstGeom>
-          <a:noFill/>
-        </p:spPr>
-        <p:txBody>
-          <a:bodyPr wrap="square" anchor="ctr"/>
-          <a:lstStyle/>
-          <a:p>
-            <a:pPr algn="ctr"/>
-            <a:r>
-              <a:rPr sz="1600" b="1" i="0">
-                <a:solidFill>
-                  <a:srgbClr val="FFFFFF"/>
-                </a:solidFill>
-                <a:latin typeface="Calibri"/>
-              </a:rPr>
-              <a:t>3</a:t>
-            </a:r>
-          </a:p>
-        </p:txBody>
-      </p:sp>
-      <p:sp>
-        <p:nvSpPr>
-          <p:cNvPr id="17" name="TextBox 16"/>
-          <p:cNvSpPr txBox="1"/>
-          <p:nvPr/>
-        </p:nvSpPr>
-        <p:spPr>
-          <a:xfrm>
-            <a:off x="1188720" y="4037076"/>
-            <a:ext cx="10271455" cy="886968"/>
-          </a:xfrm>
-          <a:prstGeom prst="rect">
-            <a:avLst/>
-          </a:prstGeom>
-          <a:noFill/>
-        </p:spPr>
-        <p:txBody>
-          <a:bodyPr wrap="square" anchor="ctr"/>
-          <a:lstStyle/>
-          <a:p>
-            <a:r>
-              <a:rPr sz="1500" b="1" i="0">
-                <a:solidFill>
-                  <a:srgbClr val="095292"/>
-                </a:solidFill>
-                <a:latin typeface="Calibri"/>
-              </a:rPr>
-              <a:t>Renderiza en un visor</a:t>
-            </a:r>
-          </a:p>
-          <a:p>
-            <a:pPr>
-              <a:spcBef>
-                <a:spcPts val="200"/>
-              </a:spcBef>
-            </a:pPr>
-            <a:r>
-              <a:rPr sz="1300" b="0" i="0">
-                <a:solidFill>
-                  <a:srgbClr val="333333"/>
-                </a:solidFill>
-                <a:latin typeface="Calibri"/>
-              </a:rPr>
-              <a:t>Pega el código en un visor Mermaid (mermaid.live o la vista previa de tu editor) y míralo dibujado. Si no renderiza, corrige ahí: un end faltante o un rótulo sin comillas.</a:t>
-            </a:r>
-          </a:p>
-        </p:txBody>
-      </p:sp>
-      <p:sp>
-        <p:nvSpPr>
-          <p:cNvPr id="18" name="Rounded Rectangle 17"/>
-          <p:cNvSpPr/>
-          <p:nvPr/>
-        </p:nvSpPr>
-        <p:spPr>
-          <a:xfrm>
-            <a:off x="457200" y="5088636"/>
-            <a:ext cx="11277295" cy="1051560"/>
-          </a:xfrm>
-          <a:prstGeom prst="roundRect">
-            <a:avLst>
-              <a:gd name="adj" fmla="val 12000"/>
-            </a:avLst>
-          </a:prstGeom>
-          <a:solidFill>
-            <a:srgbClr val="E8F4FA"/>
-          </a:solidFill>
-          <a:ln>
-            <a:noFill/>
-          </a:ln>
-        </p:spPr>
-        <p:style>
-          <a:lnRef idx="1">
-            <a:schemeClr val="accent1"/>
-          </a:lnRef>
-          <a:fillRef idx="3">
-            <a:schemeClr val="accent1"/>
-          </a:fillRef>
-          <a:effectRef idx="2">
-            <a:schemeClr val="accent1"/>
-          </a:effectRef>
-          <a:fontRef idx="minor">
-            <a:schemeClr val="lt1"/>
-          </a:fontRef>
-        </p:style>
-        <p:txBody>
-          <a:bodyPr rtlCol="0" anchor="ctr"/>
-          <a:lstStyle/>
-          <a:p>
-            <a:pPr algn="ctr"/>
-          </a:p>
-        </p:txBody>
-      </p:sp>
-      <p:sp>
-        <p:nvSpPr>
-          <p:cNvPr id="19" name="Rounded Rectangle 18"/>
-          <p:cNvSpPr/>
-          <p:nvPr/>
-        </p:nvSpPr>
-        <p:spPr>
-          <a:xfrm>
-            <a:off x="594360" y="5394960"/>
-            <a:ext cx="438912" cy="438912"/>
-          </a:xfrm>
-          <a:prstGeom prst="roundRect">
-            <a:avLst>
-              <a:gd name="adj" fmla="val 12000"/>
-            </a:avLst>
-          </a:prstGeom>
-          <a:solidFill>
-            <a:srgbClr val="095292"/>
-          </a:solidFill>
-          <a:ln>
-            <a:noFill/>
-          </a:ln>
-        </p:spPr>
-        <p:style>
-          <a:lnRef idx="1">
-            <a:schemeClr val="accent1"/>
-          </a:lnRef>
-          <a:fillRef idx="3">
-            <a:schemeClr val="accent1"/>
-          </a:fillRef>
-          <a:effectRef idx="2">
-            <a:schemeClr val="accent1"/>
-          </a:effectRef>
-          <a:fontRef idx="minor">
-            <a:schemeClr val="lt1"/>
-          </a:fontRef>
-        </p:style>
-        <p:txBody>
-          <a:bodyPr rtlCol="0" anchor="ctr"/>
-          <a:lstStyle/>
-          <a:p>
-            <a:pPr algn="ctr"/>
-          </a:p>
-        </p:txBody>
-      </p:sp>
-      <p:sp>
-        <p:nvSpPr>
-          <p:cNvPr id="20" name="TextBox 19"/>
-          <p:cNvSpPr txBox="1"/>
-          <p:nvPr/>
-        </p:nvSpPr>
-        <p:spPr>
-          <a:xfrm>
-            <a:off x="594360" y="5394960"/>
-            <a:ext cx="438912" cy="438912"/>
-          </a:xfrm>
-          <a:prstGeom prst="rect">
-            <a:avLst/>
-          </a:prstGeom>
-          <a:noFill/>
-        </p:spPr>
-        <p:txBody>
-          <a:bodyPr wrap="square" anchor="ctr"/>
-          <a:lstStyle/>
-          <a:p>
-            <a:pPr algn="ctr"/>
-            <a:r>
-              <a:rPr sz="1600" b="1" i="0">
-                <a:solidFill>
-                  <a:srgbClr val="FFFFFF"/>
-                </a:solidFill>
-                <a:latin typeface="Calibri"/>
-              </a:rPr>
-              <a:t>4</a:t>
-            </a:r>
-          </a:p>
-        </p:txBody>
-      </p:sp>
-      <p:sp>
-        <p:nvSpPr>
-          <p:cNvPr id="21" name="TextBox 20"/>
-          <p:cNvSpPr txBox="1"/>
-          <p:nvPr/>
-        </p:nvSpPr>
-        <p:spPr>
-          <a:xfrm>
-            <a:off x="1188720" y="5180076"/>
-            <a:ext cx="10271455" cy="886968"/>
-          </a:xfrm>
-          <a:prstGeom prst="rect">
-            <a:avLst/>
-          </a:prstGeom>
-          <a:noFill/>
-        </p:spPr>
-        <p:txBody>
-          <a:bodyPr wrap="square" anchor="ctr"/>
-          <a:lstStyle/>
-          <a:p>
-            <a:r>
-              <a:rPr sz="1500" b="1" i="0">
-                <a:solidFill>
-                  <a:srgbClr val="095292"/>
-                </a:solidFill>
-                <a:latin typeface="Calibri"/>
-              </a:rPr>
-              <a:t>Guarda código e imagen</a:t>
-            </a:r>
-          </a:p>
-          <a:p>
-            <a:pPr>
-              <a:spcBef>
-                <a:spcPts val="200"/>
-              </a:spcBef>
-            </a:pPr>
-            <a:r>
-              <a:rPr sz="1300" b="0" i="0">
-                <a:solidFill>
-                  <a:srgbClr val="333333"/>
-                </a:solidFill>
-                <a:latin typeface="Calibri"/>
-              </a:rPr>
-              <a:t>El código es la fuente del diagrama: guárdalo con tu proyecto junto con el PNG exportado.</a:t>
-            </a:r>
-          </a:p>
-        </p:txBody>
-      </p:sp>
-      <p:sp>
-        <p:nvSpPr>
-          <p:cNvPr id="22" name="TextBox 21"/>
-          <p:cNvSpPr txBox="1"/>
-          <p:nvPr/>
-        </p:nvSpPr>
-        <p:spPr>
-          <a:xfrm>
-            <a:off x="11185855" y="6473952"/>
-            <a:ext cx="640080" cy="274320"/>
-          </a:xfrm>
-          <a:prstGeom prst="rect">
-            <a:avLst/>
-          </a:prstGeom>
-          <a:noFill/>
-        </p:spPr>
-        <p:txBody>
-          <a:bodyPr wrap="square">
-            <a:spAutoFit/>
-          </a:bodyPr>
-          <a:lstStyle/>
-          <a:p>
-            <a:pPr algn="r"/>
-            <a:r>
-              <a:rPr sz="1100" b="0" i="0">
-                <a:solidFill>
-                  <a:srgbClr val="666666"/>
-                </a:solidFill>
-                <a:latin typeface="Calibri"/>
-              </a:rPr>
-              <a:t>39</a:t>
+              <a:t>Teoría al servicio del diseño</a:t>
             </a:r>
           </a:p>
         </p:txBody>
@@ -16215,238 +15172,6 @@
                 <a:latin typeface="Calibri"/>
               </a:rPr>
               <a:t>4</a:t>
-            </a:r>
-          </a:p>
-        </p:txBody>
-      </p:sp>
-    </p:spTree>
-  </p:cSld>
-  <p:clrMapOvr>
-    <a:masterClrMapping/>
-  </p:clrMapOvr>
-</p:sld>
-</file>
-
-<file path=ppt/slides/slide40.xml><?xml version="1.0" encoding="utf-8"?>
-<p:sld xmlns:a="http://schemas.openxmlformats.org/drawingml/2006/main" xmlns:p="http://schemas.openxmlformats.org/presentationml/2006/main" xmlns:r="http://schemas.openxmlformats.org/officeDocument/2006/relationships">
-  <p:cSld>
-    <p:bg>
-      <p:bgPr>
-        <a:solidFill>
-          <a:srgbClr val="FFFFFF"/>
-        </a:solidFill>
-        <a:effectLst/>
-      </p:bgPr>
-    </p:bg>
-    <p:spTree>
-      <p:nvGrpSpPr>
-        <p:cNvPr id="1" name=""/>
-        <p:cNvGrpSpPr/>
-        <p:nvPr/>
-      </p:nvGrpSpPr>
-      <p:grpSpPr/>
-      <p:sp>
-        <p:nvSpPr>
-          <p:cNvPr id="2" name="Rectangle 1"/>
-          <p:cNvSpPr/>
-          <p:nvPr/>
-        </p:nvSpPr>
-        <p:spPr>
-          <a:xfrm>
-            <a:off x="0" y="0"/>
-            <a:ext cx="12191695" cy="164592"/>
-          </a:xfrm>
-          <a:prstGeom prst="rect">
-            <a:avLst/>
-          </a:prstGeom>
-          <a:solidFill>
-            <a:srgbClr val="269CCB"/>
-          </a:solidFill>
-          <a:ln>
-            <a:noFill/>
-          </a:ln>
-        </p:spPr>
-        <p:style>
-          <a:lnRef idx="1">
-            <a:schemeClr val="accent1"/>
-          </a:lnRef>
-          <a:fillRef idx="3">
-            <a:schemeClr val="accent1"/>
-          </a:fillRef>
-          <a:effectRef idx="2">
-            <a:schemeClr val="accent1"/>
-          </a:effectRef>
-          <a:fontRef idx="minor">
-            <a:schemeClr val="lt1"/>
-          </a:fontRef>
-        </p:style>
-        <p:txBody>
-          <a:bodyPr rtlCol="0" anchor="ctr"/>
-          <a:lstStyle/>
-          <a:p>
-            <a:pPr algn="ctr"/>
-          </a:p>
-        </p:txBody>
-      </p:sp>
-      <p:pic>
-        <p:nvPicPr>
-          <p:cNvPr id="3" name="Picture 2" descr="logo_uniajc_color.png"/>
-          <p:cNvPicPr>
-            <a:picLocks noChangeAspect="1"/>
-          </p:cNvPicPr>
-          <p:nvPr/>
-        </p:nvPicPr>
-        <p:blipFill>
-          <a:blip r:embed="rId2"/>
-          <a:stretch>
-            <a:fillRect/>
-          </a:stretch>
-        </p:blipFill>
-        <p:spPr>
-          <a:xfrm>
-            <a:off x="10271455" y="5998464"/>
-            <a:ext cx="1463040" cy="643233"/>
-          </a:xfrm>
-          <a:prstGeom prst="rect">
-            <a:avLst/>
-          </a:prstGeom>
-        </p:spPr>
-      </p:pic>
-      <p:sp>
-        <p:nvSpPr>
-          <p:cNvPr id="4" name="TextBox 3"/>
-          <p:cNvSpPr txBox="1"/>
-          <p:nvPr/>
-        </p:nvSpPr>
-        <p:spPr>
-          <a:xfrm>
-            <a:off x="457200" y="1737360"/>
-            <a:ext cx="11277295" cy="1097280"/>
-          </a:xfrm>
-          <a:prstGeom prst="rect">
-            <a:avLst/>
-          </a:prstGeom>
-          <a:noFill/>
-        </p:spPr>
-        <p:txBody>
-          <a:bodyPr wrap="square" anchor="ctr"/>
-          <a:lstStyle/>
-          <a:p>
-            <a:pPr algn="ctr"/>
-            <a:r>
-              <a:rPr sz="3400" b="1" i="0">
-                <a:solidFill>
-                  <a:srgbClr val="095292"/>
-                </a:solidFill>
-                <a:latin typeface="Calibri"/>
-              </a:rPr>
-              <a:t>Clase 4 · cierre conceptual</a:t>
-            </a:r>
-          </a:p>
-        </p:txBody>
-      </p:sp>
-      <p:sp>
-        <p:nvSpPr>
-          <p:cNvPr id="5" name="TextBox 4"/>
-          <p:cNvSpPr txBox="1"/>
-          <p:nvPr/>
-        </p:nvSpPr>
-        <p:spPr>
-          <a:xfrm>
-            <a:off x="457200" y="3017520"/>
-            <a:ext cx="11277295" cy="1645920"/>
-          </a:xfrm>
-          <a:prstGeom prst="rect">
-            <a:avLst/>
-          </a:prstGeom>
-          <a:noFill/>
-        </p:spPr>
-        <p:txBody>
-          <a:bodyPr wrap="square">
-            <a:spAutoFit/>
-          </a:bodyPr>
-          <a:lstStyle/>
-          <a:p>
-            <a:pPr algn="ctr">
-              <a:spcAft>
-                <a:spcPts val="600"/>
-              </a:spcAft>
-            </a:pPr>
-            <a:r>
-              <a:rPr sz="1600" b="0" i="0">
-                <a:solidFill>
-                  <a:srgbClr val="333333"/>
-                </a:solidFill>
-                <a:latin typeface="Calibri"/>
-              </a:rPr>
-              <a:t>Contrastar monolito vs microservicios con criterios de equipo y acoplamiento.</a:t>
-            </a:r>
-          </a:p>
-          <a:p>
-            <a:pPr algn="ctr">
-              <a:spcAft>
-                <a:spcPts val="600"/>
-              </a:spcAft>
-            </a:pPr>
-            <a:r>
-              <a:rPr sz="1600" b="0" i="0">
-                <a:solidFill>
-                  <a:srgbClr val="333333"/>
-                </a:solidFill>
-                <a:latin typeface="Calibri"/>
-              </a:rPr>
-              <a:t>Modelar la app en C4 Container (Mermaid) con 2–5 cajas justificadas.</a:t>
-            </a:r>
-          </a:p>
-          <a:p>
-            <a:pPr algn="ctr">
-              <a:spcAft>
-                <a:spcPts val="600"/>
-              </a:spcAft>
-            </a:pPr>
-            <a:r>
-              <a:rPr sz="1600" b="0" i="0">
-                <a:solidFill>
-                  <a:srgbClr val="333333"/>
-                </a:solidFill>
-                <a:latin typeface="Calibri"/>
-              </a:rPr>
-              <a:t>Definir 3 contratos con verbo, ruta y error de negocio, y nombrar 3 riesgos de distribución.</a:t>
-            </a:r>
-          </a:p>
-        </p:txBody>
-      </p:sp>
-      <p:sp>
-        <p:nvSpPr>
-          <p:cNvPr id="6" name="TextBox 5"/>
-          <p:cNvSpPr txBox="1"/>
-          <p:nvPr/>
-        </p:nvSpPr>
-        <p:spPr>
-          <a:xfrm>
-            <a:off x="457200" y="4754880"/>
-            <a:ext cx="11277295" cy="640080"/>
-          </a:xfrm>
-          <a:prstGeom prst="rect">
-            <a:avLst/>
-          </a:prstGeom>
-          <a:noFill/>
-        </p:spPr>
-        <p:txBody>
-          <a:bodyPr wrap="square">
-            <a:spAutoFit/>
-          </a:bodyPr>
-          <a:lstStyle/>
-          <a:p>
-            <a:pPr algn="ctr"/>
-            <a:r>
-              <a:rPr sz="2000" b="1" i="0">
-                <a:solidFill>
-                  <a:srgbClr val="269CCB"/>
-                </a:solidFill>
-                <a:latin typeface="Calibri"/>
-              </a:rPr>
-              <a:t>Teoría al servicio del diseño</a:t>
             </a:r>
           </a:p>
         </p:txBody>
@@ -17993,7 +16718,7 @@
                 </a:solidFill>
                 <a:latin typeface="Calibri"/>
               </a:rPr>
-              <a:t>De donde viene la clase y que se abre hoy (1/2)</a:t>
+              <a:t>De donde viene la clase y que se abre hoy</a:t>
             </a:r>
           </a:p>
         </p:txBody>
@@ -18032,7 +16757,7 @@
                 </a:solidFill>
                 <a:latin typeface="Calibri"/>
               </a:rPr>
-              <a:t>–   La Clase 3 dejo al estudiante con una unidad de despliegue concreta en las manos: una imagen que se ejecuta como contenedor.</a:t>
+              <a:t>–   Hoy se juntan las dos cosas: se abre la caja negra y se decide de cuantas piezas esta hecha por dentro y por que.</a:t>
             </a:r>
           </a:p>
           <a:p>
@@ -18048,7 +16773,7 @@
                 </a:solidFill>
                 <a:latin typeface="Calibri"/>
               </a:rPr>
-              <a:t>–   La Clase 1 le dejo una caja negra llamada Turnos con actores y sistemas externos alrededor.</a:t>
+              <a:t>–   Ese es el nivel 2 del modelo C4, el de contenedores, y el trabajo de este nivel son tres cosas: la decision de arquitectura en una frase con sus dos criterios</a:t>
             </a:r>
           </a:p>
           <a:p>
@@ -18064,7 +16789,7 @@
                 </a:solidFill>
                 <a:latin typeface="Calibri"/>
               </a:rPr>
-              <a:t>–   Hoy se juntan las dos cosas: se abre la caja negra y se decide de cuantas piezas esta hecha por dentro y por que.</a:t>
+              <a:t>–   El diagrama de contenedores escrito en Mermaid, y una tabla de tres contratos mas tres riesgos de distribucion.</a:t>
             </a:r>
           </a:p>
           <a:p>
@@ -18080,7 +16805,7 @@
                 </a:solidFill>
                 <a:latin typeface="Calibri"/>
               </a:rPr>
-              <a:t>–   Ese es el nivel 2 del modelo C4, el de contenedores, y el trabajo de este nivel son tres cosas: la decision de arquitectura en una frase con sus dos criterios</a:t>
+              <a:t>–   En el modelo C4 un contenedor es una unidad que se ejecuta o almacena datos por separado: una aplicacion web, una API, una base de datos, una cola.</a:t>
             </a:r>
           </a:p>
           <a:p>
@@ -18096,7 +16821,7 @@
                 </a:solidFill>
                 <a:latin typeface="Calibri"/>
               </a:rPr>
-              <a:t>–   El diagrama de contenedores escrito en Mermaid, y una tabla de tres contratos mas tres riesgos de distribucion.</a:t>
+              <a:t>–   No es lo mismo que un contenedor Docker, aunque a menudo uno se despliegue dentro del otro.</a:t>
             </a:r>
           </a:p>
         </p:txBody>
@@ -18277,7 +17002,7 @@
                 </a:solidFill>
                 <a:latin typeface="Calibri"/>
               </a:rPr>
-              <a:t>De donde viene la clase y que se abre hoy (2/2)</a:t>
+              <a:t>Monolito: lo que la palabra realmente significa (1/4)</a:t>
             </a:r>
           </a:p>
         </p:txBody>
@@ -18316,7 +17041,7 @@
                 </a:solidFill>
                 <a:latin typeface="Calibri"/>
               </a:rPr>
-              <a:t>–   La pregunta que organiza la clase no es que son los microservicios, sino una mas incomoda y mas util: cada vez que un sistema se parte en dos, se gana algo y se paga algo, y hoy hay que decir explicitamente que se gana y que se paga.</a:t>
+              <a:t>–   Un monolito es un sistema que se despliega como una sola unidad: todo su codigo se construye junto y sale al aire junto.</a:t>
             </a:r>
           </a:p>
           <a:p>
@@ -18332,7 +17057,55 @@
                 </a:solidFill>
                 <a:latin typeface="Calibri"/>
               </a:rPr>
-              <a:t>–   Un estudiante que solo aprende la primera mitad de esa frase sale convencido de que mas servicios es mejor arquitectura, que es exactamente el error que esta clase debe prevenir.</a:t>
+              <a:t>–   No es un insulto ni un error, es la arquitectura correcta por defecto para la mayoria de los sistemas pequenos, y varios proyectos de este curso deberian ser monolitos bien organizados.</a:t>
+            </a:r>
+          </a:p>
+          <a:p>
+            <a:pPr>
+              <a:spcAft>
+                <a:spcPts val="800"/>
+              </a:spcAft>
+            </a:pPr>
+            <a:r>
+              <a:rPr sz="2000" b="0" i="0">
+                <a:solidFill>
+                  <a:srgbClr val="333333"/>
+                </a:solidFill>
+                <a:latin typeface="Calibri"/>
+              </a:rPr>
+              <a:t>–   Un microservicio, en cambio, es una unidad de despliegue independiente con una frontera de responsabilidad de negocio propia.</a:t>
+            </a:r>
+          </a:p>
+          <a:p>
+            <a:pPr>
+              <a:spcAft>
+                <a:spcPts val="800"/>
+              </a:spcAft>
+            </a:pPr>
+            <a:r>
+              <a:rPr sz="2000" b="0" i="0">
+                <a:solidFill>
+                  <a:srgbClr val="333333"/>
+                </a:solidFill>
+                <a:latin typeface="Calibri"/>
+              </a:rPr>
+              <a:t>–   Tres senales de una frontera real: el servicio es dueno de sus propios datos, puede liberarse a su propio ritmo y corresponde a una capacidad de negocio que se puede nombrar sin usar palabras tecnicas.</a:t>
+            </a:r>
+          </a:p>
+          <a:p>
+            <a:pPr>
+              <a:spcAft>
+                <a:spcPts val="800"/>
+              </a:spcAft>
+            </a:pPr>
+            <a:r>
+              <a:rPr sz="2000" b="0" i="0">
+                <a:solidFill>
+                  <a:srgbClr val="333333"/>
+                </a:solidFill>
+                <a:latin typeface="Calibri"/>
+              </a:rPr>
+              <a:t>–   En cuanto a la notacion, el nivel de contenedores del modelo C4 pide dibujar, dentro del sistema, cada cosa que se ejecuta o almacena de forma independiente</a:t>
             </a:r>
           </a:p>
         </p:txBody>

--- a/Arquitectura de Sistemas Computacionales/Clases/Clase 4 - Microservicios y arquitecturas distribuidas/Presentacion.pptx
+++ b/Arquitectura de Sistemas Computacionales/Clases/Clase 4 - Microservicios y arquitecturas distribuidas/Presentacion.pptx
@@ -654,523 +654,157 @@
           <a:p/>
           <a:p>
             <a:r>
-              <a:t>Un timeout es el tiempo maximo que un servicio espera respuesta antes de darse por vencido; sin timeout explicito, un servicio lento no falla sino que deja colgado a quien lo llamo, y el bloqueo se propaga hacia arriba hasta tumbar el sistema completo.</a:t>
+              <a:t>Los riesgos de distribucion no son una lista libre: son TRES riesgos, cada uno responde una pregunta distinta, y estan elegidos para que ninguno se pueda contestar sin mirar el propio diagrama.</a:t>
             </a:r>
           </a:p>
           <a:p/>
           <a:p>
             <a:r>
-              <a:t>Los valores tipicos para llamadas internas estan entre 2 y 5 segundos, y son convencion, no ley.</a:t>
+              <a:t>Se nombra UNA caja del diagrama y se dice que deja de funcionar y —esta es la mitad que se olvida— que SIGUE funcionando.</a:t>
             </a:r>
           </a:p>
           <a:p/>
           <a:p>
             <a:r>
-              <a:t>Un reintento es volver a intentar la llamada fallida, y trae una trampa: si todos los clientes reintentan de inmediato contra un servicio ya saturado, lo hunden mas, por lo que se limita a dos o tres reintentos con espera creciente entre uno y otro.</a:t>
+              <a:t>En CloudLite Turnos, si se cae el trabajador de notificaciones, los turnos se siguen reservando y lo que se pierde es el correo de confirmacion; si se cae la base de turnos, no se reserva nada</a:t>
             </a:r>
           </a:p>
           <a:p/>
           <a:p>
             <a:r>
-              <a:t>En CloudLite eso es literal: si el reintento de crear turno no es idempotente, el cliente termina con dos reservas para el mismo horario, y la solucion habitual es que la peticion lleve un identificador unico que el servidor reconozca como repetido.</a:t>
+              <a:t>Pero la aplicacion web sigue cargando y puede mostrar un mensaje decente en lugar de una pantalla en blanco.</a:t>
             </a:r>
           </a:p>
           <a:p/>
           <a:p>
             <a:r>
-              <a:t>El cuarto mecanismo es el interruptor de circuito, o circuit breaker, que tras varias fallas consecutivas deja de intentar por un rato y responde de inmediato con un error controlado, para no gastar recursos golpeando algo que esta caido.</a:t>
+              <a:t>Reservar un turno en el ejemplo de tres cajas son tres saltos: el navegador a la aplicacion web, la aplicacion web a la API, y la API a la base de datos; si se agrega el correo son cuatro, y si el correo se envia por cola, cinco.</a:t>
             </a:r>
           </a:p>
           <a:p/>
           <a:p>
             <a:r>
+              <a:t>El numero importa por lo que se explico arriba: cada salto agrega latencia y una probabilidad de fallo, y esa aritmetica es la unica defensa contra multiplicar cajas por gusto.</a:t>
+            </a:r>
+          </a:p>
+          <a:p/>
+          <a:p>
+            <a:r>
+              <a:t>Un estudiante que no puede contar sus saltos no esta leyendo su diagrama, esta recordandolo.</a:t>
+            </a:r>
+          </a:p>
+          <a:p/>
+          <a:p>
+            <a:r>
+              <a:t>El tercero pregunta por un dato que se escribe en dos pasos, y es el mas dificil de los tres porque exige mirar la escritura y no la lectura.</a:t>
+            </a:r>
+          </a:p>
+          <a:p/>
+          <a:p>
+            <a:r>
+              <a:t>En el ejemplo, el turno se escribe en la base y despues se publica el mensaje del correo: si el segundo paso falla, el turno existe y el cliente nunca se entero.</a:t>
+            </a:r>
+          </a:p>
+          <a:p/>
+          <a:p>
+            <a:r>
+              <a:t>Ese es el problema de fondo de todo sistema distribuido, y hoy no se resuelve con una saga completa: se reconoce, se nombra el dato concreto y se dice que queda inconsistente.</a:t>
+            </a:r>
+          </a:p>
+          <a:p/>
+          <a:p>
+            <a:r>
+              <a:t>Si un estudiante dice que no encuentra ningun riesgo, casi siempre es porque su diagrama tiene flechas sin protocolo o sin formato: no sabe por donde puede romperse porque nunca definio como se comunican las piezas.</a:t>
+            </a:r>
+          </a:p>
+          <a:p/>
+          <a:p>
+            <a:r>
+              <a:t>Los tres riesgos clasicos de un sistema distribuido son: la red falla o se demora, un servicio deja de responder mientras los demas siguen, y los datos quedan inconsistentes entre dos servicios.</a:t>
+            </a:r>
+          </a:p>
+          <a:p/>
+          <a:p>
+            <a:r>
+              <a:t>En la app de turnos, si el worker de avisos cae, los turnos se siguen reservando y los avisos esperan en la cola: el fallo queda contenido.</a:t>
+            </a:r>
+          </a:p>
+          <a:p/>
+          <a:p>
+            <a:r>
               <a:t>NOTAS:</a:t>
             </a:r>
           </a:p>
           <a:p/>
           <a:p>
             <a:r>
-              <a:t>De ahi salen cuatro mecanismos que el diagrama y la tabla deben poder mencionar.</a:t>
+              <a:t>El primero pregunta que se cae.</a:t>
             </a:r>
           </a:p>
           <a:p/>
           <a:p>
             <a:r>
-              <a:t>Los reintentos exigen idempotencia, que significa que ejecutar la misma operacion dos veces produzca el mismo resultado que ejecutarla una vez.</a:t>
-            </a:r>
-          </a:p>
-        </p:txBody>
-      </p:sp>
-      <p:sp>
-        <p:nvSpPr>
-          <p:cNvPr id="4" name="Slide Number Placeholder 3"/>
-          <p:cNvSpPr>
-            <a:spLocks noGrp="1"/>
-          </p:cNvSpPr>
-          <p:nvPr>
-            <p:ph type="sldNum" idx="5" sz="quarter"/>
-          </p:nvPr>
-        </p:nvSpPr>
-        <p:spPr/>
-      </p:sp>
-    </p:spTree>
-  </p:cSld>
-  <p:clrMapOvr>
-    <a:masterClrMapping/>
-  </p:clrMapOvr>
-</p:notes>
-</file>
-
-<file path=ppt/notesSlides/notesSlide11.xml><?xml version="1.0" encoding="utf-8"?>
-<p:notes xmlns:a="http://schemas.openxmlformats.org/drawingml/2006/main" xmlns:p="http://schemas.openxmlformats.org/presentationml/2006/main" xmlns:r="http://schemas.openxmlformats.org/officeDocument/2006/relationships">
-  <p:cSld>
-    <p:spTree>
-      <p:nvGrpSpPr>
-        <p:cNvPr id="1" name=""/>
-        <p:cNvGrpSpPr/>
-        <p:nvPr/>
-      </p:nvGrpSpPr>
-      <p:grpSpPr>
-        <a:xfrm>
-          <a:off x="0" y="0"/>
-          <a:ext cx="0" cy="0"/>
-          <a:chOff x="0" y="0"/>
-          <a:chExt cx="0" cy="0"/>
-        </a:xfrm>
-      </p:grpSpPr>
-      <p:sp>
-        <p:nvSpPr>
-          <p:cNvPr id="2" name="Slide Image Placeholder 1"/>
-          <p:cNvSpPr>
-            <a:spLocks noGrp="1"/>
-          </p:cNvSpPr>
-          <p:nvPr>
-            <p:ph type="sldImg" idx="2"/>
-          </p:nvPr>
-        </p:nvSpPr>
-        <p:spPr/>
-      </p:sp>
-      <p:sp>
-        <p:nvSpPr>
-          <p:cNvPr id="3" name="Notes Placeholder 2"/>
-          <p:cNvSpPr>
-            <a:spLocks noGrp="1"/>
-          </p:cNvSpPr>
-          <p:nvPr>
-            <p:ph type="body" idx="3" sz="quarter"/>
-          </p:nvPr>
-        </p:nvSpPr>
-        <p:spPr/>
-        <p:txBody>
-          <a:bodyPr/>
-          <a:lstStyle/>
-          <a:p>
-            <a:r>
-              <a:t>DESARROLLO (para explicarlo, no se proyecta):</a:t>
+              <a:t>El segundo pregunta cuantos saltos de red tiene una operacion de punta a punta, y se responde con un numero, contado sobre el propio dibujo.</a:t>
             </a:r>
           </a:p>
           <a:p/>
           <a:p>
             <a:r>
-              <a:t>El punto donde los proyectos academicos se rompen es el de los datos.</a:t>
+              <a:t>PREGUNTAS FRECUENTES Y CIERRE CONCEPTUAL ()</a:t>
             </a:r>
           </a:p>
           <a:p/>
           <a:p>
             <a:r>
-              <a:t>La regla ortodoxa de los microservicios dice que cada servicio es dueno exclusivo de su base de datos y que nadie mas la consulta directamente</a:t>
+              <a:t>Cuantos microservicios son los correctos: no hay numero correcto, hay justificacion por frontera</a:t>
             </a:r>
           </a:p>
           <a:p/>
           <a:p>
             <a:r>
-              <a:t>Si dos servicios comparten tablas, estan acoplados y no pueden desplegarse por separado, lo que contradice la definicion.</a:t>
+              <a:t>Y el rango de dos a cinco contenedores que exige el curso es una restriccion pedagogica pensada para proyectos de una a tres personas en doce semanas, no un hallazgo de la ingenieria.</a:t>
             </a:r>
           </a:p>
           <a:p/>
           <a:p>
             <a:r>
-              <a:t>Pero cumplir esa regla tiene un precio real: una consulta que antes era un join deja de existir y hay que resolverla llamando a otro servicio</a:t>
+              <a:t>Si las empresas grandes tienen cientos de servicios, por que nosotros solo tres: porque el numero de servicios que una organizacion puede sostener es funcion del numero de equipos autonomos y de la madurez de su automatizacion de despliegue y observabilidad</a:t>
             </a:r>
           </a:p>
           <a:p/>
           <a:p>
             <a:r>
-              <a:t>Y una operacion que abarca dos servicios ya no puede ser una transaccion unica sino una secuencia de pasos con compensaciones.</a:t>
+              <a:t>Condiciones que un equipo de tres no tiene, y copiar la forma sin las condiciones produce lo que aqui se llama microservicios teatro.</a:t>
             </a:r>
           </a:p>
           <a:p/>
           <a:p>
             <a:r>
-              <a:t>Fingir ortodoxia es peor que documentar una concesion.</a:t>
+              <a:t>Y la tercera, que hay que responder sin ambiguedad: esta mal hacer un monolito.</a:t>
             </a:r>
           </a:p>
           <a:p/>
           <a:p>
             <a:r>
-              <a:t>La regla de propiedad es: cada tabla tiene un solo servicio dueno, que es el unico que escribe en ella; los demas la consultan por su API.</a:t>
+              <a:t>(No se proyecta) Conviene dictarlos asi, porque un estudiante que entiende por que son esos tres no escribe generalidades.</a:t>
             </a:r>
           </a:p>
           <a:p/>
           <a:p>
             <a:r>
-              <a:t>En CloudLite Turnos la tabla de turnos es de la API de turnos, y el worker de avisos no la toca: recibe por la cola el dato que necesita.</a:t>
+              <a:t>(No se proyecta) «Se cae todo» vale la mitad de los puntos, y con razon: en un sistema bien partido nunca se cae todo, y el ejercicio consiste precisamente en descubrir que algunas cosas sobreviven.</a:t>
             </a:r>
           </a:p>
           <a:p/>
           <a:p>
             <a:r>
-              <a:t>Dos servicios que escriben en la misma tabla quedan acoplados aunque se desplieguen por separado, y ese es el error mas comun.</a:t>
+              <a:t>(No se proyecta) Ese razonamiento es el que en la Clase 7 permite decidir que va en cada zona de red y en la Clase 13 que pieza vale la pena replicar.</a:t>
             </a:r>
           </a:p>
           <a:p/>
           <a:p>
             <a:r>
-              <a:t>NOTAS:</a:t>
-            </a:r>
-          </a:p>
-          <a:p/>
-          <a:p>
-            <a:r>
-              <a:t>Eso introduce consistencia eventual, es decir un lapso durante el cual dos partes del sistema tienen versiones distintas de la verdad, con consecuencias visibles para el usuario.</a:t>
-            </a:r>
-          </a:p>
-          <a:p/>
-          <a:p>
-            <a:r>
-              <a:t>(No se proyecta) La postura honesta para este curso es que un CloudLite con una base de datos compartida y propiedad de tablas claramente documentada resulta aceptable, siempre que el estudiante lo registre como un trade-off consciente en su informe y no lo presente como microservicios puros.</a:t>
-            </a:r>
-          </a:p>
-        </p:txBody>
-      </p:sp>
-      <p:sp>
-        <p:nvSpPr>
-          <p:cNvPr id="4" name="Slide Number Placeholder 3"/>
-          <p:cNvSpPr>
-            <a:spLocks noGrp="1"/>
-          </p:cNvSpPr>
-          <p:nvPr>
-            <p:ph type="sldNum" idx="5" sz="quarter"/>
-          </p:nvPr>
-        </p:nvSpPr>
-        <p:spPr/>
-      </p:sp>
-    </p:spTree>
-  </p:cSld>
-  <p:clrMapOvr>
-    <a:masterClrMapping/>
-  </p:clrMapOvr>
-</p:notes>
-</file>
-
-<file path=ppt/notesSlides/notesSlide12.xml><?xml version="1.0" encoding="utf-8"?>
-<p:notes xmlns:a="http://schemas.openxmlformats.org/drawingml/2006/main" xmlns:p="http://schemas.openxmlformats.org/presentationml/2006/main" xmlns:r="http://schemas.openxmlformats.org/officeDocument/2006/relationships">
-  <p:cSld>
-    <p:spTree>
-      <p:nvGrpSpPr>
-        <p:cNvPr id="1" name=""/>
-        <p:cNvGrpSpPr/>
-        <p:nvPr/>
-      </p:nvGrpSpPr>
-      <p:grpSpPr>
-        <a:xfrm>
-          <a:off x="0" y="0"/>
-          <a:ext cx="0" cy="0"/>
-          <a:chOff x="0" y="0"/>
-          <a:chExt cx="0" cy="0"/>
-        </a:xfrm>
-      </p:grpSpPr>
-      <p:sp>
-        <p:nvSpPr>
-          <p:cNvPr id="2" name="Slide Image Placeholder 1"/>
-          <p:cNvSpPr>
-            <a:spLocks noGrp="1"/>
-          </p:cNvSpPr>
-          <p:nvPr>
-            <p:ph type="sldImg" idx="2"/>
-          </p:nvPr>
-        </p:nvSpPr>
-        <p:spPr/>
-      </p:sp>
-      <p:sp>
-        <p:nvSpPr>
-          <p:cNvPr id="3" name="Notes Placeholder 2"/>
-          <p:cNvSpPr>
-            <a:spLocks noGrp="1"/>
-          </p:cNvSpPr>
-          <p:nvPr>
-            <p:ph type="body" idx="3" sz="quarter"/>
-          </p:nvPr>
-        </p:nvSpPr>
-        <p:spPr/>
-        <p:txBody>
-          <a:bodyPr/>
-          <a:lstStyle/>
-          <a:p>
-            <a:r>
-              <a:t>DESARROLLO (para explicarlo, no se proyecta):</a:t>
-            </a:r>
-          </a:p>
-          <a:p/>
-          <a:p>
-            <a:r>
-              <a:t>Los riesgos de distribucion no son una lista libre: son TRES riesgos, cada uno responde una pregunta distinta, y estan elegidos para que ninguno se pueda contestar sin mirar el propio diagrama.</a:t>
-            </a:r>
-          </a:p>
-          <a:p/>
-          <a:p>
-            <a:r>
-              <a:t>Se nombra UNA caja del diagrama y se dice que deja de funcionar y —esta es la mitad que se olvida— que SIGUE funcionando.</a:t>
-            </a:r>
-          </a:p>
-          <a:p/>
-          <a:p>
-            <a:r>
-              <a:t>En CloudLite Turnos, si se cae el trabajador de notificaciones, los turnos se siguen reservando y lo que se pierde es el correo de confirmacion; si se cae la base de turnos, no se reserva nada</a:t>
-            </a:r>
-          </a:p>
-          <a:p/>
-          <a:p>
-            <a:r>
-              <a:t>Pero la aplicacion web sigue cargando y puede mostrar un mensaje decente en lugar de una pantalla en blanco.</a:t>
-            </a:r>
-          </a:p>
-          <a:p/>
-          <a:p>
-            <a:r>
-              <a:t>Reservar un turno en el ejemplo de tres cajas son tres saltos: el navegador a la aplicacion web, la aplicacion web a la API, y la API a la base de datos; si se agrega el correo son cuatro, y si el correo se envia por cola, cinco.</a:t>
-            </a:r>
-          </a:p>
-          <a:p/>
-          <a:p>
-            <a:r>
-              <a:t>El numero importa por lo que se explico arriba: cada salto agrega latencia y una probabilidad de fallo, y esa aritmetica es la unica defensa contra multiplicar cajas por gusto.</a:t>
-            </a:r>
-          </a:p>
-          <a:p/>
-          <a:p>
-            <a:r>
-              <a:t>Un estudiante que no puede contar sus saltos no esta leyendo su diagrama, esta recordandolo.</a:t>
-            </a:r>
-          </a:p>
-          <a:p/>
-          <a:p>
-            <a:r>
-              <a:t>El tercero pregunta por un dato que se escribe en dos pasos, y es el mas dificil de los tres porque exige mirar la escritura y no la lectura.</a:t>
-            </a:r>
-          </a:p>
-          <a:p/>
-          <a:p>
-            <a:r>
-              <a:t>En el ejemplo, el turno se escribe en la base y despues se publica el mensaje del correo: si el segundo paso falla, el turno existe y el cliente nunca se entero.</a:t>
-            </a:r>
-          </a:p>
-          <a:p/>
-          <a:p>
-            <a:r>
-              <a:t>Ese es el problema de fondo de todo sistema distribuido, y hoy no se resuelve con una saga completa: se reconoce, se nombra el dato concreto y se dice que queda inconsistente.</a:t>
-            </a:r>
-          </a:p>
-          <a:p/>
-          <a:p>
-            <a:r>
-              <a:t>Si un estudiante dice que no encuentra ningun riesgo, casi siempre es porque su diagrama tiene flechas sin protocolo o sin formato: no sabe por donde puede romperse porque nunca definio como se comunican las piezas.</a:t>
-            </a:r>
-          </a:p>
-          <a:p/>
-          <a:p>
-            <a:r>
-              <a:t>Los tres riesgos clasicos de un sistema distribuido son: la red falla o se demora, un servicio deja de responder mientras los demas siguen, y los datos quedan inconsistentes entre dos servicios.</a:t>
-            </a:r>
-          </a:p>
-          <a:p/>
-          <a:p>
-            <a:r>
-              <a:t>En la app de turnos, si el worker de avisos cae, los turnos se siguen reservando y los avisos esperan en la cola: el fallo queda contenido.</a:t>
-            </a:r>
-          </a:p>
-          <a:p/>
-          <a:p>
-            <a:r>
-              <a:t>NOTAS:</a:t>
-            </a:r>
-          </a:p>
-          <a:p/>
-          <a:p>
-            <a:r>
-              <a:t>El primero pregunta que se cae.</a:t>
-            </a:r>
-          </a:p>
-          <a:p/>
-          <a:p>
-            <a:r>
-              <a:t>El segundo pregunta cuantos saltos de red tiene una operacion de punta a punta, y se responde con un numero, contado sobre el propio dibujo.</a:t>
-            </a:r>
-          </a:p>
-          <a:p/>
-          <a:p>
-            <a:r>
-              <a:t>PREGUNTAS FRECUENTES Y CIERRE CONCEPTUAL ()</a:t>
-            </a:r>
-          </a:p>
-          <a:p/>
-          <a:p>
-            <a:r>
-              <a:t>Cuantos microservicios son los correctos: no hay numero correcto, hay justificacion por frontera</a:t>
-            </a:r>
-          </a:p>
-          <a:p/>
-          <a:p>
-            <a:r>
-              <a:t>Y el rango de dos a cinco contenedores que exige el curso es una restriccion pedagogica pensada para proyectos de una a tres personas en doce semanas, no un hallazgo de la ingenieria.</a:t>
-            </a:r>
-          </a:p>
-          <a:p/>
-          <a:p>
-            <a:r>
-              <a:t>Si las empresas grandes tienen cientos de servicios, por que nosotros solo tres: porque el numero de servicios que una organizacion puede sostener es funcion del numero de equipos autonomos y de la madurez de su automatizacion de despliegue y observabilidad</a:t>
-            </a:r>
-          </a:p>
-          <a:p/>
-          <a:p>
-            <a:r>
-              <a:t>Condiciones que un equipo de tres no tiene, y copiar la forma sin las condiciones produce lo que aqui se llama microservicios teatro.</a:t>
-            </a:r>
-          </a:p>
-          <a:p/>
-          <a:p>
-            <a:r>
-              <a:t>Y la tercera, que hay que responder sin ambiguedad: esta mal hacer un monolito.</a:t>
-            </a:r>
-          </a:p>
-          <a:p/>
-          <a:p>
-            <a:r>
-              <a:t>(No se proyecta) Conviene dictarlos asi, porque un estudiante que entiende por que son esos tres no escribe generalidades.</a:t>
-            </a:r>
-          </a:p>
-          <a:p/>
-          <a:p>
-            <a:r>
-              <a:t>(No se proyecta) «Se cae todo» vale la mitad de los puntos, y con razon: en un sistema bien partido nunca se cae todo, y el ejercicio consiste precisamente en descubrir que algunas cosas sobreviven.</a:t>
-            </a:r>
-          </a:p>
-          <a:p/>
-          <a:p>
-            <a:r>
-              <a:t>(No se proyecta) Ese razonamiento es el que en la Clase 7 permite decidir que va en cada zona de red y en la Clase 13 que pieza vale la pena replicar.</a:t>
-            </a:r>
-          </a:p>
-          <a:p/>
-          <a:p>
-            <a:r>
               <a:t>(No se proyecta) Devolverle el diagrama es mas util que darle un ejemplo.</a:t>
-            </a:r>
-          </a:p>
-        </p:txBody>
-      </p:sp>
-      <p:sp>
-        <p:nvSpPr>
-          <p:cNvPr id="4" name="Slide Number Placeholder 3"/>
-          <p:cNvSpPr>
-            <a:spLocks noGrp="1"/>
-          </p:cNvSpPr>
-          <p:nvPr>
-            <p:ph type="sldNum" idx="5" sz="quarter"/>
-          </p:nvPr>
-        </p:nvSpPr>
-        <p:spPr/>
-      </p:sp>
-    </p:spTree>
-  </p:cSld>
-  <p:clrMapOvr>
-    <a:masterClrMapping/>
-  </p:clrMapOvr>
-</p:notes>
-</file>
-
-<file path=ppt/notesSlides/notesSlide13.xml><?xml version="1.0" encoding="utf-8"?>
-<p:notes xmlns:a="http://schemas.openxmlformats.org/drawingml/2006/main" xmlns:p="http://schemas.openxmlformats.org/presentationml/2006/main" xmlns:r="http://schemas.openxmlformats.org/officeDocument/2006/relationships">
-  <p:cSld>
-    <p:spTree>
-      <p:nvGrpSpPr>
-        <p:cNvPr id="1" name=""/>
-        <p:cNvGrpSpPr/>
-        <p:nvPr/>
-      </p:nvGrpSpPr>
-      <p:grpSpPr>
-        <a:xfrm>
-          <a:off x="0" y="0"/>
-          <a:ext cx="0" cy="0"/>
-          <a:chOff x="0" y="0"/>
-          <a:chExt cx="0" cy="0"/>
-        </a:xfrm>
-      </p:grpSpPr>
-      <p:sp>
-        <p:nvSpPr>
-          <p:cNvPr id="2" name="Slide Image Placeholder 1"/>
-          <p:cNvSpPr>
-            <a:spLocks noGrp="1"/>
-          </p:cNvSpPr>
-          <p:nvPr>
-            <p:ph type="sldImg" idx="2"/>
-          </p:nvPr>
-        </p:nvSpPr>
-        <p:spPr/>
-      </p:sp>
-      <p:sp>
-        <p:nvSpPr>
-          <p:cNvPr id="3" name="Notes Placeholder 2"/>
-          <p:cNvSpPr>
-            <a:spLocks noGrp="1"/>
-          </p:cNvSpPr>
-          <p:nvPr>
-            <p:ph type="body" idx="3" sz="quarter"/>
-          </p:nvPr>
-        </p:nvSpPr>
-        <p:spPr/>
-        <p:txBody>
-          <a:bodyPr/>
-          <a:lstStyle/>
-          <a:p>
-            <a:r>
-              <a:t>TEXTO COMPLETO DE LA LÁMINA (se proyecta resumido):</a:t>
-            </a:r>
-          </a:p>
-          <a:p/>
-          <a:p>
-            <a:r>
-              <a:t>Cada flecha del diagrama es una llamada de red: puede tardar, perderse o llegar dos veces.</a:t>
-            </a:r>
-          </a:p>
-          <a:p/>
-          <a:p>
-            <a:r>
-              <a:t>Riesgo 1 · qué se cae: nombra una caja, y di qué deja de funcionar y qué sigue funcionando. «Se cae todo» vale la mitad.</a:t>
-            </a:r>
-          </a:p>
-          <a:p/>
-          <a:p>
-            <a:r>
-              <a:t>Riesgo 2 · cuántos saltos de red tiene una operación de punta a punta: cuéntalos sobre tu propio diagrama.</a:t>
-            </a:r>
-          </a:p>
-          <a:p/>
-          <a:p>
-            <a:r>
-              <a:t>Riesgo 3 · un dato escrito en dos pasos: nómbralo y di qué pasa si el segundo falla.</a:t>
-            </a:r>
-          </a:p>
-          <a:p/>
-          <a:p>
-            <a:r>
-              <a:t>Caja de herramientas para mitigarlos: timeout · reintento con espera creciente · idempotencia · circuit breaker.</a:t>
-            </a:r>
-          </a:p>
-          <a:p/>
-          <a:p>
-            <a:r>
-              <a:t>«Los microservicios son más complejos» no es un riesgo: no nombra caja, ni salto, ni dato.</a:t>
             </a:r>
           </a:p>
         </p:txBody>
@@ -1472,43 +1106,103 @@
           <a:lstStyle/>
           <a:p>
             <a:r>
-              <a:t>TEXTO COMPLETO DE LA LÁMINA (se proyecta resumido):</a:t>
+              <a:t>DESARROLLO (para explicarlo, no se proyecta):</a:t>
             </a:r>
           </a:p>
           <a:p/>
           <a:p>
             <a:r>
-              <a:t>Monolito modular ≠ malo: a menudo mejor para equipos pequeños.</a:t>
+              <a:t>La primera: cada caja lleva TRES datos, no uno.</a:t>
             </a:r>
           </a:p>
           <a:p/>
           <a:p>
             <a:r>
-              <a:t>Microservicio: frontera de despliegue e independencia de datos (ideal).</a:t>
+              <a:t>Una caja que dice solo «API» no es un contenedor descrito, es una etiqueta; con «API de turnos · Node.js · valida la franja y registra el turno» ya se puede discutir si esa frontera tiene sentido.</a:t>
             </a:r>
           </a:p>
           <a:p/>
           <a:p>
             <a:r>
-              <a:t>Anti-patrón: 12 microservicios para 3 estudiantes = diagrama teatro.</a:t>
+              <a:t>La segunda: lo que guarda datos no es una caja mas.</a:t>
             </a:r>
           </a:p>
           <a:p/>
           <a:p>
             <a:r>
-              <a:t>La decisión se escribe en una sola frase y se elige UNA: «un poco de los dos» no es una decisión.</a:t>
+              <a:t>En la notacion se marca como almacen —en el codigo, ContainerDb en lugar de Container— y esa distincion no es cosmetica: un almacen no se replica igual que un servicio, no se despliega igual y no falla igual, y todo eso se retoma en las Clases 7 y 13.</a:t>
             </a:r>
           </a:p>
           <a:p/>
           <a:p>
             <a:r>
-              <a:t>Se sostiene con dos criterios: tamaño del equipo (con número y plazo) y acoplamiento (qué partes cambian juntas).</a:t>
+              <a:t>La tercera: ninguna flecha queda muda, y media etiqueta tampoco alcanza.</a:t>
             </a:r>
           </a:p>
           <a:p/>
           <a:p>
             <a:r>
-              <a:t>Y con lo que se gana y lo que se pierde: sin la segunda mitad, no hubo decisión.</a:t>
+              <a:t>Cada flecha lleva protocolo Y formato: HTTPS/JSON, TCP/SQL.</a:t>
+            </a:r>
+          </a:p>
+          <a:p/>
+          <a:p>
+            <a:r>
+              <a:t>Si alli decia «Pasarela de pagos», aqui no puede decir «Pagos».</a:t>
+            </a:r>
+          </a:p>
+          <a:p/>
+          <a:p>
+            <a:r>
+              <a:t>Los actores y los sistemas externos del Context siguen existiendo hoy y siguen estando FUERA del recuadro del sistema: abrir la caja no elimina lo que la rodeaba.</a:t>
+            </a:r>
+          </a:p>
+          <a:p/>
+          <a:p>
+            <a:r>
+              <a:t>Un ejemplo de trazabilidad: si el Context muestra «Proveedor de correo» como System_Ext, en el Containers aparece con el mismo nombre, fuera del recuadro, y la flecha que llega a el sale del contenedor que envia los avisos.</a:t>
+            </a:r>
+          </a:p>
+          <a:p/>
+          <a:p>
+            <a:r>
+              <a:t>NOTAS:</a:t>
+            </a:r>
+          </a:p>
+          <a:p/>
+          <a:p>
+            <a:r>
+              <a:t>Nombre, tecnologia y responsabilidad en una frase.</a:t>
+            </a:r>
+          </a:p>
+          <a:p/>
+          <a:p>
+            <a:r>
+              <a:t>«HTTP» a secas no dice como viajan los datos y «SQL» a secas no dice sobre que transporte; con las dos mitades, cualquiera que lea el diagrama sabe por donde puede romperse.</a:t>
+            </a:r>
+          </a:p>
+          <a:p/>
+          <a:p>
+            <a:r>
+              <a:t>(No se proyecta) Antes del ejemplo conviene fijar las tres reglas con las que se corrige el diagrama, porque cada una tiene puntos asignados y las tres se pierden por descuido y no por no saber.</a:t>
+            </a:r>
+          </a:p>
+          <a:p/>
+          <a:p>
+            <a:r>
+              <a:t>(No se proyecta) Y hay una cuarta condicion que no es del nivel sino de la continuidad del proyecto: los nombres tienen que ser IDENTICOS a los del C4 Context de la Clase 1.</a:t>
+            </a:r>
+          </a:p>
+          <a:p/>
+          <a:p>
+            <a:r>
+              <a:t>(No se proyecta) No es pedanteria de notacion; es lo unico que permite afirmar que los dos dibujos son el mismo sistema visto desde distinta altura, y es exactamente lo que se volvera a verificar en la Clase 7 contra el diagrama de despliegue y en la Clase 11 en la auditoria del paquete.</a:t>
+            </a:r>
+          </a:p>
+          <a:p/>
+          <a:p>
+            <a:r>
+              <a:t>(No se proyecta) Ese es el error de dibujo mas comun de la clase, meter al usuario o a la pasarela de pagos dentro del sistema propio, y se detecta en dos segundos preguntando quien lo opera.</a:t>
             </a:r>
           </a:p>
         </p:txBody>
@@ -1584,97 +1278,79 @@
           <a:p/>
           <a:p>
             <a:r>
-              <a:t>La primera: cada caja lleva TRES datos, no uno.</a:t>
+              <a:t>En este curso el diagrama se escribe como codigo Mermaid, y un visor Mermaid lo renderiza.</a:t>
             </a:r>
           </a:p>
           <a:p/>
           <a:p>
             <a:r>
-              <a:t>Una caja que dice solo «API» no es un contenedor descrito, es una etiqueta; con «API de turnos · Node.js · valida la franja y registra el turno» ya se puede discutir si esa frontera tiene sentido.</a:t>
+              <a:t>La primera linea es exactamente C4Container, sin nada antes</a:t>
             </a:r>
           </a:p>
           <a:p/>
           <a:p>
             <a:r>
-              <a:t>La segunda: lo que guarda datos no es una caja mas.</a:t>
+              <a:t>Los actores se declaran con Person y los sistemas ajenos con System_Ext, los dos por fuera del bloque del sistema.</a:t>
             </a:r>
           </a:p>
           <a:p/>
           <a:p>
             <a:r>
-              <a:t>En la notacion se marca como almacen —en el codigo, ContainerDb en lugar de Container— y esa distincion no es cosmetica: un almacen no se replica igual que un servicio, no se despliega igual y no falla igual, y todo eso se retoma en las Clases 7 y 13.</a:t>
+              <a:t>El sistema propio se abre con System_Boundary y una llave, y dentro van las cajas: Container para lo que ejecuta y ContainerDb para lo que almacena, cada una con identificador, nombre, tecnologia y responsabilidad.</a:t>
             </a:r>
           </a:p>
           <a:p/>
           <a:p>
             <a:r>
-              <a:t>La tercera: ninguna flecha queda muda, y media etiqueta tampoco alcanza.</a:t>
+              <a:t>La llave se cierra, y las relaciones van despues, con Rel y cuatro datos: origen, destino, que hace y con que protocolo y formato.</a:t>
             </a:r>
           </a:p>
           <a:p/>
           <a:p>
             <a:r>
-              <a:t>Cada flecha lleva protocolo Y formato: HTTPS/JSON, TCP/SQL.</a:t>
+              <a:t>El identificador corto de cada caja —en el molde proyectado son spa, api, db y worker— es el que usan las relaciones; si no coincide, no dibuja la flecha y tampoco avisa con claridad.</a:t>
             </a:r>
           </a:p>
           <a:p/>
           <a:p>
             <a:r>
-              <a:t>Si alli decia «Pasarela de pagos», aqui no puede decir «Pagos».</a:t>
+              <a:t>La regla operativa del dia se dice como consecuencia y no como consejo: se pega el codigo, se mira renderizado, y solo entonces se envia.</a:t>
             </a:r>
           </a:p>
           <a:p/>
           <a:p>
             <a:r>
-              <a:t>Los actores y los sistemas externos del Context siguen existiendo hoy y siguen estando FUERA del recuadro del sistema: abrir la caja no elimina lo que la rodeaba.</a:t>
+              <a:t>(No se proyecta) Eso cambia lo que el docente tiene que ensenar, porque un boceto correcto escrito con la sintaxis equivocada no renderiza y entonces no hay diagrama que calificar.</a:t>
             </a:r>
           </a:p>
           <a:p/>
           <a:p>
             <a:r>
-              <a:t>Un ejemplo de trazabilidad: si el Context muestra «Proveedor de correo» como System_Ext, en el Containers aparece con el mismo nombre, fuera del recuadro, y la flecha que llega a el sale del contenedor que envia los avisos.</a:t>
+              <a:t>(No se proyecta) Son cinco reglas de escritura y conviene recorrerlas sobre la diapositiva, linea por linea.</a:t>
             </a:r>
           </a:p>
           <a:p/>
           <a:p>
             <a:r>
-              <a:t>NOTAS:</a:t>
+              <a:t>(No se proyecta) C4Context es el nivel de la Clase 1 y graph TD es otro tipo de diagrama, y cualquiera de los dos deja la respuesta en el nivel equivocado.</a:t>
             </a:r>
           </a:p>
           <a:p/>
           <a:p>
             <a:r>
-              <a:t>Nombre, tecnologia y responsabilidad en una frase.</a:t>
+              <a:t>(No se proyecta) Vale la pena decir en voz alta que aqui el uso de una IA es legitimo y ademas recomendado: pasar un boceto a codigo Mermaid es justo la tarea mecanica en la que ayuda sin sustituir el criterio.</a:t>
             </a:r>
           </a:p>
           <a:p/>
           <a:p>
             <a:r>
-              <a:t>«HTTP» a secas no dice como viajan los datos y «SQL» a secas no dice sobre que transporte; con las dos mitades, cualquiera que lea el diagrama sabe por donde puede romperse.</a:t>
+              <a:t>(No se proyecta) Lo que NO delega el estudiante es la revision, y hay tres cosas que tiene que verificar el mismo antes de enviar, porque son las que la IA equivoca con frecuencia: que la primera linea sea C4Container, que la base de datos haya quedado como ContainerDb y no como Container, y que ninguna relacion haya perdido la mitad de su etiqueta.</a:t>
             </a:r>
           </a:p>
           <a:p/>
           <a:p>
             <a:r>
-              <a:t>(No se proyecta) Antes del ejemplo conviene fijar las tres reglas con las que se corrige el diagrama, porque cada una tiene puntos asignados y las tres se pierden por descuido y no por no saber.</a:t>
-            </a:r>
-          </a:p>
-          <a:p/>
-          <a:p>
-            <a:r>
-              <a:t>(No se proyecta) Y hay una cuarta condicion que no es del nivel sino de la continuidad del proyecto: los nombres tienen que ser IDENTICOS a los del C4 Context de la Clase 1.</a:t>
-            </a:r>
-          </a:p>
-          <a:p/>
-          <a:p>
-            <a:r>
-              <a:t>(No se proyecta) No es pedanteria de notacion; es lo unico que permite afirmar que los dos dibujos son el mismo sistema visto desde distinta altura, y es exactamente lo que se volvera a verificar en la Clase 7 contra el diagrama de despliegue y en la Clase 11 en la auditoria del paquete.</a:t>
-            </a:r>
-          </a:p>
-          <a:p/>
-          <a:p>
-            <a:r>
-              <a:t>(No se proyecta) Ese es el error de dibujo mas comun de la clase, meter al usuario o a la pasarela de pagos dentro del sistema propio, y se detecta en dos segundos preguntando quien lo opera.</a:t>
+              <a:t>(No se proyecta) Un codigo que no renderiza vale cero, y es el unico punto del taller donde el estudiante puede comprobar su propia nota antes de entregar.</a:t>
             </a:r>
           </a:p>
         </p:txBody>
@@ -1744,43 +1420,73 @@
           <a:lstStyle/>
           <a:p>
             <a:r>
-              <a:t>TEXTO COMPLETO DE LA LÁMINA (se proyecta resumido):</a:t>
+              <a:t>DESARROLLO (para explicarlo, no se proyecta):</a:t>
             </a:r>
           </a:p>
           <a:p/>
           <a:p>
             <a:r>
-              <a:t>Se abre la ÚNICA caja del Context de la Clase 1: los actores y los externos siguen ahí, fuera del sistema.</a:t>
+              <a:t>CloudLite Turnos, el sistema de agendamiento de la barberia, empieza con tres contenedores: una aplicacion web que corre en el navegador del cliente, una API que atiende peticiones HTTP con cuerpo en formato JSON</a:t>
             </a:r>
           </a:p>
           <a:p/>
           <a:p>
             <a:r>
-              <a:t>Tres datos por caja, obligatorios: nombre · tecnología · responsabilidad en una frase.</a:t>
+              <a:t>Y una base de datos relacional donde viven turnos, clientes y horarios.</a:t>
             </a:r>
           </a:p>
           <a:p/>
           <a:p>
             <a:r>
-              <a:t>Lo que guarda datos se marca como almacén (`ContainerDb`), no como una caja más.</a:t>
+              <a:t>Ahora viene la parte interesante: la cuarta caja aparece solo si hay una razon.</a:t>
             </a:r>
           </a:p>
           <a:p/>
           <a:p>
             <a:r>
-              <a:t>Los nombres son idénticos a los del C4 Context: si allí decía «Pasarela de pagos», aquí no puede decir «Pagos».</a:t>
+              <a:t>El envio del correo de confirmacion tarda, con proveedores reales de correo, entre 300 y 2000 milisegundos, y puede fallar por causas ajenas al sistema.</a:t>
             </a:r>
           </a:p>
           <a:p/>
           <a:p>
             <a:r>
-              <a:t>Cada flecha lleva protocolo Y formato (`HTTPS/JSON`, `TCP/SQL`): una línea muda no cuenta.</a:t>
+              <a:t>Cuatro contenedores con una justificacion medible es mejor arquitectura que ocho por moda.</a:t>
             </a:r>
           </a:p>
           <a:p/>
           <a:p>
             <a:r>
-              <a:t>Entre 2 y 5 cajas. El número tiene que ser coherente con la decisión de la diapositiva anterior.</a:t>
+              <a:t>NOTAS:</a:t>
+            </a:r>
+          </a:p>
+          <a:p/>
+          <a:p>
+            <a:r>
+              <a:t>La flecha entre la web y la API dice «HTTPS/JSON, consulta disponibilidad y crea reservas»; la flecha entre la API y la base de datos dice «TCP, lee y escribe turnos».</a:t>
+            </a:r>
+          </a:p>
+          <a:p/>
+          <a:p>
+            <a:r>
+              <a:t>Con eso ya existe un diagrama valido y defendible.</a:t>
+            </a:r>
+          </a:p>
+          <a:p/>
+          <a:p>
+            <a:r>
+              <a:t>Si la API espera ese envio antes de responder, la reserva de un turno hereda esa latencia y ese riesgo.</a:t>
+            </a:r>
+          </a:p>
+          <a:p/>
+          <a:p>
+            <a:r>
+              <a:t>Esa es una razon legitima para separar: se agrega una cola de mensajes y un trabajador de notificaciones, la API escribe el turno, publica un mensaje y responde en decenas de milisegundos, y el trabajador envia el correo despues, con reintentos si falla.</a:t>
+            </a:r>
+          </a:p>
+          <a:p/>
+          <a:p>
+            <a:r>
+              <a:t>(No se proyecta) Primer ejemplo concreto, y conviene construirlo en el tablero en vivo.</a:t>
             </a:r>
           </a:p>
         </p:txBody>
@@ -1856,79 +1562,97 @@
           <a:p/>
           <a:p>
             <a:r>
-              <a:t>En este curso el diagrama se escribe como codigo Mermaid, y un visor Mermaid lo renderiza.</a:t>
+              <a:t>Si cada flecha del diagrama lleva protocolo y formato, el paso siguiente es decir QUE se negocia por esa flecha, y eso es un contrato.</a:t>
             </a:r>
           </a:p>
           <a:p/>
           <a:p>
             <a:r>
-              <a:t>La primera linea es exactamente C4Container, sin nada antes</a:t>
+              <a:t>Un contrato entre dos piezas de un sistema tiene cuatro datos y los cuatro se piden por separado: como se llama la interaccion en terminos de negocio</a:t>
             </a:r>
           </a:p>
           <a:p/>
           <a:p>
             <a:r>
-              <a:t>Los actores se declaran con Person y los sistemas ajenos con System_Ext, los dos por fuera del bloque del sistema.</a:t>
+              <a:t>Quien llama a quien, con que verbo y ruta —o con que nombre de evento, si es asincrono—, y cual es el error de negocio que puede devolver.</a:t>
             </a:r>
           </a:p>
           <a:p/>
           <a:p>
             <a:r>
-              <a:t>El sistema propio se abre con System_Boundary y una llave, y dentro van las cajas: Container para lo que ejecuta y ContainerDb para lo que almacena, cada una con identificador, nombre, tecnologia y responsabilidad.</a:t>
+              <a:t>El cuarto es el que se olvida y el que hace util al contrato.</a:t>
             </a:r>
           </a:p>
           <a:p/>
           <a:p>
             <a:r>
-              <a:t>La llave se cierra, y las relaciones van despues, con Rel y cuatro datos: origen, destino, que hace y con que protocolo y formato.</a:t>
+              <a:t>Un error de negocio es una respuesta prevista, que forma parte del diseno: la franja ya esta tomada, el cupo se agoto, el usuario no tiene permiso.</a:t>
             </a:r>
           </a:p>
           <a:p/>
           <a:p>
             <a:r>
-              <a:t>El identificador corto de cada caja —en el molde proyectado son spa, api, db y worker— es el que usan las relaciones; si no coincide, no dibuja la flecha y tampoco avisa con claridad.</a:t>
+              <a:t>La primera: al menos uno de los tres contratos tiene que ser un 409 de conflicto, y la razon es de dominio y no de capricho.</a:t>
             </a:r>
           </a:p>
           <a:p/>
           <a:p>
             <a:r>
-              <a:t>La regla operativa del dia se dice como consecuencia y no como consejo: se pega el codigo, se mira renderizado, y solo entonces se envia.</a:t>
+              <a:t>El 409 es la respuesta que dice «tu peticion es valida, pero el estado actual del sistema no la admite», y en cualquier dominio de reservas ese caso existe siempre: dos clientes quieren la misma franja.</a:t>
             </a:r>
           </a:p>
           <a:p/>
           <a:p>
             <a:r>
-              <a:t>(No se proyecta) Eso cambia lo que el docente tiene que ensenar, porque un boceto correcto escrito con la sintaxis equivocada no renderiza y entonces no hay diagrama que calificar.</a:t>
+              <a:t>Un estudiante que no encuentra ningun 409 en su sistema casi nunca tiene un dominio sin conflictos; lo que tiene es un diagrama que no modela ninguna regla de negocio.</a:t>
             </a:r>
           </a:p>
           <a:p/>
           <a:p>
             <a:r>
-              <a:t>(No se proyecta) Son cinco reglas de escritura y conviene recorrerlas sobre la diapositiva, linea por linea.</a:t>
+              <a:t>La segunda exigencia: los tres contratos no pueden ser entre el mismo par de cajas.</a:t>
             </a:r>
           </a:p>
           <a:p/>
           <a:p>
             <a:r>
-              <a:t>(No se proyecta) C4Context es el nivel de la Clase 1 y graph TD es otro tipo de diagrama, y cualquiera de los dos deja la respuesta en el nivel equivocado.</a:t>
+              <a:t>Y si el contrato es con la base de datos, en la columna del verbo va la sentencia (INSERT, SELECT) y no una ruta REST</a:t>
             </a:r>
           </a:p>
           <a:p/>
           <a:p>
             <a:r>
-              <a:t>(No se proyecta) Vale la pena decir en voz alta que aqui el uso de una IA es legitimo y ademas recomendado: pasar un boceto a codigo Mermaid es justo la tarea mecanica en la que ayuda sin sustituir el criterio.</a:t>
+              <a:t>Porque la base no expone rutas; ponerle POST /turnos a la base de datos es el error que delata que se lleno la tabla por analogia y no leyendo el propio diagrama.</a:t>
             </a:r>
           </a:p>
           <a:p/>
           <a:p>
             <a:r>
-              <a:t>(No se proyecta) Lo que NO delega el estudiante es la revision, y hay tres cosas que tiene que verificar el mismo antes de enviar, porque son las que la IA equivoca con frecuencia: que la primera linea sea C4Container, que la base de datos haya quedado como ContainerDb y no como Container, y que ninguna relacion haya perdido la mitad de su etiqueta.</a:t>
+              <a:t>(No se proyecta) Un 500 no es un error de negocio, es una falla del sistema; nadie lo disena, y por eso poner 500 en esa columna es la senal de que el estudiante no distinguio las dos cosas.</a:t>
             </a:r>
           </a:p>
           <a:p/>
           <a:p>
             <a:r>
-              <a:t>(No se proyecta) Un codigo que no renderiza vale cero, y es el unico punto del taller donde el estudiante puede comprobar su propia nota antes de entregar.</a:t>
+              <a:t>(No se proyecta) La diapositiva proyecta los tres contratos resueltos sobre CloudLite Turnos y conviene recorrerlos leyendo la cuarta columna en voz alta, porque es lo que hay que replicar.</a:t>
+            </a:r>
+          </a:p>
+          <a:p/>
+          <a:p>
+            <a:r>
+              <a:t>(No se proyecta) Dos exigencias mas, que valen puntos y se pierden sin darse cuenta.</a:t>
+            </a:r>
+          </a:p>
+          <a:p/>
+          <a:p>
+            <a:r>
+              <a:t>(No se proyecta) Conviene tambien tener a mano la diferencia con sus vecinos, porque se confunden: 400 es que la peticion esta mal formada, 401 que no se sabe quien eres, 403 que se sabe y no te corresponde, 404 que no existe, 422 que esta bien formada pero sus datos no pasan una validacion, y 409 que choca con el estado actual.</a:t>
+            </a:r>
+          </a:p>
+          <a:p/>
+          <a:p>
+            <a:r>
+              <a:t>(No se proyecta) Tres filas que digan «App web → API» describen un solo canal contado tres veces, y lo que se esta evaluando es si el estudiante entendio que su sistema tiene varias fronteras.</a:t>
             </a:r>
           </a:p>
         </p:txBody>
@@ -2004,67 +1728,37 @@
           <a:p/>
           <a:p>
             <a:r>
-              <a:t>CloudLite Turnos, el sistema de agendamiento de la barberia, empieza con tres contenedores: una aplicacion web que corre en el navegador del cliente, una API que atiende peticiones HTTP con cuerpo en formato JSON</a:t>
+              <a:t>El segundo bloque de contenido es el mas importante del dia: que se paga al distribuir.</a:t>
             </a:r>
           </a:p>
           <a:p/>
           <a:p>
             <a:r>
-              <a:t>Y una base de datos relacional donde viven turnos, clientes y horarios.</a:t>
+              <a:t>Una llamada a una funcion dentro del mismo proceso cuesta del orden de nanosegundos y no puede fallar por causas de red.</a:t>
             </a:r>
           </a:p>
           <a:p/>
           <a:p>
             <a:r>
-              <a:t>Ahora viene la parte interesante: la cuarta caja aparece solo si hay una razon.</a:t>
+              <a:t>La misma llamada convertida en peticion HTTP entre dos contenedores de la misma maquina o del mismo centro de datos cuesta tipicamente entre 1 y 5 milisegundos, y entre regiones geograficas distintas puede subir a 50 o 200 milisegundos.</a:t>
             </a:r>
           </a:p>
           <a:p/>
           <a:p>
             <a:r>
-              <a:t>El envio del correo de confirmacion tarda, con proveedores reales de correo, entre 300 y 2000 milisegundos, y puede fallar por causas ajenas al sistema.</a:t>
+              <a:t>Es decir, convertir una llamada local en remota empeora el costo en varios ordenes de magnitud, y a eso se suma que ahora la llamada puede perderse, llegar duplicada o tardar indefinidamente.</a:t>
             </a:r>
           </a:p>
           <a:p/>
           <a:p>
             <a:r>
-              <a:t>Cuatro contenedores con una justificacion medible es mejor arquitectura que ocho por moda.</a:t>
+              <a:t>Ese calculo es exacto y no una convencion, y es el argumento mas contundente contra multiplicar servicios sin necesidad.</a:t>
             </a:r>
           </a:p>
           <a:p/>
           <a:p>
             <a:r>
-              <a:t>NOTAS:</a:t>
-            </a:r>
-          </a:p>
-          <a:p/>
-          <a:p>
-            <a:r>
-              <a:t>La flecha entre la web y la API dice «HTTPS/JSON, consulta disponibilidad y crea reservas»; la flecha entre la API y la base de datos dice «TCP, lee y escribe turnos».</a:t>
-            </a:r>
-          </a:p>
-          <a:p/>
-          <a:p>
-            <a:r>
-              <a:t>Con eso ya existe un diagrama valido y defendible.</a:t>
-            </a:r>
-          </a:p>
-          <a:p/>
-          <a:p>
-            <a:r>
-              <a:t>Si la API espera ese envio antes de responder, la reserva de un turno hereda esa latencia y ese riesgo.</a:t>
-            </a:r>
-          </a:p>
-          <a:p/>
-          <a:p>
-            <a:r>
-              <a:t>Esa es una razon legitima para separar: se agrega una cola de mensajes y un trabajador de notificaciones, la API escribe el turno, publica un mensaje y responde en decenas de milisegundos, y el trabajador envia el correo despues, con reintentos si falla.</a:t>
-            </a:r>
-          </a:p>
-          <a:p/>
-          <a:p>
-            <a:r>
-              <a:t>(No se proyecta) Primer ejemplo concreto, y conviene construirlo en el tablero en vivo.</a:t>
+              <a:t>(No se proyecta) Hay una aritmetica que conviene mostrar porque impresiona con razon: si una peticion del usuario atraviesa en cadena cinco servicios y cada uno esta disponible el 99,9 % del tiempo, la disponibilidad del recorrido completo es 0,999 elevado a la quinta potencia, alrededor del 99,5 %, lo que pasa de unos 43 minutos de indisponibilidad al mes a mas de tres horas.</a:t>
             </a:r>
           </a:p>
         </p:txBody>
@@ -2140,97 +1834,49 @@
           <a:p/>
           <a:p>
             <a:r>
-              <a:t>Si cada flecha del diagrama lleva protocolo y formato, el paso siguiente es decir QUE se negocia por esa flecha, y eso es un contrato.</a:t>
+              <a:t>Un timeout es el tiempo maximo que un servicio espera respuesta antes de darse por vencido; sin timeout explicito, un servicio lento no falla sino que deja colgado a quien lo llamo, y el bloqueo se propaga hacia arriba hasta tumbar el sistema completo.</a:t>
             </a:r>
           </a:p>
           <a:p/>
           <a:p>
             <a:r>
-              <a:t>Un contrato entre dos piezas de un sistema tiene cuatro datos y los cuatro se piden por separado: como se llama la interaccion en terminos de negocio</a:t>
+              <a:t>Los valores tipicos para llamadas internas estan entre 2 y 5 segundos, y son convencion, no ley.</a:t>
             </a:r>
           </a:p>
           <a:p/>
           <a:p>
             <a:r>
-              <a:t>Quien llama a quien, con que verbo y ruta —o con que nombre de evento, si es asincrono—, y cual es el error de negocio que puede devolver.</a:t>
+              <a:t>Un reintento es volver a intentar la llamada fallida, y trae una trampa: si todos los clientes reintentan de inmediato contra un servicio ya saturado, lo hunden mas, por lo que se limita a dos o tres reintentos con espera creciente entre uno y otro.</a:t>
             </a:r>
           </a:p>
           <a:p/>
           <a:p>
             <a:r>
-              <a:t>El cuarto es el que se olvida y el que hace util al contrato.</a:t>
+              <a:t>En CloudLite eso es literal: si el reintento de crear turno no es idempotente, el cliente termina con dos reservas para el mismo horario, y la solucion habitual es que la peticion lleve un identificador unico que el servidor reconozca como repetido.</a:t>
             </a:r>
           </a:p>
           <a:p/>
           <a:p>
             <a:r>
-              <a:t>Un error de negocio es una respuesta prevista, que forma parte del diseno: la franja ya esta tomada, el cupo se agoto, el usuario no tiene permiso.</a:t>
+              <a:t>El cuarto mecanismo es el interruptor de circuito, o circuit breaker, que tras varias fallas consecutivas deja de intentar por un rato y responde de inmediato con un error controlado, para no gastar recursos golpeando algo que esta caido.</a:t>
             </a:r>
           </a:p>
           <a:p/>
           <a:p>
             <a:r>
-              <a:t>La primera: al menos uno de los tres contratos tiene que ser un 409 de conflicto, y la razon es de dominio y no de capricho.</a:t>
+              <a:t>NOTAS:</a:t>
             </a:r>
           </a:p>
           <a:p/>
           <a:p>
             <a:r>
-              <a:t>El 409 es la respuesta que dice «tu peticion es valida, pero el estado actual del sistema no la admite», y en cualquier dominio de reservas ese caso existe siempre: dos clientes quieren la misma franja.</a:t>
+              <a:t>De ahi salen cuatro mecanismos que el diagrama y la tabla deben poder mencionar.</a:t>
             </a:r>
           </a:p>
           <a:p/>
           <a:p>
             <a:r>
-              <a:t>Un estudiante que no encuentra ningun 409 en su sistema casi nunca tiene un dominio sin conflictos; lo que tiene es un diagrama que no modela ninguna regla de negocio.</a:t>
-            </a:r>
-          </a:p>
-          <a:p/>
-          <a:p>
-            <a:r>
-              <a:t>La segunda exigencia: los tres contratos no pueden ser entre el mismo par de cajas.</a:t>
-            </a:r>
-          </a:p>
-          <a:p/>
-          <a:p>
-            <a:r>
-              <a:t>Y si el contrato es con la base de datos, en la columna del verbo va la sentencia (INSERT, SELECT) y no una ruta REST</a:t>
-            </a:r>
-          </a:p>
-          <a:p/>
-          <a:p>
-            <a:r>
-              <a:t>Porque la base no expone rutas; ponerle POST /turnos a la base de datos es el error que delata que se lleno la tabla por analogia y no leyendo el propio diagrama.</a:t>
-            </a:r>
-          </a:p>
-          <a:p/>
-          <a:p>
-            <a:r>
-              <a:t>(No se proyecta) Un 500 no es un error de negocio, es una falla del sistema; nadie lo disena, y por eso poner 500 en esa columna es la senal de que el estudiante no distinguio las dos cosas.</a:t>
-            </a:r>
-          </a:p>
-          <a:p/>
-          <a:p>
-            <a:r>
-              <a:t>(No se proyecta) La diapositiva proyecta los tres contratos resueltos sobre CloudLite Turnos y conviene recorrerlos leyendo la cuarta columna en voz alta, porque es lo que hay que replicar.</a:t>
-            </a:r>
-          </a:p>
-          <a:p/>
-          <a:p>
-            <a:r>
-              <a:t>(No se proyecta) Dos exigencias mas, que valen puntos y se pierden sin darse cuenta.</a:t>
-            </a:r>
-          </a:p>
-          <a:p/>
-          <a:p>
-            <a:r>
-              <a:t>(No se proyecta) Conviene tambien tener a mano la diferencia con sus vecinos, porque se confunden: 400 es que la peticion esta mal formada, 401 que no se sabe quien eres, 403 que se sabe y no te corresponde, 404 que no existe, 422 que esta bien formada pero sus datos no pasan una validacion, y 409 que choca con el estado actual.</a:t>
-            </a:r>
-          </a:p>
-          <a:p/>
-          <a:p>
-            <a:r>
-              <a:t>(No se proyecta) Tres filas que digan «App web → API» describen un solo canal contado tres veces, y lo que se esta evaluando es si el estudiante entendio que su sistema tiene varias fronteras.</a:t>
+              <a:t>Los reintentos exigen idempotencia, que significa que ejecutar la misma operacion dos veces produzca el mismo resultado que ejecutarla una vez.</a:t>
             </a:r>
           </a:p>
         </p:txBody>
@@ -2306,37 +1952,73 @@
           <a:p/>
           <a:p>
             <a:r>
-              <a:t>El segundo bloque de contenido es el mas importante del dia: que se paga al distribuir.</a:t>
+              <a:t>El punto donde los proyectos academicos se rompen es el de los datos.</a:t>
             </a:r>
           </a:p>
           <a:p/>
           <a:p>
             <a:r>
-              <a:t>Una llamada a una funcion dentro del mismo proceso cuesta del orden de nanosegundos y no puede fallar por causas de red.</a:t>
+              <a:t>La regla ortodoxa de los microservicios dice que cada servicio es dueno exclusivo de su base de datos y que nadie mas la consulta directamente</a:t>
             </a:r>
           </a:p>
           <a:p/>
           <a:p>
             <a:r>
-              <a:t>La misma llamada convertida en peticion HTTP entre dos contenedores de la misma maquina o del mismo centro de datos cuesta tipicamente entre 1 y 5 milisegundos, y entre regiones geograficas distintas puede subir a 50 o 200 milisegundos.</a:t>
+              <a:t>Si dos servicios comparten tablas, estan acoplados y no pueden desplegarse por separado, lo que contradice la definicion.</a:t>
             </a:r>
           </a:p>
           <a:p/>
           <a:p>
             <a:r>
-              <a:t>Es decir, convertir una llamada local en remota empeora el costo en varios ordenes de magnitud, y a eso se suma que ahora la llamada puede perderse, llegar duplicada o tardar indefinidamente.</a:t>
+              <a:t>Pero cumplir esa regla tiene un precio real: una consulta que antes era un join deja de existir y hay que resolverla llamando a otro servicio</a:t>
             </a:r>
           </a:p>
           <a:p/>
           <a:p>
             <a:r>
-              <a:t>Ese calculo es exacto y no una convencion, y es el argumento mas contundente contra multiplicar servicios sin necesidad.</a:t>
+              <a:t>Y una operacion que abarca dos servicios ya no puede ser una transaccion unica sino una secuencia de pasos con compensaciones.</a:t>
             </a:r>
           </a:p>
           <a:p/>
           <a:p>
             <a:r>
-              <a:t>(No se proyecta) Hay una aritmetica que conviene mostrar porque impresiona con razon: si una peticion del usuario atraviesa en cadena cinco servicios y cada uno esta disponible el 99,9 % del tiempo, la disponibilidad del recorrido completo es 0,999 elevado a la quinta potencia, alrededor del 99,5 %, lo que pasa de unos 43 minutos de indisponibilidad al mes a mas de tres horas.</a:t>
+              <a:t>Fingir ortodoxia es peor que documentar una concesion.</a:t>
+            </a:r>
+          </a:p>
+          <a:p/>
+          <a:p>
+            <a:r>
+              <a:t>La regla de propiedad es: cada tabla tiene un solo servicio dueno, que es el unico que escribe en ella; los demas la consultan por su API.</a:t>
+            </a:r>
+          </a:p>
+          <a:p/>
+          <a:p>
+            <a:r>
+              <a:t>En CloudLite Turnos la tabla de turnos es de la API de turnos, y el worker de avisos no la toca: recibe por la cola el dato que necesita.</a:t>
+            </a:r>
+          </a:p>
+          <a:p/>
+          <a:p>
+            <a:r>
+              <a:t>Dos servicios que escriben en la misma tabla quedan acoplados aunque se desplieguen por separado, y ese es el error mas comun.</a:t>
+            </a:r>
+          </a:p>
+          <a:p/>
+          <a:p>
+            <a:r>
+              <a:t>NOTAS:</a:t>
+            </a:r>
+          </a:p>
+          <a:p/>
+          <a:p>
+            <a:r>
+              <a:t>Eso introduce consistencia eventual, es decir un lapso durante el cual dos partes del sistema tienen versiones distintas de la verdad, con consecuencias visibles para el usuario.</a:t>
+            </a:r>
+          </a:p>
+          <a:p/>
+          <a:p>
+            <a:r>
+              <a:t>(No se proyecta) La postura honesta para este curso es que un CloudLite con una base de datos compartida y propiedad de tablas claramente documentada resulta aceptable, siempre que el estudiante lo registre como un trade-off consciente en su informe y no lo presente como microservicios puros.</a:t>
             </a:r>
           </a:p>
         </p:txBody>
@@ -5818,118 +5500,14 @@
       </p:sp>
       <p:sp>
         <p:nvSpPr>
-          <p:cNvPr id="5" name="Rounded Rectangle 4"/>
-          <p:cNvSpPr/>
-          <p:nvPr/>
-        </p:nvSpPr>
-        <p:spPr>
-          <a:xfrm>
-            <a:off x="5797149" y="1573813"/>
-            <a:ext cx="6010497" cy="4057845"/>
-          </a:xfrm>
-          <a:prstGeom prst="roundRect">
-            <a:avLst>
-              <a:gd name="adj" fmla="val 4000"/>
-            </a:avLst>
-          </a:prstGeom>
-          <a:solidFill>
-            <a:srgbClr val="E8EEF4"/>
-          </a:solidFill>
-          <a:ln>
-            <a:noFill/>
-          </a:ln>
-        </p:spPr>
-        <p:style>
-          <a:lnRef idx="1">
-            <a:schemeClr val="accent1"/>
-          </a:lnRef>
-          <a:fillRef idx="3">
-            <a:schemeClr val="accent1"/>
-          </a:fillRef>
-          <a:effectRef idx="2">
-            <a:schemeClr val="accent1"/>
-          </a:effectRef>
-          <a:fontRef idx="minor">
-            <a:schemeClr val="lt1"/>
-          </a:fontRef>
-        </p:style>
-        <p:txBody>
-          <a:bodyPr rtlCol="0" anchor="ctr"/>
-          <a:lstStyle/>
-          <a:p>
-            <a:pPr algn="ctr"/>
-          </a:p>
-        </p:txBody>
-      </p:sp>
-      <p:pic>
-        <p:nvPicPr>
-          <p:cNvPr id="6" name="Picture 5" descr="architecture-diagram-sketch.jpg"/>
-          <p:cNvPicPr>
-            <a:picLocks noChangeAspect="1"/>
-          </p:cNvPicPr>
-          <p:nvPr/>
-        </p:nvPicPr>
-        <p:blipFill>
-          <a:blip r:embed="rId2"/>
-          <a:stretch>
-            <a:fillRect/>
-          </a:stretch>
-        </p:blipFill>
-        <p:spPr>
-          <a:xfrm>
-            <a:off x="5870301" y="1646965"/>
-            <a:ext cx="5864193" cy="3911541"/>
-          </a:xfrm>
-          <a:prstGeom prst="rect">
-            <a:avLst/>
-          </a:prstGeom>
-        </p:spPr>
-      </p:pic>
-      <p:sp>
-        <p:nvSpPr>
-          <p:cNvPr id="7" name="TextBox 6"/>
+          <p:cNvPr id="5" name="TextBox 4"/>
           <p:cNvSpPr txBox="1"/>
           <p:nvPr/>
         </p:nvSpPr>
         <p:spPr>
           <a:xfrm>
-            <a:off x="5870301" y="5961888"/>
-            <a:ext cx="5864193" cy="320040"/>
-          </a:xfrm>
-          <a:prstGeom prst="rect">
-            <a:avLst/>
-          </a:prstGeom>
-          <a:noFill/>
-        </p:spPr>
-        <p:txBody>
-          <a:bodyPr wrap="square">
-            <a:spAutoFit/>
-          </a:bodyPr>
-          <a:lstStyle/>
-          <a:p>
-            <a:pPr algn="ctr"/>
-            <a:r>
-              <a:rPr sz="1100" b="0" i="1">
-                <a:solidFill>
-                  <a:srgbClr val="666666"/>
-                </a:solidFill>
-                <a:latin typeface="Calibri"/>
-              </a:rPr>
-              <a:t>Foto: Tima Miroshnichenko · Pexels</a:t>
-            </a:r>
-          </a:p>
-        </p:txBody>
-      </p:sp>
-      <p:sp>
-        <p:nvSpPr>
-          <p:cNvPr id="8" name="TextBox 7"/>
-          <p:cNvSpPr txBox="1"/>
-          <p:nvPr/>
-        </p:nvSpPr>
-        <p:spPr>
-          <a:xfrm>
-            <a:off x="457200" y="1353312"/>
-            <a:ext cx="5093061" cy="5047488"/>
+            <a:off x="457200" y="1170432"/>
+            <a:ext cx="11277295" cy="5230368"/>
           </a:xfrm>
           <a:prstGeom prst="rect">
             <a:avLst/>
@@ -6077,11 +5655,61 @@
               <a:t> a los del C4 Context: si allí decía «Pasarela de pagos», aquí no puede decir «Pagos».</a:t>
             </a:r>
           </a:p>
-        </p:txBody>
-      </p:sp>
-      <p:sp>
-        <p:nvSpPr>
-          <p:cNvPr id="9" name="TextBox 8"/>
+          <a:p>
+            <a:pPr>
+              <a:spcAft>
+                <a:spcPts val="800"/>
+              </a:spcAft>
+            </a:pPr>
+            <a:r>
+              <a:rPr sz="2000" b="0" i="0">
+                <a:solidFill>
+                  <a:srgbClr val="333333"/>
+                </a:solidFill>
+                <a:latin typeface="Calibri"/>
+              </a:rPr>
+              <a:t>–   Cada flecha lleva </a:t>
+            </a:r>
+            <a:r>
+              <a:rPr sz="2000" b="1" i="0">
+                <a:solidFill>
+                  <a:srgbClr val="333333"/>
+                </a:solidFill>
+                <a:latin typeface="Calibri"/>
+              </a:rPr>
+              <a:t>protocolo Y formato</a:t>
+            </a:r>
+            <a:r>
+              <a:rPr sz="2000" b="0" i="0">
+                <a:solidFill>
+                  <a:srgbClr val="333333"/>
+                </a:solidFill>
+                <a:latin typeface="Calibri"/>
+              </a:rPr>
+              <a:t> («HTTPS/JSON», «TCP/SQL»): una línea muda no cuenta.</a:t>
+            </a:r>
+          </a:p>
+          <a:p>
+            <a:pPr>
+              <a:spcAft>
+                <a:spcPts val="800"/>
+              </a:spcAft>
+            </a:pPr>
+            <a:r>
+              <a:rPr sz="2000" b="0" i="0">
+                <a:solidFill>
+                  <a:srgbClr val="333333"/>
+                </a:solidFill>
+                <a:latin typeface="Calibri"/>
+              </a:rPr>
+              <a:t>–   Entre 2 y 5 cajas. El número tiene que ser coherente con la decisión de la diapositiva anterior.</a:t>
+            </a:r>
+          </a:p>
+        </p:txBody>
+      </p:sp>
+      <p:sp>
+        <p:nvSpPr>
+          <p:cNvPr id="6" name="TextBox 5"/>
           <p:cNvSpPr txBox="1"/>
           <p:nvPr/>
         </p:nvSpPr>
@@ -7070,118 +6698,14 @@
       </p:sp>
       <p:sp>
         <p:nvSpPr>
-          <p:cNvPr id="5" name="Rounded Rectangle 4"/>
-          <p:cNvSpPr/>
-          <p:nvPr/>
-        </p:nvSpPr>
-        <p:spPr>
-          <a:xfrm>
-            <a:off x="5797149" y="1573813"/>
-            <a:ext cx="6010497" cy="4057845"/>
-          </a:xfrm>
-          <a:prstGeom prst="roundRect">
-            <a:avLst>
-              <a:gd name="adj" fmla="val 4000"/>
-            </a:avLst>
-          </a:prstGeom>
-          <a:solidFill>
-            <a:srgbClr val="E8EEF4"/>
-          </a:solidFill>
-          <a:ln>
-            <a:noFill/>
-          </a:ln>
-        </p:spPr>
-        <p:style>
-          <a:lnRef idx="1">
-            <a:schemeClr val="accent1"/>
-          </a:lnRef>
-          <a:fillRef idx="3">
-            <a:schemeClr val="accent1"/>
-          </a:fillRef>
-          <a:effectRef idx="2">
-            <a:schemeClr val="accent1"/>
-          </a:effectRef>
-          <a:fontRef idx="minor">
-            <a:schemeClr val="lt1"/>
-          </a:fontRef>
-        </p:style>
-        <p:txBody>
-          <a:bodyPr rtlCol="0" anchor="ctr"/>
-          <a:lstStyle/>
-          <a:p>
-            <a:pPr algn="ctr"/>
-          </a:p>
-        </p:txBody>
-      </p:sp>
-      <p:pic>
-        <p:nvPicPr>
-          <p:cNvPr id="6" name="Picture 5" descr="diagram-on-screen-developer.jpg"/>
-          <p:cNvPicPr>
-            <a:picLocks noChangeAspect="1"/>
-          </p:cNvPicPr>
-          <p:nvPr/>
-        </p:nvPicPr>
-        <p:blipFill>
-          <a:blip r:embed="rId2"/>
-          <a:stretch>
-            <a:fillRect/>
-          </a:stretch>
-        </p:blipFill>
-        <p:spPr>
-          <a:xfrm>
-            <a:off x="5870301" y="1646965"/>
-            <a:ext cx="5864193" cy="3911541"/>
-          </a:xfrm>
-          <a:prstGeom prst="rect">
-            <a:avLst/>
-          </a:prstGeom>
-        </p:spPr>
-      </p:pic>
-      <p:sp>
-        <p:nvSpPr>
-          <p:cNvPr id="7" name="TextBox 6"/>
+          <p:cNvPr id="5" name="TextBox 4"/>
           <p:cNvSpPr txBox="1"/>
           <p:nvPr/>
         </p:nvSpPr>
         <p:spPr>
           <a:xfrm>
-            <a:off x="5870301" y="5961888"/>
-            <a:ext cx="5864193" cy="320040"/>
-          </a:xfrm>
-          <a:prstGeom prst="rect">
-            <a:avLst/>
-          </a:prstGeom>
-          <a:noFill/>
-        </p:spPr>
-        <p:txBody>
-          <a:bodyPr wrap="square">
-            <a:spAutoFit/>
-          </a:bodyPr>
-          <a:lstStyle/>
-          <a:p>
-            <a:pPr algn="ctr"/>
-            <a:r>
-              <a:rPr sz="1100" b="0" i="1">
-                <a:solidFill>
-                  <a:srgbClr val="666666"/>
-                </a:solidFill>
-                <a:latin typeface="Calibri"/>
-              </a:rPr>
-              <a:t>Foto: ThisIsEngineering · Pexels</a:t>
-            </a:r>
-          </a:p>
-        </p:txBody>
-      </p:sp>
-      <p:sp>
-        <p:nvSpPr>
-          <p:cNvPr id="8" name="TextBox 7"/>
-          <p:cNvSpPr txBox="1"/>
-          <p:nvPr/>
-        </p:nvSpPr>
-        <p:spPr>
-          <a:xfrm>
-            <a:off x="457200" y="1353312"/>
-            <a:ext cx="5093061" cy="5047488"/>
+            <a:off x="457200" y="1170432"/>
+            <a:ext cx="11277295" cy="5230368"/>
           </a:xfrm>
           <a:prstGeom prst="rect">
             <a:avLst/>
@@ -7245,7 +6769,7 @@
       </p:sp>
       <p:sp>
         <p:nvSpPr>
-          <p:cNvPr id="9" name="TextBox 8"/>
+          <p:cNvPr id="6" name="TextBox 5"/>
           <p:cNvSpPr txBox="1"/>
           <p:nvPr/>
         </p:nvSpPr>
@@ -13618,118 +13142,14 @@
       </p:sp>
       <p:sp>
         <p:nvSpPr>
-          <p:cNvPr id="5" name="Rounded Rectangle 4"/>
-          <p:cNvSpPr/>
-          <p:nvPr/>
-        </p:nvSpPr>
-        <p:spPr>
-          <a:xfrm>
-            <a:off x="5797149" y="1573813"/>
-            <a:ext cx="6010497" cy="4057845"/>
-          </a:xfrm>
-          <a:prstGeom prst="roundRect">
-            <a:avLst>
-              <a:gd name="adj" fmla="val 4000"/>
-            </a:avLst>
-          </a:prstGeom>
-          <a:solidFill>
-            <a:srgbClr val="E8EEF4"/>
-          </a:solidFill>
-          <a:ln>
-            <a:noFill/>
-          </a:ln>
-        </p:spPr>
-        <p:style>
-          <a:lnRef idx="1">
-            <a:schemeClr val="accent1"/>
-          </a:lnRef>
-          <a:fillRef idx="3">
-            <a:schemeClr val="accent1"/>
-          </a:fillRef>
-          <a:effectRef idx="2">
-            <a:schemeClr val="accent1"/>
-          </a:effectRef>
-          <a:fontRef idx="minor">
-            <a:schemeClr val="lt1"/>
-          </a:fontRef>
-        </p:style>
-        <p:txBody>
-          <a:bodyPr rtlCol="0" anchor="ctr"/>
-          <a:lstStyle/>
-          <a:p>
-            <a:pPr algn="ctr"/>
-          </a:p>
-        </p:txBody>
-      </p:sp>
-      <p:pic>
-        <p:nvPicPr>
-          <p:cNvPr id="6" name="Picture 5" descr="network-cables-server-failure.jpg"/>
-          <p:cNvPicPr>
-            <a:picLocks noChangeAspect="1"/>
-          </p:cNvPicPr>
-          <p:nvPr/>
-        </p:nvPicPr>
-        <p:blipFill>
-          <a:blip r:embed="rId2"/>
-          <a:stretch>
-            <a:fillRect/>
-          </a:stretch>
-        </p:blipFill>
-        <p:spPr>
-          <a:xfrm>
-            <a:off x="5870301" y="1646965"/>
-            <a:ext cx="5864193" cy="3911541"/>
-          </a:xfrm>
-          <a:prstGeom prst="rect">
-            <a:avLst/>
-          </a:prstGeom>
-        </p:spPr>
-      </p:pic>
-      <p:sp>
-        <p:nvSpPr>
-          <p:cNvPr id="7" name="TextBox 6"/>
+          <p:cNvPr id="5" name="TextBox 4"/>
           <p:cNvSpPr txBox="1"/>
           <p:nvPr/>
         </p:nvSpPr>
         <p:spPr>
           <a:xfrm>
-            <a:off x="5870301" y="5961888"/>
-            <a:ext cx="5864193" cy="320040"/>
-          </a:xfrm>
-          <a:prstGeom prst="rect">
-            <a:avLst/>
-          </a:prstGeom>
-          <a:noFill/>
-        </p:spPr>
-        <p:txBody>
-          <a:bodyPr wrap="square">
-            <a:spAutoFit/>
-          </a:bodyPr>
-          <a:lstStyle/>
-          <a:p>
-            <a:pPr algn="ctr"/>
-            <a:r>
-              <a:rPr sz="1100" b="0" i="1">
-                <a:solidFill>
-                  <a:srgbClr val="666666"/>
-                </a:solidFill>
-                <a:latin typeface="Calibri"/>
-              </a:rPr>
-              <a:t>Foto: Brett Sayles · Pexels</a:t>
-            </a:r>
-          </a:p>
-        </p:txBody>
-      </p:sp>
-      <p:sp>
-        <p:nvSpPr>
-          <p:cNvPr id="8" name="TextBox 7"/>
-          <p:cNvSpPr txBox="1"/>
-          <p:nvPr/>
-        </p:nvSpPr>
-        <p:spPr>
-          <a:xfrm>
-            <a:off x="457200" y="1353312"/>
-            <a:ext cx="5093061" cy="5047488"/>
+            <a:off x="457200" y="1170432"/>
+            <a:ext cx="11277295" cy="5230368"/>
           </a:xfrm>
           <a:prstGeom prst="rect">
             <a:avLst/>
@@ -13824,7 +13244,7 @@
                 </a:solidFill>
                 <a:latin typeface="Calibri"/>
               </a:rPr>
-              <a:t>.</a:t>
+              <a:t>. «Se cae todo» vale la mitad.</a:t>
             </a:r>
           </a:p>
           <a:p>
@@ -13858,7 +13278,7 @@
                 </a:solidFill>
                 <a:latin typeface="Calibri"/>
               </a:rPr>
-              <a:t> tiene una operación de punta a punta:</a:t>
+              <a:t> tiene una operación de punta a punta: cuéntalos sobre tu propio diagrama.</a:t>
             </a:r>
           </a:p>
           <a:p>
@@ -13895,11 +13315,61 @@
               <a:t> nómbralo y di qué pasa si el segundo falla.</a:t>
             </a:r>
           </a:p>
-        </p:txBody>
-      </p:sp>
-      <p:sp>
-        <p:nvSpPr>
-          <p:cNvPr id="9" name="TextBox 8"/>
+          <a:p>
+            <a:pPr>
+              <a:spcAft>
+                <a:spcPts val="800"/>
+              </a:spcAft>
+            </a:pPr>
+            <a:r>
+              <a:rPr sz="2000" b="0" i="0">
+                <a:solidFill>
+                  <a:srgbClr val="333333"/>
+                </a:solidFill>
+                <a:latin typeface="Calibri"/>
+              </a:rPr>
+              <a:t>–   Caja de herramientas para mitigarlos: </a:t>
+            </a:r>
+            <a:r>
+              <a:rPr sz="2000" b="1" i="0">
+                <a:solidFill>
+                  <a:srgbClr val="333333"/>
+                </a:solidFill>
+                <a:latin typeface="Calibri"/>
+              </a:rPr>
+              <a:t>timeout · reintento con espera creciente · idempotencia · circuit breaker</a:t>
+            </a:r>
+            <a:r>
+              <a:rPr sz="2000" b="0" i="0">
+                <a:solidFill>
+                  <a:srgbClr val="333333"/>
+                </a:solidFill>
+                <a:latin typeface="Calibri"/>
+              </a:rPr>
+              <a:t>.</a:t>
+            </a:r>
+          </a:p>
+          <a:p>
+            <a:pPr>
+              <a:spcAft>
+                <a:spcPts val="800"/>
+              </a:spcAft>
+            </a:pPr>
+            <a:r>
+              <a:rPr sz="2000" b="0" i="0">
+                <a:solidFill>
+                  <a:srgbClr val="333333"/>
+                </a:solidFill>
+                <a:latin typeface="Calibri"/>
+              </a:rPr>
+              <a:t>–   «Los microservicios son más complejos» no es un riesgo: no nombra caja, ni salto, ni dato.</a:t>
+            </a:r>
+          </a:p>
+        </p:txBody>
+      </p:sp>
+      <p:sp>
+        <p:nvSpPr>
+          <p:cNvPr id="6" name="TextBox 5"/>
           <p:cNvSpPr txBox="1"/>
           <p:nvPr/>
         </p:nvSpPr>
@@ -15211,118 +14681,14 @@
       </p:sp>
       <p:sp>
         <p:nvSpPr>
-          <p:cNvPr id="5" name="Rounded Rectangle 4"/>
-          <p:cNvSpPr/>
-          <p:nvPr/>
-        </p:nvSpPr>
-        <p:spPr>
-          <a:xfrm>
-            <a:off x="5797149" y="1573813"/>
-            <a:ext cx="6010497" cy="4057845"/>
-          </a:xfrm>
-          <a:prstGeom prst="roundRect">
-            <a:avLst>
-              <a:gd name="adj" fmla="val 4000"/>
-            </a:avLst>
-          </a:prstGeom>
-          <a:solidFill>
-            <a:srgbClr val="E8EEF4"/>
-          </a:solidFill>
-          <a:ln>
-            <a:noFill/>
-          </a:ln>
-        </p:spPr>
-        <p:style>
-          <a:lnRef idx="1">
-            <a:schemeClr val="accent1"/>
-          </a:lnRef>
-          <a:fillRef idx="3">
-            <a:schemeClr val="accent1"/>
-          </a:fillRef>
-          <a:effectRef idx="2">
-            <a:schemeClr val="accent1"/>
-          </a:effectRef>
-          <a:fontRef idx="minor">
-            <a:schemeClr val="lt1"/>
-          </a:fontRef>
-        </p:style>
-        <p:txBody>
-          <a:bodyPr rtlCol="0" anchor="ctr"/>
-          <a:lstStyle/>
-          <a:p>
-            <a:pPr algn="ctr"/>
-          </a:p>
-        </p:txBody>
-      </p:sp>
-      <p:pic>
-        <p:nvPicPr>
-          <p:cNvPr id="6" name="Picture 5" descr="students-learning-laptops-classroom.jpg"/>
-          <p:cNvPicPr>
-            <a:picLocks noChangeAspect="1"/>
-          </p:cNvPicPr>
-          <p:nvPr/>
-        </p:nvPicPr>
-        <p:blipFill>
-          <a:blip r:embed="rId2"/>
-          <a:stretch>
-            <a:fillRect/>
-          </a:stretch>
-        </p:blipFill>
-        <p:spPr>
-          <a:xfrm>
-            <a:off x="5870301" y="1646965"/>
-            <a:ext cx="5864193" cy="3911541"/>
-          </a:xfrm>
-          <a:prstGeom prst="rect">
-            <a:avLst/>
-          </a:prstGeom>
-        </p:spPr>
-      </p:pic>
-      <p:sp>
-        <p:nvSpPr>
-          <p:cNvPr id="7" name="TextBox 6"/>
+          <p:cNvPr id="5" name="TextBox 4"/>
           <p:cNvSpPr txBox="1"/>
           <p:nvPr/>
         </p:nvSpPr>
         <p:spPr>
           <a:xfrm>
-            <a:off x="5870301" y="5961888"/>
-            <a:ext cx="5864193" cy="320040"/>
-          </a:xfrm>
-          <a:prstGeom prst="rect">
-            <a:avLst/>
-          </a:prstGeom>
-          <a:noFill/>
-        </p:spPr>
-        <p:txBody>
-          <a:bodyPr wrap="square">
-            <a:spAutoFit/>
-          </a:bodyPr>
-          <a:lstStyle/>
-          <a:p>
-            <a:pPr algn="ctr"/>
-            <a:r>
-              <a:rPr sz="1100" b="0" i="1">
-                <a:solidFill>
-                  <a:srgbClr val="666666"/>
-                </a:solidFill>
-                <a:latin typeface="Calibri"/>
-              </a:rPr>
-              <a:t>Foto: Mikhail Nilov · Pexels</a:t>
-            </a:r>
-          </a:p>
-        </p:txBody>
-      </p:sp>
-      <p:sp>
-        <p:nvSpPr>
-          <p:cNvPr id="8" name="TextBox 7"/>
-          <p:cNvSpPr txBox="1"/>
-          <p:nvPr/>
-        </p:nvSpPr>
-        <p:spPr>
-          <a:xfrm>
-            <a:off x="457200" y="1353312"/>
-            <a:ext cx="5093061" cy="5047488"/>
+            <a:off x="457200" y="1170432"/>
+            <a:ext cx="11277295" cy="5230368"/>
           </a:xfrm>
           <a:prstGeom prst="rect">
             <a:avLst/>
@@ -15440,7 +14806,7 @@
       </p:sp>
       <p:sp>
         <p:nvSpPr>
-          <p:cNvPr id="9" name="TextBox 8"/>
+          <p:cNvPr id="6" name="TextBox 5"/>
           <p:cNvSpPr txBox="1"/>
           <p:nvPr/>
         </p:nvSpPr>
@@ -16717,118 +16083,14 @@
       </p:sp>
       <p:sp>
         <p:nvSpPr>
-          <p:cNvPr id="5" name="Rounded Rectangle 4"/>
-          <p:cNvSpPr/>
-          <p:nvPr/>
-        </p:nvSpPr>
-        <p:spPr>
-          <a:xfrm>
-            <a:off x="5797149" y="1573813"/>
-            <a:ext cx="6010497" cy="4057845"/>
-          </a:xfrm>
-          <a:prstGeom prst="roundRect">
-            <a:avLst>
-              <a:gd name="adj" fmla="val 4000"/>
-            </a:avLst>
-          </a:prstGeom>
-          <a:solidFill>
-            <a:srgbClr val="E8EEF4"/>
-          </a:solidFill>
-          <a:ln>
-            <a:noFill/>
-          </a:ln>
-        </p:spPr>
-        <p:style>
-          <a:lnRef idx="1">
-            <a:schemeClr val="accent1"/>
-          </a:lnRef>
-          <a:fillRef idx="3">
-            <a:schemeClr val="accent1"/>
-          </a:fillRef>
-          <a:effectRef idx="2">
-            <a:schemeClr val="accent1"/>
-          </a:effectRef>
-          <a:fontRef idx="minor">
-            <a:schemeClr val="lt1"/>
-          </a:fontRef>
-        </p:style>
-        <p:txBody>
-          <a:bodyPr rtlCol="0" anchor="ctr"/>
-          <a:lstStyle/>
-          <a:p>
-            <a:pPr algn="ctr"/>
-          </a:p>
-        </p:txBody>
-      </p:sp>
-      <p:pic>
-        <p:nvPicPr>
-          <p:cNvPr id="6" name="Picture 5" descr="building-blocks-modular.jpg"/>
-          <p:cNvPicPr>
-            <a:picLocks noChangeAspect="1"/>
-          </p:cNvPicPr>
-          <p:nvPr/>
-        </p:nvPicPr>
-        <p:blipFill>
-          <a:blip r:embed="rId2"/>
-          <a:stretch>
-            <a:fillRect/>
-          </a:stretch>
-        </p:blipFill>
-        <p:spPr>
-          <a:xfrm>
-            <a:off x="5870301" y="1646965"/>
-            <a:ext cx="5864193" cy="3911541"/>
-          </a:xfrm>
-          <a:prstGeom prst="rect">
-            <a:avLst/>
-          </a:prstGeom>
-        </p:spPr>
-      </p:pic>
-      <p:sp>
-        <p:nvSpPr>
-          <p:cNvPr id="7" name="TextBox 6"/>
+          <p:cNvPr id="5" name="TextBox 4"/>
           <p:cNvSpPr txBox="1"/>
           <p:nvPr/>
         </p:nvSpPr>
         <p:spPr>
           <a:xfrm>
-            <a:off x="5870301" y="5961888"/>
-            <a:ext cx="5864193" cy="320040"/>
-          </a:xfrm>
-          <a:prstGeom prst="rect">
-            <a:avLst/>
-          </a:prstGeom>
-          <a:noFill/>
-        </p:spPr>
-        <p:txBody>
-          <a:bodyPr wrap="square">
-            <a:spAutoFit/>
-          </a:bodyPr>
-          <a:lstStyle/>
-          <a:p>
-            <a:pPr algn="ctr"/>
-            <a:r>
-              <a:rPr sz="1100" b="0" i="1">
-                <a:solidFill>
-                  <a:srgbClr val="666666"/>
-                </a:solidFill>
-                <a:latin typeface="Calibri"/>
-              </a:rPr>
-              <a:t>Foto: Jan van der Wolf · Pexels</a:t>
-            </a:r>
-          </a:p>
-        </p:txBody>
-      </p:sp>
-      <p:sp>
-        <p:nvSpPr>
-          <p:cNvPr id="8" name="TextBox 7"/>
-          <p:cNvSpPr txBox="1"/>
-          <p:nvPr/>
-        </p:nvSpPr>
-        <p:spPr>
-          <a:xfrm>
-            <a:off x="457200" y="1353312"/>
-            <a:ext cx="5093061" cy="5047488"/>
+            <a:off x="457200" y="1170432"/>
+            <a:ext cx="11277295" cy="5230368"/>
           </a:xfrm>
           <a:prstGeom prst="rect">
             <a:avLst/>
@@ -16940,11 +16202,79 @@
               <a:t> y se elige UNA: «un poco de los dos» no es una decisión.</a:t>
             </a:r>
           </a:p>
-        </p:txBody>
-      </p:sp>
-      <p:sp>
-        <p:nvSpPr>
-          <p:cNvPr id="9" name="TextBox 8"/>
+          <a:p>
+            <a:pPr>
+              <a:spcAft>
+                <a:spcPts val="800"/>
+              </a:spcAft>
+            </a:pPr>
+            <a:r>
+              <a:rPr sz="2000" b="0" i="0">
+                <a:solidFill>
+                  <a:srgbClr val="333333"/>
+                </a:solidFill>
+                <a:latin typeface="Calibri"/>
+              </a:rPr>
+              <a:t>–   Se sostiene con </a:t>
+            </a:r>
+            <a:r>
+              <a:rPr sz="2000" b="1" i="0">
+                <a:solidFill>
+                  <a:srgbClr val="333333"/>
+                </a:solidFill>
+                <a:latin typeface="Calibri"/>
+              </a:rPr>
+              <a:t>dos</a:t>
+            </a:r>
+            <a:r>
+              <a:rPr sz="2000" b="0" i="0">
+                <a:solidFill>
+                  <a:srgbClr val="333333"/>
+                </a:solidFill>
+                <a:latin typeface="Calibri"/>
+              </a:rPr>
+              <a:t> criterios: tamaño del equipo (con número y plazo) y acoplamiento (qué partes cambian juntas).</a:t>
+            </a:r>
+          </a:p>
+          <a:p>
+            <a:pPr>
+              <a:spcAft>
+                <a:spcPts val="800"/>
+              </a:spcAft>
+            </a:pPr>
+            <a:r>
+              <a:rPr sz="2000" b="0" i="0">
+                <a:solidFill>
+                  <a:srgbClr val="333333"/>
+                </a:solidFill>
+                <a:latin typeface="Calibri"/>
+              </a:rPr>
+              <a:t>–   Y con lo que se gana </a:t>
+            </a:r>
+            <a:r>
+              <a:rPr sz="2000" b="1" i="0">
+                <a:solidFill>
+                  <a:srgbClr val="333333"/>
+                </a:solidFill>
+                <a:latin typeface="Calibri"/>
+              </a:rPr>
+              <a:t>y</a:t>
+            </a:r>
+            <a:r>
+              <a:rPr sz="2000" b="0" i="0">
+                <a:solidFill>
+                  <a:srgbClr val="333333"/>
+                </a:solidFill>
+                <a:latin typeface="Calibri"/>
+              </a:rPr>
+              <a:t> lo que se pierde: sin la segunda mitad, no hubo decisión.</a:t>
+            </a:r>
+          </a:p>
+        </p:txBody>
+      </p:sp>
+      <p:sp>
+        <p:nvSpPr>
+          <p:cNvPr id="6" name="TextBox 5"/>
           <p:cNvSpPr txBox="1"/>
           <p:nvPr/>
         </p:nvSpPr>

--- a/Arquitectura de Sistemas Computacionales/Clases/Clase 4 - Microservicios y arquitecturas distribuidas/Presentacion.pptx
+++ b/Arquitectura de Sistemas Computacionales/Clases/Clase 4 - Microservicios y arquitecturas distribuidas/Presentacion.pptx
@@ -654,6 +654,266 @@
           <a:p/>
           <a:p>
             <a:r>
+              <a:t>Un timeout es el tiempo maximo que un servicio espera respuesta antes de darse por vencido; sin timeout explicito, un servicio lento no falla sino que deja colgado a quien lo llamo, y el bloqueo se propaga hacia arriba hasta tumbar el sistema completo.</a:t>
+            </a:r>
+          </a:p>
+          <a:p/>
+          <a:p>
+            <a:r>
+              <a:t>Los valores tipicos para llamadas internas estan entre 2 y 5 segundos, y son convencion, no ley.</a:t>
+            </a:r>
+          </a:p>
+          <a:p/>
+          <a:p>
+            <a:r>
+              <a:t>Un reintento es volver a intentar la llamada fallida, y trae una trampa: si todos los clientes reintentan de inmediato contra un servicio ya saturado, lo hunden mas, por lo que se limita a dos o tres reintentos con espera creciente entre uno y otro.</a:t>
+            </a:r>
+          </a:p>
+          <a:p/>
+          <a:p>
+            <a:r>
+              <a:t>En CloudLite eso es literal: si el reintento de crear turno no es idempotente, el cliente termina con dos reservas para el mismo horario, y la solucion habitual es que la peticion lleve un identificador unico que el servidor reconozca como repetido.</a:t>
+            </a:r>
+          </a:p>
+          <a:p/>
+          <a:p>
+            <a:r>
+              <a:t>El cuarto mecanismo es el interruptor de circuito, o circuit breaker, que tras varias fallas consecutivas deja de intentar por un rato y responde de inmediato con un error controlado, para no gastar recursos golpeando algo que esta caido.</a:t>
+            </a:r>
+          </a:p>
+          <a:p/>
+          <a:p>
+            <a:r>
+              <a:t>NOTAS:</a:t>
+            </a:r>
+          </a:p>
+          <a:p/>
+          <a:p>
+            <a:r>
+              <a:t>De ahi salen cuatro mecanismos que el diagrama y la tabla deben poder mencionar.</a:t>
+            </a:r>
+          </a:p>
+          <a:p/>
+          <a:p>
+            <a:r>
+              <a:t>Los reintentos exigen idempotencia, que significa que ejecutar la misma operacion dos veces produzca el mismo resultado que ejecutarla una vez.</a:t>
+            </a:r>
+          </a:p>
+        </p:txBody>
+      </p:sp>
+      <p:sp>
+        <p:nvSpPr>
+          <p:cNvPr id="4" name="Slide Number Placeholder 3"/>
+          <p:cNvSpPr>
+            <a:spLocks noGrp="1"/>
+          </p:cNvSpPr>
+          <p:nvPr>
+            <p:ph type="sldNum" idx="5" sz="quarter"/>
+          </p:nvPr>
+        </p:nvSpPr>
+        <p:spPr/>
+      </p:sp>
+    </p:spTree>
+  </p:cSld>
+  <p:clrMapOvr>
+    <a:masterClrMapping/>
+  </p:clrMapOvr>
+</p:notes>
+</file>
+
+<file path=ppt/notesSlides/notesSlide11.xml><?xml version="1.0" encoding="utf-8"?>
+<p:notes xmlns:a="http://schemas.openxmlformats.org/drawingml/2006/main" xmlns:p="http://schemas.openxmlformats.org/presentationml/2006/main" xmlns:r="http://schemas.openxmlformats.org/officeDocument/2006/relationships">
+  <p:cSld>
+    <p:spTree>
+      <p:nvGrpSpPr>
+        <p:cNvPr id="1" name=""/>
+        <p:cNvGrpSpPr/>
+        <p:nvPr/>
+      </p:nvGrpSpPr>
+      <p:grpSpPr>
+        <a:xfrm>
+          <a:off x="0" y="0"/>
+          <a:ext cx="0" cy="0"/>
+          <a:chOff x="0" y="0"/>
+          <a:chExt cx="0" cy="0"/>
+        </a:xfrm>
+      </p:grpSpPr>
+      <p:sp>
+        <p:nvSpPr>
+          <p:cNvPr id="2" name="Slide Image Placeholder 1"/>
+          <p:cNvSpPr>
+            <a:spLocks noGrp="1"/>
+          </p:cNvSpPr>
+          <p:nvPr>
+            <p:ph type="sldImg" idx="2"/>
+          </p:nvPr>
+        </p:nvSpPr>
+        <p:spPr/>
+      </p:sp>
+      <p:sp>
+        <p:nvSpPr>
+          <p:cNvPr id="3" name="Notes Placeholder 2"/>
+          <p:cNvSpPr>
+            <a:spLocks noGrp="1"/>
+          </p:cNvSpPr>
+          <p:nvPr>
+            <p:ph type="body" idx="3" sz="quarter"/>
+          </p:nvPr>
+        </p:nvSpPr>
+        <p:spPr/>
+        <p:txBody>
+          <a:bodyPr/>
+          <a:lstStyle/>
+          <a:p>
+            <a:r>
+              <a:t>DESARROLLO (para explicarlo, no se proyecta):</a:t>
+            </a:r>
+          </a:p>
+          <a:p/>
+          <a:p>
+            <a:r>
+              <a:t>El punto donde los proyectos academicos se rompen es el de los datos.</a:t>
+            </a:r>
+          </a:p>
+          <a:p/>
+          <a:p>
+            <a:r>
+              <a:t>La regla ortodoxa de los microservicios dice que cada servicio es dueno exclusivo de su base de datos y que nadie mas la consulta directamente</a:t>
+            </a:r>
+          </a:p>
+          <a:p/>
+          <a:p>
+            <a:r>
+              <a:t>Si dos servicios comparten tablas, estan acoplados y no pueden desplegarse por separado, lo que contradice la definicion.</a:t>
+            </a:r>
+          </a:p>
+          <a:p/>
+          <a:p>
+            <a:r>
+              <a:t>Pero cumplir esa regla tiene un precio real: una consulta que antes era un join deja de existir y hay que resolverla llamando a otro servicio</a:t>
+            </a:r>
+          </a:p>
+          <a:p/>
+          <a:p>
+            <a:r>
+              <a:t>Y una operacion que abarca dos servicios ya no puede ser una transaccion unica sino una secuencia de pasos con compensaciones.</a:t>
+            </a:r>
+          </a:p>
+          <a:p/>
+          <a:p>
+            <a:r>
+              <a:t>Fingir ortodoxia es peor que documentar una concesion.</a:t>
+            </a:r>
+          </a:p>
+          <a:p/>
+          <a:p>
+            <a:r>
+              <a:t>La regla de propiedad es: cada tabla tiene un solo servicio dueno, que es el unico que escribe en ella; los demas la consultan por su API.</a:t>
+            </a:r>
+          </a:p>
+          <a:p/>
+          <a:p>
+            <a:r>
+              <a:t>En CloudLite Turnos la tabla de turnos es de la API de turnos, y el worker de avisos no la toca: recibe por la cola el dato que necesita.</a:t>
+            </a:r>
+          </a:p>
+          <a:p/>
+          <a:p>
+            <a:r>
+              <a:t>Dos servicios que escriben en la misma tabla quedan acoplados aunque se desplieguen por separado, y ese es el error mas comun.</a:t>
+            </a:r>
+          </a:p>
+          <a:p/>
+          <a:p>
+            <a:r>
+              <a:t>NOTAS:</a:t>
+            </a:r>
+          </a:p>
+          <a:p/>
+          <a:p>
+            <a:r>
+              <a:t>Eso introduce consistencia eventual, es decir un lapso durante el cual dos partes del sistema tienen versiones distintas de la verdad, con consecuencias visibles para el usuario.</a:t>
+            </a:r>
+          </a:p>
+          <a:p/>
+          <a:p>
+            <a:r>
+              <a:t>(No se proyecta) La postura honesta para este curso es que un CloudLite con una base de datos compartida y propiedad de tablas claramente documentada resulta aceptable, siempre que el estudiante lo registre como un trade-off consciente en su informe y no lo presente como microservicios puros.</a:t>
+            </a:r>
+          </a:p>
+        </p:txBody>
+      </p:sp>
+      <p:sp>
+        <p:nvSpPr>
+          <p:cNvPr id="4" name="Slide Number Placeholder 3"/>
+          <p:cNvSpPr>
+            <a:spLocks noGrp="1"/>
+          </p:cNvSpPr>
+          <p:nvPr>
+            <p:ph type="sldNum" idx="5" sz="quarter"/>
+          </p:nvPr>
+        </p:nvSpPr>
+        <p:spPr/>
+      </p:sp>
+    </p:spTree>
+  </p:cSld>
+  <p:clrMapOvr>
+    <a:masterClrMapping/>
+  </p:clrMapOvr>
+</p:notes>
+</file>
+
+<file path=ppt/notesSlides/notesSlide12.xml><?xml version="1.0" encoding="utf-8"?>
+<p:notes xmlns:a="http://schemas.openxmlformats.org/drawingml/2006/main" xmlns:p="http://schemas.openxmlformats.org/presentationml/2006/main" xmlns:r="http://schemas.openxmlformats.org/officeDocument/2006/relationships">
+  <p:cSld>
+    <p:spTree>
+      <p:nvGrpSpPr>
+        <p:cNvPr id="1" name=""/>
+        <p:cNvGrpSpPr/>
+        <p:nvPr/>
+      </p:nvGrpSpPr>
+      <p:grpSpPr>
+        <a:xfrm>
+          <a:off x="0" y="0"/>
+          <a:ext cx="0" cy="0"/>
+          <a:chOff x="0" y="0"/>
+          <a:chExt cx="0" cy="0"/>
+        </a:xfrm>
+      </p:grpSpPr>
+      <p:sp>
+        <p:nvSpPr>
+          <p:cNvPr id="2" name="Slide Image Placeholder 1"/>
+          <p:cNvSpPr>
+            <a:spLocks noGrp="1"/>
+          </p:cNvSpPr>
+          <p:nvPr>
+            <p:ph type="sldImg" idx="2"/>
+          </p:nvPr>
+        </p:nvSpPr>
+        <p:spPr/>
+      </p:sp>
+      <p:sp>
+        <p:nvSpPr>
+          <p:cNvPr id="3" name="Notes Placeholder 2"/>
+          <p:cNvSpPr>
+            <a:spLocks noGrp="1"/>
+          </p:cNvSpPr>
+          <p:nvPr>
+            <p:ph type="body" idx="3" sz="quarter"/>
+          </p:nvPr>
+        </p:nvSpPr>
+        <p:spPr/>
+        <p:txBody>
+          <a:bodyPr/>
+          <a:lstStyle/>
+          <a:p>
+            <a:r>
+              <a:t>DESARROLLO (para explicarlo, no se proyecta):</a:t>
+            </a:r>
+          </a:p>
+          <a:p/>
+          <a:p>
+            <a:r>
               <a:t>Los riesgos de distribucion no son una lista libre: son TRES riesgos, cada uno responde una pregunta distinta, y estan elegidos para que ninguno se pueda contestar sin mirar el propio diagrama.</a:t>
             </a:r>
           </a:p>
@@ -805,6 +1065,112 @@
           <a:p>
             <a:r>
               <a:t>(No se proyecta) Devolverle el diagrama es mas util que darle un ejemplo.</a:t>
+            </a:r>
+          </a:p>
+        </p:txBody>
+      </p:sp>
+      <p:sp>
+        <p:nvSpPr>
+          <p:cNvPr id="4" name="Slide Number Placeholder 3"/>
+          <p:cNvSpPr>
+            <a:spLocks noGrp="1"/>
+          </p:cNvSpPr>
+          <p:nvPr>
+            <p:ph type="sldNum" idx="5" sz="quarter"/>
+          </p:nvPr>
+        </p:nvSpPr>
+        <p:spPr/>
+      </p:sp>
+    </p:spTree>
+  </p:cSld>
+  <p:clrMapOvr>
+    <a:masterClrMapping/>
+  </p:clrMapOvr>
+</p:notes>
+</file>
+
+<file path=ppt/notesSlides/notesSlide13.xml><?xml version="1.0" encoding="utf-8"?>
+<p:notes xmlns:a="http://schemas.openxmlformats.org/drawingml/2006/main" xmlns:p="http://schemas.openxmlformats.org/presentationml/2006/main" xmlns:r="http://schemas.openxmlformats.org/officeDocument/2006/relationships">
+  <p:cSld>
+    <p:spTree>
+      <p:nvGrpSpPr>
+        <p:cNvPr id="1" name=""/>
+        <p:cNvGrpSpPr/>
+        <p:nvPr/>
+      </p:nvGrpSpPr>
+      <p:grpSpPr>
+        <a:xfrm>
+          <a:off x="0" y="0"/>
+          <a:ext cx="0" cy="0"/>
+          <a:chOff x="0" y="0"/>
+          <a:chExt cx="0" cy="0"/>
+        </a:xfrm>
+      </p:grpSpPr>
+      <p:sp>
+        <p:nvSpPr>
+          <p:cNvPr id="2" name="Slide Image Placeholder 1"/>
+          <p:cNvSpPr>
+            <a:spLocks noGrp="1"/>
+          </p:cNvSpPr>
+          <p:nvPr>
+            <p:ph type="sldImg" idx="2"/>
+          </p:nvPr>
+        </p:nvSpPr>
+        <p:spPr/>
+      </p:sp>
+      <p:sp>
+        <p:nvSpPr>
+          <p:cNvPr id="3" name="Notes Placeholder 2"/>
+          <p:cNvSpPr>
+            <a:spLocks noGrp="1"/>
+          </p:cNvSpPr>
+          <p:nvPr>
+            <p:ph type="body" idx="3" sz="quarter"/>
+          </p:nvPr>
+        </p:nvSpPr>
+        <p:spPr/>
+        <p:txBody>
+          <a:bodyPr/>
+          <a:lstStyle/>
+          <a:p>
+            <a:r>
+              <a:t>TEXTO COMPLETO DE LA LÁMINA (se proyecta resumido):</a:t>
+            </a:r>
+          </a:p>
+          <a:p/>
+          <a:p>
+            <a:r>
+              <a:t>Cada flecha del diagrama es una llamada de red: puede tardar, perderse o llegar dos veces.</a:t>
+            </a:r>
+          </a:p>
+          <a:p/>
+          <a:p>
+            <a:r>
+              <a:t>Riesgo 1 · qué se cae: nombra una caja, y di qué deja de funcionar y qué sigue funcionando. «Se cae todo» vale la mitad.</a:t>
+            </a:r>
+          </a:p>
+          <a:p/>
+          <a:p>
+            <a:r>
+              <a:t>Riesgo 2 · cuántos saltos de red tiene una operación de punta a punta: cuéntalos sobre tu propio diagrama.</a:t>
+            </a:r>
+          </a:p>
+          <a:p/>
+          <a:p>
+            <a:r>
+              <a:t>Riesgo 3 · un dato escrito en dos pasos: nómbralo y di qué pasa si el segundo falla.</a:t>
+            </a:r>
+          </a:p>
+          <a:p/>
+          <a:p>
+            <a:r>
+              <a:t>Caja de herramientas para mitigarlos: timeout · reintento con espera creciente · idempotencia · circuit breaker.</a:t>
+            </a:r>
+          </a:p>
+          <a:p/>
+          <a:p>
+            <a:r>
+              <a:t>«Los microservicios son más complejos» no es un riesgo: no nombra caja, ni salto, ni dato.</a:t>
             </a:r>
           </a:p>
         </p:txBody>
@@ -1106,103 +1472,43 @@
           <a:lstStyle/>
           <a:p>
             <a:r>
-              <a:t>DESARROLLO (para explicarlo, no se proyecta):</a:t>
+              <a:t>TEXTO COMPLETO DE LA LÁMINA (se proyecta resumido):</a:t>
             </a:r>
           </a:p>
           <a:p/>
           <a:p>
             <a:r>
-              <a:t>La primera: cada caja lleva TRES datos, no uno.</a:t>
+              <a:t>Monolito modular ≠ malo: a menudo mejor para equipos pequeños.</a:t>
             </a:r>
           </a:p>
           <a:p/>
           <a:p>
             <a:r>
-              <a:t>Una caja que dice solo «API» no es un contenedor descrito, es una etiqueta; con «API de turnos · Node.js · valida la franja y registra el turno» ya se puede discutir si esa frontera tiene sentido.</a:t>
+              <a:t>Microservicio: frontera de despliegue e independencia de datos (ideal).</a:t>
             </a:r>
           </a:p>
           <a:p/>
           <a:p>
             <a:r>
-              <a:t>La segunda: lo que guarda datos no es una caja mas.</a:t>
+              <a:t>Anti-patrón: 12 microservicios para 3 estudiantes = diagrama teatro.</a:t>
             </a:r>
           </a:p>
           <a:p/>
           <a:p>
             <a:r>
-              <a:t>En la notacion se marca como almacen —en el codigo, ContainerDb en lugar de Container— y esa distincion no es cosmetica: un almacen no se replica igual que un servicio, no se despliega igual y no falla igual, y todo eso se retoma en las Clases 7 y 13.</a:t>
+              <a:t>La decisión se escribe en una sola frase y se elige UNA: «un poco de los dos» no es una decisión.</a:t>
             </a:r>
           </a:p>
           <a:p/>
           <a:p>
             <a:r>
-              <a:t>La tercera: ninguna flecha queda muda, y media etiqueta tampoco alcanza.</a:t>
+              <a:t>Se sostiene con dos criterios: tamaño del equipo (con número y plazo) y acoplamiento (qué partes cambian juntas).</a:t>
             </a:r>
           </a:p>
           <a:p/>
           <a:p>
             <a:r>
-              <a:t>Cada flecha lleva protocolo Y formato: HTTPS/JSON, TCP/SQL.</a:t>
-            </a:r>
-          </a:p>
-          <a:p/>
-          <a:p>
-            <a:r>
-              <a:t>Si alli decia «Pasarela de pagos», aqui no puede decir «Pagos».</a:t>
-            </a:r>
-          </a:p>
-          <a:p/>
-          <a:p>
-            <a:r>
-              <a:t>Los actores y los sistemas externos del Context siguen existiendo hoy y siguen estando FUERA del recuadro del sistema: abrir la caja no elimina lo que la rodeaba.</a:t>
-            </a:r>
-          </a:p>
-          <a:p/>
-          <a:p>
-            <a:r>
-              <a:t>Un ejemplo de trazabilidad: si el Context muestra «Proveedor de correo» como System_Ext, en el Containers aparece con el mismo nombre, fuera del recuadro, y la flecha que llega a el sale del contenedor que envia los avisos.</a:t>
-            </a:r>
-          </a:p>
-          <a:p/>
-          <a:p>
-            <a:r>
-              <a:t>NOTAS:</a:t>
-            </a:r>
-          </a:p>
-          <a:p/>
-          <a:p>
-            <a:r>
-              <a:t>Nombre, tecnologia y responsabilidad en una frase.</a:t>
-            </a:r>
-          </a:p>
-          <a:p/>
-          <a:p>
-            <a:r>
-              <a:t>«HTTP» a secas no dice como viajan los datos y «SQL» a secas no dice sobre que transporte; con las dos mitades, cualquiera que lea el diagrama sabe por donde puede romperse.</a:t>
-            </a:r>
-          </a:p>
-          <a:p/>
-          <a:p>
-            <a:r>
-              <a:t>(No se proyecta) Antes del ejemplo conviene fijar las tres reglas con las que se corrige el diagrama, porque cada una tiene puntos asignados y las tres se pierden por descuido y no por no saber.</a:t>
-            </a:r>
-          </a:p>
-          <a:p/>
-          <a:p>
-            <a:r>
-              <a:t>(No se proyecta) Y hay una cuarta condicion que no es del nivel sino de la continuidad del proyecto: los nombres tienen que ser IDENTICOS a los del C4 Context de la Clase 1.</a:t>
-            </a:r>
-          </a:p>
-          <a:p/>
-          <a:p>
-            <a:r>
-              <a:t>(No se proyecta) No es pedanteria de notacion; es lo unico que permite afirmar que los dos dibujos son el mismo sistema visto desde distinta altura, y es exactamente lo que se volvera a verificar en la Clase 7 contra el diagrama de despliegue y en la Clase 11 en la auditoria del paquete.</a:t>
-            </a:r>
-          </a:p>
-          <a:p/>
-          <a:p>
-            <a:r>
-              <a:t>(No se proyecta) Ese es el error de dibujo mas comun de la clase, meter al usuario o a la pasarela de pagos dentro del sistema propio, y se detecta en dos segundos preguntando quien lo opera.</a:t>
+              <a:t>Y con lo que se gana y lo que se pierde: sin la segunda mitad, no hubo decisión.</a:t>
             </a:r>
           </a:p>
         </p:txBody>
@@ -1278,79 +1584,97 @@
           <a:p/>
           <a:p>
             <a:r>
-              <a:t>En este curso el diagrama se escribe como codigo Mermaid, y un visor Mermaid lo renderiza.</a:t>
+              <a:t>La primera: cada caja lleva TRES datos, no uno.</a:t>
             </a:r>
           </a:p>
           <a:p/>
           <a:p>
             <a:r>
-              <a:t>La primera linea es exactamente C4Container, sin nada antes</a:t>
+              <a:t>Una caja que dice solo «API» no es un contenedor descrito, es una etiqueta; con «API de turnos · Node.js · valida la franja y registra el turno» ya se puede discutir si esa frontera tiene sentido.</a:t>
             </a:r>
           </a:p>
           <a:p/>
           <a:p>
             <a:r>
-              <a:t>Los actores se declaran con Person y los sistemas ajenos con System_Ext, los dos por fuera del bloque del sistema.</a:t>
+              <a:t>La segunda: lo que guarda datos no es una caja mas.</a:t>
             </a:r>
           </a:p>
           <a:p/>
           <a:p>
             <a:r>
-              <a:t>El sistema propio se abre con System_Boundary y una llave, y dentro van las cajas: Container para lo que ejecuta y ContainerDb para lo que almacena, cada una con identificador, nombre, tecnologia y responsabilidad.</a:t>
+              <a:t>En la notacion se marca como almacen —en el codigo, ContainerDb en lugar de Container— y esa distincion no es cosmetica: un almacen no se replica igual que un servicio, no se despliega igual y no falla igual, y todo eso se retoma en las Clases 7 y 13.</a:t>
             </a:r>
           </a:p>
           <a:p/>
           <a:p>
             <a:r>
-              <a:t>La llave se cierra, y las relaciones van despues, con Rel y cuatro datos: origen, destino, que hace y con que protocolo y formato.</a:t>
+              <a:t>La tercera: ninguna flecha queda muda, y media etiqueta tampoco alcanza.</a:t>
             </a:r>
           </a:p>
           <a:p/>
           <a:p>
             <a:r>
-              <a:t>El identificador corto de cada caja —en el molde proyectado son spa, api, db y worker— es el que usan las relaciones; si no coincide, no dibuja la flecha y tampoco avisa con claridad.</a:t>
+              <a:t>Cada flecha lleva protocolo Y formato: HTTPS/JSON, TCP/SQL.</a:t>
             </a:r>
           </a:p>
           <a:p/>
           <a:p>
             <a:r>
-              <a:t>La regla operativa del dia se dice como consecuencia y no como consejo: se pega el codigo, se mira renderizado, y solo entonces se envia.</a:t>
+              <a:t>Si alli decia «Pasarela de pagos», aqui no puede decir «Pagos».</a:t>
             </a:r>
           </a:p>
           <a:p/>
           <a:p>
             <a:r>
-              <a:t>(No se proyecta) Eso cambia lo que el docente tiene que ensenar, porque un boceto correcto escrito con la sintaxis equivocada no renderiza y entonces no hay diagrama que calificar.</a:t>
+              <a:t>Los actores y los sistemas externos del Context siguen existiendo hoy y siguen estando FUERA del recuadro del sistema: abrir la caja no elimina lo que la rodeaba.</a:t>
             </a:r>
           </a:p>
           <a:p/>
           <a:p>
             <a:r>
-              <a:t>(No se proyecta) Son cinco reglas de escritura y conviene recorrerlas sobre la diapositiva, linea por linea.</a:t>
+              <a:t>Un ejemplo de trazabilidad: si el Context muestra «Proveedor de correo» como System_Ext, en el Containers aparece con el mismo nombre, fuera del recuadro, y la flecha que llega a el sale del contenedor que envia los avisos.</a:t>
             </a:r>
           </a:p>
           <a:p/>
           <a:p>
             <a:r>
-              <a:t>(No se proyecta) C4Context es el nivel de la Clase 1 y graph TD es otro tipo de diagrama, y cualquiera de los dos deja la respuesta en el nivel equivocado.</a:t>
+              <a:t>NOTAS:</a:t>
             </a:r>
           </a:p>
           <a:p/>
           <a:p>
             <a:r>
-              <a:t>(No se proyecta) Vale la pena decir en voz alta que aqui el uso de una IA es legitimo y ademas recomendado: pasar un boceto a codigo Mermaid es justo la tarea mecanica en la que ayuda sin sustituir el criterio.</a:t>
+              <a:t>Nombre, tecnologia y responsabilidad en una frase.</a:t>
             </a:r>
           </a:p>
           <a:p/>
           <a:p>
             <a:r>
-              <a:t>(No se proyecta) Lo que NO delega el estudiante es la revision, y hay tres cosas que tiene que verificar el mismo antes de enviar, porque son las que la IA equivoca con frecuencia: que la primera linea sea C4Container, que la base de datos haya quedado como ContainerDb y no como Container, y que ninguna relacion haya perdido la mitad de su etiqueta.</a:t>
+              <a:t>«HTTP» a secas no dice como viajan los datos y «SQL» a secas no dice sobre que transporte; con las dos mitades, cualquiera que lea el diagrama sabe por donde puede romperse.</a:t>
             </a:r>
           </a:p>
           <a:p/>
           <a:p>
             <a:r>
-              <a:t>(No se proyecta) Un codigo que no renderiza vale cero, y es el unico punto del taller donde el estudiante puede comprobar su propia nota antes de entregar.</a:t>
+              <a:t>(No se proyecta) Antes del ejemplo conviene fijar las tres reglas con las que se corrige el diagrama, porque cada una tiene puntos asignados y las tres se pierden por descuido y no por no saber.</a:t>
+            </a:r>
+          </a:p>
+          <a:p/>
+          <a:p>
+            <a:r>
+              <a:t>(No se proyecta) Y hay una cuarta condicion que no es del nivel sino de la continuidad del proyecto: los nombres tienen que ser IDENTICOS a los del C4 Context de la Clase 1.</a:t>
+            </a:r>
+          </a:p>
+          <a:p/>
+          <a:p>
+            <a:r>
+              <a:t>(No se proyecta) No es pedanteria de notacion; es lo unico que permite afirmar que los dos dibujos son el mismo sistema visto desde distinta altura, y es exactamente lo que se volvera a verificar en la Clase 7 contra el diagrama de despliegue y en la Clase 11 en la auditoria del paquete.</a:t>
+            </a:r>
+          </a:p>
+          <a:p/>
+          <a:p>
+            <a:r>
+              <a:t>(No se proyecta) Ese es el error de dibujo mas comun de la clase, meter al usuario o a la pasarela de pagos dentro del sistema propio, y se detecta en dos segundos preguntando quien lo opera.</a:t>
             </a:r>
           </a:p>
         </p:txBody>
@@ -1420,73 +1744,43 @@
           <a:lstStyle/>
           <a:p>
             <a:r>
-              <a:t>DESARROLLO (para explicarlo, no se proyecta):</a:t>
+              <a:t>TEXTO COMPLETO DE LA LÁMINA (se proyecta resumido):</a:t>
             </a:r>
           </a:p>
           <a:p/>
           <a:p>
             <a:r>
-              <a:t>CloudLite Turnos, el sistema de agendamiento de la barberia, empieza con tres contenedores: una aplicacion web que corre en el navegador del cliente, una API que atiende peticiones HTTP con cuerpo en formato JSON</a:t>
+              <a:t>Se abre la ÚNICA caja del Context de la Clase 1: los actores y los externos siguen ahí, fuera del sistema.</a:t>
             </a:r>
           </a:p>
           <a:p/>
           <a:p>
             <a:r>
-              <a:t>Y una base de datos relacional donde viven turnos, clientes y horarios.</a:t>
+              <a:t>Tres datos por caja, obligatorios: nombre · tecnología · responsabilidad en una frase.</a:t>
             </a:r>
           </a:p>
           <a:p/>
           <a:p>
             <a:r>
-              <a:t>Ahora viene la parte interesante: la cuarta caja aparece solo si hay una razon.</a:t>
+              <a:t>Lo que guarda datos se marca como almacén (`ContainerDb`), no como una caja más.</a:t>
             </a:r>
           </a:p>
           <a:p/>
           <a:p>
             <a:r>
-              <a:t>El envio del correo de confirmacion tarda, con proveedores reales de correo, entre 300 y 2000 milisegundos, y puede fallar por causas ajenas al sistema.</a:t>
+              <a:t>Los nombres son idénticos a los del C4 Context: si allí decía «Pasarela de pagos», aquí no puede decir «Pagos».</a:t>
             </a:r>
           </a:p>
           <a:p/>
           <a:p>
             <a:r>
-              <a:t>Cuatro contenedores con una justificacion medible es mejor arquitectura que ocho por moda.</a:t>
+              <a:t>Cada flecha lleva protocolo Y formato (`HTTPS/JSON`, `TCP/SQL`): una línea muda no cuenta.</a:t>
             </a:r>
           </a:p>
           <a:p/>
           <a:p>
             <a:r>
-              <a:t>NOTAS:</a:t>
-            </a:r>
-          </a:p>
-          <a:p/>
-          <a:p>
-            <a:r>
-              <a:t>La flecha entre la web y la API dice «HTTPS/JSON, consulta disponibilidad y crea reservas»; la flecha entre la API y la base de datos dice «TCP, lee y escribe turnos».</a:t>
-            </a:r>
-          </a:p>
-          <a:p/>
-          <a:p>
-            <a:r>
-              <a:t>Con eso ya existe un diagrama valido y defendible.</a:t>
-            </a:r>
-          </a:p>
-          <a:p/>
-          <a:p>
-            <a:r>
-              <a:t>Si la API espera ese envio antes de responder, la reserva de un turno hereda esa latencia y ese riesgo.</a:t>
-            </a:r>
-          </a:p>
-          <a:p/>
-          <a:p>
-            <a:r>
-              <a:t>Esa es una razon legitima para separar: se agrega una cola de mensajes y un trabajador de notificaciones, la API escribe el turno, publica un mensaje y responde en decenas de milisegundos, y el trabajador envia el correo despues, con reintentos si falla.</a:t>
-            </a:r>
-          </a:p>
-          <a:p/>
-          <a:p>
-            <a:r>
-              <a:t>(No se proyecta) Primer ejemplo concreto, y conviene construirlo en el tablero en vivo.</a:t>
+              <a:t>Entre 2 y 5 cajas. El número tiene que ser coherente con la decisión de la diapositiva anterior.</a:t>
             </a:r>
           </a:p>
         </p:txBody>
@@ -1562,97 +1856,79 @@
           <a:p/>
           <a:p>
             <a:r>
-              <a:t>Si cada flecha del diagrama lleva protocolo y formato, el paso siguiente es decir QUE se negocia por esa flecha, y eso es un contrato.</a:t>
+              <a:t>En este curso el diagrama se escribe como codigo Mermaid, y un visor Mermaid lo renderiza.</a:t>
             </a:r>
           </a:p>
           <a:p/>
           <a:p>
             <a:r>
-              <a:t>Un contrato entre dos piezas de un sistema tiene cuatro datos y los cuatro se piden por separado: como se llama la interaccion en terminos de negocio</a:t>
+              <a:t>La primera linea es exactamente C4Container, sin nada antes</a:t>
             </a:r>
           </a:p>
           <a:p/>
           <a:p>
             <a:r>
-              <a:t>Quien llama a quien, con que verbo y ruta —o con que nombre de evento, si es asincrono—, y cual es el error de negocio que puede devolver.</a:t>
+              <a:t>Los actores se declaran con Person y los sistemas ajenos con System_Ext, los dos por fuera del bloque del sistema.</a:t>
             </a:r>
           </a:p>
           <a:p/>
           <a:p>
             <a:r>
-              <a:t>El cuarto es el que se olvida y el que hace util al contrato.</a:t>
+              <a:t>El sistema propio se abre con System_Boundary y una llave, y dentro van las cajas: Container para lo que ejecuta y ContainerDb para lo que almacena, cada una con identificador, nombre, tecnologia y responsabilidad.</a:t>
             </a:r>
           </a:p>
           <a:p/>
           <a:p>
             <a:r>
-              <a:t>Un error de negocio es una respuesta prevista, que forma parte del diseno: la franja ya esta tomada, el cupo se agoto, el usuario no tiene permiso.</a:t>
+              <a:t>La llave se cierra, y las relaciones van despues, con Rel y cuatro datos: origen, destino, que hace y con que protocolo y formato.</a:t>
             </a:r>
           </a:p>
           <a:p/>
           <a:p>
             <a:r>
-              <a:t>La primera: al menos uno de los tres contratos tiene que ser un 409 de conflicto, y la razon es de dominio y no de capricho.</a:t>
+              <a:t>El identificador corto de cada caja —en el molde proyectado son spa, api, db y worker— es el que usan las relaciones; si no coincide, no dibuja la flecha y tampoco avisa con claridad.</a:t>
             </a:r>
           </a:p>
           <a:p/>
           <a:p>
             <a:r>
-              <a:t>El 409 es la respuesta que dice «tu peticion es valida, pero el estado actual del sistema no la admite», y en cualquier dominio de reservas ese caso existe siempre: dos clientes quieren la misma franja.</a:t>
+              <a:t>La regla operativa del dia se dice como consecuencia y no como consejo: se pega el codigo, se mira renderizado, y solo entonces se envia.</a:t>
             </a:r>
           </a:p>
           <a:p/>
           <a:p>
             <a:r>
-              <a:t>Un estudiante que no encuentra ningun 409 en su sistema casi nunca tiene un dominio sin conflictos; lo que tiene es un diagrama que no modela ninguna regla de negocio.</a:t>
+              <a:t>(No se proyecta) Eso cambia lo que el docente tiene que ensenar, porque un boceto correcto escrito con la sintaxis equivocada no renderiza y entonces no hay diagrama que calificar.</a:t>
             </a:r>
           </a:p>
           <a:p/>
           <a:p>
             <a:r>
-              <a:t>La segunda exigencia: los tres contratos no pueden ser entre el mismo par de cajas.</a:t>
+              <a:t>(No se proyecta) Son cinco reglas de escritura y conviene recorrerlas sobre la diapositiva, linea por linea.</a:t>
             </a:r>
           </a:p>
           <a:p/>
           <a:p>
             <a:r>
-              <a:t>Y si el contrato es con la base de datos, en la columna del verbo va la sentencia (INSERT, SELECT) y no una ruta REST</a:t>
+              <a:t>(No se proyecta) C4Context es el nivel de la Clase 1 y graph TD es otro tipo de diagrama, y cualquiera de los dos deja la respuesta en el nivel equivocado.</a:t>
             </a:r>
           </a:p>
           <a:p/>
           <a:p>
             <a:r>
-              <a:t>Porque la base no expone rutas; ponerle POST /turnos a la base de datos es el error que delata que se lleno la tabla por analogia y no leyendo el propio diagrama.</a:t>
+              <a:t>(No se proyecta) Vale la pena decir en voz alta que aqui el uso de una IA es legitimo y ademas recomendado: pasar un boceto a codigo Mermaid es justo la tarea mecanica en la que ayuda sin sustituir el criterio.</a:t>
             </a:r>
           </a:p>
           <a:p/>
           <a:p>
             <a:r>
-              <a:t>(No se proyecta) Un 500 no es un error de negocio, es una falla del sistema; nadie lo disena, y por eso poner 500 en esa columna es la senal de que el estudiante no distinguio las dos cosas.</a:t>
+              <a:t>(No se proyecta) Lo que NO delega el estudiante es la revision, y hay tres cosas que tiene que verificar el mismo antes de enviar, porque son las que la IA equivoca con frecuencia: que la primera linea sea C4Container, que la base de datos haya quedado como ContainerDb y no como Container, y que ninguna relacion haya perdido la mitad de su etiqueta.</a:t>
             </a:r>
           </a:p>
           <a:p/>
           <a:p>
             <a:r>
-              <a:t>(No se proyecta) La diapositiva proyecta los tres contratos resueltos sobre CloudLite Turnos y conviene recorrerlos leyendo la cuarta columna en voz alta, porque es lo que hay que replicar.</a:t>
-            </a:r>
-          </a:p>
-          <a:p/>
-          <a:p>
-            <a:r>
-              <a:t>(No se proyecta) Dos exigencias mas, que valen puntos y se pierden sin darse cuenta.</a:t>
-            </a:r>
-          </a:p>
-          <a:p/>
-          <a:p>
-            <a:r>
-              <a:t>(No se proyecta) Conviene tambien tener a mano la diferencia con sus vecinos, porque se confunden: 400 es que la peticion esta mal formada, 401 que no se sabe quien eres, 403 que se sabe y no te corresponde, 404 que no existe, 422 que esta bien formada pero sus datos no pasan una validacion, y 409 que choca con el estado actual.</a:t>
-            </a:r>
-          </a:p>
-          <a:p/>
-          <a:p>
-            <a:r>
-              <a:t>(No se proyecta) Tres filas que digan «App web → API» describen un solo canal contado tres veces, y lo que se esta evaluando es si el estudiante entendio que su sistema tiene varias fronteras.</a:t>
+              <a:t>(No se proyecta) Un codigo que no renderiza vale cero, y es el unico punto del taller donde el estudiante puede comprobar su propia nota antes de entregar.</a:t>
             </a:r>
           </a:p>
         </p:txBody>
@@ -1728,37 +2004,67 @@
           <a:p/>
           <a:p>
             <a:r>
-              <a:t>El segundo bloque de contenido es el mas importante del dia: que se paga al distribuir.</a:t>
+              <a:t>CloudLite Turnos, el sistema de agendamiento de la barberia, empieza con tres contenedores: una aplicacion web que corre en el navegador del cliente, una API que atiende peticiones HTTP con cuerpo en formato JSON</a:t>
             </a:r>
           </a:p>
           <a:p/>
           <a:p>
             <a:r>
-              <a:t>Una llamada a una funcion dentro del mismo proceso cuesta del orden de nanosegundos y no puede fallar por causas de red.</a:t>
+              <a:t>Y una base de datos relacional donde viven turnos, clientes y horarios.</a:t>
             </a:r>
           </a:p>
           <a:p/>
           <a:p>
             <a:r>
-              <a:t>La misma llamada convertida en peticion HTTP entre dos contenedores de la misma maquina o del mismo centro de datos cuesta tipicamente entre 1 y 5 milisegundos, y entre regiones geograficas distintas puede subir a 50 o 200 milisegundos.</a:t>
+              <a:t>Ahora viene la parte interesante: la cuarta caja aparece solo si hay una razon.</a:t>
             </a:r>
           </a:p>
           <a:p/>
           <a:p>
             <a:r>
-              <a:t>Es decir, convertir una llamada local en remota empeora el costo en varios ordenes de magnitud, y a eso se suma que ahora la llamada puede perderse, llegar duplicada o tardar indefinidamente.</a:t>
+              <a:t>El envio del correo de confirmacion tarda, con proveedores reales de correo, entre 300 y 2000 milisegundos, y puede fallar por causas ajenas al sistema.</a:t>
             </a:r>
           </a:p>
           <a:p/>
           <a:p>
             <a:r>
-              <a:t>Ese calculo es exacto y no una convencion, y es el argumento mas contundente contra multiplicar servicios sin necesidad.</a:t>
+              <a:t>Cuatro contenedores con una justificacion medible es mejor arquitectura que ocho por moda.</a:t>
             </a:r>
           </a:p>
           <a:p/>
           <a:p>
             <a:r>
-              <a:t>(No se proyecta) Hay una aritmetica que conviene mostrar porque impresiona con razon: si una peticion del usuario atraviesa en cadena cinco servicios y cada uno esta disponible el 99,9 % del tiempo, la disponibilidad del recorrido completo es 0,999 elevado a la quinta potencia, alrededor del 99,5 %, lo que pasa de unos 43 minutos de indisponibilidad al mes a mas de tres horas.</a:t>
+              <a:t>NOTAS:</a:t>
+            </a:r>
+          </a:p>
+          <a:p/>
+          <a:p>
+            <a:r>
+              <a:t>La flecha entre la web y la API dice «HTTPS/JSON, consulta disponibilidad y crea reservas»; la flecha entre la API y la base de datos dice «TCP, lee y escribe turnos».</a:t>
+            </a:r>
+          </a:p>
+          <a:p/>
+          <a:p>
+            <a:r>
+              <a:t>Con eso ya existe un diagrama valido y defendible.</a:t>
+            </a:r>
+          </a:p>
+          <a:p/>
+          <a:p>
+            <a:r>
+              <a:t>Si la API espera ese envio antes de responder, la reserva de un turno hereda esa latencia y ese riesgo.</a:t>
+            </a:r>
+          </a:p>
+          <a:p/>
+          <a:p>
+            <a:r>
+              <a:t>Esa es una razon legitima para separar: se agrega una cola de mensajes y un trabajador de notificaciones, la API escribe el turno, publica un mensaje y responde en decenas de milisegundos, y el trabajador envia el correo despues, con reintentos si falla.</a:t>
+            </a:r>
+          </a:p>
+          <a:p/>
+          <a:p>
+            <a:r>
+              <a:t>(No se proyecta) Primer ejemplo concreto, y conviene construirlo en el tablero en vivo.</a:t>
             </a:r>
           </a:p>
         </p:txBody>
@@ -1834,49 +2140,97 @@
           <a:p/>
           <a:p>
             <a:r>
-              <a:t>Un timeout es el tiempo maximo que un servicio espera respuesta antes de darse por vencido; sin timeout explicito, un servicio lento no falla sino que deja colgado a quien lo llamo, y el bloqueo se propaga hacia arriba hasta tumbar el sistema completo.</a:t>
+              <a:t>Si cada flecha del diagrama lleva protocolo y formato, el paso siguiente es decir QUE se negocia por esa flecha, y eso es un contrato.</a:t>
             </a:r>
           </a:p>
           <a:p/>
           <a:p>
             <a:r>
-              <a:t>Los valores tipicos para llamadas internas estan entre 2 y 5 segundos, y son convencion, no ley.</a:t>
+              <a:t>Un contrato entre dos piezas de un sistema tiene cuatro datos y los cuatro se piden por separado: como se llama la interaccion en terminos de negocio</a:t>
             </a:r>
           </a:p>
           <a:p/>
           <a:p>
             <a:r>
-              <a:t>Un reintento es volver a intentar la llamada fallida, y trae una trampa: si todos los clientes reintentan de inmediato contra un servicio ya saturado, lo hunden mas, por lo que se limita a dos o tres reintentos con espera creciente entre uno y otro.</a:t>
+              <a:t>Quien llama a quien, con que verbo y ruta —o con que nombre de evento, si es asincrono—, y cual es el error de negocio que puede devolver.</a:t>
             </a:r>
           </a:p>
           <a:p/>
           <a:p>
             <a:r>
-              <a:t>En CloudLite eso es literal: si el reintento de crear turno no es idempotente, el cliente termina con dos reservas para el mismo horario, y la solucion habitual es que la peticion lleve un identificador unico que el servidor reconozca como repetido.</a:t>
+              <a:t>El cuarto es el que se olvida y el que hace util al contrato.</a:t>
             </a:r>
           </a:p>
           <a:p/>
           <a:p>
             <a:r>
-              <a:t>El cuarto mecanismo es el interruptor de circuito, o circuit breaker, que tras varias fallas consecutivas deja de intentar por un rato y responde de inmediato con un error controlado, para no gastar recursos golpeando algo que esta caido.</a:t>
+              <a:t>Un error de negocio es una respuesta prevista, que forma parte del diseno: la franja ya esta tomada, el cupo se agoto, el usuario no tiene permiso.</a:t>
             </a:r>
           </a:p>
           <a:p/>
           <a:p>
             <a:r>
-              <a:t>NOTAS:</a:t>
+              <a:t>La primera: al menos uno de los tres contratos tiene que ser un 409 de conflicto, y la razon es de dominio y no de capricho.</a:t>
             </a:r>
           </a:p>
           <a:p/>
           <a:p>
             <a:r>
-              <a:t>De ahi salen cuatro mecanismos que el diagrama y la tabla deben poder mencionar.</a:t>
+              <a:t>El 409 es la respuesta que dice «tu peticion es valida, pero el estado actual del sistema no la admite», y en cualquier dominio de reservas ese caso existe siempre: dos clientes quieren la misma franja.</a:t>
             </a:r>
           </a:p>
           <a:p/>
           <a:p>
             <a:r>
-              <a:t>Los reintentos exigen idempotencia, que significa que ejecutar la misma operacion dos veces produzca el mismo resultado que ejecutarla una vez.</a:t>
+              <a:t>Un estudiante que no encuentra ningun 409 en su sistema casi nunca tiene un dominio sin conflictos; lo que tiene es un diagrama que no modela ninguna regla de negocio.</a:t>
+            </a:r>
+          </a:p>
+          <a:p/>
+          <a:p>
+            <a:r>
+              <a:t>La segunda exigencia: los tres contratos no pueden ser entre el mismo par de cajas.</a:t>
+            </a:r>
+          </a:p>
+          <a:p/>
+          <a:p>
+            <a:r>
+              <a:t>Y si el contrato es con la base de datos, en la columna del verbo va la sentencia (INSERT, SELECT) y no una ruta REST</a:t>
+            </a:r>
+          </a:p>
+          <a:p/>
+          <a:p>
+            <a:r>
+              <a:t>Porque la base no expone rutas; ponerle POST /turnos a la base de datos es el error que delata que se lleno la tabla por analogia y no leyendo el propio diagrama.</a:t>
+            </a:r>
+          </a:p>
+          <a:p/>
+          <a:p>
+            <a:r>
+              <a:t>(No se proyecta) Un 500 no es un error de negocio, es una falla del sistema; nadie lo disena, y por eso poner 500 en esa columna es la senal de que el estudiante no distinguio las dos cosas.</a:t>
+            </a:r>
+          </a:p>
+          <a:p/>
+          <a:p>
+            <a:r>
+              <a:t>(No se proyecta) La diapositiva proyecta los tres contratos resueltos sobre CloudLite Turnos y conviene recorrerlos leyendo la cuarta columna en voz alta, porque es lo que hay que replicar.</a:t>
+            </a:r>
+          </a:p>
+          <a:p/>
+          <a:p>
+            <a:r>
+              <a:t>(No se proyecta) Dos exigencias mas, que valen puntos y se pierden sin darse cuenta.</a:t>
+            </a:r>
+          </a:p>
+          <a:p/>
+          <a:p>
+            <a:r>
+              <a:t>(No se proyecta) Conviene tambien tener a mano la diferencia con sus vecinos, porque se confunden: 400 es que la peticion esta mal formada, 401 que no se sabe quien eres, 403 que se sabe y no te corresponde, 404 que no existe, 422 que esta bien formada pero sus datos no pasan una validacion, y 409 que choca con el estado actual.</a:t>
+            </a:r>
+          </a:p>
+          <a:p/>
+          <a:p>
+            <a:r>
+              <a:t>(No se proyecta) Tres filas que digan «App web → API» describen un solo canal contado tres veces, y lo que se esta evaluando es si el estudiante entendio que su sistema tiene varias fronteras.</a:t>
             </a:r>
           </a:p>
         </p:txBody>
@@ -1952,73 +2306,37 @@
           <a:p/>
           <a:p>
             <a:r>
-              <a:t>El punto donde los proyectos academicos se rompen es el de los datos.</a:t>
+              <a:t>El segundo bloque de contenido es el mas importante del dia: que se paga al distribuir.</a:t>
             </a:r>
           </a:p>
           <a:p/>
           <a:p>
             <a:r>
-              <a:t>La regla ortodoxa de los microservicios dice que cada servicio es dueno exclusivo de su base de datos y que nadie mas la consulta directamente</a:t>
+              <a:t>Una llamada a una funcion dentro del mismo proceso cuesta del orden de nanosegundos y no puede fallar por causas de red.</a:t>
             </a:r>
           </a:p>
           <a:p/>
           <a:p>
             <a:r>
-              <a:t>Si dos servicios comparten tablas, estan acoplados y no pueden desplegarse por separado, lo que contradice la definicion.</a:t>
+              <a:t>La misma llamada convertida en peticion HTTP entre dos contenedores de la misma maquina o del mismo centro de datos cuesta tipicamente entre 1 y 5 milisegundos, y entre regiones geograficas distintas puede subir a 50 o 200 milisegundos.</a:t>
             </a:r>
           </a:p>
           <a:p/>
           <a:p>
             <a:r>
-              <a:t>Pero cumplir esa regla tiene un precio real: una consulta que antes era un join deja de existir y hay que resolverla llamando a otro servicio</a:t>
+              <a:t>Es decir, convertir una llamada local en remota empeora el costo en varios ordenes de magnitud, y a eso se suma que ahora la llamada puede perderse, llegar duplicada o tardar indefinidamente.</a:t>
             </a:r>
           </a:p>
           <a:p/>
           <a:p>
             <a:r>
-              <a:t>Y una operacion que abarca dos servicios ya no puede ser una transaccion unica sino una secuencia de pasos con compensaciones.</a:t>
+              <a:t>Ese calculo es exacto y no una convencion, y es el argumento mas contundente contra multiplicar servicios sin necesidad.</a:t>
             </a:r>
           </a:p>
           <a:p/>
           <a:p>
             <a:r>
-              <a:t>Fingir ortodoxia es peor que documentar una concesion.</a:t>
-            </a:r>
-          </a:p>
-          <a:p/>
-          <a:p>
-            <a:r>
-              <a:t>La regla de propiedad es: cada tabla tiene un solo servicio dueno, que es el unico que escribe en ella; los demas la consultan por su API.</a:t>
-            </a:r>
-          </a:p>
-          <a:p/>
-          <a:p>
-            <a:r>
-              <a:t>En CloudLite Turnos la tabla de turnos es de la API de turnos, y el worker de avisos no la toca: recibe por la cola el dato que necesita.</a:t>
-            </a:r>
-          </a:p>
-          <a:p/>
-          <a:p>
-            <a:r>
-              <a:t>Dos servicios que escriben en la misma tabla quedan acoplados aunque se desplieguen por separado, y ese es el error mas comun.</a:t>
-            </a:r>
-          </a:p>
-          <a:p/>
-          <a:p>
-            <a:r>
-              <a:t>NOTAS:</a:t>
-            </a:r>
-          </a:p>
-          <a:p/>
-          <a:p>
-            <a:r>
-              <a:t>Eso introduce consistencia eventual, es decir un lapso durante el cual dos partes del sistema tienen versiones distintas de la verdad, con consecuencias visibles para el usuario.</a:t>
-            </a:r>
-          </a:p>
-          <a:p/>
-          <a:p>
-            <a:r>
-              <a:t>(No se proyecta) La postura honesta para este curso es que un CloudLite con una base de datos compartida y propiedad de tablas claramente documentada resulta aceptable, siempre que el estudiante lo registre como un trade-off consciente en su informe y no lo presente como microservicios puros.</a:t>
+              <a:t>(No se proyecta) Hay una aritmetica que conviene mostrar porque impresiona con razon: si una peticion del usuario atraviesa en cadena cinco servicios y cada uno esta disponible el 99,9 % del tiempo, la disponibilidad del recorrido completo es 0,999 elevado a la quinta potencia, alrededor del 99,5 %, lo que pasa de unos 43 minutos de indisponibilidad al mes a mas de tres horas.</a:t>
             </a:r>
           </a:p>
         </p:txBody>
@@ -5500,14 +5818,83 @@
       </p:sp>
       <p:sp>
         <p:nvSpPr>
-          <p:cNvPr id="5" name="TextBox 4"/>
+          <p:cNvPr id="5" name="Rounded Rectangle 4"/>
+          <p:cNvSpPr/>
+          <p:nvPr/>
+        </p:nvSpPr>
+        <p:spPr>
+          <a:xfrm>
+            <a:off x="5797149" y="1343926"/>
+            <a:ext cx="6010497" cy="4837658"/>
+          </a:xfrm>
+          <a:prstGeom prst="roundRect">
+            <a:avLst>
+              <a:gd name="adj" fmla="val 4000"/>
+            </a:avLst>
+          </a:prstGeom>
+          <a:solidFill>
+            <a:srgbClr val="E8EEF4"/>
+          </a:solidFill>
+          <a:ln>
+            <a:noFill/>
+          </a:ln>
+        </p:spPr>
+        <p:style>
+          <a:lnRef idx="1">
+            <a:schemeClr val="accent1"/>
+          </a:lnRef>
+          <a:fillRef idx="3">
+            <a:schemeClr val="accent1"/>
+          </a:fillRef>
+          <a:effectRef idx="2">
+            <a:schemeClr val="accent1"/>
+          </a:effectRef>
+          <a:fontRef idx="minor">
+            <a:schemeClr val="lt1"/>
+          </a:fontRef>
+        </p:style>
+        <p:txBody>
+          <a:bodyPr rtlCol="0" anchor="ctr"/>
+          <a:lstStyle/>
+          <a:p>
+            <a:pPr algn="ctr"/>
+          </a:p>
+        </p:txBody>
+      </p:sp>
+      <p:pic>
+        <p:nvPicPr>
+          <p:cNvPr id="6" name="Picture 5" descr="ilus-c4-lite-paso1.png"/>
+          <p:cNvPicPr>
+            <a:picLocks noChangeAspect="1"/>
+          </p:cNvPicPr>
+          <p:nvPr/>
+        </p:nvPicPr>
+        <p:blipFill>
+          <a:blip r:embed="rId2"/>
+          <a:stretch>
+            <a:fillRect/>
+          </a:stretch>
+        </p:blipFill>
+        <p:spPr>
+          <a:xfrm>
+            <a:off x="5870301" y="1417078"/>
+            <a:ext cx="5864193" cy="4691354"/>
+          </a:xfrm>
+          <a:prstGeom prst="rect">
+            <a:avLst/>
+          </a:prstGeom>
+        </p:spPr>
+      </p:pic>
+      <p:sp>
+        <p:nvSpPr>
+          <p:cNvPr id="7" name="TextBox 6"/>
           <p:cNvSpPr txBox="1"/>
           <p:nvPr/>
         </p:nvSpPr>
         <p:spPr>
           <a:xfrm>
-            <a:off x="457200" y="1170432"/>
-            <a:ext cx="11277295" cy="5230368"/>
+            <a:off x="457200" y="1353312"/>
+            <a:ext cx="5093061" cy="5047488"/>
           </a:xfrm>
           <a:prstGeom prst="rect">
             <a:avLst/>
@@ -5655,61 +6042,11 @@
               <a:t> a los del C4 Context: si allí decía «Pasarela de pagos», aquí no puede decir «Pagos».</a:t>
             </a:r>
           </a:p>
-          <a:p>
-            <a:pPr>
-              <a:spcAft>
-                <a:spcPts val="800"/>
-              </a:spcAft>
-            </a:pPr>
-            <a:r>
-              <a:rPr sz="2000" b="0" i="0">
-                <a:solidFill>
-                  <a:srgbClr val="333333"/>
-                </a:solidFill>
-                <a:latin typeface="Calibri"/>
-              </a:rPr>
-              <a:t>–   Cada flecha lleva </a:t>
-            </a:r>
-            <a:r>
-              <a:rPr sz="2000" b="1" i="0">
-                <a:solidFill>
-                  <a:srgbClr val="333333"/>
-                </a:solidFill>
-                <a:latin typeface="Calibri"/>
-              </a:rPr>
-              <a:t>protocolo Y formato</a:t>
-            </a:r>
-            <a:r>
-              <a:rPr sz="2000" b="0" i="0">
-                <a:solidFill>
-                  <a:srgbClr val="333333"/>
-                </a:solidFill>
-                <a:latin typeface="Calibri"/>
-              </a:rPr>
-              <a:t> («HTTPS/JSON», «TCP/SQL»): una línea muda no cuenta.</a:t>
-            </a:r>
-          </a:p>
-          <a:p>
-            <a:pPr>
-              <a:spcAft>
-                <a:spcPts val="800"/>
-              </a:spcAft>
-            </a:pPr>
-            <a:r>
-              <a:rPr sz="2000" b="0" i="0">
-                <a:solidFill>
-                  <a:srgbClr val="333333"/>
-                </a:solidFill>
-                <a:latin typeface="Calibri"/>
-              </a:rPr>
-              <a:t>–   Entre 2 y 5 cajas. El número tiene que ser coherente con la decisión de la diapositiva anterior.</a:t>
-            </a:r>
-          </a:p>
-        </p:txBody>
-      </p:sp>
-      <p:sp>
-        <p:nvSpPr>
-          <p:cNvPr id="6" name="TextBox 5"/>
+        </p:txBody>
+      </p:sp>
+      <p:sp>
+        <p:nvSpPr>
+          <p:cNvPr id="8" name="TextBox 7"/>
           <p:cNvSpPr txBox="1"/>
           <p:nvPr/>
         </p:nvSpPr>
@@ -6698,14 +7035,83 @@
       </p:sp>
       <p:sp>
         <p:nvSpPr>
-          <p:cNvPr id="5" name="TextBox 4"/>
+          <p:cNvPr id="5" name="Rounded Rectangle 4"/>
+          <p:cNvSpPr/>
+          <p:nvPr/>
+        </p:nvSpPr>
+        <p:spPr>
+          <a:xfrm>
+            <a:off x="5797149" y="1343926"/>
+            <a:ext cx="6010497" cy="4837658"/>
+          </a:xfrm>
+          <a:prstGeom prst="roundRect">
+            <a:avLst>
+              <a:gd name="adj" fmla="val 4000"/>
+            </a:avLst>
+          </a:prstGeom>
+          <a:solidFill>
+            <a:srgbClr val="E8EEF4"/>
+          </a:solidFill>
+          <a:ln>
+            <a:noFill/>
+          </a:ln>
+        </p:spPr>
+        <p:style>
+          <a:lnRef idx="1">
+            <a:schemeClr val="accent1"/>
+          </a:lnRef>
+          <a:fillRef idx="3">
+            <a:schemeClr val="accent1"/>
+          </a:fillRef>
+          <a:effectRef idx="2">
+            <a:schemeClr val="accent1"/>
+          </a:effectRef>
+          <a:fontRef idx="minor">
+            <a:schemeClr val="lt1"/>
+          </a:fontRef>
+        </p:style>
+        <p:txBody>
+          <a:bodyPr rtlCol="0" anchor="ctr"/>
+          <a:lstStyle/>
+          <a:p>
+            <a:pPr algn="ctr"/>
+          </a:p>
+        </p:txBody>
+      </p:sp>
+      <p:pic>
+        <p:nvPicPr>
+          <p:cNvPr id="6" name="Picture 5" descr="ilus-sintaxis-c4-paso1.png"/>
+          <p:cNvPicPr>
+            <a:picLocks noChangeAspect="1"/>
+          </p:cNvPicPr>
+          <p:nvPr/>
+        </p:nvPicPr>
+        <p:blipFill>
+          <a:blip r:embed="rId2"/>
+          <a:stretch>
+            <a:fillRect/>
+          </a:stretch>
+        </p:blipFill>
+        <p:spPr>
+          <a:xfrm>
+            <a:off x="5870301" y="1417078"/>
+            <a:ext cx="5864193" cy="4691354"/>
+          </a:xfrm>
+          <a:prstGeom prst="rect">
+            <a:avLst/>
+          </a:prstGeom>
+        </p:spPr>
+      </p:pic>
+      <p:sp>
+        <p:nvSpPr>
+          <p:cNvPr id="7" name="TextBox 6"/>
           <p:cNvSpPr txBox="1"/>
           <p:nvPr/>
         </p:nvSpPr>
         <p:spPr>
           <a:xfrm>
-            <a:off x="457200" y="1170432"/>
-            <a:ext cx="11277295" cy="5230368"/>
+            <a:off x="457200" y="1353312"/>
+            <a:ext cx="5093061" cy="5047488"/>
           </a:xfrm>
           <a:prstGeom prst="rect">
             <a:avLst/>
@@ -6769,7 +7175,7 @@
       </p:sp>
       <p:sp>
         <p:nvSpPr>
-          <p:cNvPr id="6" name="TextBox 5"/>
+          <p:cNvPr id="8" name="TextBox 7"/>
           <p:cNvSpPr txBox="1"/>
           <p:nvPr/>
         </p:nvSpPr>
@@ -11883,9 +12289,33 @@
           </a:prstGeom>
         </p:spPr>
       </p:pic>
-      <p:sp>
-        <p:nvSpPr>
-          <p:cNvPr id="8" name="TextBox 7"/>
+      <p:pic>
+        <p:nvPicPr>
+          <p:cNvPr id="8" name="Picture 7" descr="base-compartida-paso3.png"/>
+          <p:cNvPicPr>
+            <a:picLocks noChangeAspect="1"/>
+          </p:cNvPicPr>
+          <p:nvPr/>
+        </p:nvPicPr>
+        <p:blipFill>
+          <a:blip r:embed="rId4"/>
+          <a:stretch>
+            <a:fillRect/>
+          </a:stretch>
+        </p:blipFill>
+        <p:spPr>
+          <a:xfrm>
+            <a:off x="5876318" y="1261872"/>
+            <a:ext cx="5852160" cy="4681728"/>
+          </a:xfrm>
+          <a:prstGeom prst="rect">
+            <a:avLst/>
+          </a:prstGeom>
+        </p:spPr>
+      </p:pic>
+      <p:sp>
+        <p:nvSpPr>
+          <p:cNvPr id="13" name="TextBox 12"/>
           <p:cNvSpPr txBox="1"/>
           <p:nvPr/>
         </p:nvSpPr>
@@ -11920,7 +12350,7 @@
       </p:sp>
       <p:sp>
         <p:nvSpPr>
-          <p:cNvPr id="9" name="TextBox 8"/>
+          <p:cNvPr id="14" name="TextBox 13"/>
           <p:cNvSpPr txBox="1"/>
           <p:nvPr/>
         </p:nvSpPr>
@@ -12007,7 +12437,7 @@
       </p:sp>
       <p:sp>
         <p:nvSpPr>
-          <p:cNvPr id="10" name="TextBox 9"/>
+          <p:cNvPr id="15" name="TextBox 14"/>
           <p:cNvSpPr txBox="1"/>
           <p:nvPr/>
         </p:nvSpPr>
@@ -12094,6 +12524,59 @@
                                         <p:cTn id="7" dur="450"/>
                                         <p:tgtEl>
                                           <p:spTgt spid="7"/>
+                                        </p:tgtEl>
+                                      </p:cBhvr>
+                                    </p:animEffect>
+                                  </p:childTnLst>
+                                </p:cTn>
+                              </p:par>
+                            </p:childTnLst>
+                          </p:cTn>
+                        </p:par>
+                      </p:childTnLst>
+                    </p:cTn>
+                  </p:par>
+                  <p:par>
+                    <p:cTn id="8" fill="hold">
+                      <p:stCondLst>
+                        <p:cond delay="indefinite"/>
+                      </p:stCondLst>
+                      <p:childTnLst>
+                        <p:par>
+                          <p:cTn id="9" fill="hold">
+                            <p:stCondLst>
+                              <p:cond delay="0"/>
+                            </p:stCondLst>
+                            <p:childTnLst>
+                              <p:par>
+                                <p:cTn id="10" presetID="10" presetClass="entr" presetSubtype="0" fill="hold" nodeType="clickEffect">
+                                  <p:stCondLst>
+                                    <p:cond delay="0"/>
+                                  </p:stCondLst>
+                                  <p:childTnLst>
+                                    <p:set>
+                                      <p:cBhvr>
+                                        <p:cTn id="11" dur="1" fill="hold">
+                                          <p:stCondLst>
+                                            <p:cond delay="0"/>
+                                          </p:stCondLst>
+                                        </p:cTn>
+                                        <p:tgtEl>
+                                          <p:spTgt spid="8"/>
+                                        </p:tgtEl>
+                                        <p:attrNameLst>
+                                          <p:attrName>style.visibility</p:attrName>
+                                        </p:attrNameLst>
+                                      </p:cBhvr>
+                                      <p:to>
+                                        <p:strVal val="visible"/>
+                                      </p:to>
+                                    </p:set>
+                                    <p:animEffect transition="in" filter="fade">
+                                      <p:cBhvr>
+                                        <p:cTn id="12" dur="450"/>
+                                        <p:tgtEl>
+                                          <p:spTgt spid="8"/>
                                         </p:tgtEl>
                                       </p:cBhvr>
                                     </p:animEffect>
@@ -13142,14 +13625,83 @@
       </p:sp>
       <p:sp>
         <p:nvSpPr>
-          <p:cNvPr id="5" name="TextBox 4"/>
+          <p:cNvPr id="5" name="Rounded Rectangle 4"/>
+          <p:cNvSpPr/>
+          <p:nvPr/>
+        </p:nvSpPr>
+        <p:spPr>
+          <a:xfrm>
+            <a:off x="5797149" y="1343926"/>
+            <a:ext cx="6010497" cy="4837658"/>
+          </a:xfrm>
+          <a:prstGeom prst="roundRect">
+            <a:avLst>
+              <a:gd name="adj" fmla="val 4000"/>
+            </a:avLst>
+          </a:prstGeom>
+          <a:solidFill>
+            <a:srgbClr val="E8EEF4"/>
+          </a:solidFill>
+          <a:ln>
+            <a:noFill/>
+          </a:ln>
+        </p:spPr>
+        <p:style>
+          <a:lnRef idx="1">
+            <a:schemeClr val="accent1"/>
+          </a:lnRef>
+          <a:fillRef idx="3">
+            <a:schemeClr val="accent1"/>
+          </a:fillRef>
+          <a:effectRef idx="2">
+            <a:schemeClr val="accent1"/>
+          </a:effectRef>
+          <a:fontRef idx="minor">
+            <a:schemeClr val="lt1"/>
+          </a:fontRef>
+        </p:style>
+        <p:txBody>
+          <a:bodyPr rtlCol="0" anchor="ctr"/>
+          <a:lstStyle/>
+          <a:p>
+            <a:pPr algn="ctr"/>
+          </a:p>
+        </p:txBody>
+      </p:sp>
+      <p:pic>
+        <p:nvPicPr>
+          <p:cNvPr id="6" name="Picture 5" descr="ilus-tres-riesgos-paso1.png"/>
+          <p:cNvPicPr>
+            <a:picLocks noChangeAspect="1"/>
+          </p:cNvPicPr>
+          <p:nvPr/>
+        </p:nvPicPr>
+        <p:blipFill>
+          <a:blip r:embed="rId2"/>
+          <a:stretch>
+            <a:fillRect/>
+          </a:stretch>
+        </p:blipFill>
+        <p:spPr>
+          <a:xfrm>
+            <a:off x="5870301" y="1417078"/>
+            <a:ext cx="5864193" cy="4691354"/>
+          </a:xfrm>
+          <a:prstGeom prst="rect">
+            <a:avLst/>
+          </a:prstGeom>
+        </p:spPr>
+      </p:pic>
+      <p:sp>
+        <p:nvSpPr>
+          <p:cNvPr id="7" name="TextBox 6"/>
           <p:cNvSpPr txBox="1"/>
           <p:nvPr/>
         </p:nvSpPr>
         <p:spPr>
           <a:xfrm>
-            <a:off x="457200" y="1170432"/>
-            <a:ext cx="11277295" cy="5230368"/>
+            <a:off x="457200" y="1353312"/>
+            <a:ext cx="5093061" cy="5047488"/>
           </a:xfrm>
           <a:prstGeom prst="rect">
             <a:avLst/>
@@ -13315,61 +13867,11 @@
               <a:t> nómbralo y di qué pasa si el segundo falla.</a:t>
             </a:r>
           </a:p>
-          <a:p>
-            <a:pPr>
-              <a:spcAft>
-                <a:spcPts val="800"/>
-              </a:spcAft>
-            </a:pPr>
-            <a:r>
-              <a:rPr sz="2000" b="0" i="0">
-                <a:solidFill>
-                  <a:srgbClr val="333333"/>
-                </a:solidFill>
-                <a:latin typeface="Calibri"/>
-              </a:rPr>
-              <a:t>–   Caja de herramientas para mitigarlos: </a:t>
-            </a:r>
-            <a:r>
-              <a:rPr sz="2000" b="1" i="0">
-                <a:solidFill>
-                  <a:srgbClr val="333333"/>
-                </a:solidFill>
-                <a:latin typeface="Calibri"/>
-              </a:rPr>
-              <a:t>timeout · reintento con espera creciente · idempotencia · circuit breaker</a:t>
-            </a:r>
-            <a:r>
-              <a:rPr sz="2000" b="0" i="0">
-                <a:solidFill>
-                  <a:srgbClr val="333333"/>
-                </a:solidFill>
-                <a:latin typeface="Calibri"/>
-              </a:rPr>
-              <a:t>.</a:t>
-            </a:r>
-          </a:p>
-          <a:p>
-            <a:pPr>
-              <a:spcAft>
-                <a:spcPts val="800"/>
-              </a:spcAft>
-            </a:pPr>
-            <a:r>
-              <a:rPr sz="2000" b="0" i="0">
-                <a:solidFill>
-                  <a:srgbClr val="333333"/>
-                </a:solidFill>
-                <a:latin typeface="Calibri"/>
-              </a:rPr>
-              <a:t>–   «Los microservicios son más complejos» no es un riesgo: no nombra caja, ni salto, ni dato.</a:t>
-            </a:r>
-          </a:p>
-        </p:txBody>
-      </p:sp>
-      <p:sp>
-        <p:nvSpPr>
-          <p:cNvPr id="6" name="TextBox 5"/>
+        </p:txBody>
+      </p:sp>
+      <p:sp>
+        <p:nvSpPr>
+          <p:cNvPr id="8" name="TextBox 7"/>
           <p:cNvSpPr txBox="1"/>
           <p:nvPr/>
         </p:nvSpPr>
@@ -16076,21 +16578,90 @@
                 </a:solidFill>
                 <a:latin typeface="Calibri"/>
               </a:rPr>
-              <a:t>Monolito vs microservicios ()</a:t>
-            </a:r>
-          </a:p>
-        </p:txBody>
-      </p:sp>
-      <p:sp>
-        <p:nvSpPr>
-          <p:cNvPr id="5" name="TextBox 4"/>
+              <a:t>Monolito vs microservicios</a:t>
+            </a:r>
+          </a:p>
+        </p:txBody>
+      </p:sp>
+      <p:sp>
+        <p:nvSpPr>
+          <p:cNvPr id="5" name="Rounded Rectangle 4"/>
+          <p:cNvSpPr/>
+          <p:nvPr/>
+        </p:nvSpPr>
+        <p:spPr>
+          <a:xfrm>
+            <a:off x="5797149" y="1343926"/>
+            <a:ext cx="6010497" cy="4837658"/>
+          </a:xfrm>
+          <a:prstGeom prst="roundRect">
+            <a:avLst>
+              <a:gd name="adj" fmla="val 4000"/>
+            </a:avLst>
+          </a:prstGeom>
+          <a:solidFill>
+            <a:srgbClr val="E8EEF4"/>
+          </a:solidFill>
+          <a:ln>
+            <a:noFill/>
+          </a:ln>
+        </p:spPr>
+        <p:style>
+          <a:lnRef idx="1">
+            <a:schemeClr val="accent1"/>
+          </a:lnRef>
+          <a:fillRef idx="3">
+            <a:schemeClr val="accent1"/>
+          </a:fillRef>
+          <a:effectRef idx="2">
+            <a:schemeClr val="accent1"/>
+          </a:effectRef>
+          <a:fontRef idx="minor">
+            <a:schemeClr val="lt1"/>
+          </a:fontRef>
+        </p:style>
+        <p:txBody>
+          <a:bodyPr rtlCol="0" anchor="ctr"/>
+          <a:lstStyle/>
+          <a:p>
+            <a:pPr algn="ctr"/>
+          </a:p>
+        </p:txBody>
+      </p:sp>
+      <p:pic>
+        <p:nvPicPr>
+          <p:cNvPr id="6" name="Picture 5" descr="ilus-decidir-monolito-paso1.png"/>
+          <p:cNvPicPr>
+            <a:picLocks noChangeAspect="1"/>
+          </p:cNvPicPr>
+          <p:nvPr/>
+        </p:nvPicPr>
+        <p:blipFill>
+          <a:blip r:embed="rId2"/>
+          <a:stretch>
+            <a:fillRect/>
+          </a:stretch>
+        </p:blipFill>
+        <p:spPr>
+          <a:xfrm>
+            <a:off x="5870301" y="1417078"/>
+            <a:ext cx="5864193" cy="4691354"/>
+          </a:xfrm>
+          <a:prstGeom prst="rect">
+            <a:avLst/>
+          </a:prstGeom>
+        </p:spPr>
+      </p:pic>
+      <p:sp>
+        <p:nvSpPr>
+          <p:cNvPr id="7" name="TextBox 6"/>
           <p:cNvSpPr txBox="1"/>
           <p:nvPr/>
         </p:nvSpPr>
         <p:spPr>
           <a:xfrm>
-            <a:off x="457200" y="1170432"/>
-            <a:ext cx="11277295" cy="5230368"/>
+            <a:off x="457200" y="1353312"/>
+            <a:ext cx="5093061" cy="5047488"/>
           </a:xfrm>
           <a:prstGeom prst="rect">
             <a:avLst/>
@@ -16202,79 +16773,11 @@
               <a:t> y se elige UNA: «un poco de los dos» no es una decisión.</a:t>
             </a:r>
           </a:p>
-          <a:p>
-            <a:pPr>
-              <a:spcAft>
-                <a:spcPts val="800"/>
-              </a:spcAft>
-            </a:pPr>
-            <a:r>
-              <a:rPr sz="2000" b="0" i="0">
-                <a:solidFill>
-                  <a:srgbClr val="333333"/>
-                </a:solidFill>
-                <a:latin typeface="Calibri"/>
-              </a:rPr>
-              <a:t>–   Se sostiene con </a:t>
-            </a:r>
-            <a:r>
-              <a:rPr sz="2000" b="1" i="0">
-                <a:solidFill>
-                  <a:srgbClr val="333333"/>
-                </a:solidFill>
-                <a:latin typeface="Calibri"/>
-              </a:rPr>
-              <a:t>dos</a:t>
-            </a:r>
-            <a:r>
-              <a:rPr sz="2000" b="0" i="0">
-                <a:solidFill>
-                  <a:srgbClr val="333333"/>
-                </a:solidFill>
-                <a:latin typeface="Calibri"/>
-              </a:rPr>
-              <a:t> criterios: tamaño del equipo (con número y plazo) y acoplamiento (qué partes cambian juntas).</a:t>
-            </a:r>
-          </a:p>
-          <a:p>
-            <a:pPr>
-              <a:spcAft>
-                <a:spcPts val="800"/>
-              </a:spcAft>
-            </a:pPr>
-            <a:r>
-              <a:rPr sz="2000" b="0" i="0">
-                <a:solidFill>
-                  <a:srgbClr val="333333"/>
-                </a:solidFill>
-                <a:latin typeface="Calibri"/>
-              </a:rPr>
-              <a:t>–   Y con lo que se gana </a:t>
-            </a:r>
-            <a:r>
-              <a:rPr sz="2000" b="1" i="0">
-                <a:solidFill>
-                  <a:srgbClr val="333333"/>
-                </a:solidFill>
-                <a:latin typeface="Calibri"/>
-              </a:rPr>
-              <a:t>y</a:t>
-            </a:r>
-            <a:r>
-              <a:rPr sz="2000" b="0" i="0">
-                <a:solidFill>
-                  <a:srgbClr val="333333"/>
-                </a:solidFill>
-                <a:latin typeface="Calibri"/>
-              </a:rPr>
-              <a:t> lo que se pierde: sin la segunda mitad, no hubo decisión.</a:t>
-            </a:r>
-          </a:p>
-        </p:txBody>
-      </p:sp>
-      <p:sp>
-        <p:nvSpPr>
-          <p:cNvPr id="6" name="TextBox 5"/>
+        </p:txBody>
+      </p:sp>
+      <p:sp>
+        <p:nvSpPr>
+          <p:cNvPr id="8" name="TextBox 7"/>
           <p:cNvSpPr txBox="1"/>
           <p:nvPr/>
         </p:nvSpPr>

--- a/Arquitectura de Sistemas Computacionales/Clases/Clase 4 - Microservicios y arquitecturas distribuidas/Presentacion.pptx
+++ b/Arquitectura de Sistemas Computacionales/Clases/Clase 4 - Microservicios y arquitecturas distribuidas/Presentacion.pptx
@@ -654,49 +654,97 @@
           <a:p/>
           <a:p>
             <a:r>
-              <a:t>Un timeout es el tiempo maximo que un servicio espera respuesta antes de darse por vencido; sin timeout explicito, un servicio lento no falla sino que deja colgado a quien lo llamo, y el bloqueo se propaga hacia arriba hasta tumbar el sistema completo.</a:t>
+              <a:t>Si cada flecha del diagrama lleva protocolo y formato, el paso siguiente es decir QUE se negocia por esa flecha, y eso es un contrato.</a:t>
             </a:r>
           </a:p>
           <a:p/>
           <a:p>
             <a:r>
-              <a:t>Los valores tipicos para llamadas internas estan entre 2 y 5 segundos, y son convencion, no ley.</a:t>
+              <a:t>Un contrato entre dos piezas de un sistema tiene cuatro datos y los cuatro se piden por separado: como se llama la interaccion en terminos de negocio</a:t>
             </a:r>
           </a:p>
           <a:p/>
           <a:p>
             <a:r>
-              <a:t>Un reintento es volver a intentar la llamada fallida, y trae una trampa: si todos los clientes reintentan de inmediato contra un servicio ya saturado, lo hunden mas, por lo que se limita a dos o tres reintentos con espera creciente entre uno y otro.</a:t>
+              <a:t>Quien llama a quien, con que verbo y ruta —o con que nombre de evento, si es asincrono—, y cual es el error de negocio que puede devolver.</a:t>
             </a:r>
           </a:p>
           <a:p/>
           <a:p>
             <a:r>
-              <a:t>En CloudLite eso es literal: si el reintento de crear turno no es idempotente, el cliente termina con dos reservas para el mismo horario, y la solucion habitual es que la peticion lleve un identificador unico que el servidor reconozca como repetido.</a:t>
+              <a:t>El cuarto es el que se olvida y el que hace util al contrato.</a:t>
             </a:r>
           </a:p>
           <a:p/>
           <a:p>
             <a:r>
-              <a:t>El cuarto mecanismo es el interruptor de circuito, o circuit breaker, que tras varias fallas consecutivas deja de intentar por un rato y responde de inmediato con un error controlado, para no gastar recursos golpeando algo que esta caido.</a:t>
+              <a:t>Un error de negocio es una respuesta prevista, que forma parte del diseno: la franja ya esta tomada, el cupo se agoto, el usuario no tiene permiso.</a:t>
             </a:r>
           </a:p>
           <a:p/>
           <a:p>
             <a:r>
-              <a:t>NOTAS:</a:t>
+              <a:t>La primera: al menos uno de los tres contratos tiene que ser un 409 de conflicto, y la razon es de dominio y no de capricho.</a:t>
             </a:r>
           </a:p>
           <a:p/>
           <a:p>
             <a:r>
-              <a:t>De ahi salen cuatro mecanismos que el diagrama y la tabla deben poder mencionar.</a:t>
+              <a:t>El 409 es la respuesta que dice «tu peticion es valida, pero el estado actual del sistema no la admite», y en cualquier dominio de reservas ese caso existe siempre: dos clientes quieren la misma franja.</a:t>
             </a:r>
           </a:p>
           <a:p/>
           <a:p>
             <a:r>
-              <a:t>Los reintentos exigen idempotencia, que significa que ejecutar la misma operacion dos veces produzca el mismo resultado que ejecutarla una vez.</a:t>
+              <a:t>Un estudiante que no encuentra ningun 409 en su sistema casi nunca tiene un dominio sin conflictos; lo que tiene es un diagrama que no modela ninguna regla de negocio.</a:t>
+            </a:r>
+          </a:p>
+          <a:p/>
+          <a:p>
+            <a:r>
+              <a:t>La segunda exigencia: los tres contratos no pueden ser entre el mismo par de cajas.</a:t>
+            </a:r>
+          </a:p>
+          <a:p/>
+          <a:p>
+            <a:r>
+              <a:t>Y si el contrato es con la base de datos, en la columna del verbo va la sentencia (INSERT, SELECT) y no una ruta REST</a:t>
+            </a:r>
+          </a:p>
+          <a:p/>
+          <a:p>
+            <a:r>
+              <a:t>Porque la base no expone rutas; ponerle POST /turnos a la base de datos es el error que delata que se lleno la tabla por analogia y no leyendo el propio diagrama.</a:t>
+            </a:r>
+          </a:p>
+          <a:p/>
+          <a:p>
+            <a:r>
+              <a:t>(No se proyecta) Un 500 no es un error de negocio, es una falla del sistema; nadie lo disena, y por eso poner 500 en esa columna es la senal de que el estudiante no distinguio las dos cosas.</a:t>
+            </a:r>
+          </a:p>
+          <a:p/>
+          <a:p>
+            <a:r>
+              <a:t>(No se proyecta) La diapositiva proyecta los tres contratos resueltos sobre CloudLite Turnos y conviene recorrerlos leyendo la cuarta columna en voz alta, porque es lo que hay que replicar.</a:t>
+            </a:r>
+          </a:p>
+          <a:p/>
+          <a:p>
+            <a:r>
+              <a:t>(No se proyecta) Dos exigencias mas, que valen puntos y se pierden sin darse cuenta.</a:t>
+            </a:r>
+          </a:p>
+          <a:p/>
+          <a:p>
+            <a:r>
+              <a:t>(No se proyecta) Conviene tambien tener a mano la diferencia con sus vecinos, porque se confunden: 400 es que la peticion esta mal formada, 401 que no se sabe quien eres, 403 que se sabe y no te corresponde, 404 que no existe, 422 que esta bien formada pero sus datos no pasan una validacion, y 409 que choca con el estado actual.</a:t>
+            </a:r>
+          </a:p>
+          <a:p/>
+          <a:p>
+            <a:r>
+              <a:t>(No se proyecta) Tres filas que digan «App web → API» describen un solo canal contado tres veces, y lo que se esta evaluando es si el estudiante entendio que su sistema tiene varias fronteras.</a:t>
             </a:r>
           </a:p>
         </p:txBody>
@@ -772,73 +820,37 @@
           <a:p/>
           <a:p>
             <a:r>
-              <a:t>El punto donde los proyectos academicos se rompen es el de los datos.</a:t>
+              <a:t>El segundo bloque de contenido es el mas importante del dia: que se paga al distribuir.</a:t>
             </a:r>
           </a:p>
           <a:p/>
           <a:p>
             <a:r>
-              <a:t>La regla ortodoxa de los microservicios dice que cada servicio es dueno exclusivo de su base de datos y que nadie mas la consulta directamente</a:t>
+              <a:t>Una llamada a una funcion dentro del mismo proceso cuesta del orden de nanosegundos y no puede fallar por causas de red.</a:t>
             </a:r>
           </a:p>
           <a:p/>
           <a:p>
             <a:r>
-              <a:t>Si dos servicios comparten tablas, estan acoplados y no pueden desplegarse por separado, lo que contradice la definicion.</a:t>
+              <a:t>La misma llamada convertida en peticion HTTP entre dos contenedores de la misma maquina o del mismo centro de datos cuesta tipicamente entre 1 y 5 milisegundos, y entre regiones geograficas distintas puede subir a 50 o 200 milisegundos.</a:t>
             </a:r>
           </a:p>
           <a:p/>
           <a:p>
             <a:r>
-              <a:t>Pero cumplir esa regla tiene un precio real: una consulta que antes era un join deja de existir y hay que resolverla llamando a otro servicio</a:t>
+              <a:t>Es decir, convertir una llamada local en remota empeora el costo en varios ordenes de magnitud, y a eso se suma que ahora la llamada puede perderse, llegar duplicada o tardar indefinidamente.</a:t>
             </a:r>
           </a:p>
           <a:p/>
           <a:p>
             <a:r>
-              <a:t>Y una operacion que abarca dos servicios ya no puede ser una transaccion unica sino una secuencia de pasos con compensaciones.</a:t>
+              <a:t>Ese calculo es exacto y no una convencion, y es el argumento mas contundente contra multiplicar servicios sin necesidad.</a:t>
             </a:r>
           </a:p>
           <a:p/>
           <a:p>
             <a:r>
-              <a:t>Fingir ortodoxia es peor que documentar una concesion.</a:t>
-            </a:r>
-          </a:p>
-          <a:p/>
-          <a:p>
-            <a:r>
-              <a:t>La regla de propiedad es: cada tabla tiene un solo servicio dueno, que es el unico que escribe en ella; los demas la consultan por su API.</a:t>
-            </a:r>
-          </a:p>
-          <a:p/>
-          <a:p>
-            <a:r>
-              <a:t>En CloudLite Turnos la tabla de turnos es de la API de turnos, y el worker de avisos no la toca: recibe por la cola el dato que necesita.</a:t>
-            </a:r>
-          </a:p>
-          <a:p/>
-          <a:p>
-            <a:r>
-              <a:t>Dos servicios que escriben en la misma tabla quedan acoplados aunque se desplieguen por separado, y ese es el error mas comun.</a:t>
-            </a:r>
-          </a:p>
-          <a:p/>
-          <a:p>
-            <a:r>
-              <a:t>NOTAS:</a:t>
-            </a:r>
-          </a:p>
-          <a:p/>
-          <a:p>
-            <a:r>
-              <a:t>Eso introduce consistencia eventual, es decir un lapso durante el cual dos partes del sistema tienen versiones distintas de la verdad, con consecuencias visibles para el usuario.</a:t>
-            </a:r>
-          </a:p>
-          <a:p/>
-          <a:p>
-            <a:r>
-              <a:t>(No se proyecta) La postura honesta para este curso es que un CloudLite con una base de datos compartida y propiedad de tablas claramente documentada resulta aceptable, siempre que el estudiante lo registre como un trade-off consciente en su informe y no lo presente como microservicios puros.</a:t>
+              <a:t>(No se proyecta) Hay una aritmetica que conviene mostrar porque impresiona con razon: si una peticion del usuario atraviesa en cadena cinco servicios y cada uno esta disponible el 99,9 % del tiempo, la disponibilidad del recorrido completo es 0,999 elevado a la quinta potencia, alrededor del 99,5 %, lo que pasa de unos 43 minutos de indisponibilidad al mes a mas de tres horas.</a:t>
             </a:r>
           </a:p>
         </p:txBody>
@@ -914,157 +926,49 @@
           <a:p/>
           <a:p>
             <a:r>
-              <a:t>Los riesgos de distribucion no son una lista libre: son TRES riesgos, cada uno responde una pregunta distinta, y estan elegidos para que ninguno se pueda contestar sin mirar el propio diagrama.</a:t>
+              <a:t>Un timeout es el tiempo maximo que un servicio espera respuesta antes de darse por vencido; sin timeout explicito, un servicio lento no falla sino que deja colgado a quien lo llamo, y el bloqueo se propaga hacia arriba hasta tumbar el sistema completo.</a:t>
             </a:r>
           </a:p>
           <a:p/>
           <a:p>
             <a:r>
-              <a:t>Se nombra UNA caja del diagrama y se dice que deja de funcionar y —esta es la mitad que se olvida— que SIGUE funcionando.</a:t>
+              <a:t>Los valores tipicos para llamadas internas estan entre 2 y 5 segundos, y son convencion, no ley.</a:t>
             </a:r>
           </a:p>
           <a:p/>
           <a:p>
             <a:r>
-              <a:t>En CloudLite Turnos, si se cae el trabajador de notificaciones, los turnos se siguen reservando y lo que se pierde es el correo de confirmacion; si se cae la base de turnos, no se reserva nada</a:t>
+              <a:t>Un reintento es volver a intentar la llamada fallida, y trae una trampa: si todos los clientes reintentan de inmediato contra un servicio ya saturado, lo hunden mas, por lo que se limita a dos o tres reintentos con espera creciente entre uno y otro.</a:t>
             </a:r>
           </a:p>
           <a:p/>
           <a:p>
             <a:r>
-              <a:t>Pero la aplicacion web sigue cargando y puede mostrar un mensaje decente en lugar de una pantalla en blanco.</a:t>
+              <a:t>En CloudLite eso es literal: si el reintento de crear turno no es idempotente, el cliente termina con dos reservas para el mismo horario, y la solucion habitual es que la peticion lleve un identificador unico que el servidor reconozca como repetido.</a:t>
             </a:r>
           </a:p>
           <a:p/>
           <a:p>
             <a:r>
-              <a:t>Reservar un turno en el ejemplo de tres cajas son tres saltos: el navegador a la aplicacion web, la aplicacion web a la API, y la API a la base de datos; si se agrega el correo son cuatro, y si el correo se envia por cola, cinco.</a:t>
+              <a:t>El cuarto mecanismo es el interruptor de circuito, o circuit breaker, que tras varias fallas consecutivas deja de intentar por un rato y responde de inmediato con un error controlado, para no gastar recursos golpeando algo que esta caido.</a:t>
             </a:r>
           </a:p>
           <a:p/>
           <a:p>
             <a:r>
-              <a:t>El numero importa por lo que se explico arriba: cada salto agrega latencia y una probabilidad de fallo, y esa aritmetica es la unica defensa contra multiplicar cajas por gusto.</a:t>
+              <a:t>NOTAS:</a:t>
             </a:r>
           </a:p>
           <a:p/>
           <a:p>
             <a:r>
-              <a:t>Un estudiante que no puede contar sus saltos no esta leyendo su diagrama, esta recordandolo.</a:t>
+              <a:t>De ahi salen cuatro mecanismos que el diagrama y la tabla deben poder mencionar.</a:t>
             </a:r>
           </a:p>
           <a:p/>
           <a:p>
             <a:r>
-              <a:t>El tercero pregunta por un dato que se escribe en dos pasos, y es el mas dificil de los tres porque exige mirar la escritura y no la lectura.</a:t>
-            </a:r>
-          </a:p>
-          <a:p/>
-          <a:p>
-            <a:r>
-              <a:t>En el ejemplo, el turno se escribe en la base y despues se publica el mensaje del correo: si el segundo paso falla, el turno existe y el cliente nunca se entero.</a:t>
-            </a:r>
-          </a:p>
-          <a:p/>
-          <a:p>
-            <a:r>
-              <a:t>Ese es el problema de fondo de todo sistema distribuido, y hoy no se resuelve con una saga completa: se reconoce, se nombra el dato concreto y se dice que queda inconsistente.</a:t>
-            </a:r>
-          </a:p>
-          <a:p/>
-          <a:p>
-            <a:r>
-              <a:t>Si un estudiante dice que no encuentra ningun riesgo, casi siempre es porque su diagrama tiene flechas sin protocolo o sin formato: no sabe por donde puede romperse porque nunca definio como se comunican las piezas.</a:t>
-            </a:r>
-          </a:p>
-          <a:p/>
-          <a:p>
-            <a:r>
-              <a:t>Los tres riesgos clasicos de un sistema distribuido son: la red falla o se demora, un servicio deja de responder mientras los demas siguen, y los datos quedan inconsistentes entre dos servicios.</a:t>
-            </a:r>
-          </a:p>
-          <a:p/>
-          <a:p>
-            <a:r>
-              <a:t>En la app de turnos, si el worker de avisos cae, los turnos se siguen reservando y los avisos esperan en la cola: el fallo queda contenido.</a:t>
-            </a:r>
-          </a:p>
-          <a:p/>
-          <a:p>
-            <a:r>
-              <a:t>NOTAS:</a:t>
-            </a:r>
-          </a:p>
-          <a:p/>
-          <a:p>
-            <a:r>
-              <a:t>El primero pregunta que se cae.</a:t>
-            </a:r>
-          </a:p>
-          <a:p/>
-          <a:p>
-            <a:r>
-              <a:t>El segundo pregunta cuantos saltos de red tiene una operacion de punta a punta, y se responde con un numero, contado sobre el propio dibujo.</a:t>
-            </a:r>
-          </a:p>
-          <a:p/>
-          <a:p>
-            <a:r>
-              <a:t>PREGUNTAS FRECUENTES Y CIERRE CONCEPTUAL ()</a:t>
-            </a:r>
-          </a:p>
-          <a:p/>
-          <a:p>
-            <a:r>
-              <a:t>Cuantos microservicios son los correctos: no hay numero correcto, hay justificacion por frontera</a:t>
-            </a:r>
-          </a:p>
-          <a:p/>
-          <a:p>
-            <a:r>
-              <a:t>Y el rango de dos a cinco contenedores que exige el curso es una restriccion pedagogica pensada para proyectos de una a tres personas en doce semanas, no un hallazgo de la ingenieria.</a:t>
-            </a:r>
-          </a:p>
-          <a:p/>
-          <a:p>
-            <a:r>
-              <a:t>Si las empresas grandes tienen cientos de servicios, por que nosotros solo tres: porque el numero de servicios que una organizacion puede sostener es funcion del numero de equipos autonomos y de la madurez de su automatizacion de despliegue y observabilidad</a:t>
-            </a:r>
-          </a:p>
-          <a:p/>
-          <a:p>
-            <a:r>
-              <a:t>Condiciones que un equipo de tres no tiene, y copiar la forma sin las condiciones produce lo que aqui se llama microservicios teatro.</a:t>
-            </a:r>
-          </a:p>
-          <a:p/>
-          <a:p>
-            <a:r>
-              <a:t>Y la tercera, que hay que responder sin ambiguedad: esta mal hacer un monolito.</a:t>
-            </a:r>
-          </a:p>
-          <a:p/>
-          <a:p>
-            <a:r>
-              <a:t>(No se proyecta) Conviene dictarlos asi, porque un estudiante que entiende por que son esos tres no escribe generalidades.</a:t>
-            </a:r>
-          </a:p>
-          <a:p/>
-          <a:p>
-            <a:r>
-              <a:t>(No se proyecta) «Se cae todo» vale la mitad de los puntos, y con razon: en un sistema bien partido nunca se cae todo, y el ejercicio consiste precisamente en descubrir que algunas cosas sobreviven.</a:t>
-            </a:r>
-          </a:p>
-          <a:p/>
-          <a:p>
-            <a:r>
-              <a:t>(No se proyecta) Ese razonamiento es el que en la Clase 7 permite decidir que va en cada zona de red y en la Clase 13 que pieza vale la pena replicar.</a:t>
-            </a:r>
-          </a:p>
-          <a:p/>
-          <a:p>
-            <a:r>
-              <a:t>(No se proyecta) Devolverle el diagrama es mas util que darle un ejemplo.</a:t>
+              <a:t>Los reintentos exigen idempotencia, que significa que ejecutar la misma operacion dos veces produzca el mismo resultado que ejecutarla una vez.</a:t>
             </a:r>
           </a:p>
         </p:txBody>
@@ -1134,6 +1038,374 @@
           <a:lstStyle/>
           <a:p>
             <a:r>
+              <a:t>DESARROLLO (para explicarlo, no se proyecta):</a:t>
+            </a:r>
+          </a:p>
+          <a:p/>
+          <a:p>
+            <a:r>
+              <a:t>El punto donde los proyectos academicos se rompen es el de los datos.</a:t>
+            </a:r>
+          </a:p>
+          <a:p/>
+          <a:p>
+            <a:r>
+              <a:t>La regla ortodoxa de los microservicios dice que cada servicio es dueno exclusivo de su base de datos y que nadie mas la consulta directamente</a:t>
+            </a:r>
+          </a:p>
+          <a:p/>
+          <a:p>
+            <a:r>
+              <a:t>Si dos servicios comparten tablas, estan acoplados y no pueden desplegarse por separado, lo que contradice la definicion.</a:t>
+            </a:r>
+          </a:p>
+          <a:p/>
+          <a:p>
+            <a:r>
+              <a:t>Pero cumplir esa regla tiene un precio real: una consulta que antes era un join deja de existir y hay que resolverla llamando a otro servicio</a:t>
+            </a:r>
+          </a:p>
+          <a:p/>
+          <a:p>
+            <a:r>
+              <a:t>Y una operacion que abarca dos servicios ya no puede ser una transaccion unica sino una secuencia de pasos con compensaciones.</a:t>
+            </a:r>
+          </a:p>
+          <a:p/>
+          <a:p>
+            <a:r>
+              <a:t>Fingir ortodoxia es peor que documentar una concesion.</a:t>
+            </a:r>
+          </a:p>
+          <a:p/>
+          <a:p>
+            <a:r>
+              <a:t>La regla de propiedad es: cada tabla tiene un solo servicio dueno, que es el unico que escribe en ella; los demas la consultan por su API.</a:t>
+            </a:r>
+          </a:p>
+          <a:p/>
+          <a:p>
+            <a:r>
+              <a:t>En CloudLite Turnos la tabla de turnos es de la API de turnos, y el worker de avisos no la toca: recibe por la cola el dato que necesita.</a:t>
+            </a:r>
+          </a:p>
+          <a:p/>
+          <a:p>
+            <a:r>
+              <a:t>Dos servicios que escriben en la misma tabla quedan acoplados aunque se desplieguen por separado, y ese es el error mas comun.</a:t>
+            </a:r>
+          </a:p>
+          <a:p/>
+          <a:p>
+            <a:r>
+              <a:t>NOTAS:</a:t>
+            </a:r>
+          </a:p>
+          <a:p/>
+          <a:p>
+            <a:r>
+              <a:t>Eso introduce consistencia eventual, es decir un lapso durante el cual dos partes del sistema tienen versiones distintas de la verdad, con consecuencias visibles para el usuario.</a:t>
+            </a:r>
+          </a:p>
+          <a:p/>
+          <a:p>
+            <a:r>
+              <a:t>(No se proyecta) La postura honesta para este curso es que un CloudLite con una base de datos compartida y propiedad de tablas claramente documentada resulta aceptable, siempre que el estudiante lo registre como un trade-off consciente en su informe y no lo presente como microservicios puros.</a:t>
+            </a:r>
+          </a:p>
+        </p:txBody>
+      </p:sp>
+      <p:sp>
+        <p:nvSpPr>
+          <p:cNvPr id="4" name="Slide Number Placeholder 3"/>
+          <p:cNvSpPr>
+            <a:spLocks noGrp="1"/>
+          </p:cNvSpPr>
+          <p:nvPr>
+            <p:ph type="sldNum" idx="5" sz="quarter"/>
+          </p:nvPr>
+        </p:nvSpPr>
+        <p:spPr/>
+      </p:sp>
+    </p:spTree>
+  </p:cSld>
+  <p:clrMapOvr>
+    <a:masterClrMapping/>
+  </p:clrMapOvr>
+</p:notes>
+</file>
+
+<file path=ppt/notesSlides/notesSlide14.xml><?xml version="1.0" encoding="utf-8"?>
+<p:notes xmlns:a="http://schemas.openxmlformats.org/drawingml/2006/main" xmlns:p="http://schemas.openxmlformats.org/presentationml/2006/main" xmlns:r="http://schemas.openxmlformats.org/officeDocument/2006/relationships">
+  <p:cSld>
+    <p:spTree>
+      <p:nvGrpSpPr>
+        <p:cNvPr id="1" name=""/>
+        <p:cNvGrpSpPr/>
+        <p:nvPr/>
+      </p:nvGrpSpPr>
+      <p:grpSpPr>
+        <a:xfrm>
+          <a:off x="0" y="0"/>
+          <a:ext cx="0" cy="0"/>
+          <a:chOff x="0" y="0"/>
+          <a:chExt cx="0" cy="0"/>
+        </a:xfrm>
+      </p:grpSpPr>
+      <p:sp>
+        <p:nvSpPr>
+          <p:cNvPr id="2" name="Slide Image Placeholder 1"/>
+          <p:cNvSpPr>
+            <a:spLocks noGrp="1"/>
+          </p:cNvSpPr>
+          <p:nvPr>
+            <p:ph type="sldImg" idx="2"/>
+          </p:nvPr>
+        </p:nvSpPr>
+        <p:spPr/>
+      </p:sp>
+      <p:sp>
+        <p:nvSpPr>
+          <p:cNvPr id="3" name="Notes Placeholder 2"/>
+          <p:cNvSpPr>
+            <a:spLocks noGrp="1"/>
+          </p:cNvSpPr>
+          <p:nvPr>
+            <p:ph type="body" idx="3" sz="quarter"/>
+          </p:nvPr>
+        </p:nvSpPr>
+        <p:spPr/>
+        <p:txBody>
+          <a:bodyPr/>
+          <a:lstStyle/>
+          <a:p>
+            <a:r>
+              <a:t>DESARROLLO (para explicarlo, no se proyecta):</a:t>
+            </a:r>
+          </a:p>
+          <a:p/>
+          <a:p>
+            <a:r>
+              <a:t>Los riesgos de distribucion no son una lista libre: son TRES riesgos, cada uno responde una pregunta distinta, y estan elegidos para que ninguno se pueda contestar sin mirar el propio diagrama.</a:t>
+            </a:r>
+          </a:p>
+          <a:p/>
+          <a:p>
+            <a:r>
+              <a:t>Se nombra UNA caja del diagrama y se dice que deja de funcionar y —esta es la mitad que se olvida— que SIGUE funcionando.</a:t>
+            </a:r>
+          </a:p>
+          <a:p/>
+          <a:p>
+            <a:r>
+              <a:t>En CloudLite Turnos, si se cae el trabajador de notificaciones, los turnos se siguen reservando y lo que se pierde es el correo de confirmacion; si se cae la base de turnos, no se reserva nada</a:t>
+            </a:r>
+          </a:p>
+          <a:p/>
+          <a:p>
+            <a:r>
+              <a:t>Pero la aplicacion web sigue cargando y puede mostrar un mensaje decente en lugar de una pantalla en blanco.</a:t>
+            </a:r>
+          </a:p>
+          <a:p/>
+          <a:p>
+            <a:r>
+              <a:t>Reservar un turno en el ejemplo de tres cajas son tres saltos: el navegador a la aplicacion web, la aplicacion web a la API, y la API a la base de datos; si se agrega el correo son cuatro, y si el correo se envia por cola, cinco.</a:t>
+            </a:r>
+          </a:p>
+          <a:p/>
+          <a:p>
+            <a:r>
+              <a:t>El numero importa por lo que se explico arriba: cada salto agrega latencia y una probabilidad de fallo, y esa aritmetica es la unica defensa contra multiplicar cajas por gusto.</a:t>
+            </a:r>
+          </a:p>
+          <a:p/>
+          <a:p>
+            <a:r>
+              <a:t>Un estudiante que no puede contar sus saltos no esta leyendo su diagrama, esta recordandolo.</a:t>
+            </a:r>
+          </a:p>
+          <a:p/>
+          <a:p>
+            <a:r>
+              <a:t>El tercero pregunta por un dato que se escribe en dos pasos, y es el mas dificil de los tres porque exige mirar la escritura y no la lectura.</a:t>
+            </a:r>
+          </a:p>
+          <a:p/>
+          <a:p>
+            <a:r>
+              <a:t>En el ejemplo, el turno se escribe en la base y despues se publica el mensaje del correo: si el segundo paso falla, el turno existe y el cliente nunca se entero.</a:t>
+            </a:r>
+          </a:p>
+          <a:p/>
+          <a:p>
+            <a:r>
+              <a:t>Ese es el problema de fondo de todo sistema distribuido, y hoy no se resuelve con una saga completa: se reconoce, se nombra el dato concreto y se dice que queda inconsistente.</a:t>
+            </a:r>
+          </a:p>
+          <a:p/>
+          <a:p>
+            <a:r>
+              <a:t>Si un estudiante dice que no encuentra ningun riesgo, casi siempre es porque su diagrama tiene flechas sin protocolo o sin formato: no sabe por donde puede romperse porque nunca definio como se comunican las piezas.</a:t>
+            </a:r>
+          </a:p>
+          <a:p/>
+          <a:p>
+            <a:r>
+              <a:t>Los tres riesgos clasicos de un sistema distribuido son: la red falla o se demora, un servicio deja de responder mientras los demas siguen, y los datos quedan inconsistentes entre dos servicios.</a:t>
+            </a:r>
+          </a:p>
+          <a:p/>
+          <a:p>
+            <a:r>
+              <a:t>En la app de turnos, si el worker de avisos cae, los turnos se siguen reservando y los avisos esperan en la cola: el fallo queda contenido.</a:t>
+            </a:r>
+          </a:p>
+          <a:p/>
+          <a:p>
+            <a:r>
+              <a:t>NOTAS:</a:t>
+            </a:r>
+          </a:p>
+          <a:p/>
+          <a:p>
+            <a:r>
+              <a:t>El primero pregunta que se cae.</a:t>
+            </a:r>
+          </a:p>
+          <a:p/>
+          <a:p>
+            <a:r>
+              <a:t>El segundo pregunta cuantos saltos de red tiene una operacion de punta a punta, y se responde con un numero, contado sobre el propio dibujo.</a:t>
+            </a:r>
+          </a:p>
+          <a:p/>
+          <a:p>
+            <a:r>
+              <a:t>PREGUNTAS FRECUENTES Y CIERRE CONCEPTUAL ()</a:t>
+            </a:r>
+          </a:p>
+          <a:p/>
+          <a:p>
+            <a:r>
+              <a:t>Cuantos microservicios son los correctos: no hay numero correcto, hay justificacion por frontera</a:t>
+            </a:r>
+          </a:p>
+          <a:p/>
+          <a:p>
+            <a:r>
+              <a:t>Y el rango de dos a cinco contenedores que exige el curso es una restriccion pedagogica pensada para proyectos de una a tres personas en doce semanas, no un hallazgo de la ingenieria.</a:t>
+            </a:r>
+          </a:p>
+          <a:p/>
+          <a:p>
+            <a:r>
+              <a:t>Si las empresas grandes tienen cientos de servicios, por que nosotros solo tres: porque el numero de servicios que una organizacion puede sostener es funcion del numero de equipos autonomos y de la madurez de su automatizacion de despliegue y observabilidad</a:t>
+            </a:r>
+          </a:p>
+          <a:p/>
+          <a:p>
+            <a:r>
+              <a:t>Condiciones que un equipo de tres no tiene, y copiar la forma sin las condiciones produce lo que aqui se llama microservicios teatro.</a:t>
+            </a:r>
+          </a:p>
+          <a:p/>
+          <a:p>
+            <a:r>
+              <a:t>Y la tercera, que hay que responder sin ambiguedad: esta mal hacer un monolito.</a:t>
+            </a:r>
+          </a:p>
+          <a:p/>
+          <a:p>
+            <a:r>
+              <a:t>(No se proyecta) Conviene dictarlos asi, porque un estudiante que entiende por que son esos tres no escribe generalidades.</a:t>
+            </a:r>
+          </a:p>
+          <a:p/>
+          <a:p>
+            <a:r>
+              <a:t>(No se proyecta) «Se cae todo» vale la mitad de los puntos, y con razon: en un sistema bien partido nunca se cae todo, y el ejercicio consiste precisamente en descubrir que algunas cosas sobreviven.</a:t>
+            </a:r>
+          </a:p>
+          <a:p/>
+          <a:p>
+            <a:r>
+              <a:t>(No se proyecta) Ese razonamiento es el que en la Clase 7 permite decidir que va en cada zona de red y en la Clase 13 que pieza vale la pena replicar.</a:t>
+            </a:r>
+          </a:p>
+          <a:p/>
+          <a:p>
+            <a:r>
+              <a:t>(No se proyecta) Devolverle el diagrama es mas util que darle un ejemplo.</a:t>
+            </a:r>
+          </a:p>
+        </p:txBody>
+      </p:sp>
+      <p:sp>
+        <p:nvSpPr>
+          <p:cNvPr id="4" name="Slide Number Placeholder 3"/>
+          <p:cNvSpPr>
+            <a:spLocks noGrp="1"/>
+          </p:cNvSpPr>
+          <p:nvPr>
+            <p:ph type="sldNum" idx="5" sz="quarter"/>
+          </p:nvPr>
+        </p:nvSpPr>
+        <p:spPr/>
+      </p:sp>
+    </p:spTree>
+  </p:cSld>
+  <p:clrMapOvr>
+    <a:masterClrMapping/>
+  </p:clrMapOvr>
+</p:notes>
+</file>
+
+<file path=ppt/notesSlides/notesSlide15.xml><?xml version="1.0" encoding="utf-8"?>
+<p:notes xmlns:a="http://schemas.openxmlformats.org/drawingml/2006/main" xmlns:p="http://schemas.openxmlformats.org/presentationml/2006/main" xmlns:r="http://schemas.openxmlformats.org/officeDocument/2006/relationships">
+  <p:cSld>
+    <p:spTree>
+      <p:nvGrpSpPr>
+        <p:cNvPr id="1" name=""/>
+        <p:cNvGrpSpPr/>
+        <p:nvPr/>
+      </p:nvGrpSpPr>
+      <p:grpSpPr>
+        <a:xfrm>
+          <a:off x="0" y="0"/>
+          <a:ext cx="0" cy="0"/>
+          <a:chOff x="0" y="0"/>
+          <a:chExt cx="0" cy="0"/>
+        </a:xfrm>
+      </p:grpSpPr>
+      <p:sp>
+        <p:nvSpPr>
+          <p:cNvPr id="2" name="Slide Image Placeholder 1"/>
+          <p:cNvSpPr>
+            <a:spLocks noGrp="1"/>
+          </p:cNvSpPr>
+          <p:nvPr>
+            <p:ph type="sldImg" idx="2"/>
+          </p:nvPr>
+        </p:nvSpPr>
+        <p:spPr/>
+      </p:sp>
+      <p:sp>
+        <p:nvSpPr>
+          <p:cNvPr id="3" name="Notes Placeholder 2"/>
+          <p:cNvSpPr>
+            <a:spLocks noGrp="1"/>
+          </p:cNvSpPr>
+          <p:nvPr>
+            <p:ph type="body" idx="3" sz="quarter"/>
+          </p:nvPr>
+        </p:nvSpPr>
+        <p:spPr/>
+        <p:txBody>
+          <a:bodyPr/>
+          <a:lstStyle/>
+          <a:p>
+            <a:r>
               <a:t>TEXTO COMPLETO DE LA LÁMINA (se proyecta resumido):</a:t>
             </a:r>
           </a:p>
@@ -1744,43 +2016,62 @@
           <a:lstStyle/>
           <a:p>
             <a:r>
-              <a:t>TEXTO COMPLETO DE LA LÁMINA (se proyecta resumido):</a:t>
+              <a:t>QUÉ ES (dilo así): En Mermaid un diagrama C4 se escribe como texto. A la izquierda está ese texto; a la derecha, lo que dibuja. El visor dibuja cualquier cosa que tenga la sintaxis correcta, pero hay tres reglas que no revisa por ti.</a:t>
             </a:r>
           </a:p>
           <a:p/>
           <a:p>
             <a:r>
-              <a:t>Se abre la ÚNICA caja del Context de la Clase 1: los actores y los externos siguen ahí, fuera del sistema.</a:t>
+              <a:t>CÓMO DARLA (≈3 min):</a:t>
+            </a:r>
+          </a:p>
+          <a:p>
+            <a:r>
+              <a:t>  • Al entrar: Lee el código línea por línea señalando su caja en el dibujo: Container → la caja de la API; ContainerDb → el cilindro; Rel → la flecha con su rótulo.</a:t>
+            </a:r>
+          </a:p>
+          <a:p>
+            <a:r>
+              <a:t>  • Clic 1: Regla 1: el tercer dato del Container es la tecnología (Node.js). Sin ella, el diagrama no dice con qué se construye.</a:t>
+            </a:r>
+          </a:p>
+          <a:p>
+            <a:r>
+              <a:t>  • Clic 2: Regla 2: lo que guarda datos se declara ContainerDb, por eso sale como cilindro y no como una caja más.</a:t>
+            </a:r>
+          </a:p>
+          <a:p>
+            <a:r>
+              <a:t>  • Clic 3: Regla 3: cada Rel lleva verbo («INSERT y SELECT») y protocolo/formato («TCP/SQL»). «usa» no le dice nada a quien lee.</a:t>
             </a:r>
           </a:p>
           <a:p/>
           <a:p>
             <a:r>
-              <a:t>Tres datos por caja, obligatorios: nombre · tecnología · responsabilidad en una frase.</a:t>
+              <a:t>EJEMPLO: Mal: Container(api, "API") — sin tecnología. Rel(api, db, "usa") — sin verbo concreto ni protocolo.</a:t>
             </a:r>
           </a:p>
           <a:p/>
           <a:p>
             <a:r>
-              <a:t>Lo que guarda datos se marca como almacén (`ContainerDb`), no como una caja más.</a:t>
+              <a:t>SI PREGUNTAN:</a:t>
+            </a:r>
+          </a:p>
+          <a:p>
+            <a:r>
+              <a:t>  • «¿Dónde pruebo el código?» → En cualquier visor de Mermaid (por ejemplo mermaid.live): se pega el texto y se ve el dibujo.</a:t>
             </a:r>
           </a:p>
           <a:p/>
           <a:p>
             <a:r>
-              <a:t>Los nombres son idénticos a los del C4 Context: si allí decía «Pasarela de pagos», aquí no puede decir «Pagos».</a:t>
+              <a:t>CUIDADO: Los nombres (api, db) se repiten idénticos en el diagrama de Despliegue y en el de Componentes: si cambian, ya no se puede seguir una pieza entre diagramas.</a:t>
             </a:r>
           </a:p>
           <a:p/>
           <a:p>
             <a:r>
-              <a:t>Cada flecha lleva protocolo Y formato (`HTTPS/JSON`, `TCP/SQL`): una línea muda no cuenta.</a:t>
-            </a:r>
-          </a:p>
-          <a:p/>
-          <a:p>
-            <a:r>
-              <a:t>Entre 2 y 5 cajas. El número tiene que ser coherente con la decisión de la diapositiva anterior.</a:t>
+              <a:t>PASA A LA SIGUIENTE: Ahora el diagrama completo de la app de turnos con el mismo molde.</a:t>
             </a:r>
           </a:p>
         </p:txBody>
@@ -1850,85 +2141,43 @@
           <a:lstStyle/>
           <a:p>
             <a:r>
-              <a:t>DESARROLLO (para explicarlo, no se proyecta):</a:t>
+              <a:t>TEXTO COMPLETO DE LA LÁMINA (se proyecta resumido):</a:t>
             </a:r>
           </a:p>
           <a:p/>
           <a:p>
             <a:r>
-              <a:t>En este curso el diagrama se escribe como codigo Mermaid, y un visor Mermaid lo renderiza.</a:t>
+              <a:t>Se abre la ÚNICA caja del Context de la Clase 1: los actores y los externos siguen ahí, fuera del sistema.</a:t>
             </a:r>
           </a:p>
           <a:p/>
           <a:p>
             <a:r>
-              <a:t>La primera linea es exactamente C4Container, sin nada antes</a:t>
+              <a:t>Tres datos por caja, obligatorios: nombre · tecnología · responsabilidad en una frase.</a:t>
             </a:r>
           </a:p>
           <a:p/>
           <a:p>
             <a:r>
-              <a:t>Los actores se declaran con Person y los sistemas ajenos con System_Ext, los dos por fuera del bloque del sistema.</a:t>
+              <a:t>Lo que guarda datos se marca como almacén (`ContainerDb`), no como una caja más.</a:t>
             </a:r>
           </a:p>
           <a:p/>
           <a:p>
             <a:r>
-              <a:t>El sistema propio se abre con System_Boundary y una llave, y dentro van las cajas: Container para lo que ejecuta y ContainerDb para lo que almacena, cada una con identificador, nombre, tecnologia y responsabilidad.</a:t>
+              <a:t>Los nombres son idénticos a los del C4 Context: si allí decía «Pasarela de pagos», aquí no puede decir «Pagos».</a:t>
             </a:r>
           </a:p>
           <a:p/>
           <a:p>
             <a:r>
-              <a:t>La llave se cierra, y las relaciones van despues, con Rel y cuatro datos: origen, destino, que hace y con que protocolo y formato.</a:t>
+              <a:t>Cada flecha lleva protocolo Y formato (`HTTPS/JSON`, `TCP/SQL`): una línea muda no cuenta.</a:t>
             </a:r>
           </a:p>
           <a:p/>
           <a:p>
             <a:r>
-              <a:t>El identificador corto de cada caja —en el molde proyectado son spa, api, db y worker— es el que usan las relaciones; si no coincide, no dibuja la flecha y tampoco avisa con claridad.</a:t>
-            </a:r>
-          </a:p>
-          <a:p/>
-          <a:p>
-            <a:r>
-              <a:t>La regla operativa del dia se dice como consecuencia y no como consejo: se pega el codigo, se mira renderizado, y solo entonces se envia.</a:t>
-            </a:r>
-          </a:p>
-          <a:p/>
-          <a:p>
-            <a:r>
-              <a:t>(No se proyecta) Eso cambia lo que el docente tiene que ensenar, porque un boceto correcto escrito con la sintaxis equivocada no renderiza y entonces no hay diagrama que calificar.</a:t>
-            </a:r>
-          </a:p>
-          <a:p/>
-          <a:p>
-            <a:r>
-              <a:t>(No se proyecta) Son cinco reglas de escritura y conviene recorrerlas sobre la diapositiva, linea por linea.</a:t>
-            </a:r>
-          </a:p>
-          <a:p/>
-          <a:p>
-            <a:r>
-              <a:t>(No se proyecta) C4Context es el nivel de la Clase 1 y graph TD es otro tipo de diagrama, y cualquiera de los dos deja la respuesta en el nivel equivocado.</a:t>
-            </a:r>
-          </a:p>
-          <a:p/>
-          <a:p>
-            <a:r>
-              <a:t>(No se proyecta) Vale la pena decir en voz alta que aqui el uso de una IA es legitimo y ademas recomendado: pasar un boceto a codigo Mermaid es justo la tarea mecanica en la que ayuda sin sustituir el criterio.</a:t>
-            </a:r>
-          </a:p>
-          <a:p/>
-          <a:p>
-            <a:r>
-              <a:t>(No se proyecta) Lo que NO delega el estudiante es la revision, y hay tres cosas que tiene que verificar el mismo antes de enviar, porque son las que la IA equivoca con frecuencia: que la primera linea sea C4Container, que la base de datos haya quedado como ContainerDb y no como Container, y que ninguna relacion haya perdido la mitad de su etiqueta.</a:t>
-            </a:r>
-          </a:p>
-          <a:p/>
-          <a:p>
-            <a:r>
-              <a:t>(No se proyecta) Un codigo que no renderiza vale cero, y es el unico punto del taller donde el estudiante puede comprobar su propia nota antes de entregar.</a:t>
+              <a:t>Entre 2 y 5 cajas. El número tiene que ser coherente con la decisión de la diapositiva anterior.</a:t>
             </a:r>
           </a:p>
         </p:txBody>
@@ -2004,67 +2253,79 @@
           <a:p/>
           <a:p>
             <a:r>
-              <a:t>CloudLite Turnos, el sistema de agendamiento de la barberia, empieza con tres contenedores: una aplicacion web que corre en el navegador del cliente, una API que atiende peticiones HTTP con cuerpo en formato JSON</a:t>
+              <a:t>En este curso el diagrama se escribe como codigo Mermaid, y un visor Mermaid lo renderiza.</a:t>
             </a:r>
           </a:p>
           <a:p/>
           <a:p>
             <a:r>
-              <a:t>Y una base de datos relacional donde viven turnos, clientes y horarios.</a:t>
+              <a:t>La primera linea es exactamente C4Container, sin nada antes</a:t>
             </a:r>
           </a:p>
           <a:p/>
           <a:p>
             <a:r>
-              <a:t>Ahora viene la parte interesante: la cuarta caja aparece solo si hay una razon.</a:t>
+              <a:t>Los actores se declaran con Person y los sistemas ajenos con System_Ext, los dos por fuera del bloque del sistema.</a:t>
             </a:r>
           </a:p>
           <a:p/>
           <a:p>
             <a:r>
-              <a:t>El envio del correo de confirmacion tarda, con proveedores reales de correo, entre 300 y 2000 milisegundos, y puede fallar por causas ajenas al sistema.</a:t>
+              <a:t>El sistema propio se abre con System_Boundary y una llave, y dentro van las cajas: Container para lo que ejecuta y ContainerDb para lo que almacena, cada una con identificador, nombre, tecnologia y responsabilidad.</a:t>
             </a:r>
           </a:p>
           <a:p/>
           <a:p>
             <a:r>
-              <a:t>Cuatro contenedores con una justificacion medible es mejor arquitectura que ocho por moda.</a:t>
+              <a:t>La llave se cierra, y las relaciones van despues, con Rel y cuatro datos: origen, destino, que hace y con que protocolo y formato.</a:t>
             </a:r>
           </a:p>
           <a:p/>
           <a:p>
             <a:r>
-              <a:t>NOTAS:</a:t>
+              <a:t>El identificador corto de cada caja —en el molde proyectado son spa, api, db y worker— es el que usan las relaciones; si no coincide, no dibuja la flecha y tampoco avisa con claridad.</a:t>
             </a:r>
           </a:p>
           <a:p/>
           <a:p>
             <a:r>
-              <a:t>La flecha entre la web y la API dice «HTTPS/JSON, consulta disponibilidad y crea reservas»; la flecha entre la API y la base de datos dice «TCP, lee y escribe turnos».</a:t>
+              <a:t>La regla operativa del dia se dice como consecuencia y no como consejo: se pega el codigo, se mira renderizado, y solo entonces se envia.</a:t>
             </a:r>
           </a:p>
           <a:p/>
           <a:p>
             <a:r>
-              <a:t>Con eso ya existe un diagrama valido y defendible.</a:t>
+              <a:t>(No se proyecta) Eso cambia lo que el docente tiene que ensenar, porque un boceto correcto escrito con la sintaxis equivocada no renderiza y entonces no hay diagrama que calificar.</a:t>
             </a:r>
           </a:p>
           <a:p/>
           <a:p>
             <a:r>
-              <a:t>Si la API espera ese envio antes de responder, la reserva de un turno hereda esa latencia y ese riesgo.</a:t>
+              <a:t>(No se proyecta) Son cinco reglas de escritura y conviene recorrerlas sobre la diapositiva, linea por linea.</a:t>
             </a:r>
           </a:p>
           <a:p/>
           <a:p>
             <a:r>
-              <a:t>Esa es una razon legitima para separar: se agrega una cola de mensajes y un trabajador de notificaciones, la API escribe el turno, publica un mensaje y responde en decenas de milisegundos, y el trabajador envia el correo despues, con reintentos si falla.</a:t>
+              <a:t>(No se proyecta) C4Context es el nivel de la Clase 1 y graph TD es otro tipo de diagrama, y cualquiera de los dos deja la respuesta en el nivel equivocado.</a:t>
             </a:r>
           </a:p>
           <a:p/>
           <a:p>
             <a:r>
-              <a:t>(No se proyecta) Primer ejemplo concreto, y conviene construirlo en el tablero en vivo.</a:t>
+              <a:t>(No se proyecta) Vale la pena decir en voz alta que aqui el uso de una IA es legitimo y ademas recomendado: pasar un boceto a codigo Mermaid es justo la tarea mecanica en la que ayuda sin sustituir el criterio.</a:t>
+            </a:r>
+          </a:p>
+          <a:p/>
+          <a:p>
+            <a:r>
+              <a:t>(No se proyecta) Lo que NO delega el estudiante es la revision, y hay tres cosas que tiene que verificar el mismo antes de enviar, porque son las que la IA equivoca con frecuencia: que la primera linea sea C4Container, que la base de datos haya quedado como ContainerDb y no como Container, y que ninguna relacion haya perdido la mitad de su etiqueta.</a:t>
+            </a:r>
+          </a:p>
+          <a:p/>
+          <a:p>
+            <a:r>
+              <a:t>(No se proyecta) Un codigo que no renderiza vale cero, y es el unico punto del taller donde el estudiante puede comprobar su propia nota antes de entregar.</a:t>
             </a:r>
           </a:p>
         </p:txBody>
@@ -2134,103 +2395,57 @@
           <a:lstStyle/>
           <a:p>
             <a:r>
-              <a:t>DESARROLLO (para explicarlo, no se proyecta):</a:t>
+              <a:t>QUÉ ES (dilo así): Es el diagrama de contenedores completo de una app de turnos: quién la usa, de qué piezas está hecha por dentro y con qué sistema externo habla.</a:t>
             </a:r>
           </a:p>
           <a:p/>
           <a:p>
             <a:r>
-              <a:t>Si cada flecha del diagrama lleva protocolo y formato, el paso siguiente es decir QUE se negocia por esa flecha, y eso es un contrato.</a:t>
+              <a:t>CÓMO DARLA (≈4 min):</a:t>
+            </a:r>
+          </a:p>
+          <a:p>
+            <a:r>
+              <a:t>  • Al entrar: Arriba del código y del dibujo: Person es el cliente, fuera del sistema. System_Boundary es el recuadro punteado: todo lo que va dentro es nuestro.</a:t>
+            </a:r>
+          </a:p>
+          <a:p>
+            <a:r>
+              <a:t>  • Clic 1: Dentro, los cuatro contenedores: app web (React), API (Node.js), base (PostgreSQL, cilindro) y worker de avisos. Fuera, el correo, en gris porque es un sistema externo.</a:t>
+            </a:r>
+          </a:p>
+          <a:p>
+            <a:r>
+              <a:t>  • Clic 2: Recorre las Rel en el orden de una reserva: el cliente reserva por HTTPS, la app hace POST a la API, la API escribe en la base y publica un evento, el worker envía el correo.</a:t>
             </a:r>
           </a:p>
           <a:p/>
           <a:p>
             <a:r>
-              <a:t>Un contrato entre dos piezas de un sistema tiene cuatro datos y los cuatro se piden por separado: como se llama la interaccion en terminos de negocio</a:t>
+              <a:t>EJEMPLO: Seguir una reserva de punta a punta sobre el dibujo es la mejor prueba de que el diagrama está completo.</a:t>
             </a:r>
           </a:p>
           <a:p/>
           <a:p>
             <a:r>
-              <a:t>Quien llama a quien, con que verbo y ruta —o con que nombre de evento, si es asincrono—, y cual es el error de negocio que puede devolver.</a:t>
+              <a:t>SI PREGUNTAN:</a:t>
+            </a:r>
+          </a:p>
+          <a:p>
+            <a:r>
+              <a:t>  • «¿Por qué el correo va fuera del recuadro?» → Porque no lo construimos ni lo operamos: es un servicio de terceros. Los externos siempre van fuera del System_Boundary.</a:t>
             </a:r>
           </a:p>
           <a:p/>
           <a:p>
             <a:r>
-              <a:t>El cuarto es el que se olvida y el que hace util al contrato.</a:t>
+              <a:t>CUIDADO: Si un contenedor no tiene ninguna flecha, sobra o falta una relación.</a:t>
             </a:r>
           </a:p>
           <a:p/>
           <a:p>
             <a:r>
-              <a:t>Un error de negocio es una respuesta prevista, que forma parte del diseno: la franja ya esta tomada, el cupo se agoto, el usuario no tiene permiso.</a:t>
-            </a:r>
-          </a:p>
-          <a:p/>
-          <a:p>
-            <a:r>
-              <a:t>La primera: al menos uno de los tres contratos tiene que ser un 409 de conflicto, y la razon es de dominio y no de capricho.</a:t>
-            </a:r>
-          </a:p>
-          <a:p/>
-          <a:p>
-            <a:r>
-              <a:t>El 409 es la respuesta que dice «tu peticion es valida, pero el estado actual del sistema no la admite», y en cualquier dominio de reservas ese caso existe siempre: dos clientes quieren la misma franja.</a:t>
-            </a:r>
-          </a:p>
-          <a:p/>
-          <a:p>
-            <a:r>
-              <a:t>Un estudiante que no encuentra ningun 409 en su sistema casi nunca tiene un dominio sin conflictos; lo que tiene es un diagrama que no modela ninguna regla de negocio.</a:t>
-            </a:r>
-          </a:p>
-          <a:p/>
-          <a:p>
-            <a:r>
-              <a:t>La segunda exigencia: los tres contratos no pueden ser entre el mismo par de cajas.</a:t>
-            </a:r>
-          </a:p>
-          <a:p/>
-          <a:p>
-            <a:r>
-              <a:t>Y si el contrato es con la base de datos, en la columna del verbo va la sentencia (INSERT, SELECT) y no una ruta REST</a:t>
-            </a:r>
-          </a:p>
-          <a:p/>
-          <a:p>
-            <a:r>
-              <a:t>Porque la base no expone rutas; ponerle POST /turnos a la base de datos es el error que delata que se lleno la tabla por analogia y no leyendo el propio diagrama.</a:t>
-            </a:r>
-          </a:p>
-          <a:p/>
-          <a:p>
-            <a:r>
-              <a:t>(No se proyecta) Un 500 no es un error de negocio, es una falla del sistema; nadie lo disena, y por eso poner 500 en esa columna es la senal de que el estudiante no distinguio las dos cosas.</a:t>
-            </a:r>
-          </a:p>
-          <a:p/>
-          <a:p>
-            <a:r>
-              <a:t>(No se proyecta) La diapositiva proyecta los tres contratos resueltos sobre CloudLite Turnos y conviene recorrerlos leyendo la cuarta columna en voz alta, porque es lo que hay que replicar.</a:t>
-            </a:r>
-          </a:p>
-          <a:p/>
-          <a:p>
-            <a:r>
-              <a:t>(No se proyecta) Dos exigencias mas, que valen puntos y se pierden sin darse cuenta.</a:t>
-            </a:r>
-          </a:p>
-          <a:p/>
-          <a:p>
-            <a:r>
-              <a:t>(No se proyecta) Conviene tambien tener a mano la diferencia con sus vecinos, porque se confunden: 400 es que la peticion esta mal formada, 401 que no se sabe quien eres, 403 que se sabe y no te corresponde, 404 que no existe, 422 que esta bien formada pero sus datos no pasan una validacion, y 409 que choca con el estado actual.</a:t>
-            </a:r>
-          </a:p>
-          <a:p/>
-          <a:p>
-            <a:r>
-              <a:t>(No se proyecta) Tres filas que digan «App web → API» describen un solo canal contado tres veces, y lo que se esta evaluando es si el estudiante entendio que su sistema tiene varias fronteras.</a:t>
+              <a:t>PASA A LA SIGUIENTE: Con este molde se arma el diagrama de cualquier sistema.</a:t>
             </a:r>
           </a:p>
         </p:txBody>
@@ -2306,37 +2521,67 @@
           <a:p/>
           <a:p>
             <a:r>
-              <a:t>El segundo bloque de contenido es el mas importante del dia: que se paga al distribuir.</a:t>
+              <a:t>CloudLite Turnos, el sistema de agendamiento de la barberia, empieza con tres contenedores: una aplicacion web que corre en el navegador del cliente, una API que atiende peticiones HTTP con cuerpo en formato JSON</a:t>
             </a:r>
           </a:p>
           <a:p/>
           <a:p>
             <a:r>
-              <a:t>Una llamada a una funcion dentro del mismo proceso cuesta del orden de nanosegundos y no puede fallar por causas de red.</a:t>
+              <a:t>Y una base de datos relacional donde viven turnos, clientes y horarios.</a:t>
             </a:r>
           </a:p>
           <a:p/>
           <a:p>
             <a:r>
-              <a:t>La misma llamada convertida en peticion HTTP entre dos contenedores de la misma maquina o del mismo centro de datos cuesta tipicamente entre 1 y 5 milisegundos, y entre regiones geograficas distintas puede subir a 50 o 200 milisegundos.</a:t>
+              <a:t>Ahora viene la parte interesante: la cuarta caja aparece solo si hay una razon.</a:t>
             </a:r>
           </a:p>
           <a:p/>
           <a:p>
             <a:r>
-              <a:t>Es decir, convertir una llamada local en remota empeora el costo en varios ordenes de magnitud, y a eso se suma que ahora la llamada puede perderse, llegar duplicada o tardar indefinidamente.</a:t>
+              <a:t>El envio del correo de confirmacion tarda, con proveedores reales de correo, entre 300 y 2000 milisegundos, y puede fallar por causas ajenas al sistema.</a:t>
             </a:r>
           </a:p>
           <a:p/>
           <a:p>
             <a:r>
-              <a:t>Ese calculo es exacto y no una convencion, y es el argumento mas contundente contra multiplicar servicios sin necesidad.</a:t>
+              <a:t>Cuatro contenedores con una justificacion medible es mejor arquitectura que ocho por moda.</a:t>
             </a:r>
           </a:p>
           <a:p/>
           <a:p>
             <a:r>
-              <a:t>(No se proyecta) Hay una aritmetica que conviene mostrar porque impresiona con razon: si una peticion del usuario atraviesa en cadena cinco servicios y cada uno esta disponible el 99,9 % del tiempo, la disponibilidad del recorrido completo es 0,999 elevado a la quinta potencia, alrededor del 99,5 %, lo que pasa de unos 43 minutos de indisponibilidad al mes a mas de tres horas.</a:t>
+              <a:t>NOTAS:</a:t>
+            </a:r>
+          </a:p>
+          <a:p/>
+          <a:p>
+            <a:r>
+              <a:t>La flecha entre la web y la API dice «HTTPS/JSON, consulta disponibilidad y crea reservas»; la flecha entre la API y la base de datos dice «TCP, lee y escribe turnos».</a:t>
+            </a:r>
+          </a:p>
+          <a:p/>
+          <a:p>
+            <a:r>
+              <a:t>Con eso ya existe un diagrama valido y defendible.</a:t>
+            </a:r>
+          </a:p>
+          <a:p/>
+          <a:p>
+            <a:r>
+              <a:t>Si la API espera ese envio antes de responder, la reserva de un turno hereda esa latencia y ese riesgo.</a:t>
+            </a:r>
+          </a:p>
+          <a:p/>
+          <a:p>
+            <a:r>
+              <a:t>Esa es una razon legitima para separar: se agrega una cola de mensajes y un trabajador de notificaciones, la API escribe el turno, publica un mensaje y responde en decenas de milisegundos, y el trabajador envia el correo despues, con reintentos si falla.</a:t>
+            </a:r>
+          </a:p>
+          <a:p/>
+          <a:p>
+            <a:r>
+              <a:t>(No se proyecta) Primer ejemplo concreto, y conviene construirlo en el tablero en vivo.</a:t>
             </a:r>
           </a:p>
         </p:txBody>
@@ -7363,7 +7608,7 @@
         <p:spPr>
           <a:xfrm>
             <a:off x="457200" y="1261872"/>
-            <a:ext cx="11277295" cy="4798799"/>
+            <a:ext cx="6991923" cy="4566255"/>
           </a:xfrm>
           <a:prstGeom prst="roundRect">
             <a:avLst>
@@ -7408,7 +7653,7 @@
         <p:spPr>
           <a:xfrm>
             <a:off x="457200" y="1261872"/>
-            <a:ext cx="11277295" cy="365760"/>
+            <a:ext cx="6991923" cy="365760"/>
           </a:xfrm>
           <a:prstGeom prst="rect">
             <a:avLst/>
@@ -7580,7 +7825,7 @@
         <p:spPr>
           <a:xfrm>
             <a:off x="1371600" y="1298448"/>
-            <a:ext cx="10180015" cy="292608"/>
+            <a:ext cx="5894643" cy="292608"/>
           </a:xfrm>
           <a:prstGeom prst="rect">
             <a:avLst/>
@@ -7613,7 +7858,7 @@
         <p:spPr>
           <a:xfrm>
             <a:off x="685800" y="1719072"/>
-            <a:ext cx="502920" cy="4204439"/>
+            <a:ext cx="502920" cy="3971895"/>
           </a:xfrm>
           <a:prstGeom prst="rect">
             <a:avLst/>
@@ -7628,11 +7873,11 @@
           <a:p>
             <a:pPr algn="r">
               <a:spcAft>
-                <a:spcPts val="321"/>
+                <a:spcPts val="300"/>
               </a:spcAft>
             </a:pPr>
             <a:r>
-              <a:rPr sz="1500" i="0" b="0">
+              <a:rPr sz="1400" i="0" b="0">
                 <a:solidFill>
                   <a:srgbClr val="858585"/>
                 </a:solidFill>
@@ -7644,11 +7889,11 @@
           <a:p>
             <a:pPr algn="r">
               <a:spcAft>
-                <a:spcPts val="321"/>
+                <a:spcPts val="300"/>
               </a:spcAft>
             </a:pPr>
             <a:r>
-              <a:rPr sz="1500" i="0" b="0">
+              <a:rPr sz="1400" i="0" b="0">
                 <a:solidFill>
                   <a:srgbClr val="858585"/>
                 </a:solidFill>
@@ -7660,11 +7905,11 @@
           <a:p>
             <a:pPr algn="r">
               <a:spcAft>
-                <a:spcPts val="321"/>
+                <a:spcPts val="300"/>
               </a:spcAft>
             </a:pPr>
             <a:r>
-              <a:rPr sz="1500" i="0" b="0">
+              <a:rPr sz="1400" i="0" b="0">
                 <a:solidFill>
                   <a:srgbClr val="858585"/>
                 </a:solidFill>
@@ -7676,11 +7921,11 @@
           <a:p>
             <a:pPr algn="r">
               <a:spcAft>
-                <a:spcPts val="321"/>
+                <a:spcPts val="300"/>
               </a:spcAft>
             </a:pPr>
             <a:r>
-              <a:rPr sz="1500" i="0" b="0">
+              <a:rPr sz="1400" i="0" b="0">
                 <a:solidFill>
                   <a:srgbClr val="858585"/>
                 </a:solidFill>
@@ -7692,11 +7937,11 @@
           <a:p>
             <a:pPr algn="r">
               <a:spcAft>
-                <a:spcPts val="321"/>
+                <a:spcPts val="300"/>
               </a:spcAft>
             </a:pPr>
             <a:r>
-              <a:rPr sz="1500" i="0" b="0">
+              <a:rPr sz="1400" i="0" b="0">
                 <a:solidFill>
                   <a:srgbClr val="858585"/>
                 </a:solidFill>
@@ -7708,11 +7953,11 @@
           <a:p>
             <a:pPr algn="r">
               <a:spcAft>
-                <a:spcPts val="321"/>
+                <a:spcPts val="300"/>
               </a:spcAft>
             </a:pPr>
             <a:r>
-              <a:rPr sz="1500" i="0" b="0">
+              <a:rPr sz="1400" i="0" b="0">
                 <a:solidFill>
                   <a:srgbClr val="858585"/>
                 </a:solidFill>
@@ -7724,11 +7969,11 @@
           <a:p>
             <a:pPr algn="r">
               <a:spcAft>
-                <a:spcPts val="321"/>
+                <a:spcPts val="300"/>
               </a:spcAft>
             </a:pPr>
             <a:r>
-              <a:rPr sz="1500" i="0" b="0">
+              <a:rPr sz="1400" i="0" b="0">
                 <a:solidFill>
                   <a:srgbClr val="858585"/>
                 </a:solidFill>
@@ -7740,11 +7985,11 @@
           <a:p>
             <a:pPr algn="r">
               <a:spcAft>
-                <a:spcPts val="321"/>
+                <a:spcPts val="300"/>
               </a:spcAft>
             </a:pPr>
             <a:r>
-              <a:rPr sz="1500" i="0" b="0">
+              <a:rPr sz="1400" i="0" b="0">
                 <a:solidFill>
                   <a:srgbClr val="858585"/>
                 </a:solidFill>
@@ -7756,11 +8001,11 @@
           <a:p>
             <a:pPr algn="r">
               <a:spcAft>
-                <a:spcPts val="321"/>
+                <a:spcPts val="300"/>
               </a:spcAft>
             </a:pPr>
             <a:r>
-              <a:rPr sz="1500" i="0" b="0">
+              <a:rPr sz="1400" i="0" b="0">
                 <a:solidFill>
                   <a:srgbClr val="858585"/>
                 </a:solidFill>
@@ -7772,11 +8017,11 @@
           <a:p>
             <a:pPr algn="r">
               <a:spcAft>
-                <a:spcPts val="321"/>
+                <a:spcPts val="300"/>
               </a:spcAft>
             </a:pPr>
             <a:r>
-              <a:rPr sz="1500" i="0" b="0">
+              <a:rPr sz="1400" i="0" b="0">
                 <a:solidFill>
                   <a:srgbClr val="858585"/>
                 </a:solidFill>
@@ -7788,11 +8033,11 @@
           <a:p>
             <a:pPr algn="r">
               <a:spcAft>
-                <a:spcPts val="321"/>
+                <a:spcPts val="300"/>
               </a:spcAft>
             </a:pPr>
             <a:r>
-              <a:rPr sz="1500" i="0" b="0">
+              <a:rPr sz="1400" i="0" b="0">
                 <a:solidFill>
                   <a:srgbClr val="858585"/>
                 </a:solidFill>
@@ -7804,11 +8049,11 @@
           <a:p>
             <a:pPr algn="r">
               <a:spcAft>
-                <a:spcPts val="321"/>
+                <a:spcPts val="300"/>
               </a:spcAft>
             </a:pPr>
             <a:r>
-              <a:rPr sz="1500" i="0" b="0">
+              <a:rPr sz="1400" i="0" b="0">
                 <a:solidFill>
                   <a:srgbClr val="858585"/>
                 </a:solidFill>
@@ -7820,11 +8065,11 @@
           <a:p>
             <a:pPr algn="r">
               <a:spcAft>
-                <a:spcPts val="321"/>
+                <a:spcPts val="300"/>
               </a:spcAft>
             </a:pPr>
             <a:r>
-              <a:rPr sz="1500" i="0" b="0">
+              <a:rPr sz="1400" i="0" b="0">
                 <a:solidFill>
                   <a:srgbClr val="858585"/>
                 </a:solidFill>
@@ -7836,11 +8081,11 @@
           <a:p>
             <a:pPr algn="r">
               <a:spcAft>
-                <a:spcPts val="321"/>
+                <a:spcPts val="300"/>
               </a:spcAft>
             </a:pPr>
             <a:r>
-              <a:rPr sz="1500" i="0" b="0">
+              <a:rPr sz="1400" i="0" b="0">
                 <a:solidFill>
                   <a:srgbClr val="858585"/>
                 </a:solidFill>
@@ -7852,11 +8097,11 @@
           <a:p>
             <a:pPr algn="r">
               <a:spcAft>
-                <a:spcPts val="321"/>
+                <a:spcPts val="300"/>
               </a:spcAft>
             </a:pPr>
             <a:r>
-              <a:rPr sz="1500" i="0" b="0">
+              <a:rPr sz="1400" i="0" b="0">
                 <a:solidFill>
                   <a:srgbClr val="858585"/>
                 </a:solidFill>
@@ -7876,7 +8121,7 @@
         <p:spPr>
           <a:xfrm>
             <a:off x="1188720" y="1719072"/>
-            <a:ext cx="10271455" cy="4204439"/>
+            <a:ext cx="5986083" cy="3971895"/>
           </a:xfrm>
           <a:prstGeom prst="rect">
             <a:avLst/>
@@ -7891,11 +8136,11 @@
           <a:p>
             <a:pPr>
               <a:spcAft>
-                <a:spcPts val="321"/>
+                <a:spcPts val="300"/>
               </a:spcAft>
             </a:pPr>
             <a:r>
-              <a:rPr sz="1500" i="0" b="0">
+              <a:rPr sz="1400" i="0" b="0">
                 <a:solidFill>
                   <a:srgbClr val="D4D4D4"/>
                 </a:solidFill>
@@ -7907,11 +8152,11 @@
           <a:p>
             <a:pPr>
               <a:spcAft>
-                <a:spcPts val="321"/>
+                <a:spcPts val="300"/>
               </a:spcAft>
             </a:pPr>
             <a:r>
-              <a:rPr sz="1500" i="0" b="0">
+              <a:rPr sz="1400" i="0" b="0">
                 <a:solidFill>
                   <a:srgbClr val="D4D4D4"/>
                 </a:solidFill>
@@ -7920,7 +8165,7 @@
               <a:t>title</a:t>
             </a:r>
             <a:r>
-              <a:rPr sz="1500" i="0" b="0">
+              <a:rPr sz="1400" i="0" b="0">
                 <a:solidFill>
                   <a:srgbClr val="D4D4D4"/>
                 </a:solidFill>
@@ -7929,25 +8174,43 @@
               <a:t> </a:t>
             </a:r>
             <a:r>
-              <a:rPr sz="1500" i="0" b="0">
+              <a:rPr sz="1400" i="0" b="0">
                 <a:solidFill>
                   <a:srgbClr val="D4D4D4"/>
                 </a:solidFill>
                 <a:latin typeface="Consolas"/>
               </a:rPr>
-              <a:t>Diagrama</a:t>
-            </a:r>
-            <a:r>
-              <a:rPr sz="1500" i="0" b="0">
+              <a:t>Contenedores</a:t>
+            </a:r>
+            <a:r>
+              <a:rPr sz="1400" i="0" b="0">
                 <a:solidFill>
                   <a:srgbClr val="D4D4D4"/>
                 </a:solidFill>
                 <a:latin typeface="Consolas"/>
               </a:rPr>
+              <a:t> - </a:t>
+            </a:r>
+            <a:r>
+              <a:rPr sz="1400" i="0" b="0">
+                <a:solidFill>
+                  <a:srgbClr val="D4D4D4"/>
+                </a:solidFill>
+                <a:latin typeface="Consolas"/>
+              </a:rPr>
+              <a:t>App</a:t>
+            </a:r>
+            <a:r>
+              <a:rPr sz="1400" i="0" b="0">
+                <a:solidFill>
+                  <a:srgbClr val="D4D4D4"/>
+                </a:solidFill>
+                <a:latin typeface="Consolas"/>
+              </a:rPr>
               <a:t> </a:t>
             </a:r>
             <a:r>
-              <a:rPr sz="1500" i="0" b="0">
+              <a:rPr sz="1400" i="0" b="0">
                 <a:solidFill>
                   <a:srgbClr val="D4D4D4"/>
                 </a:solidFill>
@@ -7956,7 +8219,7 @@
               <a:t>de</a:t>
             </a:r>
             <a:r>
-              <a:rPr sz="1500" i="0" b="0">
+              <a:rPr sz="1400" i="0" b="0">
                 <a:solidFill>
                   <a:srgbClr val="D4D4D4"/>
                 </a:solidFill>
@@ -7965,59 +8228,23 @@
               <a:t> </a:t>
             </a:r>
             <a:r>
-              <a:rPr sz="1500" i="0" b="0">
+              <a:rPr sz="1400" i="0" b="0">
                 <a:solidFill>
                   <a:srgbClr val="D4D4D4"/>
                 </a:solidFill>
                 <a:latin typeface="Consolas"/>
               </a:rPr>
-              <a:t>contenedores</a:t>
-            </a:r>
-            <a:r>
-              <a:rPr sz="1500" i="0" b="0">
-                <a:solidFill>
-                  <a:srgbClr val="D4D4D4"/>
-                </a:solidFill>
-                <a:latin typeface="Consolas"/>
-              </a:rPr>
-              <a:t> - </a:t>
-            </a:r>
-            <a:r>
-              <a:rPr sz="1500" i="0" b="0">
-                <a:solidFill>
-                  <a:srgbClr val="D4D4D4"/>
-                </a:solidFill>
-                <a:latin typeface="Consolas"/>
-              </a:rPr>
-              <a:t>La app</a:t>
-            </a:r>
-            <a:r>
-              <a:rPr sz="1500" i="0" b="0">
-                <a:solidFill>
-                  <a:srgbClr val="D4D4D4"/>
-                </a:solidFill>
-                <a:latin typeface="Consolas"/>
-              </a:rPr>
-              <a:t> </a:t>
-            </a:r>
-            <a:r>
-              <a:rPr sz="1500" i="0" b="0">
-                <a:solidFill>
-                  <a:srgbClr val="D4D4D4"/>
-                </a:solidFill>
-                <a:latin typeface="Consolas"/>
-              </a:rPr>
-              <a:t>Turnos</a:t>
+              <a:t>turnos</a:t>
             </a:r>
           </a:p>
           <a:p>
             <a:pPr>
               <a:spcAft>
-                <a:spcPts val="321"/>
+                <a:spcPts val="300"/>
               </a:spcAft>
             </a:pPr>
             <a:r>
-              <a:rPr sz="1500" i="0" b="0">
+              <a:rPr sz="1400" i="0" b="0">
                 <a:solidFill>
                   <a:srgbClr val="DCDCAA"/>
                 </a:solidFill>
@@ -8026,7 +8253,7 @@
               <a:t>Person</a:t>
             </a:r>
             <a:r>
-              <a:rPr sz="1500" i="0" b="0">
+              <a:rPr sz="1400" i="0" b="0">
                 <a:solidFill>
                   <a:srgbClr val="D4D4D4"/>
                 </a:solidFill>
@@ -8035,7 +8262,7 @@
               <a:t>(</a:t>
             </a:r>
             <a:r>
-              <a:rPr sz="1500" i="0" b="0">
+              <a:rPr sz="1400" i="0" b="0">
                 <a:solidFill>
                   <a:srgbClr val="D4D4D4"/>
                 </a:solidFill>
@@ -8044,7 +8271,7 @@
               <a:t>cliente</a:t>
             </a:r>
             <a:r>
-              <a:rPr sz="1500" i="0" b="0">
+              <a:rPr sz="1400" i="0" b="0">
                 <a:solidFill>
                   <a:srgbClr val="D4D4D4"/>
                 </a:solidFill>
@@ -8053,16 +8280,16 @@
               <a:t>, </a:t>
             </a:r>
             <a:r>
-              <a:rPr sz="1500" i="0" b="0">
+              <a:rPr sz="1400" i="0" b="0">
                 <a:solidFill>
                   <a:srgbClr val="CE9178"/>
                 </a:solidFill>
                 <a:latin typeface="Consolas"/>
               </a:rPr>
-              <a:t>"Cliente de la barberia"</a:t>
-            </a:r>
-            <a:r>
-              <a:rPr sz="1500" i="0" b="0">
+              <a:t>"Cliente"</a:t>
+            </a:r>
+            <a:r>
+              <a:rPr sz="1400" i="0" b="0">
                 <a:solidFill>
                   <a:srgbClr val="D4D4D4"/>
                 </a:solidFill>
@@ -8071,16 +8298,16 @@
               <a:t>, </a:t>
             </a:r>
             <a:r>
-              <a:rPr sz="1500" i="0" b="0">
+              <a:rPr sz="1400" i="0" b="0">
                 <a:solidFill>
                   <a:srgbClr val="CE9178"/>
                 </a:solidFill>
                 <a:latin typeface="Consolas"/>
               </a:rPr>
-              <a:t>"Reserva y consulta sus turnos"</a:t>
-            </a:r>
-            <a:r>
-              <a:rPr sz="1500" i="0" b="0">
+              <a:t>"Reserva sus turnos"</a:t>
+            </a:r>
+            <a:r>
+              <a:rPr sz="1400" i="0" b="0">
                 <a:solidFill>
                   <a:srgbClr val="D4D4D4"/>
                 </a:solidFill>
@@ -8092,11 +8319,11 @@
           <a:p>
             <a:pPr>
               <a:spcAft>
-                <a:spcPts val="321"/>
+                <a:spcPts val="300"/>
               </a:spcAft>
             </a:pPr>
             <a:r>
-              <a:rPr sz="1500" i="0" b="0">
+              <a:rPr sz="1400" i="0" b="0">
                 <a:solidFill>
                   <a:srgbClr val="DCDCAA"/>
                 </a:solidFill>
@@ -8105,7 +8332,7 @@
               <a:t>System_Boundary</a:t>
             </a:r>
             <a:r>
-              <a:rPr sz="1500" i="0" b="0">
+              <a:rPr sz="1400" i="0" b="0">
                 <a:solidFill>
                   <a:srgbClr val="D4D4D4"/>
                 </a:solidFill>
@@ -8114,16 +8341,16 @@
               <a:t>(</a:t>
             </a:r>
             <a:r>
-              <a:rPr sz="1500" i="0" b="0">
+              <a:rPr sz="1400" i="0" b="0">
                 <a:solidFill>
                   <a:srgbClr val="D4D4D4"/>
                 </a:solidFill>
                 <a:latin typeface="Consolas"/>
               </a:rPr>
-              <a:t>turnos</a:t>
-            </a:r>
-            <a:r>
-              <a:rPr sz="1500" i="0" b="0">
+              <a:t>app</a:t>
+            </a:r>
+            <a:r>
+              <a:rPr sz="1400" i="0" b="0">
                 <a:solidFill>
                   <a:srgbClr val="D4D4D4"/>
                 </a:solidFill>
@@ -8132,16 +8359,16 @@
               <a:t>, </a:t>
             </a:r>
             <a:r>
-              <a:rPr sz="1500" i="0" b="0">
+              <a:rPr sz="1400" i="0" b="0">
                 <a:solidFill>
                   <a:srgbClr val="CE9178"/>
                 </a:solidFill>
                 <a:latin typeface="Consolas"/>
               </a:rPr>
-              <a:t>"la app"</a:t>
-            </a:r>
-            <a:r>
-              <a:rPr sz="1500" i="0" b="0">
+              <a:t>"App de turnos"</a:t>
+            </a:r>
+            <a:r>
+              <a:rPr sz="1400" i="0" b="0">
                 <a:solidFill>
                   <a:srgbClr val="D4D4D4"/>
                 </a:solidFill>
@@ -8153,11 +8380,11 @@
           <a:p>
             <a:pPr>
               <a:spcAft>
-                <a:spcPts val="321"/>
+                <a:spcPts val="300"/>
               </a:spcAft>
             </a:pPr>
             <a:r>
-              <a:rPr sz="1500" i="0" b="0">
+              <a:rPr sz="1400" i="0" b="0">
                 <a:solidFill>
                   <a:srgbClr val="D4D4D4"/>
                 </a:solidFill>
@@ -8166,7 +8393,7 @@
               <a:t>  </a:t>
             </a:r>
             <a:r>
-              <a:rPr sz="1500" i="0" b="0">
+              <a:rPr sz="1400" i="0" b="0">
                 <a:solidFill>
                   <a:srgbClr val="DCDCAA"/>
                 </a:solidFill>
@@ -8175,7 +8402,7 @@
               <a:t>Container</a:t>
             </a:r>
             <a:r>
-              <a:rPr sz="1500" i="0" b="0">
+              <a:rPr sz="1400" i="0" b="0">
                 <a:solidFill>
                   <a:srgbClr val="D4D4D4"/>
                 </a:solidFill>
@@ -8184,7 +8411,7 @@
               <a:t>(</a:t>
             </a:r>
             <a:r>
-              <a:rPr sz="1500" i="0" b="0">
+              <a:rPr sz="1400" i="0" b="0">
                 <a:solidFill>
                   <a:srgbClr val="D4D4D4"/>
                 </a:solidFill>
@@ -8193,7 +8420,7 @@
               <a:t>spa</a:t>
             </a:r>
             <a:r>
-              <a:rPr sz="1500" i="0" b="0">
+              <a:rPr sz="1400" i="0" b="0">
                 <a:solidFill>
                   <a:srgbClr val="D4D4D4"/>
                 </a:solidFill>
@@ -8202,7 +8429,7 @@
               <a:t>, </a:t>
             </a:r>
             <a:r>
-              <a:rPr sz="1500" i="0" b="0">
+              <a:rPr sz="1400" i="0" b="0">
                 <a:solidFill>
                   <a:srgbClr val="CE9178"/>
                 </a:solidFill>
@@ -8211,7 +8438,7 @@
               <a:t>"App web"</a:t>
             </a:r>
             <a:r>
-              <a:rPr sz="1500" i="0" b="0">
+              <a:rPr sz="1400" i="0" b="0">
                 <a:solidFill>
                   <a:srgbClr val="D4D4D4"/>
                 </a:solidFill>
@@ -8220,7 +8447,7 @@
               <a:t>, </a:t>
             </a:r>
             <a:r>
-              <a:rPr sz="1500" i="0" b="0">
+              <a:rPr sz="1400" i="0" b="0">
                 <a:solidFill>
                   <a:srgbClr val="CE9178"/>
                 </a:solidFill>
@@ -8229,7 +8456,7 @@
               <a:t>"React"</a:t>
             </a:r>
             <a:r>
-              <a:rPr sz="1500" i="0" b="0">
+              <a:rPr sz="1400" i="0" b="0">
                 <a:solidFill>
                   <a:srgbClr val="D4D4D4"/>
                 </a:solidFill>
@@ -8238,16 +8465,16 @@
               <a:t>, </a:t>
             </a:r>
             <a:r>
-              <a:rPr sz="1500" i="0" b="0">
+              <a:rPr sz="1400" i="0" b="0">
                 <a:solidFill>
                   <a:srgbClr val="CE9178"/>
                 </a:solidFill>
                 <a:latin typeface="Consolas"/>
               </a:rPr>
-              <a:t>"Muestra franjas libres y crea la reserva"</a:t>
-            </a:r>
-            <a:r>
-              <a:rPr sz="1500" i="0" b="0">
+              <a:t>"Reserva"</a:t>
+            </a:r>
+            <a:r>
+              <a:rPr sz="1400" i="0" b="0">
                 <a:solidFill>
                   <a:srgbClr val="D4D4D4"/>
                 </a:solidFill>
@@ -8259,11 +8486,11 @@
           <a:p>
             <a:pPr>
               <a:spcAft>
-                <a:spcPts val="321"/>
+                <a:spcPts val="300"/>
               </a:spcAft>
             </a:pPr>
             <a:r>
-              <a:rPr sz="1500" i="0" b="0">
+              <a:rPr sz="1400" i="0" b="0">
                 <a:solidFill>
                   <a:srgbClr val="D4D4D4"/>
                 </a:solidFill>
@@ -8272,7 +8499,7 @@
               <a:t>  </a:t>
             </a:r>
             <a:r>
-              <a:rPr sz="1500" i="0" b="0">
+              <a:rPr sz="1400" i="0" b="0">
                 <a:solidFill>
                   <a:srgbClr val="DCDCAA"/>
                 </a:solidFill>
@@ -8281,7 +8508,7 @@
               <a:t>Container</a:t>
             </a:r>
             <a:r>
-              <a:rPr sz="1500" i="0" b="0">
+              <a:rPr sz="1400" i="0" b="0">
                 <a:solidFill>
                   <a:srgbClr val="D4D4D4"/>
                 </a:solidFill>
@@ -8290,7 +8517,7 @@
               <a:t>(</a:t>
             </a:r>
             <a:r>
-              <a:rPr sz="1500" i="0" b="0">
+              <a:rPr sz="1400" i="0" b="0">
                 <a:solidFill>
                   <a:srgbClr val="D4D4D4"/>
                 </a:solidFill>
@@ -8299,7 +8526,7 @@
               <a:t>api</a:t>
             </a:r>
             <a:r>
-              <a:rPr sz="1500" i="0" b="0">
+              <a:rPr sz="1400" i="0" b="0">
                 <a:solidFill>
                   <a:srgbClr val="D4D4D4"/>
                 </a:solidFill>
@@ -8308,7 +8535,7 @@
               <a:t>, </a:t>
             </a:r>
             <a:r>
-              <a:rPr sz="1500" i="0" b="0">
+              <a:rPr sz="1400" i="0" b="0">
                 <a:solidFill>
                   <a:srgbClr val="CE9178"/>
                 </a:solidFill>
@@ -8317,7 +8544,7 @@
               <a:t>"API de turnos"</a:t>
             </a:r>
             <a:r>
-              <a:rPr sz="1500" i="0" b="0">
+              <a:rPr sz="1400" i="0" b="0">
                 <a:solidFill>
                   <a:srgbClr val="D4D4D4"/>
                 </a:solidFill>
@@ -8326,7 +8553,7 @@
               <a:t>, </a:t>
             </a:r>
             <a:r>
-              <a:rPr sz="1500" i="0" b="0">
+              <a:rPr sz="1400" i="0" b="0">
                 <a:solidFill>
                   <a:srgbClr val="CE9178"/>
                 </a:solidFill>
@@ -8335,7 +8562,7 @@
               <a:t>"Node.js"</a:t>
             </a:r>
             <a:r>
-              <a:rPr sz="1500" i="0" b="0">
+              <a:rPr sz="1400" i="0" b="0">
                 <a:solidFill>
                   <a:srgbClr val="D4D4D4"/>
                 </a:solidFill>
@@ -8344,16 +8571,16 @@
               <a:t>, </a:t>
             </a:r>
             <a:r>
-              <a:rPr sz="1500" i="0" b="0">
+              <a:rPr sz="1400" i="0" b="0">
                 <a:solidFill>
                   <a:srgbClr val="CE9178"/>
                 </a:solidFill>
                 <a:latin typeface="Consolas"/>
               </a:rPr>
-              <a:t>"Valida la franja y registra el turno"</a:t>
-            </a:r>
-            <a:r>
-              <a:rPr sz="1500" i="0" b="0">
+              <a:t>"Valida"</a:t>
+            </a:r>
+            <a:r>
+              <a:rPr sz="1400" i="0" b="0">
                 <a:solidFill>
                   <a:srgbClr val="D4D4D4"/>
                 </a:solidFill>
@@ -8365,11 +8592,11 @@
           <a:p>
             <a:pPr>
               <a:spcAft>
-                <a:spcPts val="321"/>
+                <a:spcPts val="300"/>
               </a:spcAft>
             </a:pPr>
             <a:r>
-              <a:rPr sz="1500" i="0" b="0">
+              <a:rPr sz="1400" i="0" b="0">
                 <a:solidFill>
                   <a:srgbClr val="D4D4D4"/>
                 </a:solidFill>
@@ -8378,7 +8605,7 @@
               <a:t>  </a:t>
             </a:r>
             <a:r>
-              <a:rPr sz="1500" i="0" b="0">
+              <a:rPr sz="1400" i="0" b="0">
                 <a:solidFill>
                   <a:srgbClr val="DCDCAA"/>
                 </a:solidFill>
@@ -8387,7 +8614,7 @@
               <a:t>ContainerDb</a:t>
             </a:r>
             <a:r>
-              <a:rPr sz="1500" i="0" b="0">
+              <a:rPr sz="1400" i="0" b="0">
                 <a:solidFill>
                   <a:srgbClr val="D4D4D4"/>
                 </a:solidFill>
@@ -8396,7 +8623,7 @@
               <a:t>(</a:t>
             </a:r>
             <a:r>
-              <a:rPr sz="1500" i="0" b="0">
+              <a:rPr sz="1400" i="0" b="0">
                 <a:solidFill>
                   <a:srgbClr val="D4D4D4"/>
                 </a:solidFill>
@@ -8405,7 +8632,7 @@
               <a:t>db</a:t>
             </a:r>
             <a:r>
-              <a:rPr sz="1500" i="0" b="0">
+              <a:rPr sz="1400" i="0" b="0">
                 <a:solidFill>
                   <a:srgbClr val="D4D4D4"/>
                 </a:solidFill>
@@ -8414,7 +8641,7 @@
               <a:t>, </a:t>
             </a:r>
             <a:r>
-              <a:rPr sz="1500" i="0" b="0">
+              <a:rPr sz="1400" i="0" b="0">
                 <a:solidFill>
                   <a:srgbClr val="CE9178"/>
                 </a:solidFill>
@@ -8423,7 +8650,7 @@
               <a:t>"Base de turnos"</a:t>
             </a:r>
             <a:r>
-              <a:rPr sz="1500" i="0" b="0">
+              <a:rPr sz="1400" i="0" b="0">
                 <a:solidFill>
                   <a:srgbClr val="D4D4D4"/>
                 </a:solidFill>
@@ -8432,7 +8659,7 @@
               <a:t>, </a:t>
             </a:r>
             <a:r>
-              <a:rPr sz="1500" i="0" b="0">
+              <a:rPr sz="1400" i="0" b="0">
                 <a:solidFill>
                   <a:srgbClr val="CE9178"/>
                 </a:solidFill>
@@ -8441,25 +8668,7 @@
               <a:t>"PostgreSQL"</a:t>
             </a:r>
             <a:r>
-              <a:rPr sz="1500" i="0" b="0">
-                <a:solidFill>
-                  <a:srgbClr val="D4D4D4"/>
-                </a:solidFill>
-                <a:latin typeface="Consolas"/>
-              </a:rPr>
-              <a:t>, </a:t>
-            </a:r>
-            <a:r>
-              <a:rPr sz="1500" i="0" b="0">
-                <a:solidFill>
-                  <a:srgbClr val="CE9178"/>
-                </a:solidFill>
-                <a:latin typeface="Consolas"/>
-              </a:rPr>
-              <a:t>"Turnos, clientes y horarios"</a:t>
-            </a:r>
-            <a:r>
-              <a:rPr sz="1500" i="0" b="0">
+              <a:rPr sz="1400" i="0" b="0">
                 <a:solidFill>
                   <a:srgbClr val="D4D4D4"/>
                 </a:solidFill>
@@ -8471,11 +8680,11 @@
           <a:p>
             <a:pPr>
               <a:spcAft>
-                <a:spcPts val="321"/>
+                <a:spcPts val="300"/>
               </a:spcAft>
             </a:pPr>
             <a:r>
-              <a:rPr sz="1500" i="0" b="0">
+              <a:rPr sz="1400" i="0" b="0">
                 <a:solidFill>
                   <a:srgbClr val="D4D4D4"/>
                 </a:solidFill>
@@ -8484,7 +8693,7 @@
               <a:t>  </a:t>
             </a:r>
             <a:r>
-              <a:rPr sz="1500" i="0" b="0">
+              <a:rPr sz="1400" i="0" b="0">
                 <a:solidFill>
                   <a:srgbClr val="DCDCAA"/>
                 </a:solidFill>
@@ -8493,7 +8702,7 @@
               <a:t>Container</a:t>
             </a:r>
             <a:r>
-              <a:rPr sz="1500" i="0" b="0">
+              <a:rPr sz="1400" i="0" b="0">
                 <a:solidFill>
                   <a:srgbClr val="D4D4D4"/>
                 </a:solidFill>
@@ -8502,7 +8711,7 @@
               <a:t>(</a:t>
             </a:r>
             <a:r>
-              <a:rPr sz="1500" i="0" b="0">
+              <a:rPr sz="1400" i="0" b="0">
                 <a:solidFill>
                   <a:srgbClr val="D4D4D4"/>
                 </a:solidFill>
@@ -8511,7 +8720,7 @@
               <a:t>worker</a:t>
             </a:r>
             <a:r>
-              <a:rPr sz="1500" i="0" b="0">
+              <a:rPr sz="1400" i="0" b="0">
                 <a:solidFill>
                   <a:srgbClr val="D4D4D4"/>
                 </a:solidFill>
@@ -8520,16 +8729,16 @@
               <a:t>, </a:t>
             </a:r>
             <a:r>
-              <a:rPr sz="1500" i="0" b="0">
+              <a:rPr sz="1400" i="0" b="0">
                 <a:solidFill>
                   <a:srgbClr val="CE9178"/>
                 </a:solidFill>
                 <a:latin typeface="Consolas"/>
               </a:rPr>
-              <a:t>"Worker de avisos"</a:t>
-            </a:r>
-            <a:r>
-              <a:rPr sz="1500" i="0" b="0">
+              <a:t>"Worker"</a:t>
+            </a:r>
+            <a:r>
+              <a:rPr sz="1400" i="0" b="0">
                 <a:solidFill>
                   <a:srgbClr val="D4D4D4"/>
                 </a:solidFill>
@@ -8538,7 +8747,7 @@
               <a:t>, </a:t>
             </a:r>
             <a:r>
-              <a:rPr sz="1500" i="0" b="0">
+              <a:rPr sz="1400" i="0" b="0">
                 <a:solidFill>
                   <a:srgbClr val="CE9178"/>
                 </a:solidFill>
@@ -8547,7 +8756,7 @@
               <a:t>"cola"</a:t>
             </a:r>
             <a:r>
-              <a:rPr sz="1500" i="0" b="0">
+              <a:rPr sz="1400" i="0" b="0">
                 <a:solidFill>
                   <a:srgbClr val="D4D4D4"/>
                 </a:solidFill>
@@ -8556,16 +8765,16 @@
               <a:t>, </a:t>
             </a:r>
             <a:r>
-              <a:rPr sz="1500" i="0" b="0">
+              <a:rPr sz="1400" i="0" b="0">
                 <a:solidFill>
                   <a:srgbClr val="CE9178"/>
                 </a:solidFill>
                 <a:latin typeface="Consolas"/>
               </a:rPr>
-              <a:t>"Envia el aviso, con reintentos"</a:t>
-            </a:r>
-            <a:r>
-              <a:rPr sz="1500" i="0" b="0">
+              <a:t>"Avisos"</a:t>
+            </a:r>
+            <a:r>
+              <a:rPr sz="1400" i="0" b="0">
                 <a:solidFill>
                   <a:srgbClr val="D4D4D4"/>
                 </a:solidFill>
@@ -8577,11 +8786,11 @@
           <a:p>
             <a:pPr>
               <a:spcAft>
-                <a:spcPts val="321"/>
+                <a:spcPts val="300"/>
               </a:spcAft>
             </a:pPr>
             <a:r>
-              <a:rPr sz="1500" i="0" b="0">
+              <a:rPr sz="1400" i="0" b="0">
                 <a:solidFill>
                   <a:srgbClr val="D4D4D4"/>
                 </a:solidFill>
@@ -8593,11 +8802,11 @@
           <a:p>
             <a:pPr>
               <a:spcAft>
-                <a:spcPts val="321"/>
+                <a:spcPts val="300"/>
               </a:spcAft>
             </a:pPr>
             <a:r>
-              <a:rPr sz="1500" i="0" b="0">
+              <a:rPr sz="1400" i="0" b="0">
                 <a:solidFill>
                   <a:srgbClr val="DCDCAA"/>
                 </a:solidFill>
@@ -8606,7 +8815,7 @@
               <a:t>System_Ext</a:t>
             </a:r>
             <a:r>
-              <a:rPr sz="1500" i="0" b="0">
+              <a:rPr sz="1400" i="0" b="0">
                 <a:solidFill>
                   <a:srgbClr val="D4D4D4"/>
                 </a:solidFill>
@@ -8615,7 +8824,7 @@
               <a:t>(</a:t>
             </a:r>
             <a:r>
-              <a:rPr sz="1500" i="0" b="0">
+              <a:rPr sz="1400" i="0" b="0">
                 <a:solidFill>
                   <a:srgbClr val="D4D4D4"/>
                 </a:solidFill>
@@ -8624,7 +8833,7 @@
               <a:t>correo</a:t>
             </a:r>
             <a:r>
-              <a:rPr sz="1500" i="0" b="0">
+              <a:rPr sz="1400" i="0" b="0">
                 <a:solidFill>
                   <a:srgbClr val="D4D4D4"/>
                 </a:solidFill>
@@ -8633,16 +8842,16 @@
               <a:t>, </a:t>
             </a:r>
             <a:r>
-              <a:rPr sz="1500" i="0" b="0">
+              <a:rPr sz="1400" i="0" b="0">
                 <a:solidFill>
                   <a:srgbClr val="CE9178"/>
                 </a:solidFill>
                 <a:latin typeface="Consolas"/>
               </a:rPr>
-              <a:t>"Correo transaccional"</a:t>
-            </a:r>
-            <a:r>
-              <a:rPr sz="1500" i="0" b="0">
+              <a:t>"Correo"</a:t>
+            </a:r>
+            <a:r>
+              <a:rPr sz="1400" i="0" b="0">
                 <a:solidFill>
                   <a:srgbClr val="D4D4D4"/>
                 </a:solidFill>
@@ -8651,16 +8860,16 @@
               <a:t>, </a:t>
             </a:r>
             <a:r>
-              <a:rPr sz="1500" i="0" b="0">
+              <a:rPr sz="1400" i="0" b="0">
                 <a:solidFill>
                   <a:srgbClr val="CE9178"/>
                 </a:solidFill>
                 <a:latin typeface="Consolas"/>
               </a:rPr>
-              <a:t>"Entrega el correo al cliente"</a:t>
-            </a:r>
-            <a:r>
-              <a:rPr sz="1500" i="0" b="0">
+              <a:t>"Entrega el correo"</a:t>
+            </a:r>
+            <a:r>
+              <a:rPr sz="1400" i="0" b="0">
                 <a:solidFill>
                   <a:srgbClr val="D4D4D4"/>
                 </a:solidFill>
@@ -8672,11 +8881,11 @@
           <a:p>
             <a:pPr>
               <a:spcAft>
-                <a:spcPts val="321"/>
+                <a:spcPts val="300"/>
               </a:spcAft>
             </a:pPr>
             <a:r>
-              <a:rPr sz="1500" i="0" b="0">
+              <a:rPr sz="1400" i="0" b="0">
                 <a:solidFill>
                   <a:srgbClr val="DCDCAA"/>
                 </a:solidFill>
@@ -8685,7 +8894,7 @@
               <a:t>Rel</a:t>
             </a:r>
             <a:r>
-              <a:rPr sz="1500" i="0" b="0">
+              <a:rPr sz="1400" i="0" b="0">
                 <a:solidFill>
                   <a:srgbClr val="D4D4D4"/>
                 </a:solidFill>
@@ -8694,7 +8903,7 @@
               <a:t>(</a:t>
             </a:r>
             <a:r>
-              <a:rPr sz="1500" i="0" b="0">
+              <a:rPr sz="1400" i="0" b="0">
                 <a:solidFill>
                   <a:srgbClr val="D4D4D4"/>
                 </a:solidFill>
@@ -8703,7 +8912,7 @@
               <a:t>cliente</a:t>
             </a:r>
             <a:r>
-              <a:rPr sz="1500" i="0" b="0">
+              <a:rPr sz="1400" i="0" b="0">
                 <a:solidFill>
                   <a:srgbClr val="D4D4D4"/>
                 </a:solidFill>
@@ -8712,7 +8921,7 @@
               <a:t>, </a:t>
             </a:r>
             <a:r>
-              <a:rPr sz="1500" i="0" b="0">
+              <a:rPr sz="1400" i="0" b="0">
                 <a:solidFill>
                   <a:srgbClr val="D4D4D4"/>
                 </a:solidFill>
@@ -8721,7 +8930,7 @@
               <a:t>spa</a:t>
             </a:r>
             <a:r>
-              <a:rPr sz="1500" i="0" b="0">
+              <a:rPr sz="1400" i="0" b="0">
                 <a:solidFill>
                   <a:srgbClr val="D4D4D4"/>
                 </a:solidFill>
@@ -8730,7 +8939,7 @@
               <a:t>, </a:t>
             </a:r>
             <a:r>
-              <a:rPr sz="1500" i="0" b="0">
+              <a:rPr sz="1400" i="0" b="0">
                 <a:solidFill>
                   <a:srgbClr val="CE9178"/>
                 </a:solidFill>
@@ -8739,7 +8948,7 @@
               <a:t>"Reserva un turno"</a:t>
             </a:r>
             <a:r>
-              <a:rPr sz="1500" i="0" b="0">
+              <a:rPr sz="1400" i="0" b="0">
                 <a:solidFill>
                   <a:srgbClr val="D4D4D4"/>
                 </a:solidFill>
@@ -8748,7 +8957,7 @@
               <a:t>, </a:t>
             </a:r>
             <a:r>
-              <a:rPr sz="1500" i="0" b="0">
+              <a:rPr sz="1400" i="0" b="0">
                 <a:solidFill>
                   <a:srgbClr val="CE9178"/>
                 </a:solidFill>
@@ -8757,7 +8966,7 @@
               <a:t>"HTTPS"</a:t>
             </a:r>
             <a:r>
-              <a:rPr sz="1500" i="0" b="0">
+              <a:rPr sz="1400" i="0" b="0">
                 <a:solidFill>
                   <a:srgbClr val="D4D4D4"/>
                 </a:solidFill>
@@ -8769,11 +8978,11 @@
           <a:p>
             <a:pPr>
               <a:spcAft>
-                <a:spcPts val="321"/>
+                <a:spcPts val="300"/>
               </a:spcAft>
             </a:pPr>
             <a:r>
-              <a:rPr sz="1500" i="0" b="0">
+              <a:rPr sz="1400" i="0" b="0">
                 <a:solidFill>
                   <a:srgbClr val="DCDCAA"/>
                 </a:solidFill>
@@ -8782,7 +8991,7 @@
               <a:t>Rel</a:t>
             </a:r>
             <a:r>
-              <a:rPr sz="1500" i="0" b="0">
+              <a:rPr sz="1400" i="0" b="0">
                 <a:solidFill>
                   <a:srgbClr val="D4D4D4"/>
                 </a:solidFill>
@@ -8791,7 +9000,7 @@
               <a:t>(</a:t>
             </a:r>
             <a:r>
-              <a:rPr sz="1500" i="0" b="0">
+              <a:rPr sz="1400" i="0" b="0">
                 <a:solidFill>
                   <a:srgbClr val="D4D4D4"/>
                 </a:solidFill>
@@ -8800,7 +9009,7 @@
               <a:t>spa</a:t>
             </a:r>
             <a:r>
-              <a:rPr sz="1500" i="0" b="0">
+              <a:rPr sz="1400" i="0" b="0">
                 <a:solidFill>
                   <a:srgbClr val="D4D4D4"/>
                 </a:solidFill>
@@ -8809,7 +9018,7 @@
               <a:t>, </a:t>
             </a:r>
             <a:r>
-              <a:rPr sz="1500" i="0" b="0">
+              <a:rPr sz="1400" i="0" b="0">
                 <a:solidFill>
                   <a:srgbClr val="D4D4D4"/>
                 </a:solidFill>
@@ -8818,7 +9027,7 @@
               <a:t>api</a:t>
             </a:r>
             <a:r>
-              <a:rPr sz="1500" i="0" b="0">
+              <a:rPr sz="1400" i="0" b="0">
                 <a:solidFill>
                   <a:srgbClr val="D4D4D4"/>
                 </a:solidFill>
@@ -8827,7 +9036,7 @@
               <a:t>, </a:t>
             </a:r>
             <a:r>
-              <a:rPr sz="1500" i="0" b="0">
+              <a:rPr sz="1400" i="0" b="0">
                 <a:solidFill>
                   <a:srgbClr val="CE9178"/>
                 </a:solidFill>
@@ -8836,7 +9045,7 @@
               <a:t>"POST /turnos"</a:t>
             </a:r>
             <a:r>
-              <a:rPr sz="1500" i="0" b="0">
+              <a:rPr sz="1400" i="0" b="0">
                 <a:solidFill>
                   <a:srgbClr val="D4D4D4"/>
                 </a:solidFill>
@@ -8845,7 +9054,7 @@
               <a:t>, </a:t>
             </a:r>
             <a:r>
-              <a:rPr sz="1500" i="0" b="0">
+              <a:rPr sz="1400" i="0" b="0">
                 <a:solidFill>
                   <a:srgbClr val="CE9178"/>
                 </a:solidFill>
@@ -8854,7 +9063,7 @@
               <a:t>"HTTPS/JSON"</a:t>
             </a:r>
             <a:r>
-              <a:rPr sz="1500" i="0" b="0">
+              <a:rPr sz="1400" i="0" b="0">
                 <a:solidFill>
                   <a:srgbClr val="D4D4D4"/>
                 </a:solidFill>
@@ -8866,11 +9075,11 @@
           <a:p>
             <a:pPr>
               <a:spcAft>
-                <a:spcPts val="321"/>
+                <a:spcPts val="300"/>
               </a:spcAft>
             </a:pPr>
             <a:r>
-              <a:rPr sz="1500" i="0" b="0">
+              <a:rPr sz="1400" i="0" b="0">
                 <a:solidFill>
                   <a:srgbClr val="DCDCAA"/>
                 </a:solidFill>
@@ -8879,7 +9088,7 @@
               <a:t>Rel</a:t>
             </a:r>
             <a:r>
-              <a:rPr sz="1500" i="0" b="0">
+              <a:rPr sz="1400" i="0" b="0">
                 <a:solidFill>
                   <a:srgbClr val="D4D4D4"/>
                 </a:solidFill>
@@ -8888,7 +9097,7 @@
               <a:t>(</a:t>
             </a:r>
             <a:r>
-              <a:rPr sz="1500" i="0" b="0">
+              <a:rPr sz="1400" i="0" b="0">
                 <a:solidFill>
                   <a:srgbClr val="D4D4D4"/>
                 </a:solidFill>
@@ -8897,7 +9106,7 @@
               <a:t>api</a:t>
             </a:r>
             <a:r>
-              <a:rPr sz="1500" i="0" b="0">
+              <a:rPr sz="1400" i="0" b="0">
                 <a:solidFill>
                   <a:srgbClr val="D4D4D4"/>
                 </a:solidFill>
@@ -8906,7 +9115,7 @@
               <a:t>, </a:t>
             </a:r>
             <a:r>
-              <a:rPr sz="1500" i="0" b="0">
+              <a:rPr sz="1400" i="0" b="0">
                 <a:solidFill>
                   <a:srgbClr val="D4D4D4"/>
                 </a:solidFill>
@@ -8915,7 +9124,7 @@
               <a:t>db</a:t>
             </a:r>
             <a:r>
-              <a:rPr sz="1500" i="0" b="0">
+              <a:rPr sz="1400" i="0" b="0">
                 <a:solidFill>
                   <a:srgbClr val="D4D4D4"/>
                 </a:solidFill>
@@ -8924,16 +9133,16 @@
               <a:t>, </a:t>
             </a:r>
             <a:r>
-              <a:rPr sz="1500" i="0" b="0">
+              <a:rPr sz="1400" i="0" b="0">
                 <a:solidFill>
                   <a:srgbClr val="CE9178"/>
                 </a:solidFill>
                 <a:latin typeface="Consolas"/>
               </a:rPr>
-              <a:t>"INSERT / SELECT de turnos"</a:t>
-            </a:r>
-            <a:r>
-              <a:rPr sz="1500" i="0" b="0">
+              <a:t>"INSERT / SELECT"</a:t>
+            </a:r>
+            <a:r>
+              <a:rPr sz="1400" i="0" b="0">
                 <a:solidFill>
                   <a:srgbClr val="D4D4D4"/>
                 </a:solidFill>
@@ -8942,7 +9151,7 @@
               <a:t>, </a:t>
             </a:r>
             <a:r>
-              <a:rPr sz="1500" i="0" b="0">
+              <a:rPr sz="1400" i="0" b="0">
                 <a:solidFill>
                   <a:srgbClr val="CE9178"/>
                 </a:solidFill>
@@ -8951,7 +9160,7 @@
               <a:t>"TCP/SQL"</a:t>
             </a:r>
             <a:r>
-              <a:rPr sz="1500" i="0" b="0">
+              <a:rPr sz="1400" i="0" b="0">
                 <a:solidFill>
                   <a:srgbClr val="D4D4D4"/>
                 </a:solidFill>
@@ -8963,11 +9172,11 @@
           <a:p>
             <a:pPr>
               <a:spcAft>
-                <a:spcPts val="321"/>
+                <a:spcPts val="300"/>
               </a:spcAft>
             </a:pPr>
             <a:r>
-              <a:rPr sz="1500" i="0" b="0">
+              <a:rPr sz="1400" i="0" b="0">
                 <a:solidFill>
                   <a:srgbClr val="DCDCAA"/>
                 </a:solidFill>
@@ -8976,7 +9185,7 @@
               <a:t>Rel</a:t>
             </a:r>
             <a:r>
-              <a:rPr sz="1500" i="0" b="0">
+              <a:rPr sz="1400" i="0" b="0">
                 <a:solidFill>
                   <a:srgbClr val="D4D4D4"/>
                 </a:solidFill>
@@ -8985,7 +9194,7 @@
               <a:t>(</a:t>
             </a:r>
             <a:r>
-              <a:rPr sz="1500" i="0" b="0">
+              <a:rPr sz="1400" i="0" b="0">
                 <a:solidFill>
                   <a:srgbClr val="D4D4D4"/>
                 </a:solidFill>
@@ -8994,7 +9203,7 @@
               <a:t>api</a:t>
             </a:r>
             <a:r>
-              <a:rPr sz="1500" i="0" b="0">
+              <a:rPr sz="1400" i="0" b="0">
                 <a:solidFill>
                   <a:srgbClr val="D4D4D4"/>
                 </a:solidFill>
@@ -9003,7 +9212,7 @@
               <a:t>, </a:t>
             </a:r>
             <a:r>
-              <a:rPr sz="1500" i="0" b="0">
+              <a:rPr sz="1400" i="0" b="0">
                 <a:solidFill>
                   <a:srgbClr val="D4D4D4"/>
                 </a:solidFill>
@@ -9012,7 +9221,7 @@
               <a:t>worker</a:t>
             </a:r>
             <a:r>
-              <a:rPr sz="1500" i="0" b="0">
+              <a:rPr sz="1400" i="0" b="0">
                 <a:solidFill>
                   <a:srgbClr val="D4D4D4"/>
                 </a:solidFill>
@@ -9021,16 +9230,16 @@
               <a:t>, </a:t>
             </a:r>
             <a:r>
-              <a:rPr sz="1500" i="0" b="0">
+              <a:rPr sz="1400" i="0" b="0">
                 <a:solidFill>
                   <a:srgbClr val="CE9178"/>
                 </a:solidFill>
                 <a:latin typeface="Consolas"/>
               </a:rPr>
-              <a:t>"Publica aviso-de-turno"</a:t>
-            </a:r>
-            <a:r>
-              <a:rPr sz="1500" i="0" b="0">
+              <a:t>"Publica aviso"</a:t>
+            </a:r>
+            <a:r>
+              <a:rPr sz="1400" i="0" b="0">
                 <a:solidFill>
                   <a:srgbClr val="D4D4D4"/>
                 </a:solidFill>
@@ -9039,16 +9248,16 @@
               <a:t>, </a:t>
             </a:r>
             <a:r>
-              <a:rPr sz="1500" i="0" b="0">
+              <a:rPr sz="1400" i="0" b="0">
                 <a:solidFill>
                   <a:srgbClr val="CE9178"/>
                 </a:solidFill>
                 <a:latin typeface="Consolas"/>
               </a:rPr>
-              <a:t>"evento/cola (AMQP)"</a:t>
-            </a:r>
-            <a:r>
-              <a:rPr sz="1500" i="0" b="0">
+              <a:t>"evento (AMQP)"</a:t>
+            </a:r>
+            <a:r>
+              <a:rPr sz="1400" i="0" b="0">
                 <a:solidFill>
                   <a:srgbClr val="D4D4D4"/>
                 </a:solidFill>
@@ -9060,11 +9269,11 @@
           <a:p>
             <a:pPr>
               <a:spcAft>
-                <a:spcPts val="321"/>
+                <a:spcPts val="300"/>
               </a:spcAft>
             </a:pPr>
             <a:r>
-              <a:rPr sz="1500" i="0" b="0">
+              <a:rPr sz="1400" i="0" b="0">
                 <a:solidFill>
                   <a:srgbClr val="DCDCAA"/>
                 </a:solidFill>
@@ -9073,7 +9282,7 @@
               <a:t>Rel</a:t>
             </a:r>
             <a:r>
-              <a:rPr sz="1500" i="0" b="0">
+              <a:rPr sz="1400" i="0" b="0">
                 <a:solidFill>
                   <a:srgbClr val="D4D4D4"/>
                 </a:solidFill>
@@ -9082,7 +9291,7 @@
               <a:t>(</a:t>
             </a:r>
             <a:r>
-              <a:rPr sz="1500" i="0" b="0">
+              <a:rPr sz="1400" i="0" b="0">
                 <a:solidFill>
                   <a:srgbClr val="D4D4D4"/>
                 </a:solidFill>
@@ -9091,7 +9300,7 @@
               <a:t>worker</a:t>
             </a:r>
             <a:r>
-              <a:rPr sz="1500" i="0" b="0">
+              <a:rPr sz="1400" i="0" b="0">
                 <a:solidFill>
                   <a:srgbClr val="D4D4D4"/>
                 </a:solidFill>
@@ -9100,7 +9309,7 @@
               <a:t>, </a:t>
             </a:r>
             <a:r>
-              <a:rPr sz="1500" i="0" b="0">
+              <a:rPr sz="1400" i="0" b="0">
                 <a:solidFill>
                   <a:srgbClr val="D4D4D4"/>
                 </a:solidFill>
@@ -9109,7 +9318,7 @@
               <a:t>correo</a:t>
             </a:r>
             <a:r>
-              <a:rPr sz="1500" i="0" b="0">
+              <a:rPr sz="1400" i="0" b="0">
                 <a:solidFill>
                   <a:srgbClr val="D4D4D4"/>
                 </a:solidFill>
@@ -9118,16 +9327,16 @@
               <a:t>, </a:t>
             </a:r>
             <a:r>
-              <a:rPr sz="1500" i="0" b="0">
+              <a:rPr sz="1400" i="0" b="0">
                 <a:solidFill>
                   <a:srgbClr val="CE9178"/>
                 </a:solidFill>
                 <a:latin typeface="Consolas"/>
               </a:rPr>
-              <a:t>"Envia la confirmacion"</a:t>
-            </a:r>
-            <a:r>
-              <a:rPr sz="1500" i="0" b="0">
+              <a:t>"Envia"</a:t>
+            </a:r>
+            <a:r>
+              <a:rPr sz="1400" i="0" b="0">
                 <a:solidFill>
                   <a:srgbClr val="D4D4D4"/>
                 </a:solidFill>
@@ -9136,16 +9345,16 @@
               <a:t>, </a:t>
             </a:r>
             <a:r>
-              <a:rPr sz="1500" i="0" b="0">
+              <a:rPr sz="1400" i="0" b="0">
                 <a:solidFill>
                   <a:srgbClr val="CE9178"/>
                 </a:solidFill>
                 <a:latin typeface="Consolas"/>
               </a:rPr>
-              <a:t>"API REST sobre HTTPS"</a:t>
-            </a:r>
-            <a:r>
-              <a:rPr sz="1500" i="0" b="0">
+              <a:t>"REST/HTTPS"</a:t>
+            </a:r>
+            <a:r>
+              <a:rPr sz="1400" i="0" b="0">
                 <a:solidFill>
                   <a:srgbClr val="D4D4D4"/>
                 </a:solidFill>
@@ -9158,14 +9367,83 @@
       </p:sp>
       <p:sp>
         <p:nvSpPr>
-          <p:cNvPr id="13" name="TextBox 12"/>
+          <p:cNvPr id="13" name="Rounded Rectangle 12"/>
+          <p:cNvSpPr/>
+          <p:nvPr/>
+        </p:nvSpPr>
+        <p:spPr>
+          <a:xfrm>
+            <a:off x="7668579" y="1261872"/>
+            <a:ext cx="4120780" cy="3318569"/>
+          </a:xfrm>
+          <a:prstGeom prst="roundRect">
+            <a:avLst>
+              <a:gd name="adj" fmla="val 4000"/>
+            </a:avLst>
+          </a:prstGeom>
+          <a:solidFill>
+            <a:srgbClr val="E8EEF4"/>
+          </a:solidFill>
+          <a:ln>
+            <a:noFill/>
+          </a:ln>
+        </p:spPr>
+        <p:style>
+          <a:lnRef idx="1">
+            <a:schemeClr val="accent1"/>
+          </a:lnRef>
+          <a:fillRef idx="3">
+            <a:schemeClr val="accent1"/>
+          </a:fillRef>
+          <a:effectRef idx="2">
+            <a:schemeClr val="accent1"/>
+          </a:effectRef>
+          <a:fontRef idx="minor">
+            <a:schemeClr val="lt1"/>
+          </a:fontRef>
+        </p:style>
+        <p:txBody>
+          <a:bodyPr rtlCol="0" anchor="ctr"/>
+          <a:lstStyle/>
+          <a:p>
+            <a:pPr algn="ctr"/>
+          </a:p>
+        </p:txBody>
+      </p:sp>
+      <p:pic>
+        <p:nvPicPr>
+          <p:cNvPr id="14" name="Picture 13" descr="ilus-c4-molde-paso1.png"/>
+          <p:cNvPicPr>
+            <a:picLocks noChangeAspect="1"/>
+          </p:cNvPicPr>
+          <p:nvPr/>
+        </p:nvPicPr>
+        <p:blipFill>
+          <a:blip r:embed="rId2"/>
+          <a:stretch>
+            <a:fillRect/>
+          </a:stretch>
+        </p:blipFill>
+        <p:spPr>
+          <a:xfrm>
+            <a:off x="7723443" y="1316736"/>
+            <a:ext cx="4011052" cy="3208841"/>
+          </a:xfrm>
+          <a:prstGeom prst="rect">
+            <a:avLst/>
+          </a:prstGeom>
+        </p:spPr>
+      </p:pic>
+      <p:sp>
+        <p:nvSpPr>
+          <p:cNvPr id="15" name="TextBox 14"/>
           <p:cNvSpPr txBox="1"/>
           <p:nvPr/>
         </p:nvSpPr>
         <p:spPr>
           <a:xfrm>
-            <a:off x="457200" y="6035040"/>
-            <a:ext cx="11277295" cy="365760"/>
+            <a:off x="7723443" y="4580441"/>
+            <a:ext cx="4011052" cy="320040"/>
           </a:xfrm>
           <a:prstGeom prst="rect">
             <a:avLst/>
@@ -9180,6 +9458,41 @@
           <a:p>
             <a:pPr algn="ctr"/>
             <a:r>
+              <a:rPr sz="1200" b="0" i="1">
+                <a:solidFill>
+                  <a:srgbClr val="666666"/>
+                </a:solidFill>
+                <a:latin typeface="Calibri"/>
+              </a:rPr>
+              <a:t>Lo que dibuja este código</a:t>
+            </a:r>
+          </a:p>
+        </p:txBody>
+      </p:sp>
+      <p:sp>
+        <p:nvSpPr>
+          <p:cNvPr id="16" name="TextBox 15"/>
+          <p:cNvSpPr txBox="1"/>
+          <p:nvPr/>
+        </p:nvSpPr>
+        <p:spPr>
+          <a:xfrm>
+            <a:off x="457200" y="6035040"/>
+            <a:ext cx="11277295" cy="365760"/>
+          </a:xfrm>
+          <a:prstGeom prst="rect">
+            <a:avLst/>
+          </a:prstGeom>
+          <a:noFill/>
+        </p:spPr>
+        <p:txBody>
+          <a:bodyPr wrap="square">
+            <a:spAutoFit/>
+          </a:bodyPr>
+          <a:lstStyle/>
+          <a:p>
+            <a:pPr algn="ctr"/>
+            <a:r>
               <a:rPr sz="1300" b="0" i="1">
                 <a:solidFill>
                   <a:srgbClr val="666666"/>
@@ -9193,7 +9506,7 @@
       </p:sp>
       <p:sp>
         <p:nvSpPr>
-          <p:cNvPr id="14" name="TextBox 13"/>
+          <p:cNvPr id="17" name="TextBox 16"/>
           <p:cNvSpPr txBox="1"/>
           <p:nvPr/>
         </p:nvSpPr>
@@ -18150,7 +18463,7 @@
         <p:spPr>
           <a:xfrm>
             <a:off x="457200" y="1261872"/>
-            <a:ext cx="11277295" cy="4182625"/>
+            <a:ext cx="6991923" cy="2169874"/>
           </a:xfrm>
           <a:prstGeom prst="roundRect">
             <a:avLst>
@@ -18195,7 +18508,7 @@
         <p:spPr>
           <a:xfrm>
             <a:off x="457200" y="1261872"/>
-            <a:ext cx="11277295" cy="365760"/>
+            <a:ext cx="6991923" cy="365760"/>
           </a:xfrm>
           <a:prstGeom prst="rect">
             <a:avLst/>
@@ -18367,7 +18680,7 @@
         <p:spPr>
           <a:xfrm>
             <a:off x="1371600" y="1298448"/>
-            <a:ext cx="10180015" cy="292608"/>
+            <a:ext cx="5894643" cy="292608"/>
           </a:xfrm>
           <a:prstGeom prst="rect">
             <a:avLst/>
@@ -18399,8 +18712,8 @@
         </p:nvSpPr>
         <p:spPr>
           <a:xfrm>
-            <a:off x="1188720" y="1719072"/>
-            <a:ext cx="10271455" cy="3588265"/>
+            <a:off x="685800" y="1719072"/>
+            <a:ext cx="502920" cy="1575514"/>
           </a:xfrm>
           <a:prstGeom prst="rect">
             <a:avLst/>
@@ -18413,13 +18726,116 @@
           </a:bodyPr>
           <a:lstStyle/>
           <a:p>
+            <a:pPr algn="r">
+              <a:spcAft>
+                <a:spcPts val="342"/>
+              </a:spcAft>
+            </a:pPr>
+            <a:r>
+              <a:rPr sz="1600" i="0" b="0">
+                <a:solidFill>
+                  <a:srgbClr val="858585"/>
+                </a:solidFill>
+                <a:latin typeface="Consolas"/>
+              </a:rPr>
+              <a:t>1</a:t>
+            </a:r>
+          </a:p>
+          <a:p>
+            <a:pPr algn="r">
+              <a:spcAft>
+                <a:spcPts val="342"/>
+              </a:spcAft>
+            </a:pPr>
+            <a:r>
+              <a:rPr sz="1600" i="0" b="0">
+                <a:solidFill>
+                  <a:srgbClr val="858585"/>
+                </a:solidFill>
+                <a:latin typeface="Consolas"/>
+              </a:rPr>
+              <a:t>2</a:t>
+            </a:r>
+          </a:p>
+          <a:p>
+            <a:pPr algn="r">
+              <a:spcAft>
+                <a:spcPts val="342"/>
+              </a:spcAft>
+            </a:pPr>
+            <a:r>
+              <a:rPr sz="1600" i="0" b="0">
+                <a:solidFill>
+                  <a:srgbClr val="858585"/>
+                </a:solidFill>
+                <a:latin typeface="Consolas"/>
+              </a:rPr>
+              <a:t>3</a:t>
+            </a:r>
+          </a:p>
+          <a:p>
+            <a:pPr algn="r">
+              <a:spcAft>
+                <a:spcPts val="342"/>
+              </a:spcAft>
+            </a:pPr>
+            <a:r>
+              <a:rPr sz="1600" i="0" b="0">
+                <a:solidFill>
+                  <a:srgbClr val="858585"/>
+                </a:solidFill>
+                <a:latin typeface="Consolas"/>
+              </a:rPr>
+              <a:t>4</a:t>
+            </a:r>
+          </a:p>
+          <a:p>
+            <a:pPr algn="r">
+              <a:spcAft>
+                <a:spcPts val="342"/>
+              </a:spcAft>
+            </a:pPr>
+            <a:r>
+              <a:rPr sz="1600" i="0" b="0">
+                <a:solidFill>
+                  <a:srgbClr val="858585"/>
+                </a:solidFill>
+                <a:latin typeface="Consolas"/>
+              </a:rPr>
+              <a:t>5</a:t>
+            </a:r>
+          </a:p>
+        </p:txBody>
+      </p:sp>
+      <p:sp>
+        <p:nvSpPr>
+          <p:cNvPr id="12" name="TextBox 11"/>
+          <p:cNvSpPr txBox="1"/>
+          <p:nvPr/>
+        </p:nvSpPr>
+        <p:spPr>
+          <a:xfrm>
+            <a:off x="1188720" y="1719072"/>
+            <a:ext cx="5986083" cy="1575514"/>
+          </a:xfrm>
+          <a:prstGeom prst="rect">
+            <a:avLst/>
+          </a:prstGeom>
+          <a:noFill/>
+        </p:spPr>
+        <p:txBody>
+          <a:bodyPr wrap="square">
+            <a:spAutoFit/>
+          </a:bodyPr>
+          <a:lstStyle/>
+          <a:p>
             <a:pPr>
               <a:spcAft>
-                <a:spcPts val="428"/>
+                <a:spcPts val="342"/>
               </a:spcAft>
             </a:pPr>
             <a:r>
-              <a:rPr sz="2000" i="0" b="0">
+              <a:rPr sz="1600" i="0" b="0">
                 <a:solidFill>
                   <a:srgbClr val="D4D4D4"/>
                 </a:solidFill>
@@ -18431,11 +18847,11 @@
           <a:p>
             <a:pPr>
               <a:spcAft>
-                <a:spcPts val="428"/>
+                <a:spcPts val="342"/>
               </a:spcAft>
             </a:pPr>
             <a:r>
-              <a:rPr sz="2000" i="0" b="0">
+              <a:rPr sz="1600" i="0" b="0">
                 <a:solidFill>
                   <a:srgbClr val="D4D4D4"/>
                 </a:solidFill>
@@ -18444,7 +18860,7 @@
               <a:t>title</a:t>
             </a:r>
             <a:r>
-              <a:rPr sz="2000" i="0" b="0">
+              <a:rPr sz="1600" i="0" b="0">
                 <a:solidFill>
                   <a:srgbClr val="D4D4D4"/>
                 </a:solidFill>
@@ -18453,7 +18869,7 @@
               <a:t> </a:t>
             </a:r>
             <a:r>
-              <a:rPr sz="2000" i="0" b="0">
+              <a:rPr sz="1600" i="0" b="0">
                 <a:solidFill>
                   <a:srgbClr val="D4D4D4"/>
                 </a:solidFill>
@@ -18462,7 +18878,7 @@
               <a:t>Tres</a:t>
             </a:r>
             <a:r>
-              <a:rPr sz="2000" i="0" b="0">
+              <a:rPr sz="1600" i="0" b="0">
                 <a:solidFill>
                   <a:srgbClr val="D4D4D4"/>
                 </a:solidFill>
@@ -18471,7 +18887,7 @@
               <a:t> </a:t>
             </a:r>
             <a:r>
-              <a:rPr sz="2000" i="0" b="0">
+              <a:rPr sz="1600" i="0" b="0">
                 <a:solidFill>
                   <a:srgbClr val="D4D4D4"/>
                 </a:solidFill>
@@ -18480,7 +18896,7 @@
               <a:t>reglas</a:t>
             </a:r>
             <a:r>
-              <a:rPr sz="2000" i="0" b="0">
+              <a:rPr sz="1600" i="0" b="0">
                 <a:solidFill>
                   <a:srgbClr val="D4D4D4"/>
                 </a:solidFill>
@@ -18489,16 +18905,16 @@
               <a:t> </a:t>
             </a:r>
             <a:r>
-              <a:rPr sz="2000" i="0" b="0">
+              <a:rPr sz="1600" i="0" b="0">
                 <a:solidFill>
                   <a:srgbClr val="D4D4D4"/>
                 </a:solidFill>
                 <a:latin typeface="Consolas"/>
               </a:rPr>
-              <a:t>que</a:t>
-            </a:r>
-            <a:r>
-              <a:rPr sz="2000" i="0" b="0">
+              <a:t>del</a:t>
+            </a:r>
+            <a:r>
+              <a:rPr sz="1600" i="0" b="0">
                 <a:solidFill>
                   <a:srgbClr val="D4D4D4"/>
                 </a:solidFill>
@@ -18507,16 +18923,16 @@
               <a:t> </a:t>
             </a:r>
             <a:r>
-              <a:rPr sz="2000" i="0" b="0">
+              <a:rPr sz="1600" i="0" b="0">
                 <a:solidFill>
                   <a:srgbClr val="D4D4D4"/>
                 </a:solidFill>
                 <a:latin typeface="Consolas"/>
               </a:rPr>
-              <a:t>el</a:t>
-            </a:r>
-            <a:r>
-              <a:rPr sz="2000" i="0" b="0">
+              <a:t>nivel</a:t>
+            </a:r>
+            <a:r>
+              <a:rPr sz="1600" i="0" b="0">
                 <a:solidFill>
                   <a:srgbClr val="D4D4D4"/>
                 </a:solidFill>
@@ -18525,120 +18941,111 @@
               <a:t> </a:t>
             </a:r>
             <a:r>
-              <a:rPr sz="2000" i="0" b="0">
+              <a:rPr sz="1600" i="0" b="0">
                 <a:solidFill>
                   <a:srgbClr val="D4D4D4"/>
                 </a:solidFill>
                 <a:latin typeface="Consolas"/>
               </a:rPr>
-              <a:t>visor</a:t>
-            </a:r>
-            <a:r>
-              <a:rPr sz="2000" i="0" b="0">
-                <a:solidFill>
-                  <a:srgbClr val="D4D4D4"/>
-                </a:solidFill>
-                <a:latin typeface="Consolas"/>
-              </a:rPr>
-              <a:t> </a:t>
-            </a:r>
-            <a:r>
-              <a:rPr sz="2000" i="0" b="0">
-                <a:solidFill>
-                  <a:srgbClr val="D4D4D4"/>
-                </a:solidFill>
-                <a:latin typeface="Consolas"/>
-              </a:rPr>
-              <a:t>no</a:t>
-            </a:r>
-            <a:r>
-              <a:rPr sz="2000" i="0" b="0">
-                <a:solidFill>
-                  <a:srgbClr val="D4D4D4"/>
-                </a:solidFill>
-                <a:latin typeface="Consolas"/>
-              </a:rPr>
-              <a:t> </a:t>
-            </a:r>
-            <a:r>
-              <a:rPr sz="2000" i="0" b="0">
-                <a:solidFill>
-                  <a:srgbClr val="D4D4D4"/>
-                </a:solidFill>
-                <a:latin typeface="Consolas"/>
-              </a:rPr>
-              <a:t>revisa</a:t>
-            </a:r>
-            <a:r>
-              <a:rPr sz="2000" i="0" b="0">
-                <a:solidFill>
-                  <a:srgbClr val="D4D4D4"/>
-                </a:solidFill>
-                <a:latin typeface="Consolas"/>
-              </a:rPr>
-              <a:t> </a:t>
-            </a:r>
-            <a:r>
-              <a:rPr sz="2000" i="0" b="0">
-                <a:solidFill>
-                  <a:srgbClr val="D4D4D4"/>
-                </a:solidFill>
-                <a:latin typeface="Consolas"/>
-              </a:rPr>
-              <a:t>por</a:t>
-            </a:r>
-            <a:r>
-              <a:rPr sz="2000" i="0" b="0">
-                <a:solidFill>
-                  <a:srgbClr val="D4D4D4"/>
-                </a:solidFill>
-                <a:latin typeface="Consolas"/>
-              </a:rPr>
-              <a:t> </a:t>
-            </a:r>
-            <a:r>
-              <a:rPr sz="2000" i="0" b="0">
-                <a:solidFill>
-                  <a:srgbClr val="D4D4D4"/>
-                </a:solidFill>
-                <a:latin typeface="Consolas"/>
-              </a:rPr>
-              <a:t>ti</a:t>
+              <a:t>Container</a:t>
             </a:r>
           </a:p>
           <a:p>
             <a:pPr>
               <a:spcAft>
-                <a:spcPts val="428"/>
+                <a:spcPts val="342"/>
               </a:spcAft>
             </a:pPr>
             <a:r>
-              <a:rPr sz="2000" i="1" b="0">
-                <a:solidFill>
-                  <a:srgbClr val="6A9955"/>
+              <a:rPr sz="1600" i="0" b="0">
+                <a:solidFill>
+                  <a:srgbClr val="DCDCAA"/>
                 </a:solidFill>
                 <a:latin typeface="Consolas"/>
               </a:rPr>
-              <a:t>%% 1. Cada contenedor con TECNOLOGIA.  Mal: Container(api, "API")</a:t>
+              <a:t>Container</a:t>
+            </a:r>
+            <a:r>
+              <a:rPr sz="1600" i="0" b="0">
+                <a:solidFill>
+                  <a:srgbClr val="D4D4D4"/>
+                </a:solidFill>
+                <a:latin typeface="Consolas"/>
+              </a:rPr>
+              <a:t>(</a:t>
+            </a:r>
+            <a:r>
+              <a:rPr sz="1600" i="0" b="0">
+                <a:solidFill>
+                  <a:srgbClr val="D4D4D4"/>
+                </a:solidFill>
+                <a:latin typeface="Consolas"/>
+              </a:rPr>
+              <a:t>api</a:t>
+            </a:r>
+            <a:r>
+              <a:rPr sz="1600" i="0" b="0">
+                <a:solidFill>
+                  <a:srgbClr val="D4D4D4"/>
+                </a:solidFill>
+                <a:latin typeface="Consolas"/>
+              </a:rPr>
+              <a:t>, </a:t>
+            </a:r>
+            <a:r>
+              <a:rPr sz="1600" i="0" b="0">
+                <a:solidFill>
+                  <a:srgbClr val="CE9178"/>
+                </a:solidFill>
+                <a:latin typeface="Consolas"/>
+              </a:rPr>
+              <a:t>"API de turnos"</a:t>
+            </a:r>
+            <a:r>
+              <a:rPr sz="1600" i="0" b="0">
+                <a:solidFill>
+                  <a:srgbClr val="D4D4D4"/>
+                </a:solidFill>
+                <a:latin typeface="Consolas"/>
+              </a:rPr>
+              <a:t>, </a:t>
+            </a:r>
+            <a:r>
+              <a:rPr sz="1600" i="0" b="0">
+                <a:solidFill>
+                  <a:srgbClr val="CE9178"/>
+                </a:solidFill>
+                <a:latin typeface="Consolas"/>
+              </a:rPr>
+              <a:t>"Node.js"</a:t>
+            </a:r>
+            <a:r>
+              <a:rPr sz="1600" i="0" b="0">
+                <a:solidFill>
+                  <a:srgbClr val="D4D4D4"/>
+                </a:solidFill>
+                <a:latin typeface="Consolas"/>
+              </a:rPr>
+              <a:t>)</a:t>
             </a:r>
           </a:p>
           <a:p>
             <a:pPr>
               <a:spcAft>
-                <a:spcPts val="428"/>
+                <a:spcPts val="342"/>
               </a:spcAft>
             </a:pPr>
             <a:r>
-              <a:rPr sz="2000" i="0" b="0">
+              <a:rPr sz="1600" i="0" b="0">
                 <a:solidFill>
                   <a:srgbClr val="DCDCAA"/>
                 </a:solidFill>
                 <a:latin typeface="Consolas"/>
               </a:rPr>
-              <a:t>Container</a:t>
-            </a:r>
-            <a:r>
-              <a:rPr sz="2000" i="0" b="0">
+              <a:t>ContainerDb</a:t>
+            </a:r>
+            <a:r>
+              <a:rPr sz="1600" i="0" b="0">
                 <a:solidFill>
                   <a:srgbClr val="D4D4D4"/>
                 </a:solidFill>
@@ -18647,16 +19054,16 @@
               <a:t>(</a:t>
             </a:r>
             <a:r>
-              <a:rPr sz="2000" i="0" b="0">
+              <a:rPr sz="1600" i="0" b="0">
                 <a:solidFill>
                   <a:srgbClr val="D4D4D4"/>
                 </a:solidFill>
                 <a:latin typeface="Consolas"/>
               </a:rPr>
-              <a:t>api</a:t>
-            </a:r>
-            <a:r>
-              <a:rPr sz="2000" i="0" b="0">
+              <a:t>db</a:t>
+            </a:r>
+            <a:r>
+              <a:rPr sz="1600" i="0" b="0">
                 <a:solidFill>
                   <a:srgbClr val="D4D4D4"/>
                 </a:solidFill>
@@ -18665,16 +19072,16 @@
               <a:t>, </a:t>
             </a:r>
             <a:r>
-              <a:rPr sz="2000" i="0" b="0">
+              <a:rPr sz="1600" i="0" b="0">
                 <a:solidFill>
                   <a:srgbClr val="CE9178"/>
                 </a:solidFill>
                 <a:latin typeface="Consolas"/>
               </a:rPr>
-              <a:t>"API de turnos"</a:t>
-            </a:r>
-            <a:r>
-              <a:rPr sz="2000" i="0" b="0">
+              <a:t>"Base de turnos"</a:t>
+            </a:r>
+            <a:r>
+              <a:rPr sz="1600" i="0" b="0">
                 <a:solidFill>
                   <a:srgbClr val="D4D4D4"/>
                 </a:solidFill>
@@ -18683,34 +19090,16 @@
               <a:t>, </a:t>
             </a:r>
             <a:r>
-              <a:rPr sz="2000" i="0" b="0">
+              <a:rPr sz="1600" i="0" b="0">
                 <a:solidFill>
                   <a:srgbClr val="CE9178"/>
                 </a:solidFill>
                 <a:latin typeface="Consolas"/>
               </a:rPr>
-              <a:t>"Node.js"</a:t>
-            </a:r>
-            <a:r>
-              <a:rPr sz="2000" i="0" b="0">
-                <a:solidFill>
-                  <a:srgbClr val="D4D4D4"/>
-                </a:solidFill>
-                <a:latin typeface="Consolas"/>
-              </a:rPr>
-              <a:t>, </a:t>
-            </a:r>
-            <a:r>
-              <a:rPr sz="2000" i="0" b="0">
-                <a:solidFill>
-                  <a:srgbClr val="CE9178"/>
-                </a:solidFill>
-                <a:latin typeface="Consolas"/>
-              </a:rPr>
-              <a:t>"Valida la franja y registra el turno"</a:t>
-            </a:r>
-            <a:r>
-              <a:rPr sz="2000" i="0" b="0">
+              <a:t>"PostgreSQL"</a:t>
+            </a:r>
+            <a:r>
+              <a:rPr sz="1600" i="0" b="0">
                 <a:solidFill>
                   <a:srgbClr val="D4D4D4"/>
                 </a:solidFill>
@@ -18722,54 +19111,56 @@
           <a:p>
             <a:pPr>
               <a:spcAft>
-                <a:spcPts val="428"/>
+                <a:spcPts val="342"/>
               </a:spcAft>
             </a:pPr>
             <a:r>
-              <a:rPr sz="2000" i="1" b="0">
-                <a:solidFill>
-                  <a:srgbClr val="6A9955"/>
+              <a:rPr sz="1600" i="0" b="0">
+                <a:solidFill>
+                  <a:srgbClr val="DCDCAA"/>
                 </a:solidFill>
                 <a:latin typeface="Consolas"/>
               </a:rPr>
-              <a:t>%% 2. Lo que guarda datos es ContainerDb, no un Container mas</a:t>
-            </a:r>
-          </a:p>
-          <a:p>
-            <a:pPr>
-              <a:spcAft>
-                <a:spcPts val="428"/>
-              </a:spcAft>
-            </a:pPr>
-            <a:r>
-              <a:rPr sz="2000" i="0" b="0">
-                <a:solidFill>
-                  <a:srgbClr val="DCDCAA"/>
+              <a:t>Rel</a:t>
+            </a:r>
+            <a:r>
+              <a:rPr sz="1600" i="0" b="0">
+                <a:solidFill>
+                  <a:srgbClr val="D4D4D4"/>
                 </a:solidFill>
                 <a:latin typeface="Consolas"/>
               </a:rPr>
-              <a:t>ContainerDb</a:t>
-            </a:r>
-            <a:r>
-              <a:rPr sz="2000" i="0" b="0">
+              <a:t>(</a:t>
+            </a:r>
+            <a:r>
+              <a:rPr sz="1600" i="0" b="0">
                 <a:solidFill>
                   <a:srgbClr val="D4D4D4"/>
                 </a:solidFill>
                 <a:latin typeface="Consolas"/>
               </a:rPr>
-              <a:t>(</a:t>
-            </a:r>
-            <a:r>
-              <a:rPr sz="2000" i="0" b="0">
+              <a:t>api</a:t>
+            </a:r>
+            <a:r>
+              <a:rPr sz="1600" i="0" b="0">
                 <a:solidFill>
                   <a:srgbClr val="D4D4D4"/>
                 </a:solidFill>
                 <a:latin typeface="Consolas"/>
               </a:rPr>
+              <a:t>, </a:t>
+            </a:r>
+            <a:r>
+              <a:rPr sz="1600" i="0" b="0">
+                <a:solidFill>
+                  <a:srgbClr val="D4D4D4"/>
+                </a:solidFill>
+                <a:latin typeface="Consolas"/>
+              </a:rPr>
               <a:t>db</a:t>
             </a:r>
             <a:r>
-              <a:rPr sz="2000" i="0" b="0">
+              <a:rPr sz="1600" i="0" b="0">
                 <a:solidFill>
                   <a:srgbClr val="D4D4D4"/>
                 </a:solidFill>
@@ -18778,16 +19169,16 @@
               <a:t>, </a:t>
             </a:r>
             <a:r>
-              <a:rPr sz="2000" i="0" b="0">
+              <a:rPr sz="1600" i="0" b="0">
                 <a:solidFill>
                   <a:srgbClr val="CE9178"/>
                 </a:solidFill>
                 <a:latin typeface="Consolas"/>
               </a:rPr>
-              <a:t>"Base de turnos"</a:t>
-            </a:r>
-            <a:r>
-              <a:rPr sz="2000" i="0" b="0">
+              <a:t>"INSERT y SELECT"</a:t>
+            </a:r>
+            <a:r>
+              <a:rPr sz="1600" i="0" b="0">
                 <a:solidFill>
                   <a:srgbClr val="D4D4D4"/>
                 </a:solidFill>
@@ -18796,176 +19187,133 @@
               <a:t>, </a:t>
             </a:r>
             <a:r>
-              <a:rPr sz="2000" i="0" b="0">
+              <a:rPr sz="1600" i="0" b="0">
                 <a:solidFill>
                   <a:srgbClr val="CE9178"/>
                 </a:solidFill>
                 <a:latin typeface="Consolas"/>
               </a:rPr>
-              <a:t>"PostgreSQL"</a:t>
-            </a:r>
-            <a:r>
-              <a:rPr sz="2000" i="0" b="0">
+              <a:t>"TCP/SQL"</a:t>
+            </a:r>
+            <a:r>
+              <a:rPr sz="1600" i="0" b="0">
                 <a:solidFill>
                   <a:srgbClr val="D4D4D4"/>
                 </a:solidFill>
                 <a:latin typeface="Consolas"/>
               </a:rPr>
-              <a:t>, </a:t>
-            </a:r>
-            <a:r>
-              <a:rPr sz="2000" i="0" b="0">
-                <a:solidFill>
-                  <a:srgbClr val="CE9178"/>
-                </a:solidFill>
-                <a:latin typeface="Consolas"/>
-              </a:rPr>
-              <a:t>"Turnos y horarios"</a:t>
-            </a:r>
-            <a:r>
-              <a:rPr sz="2000" i="0" b="0">
-                <a:solidFill>
-                  <a:srgbClr val="D4D4D4"/>
-                </a:solidFill>
-                <a:latin typeface="Consolas"/>
-              </a:rPr>
               <a:t>)</a:t>
             </a:r>
           </a:p>
-          <a:p>
-            <a:pPr>
-              <a:spcAft>
-                <a:spcPts val="428"/>
-              </a:spcAft>
-            </a:pPr>
-            <a:r>
-              <a:rPr sz="2000" i="1" b="0">
-                <a:solidFill>
-                  <a:srgbClr val="6A9955"/>
-                </a:solidFill>
-                <a:latin typeface="Consolas"/>
-              </a:rPr>
-              <a:t>%% 3. Cada Rel con verbo, protocolo Y formato.  Mal: Rel(api, db, "usa")</a:t>
-            </a:r>
-          </a:p>
-          <a:p>
-            <a:pPr>
-              <a:spcAft>
-                <a:spcPts val="428"/>
-              </a:spcAft>
-            </a:pPr>
-            <a:r>
-              <a:rPr sz="2000" i="0" b="0">
-                <a:solidFill>
-                  <a:srgbClr val="DCDCAA"/>
-                </a:solidFill>
-                <a:latin typeface="Consolas"/>
-              </a:rPr>
-              <a:t>Rel</a:t>
-            </a:r>
-            <a:r>
-              <a:rPr sz="2000" i="0" b="0">
-                <a:solidFill>
-                  <a:srgbClr val="D4D4D4"/>
-                </a:solidFill>
-                <a:latin typeface="Consolas"/>
-              </a:rPr>
-              <a:t>(</a:t>
-            </a:r>
-            <a:r>
-              <a:rPr sz="2000" i="0" b="0">
-                <a:solidFill>
-                  <a:srgbClr val="D4D4D4"/>
-                </a:solidFill>
-                <a:latin typeface="Consolas"/>
-              </a:rPr>
-              <a:t>api</a:t>
-            </a:r>
-            <a:r>
-              <a:rPr sz="2000" i="0" b="0">
-                <a:solidFill>
-                  <a:srgbClr val="D4D4D4"/>
-                </a:solidFill>
-                <a:latin typeface="Consolas"/>
-              </a:rPr>
-              <a:t>, </a:t>
-            </a:r>
-            <a:r>
-              <a:rPr sz="2000" i="0" b="0">
-                <a:solidFill>
-                  <a:srgbClr val="D4D4D4"/>
-                </a:solidFill>
-                <a:latin typeface="Consolas"/>
-              </a:rPr>
-              <a:t>db</a:t>
-            </a:r>
-            <a:r>
-              <a:rPr sz="2000" i="0" b="0">
-                <a:solidFill>
-                  <a:srgbClr val="D4D4D4"/>
-                </a:solidFill>
-                <a:latin typeface="Consolas"/>
-              </a:rPr>
-              <a:t>, </a:t>
-            </a:r>
-            <a:r>
-              <a:rPr sz="2000" i="0" b="0">
-                <a:solidFill>
-                  <a:srgbClr val="CE9178"/>
-                </a:solidFill>
-                <a:latin typeface="Consolas"/>
-              </a:rPr>
-              <a:t>"INSERT y SELECT de turnos"</a:t>
-            </a:r>
-            <a:r>
-              <a:rPr sz="2000" i="0" b="0">
-                <a:solidFill>
-                  <a:srgbClr val="D4D4D4"/>
-                </a:solidFill>
-                <a:latin typeface="Consolas"/>
-              </a:rPr>
-              <a:t>, </a:t>
-            </a:r>
-            <a:r>
-              <a:rPr sz="2000" i="0" b="0">
-                <a:solidFill>
-                  <a:srgbClr val="CE9178"/>
-                </a:solidFill>
-                <a:latin typeface="Consolas"/>
-              </a:rPr>
-              <a:t>"TCP/SQL"</a:t>
-            </a:r>
-            <a:r>
-              <a:rPr sz="2000" i="0" b="0">
-                <a:solidFill>
-                  <a:srgbClr val="D4D4D4"/>
-                </a:solidFill>
-                <a:latin typeface="Consolas"/>
-              </a:rPr>
-              <a:t>)</a:t>
-            </a:r>
-          </a:p>
-          <a:p>
-            <a:pPr>
-              <a:spcAft>
-                <a:spcPts val="428"/>
-              </a:spcAft>
-            </a:pPr>
-            <a:r>
-              <a:rPr sz="2000" i="1" b="0">
-                <a:solidFill>
-                  <a:srgbClr val="6A9955"/>
-                </a:solidFill>
-                <a:latin typeface="Consolas"/>
-              </a:rPr>
-              <a:t>%% Y los nombres se repiten IGUALES en el Despliegue y en el Component.</a:t>
-            </a:r>
-          </a:p>
-        </p:txBody>
-      </p:sp>
-      <p:sp>
-        <p:nvSpPr>
-          <p:cNvPr id="12" name="TextBox 11"/>
+        </p:txBody>
+      </p:sp>
+      <p:sp>
+        <p:nvSpPr>
+          <p:cNvPr id="13" name="Rounded Rectangle 12"/>
+          <p:cNvSpPr/>
+          <p:nvPr/>
+        </p:nvSpPr>
+        <p:spPr>
+          <a:xfrm>
+            <a:off x="7668579" y="1261872"/>
+            <a:ext cx="4120780" cy="3318569"/>
+          </a:xfrm>
+          <a:prstGeom prst="roundRect">
+            <a:avLst>
+              <a:gd name="adj" fmla="val 4000"/>
+            </a:avLst>
+          </a:prstGeom>
+          <a:solidFill>
+            <a:srgbClr val="E8EEF4"/>
+          </a:solidFill>
+          <a:ln>
+            <a:noFill/>
+          </a:ln>
+        </p:spPr>
+        <p:style>
+          <a:lnRef idx="1">
+            <a:schemeClr val="accent1"/>
+          </a:lnRef>
+          <a:fillRef idx="3">
+            <a:schemeClr val="accent1"/>
+          </a:fillRef>
+          <a:effectRef idx="2">
+            <a:schemeClr val="accent1"/>
+          </a:effectRef>
+          <a:fontRef idx="minor">
+            <a:schemeClr val="lt1"/>
+          </a:fontRef>
+        </p:style>
+        <p:txBody>
+          <a:bodyPr rtlCol="0" anchor="ctr"/>
+          <a:lstStyle/>
+          <a:p>
+            <a:pPr algn="ctr"/>
+          </a:p>
+        </p:txBody>
+      </p:sp>
+      <p:pic>
+        <p:nvPicPr>
+          <p:cNvPr id="14" name="Picture 13" descr="ilus-c4-reglas-paso1.png"/>
+          <p:cNvPicPr>
+            <a:picLocks noChangeAspect="1"/>
+          </p:cNvPicPr>
+          <p:nvPr/>
+        </p:nvPicPr>
+        <p:blipFill>
+          <a:blip r:embed="rId2"/>
+          <a:stretch>
+            <a:fillRect/>
+          </a:stretch>
+        </p:blipFill>
+        <p:spPr>
+          <a:xfrm>
+            <a:off x="7723443" y="1316736"/>
+            <a:ext cx="4011052" cy="3208841"/>
+          </a:xfrm>
+          <a:prstGeom prst="rect">
+            <a:avLst/>
+          </a:prstGeom>
+        </p:spPr>
+      </p:pic>
+      <p:sp>
+        <p:nvSpPr>
+          <p:cNvPr id="15" name="TextBox 14"/>
+          <p:cNvSpPr txBox="1"/>
+          <p:nvPr/>
+        </p:nvSpPr>
+        <p:spPr>
+          <a:xfrm>
+            <a:off x="7723443" y="4580441"/>
+            <a:ext cx="4011052" cy="320040"/>
+          </a:xfrm>
+          <a:prstGeom prst="rect">
+            <a:avLst/>
+          </a:prstGeom>
+          <a:noFill/>
+        </p:spPr>
+        <p:txBody>
+          <a:bodyPr wrap="square">
+            <a:spAutoFit/>
+          </a:bodyPr>
+          <a:lstStyle/>
+          <a:p>
+            <a:pPr algn="ctr"/>
+            <a:r>
+              <a:rPr sz="1200" b="0" i="1">
+                <a:solidFill>
+                  <a:srgbClr val="666666"/>
+                </a:solidFill>
+                <a:latin typeface="Calibri"/>
+              </a:rPr>
+              <a:t>Lo que dibuja este código</a:t>
+            </a:r>
+          </a:p>
+        </p:txBody>
+      </p:sp>
+      <p:sp>
+        <p:nvSpPr>
+          <p:cNvPr id="16" name="TextBox 15"/>
           <p:cNvSpPr txBox="1"/>
           <p:nvPr/>
         </p:nvSpPr>

--- a/Arquitectura de Sistemas Computacionales/Clases/Clase 4 - Microservicios y arquitecturas distribuidas/Presentacion.pptx
+++ b/Arquitectura de Sistemas Computacionales/Clases/Clase 4 - Microservicios y arquitecturas distribuidas/Presentacion.pptx
@@ -6773,15 +6773,70 @@
                 </a:solidFill>
                 <a:latin typeface="Calibri"/>
               </a:rPr>
-              <a:t>Worker de avisos
+              <a:t>Worker
 (Container · cola)</a:t>
+            </a:r>
+          </a:p>
+        </p:txBody>
+      </p:sp>
+      <p:sp>
+        <p:nvSpPr>
+          <p:cNvPr id="11" name="Rounded Rectangle 10"/>
+          <p:cNvSpPr/>
+          <p:nvPr/>
+        </p:nvSpPr>
+        <p:spPr>
+          <a:xfrm>
+            <a:off x="8595360" y="3931920"/>
+            <a:ext cx="2377440" cy="914400"/>
+          </a:xfrm>
+          <a:prstGeom prst="roundRect">
+            <a:avLst>
+              <a:gd name="adj" fmla="val 12000"/>
+            </a:avLst>
+          </a:prstGeom>
+          <a:solidFill>
+            <a:srgbClr val="8C8C8C"/>
+          </a:solidFill>
+          <a:ln>
+            <a:noFill/>
+          </a:ln>
+        </p:spPr>
+        <p:style>
+          <a:lnRef idx="1">
+            <a:schemeClr val="accent1"/>
+          </a:lnRef>
+          <a:fillRef idx="3">
+            <a:schemeClr val="accent1"/>
+          </a:fillRef>
+          <a:effectRef idx="2">
+            <a:schemeClr val="accent1"/>
+          </a:effectRef>
+          <a:fontRef idx="minor">
+            <a:schemeClr val="lt1"/>
+          </a:fontRef>
+        </p:style>
+        <p:txBody>
+          <a:bodyPr rtlCol="0" anchor="ctr" wrap="square"/>
+          <a:lstStyle/>
+          <a:p>
+            <a:pPr algn="ctr"/>
+            <a:r>
+              <a:rPr sz="1100" b="1" i="0">
+                <a:solidFill>
+                  <a:srgbClr val="FFFFFF"/>
+                </a:solidFill>
+                <a:latin typeface="Calibri"/>
+              </a:rPr>
+              <a:t>Correo
+(System_Ext)</a:t>
             </a:r>
           </a:p>
         </p:txBody>
       </p:sp>
       <p:cxnSp>
         <p:nvCxnSpPr>
-          <p:cNvPr id="11" name="Connector 10"/>
+          <p:cNvPr id="12" name="Connector 11"/>
           <p:cNvCxnSpPr/>
           <p:nvPr/>
         </p:nvCxnSpPr>
@@ -6817,7 +6872,7 @@
       </p:cxnSp>
       <p:sp>
         <p:nvSpPr>
-          <p:cNvPr id="12" name="TextBox 11"/>
+          <p:cNvPr id="13" name="TextBox 12"/>
           <p:cNvSpPr txBox="1"/>
           <p:nvPr/>
         </p:nvSpPr>
@@ -6845,14 +6900,14 @@
                 </a:solidFill>
                 <a:latin typeface="Calibri"/>
               </a:rPr>
-              <a:t>usa · HTTPS</a:t>
+              <a:t>Reserva un turno · HTTPS</a:t>
             </a:r>
           </a:p>
         </p:txBody>
       </p:sp>
       <p:cxnSp>
         <p:nvCxnSpPr>
-          <p:cNvPr id="13" name="Connector 12"/>
+          <p:cNvPr id="14" name="Connector 13"/>
           <p:cNvCxnSpPr/>
           <p:nvPr/>
         </p:nvCxnSpPr>
@@ -6888,7 +6943,7 @@
       </p:cxnSp>
       <p:sp>
         <p:nvSpPr>
-          <p:cNvPr id="14" name="TextBox 13"/>
+          <p:cNvPr id="15" name="TextBox 14"/>
           <p:cNvSpPr txBox="1"/>
           <p:nvPr/>
         </p:nvSpPr>
@@ -6916,14 +6971,14 @@
                 </a:solidFill>
                 <a:latin typeface="Calibri"/>
               </a:rPr>
-              <a:t>HTTPS/JSON</a:t>
+              <a:t>POST /turnos · HTTPS/JSON</a:t>
             </a:r>
           </a:p>
         </p:txBody>
       </p:sp>
       <p:cxnSp>
         <p:nvCxnSpPr>
-          <p:cNvPr id="15" name="Connector 14"/>
+          <p:cNvPr id="16" name="Connector 15"/>
           <p:cNvCxnSpPr/>
           <p:nvPr/>
         </p:nvCxnSpPr>
@@ -6959,7 +7014,7 @@
       </p:cxnSp>
       <p:sp>
         <p:nvSpPr>
-          <p:cNvPr id="16" name="TextBox 15"/>
+          <p:cNvPr id="17" name="TextBox 16"/>
           <p:cNvSpPr txBox="1"/>
           <p:nvPr/>
         </p:nvSpPr>
@@ -6987,14 +7042,14 @@
                 </a:solidFill>
                 <a:latin typeface="Calibri"/>
               </a:rPr>
-              <a:t>TCP/SQL</a:t>
+              <a:t>INSERT / SELECT · TCP/SQL</a:t>
             </a:r>
           </a:p>
         </p:txBody>
       </p:sp>
       <p:cxnSp>
         <p:nvCxnSpPr>
-          <p:cNvPr id="17" name="Connector 16"/>
+          <p:cNvPr id="18" name="Connector 17"/>
           <p:cNvCxnSpPr/>
           <p:nvPr/>
         </p:nvCxnSpPr>
@@ -7030,7 +7085,7 @@
       </p:cxnSp>
       <p:sp>
         <p:nvSpPr>
-          <p:cNvPr id="18" name="TextBox 17"/>
+          <p:cNvPr id="19" name="TextBox 18"/>
           <p:cNvSpPr txBox="1"/>
           <p:nvPr/>
         </p:nvSpPr>
@@ -7058,21 +7113,57 @@
                 </a:solidFill>
                 <a:latin typeface="Calibri"/>
               </a:rPr>
-              <a:t>evento/cola (AMQP)</a:t>
-            </a:r>
-          </a:p>
-        </p:txBody>
-      </p:sp>
-      <p:sp>
-        <p:nvSpPr>
-          <p:cNvPr id="19" name="TextBox 18"/>
+              <a:t>Publica aviso · evento (AMQP)</a:t>
+            </a:r>
+          </a:p>
+        </p:txBody>
+      </p:sp>
+      <p:cxnSp>
+        <p:nvCxnSpPr>
+          <p:cNvPr id="20" name="Connector 19"/>
+          <p:cNvCxnSpPr/>
+          <p:nvPr/>
+        </p:nvCxnSpPr>
+        <p:spPr>
+          <a:xfrm>
+            <a:off x="7132320" y="4389120"/>
+            <a:ext cx="1463040" cy="0"/>
+          </a:xfrm>
+          <a:prstGeom prst="line">
+            <a:avLst/>
+          </a:prstGeom>
+          <a:ln w="22225">
+            <a:solidFill>
+              <a:srgbClr val="666666"/>
+            </a:solidFill>
+            <a:tailEnd type="triangle" w="med" len="med"/>
+          </a:ln>
+        </p:spPr>
+        <p:style>
+          <a:lnRef idx="2">
+            <a:schemeClr val="accent1"/>
+          </a:lnRef>
+          <a:fillRef idx="0">
+            <a:schemeClr val="accent1"/>
+          </a:fillRef>
+          <a:effectRef idx="1">
+            <a:schemeClr val="accent1"/>
+          </a:effectRef>
+          <a:fontRef idx="minor">
+            <a:schemeClr val="tx1"/>
+          </a:fontRef>
+        </p:style>
+      </p:cxnSp>
+      <p:sp>
+        <p:nvSpPr>
+          <p:cNvPr id="21" name="TextBox 20"/>
           <p:cNvSpPr txBox="1"/>
           <p:nvPr/>
         </p:nvSpPr>
         <p:spPr>
           <a:xfrm>
-            <a:off x="457200" y="6263640"/>
-            <a:ext cx="11277295" cy="411480"/>
+            <a:off x="7040880" y="4187952"/>
+            <a:ext cx="1645920" cy="320040"/>
           </a:xfrm>
           <a:prstGeom prst="rect">
             <a:avLst/>
@@ -7085,6 +7176,41 @@
           </a:bodyPr>
           <a:lstStyle/>
           <a:p>
+            <a:pPr algn="ctr"/>
+            <a:r>
+              <a:rPr sz="1000" b="0" i="1">
+                <a:solidFill>
+                  <a:srgbClr val="666666"/>
+                </a:solidFill>
+                <a:latin typeface="Calibri"/>
+              </a:rPr>
+              <a:t>Envia · REST/HTTPS</a:t>
+            </a:r>
+          </a:p>
+        </p:txBody>
+      </p:sp>
+      <p:sp>
+        <p:nvSpPr>
+          <p:cNvPr id="22" name="TextBox 21"/>
+          <p:cNvSpPr txBox="1"/>
+          <p:nvPr/>
+        </p:nvSpPr>
+        <p:spPr>
+          <a:xfrm>
+            <a:off x="457200" y="6263640"/>
+            <a:ext cx="11277295" cy="411480"/>
+          </a:xfrm>
+          <a:prstGeom prst="rect">
+            <a:avLst/>
+          </a:prstGeom>
+          <a:noFill/>
+        </p:spPr>
+        <p:txBody>
+          <a:bodyPr wrap="square">
+            <a:spAutoFit/>
+          </a:bodyPr>
+          <a:lstStyle/>
+          <a:p>
             <a:r>
               <a:rPr sz="1100" b="0" i="1">
                 <a:solidFill>
@@ -7099,7 +7225,7 @@
       </p:sp>
       <p:sp>
         <p:nvSpPr>
-          <p:cNvPr id="20" name="TextBox 19"/>
+          <p:cNvPr id="23" name="TextBox 22"/>
           <p:cNvSpPr txBox="1"/>
           <p:nvPr/>
         </p:nvSpPr>

--- a/Arquitectura de Sistemas Computacionales/Clases/Clase 4 - Microservicios y arquitecturas distribuidas/Presentacion.pptx
+++ b/Arquitectura de Sistemas Computacionales/Clases/Clase 4 - Microservicios y arquitecturas distribuidas/Presentacion.pptx
@@ -1874,12 +1874,18 @@
           <a:p/>
           <a:p>
             <a:r>
-              <a:t>En la notacion se marca como almacen —en el codigo, ContainerDb en lugar de Container— y esa distincion no es cosmetica: un almacen no se replica igual que un servicio, no se despliega igual y no falla igual, y todo eso se retoma en las Clases 7 y 13.</a:t>
+              <a:t>En la notacion se marca como almacen —en el codigo, ContainerDb en lugar de Container— y esa distincion no es un detalle de forma: un almacen no se replica igual que un servicio</a:t>
             </a:r>
           </a:p>
           <a:p/>
           <a:p>
             <a:r>
+              <a:t>No se despliega igual y no falla igual, y todo eso se retoma en las Clases 7 y 13.</a:t>
+            </a:r>
+          </a:p>
+          <a:p/>
+          <a:p>
+            <a:r>
               <a:t>La tercera: ninguna flecha queda muda, y media etiqueta tampoco alcanza.</a:t>
             </a:r>
           </a:p>
@@ -1940,7 +1946,7 @@
           <a:p/>
           <a:p>
             <a:r>
-              <a:t>(No se proyecta) No es pedanteria de notacion; es lo unico que permite afirmar que los dos dibujos son el mismo sistema visto desde distinta altura, y es exactamente lo que se volvera a verificar en la Clase 7 contra el diagrama de despliegue y en la Clase 11 en la auditoria del paquete.</a:t>
+              <a:t>(No se proyecta) No es exceso de rigor con la notacion; es lo unico que permite afirmar que los dos dibujos son el mismo sistema visto desde distinta altura, y es exactamente lo que se volvera a verificar en la Clase 7 contra el diagrama de despliegue y en la Clase 11 en la auditoria del paquete.</a:t>
             </a:r>
           </a:p>
           <a:p/>
@@ -18227,6 +18233,22 @@
                 <a:latin typeface="Calibri"/>
               </a:rPr>
               <a:t>–   Una caja que dice solo «API» no es un contenedor descrito, es una etiqueta;</a:t>
+            </a:r>
+          </a:p>
+          <a:p>
+            <a:pPr>
+              <a:spcAft>
+                <a:spcPts val="800"/>
+              </a:spcAft>
+            </a:pPr>
+            <a:r>
+              <a:rPr sz="2000" b="0" i="0">
+                <a:solidFill>
+                  <a:srgbClr val="333333"/>
+                </a:solidFill>
+                <a:latin typeface="Calibri"/>
+              </a:rPr>
+              <a:t>–   No se despliega igual y no falla igual, y todo eso se retoma en las Clases 7 y 13.</a:t>
             </a:r>
           </a:p>
           <a:p>
